--- a/Especializacion/Proyecto I/Clases/Sesion 01 - Presentación del curso · docente · estudiantes · ACAs/Presentacion.pptx
+++ b/Especializacion/Proyecto I/Clases/Sesion 01 - Presentación del curso · docente · estudiantes · ACAs/Presentacion.pptx
@@ -13,6 +13,19 @@
     <p:sldId id="261" r:id="rId12"/>
     <p:sldId id="262" r:id="rId13"/>
     <p:sldId id="263" r:id="rId14"/>
+    <p:sldId id="264" r:id="rId15"/>
+    <p:sldId id="265" r:id="rId16"/>
+    <p:sldId id="266" r:id="rId17"/>
+    <p:sldId id="267" r:id="rId18"/>
+    <p:sldId id="268" r:id="rId19"/>
+    <p:sldId id="269" r:id="rId20"/>
+    <p:sldId id="270" r:id="rId21"/>
+    <p:sldId id="271" r:id="rId22"/>
+    <p:sldId id="272" r:id="rId23"/>
+    <p:sldId id="273" r:id="rId24"/>
+    <p:sldId id="274" r:id="rId25"/>
+    <p:sldId id="275" r:id="rId26"/>
+    <p:sldId id="276" r:id="rId27"/>
   </p:sldIdLst>
   <p:sldSz cx="12191695" cy="6858000" type="screen4x3"/>
   <p:notesSz cx="6858000" cy="9144000"/>
@@ -3407,6 +3420,5516 @@
 </p:sld>
 </file>
 
+<file path=ppt/slides/slide10.xml><?xml version="1.0" encoding="utf-8"?>
+<p:sld xmlns:a="http://schemas.openxmlformats.org/drawingml/2006/main" xmlns:p="http://schemas.openxmlformats.org/presentationml/2006/main" xmlns:r="http://schemas.openxmlformats.org/officeDocument/2006/relationships">
+  <p:cSld>
+    <p:bg>
+      <p:bgPr>
+        <a:solidFill>
+          <a:srgbClr val="FFFFFF"/>
+        </a:solidFill>
+        <a:effectLst/>
+      </p:bgPr>
+    </p:bg>
+    <p:spTree>
+      <p:nvGrpSpPr>
+        <p:cNvPr id="1" name=""/>
+        <p:cNvGrpSpPr/>
+        <p:nvPr/>
+      </p:nvGrpSpPr>
+      <p:grpSpPr/>
+      <p:sp>
+        <p:nvSpPr>
+          <p:cNvPr id="2" name="Rectangle 1"/>
+          <p:cNvSpPr/>
+          <p:nvPr/>
+        </p:nvSpPr>
+        <p:spPr>
+          <a:xfrm>
+            <a:off x="0" y="0"/>
+            <a:ext cx="12191695" cy="1188720"/>
+          </a:xfrm>
+          <a:prstGeom prst="rect">
+            <a:avLst/>
+          </a:prstGeom>
+          <a:solidFill>
+            <a:srgbClr val="0C2340"/>
+          </a:solidFill>
+          <a:ln>
+            <a:noFill/>
+          </a:ln>
+          <a:effectLst/>
+        </p:spPr>
+        <p:style>
+          <a:lnRef idx="1">
+            <a:schemeClr val="accent1"/>
+          </a:lnRef>
+          <a:fillRef idx="3">
+            <a:schemeClr val="accent1"/>
+          </a:fillRef>
+          <a:effectRef idx="2">
+            <a:schemeClr val="accent1"/>
+          </a:effectRef>
+          <a:fontRef idx="minor">
+            <a:schemeClr val="lt1"/>
+          </a:fontRef>
+        </p:style>
+        <p:txBody>
+          <a:bodyPr rtlCol="0" anchor="ctr"/>
+          <a:lstStyle/>
+          <a:p>
+            <a:pPr algn="ctr"/>
+          </a:p>
+        </p:txBody>
+      </p:sp>
+      <p:sp>
+        <p:nvSpPr>
+          <p:cNvPr id="3" name="TextBox 2"/>
+          <p:cNvSpPr txBox="1"/>
+          <p:nvPr/>
+        </p:nvSpPr>
+        <p:spPr>
+          <a:xfrm>
+            <a:off x="640080" y="0"/>
+            <a:ext cx="9082735" cy="1188720"/>
+          </a:xfrm>
+          <a:prstGeom prst="rect">
+            <a:avLst/>
+          </a:prstGeom>
+          <a:noFill/>
+        </p:spPr>
+        <p:txBody>
+          <a:bodyPr wrap="square" anchor="ctr" lIns="0" rIns="0" tIns="0" bIns="0">
+            <a:spAutoFit/>
+          </a:bodyPr>
+          <a:lstStyle/>
+          <a:p>
+            <a:pPr algn="ctr"/>
+            <a:r>
+              <a:rPr sz="2600" b="1" i="0">
+                <a:solidFill>
+                  <a:srgbClr val="FFFFFF"/>
+                </a:solidFill>
+                <a:latin typeface="Calibri"/>
+              </a:rPr>
+              <a:t>Las tres ACAs: qué se entrega y qué separa un buen trabajo de uno flojo</a:t>
+            </a:r>
+          </a:p>
+        </p:txBody>
+      </p:sp>
+      <p:graphicFrame>
+        <p:nvGraphicFramePr>
+          <p:cNvPr id="4" name="Table 3"/>
+          <p:cNvGraphicFramePr>
+            <a:graphicFrameLocks noGrp="1"/>
+          </p:cNvGraphicFramePr>
+          <p:nvPr/>
+        </p:nvGraphicFramePr>
+        <p:xfrm>
+          <a:off x="640080" y="1691639"/>
+          <a:ext cx="10911534" cy="2011680"/>
+        </p:xfrm>
+        <a:graphic>
+          <a:graphicData uri="http://schemas.openxmlformats.org/drawingml/2006/table">
+            <a:tbl>
+              <a:tblPr>
+                <a:tableStyleId>{2D5ABB26-0587-4C30-8999-92F81FD0307C}</a:tableStyleId>
+              </a:tblPr>
+              <a:tblGrid>
+                <a:gridCol w="1818589"/>
+                <a:gridCol w="4115754"/>
+                <a:gridCol w="4977191"/>
+              </a:tblGrid>
+              <a:tr h="502920">
+                <a:tc>
+                  <a:txBody>
+                    <a:bodyPr/>
+                    <a:lstStyle/>
+                    <a:p>
+                      <a:pPr algn="l"/>
+                      <a:r>
+                        <a:rPr sz="1300" b="1" i="0">
+                          <a:solidFill>
+                            <a:srgbClr val="FFFFFF"/>
+                          </a:solidFill>
+                          <a:latin typeface="Calibri"/>
+                        </a:rPr>
+                        <a:t>ACA</a:t>
+                      </a:r>
+                    </a:p>
+                  </a:txBody>
+                  <a:tcPr anchor="ctr" marL="109728" marR="91440" marT="36576" marB="36576">
+                    <a:solidFill>
+                      <a:srgbClr val="0C2340"/>
+                    </a:solidFill>
+                  </a:tcPr>
+                </a:tc>
+                <a:tc>
+                  <a:txBody>
+                    <a:bodyPr/>
+                    <a:lstStyle/>
+                    <a:p>
+                      <a:pPr algn="l"/>
+                      <a:r>
+                        <a:rPr sz="1300" b="1" i="0">
+                          <a:solidFill>
+                            <a:srgbClr val="FFFFFF"/>
+                          </a:solidFill>
+                          <a:latin typeface="Calibri"/>
+                        </a:rPr>
+                        <a:t>Qué se entrega</a:t>
+                      </a:r>
+                    </a:p>
+                  </a:txBody>
+                  <a:tcPr anchor="ctr" marL="109728" marR="91440" marT="36576" marB="36576">
+                    <a:solidFill>
+                      <a:srgbClr val="0C2340"/>
+                    </a:solidFill>
+                  </a:tcPr>
+                </a:tc>
+                <a:tc>
+                  <a:txBody>
+                    <a:bodyPr/>
+                    <a:lstStyle/>
+                    <a:p>
+                      <a:pPr algn="l"/>
+                      <a:r>
+                        <a:rPr sz="1300" b="1" i="0">
+                          <a:solidFill>
+                            <a:srgbClr val="FFFFFF"/>
+                          </a:solidFill>
+                          <a:latin typeface="Calibri"/>
+                        </a:rPr>
+                        <a:t>Qué distingue un buen entregable de uno flojo</a:t>
+                      </a:r>
+                    </a:p>
+                  </a:txBody>
+                  <a:tcPr anchor="ctr" marL="109728" marR="91440" marT="36576" marB="36576">
+                    <a:solidFill>
+                      <a:srgbClr val="0C2340"/>
+                    </a:solidFill>
+                  </a:tcPr>
+                </a:tc>
+              </a:tr>
+              <a:tr h="502920">
+                <a:tc>
+                  <a:txBody>
+                    <a:bodyPr/>
+                    <a:lstStyle/>
+                    <a:p>
+                      <a:pPr algn="l"/>
+                      <a:r>
+                        <a:rPr sz="1100" b="1" i="0">
+                          <a:solidFill>
+                            <a:srgbClr val="2B2B2B"/>
+                          </a:solidFill>
+                          <a:latin typeface="Calibri"/>
+                        </a:rPr>
+                        <a:t>ACA 1</a:t>
+                      </a:r>
+                      <a:r>
+                        <a:rPr sz="1100" b="0" i="0">
+                          <a:solidFill>
+                            <a:srgbClr val="2B2B2B"/>
+                          </a:solidFill>
+                          <a:latin typeface="Calibri"/>
+                        </a:rPr>
+                        <a:t> — Formulación del problema</a:t>
+                      </a:r>
+                    </a:p>
+                  </a:txBody>
+                  <a:tcPr anchor="ctr" marL="109728" marR="91440" marT="36576" marB="36576">
+                    <a:solidFill>
+                      <a:srgbClr val="FFFFFF"/>
+                    </a:solidFill>
+                  </a:tcPr>
+                </a:tc>
+                <a:tc>
+                  <a:txBody>
+                    <a:bodyPr/>
+                    <a:lstStyle/>
+                    <a:p>
+                      <a:pPr algn="l"/>
+                      <a:r>
+                        <a:rPr sz="1100" b="0" i="0">
+                          <a:solidFill>
+                            <a:srgbClr val="2B2B2B"/>
+                          </a:solidFill>
+                          <a:latin typeface="Calibri"/>
+                        </a:rPr>
+                        <a:t>Planteamiento del problema, pregunta, objetivo general y específicos, justificación, alcances y limitaciones, con referencias en APA 7.</a:t>
+                      </a:r>
+                    </a:p>
+                  </a:txBody>
+                  <a:tcPr anchor="ctr" marL="109728" marR="91440" marT="36576" marB="36576">
+                    <a:solidFill>
+                      <a:srgbClr val="FFFFFF"/>
+                    </a:solidFill>
+                  </a:tcPr>
+                </a:tc>
+                <a:tc>
+                  <a:txBody>
+                    <a:bodyPr/>
+                    <a:lstStyle/>
+                    <a:p>
+                      <a:pPr algn="l"/>
+                      <a:r>
+                        <a:rPr sz="1100" b="1" i="0">
+                          <a:solidFill>
+                            <a:srgbClr val="2B2B2B"/>
+                          </a:solidFill>
+                          <a:latin typeface="Calibri"/>
+                        </a:rPr>
+                        <a:t>Bueno:</a:t>
+                      </a:r>
+                      <a:r>
+                        <a:rPr sz="1100" b="0" i="0">
+                          <a:solidFill>
+                            <a:srgbClr val="2B2B2B"/>
+                          </a:solidFill>
+                          <a:latin typeface="Calibri"/>
+                        </a:rPr>
+                        <a:t> se puede señalar a quién le duele algo y dónde ocurre. </a:t>
+                      </a:r>
+                      <a:r>
+                        <a:rPr sz="1100" b="1" i="0">
+                          <a:solidFill>
+                            <a:srgbClr val="2B2B2B"/>
+                          </a:solidFill>
+                          <a:latin typeface="Calibri"/>
+                        </a:rPr>
+                        <a:t>Flojo:</a:t>
+                      </a:r>
+                      <a:r>
+                        <a:rPr sz="1100" b="0" i="0">
+                          <a:solidFill>
+                            <a:srgbClr val="2B2B2B"/>
+                          </a:solidFill>
+                          <a:latin typeface="Calibri"/>
+                        </a:rPr>
+                        <a:t> describe una tecnología de moda y nunca dice a quién le sirve ni en qué contexto.</a:t>
+                      </a:r>
+                    </a:p>
+                  </a:txBody>
+                  <a:tcPr anchor="ctr" marL="109728" marR="91440" marT="36576" marB="36576">
+                    <a:solidFill>
+                      <a:srgbClr val="FFFFFF"/>
+                    </a:solidFill>
+                  </a:tcPr>
+                </a:tc>
+              </a:tr>
+              <a:tr h="502920">
+                <a:tc>
+                  <a:txBody>
+                    <a:bodyPr/>
+                    <a:lstStyle/>
+                    <a:p>
+                      <a:pPr algn="l"/>
+                      <a:r>
+                        <a:rPr sz="1100" b="1" i="0">
+                          <a:solidFill>
+                            <a:srgbClr val="2B2B2B"/>
+                          </a:solidFill>
+                          <a:latin typeface="Calibri"/>
+                        </a:rPr>
+                        <a:t>ACA 2</a:t>
+                      </a:r>
+                      <a:r>
+                        <a:rPr sz="1100" b="0" i="0">
+                          <a:solidFill>
+                            <a:srgbClr val="2B2B2B"/>
+                          </a:solidFill>
+                          <a:latin typeface="Calibri"/>
+                        </a:rPr>
+                        <a:t> — Fundamentación referencial</a:t>
+                      </a:r>
+                    </a:p>
+                  </a:txBody>
+                  <a:tcPr anchor="ctr" marL="109728" marR="91440" marT="36576" marB="36576">
+                    <a:solidFill>
+                      <a:srgbClr val="F2F2F2"/>
+                    </a:solidFill>
+                  </a:tcPr>
+                </a:tc>
+                <a:tc>
+                  <a:txBody>
+                    <a:bodyPr/>
+                    <a:lstStyle/>
+                    <a:p>
+                      <a:pPr algn="l"/>
+                      <a:r>
+                        <a:rPr sz="1100" b="0" i="0">
+                          <a:solidFill>
+                            <a:srgbClr val="2B2B2B"/>
+                          </a:solidFill>
+                          <a:latin typeface="Calibri"/>
+                        </a:rPr>
+                        <a:t>Antecedentes (mínimo 6, nacionales e internacionales), marco teórico, conceptual, contextual y legal si aplica; correcciones de la ACA 1 incorporadas.</a:t>
+                      </a:r>
+                    </a:p>
+                  </a:txBody>
+                  <a:tcPr anchor="ctr" marL="109728" marR="91440" marT="36576" marB="36576">
+                    <a:solidFill>
+                      <a:srgbClr val="F2F2F2"/>
+                    </a:solidFill>
+                  </a:tcPr>
+                </a:tc>
+                <a:tc>
+                  <a:txBody>
+                    <a:bodyPr/>
+                    <a:lstStyle/>
+                    <a:p>
+                      <a:pPr algn="l"/>
+                      <a:r>
+                        <a:rPr sz="1100" b="1" i="0">
+                          <a:solidFill>
+                            <a:srgbClr val="2B2B2B"/>
+                          </a:solidFill>
+                          <a:latin typeface="Calibri"/>
+                        </a:rPr>
+                        <a:t>Bueno:</a:t>
+                      </a:r>
+                      <a:r>
+                        <a:rPr sz="1100" b="0" i="0">
+                          <a:solidFill>
+                            <a:srgbClr val="2B2B2B"/>
+                          </a:solidFill>
+                          <a:latin typeface="Calibri"/>
+                        </a:rPr>
+                        <a:t> cada fuente responde a la pregunta y se nota qué se corrigió. </a:t>
+                      </a:r>
+                      <a:r>
+                        <a:rPr sz="1100" b="1" i="0">
+                          <a:solidFill>
+                            <a:srgbClr val="2B2B2B"/>
+                          </a:solidFill>
+                          <a:latin typeface="Calibri"/>
+                        </a:rPr>
+                        <a:t>Flojo:</a:t>
+                      </a:r>
+                      <a:r>
+                        <a:rPr sz="1100" b="0" i="0">
+                          <a:solidFill>
+                            <a:srgbClr val="2B2B2B"/>
+                          </a:solidFill>
+                          <a:latin typeface="Calibri"/>
+                        </a:rPr>
+                        <a:t> una fila de resúmenes pegados que no se hablan entre sí ni con el problema.</a:t>
+                      </a:r>
+                    </a:p>
+                  </a:txBody>
+                  <a:tcPr anchor="ctr" marL="109728" marR="91440" marT="36576" marB="36576">
+                    <a:solidFill>
+                      <a:srgbClr val="F2F2F2"/>
+                    </a:solidFill>
+                  </a:tcPr>
+                </a:tc>
+              </a:tr>
+              <a:tr h="502920">
+                <a:tc>
+                  <a:txBody>
+                    <a:bodyPr/>
+                    <a:lstStyle/>
+                    <a:p>
+                      <a:pPr algn="l"/>
+                      <a:r>
+                        <a:rPr sz="1100" b="1" i="0">
+                          <a:solidFill>
+                            <a:srgbClr val="2B2B2B"/>
+                          </a:solidFill>
+                          <a:latin typeface="Calibri"/>
+                        </a:rPr>
+                        <a:t>ACA 3</a:t>
+                      </a:r>
+                      <a:r>
+                        <a:rPr sz="1100" b="0" i="0">
+                          <a:solidFill>
+                            <a:srgbClr val="2B2B2B"/>
+                          </a:solidFill>
+                          <a:latin typeface="Calibri"/>
+                        </a:rPr>
+                        <a:t> — Anteproyecto final</a:t>
+                      </a:r>
+                    </a:p>
+                  </a:txBody>
+                  <a:tcPr anchor="ctr" marL="109728" marR="91440" marT="36576" marB="36576">
+                    <a:solidFill>
+                      <a:srgbClr val="FFFFFF"/>
+                    </a:solidFill>
+                  </a:tcPr>
+                </a:tc>
+                <a:tc>
+                  <a:txBody>
+                    <a:bodyPr/>
+                    <a:lstStyle/>
+                    <a:p>
+                      <a:pPr algn="l"/>
+                      <a:r>
+                        <a:rPr sz="1100" b="0" i="0">
+                          <a:solidFill>
+                            <a:srgbClr val="2B2B2B"/>
+                          </a:solidFill>
+                          <a:latin typeface="Calibri"/>
+                        </a:rPr>
+                        <a:t>Documento completo e integrado: metodología, población, instrumentos </a:t>
+                      </a:r>
+                      <a:r>
+                        <a:rPr sz="1100" b="1" i="0">
+                          <a:solidFill>
+                            <a:srgbClr val="2B2B2B"/>
+                          </a:solidFill>
+                          <a:latin typeface="Calibri"/>
+                        </a:rPr>
+                        <a:t>propuestos</a:t>
+                      </a:r>
+                      <a:r>
+                        <a:rPr sz="1100" b="0" i="0">
+                          <a:solidFill>
+                            <a:srgbClr val="2B2B2B"/>
+                          </a:solidFill>
+                          <a:latin typeface="Calibri"/>
+                        </a:rPr>
+                        <a:t>, cronograma, presupuesto y viabilidad.</a:t>
+                      </a:r>
+                    </a:p>
+                  </a:txBody>
+                  <a:tcPr anchor="ctr" marL="109728" marR="91440" marT="36576" marB="36576">
+                    <a:solidFill>
+                      <a:srgbClr val="FFFFFF"/>
+                    </a:solidFill>
+                  </a:tcPr>
+                </a:tc>
+                <a:tc>
+                  <a:txBody>
+                    <a:bodyPr/>
+                    <a:lstStyle/>
+                    <a:p>
+                      <a:pPr algn="l"/>
+                      <a:r>
+                        <a:rPr sz="1100" b="1" i="0">
+                          <a:solidFill>
+                            <a:srgbClr val="2B2B2B"/>
+                          </a:solidFill>
+                          <a:latin typeface="Calibri"/>
+                        </a:rPr>
+                        <a:t>Bueno:</a:t>
+                      </a:r>
+                      <a:r>
+                        <a:rPr sz="1100" b="0" i="0">
+                          <a:solidFill>
+                            <a:srgbClr val="2B2B2B"/>
+                          </a:solidFill>
+                          <a:latin typeface="Calibri"/>
+                        </a:rPr>
+                        <a:t> se lee de portada a referencias sin contradecirse. </a:t>
+                      </a:r>
+                      <a:r>
+                        <a:rPr sz="1100" b="1" i="0">
+                          <a:solidFill>
+                            <a:srgbClr val="2B2B2B"/>
+                          </a:solidFill>
+                          <a:latin typeface="Calibri"/>
+                        </a:rPr>
+                        <a:t>Flojo:</a:t>
+                      </a:r>
+                      <a:r>
+                        <a:rPr sz="1100" b="0" i="0">
+                          <a:solidFill>
+                            <a:srgbClr val="2B2B2B"/>
+                          </a:solidFill>
+                          <a:latin typeface="Calibri"/>
+                        </a:rPr>
+                        <a:t> capítulos escritos por personas distintas, con tres preguntas de investigación diferentes.</a:t>
+                      </a:r>
+                    </a:p>
+                  </a:txBody>
+                  <a:tcPr anchor="ctr" marL="109728" marR="91440" marT="36576" marB="36576">
+                    <a:solidFill>
+                      <a:srgbClr val="FFFFFF"/>
+                    </a:solidFill>
+                  </a:tcPr>
+                </a:tc>
+              </a:tr>
+            </a:tbl>
+          </a:graphicData>
+        </a:graphic>
+      </p:graphicFrame>
+      <p:sp>
+        <p:nvSpPr>
+          <p:cNvPr id="5" name="TextBox 4"/>
+          <p:cNvSpPr txBox="1"/>
+          <p:nvPr/>
+        </p:nvSpPr>
+        <p:spPr>
+          <a:xfrm>
+            <a:off x="640080" y="3840480"/>
+            <a:ext cx="10911535" cy="548640"/>
+          </a:xfrm>
+          <a:prstGeom prst="rect">
+            <a:avLst/>
+          </a:prstGeom>
+          <a:noFill/>
+        </p:spPr>
+        <p:txBody>
+          <a:bodyPr wrap="square" anchor="t" lIns="0" rIns="0" tIns="0" bIns="0">
+            <a:spAutoFit/>
+          </a:bodyPr>
+          <a:lstStyle/>
+          <a:p>
+            <a:r>
+              <a:rPr sz="1200" b="0" i="1">
+                <a:solidFill>
+                  <a:srgbClr val="2B2B2B"/>
+                </a:solidFill>
+                <a:latin typeface="Calibri"/>
+              </a:rPr>
+              <a:t>Los pesos están en la slide anterior. </a:t>
+            </a:r>
+            <a:r>
+              <a:rPr sz="1200" b="1" i="1">
+                <a:solidFill>
+                  <a:srgbClr val="2B2B2B"/>
+                </a:solidFill>
+                <a:latin typeface="Calibri"/>
+              </a:rPr>
+              <a:t>Enunciado completo, criterios y fechas exactas: `Clases/Recursos/ACAs/` y CDigital.</a:t>
+            </a:r>
+            <a:r>
+              <a:rPr sz="1200" b="0" i="1">
+                <a:solidFill>
+                  <a:srgbClr val="2B2B2B"/>
+                </a:solidFill>
+                <a:latin typeface="Calibri"/>
+              </a:rPr>
+              <a:t> Al cierre se suman coevaluación y autoevaluación, cada una con su propio enunciado en esa misma carpeta.</a:t>
+            </a:r>
+          </a:p>
+        </p:txBody>
+      </p:sp>
+      <p:sp>
+        <p:nvSpPr>
+          <p:cNvPr id="6" name="TextBox 5"/>
+          <p:cNvSpPr txBox="1"/>
+          <p:nvPr/>
+        </p:nvSpPr>
+        <p:spPr>
+          <a:xfrm>
+            <a:off x="2194560" y="6446520"/>
+            <a:ext cx="5943600" cy="274320"/>
+          </a:xfrm>
+          <a:prstGeom prst="rect">
+            <a:avLst/>
+          </a:prstGeom>
+          <a:noFill/>
+        </p:spPr>
+        <p:txBody>
+          <a:bodyPr wrap="square" anchor="t" lIns="0" rIns="0" tIns="0" bIns="0">
+            <a:spAutoFit/>
+          </a:bodyPr>
+          <a:lstStyle/>
+          <a:p>
+            <a:pPr algn="l"/>
+            <a:r>
+              <a:rPr sz="1000" b="1" i="0">
+                <a:solidFill>
+                  <a:srgbClr val="8F989D"/>
+                </a:solidFill>
+                <a:latin typeface="Calibri"/>
+              </a:rPr>
+              <a:t>Inicio 8:10 pm</a:t>
+            </a:r>
+          </a:p>
+        </p:txBody>
+      </p:sp>
+      <p:sp>
+        <p:nvSpPr>
+          <p:cNvPr id="7" name="TextBox 6"/>
+          <p:cNvSpPr txBox="1"/>
+          <p:nvPr/>
+        </p:nvSpPr>
+        <p:spPr>
+          <a:xfrm>
+            <a:off x="11094415" y="6446520"/>
+            <a:ext cx="548640" cy="274320"/>
+          </a:xfrm>
+          <a:prstGeom prst="rect">
+            <a:avLst/>
+          </a:prstGeom>
+          <a:noFill/>
+        </p:spPr>
+        <p:txBody>
+          <a:bodyPr wrap="square" anchor="t" lIns="0" rIns="0" tIns="0" bIns="0">
+            <a:spAutoFit/>
+          </a:bodyPr>
+          <a:lstStyle/>
+          <a:p>
+            <a:pPr algn="r"/>
+            <a:r>
+              <a:rPr sz="1000" b="1" i="0">
+                <a:solidFill>
+                  <a:srgbClr val="8F989D"/>
+                </a:solidFill>
+                <a:latin typeface="Calibri"/>
+              </a:rPr>
+              <a:t>10</a:t>
+            </a:r>
+          </a:p>
+        </p:txBody>
+      </p:sp>
+    </p:spTree>
+  </p:cSld>
+  <p:clrMapOvr>
+    <a:masterClrMapping/>
+  </p:clrMapOvr>
+</p:sld>
+</file>
+
+<file path=ppt/slides/slide11.xml><?xml version="1.0" encoding="utf-8"?>
+<p:sld xmlns:a="http://schemas.openxmlformats.org/drawingml/2006/main" xmlns:p="http://schemas.openxmlformats.org/presentationml/2006/main" xmlns:r="http://schemas.openxmlformats.org/officeDocument/2006/relationships">
+  <p:cSld>
+    <p:bg>
+      <p:bgPr>
+        <a:solidFill>
+          <a:srgbClr val="FFFFFF"/>
+        </a:solidFill>
+        <a:effectLst/>
+      </p:bgPr>
+    </p:bg>
+    <p:spTree>
+      <p:nvGrpSpPr>
+        <p:cNvPr id="1" name=""/>
+        <p:cNvGrpSpPr/>
+        <p:nvPr/>
+      </p:nvGrpSpPr>
+      <p:grpSpPr/>
+      <p:sp>
+        <p:nvSpPr>
+          <p:cNvPr id="2" name="Rectangle 1"/>
+          <p:cNvSpPr/>
+          <p:nvPr/>
+        </p:nvSpPr>
+        <p:spPr>
+          <a:xfrm>
+            <a:off x="0" y="0"/>
+            <a:ext cx="12191695" cy="1188720"/>
+          </a:xfrm>
+          <a:prstGeom prst="rect">
+            <a:avLst/>
+          </a:prstGeom>
+          <a:solidFill>
+            <a:srgbClr val="0C2340"/>
+          </a:solidFill>
+          <a:ln>
+            <a:noFill/>
+          </a:ln>
+          <a:effectLst/>
+        </p:spPr>
+        <p:style>
+          <a:lnRef idx="1">
+            <a:schemeClr val="accent1"/>
+          </a:lnRef>
+          <a:fillRef idx="3">
+            <a:schemeClr val="accent1"/>
+          </a:fillRef>
+          <a:effectRef idx="2">
+            <a:schemeClr val="accent1"/>
+          </a:effectRef>
+          <a:fontRef idx="minor">
+            <a:schemeClr val="lt1"/>
+          </a:fontRef>
+        </p:style>
+        <p:txBody>
+          <a:bodyPr rtlCol="0" anchor="ctr"/>
+          <a:lstStyle/>
+          <a:p>
+            <a:pPr algn="ctr"/>
+          </a:p>
+        </p:txBody>
+      </p:sp>
+      <p:sp>
+        <p:nvSpPr>
+          <p:cNvPr id="3" name="TextBox 2"/>
+          <p:cNvSpPr txBox="1"/>
+          <p:nvPr/>
+        </p:nvSpPr>
+        <p:spPr>
+          <a:xfrm>
+            <a:off x="640080" y="0"/>
+            <a:ext cx="9082735" cy="1188720"/>
+          </a:xfrm>
+          <a:prstGeom prst="rect">
+            <a:avLst/>
+          </a:prstGeom>
+          <a:noFill/>
+        </p:spPr>
+        <p:txBody>
+          <a:bodyPr wrap="square" anchor="ctr" lIns="0" rIns="0" tIns="0" bIns="0">
+            <a:spAutoFit/>
+          </a:bodyPr>
+          <a:lstStyle/>
+          <a:p>
+            <a:pPr algn="ctr"/>
+            <a:r>
+              <a:rPr sz="2600" b="1" i="0">
+                <a:solidFill>
+                  <a:srgbClr val="FFFFFF"/>
+                </a:solidFill>
+                <a:latin typeface="Calibri"/>
+              </a:rPr>
+              <a:t>Cómo se entrega: paso a paso en CDigital</a:t>
+            </a:r>
+          </a:p>
+        </p:txBody>
+      </p:sp>
+      <p:sp>
+        <p:nvSpPr>
+          <p:cNvPr id="4" name="TextBox 3"/>
+          <p:cNvSpPr txBox="1"/>
+          <p:nvPr/>
+        </p:nvSpPr>
+        <p:spPr>
+          <a:xfrm>
+            <a:off x="640080" y="1691639"/>
+            <a:ext cx="10911535" cy="4617720"/>
+          </a:xfrm>
+          <a:prstGeom prst="rect">
+            <a:avLst/>
+          </a:prstGeom>
+          <a:noFill/>
+        </p:spPr>
+        <p:txBody>
+          <a:bodyPr wrap="square" anchor="t" lIns="0" rIns="0" tIns="0" bIns="0">
+            <a:spAutoFit/>
+          </a:bodyPr>
+          <a:lstStyle/>
+          <a:p>
+            <a:pPr>
+              <a:spcAft>
+                <a:spcPts val="1000"/>
+              </a:spcAft>
+            </a:pPr>
+            <a:r>
+              <a:rPr sz="1600" b="0" i="0">
+                <a:solidFill>
+                  <a:srgbClr val="2B2B2B"/>
+                </a:solidFill>
+                <a:latin typeface="Calibri"/>
+              </a:rPr>
+              <a:t>–   </a:t>
+            </a:r>
+            <a:r>
+              <a:rPr sz="1600" b="1" i="0">
+                <a:solidFill>
+                  <a:srgbClr val="2B2B2B"/>
+                </a:solidFill>
+                <a:latin typeface="Calibri"/>
+              </a:rPr>
+              <a:t>1.</a:t>
+            </a:r>
+            <a:r>
+              <a:rPr sz="1600" b="0" i="0">
+                <a:solidFill>
+                  <a:srgbClr val="2B2B2B"/>
+                </a:solidFill>
+                <a:latin typeface="Calibri"/>
+              </a:rPr>
+              <a:t> Trabajen la </a:t>
+            </a:r>
+            <a:r>
+              <a:rPr sz="1600" b="1" i="0">
+                <a:solidFill>
+                  <a:srgbClr val="2B2B2B"/>
+                </a:solidFill>
+                <a:latin typeface="Calibri"/>
+              </a:rPr>
+              <a:t>plantilla APA CUN en Google Docs</a:t>
+            </a:r>
+            <a:r>
+              <a:rPr sz="1600" b="0" i="0">
+                <a:solidFill>
+                  <a:srgbClr val="2B2B2B"/>
+                </a:solidFill>
+                <a:latin typeface="Calibri"/>
+              </a:rPr>
+              <a:t>: un documento por equipo, con permiso de edición para todos.</a:t>
+            </a:r>
+          </a:p>
+          <a:p>
+            <a:pPr>
+              <a:spcAft>
+                <a:spcPts val="1000"/>
+              </a:spcAft>
+            </a:pPr>
+            <a:r>
+              <a:rPr sz="1600" b="0" i="0">
+                <a:solidFill>
+                  <a:srgbClr val="2B2B2B"/>
+                </a:solidFill>
+                <a:latin typeface="Calibri"/>
+              </a:rPr>
+              <a:t>–   </a:t>
+            </a:r>
+            <a:r>
+              <a:rPr sz="1600" b="1" i="0">
+                <a:solidFill>
+                  <a:srgbClr val="2B2B2B"/>
+                </a:solidFill>
+                <a:latin typeface="Calibri"/>
+              </a:rPr>
+              <a:t>2.</a:t>
+            </a:r>
+            <a:r>
+              <a:rPr sz="1600" b="0" i="0">
+                <a:solidFill>
+                  <a:srgbClr val="2B2B2B"/>
+                </a:solidFill>
+                <a:latin typeface="Calibri"/>
+              </a:rPr>
+              <a:t> Antes de entregar, </a:t>
+            </a:r>
+            <a:r>
+              <a:rPr sz="1600" b="1" i="0">
+                <a:solidFill>
+                  <a:srgbClr val="2B2B2B"/>
+                </a:solidFill>
+                <a:latin typeface="Calibri"/>
+              </a:rPr>
+              <a:t>descarguen como PDF</a:t>
+            </a:r>
+            <a:r>
+              <a:rPr sz="1600" b="0" i="0">
+                <a:solidFill>
+                  <a:srgbClr val="2B2B2B"/>
+                </a:solidFill>
+                <a:latin typeface="Calibri"/>
+              </a:rPr>
+              <a:t>: así nadie recibe un documento a medio formatear.</a:t>
+            </a:r>
+          </a:p>
+          <a:p>
+            <a:pPr>
+              <a:spcAft>
+                <a:spcPts val="1000"/>
+              </a:spcAft>
+            </a:pPr>
+            <a:r>
+              <a:rPr sz="1600" b="0" i="0">
+                <a:solidFill>
+                  <a:srgbClr val="2B2B2B"/>
+                </a:solidFill>
+                <a:latin typeface="Calibri"/>
+              </a:rPr>
+              <a:t>–   </a:t>
+            </a:r>
+            <a:r>
+              <a:rPr sz="1600" b="1" i="0">
+                <a:solidFill>
+                  <a:srgbClr val="2B2B2B"/>
+                </a:solidFill>
+                <a:latin typeface="Calibri"/>
+              </a:rPr>
+              <a:t>3.</a:t>
+            </a:r>
+            <a:r>
+              <a:rPr sz="1600" b="0" i="0">
+                <a:solidFill>
+                  <a:srgbClr val="2B2B2B"/>
+                </a:solidFill>
+                <a:latin typeface="Calibri"/>
+              </a:rPr>
+              <a:t> Nombren el archivo </a:t>
+            </a:r>
+            <a:r>
+              <a:rPr sz="1600" b="1" i="0">
+                <a:solidFill>
+                  <a:srgbClr val="2B2B2B"/>
+                </a:solidFill>
+                <a:latin typeface="Calibri"/>
+              </a:rPr>
+              <a:t>ACA1_Apellido1-Apellido2-Apellido3</a:t>
+            </a:r>
+            <a:r>
+              <a:rPr sz="1600" b="0" i="0">
+                <a:solidFill>
+                  <a:srgbClr val="2B2B2B"/>
+                </a:solidFill>
+                <a:latin typeface="Calibri"/>
+              </a:rPr>
+              <a:t> (y ACA2 / ACA3 en las siguientes entregas).</a:t>
+            </a:r>
+          </a:p>
+          <a:p>
+            <a:pPr>
+              <a:spcAft>
+                <a:spcPts val="1000"/>
+              </a:spcAft>
+            </a:pPr>
+            <a:r>
+              <a:rPr sz="1600" b="0" i="0">
+                <a:solidFill>
+                  <a:srgbClr val="2B2B2B"/>
+                </a:solidFill>
+                <a:latin typeface="Calibri"/>
+              </a:rPr>
+              <a:t>–   </a:t>
+            </a:r>
+            <a:r>
+              <a:rPr sz="1600" b="1" i="0">
+                <a:solidFill>
+                  <a:srgbClr val="2B2B2B"/>
+                </a:solidFill>
+                <a:latin typeface="Calibri"/>
+              </a:rPr>
+              <a:t>4.</a:t>
+            </a:r>
+            <a:r>
+              <a:rPr sz="1600" b="0" i="0">
+                <a:solidFill>
+                  <a:srgbClr val="2B2B2B"/>
+                </a:solidFill>
+                <a:latin typeface="Calibri"/>
+              </a:rPr>
+              <a:t> </a:t>
+            </a:r>
+            <a:r>
+              <a:rPr sz="1600" b="1" i="0">
+                <a:solidFill>
+                  <a:srgbClr val="2B2B2B"/>
+                </a:solidFill>
+                <a:latin typeface="Calibri"/>
+              </a:rPr>
+              <a:t>Un solo integrante</a:t>
+            </a:r>
+            <a:r>
+              <a:rPr sz="1600" b="0" i="0">
+                <a:solidFill>
+                  <a:srgbClr val="2B2B2B"/>
+                </a:solidFill>
+                <a:latin typeface="Calibri"/>
+              </a:rPr>
+              <a:t> lo sube en el espacio de esa ACA en </a:t>
+            </a:r>
+            <a:r>
+              <a:rPr sz="1600" b="1" i="0">
+                <a:solidFill>
+                  <a:srgbClr val="2B2B2B"/>
+                </a:solidFill>
+                <a:latin typeface="Calibri"/>
+              </a:rPr>
+              <a:t>CDigital</a:t>
+            </a:r>
+            <a:r>
+              <a:rPr sz="1600" b="0" i="0">
+                <a:solidFill>
+                  <a:srgbClr val="2B2B2B"/>
+                </a:solidFill>
+                <a:latin typeface="Calibri"/>
+              </a:rPr>
+              <a:t>; los demás verifican que quedó cargado.</a:t>
+            </a:r>
+          </a:p>
+          <a:p>
+            <a:pPr>
+              <a:spcAft>
+                <a:spcPts val="1000"/>
+              </a:spcAft>
+            </a:pPr>
+            <a:r>
+              <a:rPr sz="1600" b="0" i="0">
+                <a:solidFill>
+                  <a:srgbClr val="2B2B2B"/>
+                </a:solidFill>
+                <a:latin typeface="Calibri"/>
+              </a:rPr>
+              <a:t>–   </a:t>
+            </a:r>
+            <a:r>
+              <a:rPr sz="1600" b="1" i="0">
+                <a:solidFill>
+                  <a:srgbClr val="2B2B2B"/>
+                </a:solidFill>
+                <a:latin typeface="Calibri"/>
+              </a:rPr>
+              <a:t>5.</a:t>
+            </a:r>
+            <a:r>
+              <a:rPr sz="1600" b="0" i="0">
+                <a:solidFill>
+                  <a:srgbClr val="2B2B2B"/>
+                </a:solidFill>
+                <a:latin typeface="Calibri"/>
+              </a:rPr>
+              <a:t> Revisen que la portada traiga los </a:t>
+            </a:r>
+            <a:r>
+              <a:rPr sz="1600" b="1" i="0">
+                <a:solidFill>
+                  <a:srgbClr val="2B2B2B"/>
+                </a:solidFill>
+                <a:latin typeface="Calibri"/>
+              </a:rPr>
+              <a:t>nombres completos de todos</a:t>
+            </a:r>
+            <a:r>
+              <a:rPr sz="1600" b="0" i="0">
+                <a:solidFill>
+                  <a:srgbClr val="2B2B2B"/>
+                </a:solidFill>
+                <a:latin typeface="Calibri"/>
+              </a:rPr>
+              <a:t>: si falta alguien, esa persona no tiene nota.</a:t>
+            </a:r>
+          </a:p>
+          <a:p>
+            <a:pPr>
+              <a:spcAft>
+                <a:spcPts val="1000"/>
+              </a:spcAft>
+            </a:pPr>
+            <a:r>
+              <a:rPr sz="1600" b="0" i="0">
+                <a:solidFill>
+                  <a:srgbClr val="2B2B2B"/>
+                </a:solidFill>
+                <a:latin typeface="Calibri"/>
+              </a:rPr>
+              <a:t>–   </a:t>
+            </a:r>
+            <a:r>
+              <a:rPr sz="1600" b="1" i="0">
+                <a:solidFill>
+                  <a:srgbClr val="2B2B2B"/>
+                </a:solidFill>
+                <a:latin typeface="Calibri"/>
+              </a:rPr>
+              <a:t>Lo que no está en CDigital, no está entregado.</a:t>
+            </a:r>
+            <a:r>
+              <a:rPr sz="1600" b="0" i="0">
+                <a:solidFill>
+                  <a:srgbClr val="2B2B2B"/>
+                </a:solidFill>
+                <a:latin typeface="Calibri"/>
+              </a:rPr>
+              <a:t> Correo, chat o WhatsApp no son canal de entrega.</a:t>
+            </a:r>
+          </a:p>
+          <a:p>
+            <a:pPr>
+              <a:spcAft>
+                <a:spcPts val="1000"/>
+              </a:spcAft>
+            </a:pPr>
+            <a:r>
+              <a:rPr sz="1600" b="0" i="0">
+                <a:solidFill>
+                  <a:srgbClr val="2B2B2B"/>
+                </a:solidFill>
+                <a:latin typeface="Calibri"/>
+              </a:rPr>
+              <a:t>–   </a:t>
+            </a:r>
+            <a:r>
+              <a:rPr sz="1600" b="1" i="0">
+                <a:solidFill>
+                  <a:srgbClr val="2B2B2B"/>
+                </a:solidFill>
+                <a:latin typeface="Calibri"/>
+              </a:rPr>
+              <a:t>Entrega tardía:</a:t>
+            </a:r>
+            <a:r>
+              <a:rPr sz="1600" b="0" i="0">
+                <a:solidFill>
+                  <a:srgbClr val="2B2B2B"/>
+                </a:solidFill>
+                <a:latin typeface="Calibri"/>
+              </a:rPr>
+              <a:t> el espacio cierra a la hora publicada en el enunciado. Si algo pasa, se avisa </a:t>
+            </a:r>
+            <a:r>
+              <a:rPr sz="1600" b="1" i="0">
+                <a:solidFill>
+                  <a:srgbClr val="2B2B2B"/>
+                </a:solidFill>
+                <a:latin typeface="Calibri"/>
+              </a:rPr>
+              <a:t>antes</a:t>
+            </a:r>
+            <a:r>
+              <a:rPr sz="1600" b="0" i="0">
+                <a:solidFill>
+                  <a:srgbClr val="2B2B2B"/>
+                </a:solidFill>
+                <a:latin typeface="Calibri"/>
+              </a:rPr>
+              <a:t> del cierre.</a:t>
+            </a:r>
+          </a:p>
+          <a:p>
+            <a:pPr lvl="1">
+              <a:spcAft>
+                <a:spcPts val="600"/>
+              </a:spcAft>
+            </a:pPr>
+            <a:r>
+              <a:rPr sz="1500" b="0" i="0">
+                <a:solidFill>
+                  <a:srgbClr val="2B2B2B"/>
+                </a:solidFill>
+                <a:latin typeface="Calibri"/>
+              </a:rPr>
+              <a:t>●   Quedarse sin internet a las 11:50 p. m. no es un imprevisto: es haber esperado hasta las 11:50 p. m.</a:t>
+            </a:r>
+          </a:p>
+        </p:txBody>
+      </p:sp>
+      <p:sp>
+        <p:nvSpPr>
+          <p:cNvPr id="5" name="TextBox 4"/>
+          <p:cNvSpPr txBox="1"/>
+          <p:nvPr/>
+        </p:nvSpPr>
+        <p:spPr>
+          <a:xfrm>
+            <a:off x="2194560" y="6446520"/>
+            <a:ext cx="5943600" cy="274320"/>
+          </a:xfrm>
+          <a:prstGeom prst="rect">
+            <a:avLst/>
+          </a:prstGeom>
+          <a:noFill/>
+        </p:spPr>
+        <p:txBody>
+          <a:bodyPr wrap="square" anchor="t" lIns="0" rIns="0" tIns="0" bIns="0">
+            <a:spAutoFit/>
+          </a:bodyPr>
+          <a:lstStyle/>
+          <a:p>
+            <a:pPr algn="l"/>
+            <a:r>
+              <a:rPr sz="1000" b="1" i="0">
+                <a:solidFill>
+                  <a:srgbClr val="8F989D"/>
+                </a:solidFill>
+                <a:latin typeface="Calibri"/>
+              </a:rPr>
+              <a:t>Inicio 8:10 pm</a:t>
+            </a:r>
+          </a:p>
+        </p:txBody>
+      </p:sp>
+      <p:sp>
+        <p:nvSpPr>
+          <p:cNvPr id="6" name="TextBox 5"/>
+          <p:cNvSpPr txBox="1"/>
+          <p:nvPr/>
+        </p:nvSpPr>
+        <p:spPr>
+          <a:xfrm>
+            <a:off x="11094415" y="6446520"/>
+            <a:ext cx="548640" cy="274320"/>
+          </a:xfrm>
+          <a:prstGeom prst="rect">
+            <a:avLst/>
+          </a:prstGeom>
+          <a:noFill/>
+        </p:spPr>
+        <p:txBody>
+          <a:bodyPr wrap="square" anchor="t" lIns="0" rIns="0" tIns="0" bIns="0">
+            <a:spAutoFit/>
+          </a:bodyPr>
+          <a:lstStyle/>
+          <a:p>
+            <a:pPr algn="r"/>
+            <a:r>
+              <a:rPr sz="1000" b="1" i="0">
+                <a:solidFill>
+                  <a:srgbClr val="8F989D"/>
+                </a:solidFill>
+                <a:latin typeface="Calibri"/>
+              </a:rPr>
+              <a:t>11</a:t>
+            </a:r>
+          </a:p>
+        </p:txBody>
+      </p:sp>
+      <p:sp>
+        <p:nvSpPr>
+          <p:cNvPr id="7" name="TextBox 6"/>
+          <p:cNvSpPr txBox="1"/>
+          <p:nvPr/>
+        </p:nvSpPr>
+        <p:spPr>
+          <a:xfrm>
+            <a:off x="640080" y="5943600"/>
+            <a:ext cx="9997135" cy="457200"/>
+          </a:xfrm>
+          <a:prstGeom prst="rect">
+            <a:avLst/>
+          </a:prstGeom>
+          <a:noFill/>
+        </p:spPr>
+        <p:txBody>
+          <a:bodyPr wrap="square" anchor="t" lIns="0" rIns="0" tIns="0" bIns="0">
+            <a:spAutoFit/>
+          </a:bodyPr>
+          <a:lstStyle/>
+          <a:p>
+            <a:r>
+              <a:rPr sz="1200" b="0" i="1">
+                <a:solidFill>
+                  <a:srgbClr val="2B2B2B"/>
+                </a:solidFill>
+                <a:latin typeface="Calibri"/>
+              </a:rPr>
+              <a:t>Consejo del Docente: suban una versión el día anterior. Mientras el espacio esté abierto siempre se puede reemplazar por una mejor.</a:t>
+            </a:r>
+          </a:p>
+        </p:txBody>
+      </p:sp>
+    </p:spTree>
+  </p:cSld>
+  <p:clrMapOvr>
+    <a:masterClrMapping/>
+  </p:clrMapOvr>
+</p:sld>
+</file>
+
+<file path=ppt/slides/slide12.xml><?xml version="1.0" encoding="utf-8"?>
+<p:sld xmlns:a="http://schemas.openxmlformats.org/drawingml/2006/main" xmlns:p="http://schemas.openxmlformats.org/presentationml/2006/main" xmlns:r="http://schemas.openxmlformats.org/officeDocument/2006/relationships">
+  <p:cSld>
+    <p:bg>
+      <p:bgPr>
+        <a:solidFill>
+          <a:srgbClr val="FFFFFF"/>
+        </a:solidFill>
+        <a:effectLst/>
+      </p:bgPr>
+    </p:bg>
+    <p:spTree>
+      <p:nvGrpSpPr>
+        <p:cNvPr id="1" name=""/>
+        <p:cNvGrpSpPr/>
+        <p:nvPr/>
+      </p:nvGrpSpPr>
+      <p:grpSpPr/>
+      <p:sp>
+        <p:nvSpPr>
+          <p:cNvPr id="2" name="Rectangle 1"/>
+          <p:cNvSpPr/>
+          <p:nvPr/>
+        </p:nvSpPr>
+        <p:spPr>
+          <a:xfrm>
+            <a:off x="0" y="0"/>
+            <a:ext cx="12191695" cy="1188720"/>
+          </a:xfrm>
+          <a:prstGeom prst="rect">
+            <a:avLst/>
+          </a:prstGeom>
+          <a:solidFill>
+            <a:srgbClr val="0C2340"/>
+          </a:solidFill>
+          <a:ln>
+            <a:noFill/>
+          </a:ln>
+          <a:effectLst/>
+        </p:spPr>
+        <p:style>
+          <a:lnRef idx="1">
+            <a:schemeClr val="accent1"/>
+          </a:lnRef>
+          <a:fillRef idx="3">
+            <a:schemeClr val="accent1"/>
+          </a:fillRef>
+          <a:effectRef idx="2">
+            <a:schemeClr val="accent1"/>
+          </a:effectRef>
+          <a:fontRef idx="minor">
+            <a:schemeClr val="lt1"/>
+          </a:fontRef>
+        </p:style>
+        <p:txBody>
+          <a:bodyPr rtlCol="0" anchor="ctr"/>
+          <a:lstStyle/>
+          <a:p>
+            <a:pPr algn="ctr"/>
+          </a:p>
+        </p:txBody>
+      </p:sp>
+      <p:sp>
+        <p:nvSpPr>
+          <p:cNvPr id="3" name="TextBox 2"/>
+          <p:cNvSpPr txBox="1"/>
+          <p:nvPr/>
+        </p:nvSpPr>
+        <p:spPr>
+          <a:xfrm>
+            <a:off x="640080" y="0"/>
+            <a:ext cx="9082735" cy="1188720"/>
+          </a:xfrm>
+          <a:prstGeom prst="rect">
+            <a:avLst/>
+          </a:prstGeom>
+          <a:noFill/>
+        </p:spPr>
+        <p:txBody>
+          <a:bodyPr wrap="square" anchor="ctr" lIns="0" rIns="0" tIns="0" bIns="0">
+            <a:spAutoFit/>
+          </a:bodyPr>
+          <a:lstStyle/>
+          <a:p>
+            <a:pPr algn="ctr"/>
+            <a:r>
+              <a:rPr sz="2600" b="1" i="0">
+                <a:solidFill>
+                  <a:srgbClr val="FFFFFF"/>
+                </a:solidFill>
+                <a:latin typeface="Calibri"/>
+              </a:rPr>
+              <a:t>Integridad académica: la línea que no se cruza</a:t>
+            </a:r>
+          </a:p>
+        </p:txBody>
+      </p:sp>
+      <p:sp>
+        <p:nvSpPr>
+          <p:cNvPr id="4" name="Rounded Rectangle 3"/>
+          <p:cNvSpPr/>
+          <p:nvPr/>
+        </p:nvSpPr>
+        <p:spPr>
+          <a:xfrm>
+            <a:off x="640080" y="1737360"/>
+            <a:ext cx="10911535" cy="1481328"/>
+          </a:xfrm>
+          <a:prstGeom prst="roundRect">
+            <a:avLst/>
+          </a:prstGeom>
+          <a:solidFill>
+            <a:srgbClr val="FBE4E4"/>
+          </a:solidFill>
+          <a:ln>
+            <a:noFill/>
+          </a:ln>
+          <a:effectLst/>
+        </p:spPr>
+        <p:style>
+          <a:lnRef idx="1">
+            <a:schemeClr val="accent1"/>
+          </a:lnRef>
+          <a:fillRef idx="3">
+            <a:schemeClr val="accent1"/>
+          </a:fillRef>
+          <a:effectRef idx="2">
+            <a:schemeClr val="accent1"/>
+          </a:effectRef>
+          <a:fontRef idx="minor">
+            <a:schemeClr val="lt1"/>
+          </a:fontRef>
+        </p:style>
+        <p:txBody>
+          <a:bodyPr rtlCol="0" anchor="ctr"/>
+          <a:lstStyle/>
+          <a:p>
+            <a:pPr algn="ctr"/>
+          </a:p>
+        </p:txBody>
+      </p:sp>
+      <p:sp>
+        <p:nvSpPr>
+          <p:cNvPr id="5" name="TextBox 4"/>
+          <p:cNvSpPr txBox="1"/>
+          <p:nvPr/>
+        </p:nvSpPr>
+        <p:spPr>
+          <a:xfrm>
+            <a:off x="868680" y="1847088"/>
+            <a:ext cx="10454335" cy="1261872"/>
+          </a:xfrm>
+          <a:prstGeom prst="rect">
+            <a:avLst/>
+          </a:prstGeom>
+          <a:noFill/>
+        </p:spPr>
+        <p:txBody>
+          <a:bodyPr wrap="square" anchor="t" lIns="0" rIns="0" tIns="0" bIns="0">
+            <a:spAutoFit/>
+          </a:bodyPr>
+          <a:lstStyle/>
+          <a:p>
+            <a:r>
+              <a:rPr sz="1300" b="1" i="0">
+                <a:solidFill>
+                  <a:srgbClr val="0C2340"/>
+                </a:solidFill>
+                <a:latin typeface="Calibri"/>
+              </a:rPr>
+              <a:t>⚠️ Importante</a:t>
+            </a:r>
+          </a:p>
+          <a:p>
+            <a:pPr>
+              <a:spcBef>
+                <a:spcPts val="400"/>
+              </a:spcBef>
+            </a:pPr>
+            <a:r>
+              <a:rPr sz="1300" b="1" i="0">
+                <a:solidFill>
+                  <a:srgbClr val="2B2B2B"/>
+                </a:solidFill>
+                <a:latin typeface="Calibri"/>
+              </a:rPr>
+              <a:t>Plagio es tomar lo ajeno y no decirlo.</a:t>
+            </a:r>
+            <a:r>
+              <a:rPr sz="1300" b="0" i="0">
+                <a:solidFill>
+                  <a:srgbClr val="2B2B2B"/>
+                </a:solidFill>
+                <a:latin typeface="Calibri"/>
+              </a:rPr>
+              <a:t> Cuenta como plagio pegar texto de una fuente sin comillas ni cita, traducir un párrafo ajeno y firmarlo, reusar un trabajo propio de otro semestre como si fuera nuevo, y entregar el documento de otro equipo con la portada cambiada.</a:t>
+            </a:r>
+          </a:p>
+        </p:txBody>
+      </p:sp>
+      <p:sp>
+        <p:nvSpPr>
+          <p:cNvPr id="6" name="Rounded Rectangle 5"/>
+          <p:cNvSpPr/>
+          <p:nvPr/>
+        </p:nvSpPr>
+        <p:spPr>
+          <a:xfrm>
+            <a:off x="640080" y="3447288"/>
+            <a:ext cx="10911535" cy="1225296"/>
+          </a:xfrm>
+          <a:prstGeom prst="roundRect">
+            <a:avLst/>
+          </a:prstGeom>
+          <a:solidFill>
+            <a:srgbClr val="E8F5EC"/>
+          </a:solidFill>
+          <a:ln>
+            <a:noFill/>
+          </a:ln>
+          <a:effectLst/>
+        </p:spPr>
+        <p:style>
+          <a:lnRef idx="1">
+            <a:schemeClr val="accent1"/>
+          </a:lnRef>
+          <a:fillRef idx="3">
+            <a:schemeClr val="accent1"/>
+          </a:fillRef>
+          <a:effectRef idx="2">
+            <a:schemeClr val="accent1"/>
+          </a:effectRef>
+          <a:fontRef idx="minor">
+            <a:schemeClr val="lt1"/>
+          </a:fontRef>
+        </p:style>
+        <p:txBody>
+          <a:bodyPr rtlCol="0" anchor="ctr"/>
+          <a:lstStyle/>
+          <a:p>
+            <a:pPr algn="ctr"/>
+          </a:p>
+        </p:txBody>
+      </p:sp>
+      <p:sp>
+        <p:nvSpPr>
+          <p:cNvPr id="7" name="TextBox 6"/>
+          <p:cNvSpPr txBox="1"/>
+          <p:nvPr/>
+        </p:nvSpPr>
+        <p:spPr>
+          <a:xfrm>
+            <a:off x="868680" y="3557016"/>
+            <a:ext cx="10454335" cy="1005840"/>
+          </a:xfrm>
+          <a:prstGeom prst="rect">
+            <a:avLst/>
+          </a:prstGeom>
+          <a:noFill/>
+        </p:spPr>
+        <p:txBody>
+          <a:bodyPr wrap="square" anchor="t" lIns="0" rIns="0" tIns="0" bIns="0">
+            <a:spAutoFit/>
+          </a:bodyPr>
+          <a:lstStyle/>
+          <a:p>
+            <a:r>
+              <a:rPr sz="1300" b="1" i="0">
+                <a:solidFill>
+                  <a:srgbClr val="0C2340"/>
+                </a:solidFill>
+                <a:latin typeface="Calibri"/>
+              </a:rPr>
+              <a:t>ℹ️ Nota institucional</a:t>
+            </a:r>
+          </a:p>
+          <a:p>
+            <a:pPr>
+              <a:spcBef>
+                <a:spcPts val="400"/>
+              </a:spcBef>
+            </a:pPr>
+            <a:r>
+              <a:rPr sz="1300" b="1" i="0">
+                <a:solidFill>
+                  <a:srgbClr val="2B2B2B"/>
+                </a:solidFill>
+                <a:latin typeface="Calibri"/>
+              </a:rPr>
+              <a:t>Citar no debilita el trabajo: lo sostiene.</a:t>
+            </a:r>
+            <a:r>
+              <a:rPr sz="1300" b="0" i="0">
+                <a:solidFill>
+                  <a:srgbClr val="2B2B2B"/>
+                </a:solidFill>
+                <a:latin typeface="Calibri"/>
+              </a:rPr>
+              <a:t> En este curso se cita en </a:t>
+            </a:r>
+            <a:r>
+              <a:rPr sz="1300" b="1" i="0">
+                <a:solidFill>
+                  <a:srgbClr val="2B2B2B"/>
+                </a:solidFill>
+                <a:latin typeface="Calibri"/>
+              </a:rPr>
+              <a:t>APA 7</a:t>
+            </a:r>
+            <a:r>
+              <a:rPr sz="1300" b="0" i="0">
+                <a:solidFill>
+                  <a:srgbClr val="2B2B2B"/>
+                </a:solidFill>
+                <a:latin typeface="Calibri"/>
+              </a:rPr>
+              <a:t>, dentro del texto y en la lista final de referencias. Una idea que no es suya y no está citada es un problema; esa misma idea citada es un argumento con respaldo.</a:t>
+            </a:r>
+          </a:p>
+        </p:txBody>
+      </p:sp>
+      <p:sp>
+        <p:nvSpPr>
+          <p:cNvPr id="8" name="Rounded Rectangle 7"/>
+          <p:cNvSpPr/>
+          <p:nvPr/>
+        </p:nvSpPr>
+        <p:spPr>
+          <a:xfrm>
+            <a:off x="640080" y="4901184"/>
+            <a:ext cx="10911535" cy="1225296"/>
+          </a:xfrm>
+          <a:prstGeom prst="roundRect">
+            <a:avLst/>
+          </a:prstGeom>
+          <a:solidFill>
+            <a:srgbClr val="FDECD8"/>
+          </a:solidFill>
+          <a:ln>
+            <a:noFill/>
+          </a:ln>
+          <a:effectLst/>
+        </p:spPr>
+        <p:style>
+          <a:lnRef idx="1">
+            <a:schemeClr val="accent1"/>
+          </a:lnRef>
+          <a:fillRef idx="3">
+            <a:schemeClr val="accent1"/>
+          </a:fillRef>
+          <a:effectRef idx="2">
+            <a:schemeClr val="accent1"/>
+          </a:effectRef>
+          <a:fontRef idx="minor">
+            <a:schemeClr val="lt1"/>
+          </a:fontRef>
+        </p:style>
+        <p:txBody>
+          <a:bodyPr rtlCol="0" anchor="ctr"/>
+          <a:lstStyle/>
+          <a:p>
+            <a:pPr algn="ctr"/>
+          </a:p>
+        </p:txBody>
+      </p:sp>
+      <p:sp>
+        <p:nvSpPr>
+          <p:cNvPr id="9" name="TextBox 8"/>
+          <p:cNvSpPr txBox="1"/>
+          <p:nvPr/>
+        </p:nvSpPr>
+        <p:spPr>
+          <a:xfrm>
+            <a:off x="868680" y="5010912"/>
+            <a:ext cx="10454335" cy="1005840"/>
+          </a:xfrm>
+          <a:prstGeom prst="rect">
+            <a:avLst/>
+          </a:prstGeom>
+          <a:noFill/>
+        </p:spPr>
+        <p:txBody>
+          <a:bodyPr wrap="square" anchor="t" lIns="0" rIns="0" tIns="0" bIns="0">
+            <a:spAutoFit/>
+          </a:bodyPr>
+          <a:lstStyle/>
+          <a:p>
+            <a:r>
+              <a:rPr sz="1300" b="1" i="0">
+                <a:solidFill>
+                  <a:srgbClr val="0C2340"/>
+                </a:solidFill>
+                <a:latin typeface="Calibri"/>
+              </a:rPr>
+              <a:t>💡 Aclaración</a:t>
+            </a:r>
+          </a:p>
+          <a:p>
+            <a:pPr>
+              <a:spcBef>
+                <a:spcPts val="400"/>
+              </a:spcBef>
+            </a:pPr>
+            <a:r>
+              <a:rPr sz="1300" b="1" i="0">
+                <a:solidFill>
+                  <a:srgbClr val="2B2B2B"/>
+                </a:solidFill>
+                <a:latin typeface="Calibri"/>
+              </a:rPr>
+              <a:t>Si se detecta, hay debido proceso.</a:t>
+            </a:r>
+            <a:r>
+              <a:rPr sz="1300" b="0" i="0">
+                <a:solidFill>
+                  <a:srgbClr val="2B2B2B"/>
+                </a:solidFill>
+                <a:latin typeface="Calibri"/>
+              </a:rPr>
+              <a:t> No depende del ánimo del Docente: es un procedimiento institucional, con notificación y derecho a descargos. Por eso siempre conviene preguntar antes que improvisar.</a:t>
+            </a:r>
+          </a:p>
+        </p:txBody>
+      </p:sp>
+      <p:sp>
+        <p:nvSpPr>
+          <p:cNvPr id="10" name="TextBox 9"/>
+          <p:cNvSpPr txBox="1"/>
+          <p:nvPr/>
+        </p:nvSpPr>
+        <p:spPr>
+          <a:xfrm>
+            <a:off x="2194560" y="6446520"/>
+            <a:ext cx="5943600" cy="274320"/>
+          </a:xfrm>
+          <a:prstGeom prst="rect">
+            <a:avLst/>
+          </a:prstGeom>
+          <a:noFill/>
+        </p:spPr>
+        <p:txBody>
+          <a:bodyPr wrap="square" anchor="t" lIns="0" rIns="0" tIns="0" bIns="0">
+            <a:spAutoFit/>
+          </a:bodyPr>
+          <a:lstStyle/>
+          <a:p>
+            <a:pPr algn="l"/>
+            <a:r>
+              <a:rPr sz="1000" b="1" i="0">
+                <a:solidFill>
+                  <a:srgbClr val="8F989D"/>
+                </a:solidFill>
+                <a:latin typeface="Calibri"/>
+              </a:rPr>
+              <a:t>Inicio 8:10 pm</a:t>
+            </a:r>
+          </a:p>
+        </p:txBody>
+      </p:sp>
+      <p:sp>
+        <p:nvSpPr>
+          <p:cNvPr id="11" name="TextBox 10"/>
+          <p:cNvSpPr txBox="1"/>
+          <p:nvPr/>
+        </p:nvSpPr>
+        <p:spPr>
+          <a:xfrm>
+            <a:off x="11094415" y="6446520"/>
+            <a:ext cx="548640" cy="274320"/>
+          </a:xfrm>
+          <a:prstGeom prst="rect">
+            <a:avLst/>
+          </a:prstGeom>
+          <a:noFill/>
+        </p:spPr>
+        <p:txBody>
+          <a:bodyPr wrap="square" anchor="t" lIns="0" rIns="0" tIns="0" bIns="0">
+            <a:spAutoFit/>
+          </a:bodyPr>
+          <a:lstStyle/>
+          <a:p>
+            <a:pPr algn="r"/>
+            <a:r>
+              <a:rPr sz="1000" b="1" i="0">
+                <a:solidFill>
+                  <a:srgbClr val="8F989D"/>
+                </a:solidFill>
+                <a:latin typeface="Calibri"/>
+              </a:rPr>
+              <a:t>12</a:t>
+            </a:r>
+          </a:p>
+        </p:txBody>
+      </p:sp>
+    </p:spTree>
+  </p:cSld>
+  <p:clrMapOvr>
+    <a:masterClrMapping/>
+  </p:clrMapOvr>
+</p:sld>
+</file>
+
+<file path=ppt/slides/slide13.xml><?xml version="1.0" encoding="utf-8"?>
+<p:sld xmlns:a="http://schemas.openxmlformats.org/drawingml/2006/main" xmlns:p="http://schemas.openxmlformats.org/presentationml/2006/main" xmlns:r="http://schemas.openxmlformats.org/officeDocument/2006/relationships">
+  <p:cSld>
+    <p:bg>
+      <p:bgPr>
+        <a:solidFill>
+          <a:srgbClr val="FFFFFF"/>
+        </a:solidFill>
+        <a:effectLst/>
+      </p:bgPr>
+    </p:bg>
+    <p:spTree>
+      <p:nvGrpSpPr>
+        <p:cNvPr id="1" name=""/>
+        <p:cNvGrpSpPr/>
+        <p:nvPr/>
+      </p:nvGrpSpPr>
+      <p:grpSpPr/>
+      <p:sp>
+        <p:nvSpPr>
+          <p:cNvPr id="2" name="Rectangle 1"/>
+          <p:cNvSpPr/>
+          <p:nvPr/>
+        </p:nvSpPr>
+        <p:spPr>
+          <a:xfrm>
+            <a:off x="0" y="0"/>
+            <a:ext cx="12191695" cy="1188720"/>
+          </a:xfrm>
+          <a:prstGeom prst="rect">
+            <a:avLst/>
+          </a:prstGeom>
+          <a:solidFill>
+            <a:srgbClr val="0C2340"/>
+          </a:solidFill>
+          <a:ln>
+            <a:noFill/>
+          </a:ln>
+          <a:effectLst/>
+        </p:spPr>
+        <p:style>
+          <a:lnRef idx="1">
+            <a:schemeClr val="accent1"/>
+          </a:lnRef>
+          <a:fillRef idx="3">
+            <a:schemeClr val="accent1"/>
+          </a:fillRef>
+          <a:effectRef idx="2">
+            <a:schemeClr val="accent1"/>
+          </a:effectRef>
+          <a:fontRef idx="minor">
+            <a:schemeClr val="lt1"/>
+          </a:fontRef>
+        </p:style>
+        <p:txBody>
+          <a:bodyPr rtlCol="0" anchor="ctr"/>
+          <a:lstStyle/>
+          <a:p>
+            <a:pPr algn="ctr"/>
+          </a:p>
+        </p:txBody>
+      </p:sp>
+      <p:sp>
+        <p:nvSpPr>
+          <p:cNvPr id="3" name="TextBox 2"/>
+          <p:cNvSpPr txBox="1"/>
+          <p:nvPr/>
+        </p:nvSpPr>
+        <p:spPr>
+          <a:xfrm>
+            <a:off x="640080" y="0"/>
+            <a:ext cx="9082735" cy="1188720"/>
+          </a:xfrm>
+          <a:prstGeom prst="rect">
+            <a:avLst/>
+          </a:prstGeom>
+          <a:noFill/>
+        </p:spPr>
+        <p:txBody>
+          <a:bodyPr wrap="square" anchor="ctr" lIns="0" rIns="0" tIns="0" bIns="0">
+            <a:spAutoFit/>
+          </a:bodyPr>
+          <a:lstStyle/>
+          <a:p>
+            <a:pPr algn="ctr"/>
+            <a:r>
+              <a:rPr sz="2600" b="1" i="0">
+                <a:solidFill>
+                  <a:srgbClr val="FFFFFF"/>
+                </a:solidFill>
+                <a:latin typeface="Calibri"/>
+              </a:rPr>
+              <a:t>IA generativa: se puede usar, con tres condiciones</a:t>
+            </a:r>
+          </a:p>
+        </p:txBody>
+      </p:sp>
+      <p:sp>
+        <p:nvSpPr>
+          <p:cNvPr id="4" name="TextBox 3"/>
+          <p:cNvSpPr txBox="1"/>
+          <p:nvPr/>
+        </p:nvSpPr>
+        <p:spPr>
+          <a:xfrm>
+            <a:off x="640080" y="1691639"/>
+            <a:ext cx="10911535" cy="4617720"/>
+          </a:xfrm>
+          <a:prstGeom prst="rect">
+            <a:avLst/>
+          </a:prstGeom>
+          <a:noFill/>
+        </p:spPr>
+        <p:txBody>
+          <a:bodyPr wrap="square" anchor="t" lIns="0" rIns="0" tIns="0" bIns="0">
+            <a:spAutoFit/>
+          </a:bodyPr>
+          <a:lstStyle/>
+          <a:p>
+            <a:pPr>
+              <a:spcAft>
+                <a:spcPts val="1000"/>
+              </a:spcAft>
+            </a:pPr>
+            <a:r>
+              <a:rPr sz="1600" b="0" i="0">
+                <a:solidFill>
+                  <a:srgbClr val="2B2B2B"/>
+                </a:solidFill>
+                <a:latin typeface="Calibri"/>
+              </a:rPr>
+              <a:t>–   En este curso </a:t>
+            </a:r>
+            <a:r>
+              <a:rPr sz="1600" b="1" i="0">
+                <a:solidFill>
+                  <a:srgbClr val="2B2B2B"/>
+                </a:solidFill>
+                <a:latin typeface="Calibri"/>
+              </a:rPr>
+              <a:t>no se prohíbe</a:t>
+            </a:r>
+            <a:r>
+              <a:rPr sz="1600" b="0" i="0">
+                <a:solidFill>
+                  <a:srgbClr val="2B2B2B"/>
+                </a:solidFill>
+                <a:latin typeface="Calibri"/>
+              </a:rPr>
+              <a:t> usar IA generativa. Se exige usarla con criterio y decirlo por escrito.</a:t>
+            </a:r>
+          </a:p>
+          <a:p>
+            <a:pPr>
+              <a:spcAft>
+                <a:spcPts val="1000"/>
+              </a:spcAft>
+            </a:pPr>
+            <a:r>
+              <a:rPr sz="1600" b="0" i="0">
+                <a:solidFill>
+                  <a:srgbClr val="2B2B2B"/>
+                </a:solidFill>
+                <a:latin typeface="Calibri"/>
+              </a:rPr>
+              <a:t>–   </a:t>
+            </a:r>
+            <a:r>
+              <a:rPr sz="1600" b="1" i="0">
+                <a:solidFill>
+                  <a:srgbClr val="2B2B2B"/>
+                </a:solidFill>
+                <a:latin typeface="Calibri"/>
+              </a:rPr>
+              <a:t>Condición 1 — Declararla.</a:t>
+            </a:r>
+            <a:r>
+              <a:rPr sz="1600" b="0" i="0">
+                <a:solidFill>
+                  <a:srgbClr val="2B2B2B"/>
+                </a:solidFill>
+                <a:latin typeface="Calibri"/>
+              </a:rPr>
+              <a:t> Una nota al final del documento: qué herramienta usaron y para qué (ideas, redacción, tablas).</a:t>
+            </a:r>
+          </a:p>
+          <a:p>
+            <a:pPr>
+              <a:spcAft>
+                <a:spcPts val="1000"/>
+              </a:spcAft>
+            </a:pPr>
+            <a:r>
+              <a:rPr sz="1600" b="0" i="0">
+                <a:solidFill>
+                  <a:srgbClr val="2B2B2B"/>
+                </a:solidFill>
+                <a:latin typeface="Calibri"/>
+              </a:rPr>
+              <a:t>–   </a:t>
+            </a:r>
+            <a:r>
+              <a:rPr sz="1600" b="1" i="0">
+                <a:solidFill>
+                  <a:srgbClr val="2B2B2B"/>
+                </a:solidFill>
+                <a:latin typeface="Calibri"/>
+              </a:rPr>
+              <a:t>Condición 2 — Verificar todo.</a:t>
+            </a:r>
+            <a:r>
+              <a:rPr sz="1600" b="0" i="0">
+                <a:solidFill>
+                  <a:srgbClr val="2B2B2B"/>
+                </a:solidFill>
+                <a:latin typeface="Calibri"/>
+              </a:rPr>
+              <a:t> Cada dato y cada fuente que sugiera la herramienta se comprueba en el original.</a:t>
+            </a:r>
+          </a:p>
+          <a:p>
+            <a:pPr lvl="1">
+              <a:spcAft>
+                <a:spcPts val="600"/>
+              </a:spcAft>
+            </a:pPr>
+            <a:r>
+              <a:rPr sz="1500" b="0" i="0">
+                <a:solidFill>
+                  <a:srgbClr val="2B2B2B"/>
+                </a:solidFill>
+                <a:latin typeface="Calibri"/>
+              </a:rPr>
+              <a:t>●   Los modelos </a:t>
+            </a:r>
+            <a:r>
+              <a:rPr sz="1500" b="1" i="0">
+                <a:solidFill>
+                  <a:srgbClr val="2B2B2B"/>
+                </a:solidFill>
+                <a:latin typeface="Calibri"/>
+              </a:rPr>
+              <a:t>inventan referencias</a:t>
+            </a:r>
+            <a:r>
+              <a:rPr sz="1500" b="0" i="0">
+                <a:solidFill>
+                  <a:srgbClr val="2B2B2B"/>
+                </a:solidFill>
+                <a:latin typeface="Calibri"/>
+              </a:rPr>
+              <a:t> con apariencia impecable: autor creíble, año creíble, enlace que no existe.</a:t>
+            </a:r>
+          </a:p>
+          <a:p>
+            <a:pPr lvl="1">
+              <a:spcAft>
+                <a:spcPts val="600"/>
+              </a:spcAft>
+            </a:pPr>
+            <a:r>
+              <a:rPr sz="1500" b="0" i="0">
+                <a:solidFill>
+                  <a:srgbClr val="2B2B2B"/>
+                </a:solidFill>
+                <a:latin typeface="Calibri"/>
+              </a:rPr>
+              <a:t>●   Citar una referencia inexistente no es un error de formato: es una fuente falsa dentro de un trabajo académico.</a:t>
+            </a:r>
+          </a:p>
+          <a:p>
+            <a:pPr>
+              <a:spcAft>
+                <a:spcPts val="1000"/>
+              </a:spcAft>
+            </a:pPr>
+            <a:r>
+              <a:rPr sz="1600" b="0" i="0">
+                <a:solidFill>
+                  <a:srgbClr val="2B2B2B"/>
+                </a:solidFill>
+                <a:latin typeface="Calibri"/>
+              </a:rPr>
+              <a:t>–   </a:t>
+            </a:r>
+            <a:r>
+              <a:rPr sz="1600" b="1" i="0">
+                <a:solidFill>
+                  <a:srgbClr val="2B2B2B"/>
+                </a:solidFill>
+                <a:latin typeface="Calibri"/>
+              </a:rPr>
+              <a:t>Condición 3 — La autoría es suya.</a:t>
+            </a:r>
+            <a:r>
+              <a:rPr sz="1600" b="0" i="0">
+                <a:solidFill>
+                  <a:srgbClr val="2B2B2B"/>
+                </a:solidFill>
+                <a:latin typeface="Calibri"/>
+              </a:rPr>
+              <a:t> La decisión, el criterio y la defensa del documento son del equipo.</a:t>
+            </a:r>
+          </a:p>
+          <a:p>
+            <a:pPr lvl="1">
+              <a:spcAft>
+                <a:spcPts val="600"/>
+              </a:spcAft>
+            </a:pPr>
+            <a:r>
+              <a:rPr sz="1500" b="0" i="0">
+                <a:solidFill>
+                  <a:srgbClr val="2B2B2B"/>
+                </a:solidFill>
+                <a:latin typeface="Calibri"/>
+              </a:rPr>
+              <a:t>●   Si no pueden explicar en voz alta un párrafo de su propio anteproyecto, ese párrafo todavía no es suyo.</a:t>
+            </a:r>
+          </a:p>
+          <a:p>
+            <a:pPr>
+              <a:spcAft>
+                <a:spcPts val="1000"/>
+              </a:spcAft>
+            </a:pPr>
+            <a:r>
+              <a:rPr sz="1600" b="0" i="0">
+                <a:solidFill>
+                  <a:srgbClr val="2B2B2B"/>
+                </a:solidFill>
+                <a:latin typeface="Calibri"/>
+              </a:rPr>
+              <a:t>–   Uso sensato: ordenar ideas, mejorar redacción, sugerir ejemplos. Uso inútil: pedirle el trabajo entero.</a:t>
+            </a:r>
+          </a:p>
+        </p:txBody>
+      </p:sp>
+      <p:sp>
+        <p:nvSpPr>
+          <p:cNvPr id="5" name="TextBox 4"/>
+          <p:cNvSpPr txBox="1"/>
+          <p:nvPr/>
+        </p:nvSpPr>
+        <p:spPr>
+          <a:xfrm>
+            <a:off x="2194560" y="6446520"/>
+            <a:ext cx="5943600" cy="274320"/>
+          </a:xfrm>
+          <a:prstGeom prst="rect">
+            <a:avLst/>
+          </a:prstGeom>
+          <a:noFill/>
+        </p:spPr>
+        <p:txBody>
+          <a:bodyPr wrap="square" anchor="t" lIns="0" rIns="0" tIns="0" bIns="0">
+            <a:spAutoFit/>
+          </a:bodyPr>
+          <a:lstStyle/>
+          <a:p>
+            <a:pPr algn="l"/>
+            <a:r>
+              <a:rPr sz="1000" b="1" i="0">
+                <a:solidFill>
+                  <a:srgbClr val="8F989D"/>
+                </a:solidFill>
+                <a:latin typeface="Calibri"/>
+              </a:rPr>
+              <a:t>Inicio 8:10 pm</a:t>
+            </a:r>
+          </a:p>
+        </p:txBody>
+      </p:sp>
+      <p:sp>
+        <p:nvSpPr>
+          <p:cNvPr id="6" name="TextBox 5"/>
+          <p:cNvSpPr txBox="1"/>
+          <p:nvPr/>
+        </p:nvSpPr>
+        <p:spPr>
+          <a:xfrm>
+            <a:off x="11094415" y="6446520"/>
+            <a:ext cx="548640" cy="274320"/>
+          </a:xfrm>
+          <a:prstGeom prst="rect">
+            <a:avLst/>
+          </a:prstGeom>
+          <a:noFill/>
+        </p:spPr>
+        <p:txBody>
+          <a:bodyPr wrap="square" anchor="t" lIns="0" rIns="0" tIns="0" bIns="0">
+            <a:spAutoFit/>
+          </a:bodyPr>
+          <a:lstStyle/>
+          <a:p>
+            <a:pPr algn="r"/>
+            <a:r>
+              <a:rPr sz="1000" b="1" i="0">
+                <a:solidFill>
+                  <a:srgbClr val="8F989D"/>
+                </a:solidFill>
+                <a:latin typeface="Calibri"/>
+              </a:rPr>
+              <a:t>13</a:t>
+            </a:r>
+          </a:p>
+        </p:txBody>
+      </p:sp>
+      <p:sp>
+        <p:nvSpPr>
+          <p:cNvPr id="7" name="TextBox 6"/>
+          <p:cNvSpPr txBox="1"/>
+          <p:nvPr/>
+        </p:nvSpPr>
+        <p:spPr>
+          <a:xfrm>
+            <a:off x="640080" y="5943600"/>
+            <a:ext cx="9997135" cy="457200"/>
+          </a:xfrm>
+          <a:prstGeom prst="rect">
+            <a:avLst/>
+          </a:prstGeom>
+          <a:noFill/>
+        </p:spPr>
+        <p:txBody>
+          <a:bodyPr wrap="square" anchor="t" lIns="0" rIns="0" tIns="0" bIns="0">
+            <a:spAutoFit/>
+          </a:bodyPr>
+          <a:lstStyle/>
+          <a:p>
+            <a:r>
+              <a:rPr sz="1200" b="0" i="1">
+                <a:solidFill>
+                  <a:srgbClr val="2B2B2B"/>
+                </a:solidFill>
+                <a:latin typeface="Calibri"/>
+              </a:rPr>
+              <a:t>Prueba rápida antes de entregar: abran el documento en cualquier página y explíquenla con sus palabras. Si no pueden, reescríbanla.</a:t>
+            </a:r>
+          </a:p>
+        </p:txBody>
+      </p:sp>
+    </p:spTree>
+  </p:cSld>
+  <p:clrMapOvr>
+    <a:masterClrMapping/>
+  </p:clrMapOvr>
+</p:sld>
+</file>
+
+<file path=ppt/slides/slide14.xml><?xml version="1.0" encoding="utf-8"?>
+<p:sld xmlns:a="http://schemas.openxmlformats.org/drawingml/2006/main" xmlns:p="http://schemas.openxmlformats.org/presentationml/2006/main" xmlns:r="http://schemas.openxmlformats.org/officeDocument/2006/relationships">
+  <p:cSld>
+    <p:bg>
+      <p:bgPr>
+        <a:solidFill>
+          <a:srgbClr val="FFFFFF"/>
+        </a:solidFill>
+        <a:effectLst/>
+      </p:bgPr>
+    </p:bg>
+    <p:spTree>
+      <p:nvGrpSpPr>
+        <p:cNvPr id="1" name=""/>
+        <p:cNvGrpSpPr/>
+        <p:nvPr/>
+      </p:nvGrpSpPr>
+      <p:grpSpPr/>
+      <p:sp>
+        <p:nvSpPr>
+          <p:cNvPr id="2" name="Rectangle 1"/>
+          <p:cNvSpPr/>
+          <p:nvPr/>
+        </p:nvSpPr>
+        <p:spPr>
+          <a:xfrm>
+            <a:off x="0" y="0"/>
+            <a:ext cx="12191695" cy="1188720"/>
+          </a:xfrm>
+          <a:prstGeom prst="rect">
+            <a:avLst/>
+          </a:prstGeom>
+          <a:solidFill>
+            <a:srgbClr val="0C2340"/>
+          </a:solidFill>
+          <a:ln>
+            <a:noFill/>
+          </a:ln>
+          <a:effectLst/>
+        </p:spPr>
+        <p:style>
+          <a:lnRef idx="1">
+            <a:schemeClr val="accent1"/>
+          </a:lnRef>
+          <a:fillRef idx="3">
+            <a:schemeClr val="accent1"/>
+          </a:fillRef>
+          <a:effectRef idx="2">
+            <a:schemeClr val="accent1"/>
+          </a:effectRef>
+          <a:fontRef idx="minor">
+            <a:schemeClr val="lt1"/>
+          </a:fontRef>
+        </p:style>
+        <p:txBody>
+          <a:bodyPr rtlCol="0" anchor="ctr"/>
+          <a:lstStyle/>
+          <a:p>
+            <a:pPr algn="ctr"/>
+          </a:p>
+        </p:txBody>
+      </p:sp>
+      <p:sp>
+        <p:nvSpPr>
+          <p:cNvPr id="3" name="TextBox 2"/>
+          <p:cNvSpPr txBox="1"/>
+          <p:nvPr/>
+        </p:nvSpPr>
+        <p:spPr>
+          <a:xfrm>
+            <a:off x="640080" y="0"/>
+            <a:ext cx="9082735" cy="1188720"/>
+          </a:xfrm>
+          <a:prstGeom prst="rect">
+            <a:avLst/>
+          </a:prstGeom>
+          <a:noFill/>
+        </p:spPr>
+        <p:txBody>
+          <a:bodyPr wrap="square" anchor="ctr" lIns="0" rIns="0" tIns="0" bIns="0">
+            <a:spAutoFit/>
+          </a:bodyPr>
+          <a:lstStyle/>
+          <a:p>
+            <a:pPr algn="ctr"/>
+            <a:r>
+              <a:rPr sz="2600" b="1" i="0">
+                <a:solidFill>
+                  <a:srgbClr val="FFFFFF"/>
+                </a:solidFill>
+                <a:latin typeface="Calibri"/>
+              </a:rPr>
+              <a:t>Herramientas del curso: todas gratis y desde el navegador</a:t>
+            </a:r>
+          </a:p>
+        </p:txBody>
+      </p:sp>
+      <p:graphicFrame>
+        <p:nvGraphicFramePr>
+          <p:cNvPr id="4" name="Table 3"/>
+          <p:cNvGraphicFramePr>
+            <a:graphicFrameLocks noGrp="1"/>
+          </p:cNvGraphicFramePr>
+          <p:nvPr/>
+        </p:nvGraphicFramePr>
+        <p:xfrm>
+          <a:off x="640080" y="1691639"/>
+          <a:ext cx="10911534" cy="4526280"/>
+        </p:xfrm>
+        <a:graphic>
+          <a:graphicData uri="http://schemas.openxmlformats.org/drawingml/2006/table">
+            <a:tbl>
+              <a:tblPr>
+                <a:tableStyleId>{2D5ABB26-0587-4C30-8999-92F81FD0307C}</a:tableStyleId>
+              </a:tblPr>
+              <a:tblGrid>
+                <a:gridCol w="2975873"/>
+                <a:gridCol w="7935661"/>
+              </a:tblGrid>
+              <a:tr h="502920">
+                <a:tc>
+                  <a:txBody>
+                    <a:bodyPr/>
+                    <a:lstStyle/>
+                    <a:p>
+                      <a:pPr algn="l"/>
+                      <a:r>
+                        <a:rPr sz="1300" b="1" i="0">
+                          <a:solidFill>
+                            <a:srgbClr val="FFFFFF"/>
+                          </a:solidFill>
+                          <a:latin typeface="Calibri"/>
+                        </a:rPr>
+                        <a:t>Herramienta</a:t>
+                      </a:r>
+                    </a:p>
+                  </a:txBody>
+                  <a:tcPr anchor="ctr" marL="109728" marR="91440" marT="36576" marB="36576">
+                    <a:solidFill>
+                      <a:srgbClr val="0C2340"/>
+                    </a:solidFill>
+                  </a:tcPr>
+                </a:tc>
+                <a:tc>
+                  <a:txBody>
+                    <a:bodyPr/>
+                    <a:lstStyle/>
+                    <a:p>
+                      <a:pPr algn="l"/>
+                      <a:r>
+                        <a:rPr sz="1300" b="1" i="0">
+                          <a:solidFill>
+                            <a:srgbClr val="FFFFFF"/>
+                          </a:solidFill>
+                          <a:latin typeface="Calibri"/>
+                        </a:rPr>
+                        <a:t>Para qué la usamos en este curso</a:t>
+                      </a:r>
+                    </a:p>
+                  </a:txBody>
+                  <a:tcPr anchor="ctr" marL="109728" marR="91440" marT="36576" marB="36576">
+                    <a:solidFill>
+                      <a:srgbClr val="0C2340"/>
+                    </a:solidFill>
+                  </a:tcPr>
+                </a:tc>
+              </a:tr>
+              <a:tr h="502920">
+                <a:tc>
+                  <a:txBody>
+                    <a:bodyPr/>
+                    <a:lstStyle/>
+                    <a:p>
+                      <a:pPr algn="l"/>
+                      <a:r>
+                        <a:rPr sz="1100" b="1" i="0">
+                          <a:solidFill>
+                            <a:srgbClr val="2B2B2B"/>
+                          </a:solidFill>
+                          <a:latin typeface="Calibri"/>
+                        </a:rPr>
+                        <a:t>CDigital</a:t>
+                      </a:r>
+                    </a:p>
+                  </a:txBody>
+                  <a:tcPr anchor="ctr" marL="109728" marR="91440" marT="36576" marB="36576">
+                    <a:solidFill>
+                      <a:srgbClr val="FFFFFF"/>
+                    </a:solidFill>
+                  </a:tcPr>
+                </a:tc>
+                <a:tc>
+                  <a:txBody>
+                    <a:bodyPr/>
+                    <a:lstStyle/>
+                    <a:p>
+                      <a:pPr algn="l"/>
+                      <a:r>
+                        <a:rPr sz="1100" b="0" i="0">
+                          <a:solidFill>
+                            <a:srgbClr val="2B2B2B"/>
+                          </a:solidFill>
+                          <a:latin typeface="Calibri"/>
+                        </a:rPr>
+                        <a:t>Aula oficial: material, espacios de entrega de las ACAs y retroalimentación. Único canal de entrega válido.</a:t>
+                      </a:r>
+                    </a:p>
+                  </a:txBody>
+                  <a:tcPr anchor="ctr" marL="109728" marR="91440" marT="36576" marB="36576">
+                    <a:solidFill>
+                      <a:srgbClr val="FFFFFF"/>
+                    </a:solidFill>
+                  </a:tcPr>
+                </a:tc>
+              </a:tr>
+              <a:tr h="502920">
+                <a:tc>
+                  <a:txBody>
+                    <a:bodyPr/>
+                    <a:lstStyle/>
+                    <a:p>
+                      <a:pPr algn="l"/>
+                      <a:r>
+                        <a:rPr sz="1100" b="1" i="0">
+                          <a:solidFill>
+                            <a:srgbClr val="2B2B2B"/>
+                          </a:solidFill>
+                          <a:latin typeface="Calibri"/>
+                        </a:rPr>
+                        <a:t>Google Docs</a:t>
+                      </a:r>
+                    </a:p>
+                  </a:txBody>
+                  <a:tcPr anchor="ctr" marL="109728" marR="91440" marT="36576" marB="36576">
+                    <a:solidFill>
+                      <a:srgbClr val="F2F2F2"/>
+                    </a:solidFill>
+                  </a:tcPr>
+                </a:tc>
+                <a:tc>
+                  <a:txBody>
+                    <a:bodyPr/>
+                    <a:lstStyle/>
+                    <a:p>
+                      <a:pPr algn="l"/>
+                      <a:r>
+                        <a:rPr sz="1100" b="0" i="0">
+                          <a:solidFill>
+                            <a:srgbClr val="2B2B2B"/>
+                          </a:solidFill>
+                          <a:latin typeface="Calibri"/>
+                        </a:rPr>
+                        <a:t>Donde se escribe el anteproyecto, en equipo y a la vez, sobre la plantilla APA CUN. Guarda historial de versiones.</a:t>
+                      </a:r>
+                    </a:p>
+                  </a:txBody>
+                  <a:tcPr anchor="ctr" marL="109728" marR="91440" marT="36576" marB="36576">
+                    <a:solidFill>
+                      <a:srgbClr val="F2F2F2"/>
+                    </a:solidFill>
+                  </a:tcPr>
+                </a:tc>
+              </a:tr>
+              <a:tr h="502920">
+                <a:tc>
+                  <a:txBody>
+                    <a:bodyPr/>
+                    <a:lstStyle/>
+                    <a:p>
+                      <a:pPr algn="l"/>
+                      <a:r>
+                        <a:rPr sz="1100" b="1" i="0">
+                          <a:solidFill>
+                            <a:srgbClr val="2B2B2B"/>
+                          </a:solidFill>
+                          <a:latin typeface="Calibri"/>
+                        </a:rPr>
+                        <a:t>Google Scholar</a:t>
+                      </a:r>
+                    </a:p>
+                  </a:txBody>
+                  <a:tcPr anchor="ctr" marL="109728" marR="91440" marT="36576" marB="36576">
+                    <a:solidFill>
+                      <a:srgbClr val="FFFFFF"/>
+                    </a:solidFill>
+                  </a:tcPr>
+                </a:tc>
+                <a:tc>
+                  <a:txBody>
+                    <a:bodyPr/>
+                    <a:lstStyle/>
+                    <a:p>
+                      <a:pPr algn="l"/>
+                      <a:r>
+                        <a:rPr sz="1100" b="0" i="0">
+                          <a:solidFill>
+                            <a:srgbClr val="2B2B2B"/>
+                          </a:solidFill>
+                          <a:latin typeface="Calibri"/>
+                        </a:rPr>
+                        <a:t>Buscador académico general: artículos, tesis y libros. Punto de partida para rastrear antecedentes.</a:t>
+                      </a:r>
+                    </a:p>
+                  </a:txBody>
+                  <a:tcPr anchor="ctr" marL="109728" marR="91440" marT="36576" marB="36576">
+                    <a:solidFill>
+                      <a:srgbClr val="FFFFFF"/>
+                    </a:solidFill>
+                  </a:tcPr>
+                </a:tc>
+              </a:tr>
+              <a:tr h="502920">
+                <a:tc>
+                  <a:txBody>
+                    <a:bodyPr/>
+                    <a:lstStyle/>
+                    <a:p>
+                      <a:pPr algn="l"/>
+                      <a:r>
+                        <a:rPr sz="1100" b="1" i="0">
+                          <a:solidFill>
+                            <a:srgbClr val="2B2B2B"/>
+                          </a:solidFill>
+                          <a:latin typeface="Calibri"/>
+                        </a:rPr>
+                        <a:t>SciELO y Redalyc</a:t>
+                      </a:r>
+                    </a:p>
+                  </a:txBody>
+                  <a:tcPr anchor="ctr" marL="109728" marR="91440" marT="36576" marB="36576">
+                    <a:solidFill>
+                      <a:srgbClr val="F2F2F2"/>
+                    </a:solidFill>
+                  </a:tcPr>
+                </a:tc>
+                <a:tc>
+                  <a:txBody>
+                    <a:bodyPr/>
+                    <a:lstStyle/>
+                    <a:p>
+                      <a:pPr algn="l"/>
+                      <a:r>
+                        <a:rPr sz="1100" b="0" i="0">
+                          <a:solidFill>
+                            <a:srgbClr val="2B2B2B"/>
+                          </a:solidFill>
+                          <a:latin typeface="Calibri"/>
+                        </a:rPr>
+                        <a:t>Repositorios abiertos en español: producción latinoamericana, clave para los antecedentes nacionales y regionales.</a:t>
+                      </a:r>
+                    </a:p>
+                  </a:txBody>
+                  <a:tcPr anchor="ctr" marL="109728" marR="91440" marT="36576" marB="36576">
+                    <a:solidFill>
+                      <a:srgbClr val="F2F2F2"/>
+                    </a:solidFill>
+                  </a:tcPr>
+                </a:tc>
+              </a:tr>
+              <a:tr h="502920">
+                <a:tc>
+                  <a:txBody>
+                    <a:bodyPr/>
+                    <a:lstStyle/>
+                    <a:p>
+                      <a:pPr algn="l"/>
+                      <a:r>
+                        <a:rPr sz="1100" b="1" i="0">
+                          <a:solidFill>
+                            <a:srgbClr val="2B2B2B"/>
+                          </a:solidFill>
+                          <a:latin typeface="Calibri"/>
+                        </a:rPr>
+                        <a:t>ZoteroBib (zbib.org)</a:t>
+                      </a:r>
+                    </a:p>
+                  </a:txBody>
+                  <a:tcPr anchor="ctr" marL="109728" marR="91440" marT="36576" marB="36576">
+                    <a:solidFill>
+                      <a:srgbClr val="FFFFFF"/>
+                    </a:solidFill>
+                  </a:tcPr>
+                </a:tc>
+                <a:tc>
+                  <a:txBody>
+                    <a:bodyPr/>
+                    <a:lstStyle/>
+                    <a:p>
+                      <a:pPr algn="l"/>
+                      <a:r>
+                        <a:rPr sz="1100" b="0" i="0">
+                          <a:solidFill>
+                            <a:srgbClr val="2B2B2B"/>
+                          </a:solidFill>
+                          <a:latin typeface="Calibri"/>
+                        </a:rPr>
+                        <a:t>Genera la referencia en APA 7 pegando un enlace o un DOI. Sin instalar nada y sin crear cuenta.</a:t>
+                      </a:r>
+                    </a:p>
+                  </a:txBody>
+                  <a:tcPr anchor="ctr" marL="109728" marR="91440" marT="36576" marB="36576">
+                    <a:solidFill>
+                      <a:srgbClr val="FFFFFF"/>
+                    </a:solidFill>
+                  </a:tcPr>
+                </a:tc>
+              </a:tr>
+              <a:tr h="502920">
+                <a:tc>
+                  <a:txBody>
+                    <a:bodyPr/>
+                    <a:lstStyle/>
+                    <a:p>
+                      <a:pPr algn="l"/>
+                      <a:r>
+                        <a:rPr sz="1100" b="1" i="0">
+                          <a:solidFill>
+                            <a:srgbClr val="2B2B2B"/>
+                          </a:solidFill>
+                          <a:latin typeface="Calibri"/>
+                        </a:rPr>
+                        <a:t>Excalidraw</a:t>
+                      </a:r>
+                    </a:p>
+                  </a:txBody>
+                  <a:tcPr anchor="ctr" marL="109728" marR="91440" marT="36576" marB="36576">
+                    <a:solidFill>
+                      <a:srgbClr val="F2F2F2"/>
+                    </a:solidFill>
+                  </a:tcPr>
+                </a:tc>
+                <a:tc>
+                  <a:txBody>
+                    <a:bodyPr/>
+                    <a:lstStyle/>
+                    <a:p>
+                      <a:pPr algn="l"/>
+                      <a:r>
+                        <a:rPr sz="1100" b="0" i="0">
+                          <a:solidFill>
+                            <a:srgbClr val="2B2B2B"/>
+                          </a:solidFill>
+                          <a:latin typeface="Calibri"/>
+                        </a:rPr>
+                        <a:t>Pizarra para dibujar el proceso, el contexto o la idea cuando el texto solo no alcanza para explicarla.</a:t>
+                      </a:r>
+                    </a:p>
+                  </a:txBody>
+                  <a:tcPr anchor="ctr" marL="109728" marR="91440" marT="36576" marB="36576">
+                    <a:solidFill>
+                      <a:srgbClr val="F2F2F2"/>
+                    </a:solidFill>
+                  </a:tcPr>
+                </a:tc>
+              </a:tr>
+              <a:tr h="502920">
+                <a:tc>
+                  <a:txBody>
+                    <a:bodyPr/>
+                    <a:lstStyle/>
+                    <a:p>
+                      <a:pPr algn="l"/>
+                      <a:r>
+                        <a:rPr sz="1100" b="1" i="0">
+                          <a:solidFill>
+                            <a:srgbClr val="2B2B2B"/>
+                          </a:solidFill>
+                          <a:latin typeface="Calibri"/>
+                        </a:rPr>
+                        <a:t>Padlet</a:t>
+                      </a:r>
+                    </a:p>
+                  </a:txBody>
+                  <a:tcPr anchor="ctr" marL="109728" marR="91440" marT="36576" marB="36576">
+                    <a:solidFill>
+                      <a:srgbClr val="FFFFFF"/>
+                    </a:solidFill>
+                  </a:tcPr>
+                </a:tc>
+                <a:tc>
+                  <a:txBody>
+                    <a:bodyPr/>
+                    <a:lstStyle/>
+                    <a:p>
+                      <a:pPr algn="l"/>
+                      <a:r>
+                        <a:rPr sz="1100" b="0" i="0">
+                          <a:solidFill>
+                            <a:srgbClr val="2B2B2B"/>
+                          </a:solidFill>
+                          <a:latin typeface="Calibri"/>
+                        </a:rPr>
+                        <a:t>El tablero colaborativo donde nos presentamos hoy y donde el Docente deja consignas breves.</a:t>
+                      </a:r>
+                    </a:p>
+                  </a:txBody>
+                  <a:tcPr anchor="ctr" marL="109728" marR="91440" marT="36576" marB="36576">
+                    <a:solidFill>
+                      <a:srgbClr val="FFFFFF"/>
+                    </a:solidFill>
+                  </a:tcPr>
+                </a:tc>
+              </a:tr>
+              <a:tr h="502920">
+                <a:tc>
+                  <a:txBody>
+                    <a:bodyPr/>
+                    <a:lstStyle/>
+                    <a:p>
+                      <a:pPr algn="l"/>
+                      <a:r>
+                        <a:rPr sz="1100" b="1" i="0">
+                          <a:solidFill>
+                            <a:srgbClr val="2B2B2B"/>
+                          </a:solidFill>
+                          <a:latin typeface="Calibri"/>
+                        </a:rPr>
+                        <a:t>Google Meet</a:t>
+                      </a:r>
+                    </a:p>
+                  </a:txBody>
+                  <a:tcPr anchor="ctr" marL="109728" marR="91440" marT="36576" marB="36576">
+                    <a:solidFill>
+                      <a:srgbClr val="F2F2F2"/>
+                    </a:solidFill>
+                  </a:tcPr>
+                </a:tc>
+                <a:tc>
+                  <a:txBody>
+                    <a:bodyPr/>
+                    <a:lstStyle/>
+                    <a:p>
+                      <a:pPr algn="l"/>
+                      <a:r>
+                        <a:rPr sz="1100" b="0" i="0">
+                          <a:solidFill>
+                            <a:srgbClr val="2B2B2B"/>
+                          </a:solidFill>
+                          <a:latin typeface="Calibri"/>
+                        </a:rPr>
+                        <a:t>El encuentro sincrónico semanal: mismo enlace toda la serie. La sesión se graba.</a:t>
+                      </a:r>
+                    </a:p>
+                  </a:txBody>
+                  <a:tcPr anchor="ctr" marL="109728" marR="91440" marT="36576" marB="36576">
+                    <a:solidFill>
+                      <a:srgbClr val="F2F2F2"/>
+                    </a:solidFill>
+                  </a:tcPr>
+                </a:tc>
+              </a:tr>
+            </a:tbl>
+          </a:graphicData>
+        </a:graphic>
+      </p:graphicFrame>
+      <p:sp>
+        <p:nvSpPr>
+          <p:cNvPr id="5" name="TextBox 4"/>
+          <p:cNvSpPr txBox="1"/>
+          <p:nvPr/>
+        </p:nvSpPr>
+        <p:spPr>
+          <a:xfrm>
+            <a:off x="640080" y="6080760"/>
+            <a:ext cx="10911535" cy="548640"/>
+          </a:xfrm>
+          <a:prstGeom prst="rect">
+            <a:avLst/>
+          </a:prstGeom>
+          <a:noFill/>
+        </p:spPr>
+        <p:txBody>
+          <a:bodyPr wrap="square" anchor="t" lIns="0" rIns="0" tIns="0" bIns="0">
+            <a:spAutoFit/>
+          </a:bodyPr>
+          <a:lstStyle/>
+          <a:p>
+            <a:r>
+              <a:rPr sz="1200" b="1" i="1">
+                <a:solidFill>
+                  <a:srgbClr val="2B2B2B"/>
+                </a:solidFill>
+                <a:latin typeface="Calibri"/>
+              </a:rPr>
+              <a:t>Nada de esto cuesta ni exige instalación.</a:t>
+            </a:r>
+            <a:r>
+              <a:rPr sz="1200" b="0" i="1">
+                <a:solidFill>
+                  <a:srgbClr val="2B2B2B"/>
+                </a:solidFill>
+                <a:latin typeface="Calibri"/>
+              </a:rPr>
+              <a:t> Súmenle la </a:t>
+            </a:r>
+            <a:r>
+              <a:rPr sz="1200" b="1" i="1">
+                <a:solidFill>
+                  <a:srgbClr val="2B2B2B"/>
+                </a:solidFill>
+                <a:latin typeface="Calibri"/>
+              </a:rPr>
+              <a:t>biblioteca virtual de la CUN</a:t>
+            </a:r>
+            <a:r>
+              <a:rPr sz="1200" b="0" i="1">
+                <a:solidFill>
+                  <a:srgbClr val="2B2B2B"/>
+                </a:solidFill>
+                <a:latin typeface="Calibri"/>
+              </a:rPr>
+              <a:t> con su usuario institucional. Si una herramienta les pide pagar para continuar, no es la que estamos usando: pregunten antes.</a:t>
+            </a:r>
+          </a:p>
+        </p:txBody>
+      </p:sp>
+      <p:sp>
+        <p:nvSpPr>
+          <p:cNvPr id="6" name="TextBox 5"/>
+          <p:cNvSpPr txBox="1"/>
+          <p:nvPr/>
+        </p:nvSpPr>
+        <p:spPr>
+          <a:xfrm>
+            <a:off x="2194560" y="6446520"/>
+            <a:ext cx="5943600" cy="274320"/>
+          </a:xfrm>
+          <a:prstGeom prst="rect">
+            <a:avLst/>
+          </a:prstGeom>
+          <a:noFill/>
+        </p:spPr>
+        <p:txBody>
+          <a:bodyPr wrap="square" anchor="t" lIns="0" rIns="0" tIns="0" bIns="0">
+            <a:spAutoFit/>
+          </a:bodyPr>
+          <a:lstStyle/>
+          <a:p>
+            <a:pPr algn="l"/>
+            <a:r>
+              <a:rPr sz="1000" b="1" i="0">
+                <a:solidFill>
+                  <a:srgbClr val="8F989D"/>
+                </a:solidFill>
+                <a:latin typeface="Calibri"/>
+              </a:rPr>
+              <a:t>Inicio 8:10 pm</a:t>
+            </a:r>
+          </a:p>
+        </p:txBody>
+      </p:sp>
+      <p:sp>
+        <p:nvSpPr>
+          <p:cNvPr id="7" name="TextBox 6"/>
+          <p:cNvSpPr txBox="1"/>
+          <p:nvPr/>
+        </p:nvSpPr>
+        <p:spPr>
+          <a:xfrm>
+            <a:off x="11094415" y="6446520"/>
+            <a:ext cx="548640" cy="274320"/>
+          </a:xfrm>
+          <a:prstGeom prst="rect">
+            <a:avLst/>
+          </a:prstGeom>
+          <a:noFill/>
+        </p:spPr>
+        <p:txBody>
+          <a:bodyPr wrap="square" anchor="t" lIns="0" rIns="0" tIns="0" bIns="0">
+            <a:spAutoFit/>
+          </a:bodyPr>
+          <a:lstStyle/>
+          <a:p>
+            <a:pPr algn="r"/>
+            <a:r>
+              <a:rPr sz="1000" b="1" i="0">
+                <a:solidFill>
+                  <a:srgbClr val="8F989D"/>
+                </a:solidFill>
+                <a:latin typeface="Calibri"/>
+              </a:rPr>
+              <a:t>14</a:t>
+            </a:r>
+          </a:p>
+        </p:txBody>
+      </p:sp>
+    </p:spTree>
+  </p:cSld>
+  <p:clrMapOvr>
+    <a:masterClrMapping/>
+  </p:clrMapOvr>
+</p:sld>
+</file>
+
+<file path=ppt/slides/slide15.xml><?xml version="1.0" encoding="utf-8"?>
+<p:sld xmlns:a="http://schemas.openxmlformats.org/drawingml/2006/main" xmlns:p="http://schemas.openxmlformats.org/presentationml/2006/main" xmlns:r="http://schemas.openxmlformats.org/officeDocument/2006/relationships">
+  <p:cSld>
+    <p:bg>
+      <p:bgPr>
+        <a:solidFill>
+          <a:srgbClr val="FFFFFF"/>
+        </a:solidFill>
+        <a:effectLst/>
+      </p:bgPr>
+    </p:bg>
+    <p:spTree>
+      <p:nvGrpSpPr>
+        <p:cNvPr id="1" name=""/>
+        <p:cNvGrpSpPr/>
+        <p:nvPr/>
+      </p:nvGrpSpPr>
+      <p:grpSpPr/>
+      <p:sp>
+        <p:nvSpPr>
+          <p:cNvPr id="2" name="Rectangle 1"/>
+          <p:cNvSpPr/>
+          <p:nvPr/>
+        </p:nvSpPr>
+        <p:spPr>
+          <a:xfrm>
+            <a:off x="0" y="0"/>
+            <a:ext cx="12191695" cy="1188720"/>
+          </a:xfrm>
+          <a:prstGeom prst="rect">
+            <a:avLst/>
+          </a:prstGeom>
+          <a:solidFill>
+            <a:srgbClr val="0C2340"/>
+          </a:solidFill>
+          <a:ln>
+            <a:noFill/>
+          </a:ln>
+          <a:effectLst/>
+        </p:spPr>
+        <p:style>
+          <a:lnRef idx="1">
+            <a:schemeClr val="accent1"/>
+          </a:lnRef>
+          <a:fillRef idx="3">
+            <a:schemeClr val="accent1"/>
+          </a:fillRef>
+          <a:effectRef idx="2">
+            <a:schemeClr val="accent1"/>
+          </a:effectRef>
+          <a:fontRef idx="minor">
+            <a:schemeClr val="lt1"/>
+          </a:fontRef>
+        </p:style>
+        <p:txBody>
+          <a:bodyPr rtlCol="0" anchor="ctr"/>
+          <a:lstStyle/>
+          <a:p>
+            <a:pPr algn="ctr"/>
+          </a:p>
+        </p:txBody>
+      </p:sp>
+      <p:sp>
+        <p:nvSpPr>
+          <p:cNvPr id="3" name="TextBox 2"/>
+          <p:cNvSpPr txBox="1"/>
+          <p:nvPr/>
+        </p:nvSpPr>
+        <p:spPr>
+          <a:xfrm>
+            <a:off x="640080" y="0"/>
+            <a:ext cx="9082735" cy="1188720"/>
+          </a:xfrm>
+          <a:prstGeom prst="rect">
+            <a:avLst/>
+          </a:prstGeom>
+          <a:noFill/>
+        </p:spPr>
+        <p:txBody>
+          <a:bodyPr wrap="square" anchor="ctr" lIns="0" rIns="0" tIns="0" bIns="0">
+            <a:spAutoFit/>
+          </a:bodyPr>
+          <a:lstStyle/>
+          <a:p>
+            <a:pPr algn="ctr"/>
+            <a:r>
+              <a:rPr sz="2600" b="1" i="0">
+                <a:solidFill>
+                  <a:srgbClr val="FFFFFF"/>
+                </a:solidFill>
+                <a:latin typeface="Calibri"/>
+              </a:rPr>
+              <a:t>Cómo pedir ayuda: canales, tutorías y tiempos de respuesta</a:t>
+            </a:r>
+          </a:p>
+        </p:txBody>
+      </p:sp>
+      <p:sp>
+        <p:nvSpPr>
+          <p:cNvPr id="4" name="TextBox 3"/>
+          <p:cNvSpPr txBox="1"/>
+          <p:nvPr/>
+        </p:nvSpPr>
+        <p:spPr>
+          <a:xfrm>
+            <a:off x="640080" y="1691639"/>
+            <a:ext cx="10911535" cy="4617720"/>
+          </a:xfrm>
+          <a:prstGeom prst="rect">
+            <a:avLst/>
+          </a:prstGeom>
+          <a:noFill/>
+        </p:spPr>
+        <p:txBody>
+          <a:bodyPr wrap="square" anchor="t" lIns="0" rIns="0" tIns="0" bIns="0">
+            <a:spAutoFit/>
+          </a:bodyPr>
+          <a:lstStyle/>
+          <a:p>
+            <a:pPr>
+              <a:spcAft>
+                <a:spcPts val="1000"/>
+              </a:spcAft>
+            </a:pPr>
+            <a:r>
+              <a:rPr sz="1600" b="0" i="0">
+                <a:solidFill>
+                  <a:srgbClr val="2B2B2B"/>
+                </a:solidFill>
+                <a:latin typeface="Calibri"/>
+              </a:rPr>
+              <a:t>–   </a:t>
+            </a:r>
+            <a:r>
+              <a:rPr sz="1600" b="1" i="0">
+                <a:solidFill>
+                  <a:srgbClr val="2B2B2B"/>
+                </a:solidFill>
+                <a:latin typeface="Calibri"/>
+              </a:rPr>
+              <a:t>En clase:</a:t>
+            </a:r>
+            <a:r>
+              <a:rPr sz="1600" b="0" i="0">
+                <a:solidFill>
+                  <a:srgbClr val="2B2B2B"/>
+                </a:solidFill>
+                <a:latin typeface="Calibri"/>
+              </a:rPr>
+              <a:t> la segunda hora es tutoría en vivo. Es el canal más rápido y ya está dentro de su horario.</a:t>
+            </a:r>
+          </a:p>
+          <a:p>
+            <a:pPr>
+              <a:spcAft>
+                <a:spcPts val="1000"/>
+              </a:spcAft>
+            </a:pPr>
+            <a:r>
+              <a:rPr sz="1600" b="0" i="0">
+                <a:solidFill>
+                  <a:srgbClr val="2B2B2B"/>
+                </a:solidFill>
+                <a:latin typeface="Calibri"/>
+              </a:rPr>
+              <a:t>–   </a:t>
+            </a:r>
+            <a:r>
+              <a:rPr sz="1600" b="1" i="0">
+                <a:solidFill>
+                  <a:srgbClr val="2B2B2B"/>
+                </a:solidFill>
+                <a:latin typeface="Calibri"/>
+              </a:rPr>
+              <a:t>Tutorías por equipo:</a:t>
+            </a:r>
+            <a:r>
+              <a:rPr sz="1600" b="0" i="0">
+                <a:solidFill>
+                  <a:srgbClr val="2B2B2B"/>
+                </a:solidFill>
+                <a:latin typeface="Calibri"/>
+              </a:rPr>
+              <a:t> se </a:t>
+            </a:r>
+            <a:r>
+              <a:rPr sz="1600" b="1" i="0">
+                <a:solidFill>
+                  <a:srgbClr val="2B2B2B"/>
+                </a:solidFill>
+                <a:latin typeface="Calibri"/>
+              </a:rPr>
+              <a:t>acuerdan en la semana</a:t>
+            </a:r>
+            <a:r>
+              <a:rPr sz="1600" b="0" i="0">
+                <a:solidFill>
+                  <a:srgbClr val="2B2B2B"/>
+                </a:solidFill>
+                <a:latin typeface="Calibri"/>
+              </a:rPr>
+              <a:t> con el Docente. No hay atención espontánea sin cita.</a:t>
+            </a:r>
+          </a:p>
+          <a:p>
+            <a:pPr lvl="1">
+              <a:spcAft>
+                <a:spcPts val="600"/>
+              </a:spcAft>
+            </a:pPr>
+            <a:r>
+              <a:rPr sz="1500" b="0" i="0">
+                <a:solidFill>
+                  <a:srgbClr val="2B2B2B"/>
+                </a:solidFill>
+                <a:latin typeface="Calibri"/>
+              </a:rPr>
+              <a:t>●   Al pedirla, digan qué necesitan y qué tienen escrito; se agenda y se atiende con el documento abierto.</a:t>
+            </a:r>
+          </a:p>
+          <a:p>
+            <a:pPr>
+              <a:spcAft>
+                <a:spcPts val="1000"/>
+              </a:spcAft>
+            </a:pPr>
+            <a:r>
+              <a:rPr sz="1600" b="0" i="0">
+                <a:solidFill>
+                  <a:srgbClr val="2B2B2B"/>
+                </a:solidFill>
+                <a:latin typeface="Calibri"/>
+              </a:rPr>
+              <a:t>–   </a:t>
+            </a:r>
+            <a:r>
+              <a:rPr sz="1600" b="1" i="0">
+                <a:solidFill>
+                  <a:srgbClr val="2B2B2B"/>
+                </a:solidFill>
+                <a:latin typeface="Calibri"/>
+              </a:rPr>
+              <a:t>Cada estudiante que asiste a tutoría registra su asistencia</a:t>
+            </a:r>
+            <a:r>
+              <a:rPr sz="1600" b="0" i="0">
+                <a:solidFill>
+                  <a:srgbClr val="2B2B2B"/>
+                </a:solidFill>
+                <a:latin typeface="Calibri"/>
+              </a:rPr>
+              <a:t> en el formulario del curso:</a:t>
+            </a:r>
+          </a:p>
+          <a:p>
+            <a:pPr lvl="1">
+              <a:spcAft>
+                <a:spcPts val="600"/>
+              </a:spcAft>
+            </a:pPr>
+            <a:r>
+              <a:rPr sz="1500" b="0" i="0">
+                <a:solidFill>
+                  <a:srgbClr val="2B2B2B"/>
+                </a:solidFill>
+                <a:latin typeface="Calibri"/>
+              </a:rPr>
+              <a:t>●   </a:t>
+            </a:r>
+            <a:r>
+              <a:rPr sz="1500" b="1" i="0">
+                <a:solidFill>
+                  <a:srgbClr val="2B2B2B"/>
+                </a:solidFill>
+                <a:latin typeface="Calibri"/>
+              </a:rPr>
+              <a:t>https://forms.gle/oZ8xCYiUo3KEWr1d9</a:t>
+            </a:r>
+            <a:r>
+              <a:rPr sz="1500" b="0" i="0">
+                <a:solidFill>
+                  <a:srgbClr val="2B2B2B"/>
+                </a:solidFill>
+                <a:latin typeface="Calibri"/>
+              </a:rPr>
+              <a:t> — también queda publicado en CDigital.</a:t>
+            </a:r>
+          </a:p>
+          <a:p>
+            <a:pPr lvl="1">
+              <a:spcAft>
+                <a:spcPts val="600"/>
+              </a:spcAft>
+            </a:pPr>
+            <a:r>
+              <a:rPr sz="1500" b="0" i="0">
+                <a:solidFill>
+                  <a:srgbClr val="2B2B2B"/>
+                </a:solidFill>
+                <a:latin typeface="Calibri"/>
+              </a:rPr>
+              <a:t>●   Ese registro es </a:t>
+            </a:r>
+            <a:r>
+              <a:rPr sz="1500" b="1" i="0">
+                <a:solidFill>
+                  <a:srgbClr val="2B2B2B"/>
+                </a:solidFill>
+                <a:latin typeface="Calibri"/>
+              </a:rPr>
+              <a:t>su evidencia</a:t>
+            </a:r>
+            <a:r>
+              <a:rPr sz="1500" b="0" i="0">
+                <a:solidFill>
+                  <a:srgbClr val="2B2B2B"/>
+                </a:solidFill>
+                <a:latin typeface="Calibri"/>
+              </a:rPr>
+              <a:t> de acompañamiento ante el programa: sin registro, la tutoría no consta.</a:t>
+            </a:r>
+          </a:p>
+          <a:p>
+            <a:pPr>
+              <a:spcAft>
+                <a:spcPts val="1000"/>
+              </a:spcAft>
+            </a:pPr>
+            <a:r>
+              <a:rPr sz="1600" b="0" i="0">
+                <a:solidFill>
+                  <a:srgbClr val="2B2B2B"/>
+                </a:solidFill>
+                <a:latin typeface="Calibri"/>
+              </a:rPr>
+              <a:t>–   </a:t>
+            </a:r>
+            <a:r>
+              <a:rPr sz="1600" b="1" i="0">
+                <a:solidFill>
+                  <a:srgbClr val="2B2B2B"/>
+                </a:solidFill>
+                <a:latin typeface="Calibri"/>
+              </a:rPr>
+              <a:t>Foro y mensajería de CDigital:</a:t>
+            </a:r>
+            <a:r>
+              <a:rPr sz="1600" b="0" i="0">
+                <a:solidFill>
+                  <a:srgbClr val="2B2B2B"/>
+                </a:solidFill>
+                <a:latin typeface="Calibri"/>
+              </a:rPr>
+              <a:t> para dudas que le sirven a todo el curso. Respuesta en días hábiles.</a:t>
+            </a:r>
+          </a:p>
+          <a:p>
+            <a:pPr>
+              <a:spcAft>
+                <a:spcPts val="1000"/>
+              </a:spcAft>
+            </a:pPr>
+            <a:r>
+              <a:rPr sz="1600" b="0" i="0">
+                <a:solidFill>
+                  <a:srgbClr val="2B2B2B"/>
+                </a:solidFill>
+                <a:latin typeface="Calibri"/>
+              </a:rPr>
+              <a:t>–   </a:t>
+            </a:r>
+            <a:r>
+              <a:rPr sz="1600" b="1" i="0">
+                <a:solidFill>
+                  <a:srgbClr val="2B2B2B"/>
+                </a:solidFill>
+                <a:latin typeface="Calibri"/>
+              </a:rPr>
+              <a:t>Antes de preguntar:</a:t>
+            </a:r>
+            <a:r>
+              <a:rPr sz="1600" b="0" i="0">
+                <a:solidFill>
+                  <a:srgbClr val="2B2B2B"/>
+                </a:solidFill>
+                <a:latin typeface="Calibri"/>
+              </a:rPr>
+              <a:t> revisen el enunciado de la ACA y la plantilla. La mitad de las dudas ya está resuelta ahí.</a:t>
+            </a:r>
+          </a:p>
+          <a:p>
+            <a:pPr>
+              <a:spcAft>
+                <a:spcPts val="1000"/>
+              </a:spcAft>
+            </a:pPr>
+            <a:r>
+              <a:rPr sz="1600" b="0" i="0">
+                <a:solidFill>
+                  <a:srgbClr val="2B2B2B"/>
+                </a:solidFill>
+                <a:latin typeface="Calibri"/>
+              </a:rPr>
+              <a:t>–   Pregunta bien hecha = sección concreta + qué intentaron + qué no les cuadra. «No entendí nada» no se puede responder.</a:t>
+            </a:r>
+          </a:p>
+        </p:txBody>
+      </p:sp>
+      <p:sp>
+        <p:nvSpPr>
+          <p:cNvPr id="5" name="TextBox 4"/>
+          <p:cNvSpPr txBox="1"/>
+          <p:nvPr/>
+        </p:nvSpPr>
+        <p:spPr>
+          <a:xfrm>
+            <a:off x="2194560" y="6446520"/>
+            <a:ext cx="5943600" cy="274320"/>
+          </a:xfrm>
+          <a:prstGeom prst="rect">
+            <a:avLst/>
+          </a:prstGeom>
+          <a:noFill/>
+        </p:spPr>
+        <p:txBody>
+          <a:bodyPr wrap="square" anchor="t" lIns="0" rIns="0" tIns="0" bIns="0">
+            <a:spAutoFit/>
+          </a:bodyPr>
+          <a:lstStyle/>
+          <a:p>
+            <a:pPr algn="l"/>
+            <a:r>
+              <a:rPr sz="1000" b="1" i="0">
+                <a:solidFill>
+                  <a:srgbClr val="8F989D"/>
+                </a:solidFill>
+                <a:latin typeface="Calibri"/>
+              </a:rPr>
+              <a:t>Inicio 8:10 pm</a:t>
+            </a:r>
+          </a:p>
+        </p:txBody>
+      </p:sp>
+      <p:sp>
+        <p:nvSpPr>
+          <p:cNvPr id="6" name="TextBox 5"/>
+          <p:cNvSpPr txBox="1"/>
+          <p:nvPr/>
+        </p:nvSpPr>
+        <p:spPr>
+          <a:xfrm>
+            <a:off x="11094415" y="6446520"/>
+            <a:ext cx="548640" cy="274320"/>
+          </a:xfrm>
+          <a:prstGeom prst="rect">
+            <a:avLst/>
+          </a:prstGeom>
+          <a:noFill/>
+        </p:spPr>
+        <p:txBody>
+          <a:bodyPr wrap="square" anchor="t" lIns="0" rIns="0" tIns="0" bIns="0">
+            <a:spAutoFit/>
+          </a:bodyPr>
+          <a:lstStyle/>
+          <a:p>
+            <a:pPr algn="r"/>
+            <a:r>
+              <a:rPr sz="1000" b="1" i="0">
+                <a:solidFill>
+                  <a:srgbClr val="8F989D"/>
+                </a:solidFill>
+                <a:latin typeface="Calibri"/>
+              </a:rPr>
+              <a:t>15</a:t>
+            </a:r>
+          </a:p>
+        </p:txBody>
+      </p:sp>
+      <p:sp>
+        <p:nvSpPr>
+          <p:cNvPr id="7" name="TextBox 6"/>
+          <p:cNvSpPr txBox="1"/>
+          <p:nvPr/>
+        </p:nvSpPr>
+        <p:spPr>
+          <a:xfrm>
+            <a:off x="640080" y="5943600"/>
+            <a:ext cx="9997135" cy="457200"/>
+          </a:xfrm>
+          <a:prstGeom prst="rect">
+            <a:avLst/>
+          </a:prstGeom>
+          <a:noFill/>
+        </p:spPr>
+        <p:txBody>
+          <a:bodyPr wrap="square" anchor="t" lIns="0" rIns="0" tIns="0" bIns="0">
+            <a:spAutoFit/>
+          </a:bodyPr>
+          <a:lstStyle/>
+          <a:p>
+            <a:r>
+              <a:rPr sz="1200" b="0" i="1">
+                <a:solidFill>
+                  <a:srgbClr val="2B2B2B"/>
+                </a:solidFill>
+                <a:latin typeface="Calibri"/>
+              </a:rPr>
+              <a:t>Las tutorías por grupo se acuerdan en la semana con el Docente (no hay atención espontánea sin cita).</a:t>
+            </a:r>
+          </a:p>
+        </p:txBody>
+      </p:sp>
+    </p:spTree>
+  </p:cSld>
+  <p:clrMapOvr>
+    <a:masterClrMapping/>
+  </p:clrMapOvr>
+</p:sld>
+</file>
+
+<file path=ppt/slides/slide16.xml><?xml version="1.0" encoding="utf-8"?>
+<p:sld xmlns:a="http://schemas.openxmlformats.org/drawingml/2006/main" xmlns:p="http://schemas.openxmlformats.org/presentationml/2006/main" xmlns:r="http://schemas.openxmlformats.org/officeDocument/2006/relationships">
+  <p:cSld>
+    <p:bg>
+      <p:bgPr>
+        <a:solidFill>
+          <a:srgbClr val="FFFFFF"/>
+        </a:solidFill>
+        <a:effectLst/>
+      </p:bgPr>
+    </p:bg>
+    <p:spTree>
+      <p:nvGrpSpPr>
+        <p:cNvPr id="1" name=""/>
+        <p:cNvGrpSpPr/>
+        <p:nvPr/>
+      </p:nvGrpSpPr>
+      <p:grpSpPr/>
+      <p:sp>
+        <p:nvSpPr>
+          <p:cNvPr id="2" name="Rectangle 1"/>
+          <p:cNvSpPr/>
+          <p:nvPr/>
+        </p:nvSpPr>
+        <p:spPr>
+          <a:xfrm>
+            <a:off x="0" y="0"/>
+            <a:ext cx="12191695" cy="1188720"/>
+          </a:xfrm>
+          <a:prstGeom prst="rect">
+            <a:avLst/>
+          </a:prstGeom>
+          <a:solidFill>
+            <a:srgbClr val="0C2340"/>
+          </a:solidFill>
+          <a:ln>
+            <a:noFill/>
+          </a:ln>
+          <a:effectLst/>
+        </p:spPr>
+        <p:style>
+          <a:lnRef idx="1">
+            <a:schemeClr val="accent1"/>
+          </a:lnRef>
+          <a:fillRef idx="3">
+            <a:schemeClr val="accent1"/>
+          </a:fillRef>
+          <a:effectRef idx="2">
+            <a:schemeClr val="accent1"/>
+          </a:effectRef>
+          <a:fontRef idx="minor">
+            <a:schemeClr val="lt1"/>
+          </a:fontRef>
+        </p:style>
+        <p:txBody>
+          <a:bodyPr rtlCol="0" anchor="ctr"/>
+          <a:lstStyle/>
+          <a:p>
+            <a:pPr algn="ctr"/>
+          </a:p>
+        </p:txBody>
+      </p:sp>
+      <p:sp>
+        <p:nvSpPr>
+          <p:cNvPr id="3" name="TextBox 2"/>
+          <p:cNvSpPr txBox="1"/>
+          <p:nvPr/>
+        </p:nvSpPr>
+        <p:spPr>
+          <a:xfrm>
+            <a:off x="640080" y="0"/>
+            <a:ext cx="9082735" cy="1188720"/>
+          </a:xfrm>
+          <a:prstGeom prst="rect">
+            <a:avLst/>
+          </a:prstGeom>
+          <a:noFill/>
+        </p:spPr>
+        <p:txBody>
+          <a:bodyPr wrap="square" anchor="ctr" lIns="0" rIns="0" tIns="0" bIns="0">
+            <a:spAutoFit/>
+          </a:bodyPr>
+          <a:lstStyle/>
+          <a:p>
+            <a:pPr algn="ctr"/>
+            <a:r>
+              <a:rPr sz="2600" b="1" i="0">
+                <a:solidFill>
+                  <a:srgbClr val="FFFFFF"/>
+                </a:solidFill>
+                <a:latin typeface="Calibri"/>
+              </a:rPr>
+              <a:t>Acuerdos de convivencia del encuentro</a:t>
+            </a:r>
+          </a:p>
+        </p:txBody>
+      </p:sp>
+      <p:sp>
+        <p:nvSpPr>
+          <p:cNvPr id="4" name="Rounded Rectangle 3"/>
+          <p:cNvSpPr/>
+          <p:nvPr/>
+        </p:nvSpPr>
+        <p:spPr>
+          <a:xfrm>
+            <a:off x="640080" y="1737360"/>
+            <a:ext cx="10911535" cy="1225296"/>
+          </a:xfrm>
+          <a:prstGeom prst="roundRect">
+            <a:avLst/>
+          </a:prstGeom>
+          <a:solidFill>
+            <a:srgbClr val="E8F5EC"/>
+          </a:solidFill>
+          <a:ln>
+            <a:noFill/>
+          </a:ln>
+          <a:effectLst/>
+        </p:spPr>
+        <p:style>
+          <a:lnRef idx="1">
+            <a:schemeClr val="accent1"/>
+          </a:lnRef>
+          <a:fillRef idx="3">
+            <a:schemeClr val="accent1"/>
+          </a:fillRef>
+          <a:effectRef idx="2">
+            <a:schemeClr val="accent1"/>
+          </a:effectRef>
+          <a:fontRef idx="minor">
+            <a:schemeClr val="lt1"/>
+          </a:fontRef>
+        </p:style>
+        <p:txBody>
+          <a:bodyPr rtlCol="0" anchor="ctr"/>
+          <a:lstStyle/>
+          <a:p>
+            <a:pPr algn="ctr"/>
+          </a:p>
+        </p:txBody>
+      </p:sp>
+      <p:sp>
+        <p:nvSpPr>
+          <p:cNvPr id="5" name="TextBox 4"/>
+          <p:cNvSpPr txBox="1"/>
+          <p:nvPr/>
+        </p:nvSpPr>
+        <p:spPr>
+          <a:xfrm>
+            <a:off x="868680" y="1847088"/>
+            <a:ext cx="10454335" cy="1005840"/>
+          </a:xfrm>
+          <a:prstGeom prst="rect">
+            <a:avLst/>
+          </a:prstGeom>
+          <a:noFill/>
+        </p:spPr>
+        <p:txBody>
+          <a:bodyPr wrap="square" anchor="t" lIns="0" rIns="0" tIns="0" bIns="0">
+            <a:spAutoFit/>
+          </a:bodyPr>
+          <a:lstStyle/>
+          <a:p>
+            <a:r>
+              <a:rPr sz="1300" b="1" i="0">
+                <a:solidFill>
+                  <a:srgbClr val="0C2340"/>
+                </a:solidFill>
+                <a:latin typeface="Calibri"/>
+              </a:rPr>
+              <a:t>ℹ️ Nota institucional</a:t>
+            </a:r>
+          </a:p>
+          <a:p>
+            <a:pPr>
+              <a:spcBef>
+                <a:spcPts val="400"/>
+              </a:spcBef>
+            </a:pPr>
+            <a:r>
+              <a:rPr sz="1300" b="1" i="0">
+                <a:solidFill>
+                  <a:srgbClr val="2B2B2B"/>
+                </a:solidFill>
+                <a:latin typeface="Calibri"/>
+              </a:rPr>
+              <a:t>Puntualidad y cámara.</a:t>
+            </a:r>
+            <a:r>
+              <a:rPr sz="1300" b="0" i="0">
+                <a:solidFill>
+                  <a:srgbClr val="2B2B2B"/>
+                </a:solidFill>
+                <a:latin typeface="Calibri"/>
+              </a:rPr>
+              <a:t> Empezamos a la hora en punto. Cámara encendida al menos en la presentación y en la tutoría de su equipo: revisar un avance a ciegas no funciona. Micrófono en silencio mientras alguien expone.</a:t>
+            </a:r>
+          </a:p>
+        </p:txBody>
+      </p:sp>
+      <p:sp>
+        <p:nvSpPr>
+          <p:cNvPr id="6" name="Rounded Rectangle 5"/>
+          <p:cNvSpPr/>
+          <p:nvPr/>
+        </p:nvSpPr>
+        <p:spPr>
+          <a:xfrm>
+            <a:off x="640080" y="3191256"/>
+            <a:ext cx="10911535" cy="1225296"/>
+          </a:xfrm>
+          <a:prstGeom prst="roundRect">
+            <a:avLst/>
+          </a:prstGeom>
+          <a:solidFill>
+            <a:srgbClr val="FDECD8"/>
+          </a:solidFill>
+          <a:ln>
+            <a:noFill/>
+          </a:ln>
+          <a:effectLst/>
+        </p:spPr>
+        <p:style>
+          <a:lnRef idx="1">
+            <a:schemeClr val="accent1"/>
+          </a:lnRef>
+          <a:fillRef idx="3">
+            <a:schemeClr val="accent1"/>
+          </a:fillRef>
+          <a:effectRef idx="2">
+            <a:schemeClr val="accent1"/>
+          </a:effectRef>
+          <a:fontRef idx="minor">
+            <a:schemeClr val="lt1"/>
+          </a:fontRef>
+        </p:style>
+        <p:txBody>
+          <a:bodyPr rtlCol="0" anchor="ctr"/>
+          <a:lstStyle/>
+          <a:p>
+            <a:pPr algn="ctr"/>
+          </a:p>
+        </p:txBody>
+      </p:sp>
+      <p:sp>
+        <p:nvSpPr>
+          <p:cNvPr id="7" name="TextBox 6"/>
+          <p:cNvSpPr txBox="1"/>
+          <p:nvPr/>
+        </p:nvSpPr>
+        <p:spPr>
+          <a:xfrm>
+            <a:off x="868680" y="3300984"/>
+            <a:ext cx="10454335" cy="1005840"/>
+          </a:xfrm>
+          <a:prstGeom prst="rect">
+            <a:avLst/>
+          </a:prstGeom>
+          <a:noFill/>
+        </p:spPr>
+        <p:txBody>
+          <a:bodyPr wrap="square" anchor="t" lIns="0" rIns="0" tIns="0" bIns="0">
+            <a:spAutoFit/>
+          </a:bodyPr>
+          <a:lstStyle/>
+          <a:p>
+            <a:r>
+              <a:rPr sz="1300" b="1" i="0">
+                <a:solidFill>
+                  <a:srgbClr val="0C2340"/>
+                </a:solidFill>
+                <a:latin typeface="Calibri"/>
+              </a:rPr>
+              <a:t>💡 Aclaración</a:t>
+            </a:r>
+          </a:p>
+          <a:p>
+            <a:pPr>
+              <a:spcBef>
+                <a:spcPts val="400"/>
+              </a:spcBef>
+            </a:pPr>
+            <a:r>
+              <a:rPr sz="1300" b="1" i="0">
+                <a:solidFill>
+                  <a:srgbClr val="2B2B2B"/>
+                </a:solidFill>
+                <a:latin typeface="Calibri"/>
+              </a:rPr>
+              <a:t>Participar es parte del método.</a:t>
+            </a:r>
+            <a:r>
+              <a:rPr sz="1300" b="0" i="0">
+                <a:solidFill>
+                  <a:srgbClr val="2B2B2B"/>
+                </a:solidFill>
+                <a:latin typeface="Calibri"/>
+              </a:rPr>
+              <a:t> Cuando el Docente pregunta, el silencio también es una respuesta: alarga la clase. Interrumpan para preguntar; es preferible una duda a destiempo que un capítulo entero mal escrito.</a:t>
+            </a:r>
+          </a:p>
+        </p:txBody>
+      </p:sp>
+      <p:sp>
+        <p:nvSpPr>
+          <p:cNvPr id="8" name="Rounded Rectangle 7"/>
+          <p:cNvSpPr/>
+          <p:nvPr/>
+        </p:nvSpPr>
+        <p:spPr>
+          <a:xfrm>
+            <a:off x="640080" y="4645152"/>
+            <a:ext cx="10911535" cy="1225296"/>
+          </a:xfrm>
+          <a:prstGeom prst="roundRect">
+            <a:avLst/>
+          </a:prstGeom>
+          <a:solidFill>
+            <a:srgbClr val="FBE4E4"/>
+          </a:solidFill>
+          <a:ln>
+            <a:noFill/>
+          </a:ln>
+          <a:effectLst/>
+        </p:spPr>
+        <p:style>
+          <a:lnRef idx="1">
+            <a:schemeClr val="accent1"/>
+          </a:lnRef>
+          <a:fillRef idx="3">
+            <a:schemeClr val="accent1"/>
+          </a:fillRef>
+          <a:effectRef idx="2">
+            <a:schemeClr val="accent1"/>
+          </a:effectRef>
+          <a:fontRef idx="minor">
+            <a:schemeClr val="lt1"/>
+          </a:fontRef>
+        </p:style>
+        <p:txBody>
+          <a:bodyPr rtlCol="0" anchor="ctr"/>
+          <a:lstStyle/>
+          <a:p>
+            <a:pPr algn="ctr"/>
+          </a:p>
+        </p:txBody>
+      </p:sp>
+      <p:sp>
+        <p:nvSpPr>
+          <p:cNvPr id="9" name="TextBox 8"/>
+          <p:cNvSpPr txBox="1"/>
+          <p:nvPr/>
+        </p:nvSpPr>
+        <p:spPr>
+          <a:xfrm>
+            <a:off x="868680" y="4754880"/>
+            <a:ext cx="10454335" cy="1005840"/>
+          </a:xfrm>
+          <a:prstGeom prst="rect">
+            <a:avLst/>
+          </a:prstGeom>
+          <a:noFill/>
+        </p:spPr>
+        <p:txBody>
+          <a:bodyPr wrap="square" anchor="t" lIns="0" rIns="0" tIns="0" bIns="0">
+            <a:spAutoFit/>
+          </a:bodyPr>
+          <a:lstStyle/>
+          <a:p>
+            <a:r>
+              <a:rPr sz="1300" b="1" i="0">
+                <a:solidFill>
+                  <a:srgbClr val="0C2340"/>
+                </a:solidFill>
+                <a:latin typeface="Calibri"/>
+              </a:rPr>
+              <a:t>⚠️ Importante</a:t>
+            </a:r>
+          </a:p>
+          <a:p>
+            <a:pPr>
+              <a:spcBef>
+                <a:spcPts val="400"/>
+              </a:spcBef>
+            </a:pPr>
+            <a:r>
+              <a:rPr sz="1300" b="1" i="0">
+                <a:solidFill>
+                  <a:srgbClr val="2B2B2B"/>
+                </a:solidFill>
+                <a:latin typeface="Calibri"/>
+              </a:rPr>
+              <a:t>Respeto en el foro y en el chat.</a:t>
+            </a:r>
+            <a:r>
+              <a:rPr sz="1300" b="0" i="0">
+                <a:solidFill>
+                  <a:srgbClr val="2B2B2B"/>
+                </a:solidFill>
+                <a:latin typeface="Calibri"/>
+              </a:rPr>
+              <a:t> Se critica el documento, nunca a la persona. La retroalimentación entre equipos se escribe con la misma cortesía con la que quisieran recibirla. El encuentro se graba.</a:t>
+            </a:r>
+          </a:p>
+        </p:txBody>
+      </p:sp>
+      <p:sp>
+        <p:nvSpPr>
+          <p:cNvPr id="10" name="TextBox 9"/>
+          <p:cNvSpPr txBox="1"/>
+          <p:nvPr/>
+        </p:nvSpPr>
+        <p:spPr>
+          <a:xfrm>
+            <a:off x="2194560" y="6446520"/>
+            <a:ext cx="5943600" cy="274320"/>
+          </a:xfrm>
+          <a:prstGeom prst="rect">
+            <a:avLst/>
+          </a:prstGeom>
+          <a:noFill/>
+        </p:spPr>
+        <p:txBody>
+          <a:bodyPr wrap="square" anchor="t" lIns="0" rIns="0" tIns="0" bIns="0">
+            <a:spAutoFit/>
+          </a:bodyPr>
+          <a:lstStyle/>
+          <a:p>
+            <a:pPr algn="l"/>
+            <a:r>
+              <a:rPr sz="1000" b="1" i="0">
+                <a:solidFill>
+                  <a:srgbClr val="8F989D"/>
+                </a:solidFill>
+                <a:latin typeface="Calibri"/>
+              </a:rPr>
+              <a:t>Inicio 8:10 pm</a:t>
+            </a:r>
+          </a:p>
+        </p:txBody>
+      </p:sp>
+      <p:sp>
+        <p:nvSpPr>
+          <p:cNvPr id="11" name="TextBox 10"/>
+          <p:cNvSpPr txBox="1"/>
+          <p:nvPr/>
+        </p:nvSpPr>
+        <p:spPr>
+          <a:xfrm>
+            <a:off x="11094415" y="6446520"/>
+            <a:ext cx="548640" cy="274320"/>
+          </a:xfrm>
+          <a:prstGeom prst="rect">
+            <a:avLst/>
+          </a:prstGeom>
+          <a:noFill/>
+        </p:spPr>
+        <p:txBody>
+          <a:bodyPr wrap="square" anchor="t" lIns="0" rIns="0" tIns="0" bIns="0">
+            <a:spAutoFit/>
+          </a:bodyPr>
+          <a:lstStyle/>
+          <a:p>
+            <a:pPr algn="r"/>
+            <a:r>
+              <a:rPr sz="1000" b="1" i="0">
+                <a:solidFill>
+                  <a:srgbClr val="8F989D"/>
+                </a:solidFill>
+                <a:latin typeface="Calibri"/>
+              </a:rPr>
+              <a:t>16</a:t>
+            </a:r>
+          </a:p>
+        </p:txBody>
+      </p:sp>
+    </p:spTree>
+  </p:cSld>
+  <p:clrMapOvr>
+    <a:masterClrMapping/>
+  </p:clrMapOvr>
+</p:sld>
+</file>
+
+<file path=ppt/slides/slide17.xml><?xml version="1.0" encoding="utf-8"?>
+<p:sld xmlns:a="http://schemas.openxmlformats.org/drawingml/2006/main" xmlns:p="http://schemas.openxmlformats.org/presentationml/2006/main" xmlns:r="http://schemas.openxmlformats.org/officeDocument/2006/relationships">
+  <p:cSld>
+    <p:bg>
+      <p:bgPr>
+        <a:solidFill>
+          <a:srgbClr val="FFFFFF"/>
+        </a:solidFill>
+        <a:effectLst/>
+      </p:bgPr>
+    </p:bg>
+    <p:spTree>
+      <p:nvGrpSpPr>
+        <p:cNvPr id="1" name=""/>
+        <p:cNvGrpSpPr/>
+        <p:nvPr/>
+      </p:nvGrpSpPr>
+      <p:grpSpPr/>
+      <p:sp>
+        <p:nvSpPr>
+          <p:cNvPr id="2" name="Rectangle 1"/>
+          <p:cNvSpPr/>
+          <p:nvPr/>
+        </p:nvSpPr>
+        <p:spPr>
+          <a:xfrm>
+            <a:off x="0" y="0"/>
+            <a:ext cx="12191695" cy="1188720"/>
+          </a:xfrm>
+          <a:prstGeom prst="rect">
+            <a:avLst/>
+          </a:prstGeom>
+          <a:solidFill>
+            <a:srgbClr val="0C2340"/>
+          </a:solidFill>
+          <a:ln>
+            <a:noFill/>
+          </a:ln>
+          <a:effectLst/>
+        </p:spPr>
+        <p:style>
+          <a:lnRef idx="1">
+            <a:schemeClr val="accent1"/>
+          </a:lnRef>
+          <a:fillRef idx="3">
+            <a:schemeClr val="accent1"/>
+          </a:fillRef>
+          <a:effectRef idx="2">
+            <a:schemeClr val="accent1"/>
+          </a:effectRef>
+          <a:fontRef idx="minor">
+            <a:schemeClr val="lt1"/>
+          </a:fontRef>
+        </p:style>
+        <p:txBody>
+          <a:bodyPr rtlCol="0" anchor="ctr"/>
+          <a:lstStyle/>
+          <a:p>
+            <a:pPr algn="ctr"/>
+          </a:p>
+        </p:txBody>
+      </p:sp>
+      <p:sp>
+        <p:nvSpPr>
+          <p:cNvPr id="3" name="TextBox 2"/>
+          <p:cNvSpPr txBox="1"/>
+          <p:nvPr/>
+        </p:nvSpPr>
+        <p:spPr>
+          <a:xfrm>
+            <a:off x="640080" y="0"/>
+            <a:ext cx="9082735" cy="1188720"/>
+          </a:xfrm>
+          <a:prstGeom prst="rect">
+            <a:avLst/>
+          </a:prstGeom>
+          <a:noFill/>
+        </p:spPr>
+        <p:txBody>
+          <a:bodyPr wrap="square" anchor="ctr" lIns="0" rIns="0" tIns="0" bIns="0">
+            <a:spAutoFit/>
+          </a:bodyPr>
+          <a:lstStyle/>
+          <a:p>
+            <a:pPr algn="ctr"/>
+            <a:r>
+              <a:rPr sz="2600" b="1" i="0">
+                <a:solidFill>
+                  <a:srgbClr val="FFFFFF"/>
+                </a:solidFill>
+                <a:latin typeface="Calibri"/>
+              </a:rPr>
+              <a:t>Antes de la Sesión 02: lectura autónoma y qué traer</a:t>
+            </a:r>
+          </a:p>
+        </p:txBody>
+      </p:sp>
+      <p:sp>
+        <p:nvSpPr>
+          <p:cNvPr id="4" name="TextBox 3"/>
+          <p:cNvSpPr txBox="1"/>
+          <p:nvPr/>
+        </p:nvSpPr>
+        <p:spPr>
+          <a:xfrm>
+            <a:off x="640080" y="1691639"/>
+            <a:ext cx="10911535" cy="4617720"/>
+          </a:xfrm>
+          <a:prstGeom prst="rect">
+            <a:avLst/>
+          </a:prstGeom>
+          <a:noFill/>
+        </p:spPr>
+        <p:txBody>
+          <a:bodyPr wrap="square" anchor="t" lIns="0" rIns="0" tIns="0" bIns="0">
+            <a:spAutoFit/>
+          </a:bodyPr>
+          <a:lstStyle/>
+          <a:p>
+            <a:pPr>
+              <a:spcAft>
+                <a:spcPts val="1000"/>
+              </a:spcAft>
+            </a:pPr>
+            <a:r>
+              <a:rPr sz="1500" b="0" i="0">
+                <a:solidFill>
+                  <a:srgbClr val="2B2B2B"/>
+                </a:solidFill>
+                <a:latin typeface="Calibri"/>
+              </a:rPr>
+              <a:t>–   </a:t>
+            </a:r>
+            <a:r>
+              <a:rPr sz="1500" b="1" i="0">
+                <a:solidFill>
+                  <a:srgbClr val="2B2B2B"/>
+                </a:solidFill>
+                <a:latin typeface="Calibri"/>
+              </a:rPr>
+              <a:t>Lectura autónoma de esta semana:</a:t>
+            </a:r>
+            <a:r>
+              <a:rPr sz="1500" b="0" i="0">
+                <a:solidFill>
+                  <a:srgbClr val="2B2B2B"/>
+                </a:solidFill>
+                <a:latin typeface="Calibri"/>
+              </a:rPr>
+              <a:t> la unidad de </a:t>
+            </a:r>
+            <a:r>
+              <a:rPr sz="1500" b="1" i="0">
+                <a:solidFill>
+                  <a:srgbClr val="2B2B2B"/>
+                </a:solidFill>
+                <a:latin typeface="Calibri"/>
+              </a:rPr>
+              <a:t>fundamentos y enfoque de investigación (U1 del programa)</a:t>
+            </a:r>
+            <a:r>
+              <a:rPr sz="1500" b="0" i="0">
+                <a:solidFill>
+                  <a:srgbClr val="2B2B2B"/>
+                </a:solidFill>
+                <a:latin typeface="Calibri"/>
+              </a:rPr>
+              <a:t>.</a:t>
+            </a:r>
+          </a:p>
+          <a:p>
+            <a:pPr lvl="1">
+              <a:spcAft>
+                <a:spcPts val="600"/>
+              </a:spcAft>
+            </a:pPr>
+            <a:r>
+              <a:rPr sz="1400" b="0" i="0">
+                <a:solidFill>
+                  <a:srgbClr val="2B2B2B"/>
+                </a:solidFill>
+                <a:latin typeface="Calibri"/>
+              </a:rPr>
+              <a:t>●   Está en el documento del curso publicado en CDigital. Hoy no la dictamos: la leen ustedes y la retomamos al abrir la Sesión 02.</a:t>
+            </a:r>
+          </a:p>
+          <a:p>
+            <a:pPr lvl="1">
+              <a:spcAft>
+                <a:spcPts val="600"/>
+              </a:spcAft>
+            </a:pPr>
+            <a:r>
+              <a:rPr sz="1400" b="0" i="0">
+                <a:solidFill>
+                  <a:srgbClr val="2B2B2B"/>
+                </a:solidFill>
+                <a:latin typeface="Calibri"/>
+              </a:rPr>
+              <a:t>●   Mientras leen, anoten </a:t>
+            </a:r>
+            <a:r>
+              <a:rPr sz="1400" b="1" i="0">
+                <a:solidFill>
+                  <a:srgbClr val="2B2B2B"/>
+                </a:solidFill>
+                <a:latin typeface="Calibri"/>
+              </a:rPr>
+              <a:t>tres términos</a:t>
+            </a:r>
+            <a:r>
+              <a:rPr sz="1400" b="0" i="0">
+                <a:solidFill>
+                  <a:srgbClr val="2B2B2B"/>
+                </a:solidFill>
+                <a:latin typeface="Calibri"/>
+              </a:rPr>
+              <a:t> que no les queden claros. Con esos tres arrancamos la próxima clase.</a:t>
+            </a:r>
+          </a:p>
+          <a:p>
+            <a:pPr>
+              <a:spcAft>
+                <a:spcPts val="1000"/>
+              </a:spcAft>
+            </a:pPr>
+            <a:r>
+              <a:rPr sz="1500" b="0" i="0">
+                <a:solidFill>
+                  <a:srgbClr val="2B2B2B"/>
+                </a:solidFill>
+                <a:latin typeface="Calibri"/>
+              </a:rPr>
+              <a:t>–   </a:t>
+            </a:r>
+            <a:r>
+              <a:rPr sz="1500" b="1" i="0">
+                <a:solidFill>
+                  <a:srgbClr val="2B2B2B"/>
+                </a:solidFill>
+                <a:latin typeface="Calibri"/>
+              </a:rPr>
+              <a:t>Confirmen su equipo</a:t>
+            </a:r>
+            <a:r>
+              <a:rPr sz="1500" b="0" i="0">
+                <a:solidFill>
+                  <a:srgbClr val="2B2B2B"/>
+                </a:solidFill>
+                <a:latin typeface="Calibri"/>
+              </a:rPr>
+              <a:t> (máximo 3 personas) y avísenlo. Si aún no tienen con quién, díganlo esta semana y el Docente ayuda a armarlo.</a:t>
+            </a:r>
+          </a:p>
+          <a:p>
+            <a:pPr>
+              <a:spcAft>
+                <a:spcPts val="1000"/>
+              </a:spcAft>
+            </a:pPr>
+            <a:r>
+              <a:rPr sz="1500" b="0" i="0">
+                <a:solidFill>
+                  <a:srgbClr val="2B2B2B"/>
+                </a:solidFill>
+                <a:latin typeface="Calibri"/>
+              </a:rPr>
+              <a:t>–   </a:t>
+            </a:r>
+            <a:r>
+              <a:rPr sz="1500" b="1" i="0">
+                <a:solidFill>
+                  <a:srgbClr val="2B2B2B"/>
+                </a:solidFill>
+                <a:latin typeface="Calibri"/>
+              </a:rPr>
+              <a:t>Abran el enunciado de la ACA 1</a:t>
+            </a:r>
+            <a:r>
+              <a:rPr sz="1500" b="0" i="0">
+                <a:solidFill>
+                  <a:srgbClr val="2B2B2B"/>
+                </a:solidFill>
+                <a:latin typeface="Calibri"/>
+              </a:rPr>
+              <a:t> en `Clases/Recursos/ACAs/` y léanlo completo, incluida la lista de criterios.</a:t>
+            </a:r>
+          </a:p>
+          <a:p>
+            <a:pPr>
+              <a:spcAft>
+                <a:spcPts val="1000"/>
+              </a:spcAft>
+            </a:pPr>
+            <a:r>
+              <a:rPr sz="1500" b="0" i="0">
+                <a:solidFill>
+                  <a:srgbClr val="2B2B2B"/>
+                </a:solidFill>
+                <a:latin typeface="Calibri"/>
+              </a:rPr>
+              <a:t>–   </a:t>
+            </a:r>
+            <a:r>
+              <a:rPr sz="1500" b="1" i="0">
+                <a:solidFill>
+                  <a:srgbClr val="2B2B2B"/>
+                </a:solidFill>
+                <a:latin typeface="Calibri"/>
+              </a:rPr>
+              <a:t>Creen el documento del equipo</a:t>
+            </a:r>
+            <a:r>
+              <a:rPr sz="1500" b="0" i="0">
+                <a:solidFill>
+                  <a:srgbClr val="2B2B2B"/>
+                </a:solidFill>
+                <a:latin typeface="Calibri"/>
+              </a:rPr>
+              <a:t> en Google Docs con la plantilla APA CUN y compártanlo con todos los integrantes.</a:t>
+            </a:r>
+          </a:p>
+          <a:p>
+            <a:pPr>
+              <a:spcAft>
+                <a:spcPts val="1000"/>
+              </a:spcAft>
+            </a:pPr>
+            <a:r>
+              <a:rPr sz="1500" b="0" i="0">
+                <a:solidFill>
+                  <a:srgbClr val="2B2B2B"/>
+                </a:solidFill>
+                <a:latin typeface="Calibri"/>
+              </a:rPr>
+              <a:t>–   </a:t>
+            </a:r>
+            <a:r>
+              <a:rPr sz="1500" b="1" i="0">
+                <a:solidFill>
+                  <a:srgbClr val="2B2B2B"/>
+                </a:solidFill>
+                <a:latin typeface="Calibri"/>
+              </a:rPr>
+              <a:t>Traigan a la Sesión 02</a:t>
+            </a:r>
+            <a:r>
+              <a:rPr sz="1500" b="0" i="0">
+                <a:solidFill>
+                  <a:srgbClr val="2B2B2B"/>
+                </a:solidFill>
+                <a:latin typeface="Calibri"/>
+              </a:rPr>
+              <a:t> una idea de tema escrita </a:t>
+            </a:r>
+            <a:r>
+              <a:rPr sz="1500" b="1" i="0">
+                <a:solidFill>
+                  <a:srgbClr val="2B2B2B"/>
+                </a:solidFill>
+                <a:latin typeface="Calibri"/>
+              </a:rPr>
+              <a:t>en una frase</a:t>
+            </a:r>
+            <a:r>
+              <a:rPr sz="1500" b="0" i="0">
+                <a:solidFill>
+                  <a:srgbClr val="2B2B2B"/>
+                </a:solidFill>
+                <a:latin typeface="Calibri"/>
+              </a:rPr>
+              <a:t> y el contexto donde ocurre (empresa, aula, proceso).</a:t>
+            </a:r>
+          </a:p>
+          <a:p>
+            <a:pPr lvl="1">
+              <a:spcAft>
+                <a:spcPts val="600"/>
+              </a:spcAft>
+            </a:pPr>
+            <a:r>
+              <a:rPr sz="1400" b="0" i="0">
+                <a:solidFill>
+                  <a:srgbClr val="2B2B2B"/>
+                </a:solidFill>
+                <a:latin typeface="Calibri"/>
+              </a:rPr>
+              <a:t>●   Con eso trabajamos en clase. Quien llegue sin la frase se pasará la sesión viendo trabajar a los demás.</a:t>
+            </a:r>
+          </a:p>
+        </p:txBody>
+      </p:sp>
+      <p:sp>
+        <p:nvSpPr>
+          <p:cNvPr id="5" name="TextBox 4"/>
+          <p:cNvSpPr txBox="1"/>
+          <p:nvPr/>
+        </p:nvSpPr>
+        <p:spPr>
+          <a:xfrm>
+            <a:off x="2194560" y="6446520"/>
+            <a:ext cx="5943600" cy="274320"/>
+          </a:xfrm>
+          <a:prstGeom prst="rect">
+            <a:avLst/>
+          </a:prstGeom>
+          <a:noFill/>
+        </p:spPr>
+        <p:txBody>
+          <a:bodyPr wrap="square" anchor="t" lIns="0" rIns="0" tIns="0" bIns="0">
+            <a:spAutoFit/>
+          </a:bodyPr>
+          <a:lstStyle/>
+          <a:p>
+            <a:pPr algn="l"/>
+            <a:r>
+              <a:rPr sz="1000" b="1" i="0">
+                <a:solidFill>
+                  <a:srgbClr val="8F989D"/>
+                </a:solidFill>
+                <a:latin typeface="Calibri"/>
+              </a:rPr>
+              <a:t>Inicio 8:10 pm</a:t>
+            </a:r>
+          </a:p>
+        </p:txBody>
+      </p:sp>
+      <p:sp>
+        <p:nvSpPr>
+          <p:cNvPr id="6" name="TextBox 5"/>
+          <p:cNvSpPr txBox="1"/>
+          <p:nvPr/>
+        </p:nvSpPr>
+        <p:spPr>
+          <a:xfrm>
+            <a:off x="11094415" y="6446520"/>
+            <a:ext cx="548640" cy="274320"/>
+          </a:xfrm>
+          <a:prstGeom prst="rect">
+            <a:avLst/>
+          </a:prstGeom>
+          <a:noFill/>
+        </p:spPr>
+        <p:txBody>
+          <a:bodyPr wrap="square" anchor="t" lIns="0" rIns="0" tIns="0" bIns="0">
+            <a:spAutoFit/>
+          </a:bodyPr>
+          <a:lstStyle/>
+          <a:p>
+            <a:pPr algn="r"/>
+            <a:r>
+              <a:rPr sz="1000" b="1" i="0">
+                <a:solidFill>
+                  <a:srgbClr val="8F989D"/>
+                </a:solidFill>
+                <a:latin typeface="Calibri"/>
+              </a:rPr>
+              <a:t>17</a:t>
+            </a:r>
+          </a:p>
+        </p:txBody>
+      </p:sp>
+      <p:sp>
+        <p:nvSpPr>
+          <p:cNvPr id="7" name="TextBox 6"/>
+          <p:cNvSpPr txBox="1"/>
+          <p:nvPr/>
+        </p:nvSpPr>
+        <p:spPr>
+          <a:xfrm>
+            <a:off x="640080" y="5943600"/>
+            <a:ext cx="9997135" cy="457200"/>
+          </a:xfrm>
+          <a:prstGeom prst="rect">
+            <a:avLst/>
+          </a:prstGeom>
+          <a:noFill/>
+        </p:spPr>
+        <p:txBody>
+          <a:bodyPr wrap="square" anchor="t" lIns="0" rIns="0" tIns="0" bIns="0">
+            <a:spAutoFit/>
+          </a:bodyPr>
+          <a:lstStyle/>
+          <a:p>
+            <a:r>
+              <a:rPr sz="1200" b="0" i="1">
+                <a:solidFill>
+                  <a:srgbClr val="2B2B2B"/>
+                </a:solidFill>
+                <a:latin typeface="Calibri"/>
+              </a:rPr>
+              <a:t>Nada de esto se califica hoy, pero todo se nota en la Sesión 02: la clase avanza sobre lo que ustedes traigan escrito.</a:t>
+            </a:r>
+          </a:p>
+        </p:txBody>
+      </p:sp>
+    </p:spTree>
+  </p:cSld>
+  <p:clrMapOvr>
+    <a:masterClrMapping/>
+  </p:clrMapOvr>
+</p:sld>
+</file>
+
+<file path=ppt/slides/slide18.xml><?xml version="1.0" encoding="utf-8"?>
+<p:sld xmlns:a="http://schemas.openxmlformats.org/drawingml/2006/main" xmlns:p="http://schemas.openxmlformats.org/presentationml/2006/main" xmlns:r="http://schemas.openxmlformats.org/officeDocument/2006/relationships">
+  <p:cSld>
+    <p:bg>
+      <p:bgPr>
+        <a:solidFill>
+          <a:srgbClr val="FFFFFF"/>
+        </a:solidFill>
+        <a:effectLst/>
+      </p:bgPr>
+    </p:bg>
+    <p:spTree>
+      <p:nvGrpSpPr>
+        <p:cNvPr id="1" name=""/>
+        <p:cNvGrpSpPr/>
+        <p:nvPr/>
+      </p:nvGrpSpPr>
+      <p:grpSpPr/>
+      <p:sp>
+        <p:nvSpPr>
+          <p:cNvPr id="2" name="Rectangle 1"/>
+          <p:cNvSpPr/>
+          <p:nvPr/>
+        </p:nvSpPr>
+        <p:spPr>
+          <a:xfrm>
+            <a:off x="0" y="0"/>
+            <a:ext cx="12191695" cy="1188720"/>
+          </a:xfrm>
+          <a:prstGeom prst="rect">
+            <a:avLst/>
+          </a:prstGeom>
+          <a:solidFill>
+            <a:srgbClr val="0C2340"/>
+          </a:solidFill>
+          <a:ln>
+            <a:noFill/>
+          </a:ln>
+          <a:effectLst/>
+        </p:spPr>
+        <p:style>
+          <a:lnRef idx="1">
+            <a:schemeClr val="accent1"/>
+          </a:lnRef>
+          <a:fillRef idx="3">
+            <a:schemeClr val="accent1"/>
+          </a:fillRef>
+          <a:effectRef idx="2">
+            <a:schemeClr val="accent1"/>
+          </a:effectRef>
+          <a:fontRef idx="minor">
+            <a:schemeClr val="lt1"/>
+          </a:fontRef>
+        </p:style>
+        <p:txBody>
+          <a:bodyPr rtlCol="0" anchor="ctr"/>
+          <a:lstStyle/>
+          <a:p>
+            <a:pPr algn="ctr"/>
+          </a:p>
+        </p:txBody>
+      </p:sp>
+      <p:sp>
+        <p:nvSpPr>
+          <p:cNvPr id="3" name="TextBox 2"/>
+          <p:cNvSpPr txBox="1"/>
+          <p:nvPr/>
+        </p:nvSpPr>
+        <p:spPr>
+          <a:xfrm>
+            <a:off x="640080" y="0"/>
+            <a:ext cx="9082735" cy="1188720"/>
+          </a:xfrm>
+          <a:prstGeom prst="rect">
+            <a:avLst/>
+          </a:prstGeom>
+          <a:noFill/>
+        </p:spPr>
+        <p:txBody>
+          <a:bodyPr wrap="square" anchor="ctr" lIns="0" rIns="0" tIns="0" bIns="0">
+            <a:spAutoFit/>
+          </a:bodyPr>
+          <a:lstStyle/>
+          <a:p>
+            <a:pPr algn="ctr"/>
+            <a:r>
+              <a:rPr sz="2600" b="1" i="0">
+                <a:solidFill>
+                  <a:srgbClr val="FFFFFF"/>
+                </a:solidFill>
+                <a:latin typeface="Calibri"/>
+              </a:rPr>
+              <a:t>Las preguntas que siempre salen el primer día</a:t>
+            </a:r>
+          </a:p>
+        </p:txBody>
+      </p:sp>
+      <p:sp>
+        <p:nvSpPr>
+          <p:cNvPr id="4" name="Rounded Rectangle 3"/>
+          <p:cNvSpPr/>
+          <p:nvPr/>
+        </p:nvSpPr>
+        <p:spPr>
+          <a:xfrm>
+            <a:off x="640080" y="1737360"/>
+            <a:ext cx="10911535" cy="1225296"/>
+          </a:xfrm>
+          <a:prstGeom prst="roundRect">
+            <a:avLst/>
+          </a:prstGeom>
+          <a:solidFill>
+            <a:srgbClr val="E8F5EC"/>
+          </a:solidFill>
+          <a:ln>
+            <a:noFill/>
+          </a:ln>
+          <a:effectLst/>
+        </p:spPr>
+        <p:style>
+          <a:lnRef idx="1">
+            <a:schemeClr val="accent1"/>
+          </a:lnRef>
+          <a:fillRef idx="3">
+            <a:schemeClr val="accent1"/>
+          </a:fillRef>
+          <a:effectRef idx="2">
+            <a:schemeClr val="accent1"/>
+          </a:effectRef>
+          <a:fontRef idx="minor">
+            <a:schemeClr val="lt1"/>
+          </a:fontRef>
+        </p:style>
+        <p:txBody>
+          <a:bodyPr rtlCol="0" anchor="ctr"/>
+          <a:lstStyle/>
+          <a:p>
+            <a:pPr algn="ctr"/>
+          </a:p>
+        </p:txBody>
+      </p:sp>
+      <p:sp>
+        <p:nvSpPr>
+          <p:cNvPr id="5" name="TextBox 4"/>
+          <p:cNvSpPr txBox="1"/>
+          <p:nvPr/>
+        </p:nvSpPr>
+        <p:spPr>
+          <a:xfrm>
+            <a:off x="868680" y="1847088"/>
+            <a:ext cx="10454335" cy="1005840"/>
+          </a:xfrm>
+          <a:prstGeom prst="rect">
+            <a:avLst/>
+          </a:prstGeom>
+          <a:noFill/>
+        </p:spPr>
+        <p:txBody>
+          <a:bodyPr wrap="square" anchor="t" lIns="0" rIns="0" tIns="0" bIns="0">
+            <a:spAutoFit/>
+          </a:bodyPr>
+          <a:lstStyle/>
+          <a:p>
+            <a:r>
+              <a:rPr sz="1300" b="1" i="0">
+                <a:solidFill>
+                  <a:srgbClr val="0C2340"/>
+                </a:solidFill>
+                <a:latin typeface="Calibri"/>
+              </a:rPr>
+              <a:t>ℹ️ Nota institucional</a:t>
+            </a:r>
+          </a:p>
+          <a:p>
+            <a:pPr>
+              <a:spcBef>
+                <a:spcPts val="400"/>
+              </a:spcBef>
+            </a:pPr>
+            <a:r>
+              <a:rPr sz="1300" b="1" i="0">
+                <a:solidFill>
+                  <a:srgbClr val="2B2B2B"/>
+                </a:solidFill>
+                <a:latin typeface="Calibri"/>
+              </a:rPr>
+              <a:t>«¿Esta materia se pierde fácil?»</a:t>
+            </a:r>
+            <a:r>
+              <a:rPr sz="1300" b="0" i="0">
+                <a:solidFill>
+                  <a:srgbClr val="2B2B2B"/>
+                </a:solidFill>
+                <a:latin typeface="Calibri"/>
+              </a:rPr>
+              <a:t> No se pierde por dificultad: se pierde por entregar tarde o por entregar un documento que nadie leyó antes de subirlo. Quien trae avance cada semana llega al final con el anteproyecto prácticamente listo.</a:t>
+            </a:r>
+          </a:p>
+        </p:txBody>
+      </p:sp>
+      <p:sp>
+        <p:nvSpPr>
+          <p:cNvPr id="6" name="Rounded Rectangle 5"/>
+          <p:cNvSpPr/>
+          <p:nvPr/>
+        </p:nvSpPr>
+        <p:spPr>
+          <a:xfrm>
+            <a:off x="640080" y="3191256"/>
+            <a:ext cx="10911535" cy="1225296"/>
+          </a:xfrm>
+          <a:prstGeom prst="roundRect">
+            <a:avLst/>
+          </a:prstGeom>
+          <a:solidFill>
+            <a:srgbClr val="FDECD8"/>
+          </a:solidFill>
+          <a:ln>
+            <a:noFill/>
+          </a:ln>
+          <a:effectLst/>
+        </p:spPr>
+        <p:style>
+          <a:lnRef idx="1">
+            <a:schemeClr val="accent1"/>
+          </a:lnRef>
+          <a:fillRef idx="3">
+            <a:schemeClr val="accent1"/>
+          </a:fillRef>
+          <a:effectRef idx="2">
+            <a:schemeClr val="accent1"/>
+          </a:effectRef>
+          <a:fontRef idx="minor">
+            <a:schemeClr val="lt1"/>
+          </a:fontRef>
+        </p:style>
+        <p:txBody>
+          <a:bodyPr rtlCol="0" anchor="ctr"/>
+          <a:lstStyle/>
+          <a:p>
+            <a:pPr algn="ctr"/>
+          </a:p>
+        </p:txBody>
+      </p:sp>
+      <p:sp>
+        <p:nvSpPr>
+          <p:cNvPr id="7" name="TextBox 6"/>
+          <p:cNvSpPr txBox="1"/>
+          <p:nvPr/>
+        </p:nvSpPr>
+        <p:spPr>
+          <a:xfrm>
+            <a:off x="868680" y="3300984"/>
+            <a:ext cx="10454335" cy="1005840"/>
+          </a:xfrm>
+          <a:prstGeom prst="rect">
+            <a:avLst/>
+          </a:prstGeom>
+          <a:noFill/>
+        </p:spPr>
+        <p:txBody>
+          <a:bodyPr wrap="square" anchor="t" lIns="0" rIns="0" tIns="0" bIns="0">
+            <a:spAutoFit/>
+          </a:bodyPr>
+          <a:lstStyle/>
+          <a:p>
+            <a:r>
+              <a:rPr sz="1300" b="1" i="0">
+                <a:solidFill>
+                  <a:srgbClr val="0C2340"/>
+                </a:solidFill>
+                <a:latin typeface="Calibri"/>
+              </a:rPr>
+              <a:t>💡 Aclaración</a:t>
+            </a:r>
+          </a:p>
+          <a:p>
+            <a:pPr>
+              <a:spcBef>
+                <a:spcPts val="400"/>
+              </a:spcBef>
+            </a:pPr>
+            <a:r>
+              <a:rPr sz="1300" b="1" i="0">
+                <a:solidFill>
+                  <a:srgbClr val="2B2B2B"/>
+                </a:solidFill>
+                <a:latin typeface="Calibri"/>
+              </a:rPr>
+              <a:t>«¿Puedo trabajar solo?»</a:t>
+            </a:r>
+            <a:r>
+              <a:rPr sz="1300" b="0" i="0">
+                <a:solidFill>
+                  <a:srgbClr val="2B2B2B"/>
+                </a:solidFill>
+                <a:latin typeface="Calibri"/>
+              </a:rPr>
+              <a:t> Sí, pero el equipo es de máximo 3 y la carga de trabajo es la misma para uno que para tres. Decídanlo esta semana: después de la ACA 1 no conviene cambiar de equipo ni de tema.</a:t>
+            </a:r>
+          </a:p>
+        </p:txBody>
+      </p:sp>
+      <p:sp>
+        <p:nvSpPr>
+          <p:cNvPr id="8" name="Rounded Rectangle 7"/>
+          <p:cNvSpPr/>
+          <p:nvPr/>
+        </p:nvSpPr>
+        <p:spPr>
+          <a:xfrm>
+            <a:off x="640080" y="4645152"/>
+            <a:ext cx="10911535" cy="1225296"/>
+          </a:xfrm>
+          <a:prstGeom prst="roundRect">
+            <a:avLst/>
+          </a:prstGeom>
+          <a:solidFill>
+            <a:srgbClr val="FBE4E4"/>
+          </a:solidFill>
+          <a:ln>
+            <a:noFill/>
+          </a:ln>
+          <a:effectLst/>
+        </p:spPr>
+        <p:style>
+          <a:lnRef idx="1">
+            <a:schemeClr val="accent1"/>
+          </a:lnRef>
+          <a:fillRef idx="3">
+            <a:schemeClr val="accent1"/>
+          </a:fillRef>
+          <a:effectRef idx="2">
+            <a:schemeClr val="accent1"/>
+          </a:effectRef>
+          <a:fontRef idx="minor">
+            <a:schemeClr val="lt1"/>
+          </a:fontRef>
+        </p:style>
+        <p:txBody>
+          <a:bodyPr rtlCol="0" anchor="ctr"/>
+          <a:lstStyle/>
+          <a:p>
+            <a:pPr algn="ctr"/>
+          </a:p>
+        </p:txBody>
+      </p:sp>
+      <p:sp>
+        <p:nvSpPr>
+          <p:cNvPr id="9" name="TextBox 8"/>
+          <p:cNvSpPr txBox="1"/>
+          <p:nvPr/>
+        </p:nvSpPr>
+        <p:spPr>
+          <a:xfrm>
+            <a:off x="868680" y="4754880"/>
+            <a:ext cx="10454335" cy="1005840"/>
+          </a:xfrm>
+          <a:prstGeom prst="rect">
+            <a:avLst/>
+          </a:prstGeom>
+          <a:noFill/>
+        </p:spPr>
+        <p:txBody>
+          <a:bodyPr wrap="square" anchor="t" lIns="0" rIns="0" tIns="0" bIns="0">
+            <a:spAutoFit/>
+          </a:bodyPr>
+          <a:lstStyle/>
+          <a:p>
+            <a:r>
+              <a:rPr sz="1300" b="1" i="0">
+                <a:solidFill>
+                  <a:srgbClr val="0C2340"/>
+                </a:solidFill>
+                <a:latin typeface="Calibri"/>
+              </a:rPr>
+              <a:t>⚠️ Importante</a:t>
+            </a:r>
+          </a:p>
+          <a:p>
+            <a:pPr>
+              <a:spcBef>
+                <a:spcPts val="400"/>
+              </a:spcBef>
+            </a:pPr>
+            <a:r>
+              <a:rPr sz="1300" b="1" i="0">
+                <a:solidFill>
+                  <a:srgbClr val="2B2B2B"/>
+                </a:solidFill>
+                <a:latin typeface="Calibri"/>
+              </a:rPr>
+              <a:t>«¿Sirve un trabajo de otro semestre?»</a:t>
+            </a:r>
+            <a:r>
+              <a:rPr sz="1300" b="0" i="0">
+                <a:solidFill>
+                  <a:srgbClr val="2B2B2B"/>
+                </a:solidFill>
+                <a:latin typeface="Calibri"/>
+              </a:rPr>
+              <a:t> Como punto de partida sí, si usted lo declara y lo reformula para este curso. Entregarlo tal cual como si fuera nuevo también es plagio y entra en el mismo debido proceso.</a:t>
+            </a:r>
+          </a:p>
+        </p:txBody>
+      </p:sp>
+      <p:sp>
+        <p:nvSpPr>
+          <p:cNvPr id="10" name="TextBox 9"/>
+          <p:cNvSpPr txBox="1"/>
+          <p:nvPr/>
+        </p:nvSpPr>
+        <p:spPr>
+          <a:xfrm>
+            <a:off x="2194560" y="6446520"/>
+            <a:ext cx="5943600" cy="274320"/>
+          </a:xfrm>
+          <a:prstGeom prst="rect">
+            <a:avLst/>
+          </a:prstGeom>
+          <a:noFill/>
+        </p:spPr>
+        <p:txBody>
+          <a:bodyPr wrap="square" anchor="t" lIns="0" rIns="0" tIns="0" bIns="0">
+            <a:spAutoFit/>
+          </a:bodyPr>
+          <a:lstStyle/>
+          <a:p>
+            <a:pPr algn="l"/>
+            <a:r>
+              <a:rPr sz="1000" b="1" i="0">
+                <a:solidFill>
+                  <a:srgbClr val="8F989D"/>
+                </a:solidFill>
+                <a:latin typeface="Calibri"/>
+              </a:rPr>
+              <a:t>Inicio 8:10 pm</a:t>
+            </a:r>
+          </a:p>
+        </p:txBody>
+      </p:sp>
+      <p:sp>
+        <p:nvSpPr>
+          <p:cNvPr id="11" name="TextBox 10"/>
+          <p:cNvSpPr txBox="1"/>
+          <p:nvPr/>
+        </p:nvSpPr>
+        <p:spPr>
+          <a:xfrm>
+            <a:off x="11094415" y="6446520"/>
+            <a:ext cx="548640" cy="274320"/>
+          </a:xfrm>
+          <a:prstGeom prst="rect">
+            <a:avLst/>
+          </a:prstGeom>
+          <a:noFill/>
+        </p:spPr>
+        <p:txBody>
+          <a:bodyPr wrap="square" anchor="t" lIns="0" rIns="0" tIns="0" bIns="0">
+            <a:spAutoFit/>
+          </a:bodyPr>
+          <a:lstStyle/>
+          <a:p>
+            <a:pPr algn="r"/>
+            <a:r>
+              <a:rPr sz="1000" b="1" i="0">
+                <a:solidFill>
+                  <a:srgbClr val="8F989D"/>
+                </a:solidFill>
+                <a:latin typeface="Calibri"/>
+              </a:rPr>
+              <a:t>18</a:t>
+            </a:r>
+          </a:p>
+        </p:txBody>
+      </p:sp>
+    </p:spTree>
+  </p:cSld>
+  <p:clrMapOvr>
+    <a:masterClrMapping/>
+  </p:clrMapOvr>
+</p:sld>
+</file>
+
+<file path=ppt/slides/slide19.xml><?xml version="1.0" encoding="utf-8"?>
+<p:sld xmlns:a="http://schemas.openxmlformats.org/drawingml/2006/main" xmlns:p="http://schemas.openxmlformats.org/presentationml/2006/main" xmlns:r="http://schemas.openxmlformats.org/officeDocument/2006/relationships">
+  <p:cSld>
+    <p:bg>
+      <p:bgPr>
+        <a:solidFill>
+          <a:srgbClr val="FFFFFF"/>
+        </a:solidFill>
+        <a:effectLst/>
+      </p:bgPr>
+    </p:bg>
+    <p:spTree>
+      <p:nvGrpSpPr>
+        <p:cNvPr id="1" name=""/>
+        <p:cNvGrpSpPr/>
+        <p:nvPr/>
+      </p:nvGrpSpPr>
+      <p:grpSpPr/>
+      <p:sp>
+        <p:nvSpPr>
+          <p:cNvPr id="2" name="Rectangle 1"/>
+          <p:cNvSpPr/>
+          <p:nvPr/>
+        </p:nvSpPr>
+        <p:spPr>
+          <a:xfrm>
+            <a:off x="0" y="0"/>
+            <a:ext cx="12191695" cy="1188720"/>
+          </a:xfrm>
+          <a:prstGeom prst="rect">
+            <a:avLst/>
+          </a:prstGeom>
+          <a:solidFill>
+            <a:srgbClr val="0C2340"/>
+          </a:solidFill>
+          <a:ln>
+            <a:noFill/>
+          </a:ln>
+          <a:effectLst/>
+        </p:spPr>
+        <p:style>
+          <a:lnRef idx="1">
+            <a:schemeClr val="accent1"/>
+          </a:lnRef>
+          <a:fillRef idx="3">
+            <a:schemeClr val="accent1"/>
+          </a:fillRef>
+          <a:effectRef idx="2">
+            <a:schemeClr val="accent1"/>
+          </a:effectRef>
+          <a:fontRef idx="minor">
+            <a:schemeClr val="lt1"/>
+          </a:fontRef>
+        </p:style>
+        <p:txBody>
+          <a:bodyPr rtlCol="0" anchor="ctr"/>
+          <a:lstStyle/>
+          <a:p>
+            <a:pPr algn="ctr"/>
+          </a:p>
+        </p:txBody>
+      </p:sp>
+      <p:sp>
+        <p:nvSpPr>
+          <p:cNvPr id="3" name="TextBox 2"/>
+          <p:cNvSpPr txBox="1"/>
+          <p:nvPr/>
+        </p:nvSpPr>
+        <p:spPr>
+          <a:xfrm>
+            <a:off x="640080" y="0"/>
+            <a:ext cx="9082735" cy="1188720"/>
+          </a:xfrm>
+          <a:prstGeom prst="rect">
+            <a:avLst/>
+          </a:prstGeom>
+          <a:noFill/>
+        </p:spPr>
+        <p:txBody>
+          <a:bodyPr wrap="square" anchor="ctr" lIns="0" rIns="0" tIns="0" bIns="0">
+            <a:spAutoFit/>
+          </a:bodyPr>
+          <a:lstStyle/>
+          <a:p>
+            <a:pPr algn="ctr"/>
+            <a:r>
+              <a:rPr sz="2600" b="1" i="0">
+                <a:solidFill>
+                  <a:srgbClr val="FFFFFF"/>
+                </a:solidFill>
+                <a:latin typeface="Calibri"/>
+              </a:rPr>
+              <a:t>ACUERDOS DE TRABAJO</a:t>
+            </a:r>
+          </a:p>
+        </p:txBody>
+      </p:sp>
+      <p:sp>
+        <p:nvSpPr>
+          <p:cNvPr id="4" name="Rounded Rectangle 3"/>
+          <p:cNvSpPr/>
+          <p:nvPr/>
+        </p:nvSpPr>
+        <p:spPr>
+          <a:xfrm>
+            <a:off x="640080" y="1737360"/>
+            <a:ext cx="10911535" cy="713232"/>
+          </a:xfrm>
+          <a:prstGeom prst="roundRect">
+            <a:avLst/>
+          </a:prstGeom>
+          <a:solidFill>
+            <a:srgbClr val="E8F5EC"/>
+          </a:solidFill>
+          <a:ln>
+            <a:noFill/>
+          </a:ln>
+          <a:effectLst/>
+        </p:spPr>
+        <p:style>
+          <a:lnRef idx="1">
+            <a:schemeClr val="accent1"/>
+          </a:lnRef>
+          <a:fillRef idx="3">
+            <a:schemeClr val="accent1"/>
+          </a:fillRef>
+          <a:effectRef idx="2">
+            <a:schemeClr val="accent1"/>
+          </a:effectRef>
+          <a:fontRef idx="minor">
+            <a:schemeClr val="lt1"/>
+          </a:fontRef>
+        </p:style>
+        <p:txBody>
+          <a:bodyPr rtlCol="0" anchor="ctr"/>
+          <a:lstStyle/>
+          <a:p>
+            <a:pPr algn="ctr"/>
+          </a:p>
+        </p:txBody>
+      </p:sp>
+      <p:sp>
+        <p:nvSpPr>
+          <p:cNvPr id="5" name="TextBox 4"/>
+          <p:cNvSpPr txBox="1"/>
+          <p:nvPr/>
+        </p:nvSpPr>
+        <p:spPr>
+          <a:xfrm>
+            <a:off x="868680" y="1847088"/>
+            <a:ext cx="10454335" cy="493776"/>
+          </a:xfrm>
+          <a:prstGeom prst="rect">
+            <a:avLst/>
+          </a:prstGeom>
+          <a:noFill/>
+        </p:spPr>
+        <p:txBody>
+          <a:bodyPr wrap="square" anchor="t" lIns="0" rIns="0" tIns="0" bIns="0">
+            <a:spAutoFit/>
+          </a:bodyPr>
+          <a:lstStyle/>
+          <a:p>
+            <a:r>
+              <a:rPr sz="1300" b="1" i="0">
+                <a:solidFill>
+                  <a:srgbClr val="0C2340"/>
+                </a:solidFill>
+                <a:latin typeface="Calibri"/>
+              </a:rPr>
+              <a:t>ℹ️ Nota institucional</a:t>
+            </a:r>
+          </a:p>
+          <a:p>
+            <a:pPr>
+              <a:spcBef>
+                <a:spcPts val="400"/>
+              </a:spcBef>
+            </a:pPr>
+            <a:r>
+              <a:rPr sz="1300" b="1" i="0">
+                <a:solidFill>
+                  <a:srgbClr val="2B2B2B"/>
+                </a:solidFill>
+                <a:latin typeface="Calibri"/>
+              </a:rPr>
+              <a:t>Entrega oficial: CDigital.</a:t>
+            </a:r>
+            <a:r>
+              <a:rPr sz="1300" b="0" i="0">
+                <a:solidFill>
+                  <a:srgbClr val="2B2B2B"/>
+                </a:solidFill>
+                <a:latin typeface="Calibri"/>
+              </a:rPr>
+              <a:t> Lo que no esté ahí, no está entregado.</a:t>
+            </a:r>
+          </a:p>
+        </p:txBody>
+      </p:sp>
+      <p:sp>
+        <p:nvSpPr>
+          <p:cNvPr id="6" name="Rounded Rectangle 5"/>
+          <p:cNvSpPr/>
+          <p:nvPr/>
+        </p:nvSpPr>
+        <p:spPr>
+          <a:xfrm>
+            <a:off x="640080" y="2679191"/>
+            <a:ext cx="10911535" cy="969264"/>
+          </a:xfrm>
+          <a:prstGeom prst="roundRect">
+            <a:avLst/>
+          </a:prstGeom>
+          <a:solidFill>
+            <a:srgbClr val="FDECD8"/>
+          </a:solidFill>
+          <a:ln>
+            <a:noFill/>
+          </a:ln>
+          <a:effectLst/>
+        </p:spPr>
+        <p:style>
+          <a:lnRef idx="1">
+            <a:schemeClr val="accent1"/>
+          </a:lnRef>
+          <a:fillRef idx="3">
+            <a:schemeClr val="accent1"/>
+          </a:fillRef>
+          <a:effectRef idx="2">
+            <a:schemeClr val="accent1"/>
+          </a:effectRef>
+          <a:fontRef idx="minor">
+            <a:schemeClr val="lt1"/>
+          </a:fontRef>
+        </p:style>
+        <p:txBody>
+          <a:bodyPr rtlCol="0" anchor="ctr"/>
+          <a:lstStyle/>
+          <a:p>
+            <a:pPr algn="ctr"/>
+          </a:p>
+        </p:txBody>
+      </p:sp>
+      <p:sp>
+        <p:nvSpPr>
+          <p:cNvPr id="7" name="TextBox 6"/>
+          <p:cNvSpPr txBox="1"/>
+          <p:nvPr/>
+        </p:nvSpPr>
+        <p:spPr>
+          <a:xfrm>
+            <a:off x="868680" y="2788920"/>
+            <a:ext cx="10454335" cy="749808"/>
+          </a:xfrm>
+          <a:prstGeom prst="rect">
+            <a:avLst/>
+          </a:prstGeom>
+          <a:noFill/>
+        </p:spPr>
+        <p:txBody>
+          <a:bodyPr wrap="square" anchor="t" lIns="0" rIns="0" tIns="0" bIns="0">
+            <a:spAutoFit/>
+          </a:bodyPr>
+          <a:lstStyle/>
+          <a:p>
+            <a:r>
+              <a:rPr sz="1300" b="1" i="0">
+                <a:solidFill>
+                  <a:srgbClr val="0C2340"/>
+                </a:solidFill>
+                <a:latin typeface="Calibri"/>
+              </a:rPr>
+              <a:t>💡 Aclaración</a:t>
+            </a:r>
+          </a:p>
+          <a:p>
+            <a:pPr>
+              <a:spcBef>
+                <a:spcPts val="400"/>
+              </a:spcBef>
+            </a:pPr>
+            <a:r>
+              <a:rPr sz="1300" b="0" i="0">
+                <a:solidFill>
+                  <a:srgbClr val="2B2B2B"/>
+                </a:solidFill>
+                <a:latin typeface="Calibri"/>
+              </a:rPr>
+              <a:t>Las tutorías por grupo se acuerdan en la semana con el Docente (no hay atención espontánea sin cita).</a:t>
+            </a:r>
+          </a:p>
+        </p:txBody>
+      </p:sp>
+      <p:sp>
+        <p:nvSpPr>
+          <p:cNvPr id="8" name="Rounded Rectangle 7"/>
+          <p:cNvSpPr/>
+          <p:nvPr/>
+        </p:nvSpPr>
+        <p:spPr>
+          <a:xfrm>
+            <a:off x="640080" y="3877056"/>
+            <a:ext cx="10911535" cy="713232"/>
+          </a:xfrm>
+          <a:prstGeom prst="roundRect">
+            <a:avLst/>
+          </a:prstGeom>
+          <a:solidFill>
+            <a:srgbClr val="FDECD8"/>
+          </a:solidFill>
+          <a:ln>
+            <a:noFill/>
+          </a:ln>
+          <a:effectLst/>
+        </p:spPr>
+        <p:style>
+          <a:lnRef idx="1">
+            <a:schemeClr val="accent1"/>
+          </a:lnRef>
+          <a:fillRef idx="3">
+            <a:schemeClr val="accent1"/>
+          </a:fillRef>
+          <a:effectRef idx="2">
+            <a:schemeClr val="accent1"/>
+          </a:effectRef>
+          <a:fontRef idx="minor">
+            <a:schemeClr val="lt1"/>
+          </a:fontRef>
+        </p:style>
+        <p:txBody>
+          <a:bodyPr rtlCol="0" anchor="ctr"/>
+          <a:lstStyle/>
+          <a:p>
+            <a:pPr algn="ctr"/>
+          </a:p>
+        </p:txBody>
+      </p:sp>
+      <p:sp>
+        <p:nvSpPr>
+          <p:cNvPr id="9" name="TextBox 8"/>
+          <p:cNvSpPr txBox="1"/>
+          <p:nvPr/>
+        </p:nvSpPr>
+        <p:spPr>
+          <a:xfrm>
+            <a:off x="868680" y="3986784"/>
+            <a:ext cx="10454335" cy="493776"/>
+          </a:xfrm>
+          <a:prstGeom prst="rect">
+            <a:avLst/>
+          </a:prstGeom>
+          <a:noFill/>
+        </p:spPr>
+        <p:txBody>
+          <a:bodyPr wrap="square" anchor="t" lIns="0" rIns="0" tIns="0" bIns="0">
+            <a:spAutoFit/>
+          </a:bodyPr>
+          <a:lstStyle/>
+          <a:p>
+            <a:r>
+              <a:rPr sz="1300" b="1" i="0">
+                <a:solidFill>
+                  <a:srgbClr val="0C2340"/>
+                </a:solidFill>
+                <a:latin typeface="Calibri"/>
+              </a:rPr>
+              <a:t>💡 Aclaración</a:t>
+            </a:r>
+          </a:p>
+          <a:p>
+            <a:pPr>
+              <a:spcBef>
+                <a:spcPts val="400"/>
+              </a:spcBef>
+            </a:pPr>
+            <a:r>
+              <a:rPr sz="1300" b="0" i="0">
+                <a:solidFill>
+                  <a:srgbClr val="2B2B2B"/>
+                </a:solidFill>
+                <a:latin typeface="Calibri"/>
+              </a:rPr>
+              <a:t>Traer el avance </a:t>
+            </a:r>
+            <a:r>
+              <a:rPr sz="1300" b="1" i="0">
+                <a:solidFill>
+                  <a:srgbClr val="2B2B2B"/>
+                </a:solidFill>
+                <a:latin typeface="Calibri"/>
+              </a:rPr>
+              <a:t>escrito</a:t>
+            </a:r>
+            <a:r>
+              <a:rPr sz="1300" b="0" i="0">
+                <a:solidFill>
+                  <a:srgbClr val="2B2B2B"/>
+                </a:solidFill>
+                <a:latin typeface="Calibri"/>
+              </a:rPr>
+              <a:t> a cada encuentro: se trabaja sobre lo que ya existe.</a:t>
+            </a:r>
+          </a:p>
+        </p:txBody>
+      </p:sp>
+      <p:sp>
+        <p:nvSpPr>
+          <p:cNvPr id="10" name="Rounded Rectangle 9"/>
+          <p:cNvSpPr/>
+          <p:nvPr/>
+        </p:nvSpPr>
+        <p:spPr>
+          <a:xfrm>
+            <a:off x="640080" y="4818888"/>
+            <a:ext cx="10911535" cy="713232"/>
+          </a:xfrm>
+          <a:prstGeom prst="roundRect">
+            <a:avLst/>
+          </a:prstGeom>
+          <a:solidFill>
+            <a:srgbClr val="FBE4E4"/>
+          </a:solidFill>
+          <a:ln>
+            <a:noFill/>
+          </a:ln>
+          <a:effectLst/>
+        </p:spPr>
+        <p:style>
+          <a:lnRef idx="1">
+            <a:schemeClr val="accent1"/>
+          </a:lnRef>
+          <a:fillRef idx="3">
+            <a:schemeClr val="accent1"/>
+          </a:fillRef>
+          <a:effectRef idx="2">
+            <a:schemeClr val="accent1"/>
+          </a:effectRef>
+          <a:fontRef idx="minor">
+            <a:schemeClr val="lt1"/>
+          </a:fontRef>
+        </p:style>
+        <p:txBody>
+          <a:bodyPr rtlCol="0" anchor="ctr"/>
+          <a:lstStyle/>
+          <a:p>
+            <a:pPr algn="ctr"/>
+          </a:p>
+        </p:txBody>
+      </p:sp>
+      <p:sp>
+        <p:nvSpPr>
+          <p:cNvPr id="11" name="TextBox 10"/>
+          <p:cNvSpPr txBox="1"/>
+          <p:nvPr/>
+        </p:nvSpPr>
+        <p:spPr>
+          <a:xfrm>
+            <a:off x="868680" y="4928616"/>
+            <a:ext cx="10454335" cy="493776"/>
+          </a:xfrm>
+          <a:prstGeom prst="rect">
+            <a:avLst/>
+          </a:prstGeom>
+          <a:noFill/>
+        </p:spPr>
+        <p:txBody>
+          <a:bodyPr wrap="square" anchor="t" lIns="0" rIns="0" tIns="0" bIns="0">
+            <a:spAutoFit/>
+          </a:bodyPr>
+          <a:lstStyle/>
+          <a:p>
+            <a:r>
+              <a:rPr sz="1300" b="1" i="0">
+                <a:solidFill>
+                  <a:srgbClr val="0C2340"/>
+                </a:solidFill>
+                <a:latin typeface="Calibri"/>
+              </a:rPr>
+              <a:t>⚠️ Importante</a:t>
+            </a:r>
+          </a:p>
+          <a:p>
+            <a:pPr>
+              <a:spcBef>
+                <a:spcPts val="400"/>
+              </a:spcBef>
+            </a:pPr>
+            <a:r>
+              <a:rPr sz="1300" b="0" i="0">
+                <a:solidFill>
+                  <a:srgbClr val="2B2B2B"/>
+                </a:solidFill>
+                <a:latin typeface="Calibri"/>
+              </a:rPr>
+              <a:t>Integridad académica: citar siempre en </a:t>
+            </a:r>
+            <a:r>
+              <a:rPr sz="1300" b="1" i="0">
+                <a:solidFill>
+                  <a:srgbClr val="2B2B2B"/>
+                </a:solidFill>
+                <a:latin typeface="Calibri"/>
+              </a:rPr>
+              <a:t>APA 7</a:t>
+            </a:r>
+            <a:r>
+              <a:rPr sz="1300" b="0" i="0">
+                <a:solidFill>
+                  <a:srgbClr val="2B2B2B"/>
+                </a:solidFill>
+                <a:latin typeface="Calibri"/>
+              </a:rPr>
+              <a:t>. El plagio tiene debido proceso.</a:t>
+            </a:r>
+          </a:p>
+        </p:txBody>
+      </p:sp>
+      <p:sp>
+        <p:nvSpPr>
+          <p:cNvPr id="12" name="TextBox 11"/>
+          <p:cNvSpPr txBox="1"/>
+          <p:nvPr/>
+        </p:nvSpPr>
+        <p:spPr>
+          <a:xfrm>
+            <a:off x="2194560" y="6446520"/>
+            <a:ext cx="5943600" cy="274320"/>
+          </a:xfrm>
+          <a:prstGeom prst="rect">
+            <a:avLst/>
+          </a:prstGeom>
+          <a:noFill/>
+        </p:spPr>
+        <p:txBody>
+          <a:bodyPr wrap="square" anchor="t" lIns="0" rIns="0" tIns="0" bIns="0">
+            <a:spAutoFit/>
+          </a:bodyPr>
+          <a:lstStyle/>
+          <a:p>
+            <a:pPr algn="l"/>
+            <a:r>
+              <a:rPr sz="1000" b="1" i="0">
+                <a:solidFill>
+                  <a:srgbClr val="8F989D"/>
+                </a:solidFill>
+                <a:latin typeface="Calibri"/>
+              </a:rPr>
+              <a:t>Inicio 8:10 pm</a:t>
+            </a:r>
+          </a:p>
+        </p:txBody>
+      </p:sp>
+      <p:sp>
+        <p:nvSpPr>
+          <p:cNvPr id="13" name="TextBox 12"/>
+          <p:cNvSpPr txBox="1"/>
+          <p:nvPr/>
+        </p:nvSpPr>
+        <p:spPr>
+          <a:xfrm>
+            <a:off x="11094415" y="6446520"/>
+            <a:ext cx="548640" cy="274320"/>
+          </a:xfrm>
+          <a:prstGeom prst="rect">
+            <a:avLst/>
+          </a:prstGeom>
+          <a:noFill/>
+        </p:spPr>
+        <p:txBody>
+          <a:bodyPr wrap="square" anchor="t" lIns="0" rIns="0" tIns="0" bIns="0">
+            <a:spAutoFit/>
+          </a:bodyPr>
+          <a:lstStyle/>
+          <a:p>
+            <a:pPr algn="r"/>
+            <a:r>
+              <a:rPr sz="1000" b="1" i="0">
+                <a:solidFill>
+                  <a:srgbClr val="8F989D"/>
+                </a:solidFill>
+                <a:latin typeface="Calibri"/>
+              </a:rPr>
+              <a:t>19</a:t>
+            </a:r>
+          </a:p>
+        </p:txBody>
+      </p:sp>
+    </p:spTree>
+  </p:cSld>
+  <p:clrMapOvr>
+    <a:masterClrMapping/>
+  </p:clrMapOvr>
+</p:sld>
+</file>
+
 <file path=ppt/slides/slide2.xml><?xml version="1.0" encoding="utf-8"?>
 <p:sld xmlns:a="http://schemas.openxmlformats.org/drawingml/2006/main" xmlns:p="http://schemas.openxmlformats.org/presentationml/2006/main" xmlns:r="http://schemas.openxmlformats.org/officeDocument/2006/relationships">
   <p:cSld>
@@ -3798,6 +9321,569 @@
                 <a:latin typeface="Calibri"/>
               </a:rPr>
               <a:t>2</a:t>
+            </a:r>
+          </a:p>
+        </p:txBody>
+      </p:sp>
+    </p:spTree>
+  </p:cSld>
+  <p:clrMapOvr>
+    <a:masterClrMapping/>
+  </p:clrMapOvr>
+</p:sld>
+</file>
+
+<file path=ppt/slides/slide20.xml><?xml version="1.0" encoding="utf-8"?>
+<p:sld xmlns:a="http://schemas.openxmlformats.org/drawingml/2006/main" xmlns:p="http://schemas.openxmlformats.org/presentationml/2006/main" xmlns:r="http://schemas.openxmlformats.org/officeDocument/2006/relationships">
+  <p:cSld>
+    <p:bg>
+      <p:bgPr>
+        <a:solidFill>
+          <a:srgbClr val="FFFFFF"/>
+        </a:solidFill>
+        <a:effectLst/>
+      </p:bgPr>
+    </p:bg>
+    <p:spTree>
+      <p:nvGrpSpPr>
+        <p:cNvPr id="1" name=""/>
+        <p:cNvGrpSpPr/>
+        <p:nvPr/>
+      </p:nvGrpSpPr>
+      <p:grpSpPr/>
+      <p:sp>
+        <p:nvSpPr>
+          <p:cNvPr id="2" name="Rectangle 1"/>
+          <p:cNvSpPr/>
+          <p:nvPr/>
+        </p:nvSpPr>
+        <p:spPr>
+          <a:xfrm>
+            <a:off x="0" y="0"/>
+            <a:ext cx="12191695" cy="1188720"/>
+          </a:xfrm>
+          <a:prstGeom prst="rect">
+            <a:avLst/>
+          </a:prstGeom>
+          <a:solidFill>
+            <a:srgbClr val="0C2340"/>
+          </a:solidFill>
+          <a:ln>
+            <a:noFill/>
+          </a:ln>
+          <a:effectLst/>
+        </p:spPr>
+        <p:style>
+          <a:lnRef idx="1">
+            <a:schemeClr val="accent1"/>
+          </a:lnRef>
+          <a:fillRef idx="3">
+            <a:schemeClr val="accent1"/>
+          </a:fillRef>
+          <a:effectRef idx="2">
+            <a:schemeClr val="accent1"/>
+          </a:effectRef>
+          <a:fontRef idx="minor">
+            <a:schemeClr val="lt1"/>
+          </a:fontRef>
+        </p:style>
+        <p:txBody>
+          <a:bodyPr rtlCol="0" anchor="ctr"/>
+          <a:lstStyle/>
+          <a:p>
+            <a:pPr algn="ctr"/>
+          </a:p>
+        </p:txBody>
+      </p:sp>
+      <p:sp>
+        <p:nvSpPr>
+          <p:cNvPr id="3" name="TextBox 2"/>
+          <p:cNvSpPr txBox="1"/>
+          <p:nvPr/>
+        </p:nvSpPr>
+        <p:spPr>
+          <a:xfrm>
+            <a:off x="640080" y="0"/>
+            <a:ext cx="9082735" cy="1188720"/>
+          </a:xfrm>
+          <a:prstGeom prst="rect">
+            <a:avLst/>
+          </a:prstGeom>
+          <a:noFill/>
+        </p:spPr>
+        <p:txBody>
+          <a:bodyPr wrap="square" anchor="ctr" lIns="0" rIns="0" tIns="0" bIns="0">
+            <a:spAutoFit/>
+          </a:bodyPr>
+          <a:lstStyle/>
+          <a:p>
+            <a:pPr algn="ctr"/>
+            <a:r>
+              <a:rPr sz="2600" b="1" i="0">
+                <a:solidFill>
+                  <a:srgbClr val="FFFFFF"/>
+                </a:solidFill>
+                <a:latin typeface="Calibri"/>
+              </a:rPr>
+              <a:t>PARA LA PRÓXIMA SESIÓN</a:t>
+            </a:r>
+          </a:p>
+        </p:txBody>
+      </p:sp>
+      <p:sp>
+        <p:nvSpPr>
+          <p:cNvPr id="4" name="TextBox 3"/>
+          <p:cNvSpPr txBox="1"/>
+          <p:nvPr/>
+        </p:nvSpPr>
+        <p:spPr>
+          <a:xfrm>
+            <a:off x="640080" y="1691639"/>
+            <a:ext cx="10911535" cy="4617720"/>
+          </a:xfrm>
+          <a:prstGeom prst="rect">
+            <a:avLst/>
+          </a:prstGeom>
+          <a:noFill/>
+        </p:spPr>
+        <p:txBody>
+          <a:bodyPr wrap="square" anchor="t" lIns="0" rIns="0" tIns="0" bIns="0">
+            <a:spAutoFit/>
+          </a:bodyPr>
+          <a:lstStyle/>
+          <a:p>
+            <a:pPr>
+              <a:spcAft>
+                <a:spcPts val="1000"/>
+              </a:spcAft>
+            </a:pPr>
+            <a:r>
+              <a:rPr sz="1600" b="0" i="0">
+                <a:solidFill>
+                  <a:srgbClr val="2B2B2B"/>
+                </a:solidFill>
+                <a:latin typeface="Calibri"/>
+              </a:rPr>
+              <a:t>–   </a:t>
+            </a:r>
+            <a:r>
+              <a:rPr sz="1600" b="1" i="0">
+                <a:solidFill>
+                  <a:srgbClr val="2B2B2B"/>
+                </a:solidFill>
+                <a:latin typeface="Calibri"/>
+              </a:rPr>
+              <a:t>Lectura autónoma:</a:t>
+            </a:r>
+            <a:r>
+              <a:rPr sz="1600" b="0" i="0">
+                <a:solidFill>
+                  <a:srgbClr val="2B2B2B"/>
+                </a:solidFill>
+                <a:latin typeface="Calibri"/>
+              </a:rPr>
+              <a:t> ESP329 U1 (Fundamentos y enfoque de investigación) — la retomamos al abrir la Sesión 02.</a:t>
+            </a:r>
+          </a:p>
+          <a:p>
+            <a:pPr>
+              <a:spcAft>
+                <a:spcPts val="1000"/>
+              </a:spcAft>
+            </a:pPr>
+            <a:r>
+              <a:rPr sz="1600" b="0" i="0">
+                <a:solidFill>
+                  <a:srgbClr val="2B2B2B"/>
+                </a:solidFill>
+                <a:latin typeface="Calibri"/>
+              </a:rPr>
+              <a:t>–   Revisar la </a:t>
+            </a:r>
+            <a:r>
+              <a:rPr sz="1600" b="1" i="0">
+                <a:solidFill>
+                  <a:srgbClr val="2B2B2B"/>
+                </a:solidFill>
+                <a:latin typeface="Calibri"/>
+              </a:rPr>
+              <a:t>Presentación del Curso</a:t>
+            </a:r>
+            <a:r>
+              <a:rPr sz="1600" b="0" i="0">
+                <a:solidFill>
+                  <a:srgbClr val="2B2B2B"/>
+                </a:solidFill>
+                <a:latin typeface="Calibri"/>
+              </a:rPr>
+              <a:t> completa (fechas, evaluación, contenido de todas las sesiones).</a:t>
+            </a:r>
+          </a:p>
+          <a:p>
+            <a:pPr>
+              <a:spcAft>
+                <a:spcPts val="1000"/>
+              </a:spcAft>
+            </a:pPr>
+            <a:r>
+              <a:rPr sz="1600" b="0" i="0">
+                <a:solidFill>
+                  <a:srgbClr val="2B2B2B"/>
+                </a:solidFill>
+                <a:latin typeface="Calibri"/>
+              </a:rPr>
+              <a:t>–   Abrir el enunciado de la </a:t>
+            </a:r>
+            <a:r>
+              <a:rPr sz="1600" b="1" i="0">
+                <a:solidFill>
+                  <a:srgbClr val="2B2B2B"/>
+                </a:solidFill>
+                <a:latin typeface="Calibri"/>
+              </a:rPr>
+              <a:t>ACA 1</a:t>
+            </a:r>
+            <a:r>
+              <a:rPr sz="1600" b="0" i="0">
+                <a:solidFill>
+                  <a:srgbClr val="2B2B2B"/>
+                </a:solidFill>
+                <a:latin typeface="Calibri"/>
+              </a:rPr>
+              <a:t> en `Clases/Recursos/ACAs/` y leerlo entero.</a:t>
+            </a:r>
+          </a:p>
+        </p:txBody>
+      </p:sp>
+      <p:sp>
+        <p:nvSpPr>
+          <p:cNvPr id="5" name="TextBox 4"/>
+          <p:cNvSpPr txBox="1"/>
+          <p:nvPr/>
+        </p:nvSpPr>
+        <p:spPr>
+          <a:xfrm>
+            <a:off x="2194560" y="6446520"/>
+            <a:ext cx="5943600" cy="274320"/>
+          </a:xfrm>
+          <a:prstGeom prst="rect">
+            <a:avLst/>
+          </a:prstGeom>
+          <a:noFill/>
+        </p:spPr>
+        <p:txBody>
+          <a:bodyPr wrap="square" anchor="t" lIns="0" rIns="0" tIns="0" bIns="0">
+            <a:spAutoFit/>
+          </a:bodyPr>
+          <a:lstStyle/>
+          <a:p>
+            <a:pPr algn="l"/>
+            <a:r>
+              <a:rPr sz="1000" b="1" i="0">
+                <a:solidFill>
+                  <a:srgbClr val="8F989D"/>
+                </a:solidFill>
+                <a:latin typeface="Calibri"/>
+              </a:rPr>
+              <a:t>Inicio 8:10 pm</a:t>
+            </a:r>
+          </a:p>
+        </p:txBody>
+      </p:sp>
+      <p:sp>
+        <p:nvSpPr>
+          <p:cNvPr id="6" name="TextBox 5"/>
+          <p:cNvSpPr txBox="1"/>
+          <p:nvPr/>
+        </p:nvSpPr>
+        <p:spPr>
+          <a:xfrm>
+            <a:off x="11094415" y="6446520"/>
+            <a:ext cx="548640" cy="274320"/>
+          </a:xfrm>
+          <a:prstGeom prst="rect">
+            <a:avLst/>
+          </a:prstGeom>
+          <a:noFill/>
+        </p:spPr>
+        <p:txBody>
+          <a:bodyPr wrap="square" anchor="t" lIns="0" rIns="0" tIns="0" bIns="0">
+            <a:spAutoFit/>
+          </a:bodyPr>
+          <a:lstStyle/>
+          <a:p>
+            <a:pPr algn="r"/>
+            <a:r>
+              <a:rPr sz="1000" b="1" i="0">
+                <a:solidFill>
+                  <a:srgbClr val="8F989D"/>
+                </a:solidFill>
+                <a:latin typeface="Calibri"/>
+              </a:rPr>
+              <a:t>20</a:t>
+            </a:r>
+          </a:p>
+        </p:txBody>
+      </p:sp>
+    </p:spTree>
+  </p:cSld>
+  <p:clrMapOvr>
+    <a:masterClrMapping/>
+  </p:clrMapOvr>
+</p:sld>
+</file>
+
+<file path=ppt/slides/slide21.xml><?xml version="1.0" encoding="utf-8"?>
+<p:sld xmlns:a="http://schemas.openxmlformats.org/drawingml/2006/main" xmlns:p="http://schemas.openxmlformats.org/presentationml/2006/main" xmlns:r="http://schemas.openxmlformats.org/officeDocument/2006/relationships">
+  <p:cSld>
+    <p:bg>
+      <p:bgPr>
+        <a:solidFill>
+          <a:srgbClr val="FFFFFF"/>
+        </a:solidFill>
+        <a:effectLst/>
+      </p:bgPr>
+    </p:bg>
+    <p:spTree>
+      <p:nvGrpSpPr>
+        <p:cNvPr id="1" name=""/>
+        <p:cNvGrpSpPr/>
+        <p:nvPr/>
+      </p:nvGrpSpPr>
+      <p:grpSpPr/>
+      <p:sp>
+        <p:nvSpPr>
+          <p:cNvPr id="2" name="Rectangle 1"/>
+          <p:cNvSpPr/>
+          <p:nvPr/>
+        </p:nvSpPr>
+        <p:spPr>
+          <a:xfrm>
+            <a:off x="0" y="0"/>
+            <a:ext cx="12191695" cy="164592"/>
+          </a:xfrm>
+          <a:prstGeom prst="rect">
+            <a:avLst/>
+          </a:prstGeom>
+          <a:solidFill>
+            <a:srgbClr val="007433"/>
+          </a:solidFill>
+          <a:ln>
+            <a:noFill/>
+          </a:ln>
+          <a:effectLst/>
+        </p:spPr>
+        <p:style>
+          <a:lnRef idx="1">
+            <a:schemeClr val="accent1"/>
+          </a:lnRef>
+          <a:fillRef idx="3">
+            <a:schemeClr val="accent1"/>
+          </a:fillRef>
+          <a:effectRef idx="2">
+            <a:schemeClr val="accent1"/>
+          </a:effectRef>
+          <a:fontRef idx="minor">
+            <a:schemeClr val="lt1"/>
+          </a:fontRef>
+        </p:style>
+        <p:txBody>
+          <a:bodyPr rtlCol="0" anchor="ctr"/>
+          <a:lstStyle/>
+          <a:p>
+            <a:pPr algn="ctr"/>
+          </a:p>
+        </p:txBody>
+      </p:sp>
+      <p:pic>
+        <p:nvPicPr>
+          <p:cNvPr id="3" name="Picture 2" descr="logo_cun_solo.png"/>
+          <p:cNvPicPr>
+            <a:picLocks noChangeAspect="1"/>
+          </p:cNvPicPr>
+          <p:nvPr/>
+        </p:nvPicPr>
+        <p:blipFill>
+          <a:blip r:embed="rId2"/>
+          <a:stretch>
+            <a:fillRect/>
+          </a:stretch>
+        </p:blipFill>
+        <p:spPr>
+          <a:xfrm>
+            <a:off x="10362895" y="5632704"/>
+            <a:ext cx="1371600" cy="950976"/>
+          </a:xfrm>
+          <a:prstGeom prst="rect">
+            <a:avLst/>
+          </a:prstGeom>
+        </p:spPr>
+      </p:pic>
+      <p:sp>
+        <p:nvSpPr>
+          <p:cNvPr id="4" name="TextBox 3"/>
+          <p:cNvSpPr txBox="1"/>
+          <p:nvPr/>
+        </p:nvSpPr>
+        <p:spPr>
+          <a:xfrm>
+            <a:off x="640080" y="1737360"/>
+            <a:ext cx="10911535" cy="1097280"/>
+          </a:xfrm>
+          <a:prstGeom prst="rect">
+            <a:avLst/>
+          </a:prstGeom>
+          <a:noFill/>
+        </p:spPr>
+        <p:txBody>
+          <a:bodyPr wrap="square" anchor="ctr" lIns="0" rIns="0" tIns="0" bIns="0">
+            <a:spAutoFit/>
+          </a:bodyPr>
+          <a:lstStyle/>
+          <a:p>
+            <a:pPr algn="ctr"/>
+            <a:r>
+              <a:rPr sz="3400" b="1" i="0">
+                <a:solidFill>
+                  <a:srgbClr val="0C2340"/>
+                </a:solidFill>
+                <a:latin typeface="Calibri"/>
+              </a:rPr>
+              <a:t>Cierre — Sesión 01</a:t>
+            </a:r>
+          </a:p>
+        </p:txBody>
+      </p:sp>
+      <p:sp>
+        <p:nvSpPr>
+          <p:cNvPr id="5" name="TextBox 4"/>
+          <p:cNvSpPr txBox="1"/>
+          <p:nvPr/>
+        </p:nvSpPr>
+        <p:spPr>
+          <a:xfrm>
+            <a:off x="640080" y="3017520"/>
+            <a:ext cx="10911535" cy="1645920"/>
+          </a:xfrm>
+          <a:prstGeom prst="rect">
+            <a:avLst/>
+          </a:prstGeom>
+          <a:noFill/>
+        </p:spPr>
+        <p:txBody>
+          <a:bodyPr wrap="square" anchor="t" lIns="0" rIns="0" tIns="0" bIns="0">
+            <a:spAutoFit/>
+          </a:bodyPr>
+          <a:lstStyle/>
+          <a:p>
+            <a:pPr algn="ctr">
+              <a:spcAft>
+                <a:spcPts val="600"/>
+              </a:spcAft>
+            </a:pPr>
+            <a:r>
+              <a:rPr sz="1600" b="0" i="0">
+                <a:solidFill>
+                  <a:srgbClr val="2B2B2B"/>
+                </a:solidFill>
+                <a:latin typeface="Calibri"/>
+              </a:rPr>
+              <a:t>Ya sabemos qué haremos, cómo se evalúa y quién es quién.</a:t>
+            </a:r>
+          </a:p>
+          <a:p>
+            <a:pPr algn="ctr">
+              <a:spcAft>
+                <a:spcPts val="600"/>
+              </a:spcAft>
+            </a:pPr>
+            <a:r>
+              <a:rPr sz="1600" b="1" i="0">
+                <a:solidFill>
+                  <a:srgbClr val="2B2B2B"/>
+                </a:solidFill>
+                <a:latin typeface="Calibri"/>
+              </a:rPr>
+              <a:t>Sesión 02:</a:t>
+            </a:r>
+            <a:r>
+              <a:rPr sz="1600" b="0" i="0">
+                <a:solidFill>
+                  <a:srgbClr val="2B2B2B"/>
+                </a:solidFill>
+                <a:latin typeface="Calibri"/>
+              </a:rPr>
+              <a:t> arranca el contenido del curso.</a:t>
+            </a:r>
+          </a:p>
+        </p:txBody>
+      </p:sp>
+      <p:sp>
+        <p:nvSpPr>
+          <p:cNvPr id="6" name="TextBox 5"/>
+          <p:cNvSpPr txBox="1"/>
+          <p:nvPr/>
+        </p:nvSpPr>
+        <p:spPr>
+          <a:xfrm>
+            <a:off x="640080" y="4754880"/>
+            <a:ext cx="10911535" cy="640080"/>
+          </a:xfrm>
+          <a:prstGeom prst="rect">
+            <a:avLst/>
+          </a:prstGeom>
+          <a:noFill/>
+        </p:spPr>
+        <p:txBody>
+          <a:bodyPr wrap="square" anchor="t" lIns="0" rIns="0" tIns="0" bIns="0">
+            <a:spAutoFit/>
+          </a:bodyPr>
+          <a:lstStyle/>
+          <a:p>
+            <a:pPr algn="ctr"/>
+            <a:r>
+              <a:rPr sz="2000" b="1" i="0">
+                <a:solidFill>
+                  <a:srgbClr val="007433"/>
+                </a:solidFill>
+                <a:latin typeface="Calibri"/>
+              </a:rPr>
+              <a:t>PROYECTO I</a:t>
+            </a:r>
+          </a:p>
+        </p:txBody>
+      </p:sp>
+      <p:sp>
+        <p:nvSpPr>
+          <p:cNvPr id="7" name="TextBox 6"/>
+          <p:cNvSpPr txBox="1"/>
+          <p:nvPr/>
+        </p:nvSpPr>
+        <p:spPr>
+          <a:xfrm>
+            <a:off x="2194560" y="6446520"/>
+            <a:ext cx="5943600" cy="274320"/>
+          </a:xfrm>
+          <a:prstGeom prst="rect">
+            <a:avLst/>
+          </a:prstGeom>
+          <a:noFill/>
+        </p:spPr>
+        <p:txBody>
+          <a:bodyPr wrap="square" anchor="t" lIns="0" rIns="0" tIns="0" bIns="0">
+            <a:spAutoFit/>
+          </a:bodyPr>
+          <a:lstStyle/>
+          <a:p>
+            <a:pPr algn="l"/>
+            <a:r>
+              <a:rPr sz="1000" b="1" i="0">
+                <a:solidFill>
+                  <a:srgbClr val="8F989D"/>
+                </a:solidFill>
+                <a:latin typeface="Calibri"/>
+              </a:rPr>
+              <a:t>Inicio 8:10 pm</a:t>
             </a:r>
           </a:p>
         </p:txBody>
@@ -5495,65 +11581,21 @@
                 </a:solidFill>
                 <a:latin typeface="Calibri"/>
               </a:rPr>
-              <a:t>ACUERDOS DE TRABAJO</a:t>
-            </a:r>
-          </a:p>
-        </p:txBody>
-      </p:sp>
-      <p:sp>
-        <p:nvSpPr>
-          <p:cNvPr id="4" name="Rounded Rectangle 3"/>
-          <p:cNvSpPr/>
-          <p:nvPr/>
-        </p:nvSpPr>
-        <p:spPr>
-          <a:xfrm>
-            <a:off x="640080" y="1737360"/>
-            <a:ext cx="10911535" cy="713232"/>
-          </a:xfrm>
-          <a:prstGeom prst="roundRect">
-            <a:avLst/>
-          </a:prstGeom>
-          <a:solidFill>
-            <a:srgbClr val="E8F5EC"/>
-          </a:solidFill>
-          <a:ln>
-            <a:noFill/>
-          </a:ln>
-          <a:effectLst/>
-        </p:spPr>
-        <p:style>
-          <a:lnRef idx="1">
-            <a:schemeClr val="accent1"/>
-          </a:lnRef>
-          <a:fillRef idx="3">
-            <a:schemeClr val="accent1"/>
-          </a:fillRef>
-          <a:effectRef idx="2">
-            <a:schemeClr val="accent1"/>
-          </a:effectRef>
-          <a:fontRef idx="minor">
-            <a:schemeClr val="lt1"/>
-          </a:fontRef>
-        </p:style>
-        <p:txBody>
-          <a:bodyPr rtlCol="0" anchor="ctr"/>
-          <a:lstStyle/>
-          <a:p>
-            <a:pPr algn="ctr"/>
-          </a:p>
-        </p:txBody>
-      </p:sp>
-      <p:sp>
-        <p:nvSpPr>
-          <p:cNvPr id="5" name="TextBox 4"/>
+              <a:t>Cómo trabajamos: el encuentro tiene dos mitades</a:t>
+            </a:r>
+          </a:p>
+        </p:txBody>
+      </p:sp>
+      <p:sp>
+        <p:nvSpPr>
+          <p:cNvPr id="4" name="TextBox 3"/>
           <p:cNvSpPr txBox="1"/>
           <p:nvPr/>
         </p:nvSpPr>
         <p:spPr>
           <a:xfrm>
-            <a:off x="868680" y="1847088"/>
-            <a:ext cx="10454335" cy="493776"/>
+            <a:off x="640080" y="1691639"/>
+            <a:ext cx="10911535" cy="4617720"/>
           </a:xfrm>
           <a:prstGeom prst="rect">
             <a:avLst/>
@@ -5566,97 +11608,287 @@
           </a:bodyPr>
           <a:lstStyle/>
           <a:p>
-            <a:r>
-              <a:rPr sz="1300" b="1" i="0">
-                <a:solidFill>
-                  <a:srgbClr val="0C2340"/>
-                </a:solidFill>
-                <a:latin typeface="Calibri"/>
-              </a:rPr>
-              <a:t>ℹ️ Nota institucional</a:t>
-            </a:r>
-          </a:p>
-          <a:p>
             <a:pPr>
-              <a:spcBef>
-                <a:spcPts val="400"/>
-              </a:spcBef>
+              <a:spcAft>
+                <a:spcPts val="1000"/>
+              </a:spcAft>
             </a:pPr>
             <a:r>
-              <a:rPr sz="1300" b="1" i="0">
-                <a:solidFill>
-                  <a:srgbClr val="2B2B2B"/>
-                </a:solidFill>
-                <a:latin typeface="Calibri"/>
-              </a:rPr>
-              <a:t>Entrega oficial: CDigital.</a:t>
-            </a:r>
-            <a:r>
-              <a:rPr sz="1300" b="0" i="0">
-                <a:solidFill>
-                  <a:srgbClr val="2B2B2B"/>
-                </a:solidFill>
-                <a:latin typeface="Calibri"/>
-              </a:rPr>
-              <a:t> Lo que no esté ahí, no está entregado.</a:t>
-            </a:r>
-          </a:p>
-        </p:txBody>
-      </p:sp>
-      <p:sp>
-        <p:nvSpPr>
-          <p:cNvPr id="6" name="Rounded Rectangle 5"/>
-          <p:cNvSpPr/>
-          <p:nvPr/>
-        </p:nvSpPr>
-        <p:spPr>
-          <a:xfrm>
-            <a:off x="640080" y="2679191"/>
-            <a:ext cx="10911535" cy="969264"/>
-          </a:xfrm>
-          <a:prstGeom prst="roundRect">
-            <a:avLst/>
-          </a:prstGeom>
-          <a:solidFill>
-            <a:srgbClr val="FDECD8"/>
-          </a:solidFill>
-          <a:ln>
-            <a:noFill/>
-          </a:ln>
-          <a:effectLst/>
-        </p:spPr>
-        <p:style>
-          <a:lnRef idx="1">
-            <a:schemeClr val="accent1"/>
-          </a:lnRef>
-          <a:fillRef idx="3">
-            <a:schemeClr val="accent1"/>
-          </a:fillRef>
-          <a:effectRef idx="2">
-            <a:schemeClr val="accent1"/>
-          </a:effectRef>
-          <a:fontRef idx="minor">
-            <a:schemeClr val="lt1"/>
-          </a:fontRef>
-        </p:style>
-        <p:txBody>
-          <a:bodyPr rtlCol="0" anchor="ctr"/>
-          <a:lstStyle/>
-          <a:p>
-            <a:pPr algn="ctr"/>
-          </a:p>
-        </p:txBody>
-      </p:sp>
-      <p:sp>
-        <p:nvSpPr>
-          <p:cNvPr id="7" name="TextBox 6"/>
+              <a:rPr sz="1600" b="0" i="0">
+                <a:solidFill>
+                  <a:srgbClr val="2B2B2B"/>
+                </a:solidFill>
+                <a:latin typeface="Calibri"/>
+              </a:rPr>
+              <a:t>–   Nos vemos </a:t>
+            </a:r>
+            <a:r>
+              <a:rPr sz="1600" b="1" i="0">
+                <a:solidFill>
+                  <a:srgbClr val="2B2B2B"/>
+                </a:solidFill>
+                <a:latin typeface="Calibri"/>
+              </a:rPr>
+              <a:t>una vez por semana, dos horas</a:t>
+            </a:r>
+            <a:r>
+              <a:rPr sz="1600" b="0" i="0">
+                <a:solidFill>
+                  <a:srgbClr val="2B2B2B"/>
+                </a:solidFill>
+                <a:latin typeface="Calibri"/>
+              </a:rPr>
+              <a:t>. No son dos horas de exposición.</a:t>
+            </a:r>
+          </a:p>
+          <a:p>
+            <a:pPr lvl="1">
+              <a:spcAft>
+                <a:spcPts val="600"/>
+              </a:spcAft>
+            </a:pPr>
+            <a:r>
+              <a:rPr sz="1500" b="0" i="0">
+                <a:solidFill>
+                  <a:srgbClr val="2B2B2B"/>
+                </a:solidFill>
+                <a:latin typeface="Calibri"/>
+              </a:rPr>
+              <a:t>●   </a:t>
+            </a:r>
+            <a:r>
+              <a:rPr sz="1500" b="1" i="0">
+                <a:solidFill>
+                  <a:srgbClr val="2B2B2B"/>
+                </a:solidFill>
+                <a:latin typeface="Calibri"/>
+              </a:rPr>
+              <a:t>Primera hora — contenido:</a:t>
+            </a:r>
+            <a:r>
+              <a:rPr sz="1500" b="0" i="0">
+                <a:solidFill>
+                  <a:srgbClr val="2B2B2B"/>
+                </a:solidFill>
+                <a:latin typeface="Calibri"/>
+              </a:rPr>
+              <a:t> el Docente explica el punto de la semana y modela un ejemplo en pantalla.</a:t>
+            </a:r>
+          </a:p>
+          <a:p>
+            <a:pPr lvl="1">
+              <a:spcAft>
+                <a:spcPts val="600"/>
+              </a:spcAft>
+            </a:pPr>
+            <a:r>
+              <a:rPr sz="1500" b="0" i="0">
+                <a:solidFill>
+                  <a:srgbClr val="2B2B2B"/>
+                </a:solidFill>
+                <a:latin typeface="Calibri"/>
+              </a:rPr>
+              <a:t>●   </a:t>
+            </a:r>
+            <a:r>
+              <a:rPr sz="1500" b="1" i="0">
+                <a:solidFill>
+                  <a:srgbClr val="2B2B2B"/>
+                </a:solidFill>
+                <a:latin typeface="Calibri"/>
+              </a:rPr>
+              <a:t>Segunda hora — tutoría en vivo:</a:t>
+            </a:r>
+            <a:r>
+              <a:rPr sz="1500" b="0" i="0">
+                <a:solidFill>
+                  <a:srgbClr val="2B2B2B"/>
+                </a:solidFill>
+                <a:latin typeface="Calibri"/>
+              </a:rPr>
+              <a:t> cada equipo trabaja su avance y el Docente pasa por los equipos.</a:t>
+            </a:r>
+          </a:p>
+          <a:p>
+            <a:pPr>
+              <a:spcAft>
+                <a:spcPts val="1000"/>
+              </a:spcAft>
+            </a:pPr>
+            <a:r>
+              <a:rPr sz="1600" b="0" i="0">
+                <a:solidFill>
+                  <a:srgbClr val="2B2B2B"/>
+                </a:solidFill>
+                <a:latin typeface="Calibri"/>
+              </a:rPr>
+              <a:t>–   El curso funciona </a:t>
+            </a:r>
+            <a:r>
+              <a:rPr sz="1600" b="1" i="0">
+                <a:solidFill>
+                  <a:srgbClr val="2B2B2B"/>
+                </a:solidFill>
+                <a:latin typeface="Calibri"/>
+              </a:rPr>
+              <a:t>al revés de lo que se acostumbra</a:t>
+            </a:r>
+            <a:r>
+              <a:rPr sz="1600" b="0" i="0">
+                <a:solidFill>
+                  <a:srgbClr val="2B2B2B"/>
+                </a:solidFill>
+                <a:latin typeface="Calibri"/>
+              </a:rPr>
+              <a:t>: se lee y se escribe </a:t>
+            </a:r>
+            <a:r>
+              <a:rPr sz="1600" b="1" i="0">
+                <a:solidFill>
+                  <a:srgbClr val="2B2B2B"/>
+                </a:solidFill>
+                <a:latin typeface="Calibri"/>
+              </a:rPr>
+              <a:t>antes</a:t>
+            </a:r>
+            <a:r>
+              <a:rPr sz="1600" b="0" i="0">
+                <a:solidFill>
+                  <a:srgbClr val="2B2B2B"/>
+                </a:solidFill>
+                <a:latin typeface="Calibri"/>
+              </a:rPr>
+              <a:t> de llegar al encuentro.</a:t>
+            </a:r>
+          </a:p>
+          <a:p>
+            <a:pPr lvl="1">
+              <a:spcAft>
+                <a:spcPts val="600"/>
+              </a:spcAft>
+            </a:pPr>
+            <a:r>
+              <a:rPr sz="1500" b="0" i="0">
+                <a:solidFill>
+                  <a:srgbClr val="2B2B2B"/>
+                </a:solidFill>
+                <a:latin typeface="Calibri"/>
+              </a:rPr>
+              <a:t>●   A cada sesión se </a:t>
+            </a:r>
+            <a:r>
+              <a:rPr sz="1500" b="1" i="0">
+                <a:solidFill>
+                  <a:srgbClr val="2B2B2B"/>
+                </a:solidFill>
+                <a:latin typeface="Calibri"/>
+              </a:rPr>
+              <a:t>trae el avance escrito</a:t>
+            </a:r>
+            <a:r>
+              <a:rPr sz="1500" b="0" i="0">
+                <a:solidFill>
+                  <a:srgbClr val="2B2B2B"/>
+                </a:solidFill>
+                <a:latin typeface="Calibri"/>
+              </a:rPr>
+              <a:t>. Aquí se corrige lo que ya existe; no se empieza de cero en clase.</a:t>
+            </a:r>
+          </a:p>
+          <a:p>
+            <a:pPr lvl="1">
+              <a:spcAft>
+                <a:spcPts val="600"/>
+              </a:spcAft>
+            </a:pPr>
+            <a:r>
+              <a:rPr sz="1500" b="0" i="0">
+                <a:solidFill>
+                  <a:srgbClr val="2B2B2B"/>
+                </a:solidFill>
+                <a:latin typeface="Calibri"/>
+              </a:rPr>
+              <a:t>●   Quien llega sin nada escrito pierde la segunda hora: no hay avance que revisar.</a:t>
+            </a:r>
+          </a:p>
+          <a:p>
+            <a:pPr>
+              <a:spcAft>
+                <a:spcPts val="1000"/>
+              </a:spcAft>
+            </a:pPr>
+            <a:r>
+              <a:rPr sz="1600" b="0" i="0">
+                <a:solidFill>
+                  <a:srgbClr val="2B2B2B"/>
+                </a:solidFill>
+                <a:latin typeface="Calibri"/>
+              </a:rPr>
+              <a:t>–   Se trabaja en </a:t>
+            </a:r>
+            <a:r>
+              <a:rPr sz="1600" b="1" i="0">
+                <a:solidFill>
+                  <a:srgbClr val="2B2B2B"/>
+                </a:solidFill>
+                <a:latin typeface="Calibri"/>
+              </a:rPr>
+              <a:t>equipos de máximo 3 personas</a:t>
+            </a:r>
+            <a:r>
+              <a:rPr sz="1600" b="0" i="0">
+                <a:solidFill>
+                  <a:srgbClr val="2B2B2B"/>
+                </a:solidFill>
+                <a:latin typeface="Calibri"/>
+              </a:rPr>
+              <a:t>, los mismos durante todo el curso.</a:t>
+            </a:r>
+          </a:p>
+          <a:p>
+            <a:pPr lvl="1">
+              <a:spcAft>
+                <a:spcPts val="600"/>
+              </a:spcAft>
+            </a:pPr>
+            <a:r>
+              <a:rPr sz="1500" b="0" i="0">
+                <a:solidFill>
+                  <a:srgbClr val="2B2B2B"/>
+                </a:solidFill>
+                <a:latin typeface="Calibri"/>
+              </a:rPr>
+              <a:t>●   Un solo integrante sube la entrega grupal, pero la nota es del equipo, no de quien subió el archivo.</a:t>
+            </a:r>
+          </a:p>
+          <a:p>
+            <a:pPr lvl="1">
+              <a:spcAft>
+                <a:spcPts val="600"/>
+              </a:spcAft>
+            </a:pPr>
+            <a:r>
+              <a:rPr sz="1500" b="0" i="0">
+                <a:solidFill>
+                  <a:srgbClr val="2B2B2B"/>
+                </a:solidFill>
+                <a:latin typeface="Calibri"/>
+              </a:rPr>
+              <a:t>●   ¿Prefieren trabajar solos? Se puede, y la carga es la misma. Decídanlo esta semana, no en octubre.</a:t>
+            </a:r>
+          </a:p>
+        </p:txBody>
+      </p:sp>
+      <p:sp>
+        <p:nvSpPr>
+          <p:cNvPr id="5" name="TextBox 4"/>
           <p:cNvSpPr txBox="1"/>
           <p:nvPr/>
         </p:nvSpPr>
         <p:spPr>
           <a:xfrm>
-            <a:off x="868680" y="2788920"/>
-            <a:ext cx="10454335" cy="749808"/>
+            <a:off x="2194560" y="6446520"/>
+            <a:ext cx="5943600" cy="274320"/>
           </a:xfrm>
           <a:prstGeom prst="rect">
             <a:avLst/>
@@ -5669,88 +11901,29 @@
           </a:bodyPr>
           <a:lstStyle/>
           <a:p>
-            <a:r>
-              <a:rPr sz="1300" b="1" i="0">
-                <a:solidFill>
-                  <a:srgbClr val="0C2340"/>
-                </a:solidFill>
-                <a:latin typeface="Calibri"/>
-              </a:rPr>
-              <a:t>💡 Aclaración</a:t>
-            </a:r>
-          </a:p>
-          <a:p>
-            <a:pPr>
-              <a:spcBef>
-                <a:spcPts val="400"/>
-              </a:spcBef>
-            </a:pPr>
-            <a:r>
-              <a:rPr sz="1300" b="0" i="0">
-                <a:solidFill>
-                  <a:srgbClr val="2B2B2B"/>
-                </a:solidFill>
-                <a:latin typeface="Calibri"/>
-              </a:rPr>
-              <a:t>Las tutorías por grupo se acuerdan en la semana con el Docente (no hay atención espontánea sin cita).</a:t>
-            </a:r>
-          </a:p>
-        </p:txBody>
-      </p:sp>
-      <p:sp>
-        <p:nvSpPr>
-          <p:cNvPr id="8" name="Rounded Rectangle 7"/>
-          <p:cNvSpPr/>
-          <p:nvPr/>
-        </p:nvSpPr>
-        <p:spPr>
-          <a:xfrm>
-            <a:off x="640080" y="3877056"/>
-            <a:ext cx="10911535" cy="713232"/>
-          </a:xfrm>
-          <a:prstGeom prst="roundRect">
-            <a:avLst/>
-          </a:prstGeom>
-          <a:solidFill>
-            <a:srgbClr val="FDECD8"/>
-          </a:solidFill>
-          <a:ln>
-            <a:noFill/>
-          </a:ln>
-          <a:effectLst/>
-        </p:spPr>
-        <p:style>
-          <a:lnRef idx="1">
-            <a:schemeClr val="accent1"/>
-          </a:lnRef>
-          <a:fillRef idx="3">
-            <a:schemeClr val="accent1"/>
-          </a:fillRef>
-          <a:effectRef idx="2">
-            <a:schemeClr val="accent1"/>
-          </a:effectRef>
-          <a:fontRef idx="minor">
-            <a:schemeClr val="lt1"/>
-          </a:fontRef>
-        </p:style>
-        <p:txBody>
-          <a:bodyPr rtlCol="0" anchor="ctr"/>
-          <a:lstStyle/>
-          <a:p>
-            <a:pPr algn="ctr"/>
-          </a:p>
-        </p:txBody>
-      </p:sp>
-      <p:sp>
-        <p:nvSpPr>
-          <p:cNvPr id="9" name="TextBox 8"/>
+            <a:pPr algn="l"/>
+            <a:r>
+              <a:rPr sz="1000" b="1" i="0">
+                <a:solidFill>
+                  <a:srgbClr val="8F989D"/>
+                </a:solidFill>
+                <a:latin typeface="Calibri"/>
+              </a:rPr>
+              <a:t>Inicio 8:10 pm</a:t>
+            </a:r>
+          </a:p>
+        </p:txBody>
+      </p:sp>
+      <p:sp>
+        <p:nvSpPr>
+          <p:cNvPr id="6" name="TextBox 5"/>
           <p:cNvSpPr txBox="1"/>
           <p:nvPr/>
         </p:nvSpPr>
         <p:spPr>
           <a:xfrm>
-            <a:off x="868680" y="3986784"/>
-            <a:ext cx="10454335" cy="493776"/>
+            <a:off x="11094415" y="6446520"/>
+            <a:ext cx="548640" cy="274320"/>
           </a:xfrm>
           <a:prstGeom prst="rect">
             <a:avLst/>
@@ -5763,106 +11936,29 @@
           </a:bodyPr>
           <a:lstStyle/>
           <a:p>
-            <a:r>
-              <a:rPr sz="1300" b="1" i="0">
-                <a:solidFill>
-                  <a:srgbClr val="0C2340"/>
-                </a:solidFill>
-                <a:latin typeface="Calibri"/>
-              </a:rPr>
-              <a:t>💡 Aclaración</a:t>
-            </a:r>
-          </a:p>
-          <a:p>
-            <a:pPr>
-              <a:spcBef>
-                <a:spcPts val="400"/>
-              </a:spcBef>
-            </a:pPr>
-            <a:r>
-              <a:rPr sz="1300" b="0" i="0">
-                <a:solidFill>
-                  <a:srgbClr val="2B2B2B"/>
-                </a:solidFill>
-                <a:latin typeface="Calibri"/>
-              </a:rPr>
-              <a:t>Traer el avance </a:t>
-            </a:r>
-            <a:r>
-              <a:rPr sz="1300" b="1" i="0">
-                <a:solidFill>
-                  <a:srgbClr val="2B2B2B"/>
-                </a:solidFill>
-                <a:latin typeface="Calibri"/>
-              </a:rPr>
-              <a:t>escrito</a:t>
-            </a:r>
-            <a:r>
-              <a:rPr sz="1300" b="0" i="0">
-                <a:solidFill>
-                  <a:srgbClr val="2B2B2B"/>
-                </a:solidFill>
-                <a:latin typeface="Calibri"/>
-              </a:rPr>
-              <a:t> a cada encuentro: se trabaja sobre lo que ya existe.</a:t>
-            </a:r>
-          </a:p>
-        </p:txBody>
-      </p:sp>
-      <p:sp>
-        <p:nvSpPr>
-          <p:cNvPr id="10" name="Rounded Rectangle 9"/>
-          <p:cNvSpPr/>
-          <p:nvPr/>
-        </p:nvSpPr>
-        <p:spPr>
-          <a:xfrm>
-            <a:off x="640080" y="4818888"/>
-            <a:ext cx="10911535" cy="713232"/>
-          </a:xfrm>
-          <a:prstGeom prst="roundRect">
-            <a:avLst/>
-          </a:prstGeom>
-          <a:solidFill>
-            <a:srgbClr val="FBE4E4"/>
-          </a:solidFill>
-          <a:ln>
-            <a:noFill/>
-          </a:ln>
-          <a:effectLst/>
-        </p:spPr>
-        <p:style>
-          <a:lnRef idx="1">
-            <a:schemeClr val="accent1"/>
-          </a:lnRef>
-          <a:fillRef idx="3">
-            <a:schemeClr val="accent1"/>
-          </a:fillRef>
-          <a:effectRef idx="2">
-            <a:schemeClr val="accent1"/>
-          </a:effectRef>
-          <a:fontRef idx="minor">
-            <a:schemeClr val="lt1"/>
-          </a:fontRef>
-        </p:style>
-        <p:txBody>
-          <a:bodyPr rtlCol="0" anchor="ctr"/>
-          <a:lstStyle/>
-          <a:p>
-            <a:pPr algn="ctr"/>
-          </a:p>
-        </p:txBody>
-      </p:sp>
-      <p:sp>
-        <p:nvSpPr>
-          <p:cNvPr id="11" name="TextBox 10"/>
+            <a:pPr algn="r"/>
+            <a:r>
+              <a:rPr sz="1000" b="1" i="0">
+                <a:solidFill>
+                  <a:srgbClr val="8F989D"/>
+                </a:solidFill>
+                <a:latin typeface="Calibri"/>
+              </a:rPr>
+              <a:t>6</a:t>
+            </a:r>
+          </a:p>
+        </p:txBody>
+      </p:sp>
+      <p:sp>
+        <p:nvSpPr>
+          <p:cNvPr id="7" name="TextBox 6"/>
           <p:cNvSpPr txBox="1"/>
           <p:nvPr/>
         </p:nvSpPr>
         <p:spPr>
           <a:xfrm>
-            <a:off x="868680" y="4928616"/>
-            <a:ext cx="10454335" cy="493776"/>
+            <a:off x="640080" y="5943600"/>
+            <a:ext cx="9997135" cy="457200"/>
           </a:xfrm>
           <a:prstGeom prst="rect">
             <a:avLst/>
@@ -5876,117 +11972,13 @@
           <a:lstStyle/>
           <a:p>
             <a:r>
-              <a:rPr sz="1300" b="1" i="0">
-                <a:solidFill>
-                  <a:srgbClr val="0C2340"/>
-                </a:solidFill>
-                <a:latin typeface="Calibri"/>
-              </a:rPr>
-              <a:t>⚠️ Importante</a:t>
-            </a:r>
-          </a:p>
-          <a:p>
-            <a:pPr>
-              <a:spcBef>
-                <a:spcPts val="400"/>
-              </a:spcBef>
-            </a:pPr>
-            <a:r>
-              <a:rPr sz="1300" b="0" i="0">
-                <a:solidFill>
-                  <a:srgbClr val="2B2B2B"/>
-                </a:solidFill>
-                <a:latin typeface="Calibri"/>
-              </a:rPr>
-              <a:t>Integridad académica: citar siempre en </a:t>
-            </a:r>
-            <a:r>
-              <a:rPr sz="1300" b="1" i="0">
-                <a:solidFill>
-                  <a:srgbClr val="2B2B2B"/>
-                </a:solidFill>
-                <a:latin typeface="Calibri"/>
-              </a:rPr>
-              <a:t>APA 7</a:t>
-            </a:r>
-            <a:r>
-              <a:rPr sz="1300" b="0" i="0">
-                <a:solidFill>
-                  <a:srgbClr val="2B2B2B"/>
-                </a:solidFill>
-                <a:latin typeface="Calibri"/>
-              </a:rPr>
-              <a:t>. El plagio tiene debido proceso.</a:t>
-            </a:r>
-          </a:p>
-        </p:txBody>
-      </p:sp>
-      <p:sp>
-        <p:nvSpPr>
-          <p:cNvPr id="12" name="TextBox 11"/>
-          <p:cNvSpPr txBox="1"/>
-          <p:nvPr/>
-        </p:nvSpPr>
-        <p:spPr>
-          <a:xfrm>
-            <a:off x="2194560" y="6446520"/>
-            <a:ext cx="5943600" cy="274320"/>
-          </a:xfrm>
-          <a:prstGeom prst="rect">
-            <a:avLst/>
-          </a:prstGeom>
-          <a:noFill/>
-        </p:spPr>
-        <p:txBody>
-          <a:bodyPr wrap="square" anchor="t" lIns="0" rIns="0" tIns="0" bIns="0">
-            <a:spAutoFit/>
-          </a:bodyPr>
-          <a:lstStyle/>
-          <a:p>
-            <a:pPr algn="l"/>
-            <a:r>
-              <a:rPr sz="1000" b="1" i="0">
-                <a:solidFill>
-                  <a:srgbClr val="8F989D"/>
-                </a:solidFill>
-                <a:latin typeface="Calibri"/>
-              </a:rPr>
-              <a:t>Inicio 8:10 pm</a:t>
-            </a:r>
-          </a:p>
-        </p:txBody>
-      </p:sp>
-      <p:sp>
-        <p:nvSpPr>
-          <p:cNvPr id="13" name="TextBox 12"/>
-          <p:cNvSpPr txBox="1"/>
-          <p:nvPr/>
-        </p:nvSpPr>
-        <p:spPr>
-          <a:xfrm>
-            <a:off x="11094415" y="6446520"/>
-            <a:ext cx="548640" cy="274320"/>
-          </a:xfrm>
-          <a:prstGeom prst="rect">
-            <a:avLst/>
-          </a:prstGeom>
-          <a:noFill/>
-        </p:spPr>
-        <p:txBody>
-          <a:bodyPr wrap="square" anchor="t" lIns="0" rIns="0" tIns="0" bIns="0">
-            <a:spAutoFit/>
-          </a:bodyPr>
-          <a:lstStyle/>
-          <a:p>
-            <a:pPr algn="r"/>
-            <a:r>
-              <a:rPr sz="1000" b="1" i="0">
-                <a:solidFill>
-                  <a:srgbClr val="8F989D"/>
-                </a:solidFill>
-                <a:latin typeface="Calibri"/>
-              </a:rPr>
-              <a:t>6</a:t>
+              <a:rPr sz="1200" b="0" i="1">
+                <a:solidFill>
+                  <a:srgbClr val="2B2B2B"/>
+                </a:solidFill>
+                <a:latin typeface="Calibri"/>
+              </a:rPr>
+              <a:t>Regla de oro: la clase avanza sobre el documento del equipo. Si el documento no crece, el curso no avanza.</a:t>
             </a:r>
           </a:p>
         </p:txBody>
@@ -6091,136 +12083,677 @@
                 </a:solidFill>
                 <a:latin typeface="Calibri"/>
               </a:rPr>
-              <a:t>PARA LA PRÓXIMA SESIÓN</a:t>
-            </a:r>
-          </a:p>
-        </p:txBody>
-      </p:sp>
-      <p:sp>
-        <p:nvSpPr>
-          <p:cNvPr id="4" name="TextBox 3"/>
-          <p:cNvSpPr txBox="1"/>
-          <p:nvPr/>
-        </p:nvSpPr>
-        <p:spPr>
-          <a:xfrm>
-            <a:off x="640080" y="1691639"/>
-            <a:ext cx="10911535" cy="4617720"/>
-          </a:xfrm>
-          <a:prstGeom prst="rect">
-            <a:avLst/>
-          </a:prstGeom>
-          <a:noFill/>
-        </p:spPr>
-        <p:txBody>
-          <a:bodyPr wrap="square" anchor="t" lIns="0" rIns="0" tIns="0" bIns="0">
-            <a:spAutoFit/>
-          </a:bodyPr>
-          <a:lstStyle/>
-          <a:p>
-            <a:pPr>
-              <a:spcAft>
-                <a:spcPts val="1000"/>
-              </a:spcAft>
-            </a:pPr>
-            <a:r>
-              <a:rPr sz="1600" b="0" i="0">
-                <a:solidFill>
-                  <a:srgbClr val="2B2B2B"/>
-                </a:solidFill>
-                <a:latin typeface="Calibri"/>
-              </a:rPr>
-              <a:t>–   </a:t>
-            </a:r>
-            <a:r>
-              <a:rPr sz="1600" b="1" i="0">
-                <a:solidFill>
-                  <a:srgbClr val="2B2B2B"/>
-                </a:solidFill>
-                <a:latin typeface="Calibri"/>
-              </a:rPr>
-              <a:t>Lectura autónoma:</a:t>
-            </a:r>
-            <a:r>
-              <a:rPr sz="1600" b="0" i="0">
-                <a:solidFill>
-                  <a:srgbClr val="2B2B2B"/>
-                </a:solidFill>
-                <a:latin typeface="Calibri"/>
-              </a:rPr>
-              <a:t> ESP329 U1 (Fundamentos y enfoque de investigación) — la retomamos al abrir la Sesión 02.</a:t>
-            </a:r>
-          </a:p>
-          <a:p>
-            <a:pPr>
-              <a:spcAft>
-                <a:spcPts val="1000"/>
-              </a:spcAft>
-            </a:pPr>
-            <a:r>
-              <a:rPr sz="1600" b="0" i="0">
-                <a:solidFill>
-                  <a:srgbClr val="2B2B2B"/>
-                </a:solidFill>
-                <a:latin typeface="Calibri"/>
-              </a:rPr>
-              <a:t>–   Revisar la </a:t>
-            </a:r>
-            <a:r>
-              <a:rPr sz="1600" b="1" i="0">
-                <a:solidFill>
-                  <a:srgbClr val="2B2B2B"/>
-                </a:solidFill>
-                <a:latin typeface="Calibri"/>
-              </a:rPr>
-              <a:t>Presentación del Curso</a:t>
-            </a:r>
-            <a:r>
-              <a:rPr sz="1600" b="0" i="0">
-                <a:solidFill>
-                  <a:srgbClr val="2B2B2B"/>
-                </a:solidFill>
-                <a:latin typeface="Calibri"/>
-              </a:rPr>
-              <a:t> completa (fechas, evaluación, contenido de todas las sesiones).</a:t>
-            </a:r>
-          </a:p>
-          <a:p>
-            <a:pPr>
-              <a:spcAft>
-                <a:spcPts val="1000"/>
-              </a:spcAft>
-            </a:pPr>
-            <a:r>
-              <a:rPr sz="1600" b="0" i="0">
-                <a:solidFill>
-                  <a:srgbClr val="2B2B2B"/>
-                </a:solidFill>
-                <a:latin typeface="Calibri"/>
-              </a:rPr>
-              <a:t>–   Abrir el enunciado de la </a:t>
-            </a:r>
-            <a:r>
-              <a:rPr sz="1600" b="1" i="0">
-                <a:solidFill>
-                  <a:srgbClr val="2B2B2B"/>
-                </a:solidFill>
-                <a:latin typeface="Calibri"/>
-              </a:rPr>
-              <a:t>ACA 1</a:t>
-            </a:r>
-            <a:r>
-              <a:rPr sz="1600" b="0" i="0">
-                <a:solidFill>
-                  <a:srgbClr val="2B2B2B"/>
-                </a:solidFill>
-                <a:latin typeface="Calibri"/>
-              </a:rPr>
-              <a:t> en `Clases/Recursos/ACAs/` y leerlo entero.</a:t>
-            </a:r>
-          </a:p>
-        </p:txBody>
-      </p:sp>
+              <a:t>Mapa del curso: qué pasa en cada uno de los 11 encuentros</a:t>
+            </a:r>
+          </a:p>
+        </p:txBody>
+      </p:sp>
+      <p:graphicFrame>
+        <p:nvGraphicFramePr>
+          <p:cNvPr id="4" name="Table 3"/>
+          <p:cNvGraphicFramePr>
+            <a:graphicFrameLocks noGrp="1"/>
+          </p:cNvGraphicFramePr>
+          <p:nvPr/>
+        </p:nvGraphicFramePr>
+        <p:xfrm>
+          <a:off x="640080" y="1691639"/>
+          <a:ext cx="10911534" cy="4526280"/>
+        </p:xfrm>
+        <a:graphic>
+          <a:graphicData uri="http://schemas.openxmlformats.org/drawingml/2006/table">
+            <a:tbl>
+              <a:tblPr>
+                <a:tableStyleId>{2D5ABB26-0587-4C30-8999-92F81FD0307C}</a:tableStyleId>
+              </a:tblPr>
+              <a:tblGrid>
+                <a:gridCol w="1091153"/>
+                <a:gridCol w="7241291"/>
+                <a:gridCol w="2579090"/>
+              </a:tblGrid>
+              <a:tr h="502920">
+                <a:tc>
+                  <a:txBody>
+                    <a:bodyPr/>
+                    <a:lstStyle/>
+                    <a:p>
+                      <a:pPr algn="l"/>
+                      <a:r>
+                        <a:rPr sz="1300" b="1" i="0">
+                          <a:solidFill>
+                            <a:srgbClr val="FFFFFF"/>
+                          </a:solidFill>
+                          <a:latin typeface="Calibri"/>
+                        </a:rPr>
+                        <a:t>Sesión</a:t>
+                      </a:r>
+                    </a:p>
+                  </a:txBody>
+                  <a:tcPr anchor="ctr" marL="109728" marR="91440" marT="36576" marB="36576">
+                    <a:solidFill>
+                      <a:srgbClr val="0C2340"/>
+                    </a:solidFill>
+                  </a:tcPr>
+                </a:tc>
+                <a:tc>
+                  <a:txBody>
+                    <a:bodyPr/>
+                    <a:lstStyle/>
+                    <a:p>
+                      <a:pPr algn="l"/>
+                      <a:r>
+                        <a:rPr sz="1300" b="1" i="0">
+                          <a:solidFill>
+                            <a:srgbClr val="FFFFFF"/>
+                          </a:solidFill>
+                          <a:latin typeface="Calibri"/>
+                        </a:rPr>
+                        <a:t>De qué se ocupa</a:t>
+                      </a:r>
+                    </a:p>
+                  </a:txBody>
+                  <a:tcPr anchor="ctr" marL="109728" marR="91440" marT="36576" marB="36576">
+                    <a:solidFill>
+                      <a:srgbClr val="0C2340"/>
+                    </a:solidFill>
+                  </a:tcPr>
+                </a:tc>
+                <a:tc>
+                  <a:txBody>
+                    <a:bodyPr/>
+                    <a:lstStyle/>
+                    <a:p>
+                      <a:pPr algn="l"/>
+                      <a:r>
+                        <a:rPr sz="1300" b="1" i="0">
+                          <a:solidFill>
+                            <a:srgbClr val="FFFFFF"/>
+                          </a:solidFill>
+                          <a:latin typeface="Calibri"/>
+                        </a:rPr>
+                        <a:t>Bloque</a:t>
+                      </a:r>
+                    </a:p>
+                  </a:txBody>
+                  <a:tcPr anchor="ctr" marL="109728" marR="91440" marT="36576" marB="36576">
+                    <a:solidFill>
+                      <a:srgbClr val="0C2340"/>
+                    </a:solidFill>
+                  </a:tcPr>
+                </a:tc>
+              </a:tr>
+              <a:tr h="502920">
+                <a:tc>
+                  <a:txBody>
+                    <a:bodyPr/>
+                    <a:lstStyle/>
+                    <a:p>
+                      <a:pPr algn="l"/>
+                      <a:r>
+                        <a:rPr sz="1100" b="1" i="0">
+                          <a:solidFill>
+                            <a:srgbClr val="2B2B2B"/>
+                          </a:solidFill>
+                          <a:latin typeface="Calibri"/>
+                        </a:rPr>
+                        <a:t>01</a:t>
+                      </a:r>
+                    </a:p>
+                  </a:txBody>
+                  <a:tcPr anchor="ctr" marL="109728" marR="91440" marT="36576" marB="36576">
+                    <a:solidFill>
+                      <a:srgbClr val="FFFFFF"/>
+                    </a:solidFill>
+                  </a:tcPr>
+                </a:tc>
+                <a:tc>
+                  <a:txBody>
+                    <a:bodyPr/>
+                    <a:lstStyle/>
+                    <a:p>
+                      <a:pPr algn="l"/>
+                      <a:r>
+                        <a:rPr sz="1100" b="0" i="0">
+                          <a:solidFill>
+                            <a:srgbClr val="2B2B2B"/>
+                          </a:solidFill>
+                          <a:latin typeface="Calibri"/>
+                        </a:rPr>
+                        <a:t>Presentación del curso, del Docente, de ustedes y de las ACAs (hoy)</a:t>
+                      </a:r>
+                    </a:p>
+                  </a:txBody>
+                  <a:tcPr anchor="ctr" marL="109728" marR="91440" marT="36576" marB="36576">
+                    <a:solidFill>
+                      <a:srgbClr val="FFFFFF"/>
+                    </a:solidFill>
+                  </a:tcPr>
+                </a:tc>
+                <a:tc>
+                  <a:txBody>
+                    <a:bodyPr/>
+                    <a:lstStyle/>
+                    <a:p>
+                      <a:pPr algn="l"/>
+                      <a:r>
+                        <a:rPr sz="1100" b="0" i="0">
+                          <a:solidFill>
+                            <a:srgbClr val="2B2B2B"/>
+                          </a:solidFill>
+                          <a:latin typeface="Calibri"/>
+                        </a:rPr>
+                        <a:t>Encuadre</a:t>
+                      </a:r>
+                    </a:p>
+                  </a:txBody>
+                  <a:tcPr anchor="ctr" marL="109728" marR="91440" marT="36576" marB="36576">
+                    <a:solidFill>
+                      <a:srgbClr val="FFFFFF"/>
+                    </a:solidFill>
+                  </a:tcPr>
+                </a:tc>
+              </a:tr>
+              <a:tr h="502920">
+                <a:tc>
+                  <a:txBody>
+                    <a:bodyPr/>
+                    <a:lstStyle/>
+                    <a:p>
+                      <a:pPr algn="l"/>
+                      <a:r>
+                        <a:rPr sz="1100" b="1" i="0">
+                          <a:solidFill>
+                            <a:srgbClr val="2B2B2B"/>
+                          </a:solidFill>
+                          <a:latin typeface="Calibri"/>
+                        </a:rPr>
+                        <a:t>02</a:t>
+                      </a:r>
+                    </a:p>
+                  </a:txBody>
+                  <a:tcPr anchor="ctr" marL="109728" marR="91440" marT="36576" marB="36576">
+                    <a:solidFill>
+                      <a:srgbClr val="F2F2F2"/>
+                    </a:solidFill>
+                  </a:tcPr>
+                </a:tc>
+                <a:tc>
+                  <a:txBody>
+                    <a:bodyPr/>
+                    <a:lstStyle/>
+                    <a:p>
+                      <a:pPr algn="l"/>
+                      <a:r>
+                        <a:rPr sz="1100" b="0" i="0">
+                          <a:solidFill>
+                            <a:srgbClr val="2B2B2B"/>
+                          </a:solidFill>
+                          <a:latin typeface="Calibri"/>
+                        </a:rPr>
+                        <a:t>Problema y pregunta de investigación</a:t>
+                      </a:r>
+                    </a:p>
+                  </a:txBody>
+                  <a:tcPr anchor="ctr" marL="109728" marR="91440" marT="36576" marB="36576">
+                    <a:solidFill>
+                      <a:srgbClr val="F2F2F2"/>
+                    </a:solidFill>
+                  </a:tcPr>
+                </a:tc>
+                <a:tc>
+                  <a:txBody>
+                    <a:bodyPr/>
+                    <a:lstStyle/>
+                    <a:p>
+                      <a:pPr algn="l"/>
+                      <a:r>
+                        <a:rPr sz="1100" b="0" i="0">
+                          <a:solidFill>
+                            <a:srgbClr val="2B2B2B"/>
+                          </a:solidFill>
+                          <a:latin typeface="Calibri"/>
+                        </a:rPr>
+                        <a:t>ACA 1</a:t>
+                      </a:r>
+                    </a:p>
+                  </a:txBody>
+                  <a:tcPr anchor="ctr" marL="109728" marR="91440" marT="36576" marB="36576">
+                    <a:solidFill>
+                      <a:srgbClr val="F2F2F2"/>
+                    </a:solidFill>
+                  </a:tcPr>
+                </a:tc>
+              </a:tr>
+              <a:tr h="502920">
+                <a:tc>
+                  <a:txBody>
+                    <a:bodyPr/>
+                    <a:lstStyle/>
+                    <a:p>
+                      <a:pPr algn="l"/>
+                      <a:r>
+                        <a:rPr sz="1100" b="1" i="0">
+                          <a:solidFill>
+                            <a:srgbClr val="2B2B2B"/>
+                          </a:solidFill>
+                          <a:latin typeface="Calibri"/>
+                        </a:rPr>
+                        <a:t>03</a:t>
+                      </a:r>
+                    </a:p>
+                  </a:txBody>
+                  <a:tcPr anchor="ctr" marL="109728" marR="91440" marT="36576" marB="36576">
+                    <a:solidFill>
+                      <a:srgbClr val="FFFFFF"/>
+                    </a:solidFill>
+                  </a:tcPr>
+                </a:tc>
+                <a:tc>
+                  <a:txBody>
+                    <a:bodyPr/>
+                    <a:lstStyle/>
+                    <a:p>
+                      <a:pPr algn="l"/>
+                      <a:r>
+                        <a:rPr sz="1100" b="0" i="0">
+                          <a:solidFill>
+                            <a:srgbClr val="2B2B2B"/>
+                          </a:solidFill>
+                          <a:latin typeface="Calibri"/>
+                        </a:rPr>
+                        <a:t>Objetivos, justificación, alcances y limitaciones</a:t>
+                      </a:r>
+                    </a:p>
+                  </a:txBody>
+                  <a:tcPr anchor="ctr" marL="109728" marR="91440" marT="36576" marB="36576">
+                    <a:solidFill>
+                      <a:srgbClr val="FFFFFF"/>
+                    </a:solidFill>
+                  </a:tcPr>
+                </a:tc>
+                <a:tc>
+                  <a:txBody>
+                    <a:bodyPr/>
+                    <a:lstStyle/>
+                    <a:p>
+                      <a:pPr algn="l"/>
+                      <a:r>
+                        <a:rPr sz="1100" b="0" i="0">
+                          <a:solidFill>
+                            <a:srgbClr val="2B2B2B"/>
+                          </a:solidFill>
+                          <a:latin typeface="Calibri"/>
+                        </a:rPr>
+                        <a:t>ACA 1</a:t>
+                      </a:r>
+                    </a:p>
+                  </a:txBody>
+                  <a:tcPr anchor="ctr" marL="109728" marR="91440" marT="36576" marB="36576">
+                    <a:solidFill>
+                      <a:srgbClr val="FFFFFF"/>
+                    </a:solidFill>
+                  </a:tcPr>
+                </a:tc>
+              </a:tr>
+              <a:tr h="502920">
+                <a:tc>
+                  <a:txBody>
+                    <a:bodyPr/>
+                    <a:lstStyle/>
+                    <a:p>
+                      <a:pPr algn="l"/>
+                      <a:r>
+                        <a:rPr sz="1100" b="1" i="0">
+                          <a:solidFill>
+                            <a:srgbClr val="2B2B2B"/>
+                          </a:solidFill>
+                          <a:latin typeface="Calibri"/>
+                        </a:rPr>
+                        <a:t>04</a:t>
+                      </a:r>
+                    </a:p>
+                  </a:txBody>
+                  <a:tcPr anchor="ctr" marL="109728" marR="91440" marT="36576" marB="36576">
+                    <a:solidFill>
+                      <a:srgbClr val="F2F2F2"/>
+                    </a:solidFill>
+                  </a:tcPr>
+                </a:tc>
+                <a:tc>
+                  <a:txBody>
+                    <a:bodyPr/>
+                    <a:lstStyle/>
+                    <a:p>
+                      <a:pPr algn="l"/>
+                      <a:r>
+                        <a:rPr sz="1100" b="0" i="0">
+                          <a:solidFill>
+                            <a:srgbClr val="2B2B2B"/>
+                          </a:solidFill>
+                          <a:latin typeface="Calibri"/>
+                        </a:rPr>
+                        <a:t>Retroalimentación de la ACA 1 · antecedentes de investigación</a:t>
+                      </a:r>
+                    </a:p>
+                  </a:txBody>
+                  <a:tcPr anchor="ctr" marL="109728" marR="91440" marT="36576" marB="36576">
+                    <a:solidFill>
+                      <a:srgbClr val="F2F2F2"/>
+                    </a:solidFill>
+                  </a:tcPr>
+                </a:tc>
+                <a:tc>
+                  <a:txBody>
+                    <a:bodyPr/>
+                    <a:lstStyle/>
+                    <a:p>
+                      <a:pPr algn="l"/>
+                      <a:r>
+                        <a:rPr sz="1100" b="0" i="0">
+                          <a:solidFill>
+                            <a:srgbClr val="2B2B2B"/>
+                          </a:solidFill>
+                          <a:latin typeface="Calibri"/>
+                        </a:rPr>
+                        <a:t>ACA 2</a:t>
+                      </a:r>
+                    </a:p>
+                  </a:txBody>
+                  <a:tcPr anchor="ctr" marL="109728" marR="91440" marT="36576" marB="36576">
+                    <a:solidFill>
+                      <a:srgbClr val="F2F2F2"/>
+                    </a:solidFill>
+                  </a:tcPr>
+                </a:tc>
+              </a:tr>
+              <a:tr h="502920">
+                <a:tc>
+                  <a:txBody>
+                    <a:bodyPr/>
+                    <a:lstStyle/>
+                    <a:p>
+                      <a:pPr algn="l"/>
+                      <a:r>
+                        <a:rPr sz="1100" b="1" i="0">
+                          <a:solidFill>
+                            <a:srgbClr val="2B2B2B"/>
+                          </a:solidFill>
+                          <a:latin typeface="Calibri"/>
+                        </a:rPr>
+                        <a:t>05</a:t>
+                      </a:r>
+                    </a:p>
+                  </a:txBody>
+                  <a:tcPr anchor="ctr" marL="109728" marR="91440" marT="36576" marB="36576">
+                    <a:solidFill>
+                      <a:srgbClr val="FFFFFF"/>
+                    </a:solidFill>
+                  </a:tcPr>
+                </a:tc>
+                <a:tc>
+                  <a:txBody>
+                    <a:bodyPr/>
+                    <a:lstStyle/>
+                    <a:p>
+                      <a:pPr algn="l"/>
+                      <a:r>
+                        <a:rPr sz="1100" b="0" i="0">
+                          <a:solidFill>
+                            <a:srgbClr val="2B2B2B"/>
+                          </a:solidFill>
+                          <a:latin typeface="Calibri"/>
+                        </a:rPr>
+                        <a:t>Marco teórico</a:t>
+                      </a:r>
+                    </a:p>
+                  </a:txBody>
+                  <a:tcPr anchor="ctr" marL="109728" marR="91440" marT="36576" marB="36576">
+                    <a:solidFill>
+                      <a:srgbClr val="FFFFFF"/>
+                    </a:solidFill>
+                  </a:tcPr>
+                </a:tc>
+                <a:tc>
+                  <a:txBody>
+                    <a:bodyPr/>
+                    <a:lstStyle/>
+                    <a:p>
+                      <a:pPr algn="l"/>
+                      <a:r>
+                        <a:rPr sz="1100" b="0" i="0">
+                          <a:solidFill>
+                            <a:srgbClr val="2B2B2B"/>
+                          </a:solidFill>
+                          <a:latin typeface="Calibri"/>
+                        </a:rPr>
+                        <a:t>ACA 2</a:t>
+                      </a:r>
+                    </a:p>
+                  </a:txBody>
+                  <a:tcPr anchor="ctr" marL="109728" marR="91440" marT="36576" marB="36576">
+                    <a:solidFill>
+                      <a:srgbClr val="FFFFFF"/>
+                    </a:solidFill>
+                  </a:tcPr>
+                </a:tc>
+              </a:tr>
+              <a:tr h="502920">
+                <a:tc>
+                  <a:txBody>
+                    <a:bodyPr/>
+                    <a:lstStyle/>
+                    <a:p>
+                      <a:pPr algn="l"/>
+                      <a:r>
+                        <a:rPr sz="1100" b="1" i="0">
+                          <a:solidFill>
+                            <a:srgbClr val="2B2B2B"/>
+                          </a:solidFill>
+                          <a:latin typeface="Calibri"/>
+                        </a:rPr>
+                        <a:t>06</a:t>
+                      </a:r>
+                    </a:p>
+                  </a:txBody>
+                  <a:tcPr anchor="ctr" marL="109728" marR="91440" marT="36576" marB="36576">
+                    <a:solidFill>
+                      <a:srgbClr val="F2F2F2"/>
+                    </a:solidFill>
+                  </a:tcPr>
+                </a:tc>
+                <a:tc>
+                  <a:txBody>
+                    <a:bodyPr/>
+                    <a:lstStyle/>
+                    <a:p>
+                      <a:pPr algn="l"/>
+                      <a:r>
+                        <a:rPr sz="1100" b="0" i="0">
+                          <a:solidFill>
+                            <a:srgbClr val="2B2B2B"/>
+                          </a:solidFill>
+                          <a:latin typeface="Calibri"/>
+                        </a:rPr>
+                        <a:t>Marco conceptual y marco contextual</a:t>
+                      </a:r>
+                    </a:p>
+                  </a:txBody>
+                  <a:tcPr anchor="ctr" marL="109728" marR="91440" marT="36576" marB="36576">
+                    <a:solidFill>
+                      <a:srgbClr val="F2F2F2"/>
+                    </a:solidFill>
+                  </a:tcPr>
+                </a:tc>
+                <a:tc>
+                  <a:txBody>
+                    <a:bodyPr/>
+                    <a:lstStyle/>
+                    <a:p>
+                      <a:pPr algn="l"/>
+                      <a:r>
+                        <a:rPr sz="1100" b="0" i="0">
+                          <a:solidFill>
+                            <a:srgbClr val="2B2B2B"/>
+                          </a:solidFill>
+                          <a:latin typeface="Calibri"/>
+                        </a:rPr>
+                        <a:t>ACA 2</a:t>
+                      </a:r>
+                    </a:p>
+                  </a:txBody>
+                  <a:tcPr anchor="ctr" marL="109728" marR="91440" marT="36576" marB="36576">
+                    <a:solidFill>
+                      <a:srgbClr val="F2F2F2"/>
+                    </a:solidFill>
+                  </a:tcPr>
+                </a:tc>
+              </a:tr>
+              <a:tr h="502920">
+                <a:tc>
+                  <a:txBody>
+                    <a:bodyPr/>
+                    <a:lstStyle/>
+                    <a:p>
+                      <a:pPr algn="l"/>
+                      <a:r>
+                        <a:rPr sz="1100" b="1" i="0">
+                          <a:solidFill>
+                            <a:srgbClr val="2B2B2B"/>
+                          </a:solidFill>
+                          <a:latin typeface="Calibri"/>
+                        </a:rPr>
+                        <a:t>07</a:t>
+                      </a:r>
+                    </a:p>
+                  </a:txBody>
+                  <a:tcPr anchor="ctr" marL="109728" marR="91440" marT="36576" marB="36576">
+                    <a:solidFill>
+                      <a:srgbClr val="FFFFFF"/>
+                    </a:solidFill>
+                  </a:tcPr>
+                </a:tc>
+                <a:tc>
+                  <a:txBody>
+                    <a:bodyPr/>
+                    <a:lstStyle/>
+                    <a:p>
+                      <a:pPr algn="l"/>
+                      <a:r>
+                        <a:rPr sz="1100" b="0" i="0">
+                          <a:solidFill>
+                            <a:srgbClr val="2B2B2B"/>
+                          </a:solidFill>
+                          <a:latin typeface="Calibri"/>
+                        </a:rPr>
+                        <a:t>Marco legal · citación en APA 7</a:t>
+                      </a:r>
+                    </a:p>
+                  </a:txBody>
+                  <a:tcPr anchor="ctr" marL="109728" marR="91440" marT="36576" marB="36576">
+                    <a:solidFill>
+                      <a:srgbClr val="FFFFFF"/>
+                    </a:solidFill>
+                  </a:tcPr>
+                </a:tc>
+                <a:tc>
+                  <a:txBody>
+                    <a:bodyPr/>
+                    <a:lstStyle/>
+                    <a:p>
+                      <a:pPr algn="l"/>
+                      <a:r>
+                        <a:rPr sz="1100" b="0" i="0">
+                          <a:solidFill>
+                            <a:srgbClr val="2B2B2B"/>
+                          </a:solidFill>
+                          <a:latin typeface="Calibri"/>
+                        </a:rPr>
+                        <a:t>ACA 2</a:t>
+                      </a:r>
+                    </a:p>
+                  </a:txBody>
+                  <a:tcPr anchor="ctr" marL="109728" marR="91440" marT="36576" marB="36576">
+                    <a:solidFill>
+                      <a:srgbClr val="FFFFFF"/>
+                    </a:solidFill>
+                  </a:tcPr>
+                </a:tc>
+              </a:tr>
+              <a:tr h="502920">
+                <a:tc>
+                  <a:txBody>
+                    <a:bodyPr/>
+                    <a:lstStyle/>
+                    <a:p>
+                      <a:pPr algn="l"/>
+                      <a:r>
+                        <a:rPr sz="1100" b="1" i="0">
+                          <a:solidFill>
+                            <a:srgbClr val="2B2B2B"/>
+                          </a:solidFill>
+                          <a:latin typeface="Calibri"/>
+                        </a:rPr>
+                        <a:t>08</a:t>
+                      </a:r>
+                    </a:p>
+                  </a:txBody>
+                  <a:tcPr anchor="ctr" marL="109728" marR="91440" marT="36576" marB="36576">
+                    <a:solidFill>
+                      <a:srgbClr val="F2F2F2"/>
+                    </a:solidFill>
+                  </a:tcPr>
+                </a:tc>
+                <a:tc>
+                  <a:txBody>
+                    <a:bodyPr/>
+                    <a:lstStyle/>
+                    <a:p>
+                      <a:pPr algn="l"/>
+                      <a:r>
+                        <a:rPr sz="1100" b="0" i="0">
+                          <a:solidFill>
+                            <a:srgbClr val="2B2B2B"/>
+                          </a:solidFill>
+                          <a:latin typeface="Calibri"/>
+                        </a:rPr>
+                        <a:t>Diseño metodológico: paradigma, enfoque y alcance</a:t>
+                      </a:r>
+                    </a:p>
+                  </a:txBody>
+                  <a:tcPr anchor="ctr" marL="109728" marR="91440" marT="36576" marB="36576">
+                    <a:solidFill>
+                      <a:srgbClr val="F2F2F2"/>
+                    </a:solidFill>
+                  </a:tcPr>
+                </a:tc>
+                <a:tc>
+                  <a:txBody>
+                    <a:bodyPr/>
+                    <a:lstStyle/>
+                    <a:p>
+                      <a:pPr algn="l"/>
+                      <a:r>
+                        <a:rPr sz="1100" b="0" i="0">
+                          <a:solidFill>
+                            <a:srgbClr val="2B2B2B"/>
+                          </a:solidFill>
+                          <a:latin typeface="Calibri"/>
+                        </a:rPr>
+                        <a:t>Puente</a:t>
+                      </a:r>
+                    </a:p>
+                  </a:txBody>
+                  <a:tcPr anchor="ctr" marL="109728" marR="91440" marT="36576" marB="36576">
+                    <a:solidFill>
+                      <a:srgbClr val="F2F2F2"/>
+                    </a:solidFill>
+                  </a:tcPr>
+                </a:tc>
+              </a:tr>
+            </a:tbl>
+          </a:graphicData>
+        </a:graphic>
+      </p:graphicFrame>
       <p:sp>
         <p:nvSpPr>
           <p:cNvPr id="5" name="TextBox 4"/>
@@ -6326,13 +12859,13 @@
         <p:spPr>
           <a:xfrm>
             <a:off x="0" y="0"/>
-            <a:ext cx="12191695" cy="164592"/>
+            <a:ext cx="12191695" cy="1188720"/>
           </a:xfrm>
           <a:prstGeom prst="rect">
             <a:avLst/>
           </a:prstGeom>
           <a:solidFill>
-            <a:srgbClr val="007433"/>
+            <a:srgbClr val="0C2340"/>
           </a:solidFill>
           <a:ln>
             <a:noFill/>
@@ -6361,40 +12894,16 @@
           </a:p>
         </p:txBody>
       </p:sp>
-      <p:pic>
-        <p:nvPicPr>
-          <p:cNvPr id="3" name="Picture 2" descr="logo_cun_solo.png"/>
-          <p:cNvPicPr>
-            <a:picLocks noChangeAspect="1"/>
-          </p:cNvPicPr>
-          <p:nvPr/>
-        </p:nvPicPr>
-        <p:blipFill>
-          <a:blip r:embed="rId2"/>
-          <a:stretch>
-            <a:fillRect/>
-          </a:stretch>
-        </p:blipFill>
-        <p:spPr>
-          <a:xfrm>
-            <a:off x="10362895" y="5632704"/>
-            <a:ext cx="1371600" cy="950976"/>
-          </a:xfrm>
-          <a:prstGeom prst="rect">
-            <a:avLst/>
-          </a:prstGeom>
-        </p:spPr>
-      </p:pic>
-      <p:sp>
-        <p:nvSpPr>
-          <p:cNvPr id="4" name="TextBox 3"/>
+      <p:sp>
+        <p:nvSpPr>
+          <p:cNvPr id="3" name="TextBox 2"/>
           <p:cNvSpPr txBox="1"/>
           <p:nvPr/>
         </p:nvSpPr>
         <p:spPr>
           <a:xfrm>
-            <a:off x="640080" y="1737360"/>
-            <a:ext cx="10911535" cy="1097280"/>
+            <a:off x="640080" y="0"/>
+            <a:ext cx="9082735" cy="1188720"/>
           </a:xfrm>
           <a:prstGeom prst="rect">
             <a:avLst/>
@@ -6409,17 +12918,337 @@
           <a:p>
             <a:pPr algn="ctr"/>
             <a:r>
-              <a:rPr sz="3400" b="1" i="0">
-                <a:solidFill>
-                  <a:srgbClr val="0C2340"/>
-                </a:solidFill>
-                <a:latin typeface="Calibri"/>
-              </a:rPr>
-              <a:t>Cierre — Sesión 01</a:t>
-            </a:r>
-          </a:p>
-        </p:txBody>
-      </p:sp>
+              <a:rPr sz="2600" b="1" i="0">
+                <a:solidFill>
+                  <a:srgbClr val="FFFFFF"/>
+                </a:solidFill>
+                <a:latin typeface="Calibri"/>
+              </a:rPr>
+              <a:t>Mapa del curso: qué pasa en cada uno de los 11 encuentros (cont.)</a:t>
+            </a:r>
+          </a:p>
+        </p:txBody>
+      </p:sp>
+      <p:graphicFrame>
+        <p:nvGraphicFramePr>
+          <p:cNvPr id="4" name="Table 3"/>
+          <p:cNvGraphicFramePr>
+            <a:graphicFrameLocks noGrp="1"/>
+          </p:cNvGraphicFramePr>
+          <p:nvPr/>
+        </p:nvGraphicFramePr>
+        <p:xfrm>
+          <a:off x="640080" y="1691639"/>
+          <a:ext cx="10911534" cy="2011680"/>
+        </p:xfrm>
+        <a:graphic>
+          <a:graphicData uri="http://schemas.openxmlformats.org/drawingml/2006/table">
+            <a:tbl>
+              <a:tblPr>
+                <a:tableStyleId>{2D5ABB26-0587-4C30-8999-92F81FD0307C}</a:tableStyleId>
+              </a:tblPr>
+              <a:tblGrid>
+                <a:gridCol w="1091153"/>
+                <a:gridCol w="7241291"/>
+                <a:gridCol w="2579090"/>
+              </a:tblGrid>
+              <a:tr h="502920">
+                <a:tc>
+                  <a:txBody>
+                    <a:bodyPr/>
+                    <a:lstStyle/>
+                    <a:p>
+                      <a:pPr algn="l"/>
+                      <a:r>
+                        <a:rPr sz="1300" b="1" i="0">
+                          <a:solidFill>
+                            <a:srgbClr val="FFFFFF"/>
+                          </a:solidFill>
+                          <a:latin typeface="Calibri"/>
+                        </a:rPr>
+                        <a:t>Sesión</a:t>
+                      </a:r>
+                    </a:p>
+                  </a:txBody>
+                  <a:tcPr anchor="ctr" marL="109728" marR="91440" marT="36576" marB="36576">
+                    <a:solidFill>
+                      <a:srgbClr val="0C2340"/>
+                    </a:solidFill>
+                  </a:tcPr>
+                </a:tc>
+                <a:tc>
+                  <a:txBody>
+                    <a:bodyPr/>
+                    <a:lstStyle/>
+                    <a:p>
+                      <a:pPr algn="l"/>
+                      <a:r>
+                        <a:rPr sz="1300" b="1" i="0">
+                          <a:solidFill>
+                            <a:srgbClr val="FFFFFF"/>
+                          </a:solidFill>
+                          <a:latin typeface="Calibri"/>
+                        </a:rPr>
+                        <a:t>De qué se ocupa</a:t>
+                      </a:r>
+                    </a:p>
+                  </a:txBody>
+                  <a:tcPr anchor="ctr" marL="109728" marR="91440" marT="36576" marB="36576">
+                    <a:solidFill>
+                      <a:srgbClr val="0C2340"/>
+                    </a:solidFill>
+                  </a:tcPr>
+                </a:tc>
+                <a:tc>
+                  <a:txBody>
+                    <a:bodyPr/>
+                    <a:lstStyle/>
+                    <a:p>
+                      <a:pPr algn="l"/>
+                      <a:r>
+                        <a:rPr sz="1300" b="1" i="0">
+                          <a:solidFill>
+                            <a:srgbClr val="FFFFFF"/>
+                          </a:solidFill>
+                          <a:latin typeface="Calibri"/>
+                        </a:rPr>
+                        <a:t>Bloque</a:t>
+                      </a:r>
+                    </a:p>
+                  </a:txBody>
+                  <a:tcPr anchor="ctr" marL="109728" marR="91440" marT="36576" marB="36576">
+                    <a:solidFill>
+                      <a:srgbClr val="0C2340"/>
+                    </a:solidFill>
+                  </a:tcPr>
+                </a:tc>
+              </a:tr>
+              <a:tr h="502920">
+                <a:tc>
+                  <a:txBody>
+                    <a:bodyPr/>
+                    <a:lstStyle/>
+                    <a:p>
+                      <a:pPr algn="l"/>
+                      <a:r>
+                        <a:rPr sz="1200" b="1" i="0">
+                          <a:solidFill>
+                            <a:srgbClr val="2B2B2B"/>
+                          </a:solidFill>
+                          <a:latin typeface="Calibri"/>
+                        </a:rPr>
+                        <a:t>09</a:t>
+                      </a:r>
+                    </a:p>
+                  </a:txBody>
+                  <a:tcPr anchor="ctr" marL="109728" marR="91440" marT="36576" marB="36576">
+                    <a:solidFill>
+                      <a:srgbClr val="FFFFFF"/>
+                    </a:solidFill>
+                  </a:tcPr>
+                </a:tc>
+                <a:tc>
+                  <a:txBody>
+                    <a:bodyPr/>
+                    <a:lstStyle/>
+                    <a:p>
+                      <a:pPr algn="l"/>
+                      <a:r>
+                        <a:rPr sz="1200" b="0" i="0">
+                          <a:solidFill>
+                            <a:srgbClr val="2B2B2B"/>
+                          </a:solidFill>
+                          <a:latin typeface="Calibri"/>
+                        </a:rPr>
+                        <a:t>Población y muestra, técnicas e instrumentos </a:t>
+                      </a:r>
+                      <a:r>
+                        <a:rPr sz="1200" b="1" i="0">
+                          <a:solidFill>
+                            <a:srgbClr val="2B2B2B"/>
+                          </a:solidFill>
+                          <a:latin typeface="Calibri"/>
+                        </a:rPr>
+                        <a:t>propuestos</a:t>
+                      </a:r>
+                    </a:p>
+                  </a:txBody>
+                  <a:tcPr anchor="ctr" marL="109728" marR="91440" marT="36576" marB="36576">
+                    <a:solidFill>
+                      <a:srgbClr val="FFFFFF"/>
+                    </a:solidFill>
+                  </a:tcPr>
+                </a:tc>
+                <a:tc>
+                  <a:txBody>
+                    <a:bodyPr/>
+                    <a:lstStyle/>
+                    <a:p>
+                      <a:pPr algn="l"/>
+                      <a:r>
+                        <a:rPr sz="1200" b="0" i="0">
+                          <a:solidFill>
+                            <a:srgbClr val="2B2B2B"/>
+                          </a:solidFill>
+                          <a:latin typeface="Calibri"/>
+                        </a:rPr>
+                        <a:t>ACA 3</a:t>
+                      </a:r>
+                    </a:p>
+                  </a:txBody>
+                  <a:tcPr anchor="ctr" marL="109728" marR="91440" marT="36576" marB="36576">
+                    <a:solidFill>
+                      <a:srgbClr val="FFFFFF"/>
+                    </a:solidFill>
+                  </a:tcPr>
+                </a:tc>
+              </a:tr>
+              <a:tr h="502920">
+                <a:tc>
+                  <a:txBody>
+                    <a:bodyPr/>
+                    <a:lstStyle/>
+                    <a:p>
+                      <a:pPr algn="l"/>
+                      <a:r>
+                        <a:rPr sz="1200" b="1" i="0">
+                          <a:solidFill>
+                            <a:srgbClr val="2B2B2B"/>
+                          </a:solidFill>
+                          <a:latin typeface="Calibri"/>
+                        </a:rPr>
+                        <a:t>10</a:t>
+                      </a:r>
+                    </a:p>
+                  </a:txBody>
+                  <a:tcPr anchor="ctr" marL="109728" marR="91440" marT="36576" marB="36576">
+                    <a:solidFill>
+                      <a:srgbClr val="F2F2F2"/>
+                    </a:solidFill>
+                  </a:tcPr>
+                </a:tc>
+                <a:tc>
+                  <a:txBody>
+                    <a:bodyPr/>
+                    <a:lstStyle/>
+                    <a:p>
+                      <a:pPr algn="l"/>
+                      <a:r>
+                        <a:rPr sz="1200" b="0" i="0">
+                          <a:solidFill>
+                            <a:srgbClr val="2B2B2B"/>
+                          </a:solidFill>
+                          <a:latin typeface="Calibri"/>
+                        </a:rPr>
+                        <a:t>Planeación, viabilidad e integración del anteproyecto</a:t>
+                      </a:r>
+                    </a:p>
+                  </a:txBody>
+                  <a:tcPr anchor="ctr" marL="109728" marR="91440" marT="36576" marB="36576">
+                    <a:solidFill>
+                      <a:srgbClr val="F2F2F2"/>
+                    </a:solidFill>
+                  </a:tcPr>
+                </a:tc>
+                <a:tc>
+                  <a:txBody>
+                    <a:bodyPr/>
+                    <a:lstStyle/>
+                    <a:p>
+                      <a:pPr algn="l"/>
+                      <a:r>
+                        <a:rPr sz="1200" b="0" i="0">
+                          <a:solidFill>
+                            <a:srgbClr val="2B2B2B"/>
+                          </a:solidFill>
+                          <a:latin typeface="Calibri"/>
+                        </a:rPr>
+                        <a:t>ACA 3</a:t>
+                      </a:r>
+                    </a:p>
+                  </a:txBody>
+                  <a:tcPr anchor="ctr" marL="109728" marR="91440" marT="36576" marB="36576">
+                    <a:solidFill>
+                      <a:srgbClr val="F2F2F2"/>
+                    </a:solidFill>
+                  </a:tcPr>
+                </a:tc>
+              </a:tr>
+              <a:tr h="502920">
+                <a:tc>
+                  <a:txBody>
+                    <a:bodyPr/>
+                    <a:lstStyle/>
+                    <a:p>
+                      <a:pPr algn="l"/>
+                      <a:r>
+                        <a:rPr sz="1200" b="1" i="0">
+                          <a:solidFill>
+                            <a:srgbClr val="2B2B2B"/>
+                          </a:solidFill>
+                          <a:latin typeface="Calibri"/>
+                        </a:rPr>
+                        <a:t>11</a:t>
+                      </a:r>
+                    </a:p>
+                  </a:txBody>
+                  <a:tcPr anchor="ctr" marL="109728" marR="91440" marT="36576" marB="36576">
+                    <a:solidFill>
+                      <a:srgbClr val="FFFFFF"/>
+                    </a:solidFill>
+                  </a:tcPr>
+                </a:tc>
+                <a:tc>
+                  <a:txBody>
+                    <a:bodyPr/>
+                    <a:lstStyle/>
+                    <a:p>
+                      <a:pPr algn="l"/>
+                      <a:r>
+                        <a:rPr sz="1200" b="0" i="0">
+                          <a:solidFill>
+                            <a:srgbClr val="2B2B2B"/>
+                          </a:solidFill>
+                          <a:latin typeface="Calibri"/>
+                        </a:rPr>
+                        <a:t>Integración y evaluación · coevaluación y autoevaluación</a:t>
+                      </a:r>
+                    </a:p>
+                  </a:txBody>
+                  <a:tcPr anchor="ctr" marL="109728" marR="91440" marT="36576" marB="36576">
+                    <a:solidFill>
+                      <a:srgbClr val="FFFFFF"/>
+                    </a:solidFill>
+                  </a:tcPr>
+                </a:tc>
+                <a:tc>
+                  <a:txBody>
+                    <a:bodyPr/>
+                    <a:lstStyle/>
+                    <a:p>
+                      <a:pPr algn="l"/>
+                      <a:r>
+                        <a:rPr sz="1200" b="0" i="0">
+                          <a:solidFill>
+                            <a:srgbClr val="2B2B2B"/>
+                          </a:solidFill>
+                          <a:latin typeface="Calibri"/>
+                        </a:rPr>
+                        <a:t>Cierre</a:t>
+                      </a:r>
+                    </a:p>
+                  </a:txBody>
+                  <a:tcPr anchor="ctr" marL="109728" marR="91440" marT="36576" marB="36576">
+                    <a:solidFill>
+                      <a:srgbClr val="FFFFFF"/>
+                    </a:solidFill>
+                  </a:tcPr>
+                </a:tc>
+              </a:tr>
+            </a:tbl>
+          </a:graphicData>
+        </a:graphic>
+      </p:graphicFrame>
       <p:sp>
         <p:nvSpPr>
           <p:cNvPr id="5" name="TextBox 4"/>
@@ -6428,8 +13257,8 @@
         </p:nvSpPr>
         <p:spPr>
           <a:xfrm>
-            <a:off x="640080" y="3017520"/>
-            <a:ext cx="10911535" cy="1645920"/>
+            <a:off x="640080" y="3840480"/>
+            <a:ext cx="10911535" cy="548640"/>
           </a:xfrm>
           <a:prstGeom prst="rect">
             <a:avLst/>
@@ -6442,35 +13271,357 @@
           </a:bodyPr>
           <a:lstStyle/>
           <a:p>
-            <a:pPr algn="ctr">
+            <a:r>
+              <a:rPr sz="1200" b="0" i="1">
+                <a:solidFill>
+                  <a:srgbClr val="2B2B2B"/>
+                </a:solidFill>
+                <a:latin typeface="Calibri"/>
+              </a:rPr>
+              <a:t>La unidad de </a:t>
+            </a:r>
+            <a:r>
+              <a:rPr sz="1200" b="1" i="1">
+                <a:solidFill>
+                  <a:srgbClr val="2B2B2B"/>
+                </a:solidFill>
+                <a:latin typeface="Calibri"/>
+              </a:rPr>
+              <a:t>fundamentos y enfoque de investigación (U1 del programa)</a:t>
+            </a:r>
+            <a:r>
+              <a:rPr sz="1200" b="0" i="1">
+                <a:solidFill>
+                  <a:srgbClr val="2B2B2B"/>
+                </a:solidFill>
+                <a:latin typeface="Calibri"/>
+              </a:rPr>
+              <a:t> pasa a </a:t>
+            </a:r>
+            <a:r>
+              <a:rPr sz="1200" b="1" i="1">
+                <a:solidFill>
+                  <a:srgbClr val="2B2B2B"/>
+                </a:solidFill>
+                <a:latin typeface="Calibri"/>
+              </a:rPr>
+              <a:t>lectura autónoma</a:t>
+            </a:r>
+            <a:r>
+              <a:rPr sz="1200" b="0" i="1">
+                <a:solidFill>
+                  <a:srgbClr val="2B2B2B"/>
+                </a:solidFill>
+                <a:latin typeface="Calibri"/>
+              </a:rPr>
+              <a:t>: hoy hacemos encuadre y la retomamos al abrir la Sesión 02. Fechas exactas de cada encuentro: calendario del curso en CDigital.</a:t>
+            </a:r>
+          </a:p>
+        </p:txBody>
+      </p:sp>
+      <p:sp>
+        <p:nvSpPr>
+          <p:cNvPr id="6" name="TextBox 5"/>
+          <p:cNvSpPr txBox="1"/>
+          <p:nvPr/>
+        </p:nvSpPr>
+        <p:spPr>
+          <a:xfrm>
+            <a:off x="2194560" y="6446520"/>
+            <a:ext cx="5943600" cy="274320"/>
+          </a:xfrm>
+          <a:prstGeom prst="rect">
+            <a:avLst/>
+          </a:prstGeom>
+          <a:noFill/>
+        </p:spPr>
+        <p:txBody>
+          <a:bodyPr wrap="square" anchor="t" lIns="0" rIns="0" tIns="0" bIns="0">
+            <a:spAutoFit/>
+          </a:bodyPr>
+          <a:lstStyle/>
+          <a:p>
+            <a:pPr algn="l"/>
+            <a:r>
+              <a:rPr sz="1000" b="1" i="0">
+                <a:solidFill>
+                  <a:srgbClr val="8F989D"/>
+                </a:solidFill>
+                <a:latin typeface="Calibri"/>
+              </a:rPr>
+              <a:t>Inicio 8:10 pm</a:t>
+            </a:r>
+          </a:p>
+        </p:txBody>
+      </p:sp>
+      <p:sp>
+        <p:nvSpPr>
+          <p:cNvPr id="7" name="TextBox 6"/>
+          <p:cNvSpPr txBox="1"/>
+          <p:nvPr/>
+        </p:nvSpPr>
+        <p:spPr>
+          <a:xfrm>
+            <a:off x="11094415" y="6446520"/>
+            <a:ext cx="548640" cy="274320"/>
+          </a:xfrm>
+          <a:prstGeom prst="rect">
+            <a:avLst/>
+          </a:prstGeom>
+          <a:noFill/>
+        </p:spPr>
+        <p:txBody>
+          <a:bodyPr wrap="square" anchor="t" lIns="0" rIns="0" tIns="0" bIns="0">
+            <a:spAutoFit/>
+          </a:bodyPr>
+          <a:lstStyle/>
+          <a:p>
+            <a:pPr algn="r"/>
+            <a:r>
+              <a:rPr sz="1000" b="1" i="0">
+                <a:solidFill>
+                  <a:srgbClr val="8F989D"/>
+                </a:solidFill>
+                <a:latin typeface="Calibri"/>
+              </a:rPr>
+              <a:t>8</a:t>
+            </a:r>
+          </a:p>
+        </p:txBody>
+      </p:sp>
+    </p:spTree>
+  </p:cSld>
+  <p:clrMapOvr>
+    <a:masterClrMapping/>
+  </p:clrMapOvr>
+</p:sld>
+</file>
+
+<file path=ppt/slides/slide9.xml><?xml version="1.0" encoding="utf-8"?>
+<p:sld xmlns:a="http://schemas.openxmlformats.org/drawingml/2006/main" xmlns:p="http://schemas.openxmlformats.org/presentationml/2006/main" xmlns:r="http://schemas.openxmlformats.org/officeDocument/2006/relationships">
+  <p:cSld>
+    <p:bg>
+      <p:bgPr>
+        <a:solidFill>
+          <a:srgbClr val="FFFFFF"/>
+        </a:solidFill>
+        <a:effectLst/>
+      </p:bgPr>
+    </p:bg>
+    <p:spTree>
+      <p:nvGrpSpPr>
+        <p:cNvPr id="1" name=""/>
+        <p:cNvGrpSpPr/>
+        <p:nvPr/>
+      </p:nvGrpSpPr>
+      <p:grpSpPr/>
+      <p:sp>
+        <p:nvSpPr>
+          <p:cNvPr id="2" name="Rectangle 1"/>
+          <p:cNvSpPr/>
+          <p:nvPr/>
+        </p:nvSpPr>
+        <p:spPr>
+          <a:xfrm>
+            <a:off x="0" y="0"/>
+            <a:ext cx="12191695" cy="1188720"/>
+          </a:xfrm>
+          <a:prstGeom prst="rect">
+            <a:avLst/>
+          </a:prstGeom>
+          <a:solidFill>
+            <a:srgbClr val="0C2340"/>
+          </a:solidFill>
+          <a:ln>
+            <a:noFill/>
+          </a:ln>
+          <a:effectLst/>
+        </p:spPr>
+        <p:style>
+          <a:lnRef idx="1">
+            <a:schemeClr val="accent1"/>
+          </a:lnRef>
+          <a:fillRef idx="3">
+            <a:schemeClr val="accent1"/>
+          </a:fillRef>
+          <a:effectRef idx="2">
+            <a:schemeClr val="accent1"/>
+          </a:effectRef>
+          <a:fontRef idx="minor">
+            <a:schemeClr val="lt1"/>
+          </a:fontRef>
+        </p:style>
+        <p:txBody>
+          <a:bodyPr rtlCol="0" anchor="ctr"/>
+          <a:lstStyle/>
+          <a:p>
+            <a:pPr algn="ctr"/>
+          </a:p>
+        </p:txBody>
+      </p:sp>
+      <p:sp>
+        <p:nvSpPr>
+          <p:cNvPr id="3" name="TextBox 2"/>
+          <p:cNvSpPr txBox="1"/>
+          <p:nvPr/>
+        </p:nvSpPr>
+        <p:spPr>
+          <a:xfrm>
+            <a:off x="640080" y="0"/>
+            <a:ext cx="9082735" cy="1188720"/>
+          </a:xfrm>
+          <a:prstGeom prst="rect">
+            <a:avLst/>
+          </a:prstGeom>
+          <a:noFill/>
+        </p:spPr>
+        <p:txBody>
+          <a:bodyPr wrap="square" anchor="ctr" lIns="0" rIns="0" tIns="0" bIns="0">
+            <a:spAutoFit/>
+          </a:bodyPr>
+          <a:lstStyle/>
+          <a:p>
+            <a:pPr algn="ctr"/>
+            <a:r>
+              <a:rPr sz="2600" b="1" i="0">
+                <a:solidFill>
+                  <a:srgbClr val="FFFFFF"/>
+                </a:solidFill>
+                <a:latin typeface="Calibri"/>
+              </a:rPr>
+              <a:t>El producto del curso: qué archivo entregan al final</a:t>
+            </a:r>
+          </a:p>
+        </p:txBody>
+      </p:sp>
+      <p:sp>
+        <p:nvSpPr>
+          <p:cNvPr id="4" name="TextBox 3"/>
+          <p:cNvSpPr txBox="1"/>
+          <p:nvPr/>
+        </p:nvSpPr>
+        <p:spPr>
+          <a:xfrm>
+            <a:off x="640080" y="1691639"/>
+            <a:ext cx="10911535" cy="4617720"/>
+          </a:xfrm>
+          <a:prstGeom prst="rect">
+            <a:avLst/>
+          </a:prstGeom>
+          <a:noFill/>
+        </p:spPr>
+        <p:txBody>
+          <a:bodyPr wrap="square" anchor="t" lIns="0" rIns="0" tIns="0" bIns="0">
+            <a:spAutoFit/>
+          </a:bodyPr>
+          <a:lstStyle/>
+          <a:p>
+            <a:pPr>
+              <a:spcAft>
+                <a:spcPts val="1000"/>
+              </a:spcAft>
+            </a:pPr>
+            <a:r>
+              <a:rPr sz="1600" b="0" i="0">
+                <a:solidFill>
+                  <a:srgbClr val="2B2B2B"/>
+                </a:solidFill>
+                <a:latin typeface="Calibri"/>
+              </a:rPr>
+              <a:t>–   Al terminar el curso ustedes suben </a:t>
+            </a:r>
+            <a:r>
+              <a:rPr sz="1600" b="1" i="0">
+                <a:solidFill>
+                  <a:srgbClr val="2B2B2B"/>
+                </a:solidFill>
+                <a:latin typeface="Calibri"/>
+              </a:rPr>
+              <a:t>un solo documento: el anteproyecto</a:t>
+            </a:r>
+            <a:r>
+              <a:rPr sz="1600" b="0" i="0">
+                <a:solidFill>
+                  <a:srgbClr val="2B2B2B"/>
+                </a:solidFill>
+                <a:latin typeface="Calibri"/>
+              </a:rPr>
+              <a:t> de su investigación.</a:t>
+            </a:r>
+          </a:p>
+          <a:p>
+            <a:pPr lvl="1">
               <a:spcAft>
                 <a:spcPts val="600"/>
               </a:spcAft>
             </a:pPr>
             <a:r>
-              <a:rPr sz="1600" b="0" i="0">
-                <a:solidFill>
-                  <a:srgbClr val="2B2B2B"/>
-                </a:solidFill>
-                <a:latin typeface="Calibri"/>
-              </a:rPr>
-              <a:t>Ya sabemos qué haremos, cómo se evalúa y quién es quién.</a:t>
-            </a:r>
-          </a:p>
-          <a:p>
-            <a:pPr algn="ctr">
+              <a:rPr sz="1500" b="0" i="0">
+                <a:solidFill>
+                  <a:srgbClr val="2B2B2B"/>
+                </a:solidFill>
+                <a:latin typeface="Calibri"/>
+              </a:rPr>
+              <a:t>●   No son tres trabajos sueltos: es </a:t>
+            </a:r>
+            <a:r>
+              <a:rPr sz="1500" b="1" i="0">
+                <a:solidFill>
+                  <a:srgbClr val="2B2B2B"/>
+                </a:solidFill>
+                <a:latin typeface="Calibri"/>
+              </a:rPr>
+              <a:t>un mismo archivo que crece</a:t>
+            </a:r>
+            <a:r>
+              <a:rPr sz="1500" b="0" i="0">
+                <a:solidFill>
+                  <a:srgbClr val="2B2B2B"/>
+                </a:solidFill>
+                <a:latin typeface="Calibri"/>
+              </a:rPr>
+              <a:t> entrega tras entrega.</a:t>
+            </a:r>
+          </a:p>
+          <a:p>
+            <a:pPr lvl="1">
               <a:spcAft>
                 <a:spcPts val="600"/>
               </a:spcAft>
             </a:pPr>
             <a:r>
+              <a:rPr sz="1500" b="0" i="0">
+                <a:solidFill>
+                  <a:srgbClr val="2B2B2B"/>
+                </a:solidFill>
+                <a:latin typeface="Calibri"/>
+              </a:rPr>
+              <a:t>●   La ACA 3 es ese archivo completo e integrado, no un fragmento nuevo escrito la última semana.</a:t>
+            </a:r>
+          </a:p>
+          <a:p>
+            <a:pPr>
+              <a:spcAft>
+                <a:spcPts val="1000"/>
+              </a:spcAft>
+            </a:pPr>
+            <a:r>
+              <a:rPr sz="1600" b="0" i="0">
+                <a:solidFill>
+                  <a:srgbClr val="2B2B2B"/>
+                </a:solidFill>
+                <a:latin typeface="Calibri"/>
+              </a:rPr>
+              <a:t>–   Va en la </a:t>
+            </a:r>
+            <a:r>
               <a:rPr sz="1600" b="1" i="0">
                 <a:solidFill>
                   <a:srgbClr val="2B2B2B"/>
                 </a:solidFill>
                 <a:latin typeface="Calibri"/>
               </a:rPr>
-              <a:t>Sesión 02:</a:t>
+              <a:t>plantilla APA CUN de proyecto de grado</a:t>
             </a:r>
             <a:r>
               <a:rPr sz="1600" b="0" i="0">
@@ -6479,21 +13630,139 @@
                 </a:solidFill>
                 <a:latin typeface="Calibri"/>
               </a:rPr>
-              <a:t> arranca el contenido del curso.</a:t>
-            </a:r>
-          </a:p>
-        </p:txBody>
-      </p:sp>
-      <p:sp>
-        <p:nvSpPr>
-          <p:cNvPr id="6" name="TextBox 5"/>
+              <a:t>, la misma desde el primer día.</a:t>
+            </a:r>
+          </a:p>
+          <a:p>
+            <a:pPr lvl="1">
+              <a:spcAft>
+                <a:spcPts val="600"/>
+              </a:spcAft>
+            </a:pPr>
+            <a:r>
+              <a:rPr sz="1500" b="0" i="0">
+                <a:solidFill>
+                  <a:srgbClr val="2B2B2B"/>
+                </a:solidFill>
+                <a:latin typeface="Calibri"/>
+              </a:rPr>
+              <a:t>●   Está en `Clases/Recursos/Plantilla_APA_CUN_Proyecto de grado.docx`; ábranla en Google Docs y trabajen ahí.</a:t>
+            </a:r>
+          </a:p>
+          <a:p>
+            <a:pPr>
+              <a:spcAft>
+                <a:spcPts val="1000"/>
+              </a:spcAft>
+            </a:pPr>
+            <a:r>
+              <a:rPr sz="1600" b="0" i="0">
+                <a:solidFill>
+                  <a:srgbClr val="2B2B2B"/>
+                </a:solidFill>
+                <a:latin typeface="Calibri"/>
+              </a:rPr>
+              <a:t>–   </a:t>
+            </a:r>
+            <a:r>
+              <a:rPr sz="1600" b="1" i="0">
+                <a:solidFill>
+                  <a:srgbClr val="2B2B2B"/>
+                </a:solidFill>
+                <a:latin typeface="Calibri"/>
+              </a:rPr>
+              <a:t>¿Para qué les sirve después?</a:t>
+            </a:r>
+            <a:r>
+              <a:rPr sz="1600" b="0" i="0">
+                <a:solidFill>
+                  <a:srgbClr val="2B2B2B"/>
+                </a:solidFill>
+                <a:latin typeface="Calibri"/>
+              </a:rPr>
+              <a:t> Es el punto de partida de </a:t>
+            </a:r>
+            <a:r>
+              <a:rPr sz="1600" b="1" i="0">
+                <a:solidFill>
+                  <a:srgbClr val="2B2B2B"/>
+                </a:solidFill>
+                <a:latin typeface="Calibri"/>
+              </a:rPr>
+              <a:t>Proyecto II</a:t>
+            </a:r>
+            <a:r>
+              <a:rPr sz="1600" b="0" i="0">
+                <a:solidFill>
+                  <a:srgbClr val="2B2B2B"/>
+                </a:solidFill>
+                <a:latin typeface="Calibri"/>
+              </a:rPr>
+              <a:t>, donde el proyecto se ejecuta.</a:t>
+            </a:r>
+          </a:p>
+          <a:p>
+            <a:pPr lvl="1">
+              <a:spcAft>
+                <a:spcPts val="600"/>
+              </a:spcAft>
+            </a:pPr>
+            <a:r>
+              <a:rPr sz="1500" b="0" i="0">
+                <a:solidFill>
+                  <a:srgbClr val="2B2B2B"/>
+                </a:solidFill>
+                <a:latin typeface="Calibri"/>
+              </a:rPr>
+              <a:t>●   Y es la base de lo que sustentarán al cerrar el programa: no es un trabajo que se archiva y se olvida.</a:t>
+            </a:r>
+          </a:p>
+          <a:p>
+            <a:pPr>
+              <a:spcAft>
+                <a:spcPts val="1000"/>
+              </a:spcAft>
+            </a:pPr>
+            <a:r>
+              <a:rPr sz="1600" b="0" i="0">
+                <a:solidFill>
+                  <a:srgbClr val="2B2B2B"/>
+                </a:solidFill>
+                <a:latin typeface="Calibri"/>
+              </a:rPr>
+              <a:t>–   Frontera del curso, sin excepciones: en </a:t>
+            </a:r>
+            <a:r>
+              <a:rPr sz="1600" b="1" i="0">
+                <a:solidFill>
+                  <a:srgbClr val="2B2B2B"/>
+                </a:solidFill>
+                <a:latin typeface="Calibri"/>
+              </a:rPr>
+              <a:t>Proyecto I los instrumentos se proponen; nunca se aplican</a:t>
+            </a:r>
+            <a:r>
+              <a:rPr sz="1600" b="0" i="0">
+                <a:solidFill>
+                  <a:srgbClr val="2B2B2B"/>
+                </a:solidFill>
+                <a:latin typeface="Calibri"/>
+              </a:rPr>
+              <a:t>.</a:t>
+            </a:r>
+          </a:p>
+        </p:txBody>
+      </p:sp>
+      <p:sp>
+        <p:nvSpPr>
+          <p:cNvPr id="5" name="TextBox 4"/>
           <p:cNvSpPr txBox="1"/>
           <p:nvPr/>
         </p:nvSpPr>
         <p:spPr>
           <a:xfrm>
-            <a:off x="640080" y="4754880"/>
-            <a:ext cx="10911535" cy="640080"/>
+            <a:off x="2194560" y="6446520"/>
+            <a:ext cx="5943600" cy="274320"/>
           </a:xfrm>
           <a:prstGeom prst="rect">
             <a:avLst/>
@@ -6506,29 +13775,29 @@
           </a:bodyPr>
           <a:lstStyle/>
           <a:p>
-            <a:pPr algn="ctr"/>
-            <a:r>
-              <a:rPr sz="2000" b="1" i="0">
-                <a:solidFill>
-                  <a:srgbClr val="007433"/>
-                </a:solidFill>
-                <a:latin typeface="Calibri"/>
-              </a:rPr>
-              <a:t>PROYECTO I</a:t>
-            </a:r>
-          </a:p>
-        </p:txBody>
-      </p:sp>
-      <p:sp>
-        <p:nvSpPr>
-          <p:cNvPr id="7" name="TextBox 6"/>
+            <a:pPr algn="l"/>
+            <a:r>
+              <a:rPr sz="1000" b="1" i="0">
+                <a:solidFill>
+                  <a:srgbClr val="8F989D"/>
+                </a:solidFill>
+                <a:latin typeface="Calibri"/>
+              </a:rPr>
+              <a:t>Inicio 8:10 pm</a:t>
+            </a:r>
+          </a:p>
+        </p:txBody>
+      </p:sp>
+      <p:sp>
+        <p:nvSpPr>
+          <p:cNvPr id="6" name="TextBox 5"/>
           <p:cNvSpPr txBox="1"/>
           <p:nvPr/>
         </p:nvSpPr>
         <p:spPr>
           <a:xfrm>
-            <a:off x="2194560" y="6446520"/>
-            <a:ext cx="5943600" cy="274320"/>
+            <a:off x="11094415" y="6446520"/>
+            <a:ext cx="548640" cy="274320"/>
           </a:xfrm>
           <a:prstGeom prst="rect">
             <a:avLst/>
@@ -6541,7 +13810,7 @@
           </a:bodyPr>
           <a:lstStyle/>
           <a:p>
-            <a:pPr algn="l"/>
+            <a:pPr algn="r"/>
             <a:r>
               <a:rPr sz="1000" b="1" i="0">
                 <a:solidFill>
@@ -6549,7 +13818,41 @@
                 </a:solidFill>
                 <a:latin typeface="Calibri"/>
               </a:rPr>
-              <a:t>Inicio 8:10 pm</a:t>
+              <a:t>9</a:t>
+            </a:r>
+          </a:p>
+        </p:txBody>
+      </p:sp>
+      <p:sp>
+        <p:nvSpPr>
+          <p:cNvPr id="7" name="TextBox 6"/>
+          <p:cNvSpPr txBox="1"/>
+          <p:nvPr/>
+        </p:nvSpPr>
+        <p:spPr>
+          <a:xfrm>
+            <a:off x="640080" y="5943600"/>
+            <a:ext cx="9997135" cy="457200"/>
+          </a:xfrm>
+          <a:prstGeom prst="rect">
+            <a:avLst/>
+          </a:prstGeom>
+          <a:noFill/>
+        </p:spPr>
+        <p:txBody>
+          <a:bodyPr wrap="square" anchor="t" lIns="0" rIns="0" tIns="0" bIns="0">
+            <a:spAutoFit/>
+          </a:bodyPr>
+          <a:lstStyle/>
+          <a:p>
+            <a:r>
+              <a:rPr sz="1200" b="0" i="1">
+                <a:solidFill>
+                  <a:srgbClr val="2B2B2B"/>
+                </a:solidFill>
+                <a:latin typeface="Calibri"/>
+              </a:rPr>
+              <a:t>Piénsenlo así: todo el semestre queda en un archivo. Cuídenlo, guarden versiones y compártanlo con todo el equipo desde hoy.</a:t>
             </a:r>
           </a:p>
         </p:txBody>

--- a/Especializacion/Proyecto I/Clases/Sesion 01 - Presentación del curso · docente · estudiantes · ACAs/Presentacion.pptx
+++ b/Especializacion/Proyecto I/Clases/Sesion 01 - Presentación del curso · docente · estudiantes · ACAs/Presentacion.pptx
@@ -3373,41 +3373,6 @@
                 <a:latin typeface="Calibri"/>
               </a:rPr>
               <a:t> PROYECTO I</a:t>
-            </a:r>
-          </a:p>
-        </p:txBody>
-      </p:sp>
-      <p:sp>
-        <p:nvSpPr>
-          <p:cNvPr id="7" name="TextBox 6"/>
-          <p:cNvSpPr txBox="1"/>
-          <p:nvPr/>
-        </p:nvSpPr>
-        <p:spPr>
-          <a:xfrm>
-            <a:off x="2194560" y="6446520"/>
-            <a:ext cx="5943600" cy="274320"/>
-          </a:xfrm>
-          <a:prstGeom prst="rect">
-            <a:avLst/>
-          </a:prstGeom>
-          <a:noFill/>
-        </p:spPr>
-        <p:txBody>
-          <a:bodyPr wrap="square" anchor="t" lIns="0" rIns="0" tIns="0" bIns="0">
-            <a:spAutoFit/>
-          </a:bodyPr>
-          <a:lstStyle/>
-          <a:p>
-            <a:pPr algn="l"/>
-            <a:r>
-              <a:rPr sz="1000" b="1" i="0">
-                <a:solidFill>
-                  <a:srgbClr val="8F989D"/>
-                </a:solidFill>
-                <a:latin typeface="Calibri"/>
-              </a:rPr>
-              <a:t>Inicio 8:10 pm</a:t>
             </a:r>
           </a:p>
         </p:txBody>
@@ -4001,7 +3966,43 @@
                 </a:solidFill>
                 <a:latin typeface="Calibri"/>
               </a:rPr>
-              <a:t> Al cierre se suman coevaluación y autoevaluación, cada una con su propio enunciado en esa misma carpeta.</a:t>
+              <a:t> Las ACAs son estas </a:t>
+            </a:r>
+            <a:r>
+              <a:rPr sz="1200" b="1" i="1">
+                <a:solidFill>
+                  <a:srgbClr val="2B2B2B"/>
+                </a:solidFill>
+                <a:latin typeface="Calibri"/>
+              </a:rPr>
+              <a:t>tres</a:t>
+            </a:r>
+            <a:r>
+              <a:rPr sz="1200" b="0" i="1">
+                <a:solidFill>
+                  <a:srgbClr val="2B2B2B"/>
+                </a:solidFill>
+                <a:latin typeface="Calibri"/>
+              </a:rPr>
+              <a:t>: la coevaluación (4%) y la autoevaluación (4%) del cierre </a:t>
+            </a:r>
+            <a:r>
+              <a:rPr sz="1200" b="1" i="1">
+                <a:solidFill>
+                  <a:srgbClr val="2B2B2B"/>
+                </a:solidFill>
+                <a:latin typeface="Calibri"/>
+              </a:rPr>
+              <a:t>no son ACAs</a:t>
+            </a:r>
+            <a:r>
+              <a:rPr sz="1200" b="0" i="1">
+                <a:solidFill>
+                  <a:srgbClr val="2B2B2B"/>
+                </a:solidFill>
+                <a:latin typeface="Calibri"/>
+              </a:rPr>
+              <a:t>, son instrumentos individuales que cada quien diligencia en CDigital (instructivo en esa misma carpeta).</a:t>
             </a:r>
           </a:p>
         </p:txBody>
@@ -4009,41 +4010,6 @@
       <p:sp>
         <p:nvSpPr>
           <p:cNvPr id="6" name="TextBox 5"/>
-          <p:cNvSpPr txBox="1"/>
-          <p:nvPr/>
-        </p:nvSpPr>
-        <p:spPr>
-          <a:xfrm>
-            <a:off x="2194560" y="6446520"/>
-            <a:ext cx="5943600" cy="274320"/>
-          </a:xfrm>
-          <a:prstGeom prst="rect">
-            <a:avLst/>
-          </a:prstGeom>
-          <a:noFill/>
-        </p:spPr>
-        <p:txBody>
-          <a:bodyPr wrap="square" anchor="t" lIns="0" rIns="0" tIns="0" bIns="0">
-            <a:spAutoFit/>
-          </a:bodyPr>
-          <a:lstStyle/>
-          <a:p>
-            <a:pPr algn="l"/>
-            <a:r>
-              <a:rPr sz="1000" b="1" i="0">
-                <a:solidFill>
-                  <a:srgbClr val="8F989D"/>
-                </a:solidFill>
-                <a:latin typeface="Calibri"/>
-              </a:rPr>
-              <a:t>Inicio 8:10 pm</a:t>
-            </a:r>
-          </a:p>
-        </p:txBody>
-      </p:sp>
-      <p:sp>
-        <p:nvSpPr>
-          <p:cNvPr id="7" name="TextBox 6"/>
           <p:cNvSpPr txBox="1"/>
           <p:nvPr/>
         </p:nvSpPr>
@@ -4592,8 +4558,8 @@
         </p:nvSpPr>
         <p:spPr>
           <a:xfrm>
-            <a:off x="2194560" y="6446520"/>
-            <a:ext cx="5943600" cy="274320"/>
+            <a:off x="11094415" y="6446520"/>
+            <a:ext cx="548640" cy="274320"/>
           </a:xfrm>
           <a:prstGeom prst="rect">
             <a:avLst/>
@@ -4606,7 +4572,7 @@
           </a:bodyPr>
           <a:lstStyle/>
           <a:p>
-            <a:pPr algn="l"/>
+            <a:pPr algn="r"/>
             <a:r>
               <a:rPr sz="1000" b="1" i="0">
                 <a:solidFill>
@@ -4614,7 +4580,7 @@
                 </a:solidFill>
                 <a:latin typeface="Calibri"/>
               </a:rPr>
-              <a:t>Inicio 8:10 pm</a:t>
+              <a:t>11</a:t>
             </a:r>
           </a:p>
         </p:txBody>
@@ -4622,41 +4588,6 @@
       <p:sp>
         <p:nvSpPr>
           <p:cNvPr id="6" name="TextBox 5"/>
-          <p:cNvSpPr txBox="1"/>
-          <p:nvPr/>
-        </p:nvSpPr>
-        <p:spPr>
-          <a:xfrm>
-            <a:off x="11094415" y="6446520"/>
-            <a:ext cx="548640" cy="274320"/>
-          </a:xfrm>
-          <a:prstGeom prst="rect">
-            <a:avLst/>
-          </a:prstGeom>
-          <a:noFill/>
-        </p:spPr>
-        <p:txBody>
-          <a:bodyPr wrap="square" anchor="t" lIns="0" rIns="0" tIns="0" bIns="0">
-            <a:spAutoFit/>
-          </a:bodyPr>
-          <a:lstStyle/>
-          <a:p>
-            <a:pPr algn="r"/>
-            <a:r>
-              <a:rPr sz="1000" b="1" i="0">
-                <a:solidFill>
-                  <a:srgbClr val="8F989D"/>
-                </a:solidFill>
-                <a:latin typeface="Calibri"/>
-              </a:rPr>
-              <a:t>11</a:t>
-            </a:r>
-          </a:p>
-        </p:txBody>
-      </p:sp>
-      <p:sp>
-        <p:nvSpPr>
-          <p:cNvPr id="7" name="TextBox 6"/>
           <p:cNvSpPr txBox="1"/>
           <p:nvPr/>
         </p:nvSpPr>
@@ -5128,41 +5059,6 @@
         </p:nvSpPr>
         <p:spPr>
           <a:xfrm>
-            <a:off x="2194560" y="6446520"/>
-            <a:ext cx="5943600" cy="274320"/>
-          </a:xfrm>
-          <a:prstGeom prst="rect">
-            <a:avLst/>
-          </a:prstGeom>
-          <a:noFill/>
-        </p:spPr>
-        <p:txBody>
-          <a:bodyPr wrap="square" anchor="t" lIns="0" rIns="0" tIns="0" bIns="0">
-            <a:spAutoFit/>
-          </a:bodyPr>
-          <a:lstStyle/>
-          <a:p>
-            <a:pPr algn="l"/>
-            <a:r>
-              <a:rPr sz="1000" b="1" i="0">
-                <a:solidFill>
-                  <a:srgbClr val="8F989D"/>
-                </a:solidFill>
-                <a:latin typeface="Calibri"/>
-              </a:rPr>
-              <a:t>Inicio 8:10 pm</a:t>
-            </a:r>
-          </a:p>
-        </p:txBody>
-      </p:sp>
-      <p:sp>
-        <p:nvSpPr>
-          <p:cNvPr id="11" name="TextBox 10"/>
-          <p:cNvSpPr txBox="1"/>
-          <p:nvPr/>
-        </p:nvSpPr>
-        <p:spPr>
-          <a:xfrm>
             <a:off x="11094415" y="6446520"/>
             <a:ext cx="548640" cy="274320"/>
           </a:xfrm>
@@ -5544,8 +5440,8 @@
         </p:nvSpPr>
         <p:spPr>
           <a:xfrm>
-            <a:off x="2194560" y="6446520"/>
-            <a:ext cx="5943600" cy="274320"/>
+            <a:off x="11094415" y="6446520"/>
+            <a:ext cx="548640" cy="274320"/>
           </a:xfrm>
           <a:prstGeom prst="rect">
             <a:avLst/>
@@ -5558,7 +5454,7 @@
           </a:bodyPr>
           <a:lstStyle/>
           <a:p>
-            <a:pPr algn="l"/>
+            <a:pPr algn="r"/>
             <a:r>
               <a:rPr sz="1000" b="1" i="0">
                 <a:solidFill>
@@ -5566,7 +5462,7 @@
                 </a:solidFill>
                 <a:latin typeface="Calibri"/>
               </a:rPr>
-              <a:t>Inicio 8:10 pm</a:t>
+              <a:t>13</a:t>
             </a:r>
           </a:p>
         </p:txBody>
@@ -5574,41 +5470,6 @@
       <p:sp>
         <p:nvSpPr>
           <p:cNvPr id="6" name="TextBox 5"/>
-          <p:cNvSpPr txBox="1"/>
-          <p:nvPr/>
-        </p:nvSpPr>
-        <p:spPr>
-          <a:xfrm>
-            <a:off x="11094415" y="6446520"/>
-            <a:ext cx="548640" cy="274320"/>
-          </a:xfrm>
-          <a:prstGeom prst="rect">
-            <a:avLst/>
-          </a:prstGeom>
-          <a:noFill/>
-        </p:spPr>
-        <p:txBody>
-          <a:bodyPr wrap="square" anchor="t" lIns="0" rIns="0" tIns="0" bIns="0">
-            <a:spAutoFit/>
-          </a:bodyPr>
-          <a:lstStyle/>
-          <a:p>
-            <a:pPr algn="r"/>
-            <a:r>
-              <a:rPr sz="1000" b="1" i="0">
-                <a:solidFill>
-                  <a:srgbClr val="8F989D"/>
-                </a:solidFill>
-                <a:latin typeface="Calibri"/>
-              </a:rPr>
-              <a:t>13</a:t>
-            </a:r>
-          </a:p>
-        </p:txBody>
-      </p:sp>
-      <p:sp>
-        <p:nvSpPr>
-          <p:cNvPr id="7" name="TextBox 6"/>
           <p:cNvSpPr txBox="1"/>
           <p:nvPr/>
         </p:nvSpPr>
@@ -5755,7 +5616,7 @@
         </p:nvGraphicFramePr>
         <p:xfrm>
           <a:off x="640080" y="1691639"/>
-          <a:ext cx="10911534" cy="4526280"/>
+          <a:ext cx="10911534" cy="4023360"/>
         </p:xfrm>
         <a:graphic>
           <a:graphicData uri="http://schemas.openxmlformats.org/drawingml/2006/table">
@@ -6117,7 +5978,7 @@
                           </a:solidFill>
                           <a:latin typeface="Calibri"/>
                         </a:rPr>
-                        <a:t>Padlet</a:t>
+                        <a:t>Google Meet</a:t>
                       </a:r>
                     </a:p>
                   </a:txBody>
@@ -6140,7 +6001,7 @@
                           </a:solidFill>
                           <a:latin typeface="Calibri"/>
                         </a:rPr>
-                        <a:t>El tablero colaborativo donde nos presentamos hoy y donde el Docente deja consignas breves.</a:t>
+                        <a:t>El encuentro sincrónico semanal: mismo enlace toda la serie. La sesión se graba.</a:t>
                       </a:r>
                     </a:p>
                   </a:txBody>
@@ -6151,54 +6012,6 @@
                   </a:tcPr>
                 </a:tc>
               </a:tr>
-              <a:tr h="502920">
-                <a:tc>
-                  <a:txBody>
-                    <a:bodyPr/>
-                    <a:lstStyle/>
-                    <a:p>
-                      <a:pPr algn="l"/>
-                      <a:r>
-                        <a:rPr sz="1100" b="1" i="0">
-                          <a:solidFill>
-                            <a:srgbClr val="2B2B2B"/>
-                          </a:solidFill>
-                          <a:latin typeface="Calibri"/>
-                        </a:rPr>
-                        <a:t>Google Meet</a:t>
-                      </a:r>
-                    </a:p>
-                  </a:txBody>
-                  <a:tcPr anchor="ctr" marL="109728" marR="91440" marT="36576" marB="36576">
-                    <a:solidFill>
-                      <a:srgbClr val="F2F2F2"/>
-                    </a:solidFill>
-                  </a:tcPr>
-                </a:tc>
-                <a:tc>
-                  <a:txBody>
-                    <a:bodyPr/>
-                    <a:lstStyle/>
-                    <a:p>
-                      <a:pPr algn="l"/>
-                      <a:r>
-                        <a:rPr sz="1100" b="0" i="0">
-                          <a:solidFill>
-                            <a:srgbClr val="2B2B2B"/>
-                          </a:solidFill>
-                          <a:latin typeface="Calibri"/>
-                        </a:rPr>
-                        <a:t>El encuentro sincrónico semanal: mismo enlace toda la serie. La sesión se graba.</a:t>
-                      </a:r>
-                    </a:p>
-                  </a:txBody>
-                  <a:tcPr anchor="ctr" marL="109728" marR="91440" marT="36576" marB="36576">
-                    <a:solidFill>
-                      <a:srgbClr val="F2F2F2"/>
-                    </a:solidFill>
-                  </a:tcPr>
-                </a:tc>
-              </a:tr>
             </a:tbl>
           </a:graphicData>
         </a:graphic>
@@ -6211,7 +6024,7 @@
         </p:nvSpPr>
         <p:spPr>
           <a:xfrm>
-            <a:off x="640080" y="6080760"/>
+            <a:off x="640080" y="5852160"/>
             <a:ext cx="10911535" cy="548640"/>
           </a:xfrm>
           <a:prstGeom prst="rect">
@@ -6267,41 +6080,6 @@
       <p:sp>
         <p:nvSpPr>
           <p:cNvPr id="6" name="TextBox 5"/>
-          <p:cNvSpPr txBox="1"/>
-          <p:nvPr/>
-        </p:nvSpPr>
-        <p:spPr>
-          <a:xfrm>
-            <a:off x="2194560" y="6446520"/>
-            <a:ext cx="5943600" cy="274320"/>
-          </a:xfrm>
-          <a:prstGeom prst="rect">
-            <a:avLst/>
-          </a:prstGeom>
-          <a:noFill/>
-        </p:spPr>
-        <p:txBody>
-          <a:bodyPr wrap="square" anchor="t" lIns="0" rIns="0" tIns="0" bIns="0">
-            <a:spAutoFit/>
-          </a:bodyPr>
-          <a:lstStyle/>
-          <a:p>
-            <a:pPr algn="l"/>
-            <a:r>
-              <a:rPr sz="1000" b="1" i="0">
-                <a:solidFill>
-                  <a:srgbClr val="8F989D"/>
-                </a:solidFill>
-                <a:latin typeface="Calibri"/>
-              </a:rPr>
-              <a:t>Inicio 8:10 pm</a:t>
-            </a:r>
-          </a:p>
-        </p:txBody>
-      </p:sp>
-      <p:sp>
-        <p:nvSpPr>
-          <p:cNvPr id="7" name="TextBox 6"/>
           <p:cNvSpPr txBox="1"/>
           <p:nvPr/>
         </p:nvSpPr>
@@ -6758,8 +6536,8 @@
         </p:nvSpPr>
         <p:spPr>
           <a:xfrm>
-            <a:off x="2194560" y="6446520"/>
-            <a:ext cx="5943600" cy="274320"/>
+            <a:off x="11094415" y="6446520"/>
+            <a:ext cx="548640" cy="274320"/>
           </a:xfrm>
           <a:prstGeom prst="rect">
             <a:avLst/>
@@ -6772,7 +6550,7 @@
           </a:bodyPr>
           <a:lstStyle/>
           <a:p>
-            <a:pPr algn="l"/>
+            <a:pPr algn="r"/>
             <a:r>
               <a:rPr sz="1000" b="1" i="0">
                 <a:solidFill>
@@ -6780,7 +6558,7 @@
                 </a:solidFill>
                 <a:latin typeface="Calibri"/>
               </a:rPr>
-              <a:t>Inicio 8:10 pm</a:t>
+              <a:t>15</a:t>
             </a:r>
           </a:p>
         </p:txBody>
@@ -6788,41 +6566,6 @@
       <p:sp>
         <p:nvSpPr>
           <p:cNvPr id="6" name="TextBox 5"/>
-          <p:cNvSpPr txBox="1"/>
-          <p:nvPr/>
-        </p:nvSpPr>
-        <p:spPr>
-          <a:xfrm>
-            <a:off x="11094415" y="6446520"/>
-            <a:ext cx="548640" cy="274320"/>
-          </a:xfrm>
-          <a:prstGeom prst="rect">
-            <a:avLst/>
-          </a:prstGeom>
-          <a:noFill/>
-        </p:spPr>
-        <p:txBody>
-          <a:bodyPr wrap="square" anchor="t" lIns="0" rIns="0" tIns="0" bIns="0">
-            <a:spAutoFit/>
-          </a:bodyPr>
-          <a:lstStyle/>
-          <a:p>
-            <a:pPr algn="r"/>
-            <a:r>
-              <a:rPr sz="1000" b="1" i="0">
-                <a:solidFill>
-                  <a:srgbClr val="8F989D"/>
-                </a:solidFill>
-                <a:latin typeface="Calibri"/>
-              </a:rPr>
-              <a:t>15</a:t>
-            </a:r>
-          </a:p>
-        </p:txBody>
-      </p:sp>
-      <p:sp>
-        <p:nvSpPr>
-          <p:cNvPr id="7" name="TextBox 6"/>
           <p:cNvSpPr txBox="1"/>
           <p:nvPr/>
         </p:nvSpPr>
@@ -7276,41 +7019,6 @@
         </p:nvSpPr>
         <p:spPr>
           <a:xfrm>
-            <a:off x="2194560" y="6446520"/>
-            <a:ext cx="5943600" cy="274320"/>
-          </a:xfrm>
-          <a:prstGeom prst="rect">
-            <a:avLst/>
-          </a:prstGeom>
-          <a:noFill/>
-        </p:spPr>
-        <p:txBody>
-          <a:bodyPr wrap="square" anchor="t" lIns="0" rIns="0" tIns="0" bIns="0">
-            <a:spAutoFit/>
-          </a:bodyPr>
-          <a:lstStyle/>
-          <a:p>
-            <a:pPr algn="l"/>
-            <a:r>
-              <a:rPr sz="1000" b="1" i="0">
-                <a:solidFill>
-                  <a:srgbClr val="8F989D"/>
-                </a:solidFill>
-                <a:latin typeface="Calibri"/>
-              </a:rPr>
-              <a:t>Inicio 8:10 pm</a:t>
-            </a:r>
-          </a:p>
-        </p:txBody>
-      </p:sp>
-      <p:sp>
-        <p:nvSpPr>
-          <p:cNvPr id="11" name="TextBox 10"/>
-          <p:cNvSpPr txBox="1"/>
-          <p:nvPr/>
-        </p:nvSpPr>
-        <p:spPr>
-          <a:xfrm>
             <a:off x="11094415" y="6446520"/>
             <a:ext cx="548640" cy="274320"/>
           </a:xfrm>
@@ -7746,8 +7454,8 @@
         </p:nvSpPr>
         <p:spPr>
           <a:xfrm>
-            <a:off x="2194560" y="6446520"/>
-            <a:ext cx="5943600" cy="274320"/>
+            <a:off x="11094415" y="6446520"/>
+            <a:ext cx="548640" cy="274320"/>
           </a:xfrm>
           <a:prstGeom prst="rect">
             <a:avLst/>
@@ -7760,7 +7468,7 @@
           </a:bodyPr>
           <a:lstStyle/>
           <a:p>
-            <a:pPr algn="l"/>
+            <a:pPr algn="r"/>
             <a:r>
               <a:rPr sz="1000" b="1" i="0">
                 <a:solidFill>
@@ -7768,7 +7476,7 @@
                 </a:solidFill>
                 <a:latin typeface="Calibri"/>
               </a:rPr>
-              <a:t>Inicio 8:10 pm</a:t>
+              <a:t>17</a:t>
             </a:r>
           </a:p>
         </p:txBody>
@@ -7776,41 +7484,6 @@
       <p:sp>
         <p:nvSpPr>
           <p:cNvPr id="6" name="TextBox 5"/>
-          <p:cNvSpPr txBox="1"/>
-          <p:nvPr/>
-        </p:nvSpPr>
-        <p:spPr>
-          <a:xfrm>
-            <a:off x="11094415" y="6446520"/>
-            <a:ext cx="548640" cy="274320"/>
-          </a:xfrm>
-          <a:prstGeom prst="rect">
-            <a:avLst/>
-          </a:prstGeom>
-          <a:noFill/>
-        </p:spPr>
-        <p:txBody>
-          <a:bodyPr wrap="square" anchor="t" lIns="0" rIns="0" tIns="0" bIns="0">
-            <a:spAutoFit/>
-          </a:bodyPr>
-          <a:lstStyle/>
-          <a:p>
-            <a:pPr algn="r"/>
-            <a:r>
-              <a:rPr sz="1000" b="1" i="0">
-                <a:solidFill>
-                  <a:srgbClr val="8F989D"/>
-                </a:solidFill>
-                <a:latin typeface="Calibri"/>
-              </a:rPr>
-              <a:t>17</a:t>
-            </a:r>
-          </a:p>
-        </p:txBody>
-      </p:sp>
-      <p:sp>
-        <p:nvSpPr>
-          <p:cNvPr id="7" name="TextBox 6"/>
           <p:cNvSpPr txBox="1"/>
           <p:nvPr/>
         </p:nvSpPr>
@@ -8264,41 +7937,6 @@
         </p:nvSpPr>
         <p:spPr>
           <a:xfrm>
-            <a:off x="2194560" y="6446520"/>
-            <a:ext cx="5943600" cy="274320"/>
-          </a:xfrm>
-          <a:prstGeom prst="rect">
-            <a:avLst/>
-          </a:prstGeom>
-          <a:noFill/>
-        </p:spPr>
-        <p:txBody>
-          <a:bodyPr wrap="square" anchor="t" lIns="0" rIns="0" tIns="0" bIns="0">
-            <a:spAutoFit/>
-          </a:bodyPr>
-          <a:lstStyle/>
-          <a:p>
-            <a:pPr algn="l"/>
-            <a:r>
-              <a:rPr sz="1000" b="1" i="0">
-                <a:solidFill>
-                  <a:srgbClr val="8F989D"/>
-                </a:solidFill>
-                <a:latin typeface="Calibri"/>
-              </a:rPr>
-              <a:t>Inicio 8:10 pm</a:t>
-            </a:r>
-          </a:p>
-        </p:txBody>
-      </p:sp>
-      <p:sp>
-        <p:nvSpPr>
-          <p:cNvPr id="11" name="TextBox 10"/>
-          <p:cNvSpPr txBox="1"/>
-          <p:nvPr/>
-        </p:nvSpPr>
-        <p:spPr>
-          <a:xfrm>
             <a:off x="11094415" y="6446520"/>
             <a:ext cx="548640" cy="274320"/>
           </a:xfrm>
@@ -8860,41 +8498,6 @@
         </p:nvSpPr>
         <p:spPr>
           <a:xfrm>
-            <a:off x="2194560" y="6446520"/>
-            <a:ext cx="5943600" cy="274320"/>
-          </a:xfrm>
-          <a:prstGeom prst="rect">
-            <a:avLst/>
-          </a:prstGeom>
-          <a:noFill/>
-        </p:spPr>
-        <p:txBody>
-          <a:bodyPr wrap="square" anchor="t" lIns="0" rIns="0" tIns="0" bIns="0">
-            <a:spAutoFit/>
-          </a:bodyPr>
-          <a:lstStyle/>
-          <a:p>
-            <a:pPr algn="l"/>
-            <a:r>
-              <a:rPr sz="1000" b="1" i="0">
-                <a:solidFill>
-                  <a:srgbClr val="8F989D"/>
-                </a:solidFill>
-                <a:latin typeface="Calibri"/>
-              </a:rPr>
-              <a:t>Inicio 8:10 pm</a:t>
-            </a:r>
-          </a:p>
-        </p:txBody>
-      </p:sp>
-      <p:sp>
-        <p:nvSpPr>
-          <p:cNvPr id="13" name="TextBox 12"/>
-          <p:cNvSpPr txBox="1"/>
-          <p:nvPr/>
-        </p:nvSpPr>
-        <p:spPr>
-          <a:xfrm>
             <a:off x="11094415" y="6446520"/>
             <a:ext cx="548640" cy="274320"/>
           </a:xfrm>
@@ -9263,41 +8866,6 @@
         </p:nvSpPr>
         <p:spPr>
           <a:xfrm>
-            <a:off x="2194560" y="6446520"/>
-            <a:ext cx="5943600" cy="274320"/>
-          </a:xfrm>
-          <a:prstGeom prst="rect">
-            <a:avLst/>
-          </a:prstGeom>
-          <a:noFill/>
-        </p:spPr>
-        <p:txBody>
-          <a:bodyPr wrap="square" anchor="t" lIns="0" rIns="0" tIns="0" bIns="0">
-            <a:spAutoFit/>
-          </a:bodyPr>
-          <a:lstStyle/>
-          <a:p>
-            <a:pPr algn="l"/>
-            <a:r>
-              <a:rPr sz="1000" b="1" i="0">
-                <a:solidFill>
-                  <a:srgbClr val="8F989D"/>
-                </a:solidFill>
-                <a:latin typeface="Calibri"/>
-              </a:rPr>
-              <a:t>Inicio 8:10 pm</a:t>
-            </a:r>
-          </a:p>
-        </p:txBody>
-      </p:sp>
-      <p:sp>
-        <p:nvSpPr>
-          <p:cNvPr id="7" name="TextBox 6"/>
-          <p:cNvSpPr txBox="1"/>
-          <p:nvPr/>
-        </p:nvSpPr>
-        <p:spPr>
-          <a:xfrm>
             <a:off x="11094415" y="6446520"/>
             <a:ext cx="548640" cy="274320"/>
           </a:xfrm>
@@ -9563,41 +9131,6 @@
         </p:nvSpPr>
         <p:spPr>
           <a:xfrm>
-            <a:off x="2194560" y="6446520"/>
-            <a:ext cx="5943600" cy="274320"/>
-          </a:xfrm>
-          <a:prstGeom prst="rect">
-            <a:avLst/>
-          </a:prstGeom>
-          <a:noFill/>
-        </p:spPr>
-        <p:txBody>
-          <a:bodyPr wrap="square" anchor="t" lIns="0" rIns="0" tIns="0" bIns="0">
-            <a:spAutoFit/>
-          </a:bodyPr>
-          <a:lstStyle/>
-          <a:p>
-            <a:pPr algn="l"/>
-            <a:r>
-              <a:rPr sz="1000" b="1" i="0">
-                <a:solidFill>
-                  <a:srgbClr val="8F989D"/>
-                </a:solidFill>
-                <a:latin typeface="Calibri"/>
-              </a:rPr>
-              <a:t>Inicio 8:10 pm</a:t>
-            </a:r>
-          </a:p>
-        </p:txBody>
-      </p:sp>
-      <p:sp>
-        <p:nvSpPr>
-          <p:cNvPr id="6" name="TextBox 5"/>
-          <p:cNvSpPr txBox="1"/>
-          <p:nvPr/>
-        </p:nvSpPr>
-        <p:spPr>
-          <a:xfrm>
             <a:off x="11094415" y="6446520"/>
             <a:ext cx="548640" cy="274320"/>
           </a:xfrm>
@@ -9853,41 +9386,6 @@
           </a:p>
         </p:txBody>
       </p:sp>
-      <p:sp>
-        <p:nvSpPr>
-          <p:cNvPr id="7" name="TextBox 6"/>
-          <p:cNvSpPr txBox="1"/>
-          <p:nvPr/>
-        </p:nvSpPr>
-        <p:spPr>
-          <a:xfrm>
-            <a:off x="2194560" y="6446520"/>
-            <a:ext cx="5943600" cy="274320"/>
-          </a:xfrm>
-          <a:prstGeom prst="rect">
-            <a:avLst/>
-          </a:prstGeom>
-          <a:noFill/>
-        </p:spPr>
-        <p:txBody>
-          <a:bodyPr wrap="square" anchor="t" lIns="0" rIns="0" tIns="0" bIns="0">
-            <a:spAutoFit/>
-          </a:bodyPr>
-          <a:lstStyle/>
-          <a:p>
-            <a:pPr algn="l"/>
-            <a:r>
-              <a:rPr sz="1000" b="1" i="0">
-                <a:solidFill>
-                  <a:srgbClr val="8F989D"/>
-                </a:solidFill>
-                <a:latin typeface="Calibri"/>
-              </a:rPr>
-              <a:t>Inicio 8:10 pm</a:t>
-            </a:r>
-          </a:p>
-        </p:txBody>
-      </p:sp>
     </p:spTree>
   </p:cSld>
   <p:clrMapOvr>
@@ -10170,41 +9668,6 @@
         </p:nvSpPr>
         <p:spPr>
           <a:xfrm>
-            <a:off x="2194560" y="6446520"/>
-            <a:ext cx="5943600" cy="274320"/>
-          </a:xfrm>
-          <a:prstGeom prst="rect">
-            <a:avLst/>
-          </a:prstGeom>
-          <a:noFill/>
-        </p:spPr>
-        <p:txBody>
-          <a:bodyPr wrap="square" anchor="t" lIns="0" rIns="0" tIns="0" bIns="0">
-            <a:spAutoFit/>
-          </a:bodyPr>
-          <a:lstStyle/>
-          <a:p>
-            <a:pPr algn="l"/>
-            <a:r>
-              <a:rPr sz="1000" b="1" i="0">
-                <a:solidFill>
-                  <a:srgbClr val="8F989D"/>
-                </a:solidFill>
-                <a:latin typeface="Calibri"/>
-              </a:rPr>
-              <a:t>Inicio 8:10 pm</a:t>
-            </a:r>
-          </a:p>
-        </p:txBody>
-      </p:sp>
-      <p:sp>
-        <p:nvSpPr>
-          <p:cNvPr id="9" name="TextBox 8"/>
-          <p:cNvSpPr txBox="1"/>
-          <p:nvPr/>
-        </p:nvSpPr>
-        <p:spPr>
-          <a:xfrm>
             <a:off x="11094415" y="6446520"/>
             <a:ext cx="548640" cy="274320"/>
           </a:xfrm>
@@ -10695,41 +10158,6 @@
         </p:nvSpPr>
         <p:spPr>
           <a:xfrm>
-            <a:off x="2194560" y="6446520"/>
-            <a:ext cx="5943600" cy="274320"/>
-          </a:xfrm>
-          <a:prstGeom prst="rect">
-            <a:avLst/>
-          </a:prstGeom>
-          <a:noFill/>
-        </p:spPr>
-        <p:txBody>
-          <a:bodyPr wrap="square" anchor="t" lIns="0" rIns="0" tIns="0" bIns="0">
-            <a:spAutoFit/>
-          </a:bodyPr>
-          <a:lstStyle/>
-          <a:p>
-            <a:pPr algn="l"/>
-            <a:r>
-              <a:rPr sz="1000" b="1" i="0">
-                <a:solidFill>
-                  <a:srgbClr val="8F989D"/>
-                </a:solidFill>
-                <a:latin typeface="Calibri"/>
-              </a:rPr>
-              <a:t>Inicio 8:10 pm</a:t>
-            </a:r>
-          </a:p>
-        </p:txBody>
-      </p:sp>
-      <p:sp>
-        <p:nvSpPr>
-          <p:cNvPr id="11" name="TextBox 10"/>
-          <p:cNvSpPr txBox="1"/>
-          <p:nvPr/>
-        </p:nvSpPr>
-        <p:spPr>
-          <a:xfrm>
             <a:off x="11094415" y="6446520"/>
             <a:ext cx="548640" cy="274320"/>
           </a:xfrm>
@@ -10916,7 +10344,7 @@
         </p:nvGraphicFramePr>
         <p:xfrm>
           <a:off x="640080" y="2011679"/>
-          <a:ext cx="10911533" cy="3017520"/>
+          <a:ext cx="10911533" cy="2011680"/>
         </p:xfrm>
         <a:graphic>
           <a:graphicData uri="http://schemas.openxmlformats.org/drawingml/2006/table">
@@ -11213,148 +10641,6 @@
                   </a:tcPr>
                 </a:tc>
               </a:tr>
-              <a:tr h="502920">
-                <a:tc>
-                  <a:txBody>
-                    <a:bodyPr/>
-                    <a:lstStyle/>
-                    <a:p>
-                      <a:pPr algn="l"/>
-                      <a:r>
-                        <a:rPr sz="1200" b="0" i="0">
-                          <a:solidFill>
-                            <a:srgbClr val="2B2B2B"/>
-                          </a:solidFill>
-                          <a:latin typeface="Calibri"/>
-                        </a:rPr>
-                        <a:t>Autoevaluación</a:t>
-                      </a:r>
-                    </a:p>
-                  </a:txBody>
-                  <a:tcPr anchor="ctr" marL="109728" marR="91440" marT="36576" marB="36576">
-                    <a:solidFill>
-                      <a:srgbClr val="F2F2F2"/>
-                    </a:solidFill>
-                  </a:tcPr>
-                </a:tc>
-                <a:tc>
-                  <a:txBody>
-                    <a:bodyPr/>
-                    <a:lstStyle/>
-                    <a:p>
-                      <a:pPr algn="l"/>
-                      <a:r>
-                        <a:rPr sz="1200" b="0" i="0">
-                          <a:solidFill>
-                            <a:srgbClr val="2B2B2B"/>
-                          </a:solidFill>
-                          <a:latin typeface="Calibri"/>
-                        </a:rPr>
-                        <a:t>Autoevaluación</a:t>
-                      </a:r>
-                    </a:p>
-                  </a:txBody>
-                  <a:tcPr anchor="ctr" marL="109728" marR="91440" marT="36576" marB="36576">
-                    <a:solidFill>
-                      <a:srgbClr val="F2F2F2"/>
-                    </a:solidFill>
-                  </a:tcPr>
-                </a:tc>
-                <a:tc>
-                  <a:txBody>
-                    <a:bodyPr/>
-                    <a:lstStyle/>
-                    <a:p>
-                      <a:pPr algn="l"/>
-                      <a:r>
-                        <a:rPr sz="1200" b="0" i="0">
-                          <a:solidFill>
-                            <a:srgbClr val="2B2B2B"/>
-                          </a:solidFill>
-                          <a:latin typeface="Calibri"/>
-                        </a:rPr>
-                        <a:t>4%</a:t>
-                      </a:r>
-                    </a:p>
-                  </a:txBody>
-                  <a:tcPr anchor="ctr" marL="109728" marR="91440" marT="36576" marB="36576">
-                    <a:solidFill>
-                      <a:srgbClr val="F2F2F2"/>
-                    </a:solidFill>
-                  </a:tcPr>
-                </a:tc>
-              </a:tr>
-              <a:tr h="502920">
-                <a:tc>
-                  <a:txBody>
-                    <a:bodyPr/>
-                    <a:lstStyle/>
-                    <a:p>
-                      <a:pPr algn="l"/>
-                      <a:r>
-                        <a:rPr sz="1200" b="0" i="0">
-                          <a:solidFill>
-                            <a:srgbClr val="2B2B2B"/>
-                          </a:solidFill>
-                          <a:latin typeface="Calibri"/>
-                        </a:rPr>
-                        <a:t>Coevaluación</a:t>
-                      </a:r>
-                    </a:p>
-                  </a:txBody>
-                  <a:tcPr anchor="ctr" marL="109728" marR="91440" marT="36576" marB="36576">
-                    <a:solidFill>
-                      <a:srgbClr val="FFFFFF"/>
-                    </a:solidFill>
-                  </a:tcPr>
-                </a:tc>
-                <a:tc>
-                  <a:txBody>
-                    <a:bodyPr/>
-                    <a:lstStyle/>
-                    <a:p>
-                      <a:pPr algn="l"/>
-                      <a:r>
-                        <a:rPr sz="1200" b="0" i="0">
-                          <a:solidFill>
-                            <a:srgbClr val="2B2B2B"/>
-                          </a:solidFill>
-                          <a:latin typeface="Calibri"/>
-                        </a:rPr>
-                        <a:t>Coevaluación</a:t>
-                      </a:r>
-                    </a:p>
-                  </a:txBody>
-                  <a:tcPr anchor="ctr" marL="109728" marR="91440" marT="36576" marB="36576">
-                    <a:solidFill>
-                      <a:srgbClr val="FFFFFF"/>
-                    </a:solidFill>
-                  </a:tcPr>
-                </a:tc>
-                <a:tc>
-                  <a:txBody>
-                    <a:bodyPr/>
-                    <a:lstStyle/>
-                    <a:p>
-                      <a:pPr algn="l"/>
-                      <a:r>
-                        <a:rPr sz="1200" b="0" i="0">
-                          <a:solidFill>
-                            <a:srgbClr val="2B2B2B"/>
-                          </a:solidFill>
-                          <a:latin typeface="Calibri"/>
-                        </a:rPr>
-                        <a:t>4%</a:t>
-                      </a:r>
-                    </a:p>
-                  </a:txBody>
-                  <a:tcPr anchor="ctr" marL="109728" marR="91440" marT="36576" marB="36576">
-                    <a:solidFill>
-                      <a:srgbClr val="FFFFFF"/>
-                    </a:solidFill>
-                  </a:tcPr>
-                </a:tc>
-              </a:tr>
             </a:tbl>
           </a:graphicData>
         </a:graphic>
@@ -11367,7 +10653,7 @@
         </p:nvSpPr>
         <p:spPr>
           <a:xfrm>
-            <a:off x="640080" y="5166360"/>
+            <a:off x="640080" y="4160520"/>
             <a:ext cx="10911535" cy="548640"/>
           </a:xfrm>
           <a:prstGeom prst="rect">
@@ -11388,7 +10674,7 @@
                 </a:solidFill>
                 <a:latin typeface="Calibri"/>
               </a:rPr>
-              <a:t>Enunciado completo y </a:t>
+              <a:t>Las ACAs son </a:t>
             </a:r>
             <a:r>
               <a:rPr sz="1200" b="1" i="1">
@@ -11397,7 +10683,7 @@
                 </a:solidFill>
                 <a:latin typeface="Calibri"/>
               </a:rPr>
-              <a:t>fechas exactas</a:t>
+              <a:t>3</a:t>
             </a:r>
             <a:r>
               <a:rPr sz="1200" b="0" i="1">
@@ -11406,7 +10692,61 @@
                 </a:solidFill>
                 <a:latin typeface="Calibri"/>
               </a:rPr>
-              <a:t>: `Clases/Recursos/ACAs/` y la Presentación del Curso.</a:t>
+              <a:t>. La </a:t>
+            </a:r>
+            <a:r>
+              <a:rPr sz="1200" b="1" i="1">
+                <a:solidFill>
+                  <a:srgbClr val="2B2B2B"/>
+                </a:solidFill>
+                <a:latin typeface="Calibri"/>
+              </a:rPr>
+              <a:t>coevaluación (4%)</a:t>
+            </a:r>
+            <a:r>
+              <a:rPr sz="1200" b="0" i="1">
+                <a:solidFill>
+                  <a:srgbClr val="2B2B2B"/>
+                </a:solidFill>
+                <a:latin typeface="Calibri"/>
+              </a:rPr>
+              <a:t> y la </a:t>
+            </a:r>
+            <a:r>
+              <a:rPr sz="1200" b="1" i="1">
+                <a:solidFill>
+                  <a:srgbClr val="2B2B2B"/>
+                </a:solidFill>
+                <a:latin typeface="Calibri"/>
+              </a:rPr>
+              <a:t>autoevaluación (4%)</a:t>
+            </a:r>
+            <a:r>
+              <a:rPr sz="1200" b="0" i="1">
+                <a:solidFill>
+                  <a:srgbClr val="2B2B2B"/>
+                </a:solidFill>
+                <a:latin typeface="Calibri"/>
+              </a:rPr>
+              <a:t> </a:t>
+            </a:r>
+            <a:r>
+              <a:rPr sz="1200" b="1" i="1">
+                <a:solidFill>
+                  <a:srgbClr val="2B2B2B"/>
+                </a:solidFill>
+                <a:latin typeface="Calibri"/>
+              </a:rPr>
+              <a:t>no son ACAs</a:t>
+            </a:r>
+            <a:r>
+              <a:rPr sz="1200" b="0" i="1">
+                <a:solidFill>
+                  <a:srgbClr val="2B2B2B"/>
+                </a:solidFill>
+                <a:latin typeface="Calibri"/>
+              </a:rPr>
+              <a:t>: son instrumentos individuales que cada quien diligencia en CDigital al cierre. Enunciados e instructivos: `Clases/Recursos/ACAs/`.</a:t>
             </a:r>
           </a:p>
         </p:txBody>
@@ -11414,41 +10754,6 @@
       <p:sp>
         <p:nvSpPr>
           <p:cNvPr id="7" name="TextBox 6"/>
-          <p:cNvSpPr txBox="1"/>
-          <p:nvPr/>
-        </p:nvSpPr>
-        <p:spPr>
-          <a:xfrm>
-            <a:off x="2194560" y="6446520"/>
-            <a:ext cx="5943600" cy="274320"/>
-          </a:xfrm>
-          <a:prstGeom prst="rect">
-            <a:avLst/>
-          </a:prstGeom>
-          <a:noFill/>
-        </p:spPr>
-        <p:txBody>
-          <a:bodyPr wrap="square" anchor="t" lIns="0" rIns="0" tIns="0" bIns="0">
-            <a:spAutoFit/>
-          </a:bodyPr>
-          <a:lstStyle/>
-          <a:p>
-            <a:pPr algn="l"/>
-            <a:r>
-              <a:rPr sz="1000" b="1" i="0">
-                <a:solidFill>
-                  <a:srgbClr val="8F989D"/>
-                </a:solidFill>
-                <a:latin typeface="Calibri"/>
-              </a:rPr>
-              <a:t>Inicio 8:10 pm</a:t>
-            </a:r>
-          </a:p>
-        </p:txBody>
-      </p:sp>
-      <p:sp>
-        <p:nvSpPr>
-          <p:cNvPr id="8" name="TextBox 7"/>
           <p:cNvSpPr txBox="1"/>
           <p:nvPr/>
         </p:nvSpPr>
@@ -11887,8 +11192,8 @@
         </p:nvSpPr>
         <p:spPr>
           <a:xfrm>
-            <a:off x="2194560" y="6446520"/>
-            <a:ext cx="5943600" cy="274320"/>
+            <a:off x="11094415" y="6446520"/>
+            <a:ext cx="548640" cy="274320"/>
           </a:xfrm>
           <a:prstGeom prst="rect">
             <a:avLst/>
@@ -11901,7 +11206,7 @@
           </a:bodyPr>
           <a:lstStyle/>
           <a:p>
-            <a:pPr algn="l"/>
+            <a:pPr algn="r"/>
             <a:r>
               <a:rPr sz="1000" b="1" i="0">
                 <a:solidFill>
@@ -11909,7 +11214,7 @@
                 </a:solidFill>
                 <a:latin typeface="Calibri"/>
               </a:rPr>
-              <a:t>Inicio 8:10 pm</a:t>
+              <a:t>6</a:t>
             </a:r>
           </a:p>
         </p:txBody>
@@ -11917,41 +11222,6 @@
       <p:sp>
         <p:nvSpPr>
           <p:cNvPr id="6" name="TextBox 5"/>
-          <p:cNvSpPr txBox="1"/>
-          <p:nvPr/>
-        </p:nvSpPr>
-        <p:spPr>
-          <a:xfrm>
-            <a:off x="11094415" y="6446520"/>
-            <a:ext cx="548640" cy="274320"/>
-          </a:xfrm>
-          <a:prstGeom prst="rect">
-            <a:avLst/>
-          </a:prstGeom>
-          <a:noFill/>
-        </p:spPr>
-        <p:txBody>
-          <a:bodyPr wrap="square" anchor="t" lIns="0" rIns="0" tIns="0" bIns="0">
-            <a:spAutoFit/>
-          </a:bodyPr>
-          <a:lstStyle/>
-          <a:p>
-            <a:pPr algn="r"/>
-            <a:r>
-              <a:rPr sz="1000" b="1" i="0">
-                <a:solidFill>
-                  <a:srgbClr val="8F989D"/>
-                </a:solidFill>
-                <a:latin typeface="Calibri"/>
-              </a:rPr>
-              <a:t>6</a:t>
-            </a:r>
-          </a:p>
-        </p:txBody>
-      </p:sp>
-      <p:sp>
-        <p:nvSpPr>
-          <p:cNvPr id="7" name="TextBox 6"/>
           <p:cNvSpPr txBox="1"/>
           <p:nvPr/>
         </p:nvSpPr>
@@ -12762,41 +12032,6 @@
         </p:nvSpPr>
         <p:spPr>
           <a:xfrm>
-            <a:off x="2194560" y="6446520"/>
-            <a:ext cx="5943600" cy="274320"/>
-          </a:xfrm>
-          <a:prstGeom prst="rect">
-            <a:avLst/>
-          </a:prstGeom>
-          <a:noFill/>
-        </p:spPr>
-        <p:txBody>
-          <a:bodyPr wrap="square" anchor="t" lIns="0" rIns="0" tIns="0" bIns="0">
-            <a:spAutoFit/>
-          </a:bodyPr>
-          <a:lstStyle/>
-          <a:p>
-            <a:pPr algn="l"/>
-            <a:r>
-              <a:rPr sz="1000" b="1" i="0">
-                <a:solidFill>
-                  <a:srgbClr val="8F989D"/>
-                </a:solidFill>
-                <a:latin typeface="Calibri"/>
-              </a:rPr>
-              <a:t>Inicio 8:10 pm</a:t>
-            </a:r>
-          </a:p>
-        </p:txBody>
-      </p:sp>
-      <p:sp>
-        <p:nvSpPr>
-          <p:cNvPr id="6" name="TextBox 5"/>
-          <p:cNvSpPr txBox="1"/>
-          <p:nvPr/>
-        </p:nvSpPr>
-        <p:spPr>
-          <a:xfrm>
             <a:off x="11094415" y="6446520"/>
             <a:ext cx="548640" cy="274320"/>
           </a:xfrm>
@@ -13031,7 +12266,7 @@
                     <a:p>
                       <a:pPr algn="l"/>
                       <a:r>
-                        <a:rPr sz="1200" b="1" i="0">
+                        <a:rPr sz="1100" b="1" i="0">
                           <a:solidFill>
                             <a:srgbClr val="2B2B2B"/>
                           </a:solidFill>
@@ -13054,7 +12289,7 @@
                     <a:p>
                       <a:pPr algn="l"/>
                       <a:r>
-                        <a:rPr sz="1200" b="0" i="0">
+                        <a:rPr sz="1100" b="0" i="0">
                           <a:solidFill>
                             <a:srgbClr val="2B2B2B"/>
                           </a:solidFill>
@@ -13063,7 +12298,7 @@
                         <a:t>Población y muestra, técnicas e instrumentos </a:t>
                       </a:r>
                       <a:r>
-                        <a:rPr sz="1200" b="1" i="0">
+                        <a:rPr sz="1100" b="1" i="0">
                           <a:solidFill>
                             <a:srgbClr val="2B2B2B"/>
                           </a:solidFill>
@@ -13086,7 +12321,7 @@
                     <a:p>
                       <a:pPr algn="l"/>
                       <a:r>
-                        <a:rPr sz="1200" b="0" i="0">
+                        <a:rPr sz="1100" b="0" i="0">
                           <a:solidFill>
                             <a:srgbClr val="2B2B2B"/>
                           </a:solidFill>
@@ -13111,7 +12346,7 @@
                     <a:p>
                       <a:pPr algn="l"/>
                       <a:r>
-                        <a:rPr sz="1200" b="1" i="0">
+                        <a:rPr sz="1100" b="1" i="0">
                           <a:solidFill>
                             <a:srgbClr val="2B2B2B"/>
                           </a:solidFill>
@@ -13134,7 +12369,7 @@
                     <a:p>
                       <a:pPr algn="l"/>
                       <a:r>
-                        <a:rPr sz="1200" b="0" i="0">
+                        <a:rPr sz="1100" b="0" i="0">
                           <a:solidFill>
                             <a:srgbClr val="2B2B2B"/>
                           </a:solidFill>
@@ -13157,7 +12392,7 @@
                     <a:p>
                       <a:pPr algn="l"/>
                       <a:r>
-                        <a:rPr sz="1200" b="0" i="0">
+                        <a:rPr sz="1100" b="0" i="0">
                           <a:solidFill>
                             <a:srgbClr val="2B2B2B"/>
                           </a:solidFill>
@@ -13182,7 +12417,7 @@
                     <a:p>
                       <a:pPr algn="l"/>
                       <a:r>
-                        <a:rPr sz="1200" b="1" i="0">
+                        <a:rPr sz="1100" b="1" i="0">
                           <a:solidFill>
                             <a:srgbClr val="2B2B2B"/>
                           </a:solidFill>
@@ -13205,13 +12440,13 @@
                     <a:p>
                       <a:pPr algn="l"/>
                       <a:r>
-                        <a:rPr sz="1200" b="0" i="0">
+                        <a:rPr sz="1100" b="0" i="0">
                           <a:solidFill>
                             <a:srgbClr val="2B2B2B"/>
                           </a:solidFill>
                           <a:latin typeface="Calibri"/>
                         </a:rPr>
-                        <a:t>Integración y evaluación · coevaluación y autoevaluación</a:t>
+                        <a:t>Integración y evaluación · coevaluación y autoevaluación (instrumentos individuales, no son ACAs)</a:t>
                       </a:r>
                     </a:p>
                   </a:txBody>
@@ -13228,7 +12463,7 @@
                     <a:p>
                       <a:pPr algn="l"/>
                       <a:r>
-                        <a:rPr sz="1200" b="0" i="0">
+                        <a:rPr sz="1100" b="0" i="0">
                           <a:solidFill>
                             <a:srgbClr val="2B2B2B"/>
                           </a:solidFill>
@@ -13322,41 +12557,6 @@
       <p:sp>
         <p:nvSpPr>
           <p:cNvPr id="6" name="TextBox 5"/>
-          <p:cNvSpPr txBox="1"/>
-          <p:nvPr/>
-        </p:nvSpPr>
-        <p:spPr>
-          <a:xfrm>
-            <a:off x="2194560" y="6446520"/>
-            <a:ext cx="5943600" cy="274320"/>
-          </a:xfrm>
-          <a:prstGeom prst="rect">
-            <a:avLst/>
-          </a:prstGeom>
-          <a:noFill/>
-        </p:spPr>
-        <p:txBody>
-          <a:bodyPr wrap="square" anchor="t" lIns="0" rIns="0" tIns="0" bIns="0">
-            <a:spAutoFit/>
-          </a:bodyPr>
-          <a:lstStyle/>
-          <a:p>
-            <a:pPr algn="l"/>
-            <a:r>
-              <a:rPr sz="1000" b="1" i="0">
-                <a:solidFill>
-                  <a:srgbClr val="8F989D"/>
-                </a:solidFill>
-                <a:latin typeface="Calibri"/>
-              </a:rPr>
-              <a:t>Inicio 8:10 pm</a:t>
-            </a:r>
-          </a:p>
-        </p:txBody>
-      </p:sp>
-      <p:sp>
-        <p:nvSpPr>
-          <p:cNvPr id="7" name="TextBox 6"/>
           <p:cNvSpPr txBox="1"/>
           <p:nvPr/>
         </p:nvSpPr>
@@ -13761,8 +12961,8 @@
         </p:nvSpPr>
         <p:spPr>
           <a:xfrm>
-            <a:off x="2194560" y="6446520"/>
-            <a:ext cx="5943600" cy="274320"/>
+            <a:off x="11094415" y="6446520"/>
+            <a:ext cx="548640" cy="274320"/>
           </a:xfrm>
           <a:prstGeom prst="rect">
             <a:avLst/>
@@ -13775,7 +12975,7 @@
           </a:bodyPr>
           <a:lstStyle/>
           <a:p>
-            <a:pPr algn="l"/>
+            <a:pPr algn="r"/>
             <a:r>
               <a:rPr sz="1000" b="1" i="0">
                 <a:solidFill>
@@ -13783,7 +12983,7 @@
                 </a:solidFill>
                 <a:latin typeface="Calibri"/>
               </a:rPr>
-              <a:t>Inicio 8:10 pm</a:t>
+              <a:t>9</a:t>
             </a:r>
           </a:p>
         </p:txBody>
@@ -13791,41 +12991,6 @@
       <p:sp>
         <p:nvSpPr>
           <p:cNvPr id="6" name="TextBox 5"/>
-          <p:cNvSpPr txBox="1"/>
-          <p:nvPr/>
-        </p:nvSpPr>
-        <p:spPr>
-          <a:xfrm>
-            <a:off x="11094415" y="6446520"/>
-            <a:ext cx="548640" cy="274320"/>
-          </a:xfrm>
-          <a:prstGeom prst="rect">
-            <a:avLst/>
-          </a:prstGeom>
-          <a:noFill/>
-        </p:spPr>
-        <p:txBody>
-          <a:bodyPr wrap="square" anchor="t" lIns="0" rIns="0" tIns="0" bIns="0">
-            <a:spAutoFit/>
-          </a:bodyPr>
-          <a:lstStyle/>
-          <a:p>
-            <a:pPr algn="r"/>
-            <a:r>
-              <a:rPr sz="1000" b="1" i="0">
-                <a:solidFill>
-                  <a:srgbClr val="8F989D"/>
-                </a:solidFill>
-                <a:latin typeface="Calibri"/>
-              </a:rPr>
-              <a:t>9</a:t>
-            </a:r>
-          </a:p>
-        </p:txBody>
-      </p:sp>
-      <p:sp>
-        <p:nvSpPr>
-          <p:cNvPr id="7" name="TextBox 6"/>
           <p:cNvSpPr txBox="1"/>
           <p:nvPr/>
         </p:nvSpPr>

--- a/Especializacion/Proyecto I/Clases/Sesion 01 - Presentación del curso · docente · estudiantes · ACAs/Presentacion.pptx
+++ b/Especializacion/Proyecto I/Clases/Sesion 01 - Presentación del curso · docente · estudiantes · ACAs/Presentacion.pptx
@@ -7237,7 +7237,41 @@
                 </a:solidFill>
                 <a:latin typeface="Calibri"/>
               </a:rPr>
-              <a:t>●   Está en el documento del curso publicado en CDigital. Hoy no la dictamos: la leen ustedes y la retomamos al abrir la Sesión 02.</a:t>
+              <a:t>●   Hoy no la dictamos: la leen ustedes y la retomamos al abrir la Sesión 02.</a:t>
+            </a:r>
+          </a:p>
+          <a:p>
+            <a:pPr lvl="1">
+              <a:spcAft>
+                <a:spcPts val="600"/>
+              </a:spcAft>
+            </a:pPr>
+            <a:r>
+              <a:rPr sz="1400" b="0" i="0">
+                <a:solidFill>
+                  <a:srgbClr val="2B2B2B"/>
+                </a:solidFill>
+                <a:latin typeface="Calibri"/>
+              </a:rPr>
+              <a:t>●   </a:t>
+            </a:r>
+            <a:r>
+              <a:rPr sz="1400" b="1" i="0">
+                <a:solidFill>
+                  <a:srgbClr val="2B2B2B"/>
+                </a:solidFill>
+                <a:latin typeface="Calibri"/>
+              </a:rPr>
+              <a:t>Dónde está:</a:t>
+            </a:r>
+            <a:r>
+              <a:rPr sz="1400" b="0" i="0">
+                <a:solidFill>
+                  <a:srgbClr val="2B2B2B"/>
+                </a:solidFill>
+                <a:latin typeface="Calibri"/>
+              </a:rPr>
+              <a:t> ya viene en tu carpeta del curso, en `Sesion 01 - …/` (los PDF `Lectura 1 (obligatoria)…`, `Lectura 2 (guia)…` y `Lectura 3 (recomendada)…`, más el archivo `Lectura autonoma - Sesion 01.txt` con la cita, el enlace y qué traer). También queda publicada en CDigital.</a:t>
             </a:r>
           </a:p>
           <a:p>

--- a/Especializacion/Proyecto I/Clases/Sesion 01 - Presentación del curso · docente · estudiantes · ACAs/Presentacion.pptx
+++ b/Especializacion/Proyecto I/Clases/Sesion 01 - Presentación del curso · docente · estudiantes · ACAs/Presentacion.pptx
@@ -3347,7 +3347,7 @@
                 </a:solidFill>
                 <a:latin typeface="Calibri"/>
               </a:rPr>
-              <a:t> el curso · el Docente · ustedes · las ACAs</a:t>
+              <a:t> el curso · el Docente · ustedes · cómo se evalúa</a:t>
             </a:r>
           </a:p>
           <a:p>
@@ -3477,7 +3477,7 @@
                 </a:solidFill>
                 <a:latin typeface="Calibri"/>
               </a:rPr>
-              <a:t>Las tres ACAs: qué se entrega y qué separa un buen trabajo de uno flojo</a:t>
+              <a:t>Corte por corte: qué hay en el aula y qué separa un buen trabajo de uno flojo</a:t>
             </a:r>
           </a:p>
         </p:txBody>
@@ -3492,7 +3492,7 @@
         </p:nvGraphicFramePr>
         <p:xfrm>
           <a:off x="640080" y="1691639"/>
-          <a:ext cx="10911534" cy="2011680"/>
+          <a:ext cx="10911533" cy="2011680"/>
         </p:xfrm>
         <a:graphic>
           <a:graphicData uri="http://schemas.openxmlformats.org/drawingml/2006/table">
@@ -3501,9 +3501,10 @@
                 <a:tableStyleId>{2D5ABB26-0587-4C30-8999-92F81FD0307C}</a:tableStyleId>
               </a:tblPr>
               <a:tblGrid>
-                <a:gridCol w="1818589"/>
-                <a:gridCol w="4115754"/>
-                <a:gridCol w="4977191"/>
+                <a:gridCol w="825242"/>
+                <a:gridCol w="2934194"/>
+                <a:gridCol w="3667742"/>
+                <a:gridCol w="3484355"/>
               </a:tblGrid>
               <a:tr h="502920">
                 <a:tc>
@@ -3519,7 +3520,7 @@
                           </a:solidFill>
                           <a:latin typeface="Calibri"/>
                         </a:rPr>
-                        <a:t>ACA</a:t>
+                        <a:t>Corte</a:t>
                       </a:r>
                     </a:p>
                   </a:txBody>
@@ -3542,7 +3543,7 @@
                           </a:solidFill>
                           <a:latin typeface="Calibri"/>
                         </a:rPr>
-                        <a:t>Qué se entrega</a:t>
+                        <a:t>Qué hay en el aula (CDigital)</a:t>
                       </a:r>
                     </a:p>
                   </a:txBody>
@@ -3565,7 +3566,30 @@
                           </a:solidFill>
                           <a:latin typeface="Calibri"/>
                         </a:rPr>
-                        <a:t>Qué distingue un buen entregable de uno flojo</a:t>
+                        <a:t>Qué se prepara para eso</a:t>
+                      </a:r>
+                    </a:p>
+                  </a:txBody>
+                  <a:tcPr anchor="ctr" marL="109728" marR="91440" marT="36576" marB="36576">
+                    <a:solidFill>
+                      <a:srgbClr val="0C2340"/>
+                    </a:solidFill>
+                  </a:tcPr>
+                </a:tc>
+                <a:tc>
+                  <a:txBody>
+                    <a:bodyPr/>
+                    <a:lstStyle/>
+                    <a:p>
+                      <a:pPr algn="l"/>
+                      <a:r>
+                        <a:rPr sz="1300" b="1" i="0">
+                          <a:solidFill>
+                            <a:srgbClr val="FFFFFF"/>
+                          </a:solidFill>
+                          <a:latin typeface="Calibri"/>
+                        </a:rPr>
+                        <a:t>Bueno vs. flojo</a:t>
                       </a:r>
                     </a:p>
                   </a:txBody>
@@ -3590,7 +3614,30 @@
                           </a:solidFill>
                           <a:latin typeface="Calibri"/>
                         </a:rPr>
-                        <a:t>ACA 1</a:t>
+                        <a:t>Corte 1</a:t>
+                      </a:r>
+                    </a:p>
+                  </a:txBody>
+                  <a:tcPr anchor="ctr" marL="109728" marR="91440" marT="36576" marB="36576">
+                    <a:solidFill>
+                      <a:srgbClr val="FFFFFF"/>
+                    </a:solidFill>
+                  </a:tcPr>
+                </a:tc>
+                <a:tc>
+                  <a:txBody>
+                    <a:bodyPr/>
+                    <a:lstStyle/>
+                    <a:p>
+                      <a:pPr algn="l"/>
+                      <a:r>
+                        <a:rPr sz="1100" b="1" i="0">
+                          <a:solidFill>
+                            <a:srgbClr val="2B2B2B"/>
+                          </a:solidFill>
+                          <a:latin typeface="Calibri"/>
+                        </a:rPr>
+                        <a:t>Quiz</a:t>
                       </a:r>
                       <a:r>
                         <a:rPr sz="1100" b="0" i="0">
@@ -3599,7 +3646,7 @@
                           </a:solidFill>
                           <a:latin typeface="Calibri"/>
                         </a:rPr>
-                        <a:t> — Formulación del problema</a:t>
+                        <a:t>: cuestionario individual que se resuelve en el aula, dentro de su ventana. No se sube archivo.</a:t>
                       </a:r>
                     </a:p>
                   </a:txBody>
@@ -3622,7 +3669,7 @@
                           </a:solidFill>
                           <a:latin typeface="Calibri"/>
                         </a:rPr>
-                        <a:t>Planteamiento del problema, pregunta, objetivo general y específicos, justificación, alcances y limitaciones, con referencias en APA 7.</a:t>
+                        <a:t>Formulación del problema: planteamiento, pregunta, objetivos, justificación, alcances y limitaciones. Guía: `Quiz (25%)`.</a:t>
                       </a:r>
                     </a:p>
                   </a:txBody>
@@ -3672,7 +3719,7 @@
                           </a:solidFill>
                           <a:latin typeface="Calibri"/>
                         </a:rPr>
-                        <a:t> describe una tecnología de moda y nunca dice a quién le sirve ni en qué contexto.</a:t>
+                        <a:t> una tecnología de moda sin decir a quién le sirve.</a:t>
                       </a:r>
                     </a:p>
                   </a:txBody>
@@ -3697,7 +3744,30 @@
                           </a:solidFill>
                           <a:latin typeface="Calibri"/>
                         </a:rPr>
-                        <a:t>ACA 2</a:t>
+                        <a:t>Corte 2</a:t>
+                      </a:r>
+                    </a:p>
+                  </a:txBody>
+                  <a:tcPr anchor="ctr" marL="109728" marR="91440" marT="36576" marB="36576">
+                    <a:solidFill>
+                      <a:srgbClr val="F2F2F2"/>
+                    </a:solidFill>
+                  </a:tcPr>
+                </a:tc>
+                <a:tc>
+                  <a:txBody>
+                    <a:bodyPr/>
+                    <a:lstStyle/>
+                    <a:p>
+                      <a:pPr algn="l"/>
+                      <a:r>
+                        <a:rPr sz="1100" b="1" i="0">
+                          <a:solidFill>
+                            <a:srgbClr val="2B2B2B"/>
+                          </a:solidFill>
+                          <a:latin typeface="Calibri"/>
+                        </a:rPr>
+                        <a:t>ACA 1</a:t>
                       </a:r>
                       <a:r>
                         <a:rPr sz="1100" b="0" i="0">
@@ -3706,7 +3776,25 @@
                           </a:solidFill>
                           <a:latin typeface="Calibri"/>
                         </a:rPr>
-                        <a:t> — Fundamentación referencial</a:t>
+                        <a:t>: tarea del equipo — se </a:t>
+                      </a:r>
+                      <a:r>
+                        <a:rPr sz="1100" b="1" i="0">
+                          <a:solidFill>
+                            <a:srgbClr val="2B2B2B"/>
+                          </a:solidFill>
+                          <a:latin typeface="Calibri"/>
+                        </a:rPr>
+                        <a:t>sube</a:t>
+                      </a:r>
+                      <a:r>
+                        <a:rPr sz="1100" b="0" i="0">
+                          <a:solidFill>
+                            <a:srgbClr val="2B2B2B"/>
+                          </a:solidFill>
+                          <a:latin typeface="Calibri"/>
+                        </a:rPr>
+                        <a:t> el documento.</a:t>
                       </a:r>
                     </a:p>
                   </a:txBody>
@@ -3729,7 +3817,7 @@
                           </a:solidFill>
                           <a:latin typeface="Calibri"/>
                         </a:rPr>
-                        <a:t>Antecedentes (mínimo 6, nacionales e internacionales), marco teórico, conceptual, contextual y legal si aplica; correcciones de la ACA 1 incorporadas.</a:t>
+                        <a:t>Fundamentación referencial: antecedentes (mín. 6), marco teórico, conceptual, contextual y legal, con las correcciones del corte 1. Guía: `ACA 1 (25%)`.</a:t>
                       </a:r>
                     </a:p>
                   </a:txBody>
@@ -3779,7 +3867,7 @@
                           </a:solidFill>
                           <a:latin typeface="Calibri"/>
                         </a:rPr>
-                        <a:t> una fila de resúmenes pegados que no se hablan entre sí ni con el problema.</a:t>
+                        <a:t> resúmenes pegados que no se hablan entre sí.</a:t>
                       </a:r>
                     </a:p>
                   </a:txBody>
@@ -3804,7 +3892,30 @@
                           </a:solidFill>
                           <a:latin typeface="Calibri"/>
                         </a:rPr>
-                        <a:t>ACA 3</a:t>
+                        <a:t>Corte 3</a:t>
+                      </a:r>
+                    </a:p>
+                  </a:txBody>
+                  <a:tcPr anchor="ctr" marL="109728" marR="91440" marT="36576" marB="36576">
+                    <a:solidFill>
+                      <a:srgbClr val="FFFFFF"/>
+                    </a:solidFill>
+                  </a:tcPr>
+                </a:tc>
+                <a:tc>
+                  <a:txBody>
+                    <a:bodyPr/>
+                    <a:lstStyle/>
+                    <a:p>
+                      <a:pPr algn="l"/>
+                      <a:r>
+                        <a:rPr sz="1100" b="1" i="0">
+                          <a:solidFill>
+                            <a:srgbClr val="2B2B2B"/>
+                          </a:solidFill>
+                          <a:latin typeface="Calibri"/>
+                        </a:rPr>
+                        <a:t>ACA FINAL</a:t>
                       </a:r>
                       <a:r>
                         <a:rPr sz="1100" b="0" i="0">
@@ -3813,7 +3924,43 @@
                           </a:solidFill>
                           <a:latin typeface="Calibri"/>
                         </a:rPr>
-                        <a:t> — Anteproyecto final</a:t>
+                        <a:t> (tarea del equipo) + </a:t>
+                      </a:r>
+                      <a:r>
+                        <a:rPr sz="1100" b="1" i="0">
+                          <a:solidFill>
+                            <a:srgbClr val="2B2B2B"/>
+                          </a:solidFill>
+                          <a:latin typeface="Calibri"/>
+                        </a:rPr>
+                        <a:t>autoevaluación</a:t>
+                      </a:r>
+                      <a:r>
+                        <a:rPr sz="1100" b="0" i="0">
+                          <a:solidFill>
+                            <a:srgbClr val="2B2B2B"/>
+                          </a:solidFill>
+                          <a:latin typeface="Calibri"/>
+                        </a:rPr>
+                        <a:t> (cuestionario) y </a:t>
+                      </a:r>
+                      <a:r>
+                        <a:rPr sz="1100" b="1" i="0">
+                          <a:solidFill>
+                            <a:srgbClr val="2B2B2B"/>
+                          </a:solidFill>
+                          <a:latin typeface="Calibri"/>
+                        </a:rPr>
+                        <a:t>coevaluación</a:t>
+                      </a:r>
+                      <a:r>
+                        <a:rPr sz="1100" b="0" i="0">
+                          <a:solidFill>
+                            <a:srgbClr val="2B2B2B"/>
+                          </a:solidFill>
+                          <a:latin typeface="Calibri"/>
+                        </a:rPr>
+                        <a:t> (foro), individuales.</a:t>
                       </a:r>
                     </a:p>
                   </a:txBody>
@@ -3836,7 +3983,7 @@
                           </a:solidFill>
                           <a:latin typeface="Calibri"/>
                         </a:rPr>
-                        <a:t>Documento completo e integrado: metodología, población, instrumentos </a:t>
+                        <a:t>Anteproyecto completo e integrado: metodología, población, instrumentos </a:t>
                       </a:r>
                       <a:r>
                         <a:rPr sz="1100" b="1" i="0">
@@ -3854,7 +4001,7 @@
                           </a:solidFill>
                           <a:latin typeface="Calibri"/>
                         </a:rPr>
-                        <a:t>, cronograma, presupuesto y viabilidad.</a:t>
+                        <a:t>, cronograma, presupuesto y viabilidad. Guía: `ACA FINAL (42%)`.</a:t>
                       </a:r>
                     </a:p>
                   </a:txBody>
@@ -3904,7 +4051,7 @@
                           </a:solidFill>
                           <a:latin typeface="Calibri"/>
                         </a:rPr>
-                        <a:t> capítulos escritos por personas distintas, con tres preguntas de investigación diferentes.</a:t>
+                        <a:t> capítulos con tres preguntas de investigación distintas.</a:t>
                       </a:r>
                     </a:p>
                   </a:txBody>
@@ -3948,7 +4095,7 @@
                 </a:solidFill>
                 <a:latin typeface="Calibri"/>
               </a:rPr>
-              <a:t>Los pesos están en la slide anterior. </a:t>
+              <a:t>Los pesos y el tipo de cada ítem están en la slide «CÓMO SE EVALÚA» de esta sesión. Autoevaluación y coevaluación </a:t>
             </a:r>
             <a:r>
               <a:rPr sz="1200" b="1" i="1">
@@ -3957,7 +4104,7 @@
                 </a:solidFill>
                 <a:latin typeface="Calibri"/>
               </a:rPr>
-              <a:t>Enunciado completo, criterios y fechas exactas: `Clases/Recursos/ACAs/` y CDigital.</a:t>
+              <a:t>no son entregables</a:t>
             </a:r>
             <a:r>
               <a:rPr sz="1200" b="0" i="1">
@@ -3966,43 +4113,7 @@
                 </a:solidFill>
                 <a:latin typeface="Calibri"/>
               </a:rPr>
-              <a:t> Las ACAs son estas </a:t>
-            </a:r>
-            <a:r>
-              <a:rPr sz="1200" b="1" i="1">
-                <a:solidFill>
-                  <a:srgbClr val="2B2B2B"/>
-                </a:solidFill>
-                <a:latin typeface="Calibri"/>
-              </a:rPr>
-              <a:t>tres</a:t>
-            </a:r>
-            <a:r>
-              <a:rPr sz="1200" b="0" i="1">
-                <a:solidFill>
-                  <a:srgbClr val="2B2B2B"/>
-                </a:solidFill>
-                <a:latin typeface="Calibri"/>
-              </a:rPr>
-              <a:t>: la coevaluación (4%) y la autoevaluación (4%) del cierre </a:t>
-            </a:r>
-            <a:r>
-              <a:rPr sz="1200" b="1" i="1">
-                <a:solidFill>
-                  <a:srgbClr val="2B2B2B"/>
-                </a:solidFill>
-                <a:latin typeface="Calibri"/>
-              </a:rPr>
-              <a:t>no son ACAs</a:t>
-            </a:r>
-            <a:r>
-              <a:rPr sz="1200" b="0" i="1">
-                <a:solidFill>
-                  <a:srgbClr val="2B2B2B"/>
-                </a:solidFill>
-                <a:latin typeface="Calibri"/>
-              </a:rPr>
-              <a:t>, son instrumentos individuales que cada quien diligencia en CDigital (instructivo en esa misma carpeta).</a:t>
+              <a:t>: se diligencian y se participa en el aula al cierre (instructivo en `Clases/Recursos/ACAs/`, junto con los enunciados y las fechas).</a:t>
             </a:r>
           </a:p>
         </p:txBody>
@@ -4175,7 +4286,7 @@
               </a:spcAft>
             </a:pPr>
             <a:r>
-              <a:rPr sz="1600" b="0" i="0">
+              <a:rPr sz="1500" b="0" i="0">
                 <a:solidFill>
                   <a:srgbClr val="2B2B2B"/>
                 </a:solidFill>
@@ -4184,7 +4295,7 @@
               <a:t>–   </a:t>
             </a:r>
             <a:r>
-              <a:rPr sz="1600" b="1" i="0">
+              <a:rPr sz="1500" b="1" i="0">
                 <a:solidFill>
                   <a:srgbClr val="2B2B2B"/>
                 </a:solidFill>
@@ -4193,7 +4304,7 @@
               <a:t>1.</a:t>
             </a:r>
             <a:r>
-              <a:rPr sz="1600" b="0" i="0">
+              <a:rPr sz="1500" b="0" i="0">
                 <a:solidFill>
                   <a:srgbClr val="2B2B2B"/>
                 </a:solidFill>
@@ -4202,7 +4313,7 @@
               <a:t> Trabajen la </a:t>
             </a:r>
             <a:r>
-              <a:rPr sz="1600" b="1" i="0">
+              <a:rPr sz="1500" b="1" i="0">
                 <a:solidFill>
                   <a:srgbClr val="2B2B2B"/>
                 </a:solidFill>
@@ -4211,7 +4322,7 @@
               <a:t>plantilla APA CUN en Google Docs</a:t>
             </a:r>
             <a:r>
-              <a:rPr sz="1600" b="0" i="0">
+              <a:rPr sz="1500" b="0" i="0">
                 <a:solidFill>
                   <a:srgbClr val="2B2B2B"/>
                 </a:solidFill>
@@ -4227,7 +4338,7 @@
               </a:spcAft>
             </a:pPr>
             <a:r>
-              <a:rPr sz="1600" b="0" i="0">
+              <a:rPr sz="1500" b="0" i="0">
                 <a:solidFill>
                   <a:srgbClr val="2B2B2B"/>
                 </a:solidFill>
@@ -4236,7 +4347,7 @@
               <a:t>–   </a:t>
             </a:r>
             <a:r>
-              <a:rPr sz="1600" b="1" i="0">
+              <a:rPr sz="1500" b="1" i="0">
                 <a:solidFill>
                   <a:srgbClr val="2B2B2B"/>
                 </a:solidFill>
@@ -4245,7 +4356,7 @@
               <a:t>2.</a:t>
             </a:r>
             <a:r>
-              <a:rPr sz="1600" b="0" i="0">
+              <a:rPr sz="1500" b="0" i="0">
                 <a:solidFill>
                   <a:srgbClr val="2B2B2B"/>
                 </a:solidFill>
@@ -4254,7 +4365,7 @@
               <a:t> Antes de entregar, </a:t>
             </a:r>
             <a:r>
-              <a:rPr sz="1600" b="1" i="0">
+              <a:rPr sz="1500" b="1" i="0">
                 <a:solidFill>
                   <a:srgbClr val="2B2B2B"/>
                 </a:solidFill>
@@ -4263,7 +4374,7 @@
               <a:t>descarguen como PDF</a:t>
             </a:r>
             <a:r>
-              <a:rPr sz="1600" b="0" i="0">
+              <a:rPr sz="1500" b="0" i="0">
                 <a:solidFill>
                   <a:srgbClr val="2B2B2B"/>
                 </a:solidFill>
@@ -4279,7 +4390,7 @@
               </a:spcAft>
             </a:pPr>
             <a:r>
-              <a:rPr sz="1600" b="0" i="0">
+              <a:rPr sz="1500" b="0" i="0">
                 <a:solidFill>
                   <a:srgbClr val="2B2B2B"/>
                 </a:solidFill>
@@ -4288,7 +4399,7 @@
               <a:t>–   </a:t>
             </a:r>
             <a:r>
-              <a:rPr sz="1600" b="1" i="0">
+              <a:rPr sz="1500" b="1" i="0">
                 <a:solidFill>
                   <a:srgbClr val="2B2B2B"/>
                 </a:solidFill>
@@ -4297,16 +4408,16 @@
               <a:t>3.</a:t>
             </a:r>
             <a:r>
-              <a:rPr sz="1600" b="0" i="0">
-                <a:solidFill>
-                  <a:srgbClr val="2B2B2B"/>
-                </a:solidFill>
-                <a:latin typeface="Calibri"/>
-              </a:rPr>
-              <a:t> Nombren el archivo </a:t>
-            </a:r>
-            <a:r>
-              <a:rPr sz="1600" b="1" i="0">
+              <a:rPr sz="1500" b="0" i="0">
+                <a:solidFill>
+                  <a:srgbClr val="2B2B2B"/>
+                </a:solidFill>
+                <a:latin typeface="Calibri"/>
+              </a:rPr>
+              <a:t> Nombren el archivo con el ítem del aula: </a:t>
+            </a:r>
+            <a:r>
+              <a:rPr sz="1500" b="1" i="0">
                 <a:solidFill>
                   <a:srgbClr val="2B2B2B"/>
                 </a:solidFill>
@@ -4315,13 +4426,31 @@
               <a:t>ACA1_Apellido1-Apellido2-Apellido3</a:t>
             </a:r>
             <a:r>
-              <a:rPr sz="1600" b="0" i="0">
-                <a:solidFill>
-                  <a:srgbClr val="2B2B2B"/>
-                </a:solidFill>
-                <a:latin typeface="Calibri"/>
-              </a:rPr>
-              <a:t> (y ACA2 / ACA3 en las siguientes entregas).</a:t>
+              <a:rPr sz="1500" b="0" i="0">
+                <a:solidFill>
+                  <a:srgbClr val="2B2B2B"/>
+                </a:solidFill>
+                <a:latin typeface="Calibri"/>
+              </a:rPr>
+              <a:t> en el corte 2 y </a:t>
+            </a:r>
+            <a:r>
+              <a:rPr sz="1500" b="1" i="0">
+                <a:solidFill>
+                  <a:srgbClr val="2B2B2B"/>
+                </a:solidFill>
+                <a:latin typeface="Calibri"/>
+              </a:rPr>
+              <a:t>ACAFinal_Apellido1-Apellido2-Apellido3</a:t>
+            </a:r>
+            <a:r>
+              <a:rPr sz="1500" b="0" i="0">
+                <a:solidFill>
+                  <a:srgbClr val="2B2B2B"/>
+                </a:solidFill>
+                <a:latin typeface="Calibri"/>
+              </a:rPr>
+              <a:t> en el cierre.</a:t>
             </a:r>
           </a:p>
           <a:p>
@@ -4331,7 +4460,7 @@
               </a:spcAft>
             </a:pPr>
             <a:r>
-              <a:rPr sz="1600" b="0" i="0">
+              <a:rPr sz="1500" b="0" i="0">
                 <a:solidFill>
                   <a:srgbClr val="2B2B2B"/>
                 </a:solidFill>
@@ -4340,7 +4469,7 @@
               <a:t>–   </a:t>
             </a:r>
             <a:r>
-              <a:rPr sz="1600" b="1" i="0">
+              <a:rPr sz="1500" b="1" i="0">
                 <a:solidFill>
                   <a:srgbClr val="2B2B2B"/>
                 </a:solidFill>
@@ -4349,7 +4478,7 @@
               <a:t>4.</a:t>
             </a:r>
             <a:r>
-              <a:rPr sz="1600" b="0" i="0">
+              <a:rPr sz="1500" b="0" i="0">
                 <a:solidFill>
                   <a:srgbClr val="2B2B2B"/>
                 </a:solidFill>
@@ -4358,7 +4487,7 @@
               <a:t> </a:t>
             </a:r>
             <a:r>
-              <a:rPr sz="1600" b="1" i="0">
+              <a:rPr sz="1500" b="1" i="0">
                 <a:solidFill>
                   <a:srgbClr val="2B2B2B"/>
                 </a:solidFill>
@@ -4367,16 +4496,16 @@
               <a:t>Un solo integrante</a:t>
             </a:r>
             <a:r>
-              <a:rPr sz="1600" b="0" i="0">
-                <a:solidFill>
-                  <a:srgbClr val="2B2B2B"/>
-                </a:solidFill>
-                <a:latin typeface="Calibri"/>
-              </a:rPr>
-              <a:t> lo sube en el espacio de esa ACA en </a:t>
-            </a:r>
-            <a:r>
-              <a:rPr sz="1600" b="1" i="0">
+              <a:rPr sz="1500" b="0" i="0">
+                <a:solidFill>
+                  <a:srgbClr val="2B2B2B"/>
+                </a:solidFill>
+                <a:latin typeface="Calibri"/>
+              </a:rPr>
+              <a:t> lo sube en el espacio de ese ítem en </a:t>
+            </a:r>
+            <a:r>
+              <a:rPr sz="1500" b="1" i="0">
                 <a:solidFill>
                   <a:srgbClr val="2B2B2B"/>
                 </a:solidFill>
@@ -4385,13 +4514,47 @@
               <a:t>CDigital</a:t>
             </a:r>
             <a:r>
-              <a:rPr sz="1600" b="0" i="0">
+              <a:rPr sz="1500" b="0" i="0">
                 <a:solidFill>
                   <a:srgbClr val="2B2B2B"/>
                 </a:solidFill>
                 <a:latin typeface="Calibri"/>
               </a:rPr>
               <a:t>; los demás verifican que quedó cargado.</a:t>
+            </a:r>
+          </a:p>
+          <a:p>
+            <a:pPr lvl="1">
+              <a:spcAft>
+                <a:spcPts val="600"/>
+              </a:spcAft>
+            </a:pPr>
+            <a:r>
+              <a:rPr sz="1400" b="0" i="0">
+                <a:solidFill>
+                  <a:srgbClr val="2B2B2B"/>
+                </a:solidFill>
+                <a:latin typeface="Calibri"/>
+              </a:rPr>
+              <a:t>●   </a:t>
+            </a:r>
+            <a:r>
+              <a:rPr sz="1400" b="1" i="0">
+                <a:solidFill>
+                  <a:srgbClr val="2B2B2B"/>
+                </a:solidFill>
+                <a:latin typeface="Calibri"/>
+              </a:rPr>
+              <a:t>El Quiz del corte 1 no se sube:</a:t>
+            </a:r>
+            <a:r>
+              <a:rPr sz="1400" b="0" i="0">
+                <a:solidFill>
+                  <a:srgbClr val="2B2B2B"/>
+                </a:solidFill>
+                <a:latin typeface="Calibri"/>
+              </a:rPr>
+              <a:t> es un cuestionario individual que se resuelve en el aula dentro de su ventana.</a:t>
             </a:r>
           </a:p>
           <a:p>
@@ -4401,7 +4564,7 @@
               </a:spcAft>
             </a:pPr>
             <a:r>
-              <a:rPr sz="1600" b="0" i="0">
+              <a:rPr sz="1500" b="0" i="0">
                 <a:solidFill>
                   <a:srgbClr val="2B2B2B"/>
                 </a:solidFill>
@@ -4410,7 +4573,7 @@
               <a:t>–   </a:t>
             </a:r>
             <a:r>
-              <a:rPr sz="1600" b="1" i="0">
+              <a:rPr sz="1500" b="1" i="0">
                 <a:solidFill>
                   <a:srgbClr val="2B2B2B"/>
                 </a:solidFill>
@@ -4419,7 +4582,7 @@
               <a:t>5.</a:t>
             </a:r>
             <a:r>
-              <a:rPr sz="1600" b="0" i="0">
+              <a:rPr sz="1500" b="0" i="0">
                 <a:solidFill>
                   <a:srgbClr val="2B2B2B"/>
                 </a:solidFill>
@@ -4428,7 +4591,7 @@
               <a:t> Revisen que la portada traiga los </a:t>
             </a:r>
             <a:r>
-              <a:rPr sz="1600" b="1" i="0">
+              <a:rPr sz="1500" b="1" i="0">
                 <a:solidFill>
                   <a:srgbClr val="2B2B2B"/>
                 </a:solidFill>
@@ -4437,7 +4600,7 @@
               <a:t>nombres completos de todos</a:t>
             </a:r>
             <a:r>
-              <a:rPr sz="1600" b="0" i="0">
+              <a:rPr sz="1500" b="0" i="0">
                 <a:solidFill>
                   <a:srgbClr val="2B2B2B"/>
                 </a:solidFill>
@@ -4453,7 +4616,7 @@
               </a:spcAft>
             </a:pPr>
             <a:r>
-              <a:rPr sz="1600" b="0" i="0">
+              <a:rPr sz="1500" b="0" i="0">
                 <a:solidFill>
                   <a:srgbClr val="2B2B2B"/>
                 </a:solidFill>
@@ -4462,7 +4625,7 @@
               <a:t>–   </a:t>
             </a:r>
             <a:r>
-              <a:rPr sz="1600" b="1" i="0">
+              <a:rPr sz="1500" b="1" i="0">
                 <a:solidFill>
                   <a:srgbClr val="2B2B2B"/>
                 </a:solidFill>
@@ -4471,7 +4634,7 @@
               <a:t>Lo que no está en CDigital, no está entregado.</a:t>
             </a:r>
             <a:r>
-              <a:rPr sz="1600" b="0" i="0">
+              <a:rPr sz="1500" b="0" i="0">
                 <a:solidFill>
                   <a:srgbClr val="2B2B2B"/>
                 </a:solidFill>
@@ -4487,7 +4650,7 @@
               </a:spcAft>
             </a:pPr>
             <a:r>
-              <a:rPr sz="1600" b="0" i="0">
+              <a:rPr sz="1500" b="0" i="0">
                 <a:solidFill>
                   <a:srgbClr val="2B2B2B"/>
                 </a:solidFill>
@@ -4496,7 +4659,7 @@
               <a:t>–   </a:t>
             </a:r>
             <a:r>
-              <a:rPr sz="1600" b="1" i="0">
+              <a:rPr sz="1500" b="1" i="0">
                 <a:solidFill>
                   <a:srgbClr val="2B2B2B"/>
                 </a:solidFill>
@@ -4505,7 +4668,7 @@
               <a:t>Entrega tardía:</a:t>
             </a:r>
             <a:r>
-              <a:rPr sz="1600" b="0" i="0">
+              <a:rPr sz="1500" b="0" i="0">
                 <a:solidFill>
                   <a:srgbClr val="2B2B2B"/>
                 </a:solidFill>
@@ -4514,7 +4677,7 @@
               <a:t> el espacio cierra a la hora publicada en el enunciado. Si algo pasa, se avisa </a:t>
             </a:r>
             <a:r>
-              <a:rPr sz="1600" b="1" i="0">
+              <a:rPr sz="1500" b="1" i="0">
                 <a:solidFill>
                   <a:srgbClr val="2B2B2B"/>
                 </a:solidFill>
@@ -4523,7 +4686,7 @@
               <a:t>antes</a:t>
             </a:r>
             <a:r>
-              <a:rPr sz="1600" b="0" i="0">
+              <a:rPr sz="1500" b="0" i="0">
                 <a:solidFill>
                   <a:srgbClr val="2B2B2B"/>
                 </a:solidFill>
@@ -4539,7 +4702,7 @@
               </a:spcAft>
             </a:pPr>
             <a:r>
-              <a:rPr sz="1500" b="0" i="0">
+              <a:rPr sz="1400" b="0" i="0">
                 <a:solidFill>
                   <a:srgbClr val="2B2B2B"/>
                 </a:solidFill>
@@ -5713,7 +5876,25 @@
                           </a:solidFill>
                           <a:latin typeface="Calibri"/>
                         </a:rPr>
-                        <a:t>Aula oficial: material, espacios de entrega de las ACAs y retroalimentación. Único canal de entrega válido.</a:t>
+                        <a:t>Aula oficial: material, </a:t>
+                      </a:r>
+                      <a:r>
+                        <a:rPr sz="1100" b="1" i="0">
+                          <a:solidFill>
+                            <a:srgbClr val="2B2B2B"/>
+                          </a:solidFill>
+                          <a:latin typeface="Calibri"/>
+                        </a:rPr>
+                        <a:t>quiz</a:t>
+                      </a:r>
+                      <a:r>
+                        <a:rPr sz="1100" b="0" i="0">
+                          <a:solidFill>
+                            <a:srgbClr val="2B2B2B"/>
+                          </a:solidFill>
+                          <a:latin typeface="Calibri"/>
+                        </a:rPr>
+                        <a:t>, espacios de entrega de ACA 1 y ACA FINAL, foro de coevaluación y retroalimentación. Único canal válido.</a:t>
                       </a:r>
                     </a:p>
                   </a:txBody>
@@ -6507,7 +6688,7 @@
                 </a:solidFill>
                 <a:latin typeface="Calibri"/>
               </a:rPr>
-              <a:t> revisen el enunciado de la ACA y la plantilla. La mitad de las dudas ya está resuelta ahí.</a:t>
+              <a:t> revisen el enunciado del corte y la plantilla. La mitad de las dudas ya está resuelta ahí.</a:t>
             </a:r>
           </a:p>
           <a:p>
@@ -7364,7 +7545,7 @@
                 </a:solidFill>
                 <a:latin typeface="Calibri"/>
               </a:rPr>
-              <a:t>Abran el enunciado de la ACA 1</a:t>
+              <a:t>Abran la guía del primer corte</a:t>
             </a:r>
             <a:r>
               <a:rPr sz="1500" b="0" i="0">
@@ -7373,7 +7554,25 @@
                 </a:solidFill>
                 <a:latin typeface="Calibri"/>
               </a:rPr>
-              <a:t> en `Clases/Recursos/ACAs/` y léanlo completo, incluida la lista de criterios.</a:t>
+              <a:t> en `Clases/Recursos/ACAs/` — `Quiz (25%)` — y léanla completa, criterios incluidos: eso es lo que comprueba el </a:t>
+            </a:r>
+            <a:r>
+              <a:rPr sz="1500" b="1" i="0">
+                <a:solidFill>
+                  <a:srgbClr val="2B2B2B"/>
+                </a:solidFill>
+                <a:latin typeface="Calibri"/>
+              </a:rPr>
+              <a:t>Quiz</a:t>
+            </a:r>
+            <a:r>
+              <a:rPr sz="1500" b="0" i="0">
+                <a:solidFill>
+                  <a:srgbClr val="2B2B2B"/>
+                </a:solidFill>
+                <a:latin typeface="Calibri"/>
+              </a:rPr>
+              <a:t>.</a:t>
             </a:r>
           </a:p>
           <a:p>
@@ -7855,7 +8054,7 @@
                 </a:solidFill>
                 <a:latin typeface="Calibri"/>
               </a:rPr>
-              <a:t> Sí, pero el equipo es de máximo 3 y la carga de trabajo es la misma para uno que para tres. Decídanlo esta semana: después de la ACA 1 no conviene cambiar de equipo ni de tema.</a:t>
+              <a:t> Sí, pero el equipo es de máximo 3 y la carga de trabajo es la misma para uno que para tres. Decídanlo esta semana: después del primer corte no conviene cambiar de equipo ni de tema.</a:t>
             </a:r>
           </a:p>
         </p:txBody>
@@ -8844,7 +9043,7 @@
                 </a:solidFill>
                 <a:latin typeface="Calibri"/>
               </a:rPr>
-              <a:t>Las ACAs:</a:t>
+              <a:t>Cómo se evalúa:</a:t>
             </a:r>
             <a:r>
               <a:rPr sz="1600" b="0" i="0">
@@ -8853,7 +9052,7 @@
                 </a:solidFill>
                 <a:latin typeface="Calibri"/>
               </a:rPr>
-              <a:t> qué se entrega, cuánto pesa y dónde se sube.</a:t>
+              <a:t> qué ítems tiene el aula, cuánto pesa cada uno y qué se hace con él.</a:t>
             </a:r>
           </a:p>
           <a:p>
@@ -9134,25 +9333,7 @@
                 </a:solidFill>
                 <a:latin typeface="Calibri"/>
               </a:rPr>
-              <a:t>–   Abrir el enunciado de la </a:t>
-            </a:r>
-            <a:r>
-              <a:rPr sz="1600" b="1" i="0">
-                <a:solidFill>
-                  <a:srgbClr val="2B2B2B"/>
-                </a:solidFill>
-                <a:latin typeface="Calibri"/>
-              </a:rPr>
-              <a:t>ACA 1</a:t>
-            </a:r>
-            <a:r>
-              <a:rPr sz="1600" b="0" i="0">
-                <a:solidFill>
-                  <a:srgbClr val="2B2B2B"/>
-                </a:solidFill>
-                <a:latin typeface="Calibri"/>
-              </a:rPr>
-              <a:t> en `Clases/Recursos/ACAs/` y leerlo entero.</a:t>
+              <a:t>–   Abrir los enunciados de `Clases/Recursos/ACAs/`: son la guía escrita de lo que evalúa cada corte.</a:t>
             </a:r>
           </a:p>
         </p:txBody>
@@ -10319,7 +10500,7 @@
                 </a:solidFill>
                 <a:latin typeface="Calibri"/>
               </a:rPr>
-              <a:t>LAS ACAs — QUÉ SE EVALÚA</a:t>
+              <a:t>CÓMO SE EVALÚA — LOS ÍTEMS DEL AULA</a:t>
             </a:r>
           </a:p>
         </p:txBody>
@@ -10354,7 +10535,7 @@
                 </a:solidFill>
                 <a:latin typeface="Calibri"/>
               </a:rPr>
-              <a:t>Entrega oficial: </a:t>
+              <a:t>Evaluación y notas: solo en </a:t>
             </a:r>
             <a:r>
               <a:rPr sz="1500" b="1" i="0">
@@ -10364,6 +10545,33 @@
                 <a:latin typeface="Calibri"/>
               </a:rPr>
               <a:t>CDigital</a:t>
+            </a:r>
+            <a:r>
+              <a:rPr sz="1500" b="0" i="0">
+                <a:solidFill>
+                  <a:srgbClr val="2B2B2B"/>
+                </a:solidFill>
+                <a:latin typeface="Calibri"/>
+              </a:rPr>
+              <a:t> · los pesos suman </a:t>
+            </a:r>
+            <a:r>
+              <a:rPr sz="1500" b="1" i="0">
+                <a:solidFill>
+                  <a:srgbClr val="2B2B2B"/>
+                </a:solidFill>
+                <a:latin typeface="Calibri"/>
+              </a:rPr>
+              <a:t>100%</a:t>
+            </a:r>
+            <a:r>
+              <a:rPr sz="1500" b="0" i="0">
+                <a:solidFill>
+                  <a:srgbClr val="2B2B2B"/>
+                </a:solidFill>
+                <a:latin typeface="Calibri"/>
+              </a:rPr>
+              <a:t> · fechas: enunciados y Presentación del Curso</a:t>
             </a:r>
           </a:p>
         </p:txBody>
@@ -10378,7 +10586,7 @@
         </p:nvGraphicFramePr>
         <p:xfrm>
           <a:off x="640080" y="2011679"/>
-          <a:ext cx="10911533" cy="2011680"/>
+          <a:ext cx="10911533" cy="3017520"/>
         </p:xfrm>
         <a:graphic>
           <a:graphicData uri="http://schemas.openxmlformats.org/drawingml/2006/table">
@@ -10387,9 +10595,11 @@
                 <a:tableStyleId>{2D5ABB26-0587-4C30-8999-92F81FD0307C}</a:tableStyleId>
               </a:tblPr>
               <a:tblGrid>
-                <a:gridCol w="1993453"/>
-                <a:gridCol w="7763976"/>
-                <a:gridCol w="1154104"/>
+                <a:gridCol w="1833871"/>
+                <a:gridCol w="1192016"/>
+                <a:gridCol w="1192016"/>
+                <a:gridCol w="825242"/>
+                <a:gridCol w="5868388"/>
               </a:tblGrid>
               <a:tr h="502920">
                 <a:tc>
@@ -10405,7 +10615,7 @@
                           </a:solidFill>
                           <a:latin typeface="Calibri"/>
                         </a:rPr>
-                        <a:t>ACA</a:t>
+                        <a:t>Ítem en CDigital</a:t>
                       </a:r>
                     </a:p>
                   </a:txBody>
@@ -10428,7 +10638,30 @@
                           </a:solidFill>
                           <a:latin typeface="Calibri"/>
                         </a:rPr>
-                        <a:t>Qué entregas</a:t>
+                        <a:t>Tipo</a:t>
+                      </a:r>
+                    </a:p>
+                  </a:txBody>
+                  <a:tcPr anchor="ctr" marL="109728" marR="91440" marT="36576" marB="36576">
+                    <a:solidFill>
+                      <a:srgbClr val="0C2340"/>
+                    </a:solidFill>
+                  </a:tcPr>
+                </a:tc>
+                <a:tc>
+                  <a:txBody>
+                    <a:bodyPr/>
+                    <a:lstStyle/>
+                    <a:p>
+                      <a:pPr algn="l"/>
+                      <a:r>
+                        <a:rPr sz="1300" b="1" i="0">
+                          <a:solidFill>
+                            <a:srgbClr val="FFFFFF"/>
+                          </a:solidFill>
+                          <a:latin typeface="Calibri"/>
+                        </a:rPr>
+                        <a:t>Corte (peso)</a:t>
                       </a:r>
                     </a:p>
                   </a:txBody>
@@ -10461,6 +10694,29 @@
                     </a:solidFill>
                   </a:tcPr>
                 </a:tc>
+                <a:tc>
+                  <a:txBody>
+                    <a:bodyPr/>
+                    <a:lstStyle/>
+                    <a:p>
+                      <a:pPr algn="l"/>
+                      <a:r>
+                        <a:rPr sz="1300" b="1" i="0">
+                          <a:solidFill>
+                            <a:srgbClr val="FFFFFF"/>
+                          </a:solidFill>
+                          <a:latin typeface="Calibri"/>
+                        </a:rPr>
+                        <a:t>Qué haces con él</a:t>
+                      </a:r>
+                    </a:p>
+                  </a:txBody>
+                  <a:tcPr anchor="ctr" marL="109728" marR="91440" marT="36576" marB="36576">
+                    <a:solidFill>
+                      <a:srgbClr val="0C2340"/>
+                    </a:solidFill>
+                  </a:tcPr>
+                </a:tc>
               </a:tr>
               <a:tr h="502920">
                 <a:tc>
@@ -10470,13 +10726,13 @@
                     <a:p>
                       <a:pPr algn="l"/>
                       <a:r>
-                        <a:rPr sz="1200" b="0" i="0">
+                        <a:rPr sz="1100" b="1" i="0">
                           <a:solidFill>
                             <a:srgbClr val="2B2B2B"/>
                           </a:solidFill>
                           <a:latin typeface="Calibri"/>
                         </a:rPr>
-                        <a:t>ACA 1</a:t>
+                        <a:t>Quiz</a:t>
                       </a:r>
                     </a:p>
                   </a:txBody>
@@ -10493,13 +10749,13 @@
                     <a:p>
                       <a:pPr algn="l"/>
                       <a:r>
-                        <a:rPr sz="1200" b="0" i="0">
+                        <a:rPr sz="1100" b="0" i="0">
                           <a:solidFill>
                             <a:srgbClr val="2B2B2B"/>
                           </a:solidFill>
                           <a:latin typeface="Calibri"/>
                         </a:rPr>
-                        <a:t>Formulación del problema</a:t>
+                        <a:t>Cuestionario</a:t>
                       </a:r>
                     </a:p>
                   </a:txBody>
@@ -10516,13 +10772,59 @@
                     <a:p>
                       <a:pPr algn="l"/>
                       <a:r>
-                        <a:rPr sz="1200" b="0" i="0">
+                        <a:rPr sz="1100" b="0" i="0">
+                          <a:solidFill>
+                            <a:srgbClr val="2B2B2B"/>
+                          </a:solidFill>
+                          <a:latin typeface="Calibri"/>
+                        </a:rPr>
+                        <a:t>1 (25%)</a:t>
+                      </a:r>
+                    </a:p>
+                  </a:txBody>
+                  <a:tcPr anchor="ctr" marL="109728" marR="91440" marT="36576" marB="36576">
+                    <a:solidFill>
+                      <a:srgbClr val="FFFFFF"/>
+                    </a:solidFill>
+                  </a:tcPr>
+                </a:tc>
+                <a:tc>
+                  <a:txBody>
+                    <a:bodyPr/>
+                    <a:lstStyle/>
+                    <a:p>
+                      <a:pPr algn="l"/>
+                      <a:r>
+                        <a:rPr sz="1100" b="1" i="0">
                           <a:solidFill>
                             <a:srgbClr val="2B2B2B"/>
                           </a:solidFill>
                           <a:latin typeface="Calibri"/>
                         </a:rPr>
                         <a:t>25%</a:t>
+                      </a:r>
+                    </a:p>
+                  </a:txBody>
+                  <a:tcPr anchor="ctr" marL="109728" marR="91440" marT="36576" marB="36576">
+                    <a:solidFill>
+                      <a:srgbClr val="FFFFFF"/>
+                    </a:solidFill>
+                  </a:tcPr>
+                </a:tc>
+                <a:tc>
+                  <a:txBody>
+                    <a:bodyPr/>
+                    <a:lstStyle/>
+                    <a:p>
+                      <a:pPr algn="l"/>
+                      <a:r>
+                        <a:rPr sz="1100" b="0" i="0">
+                          <a:solidFill>
+                            <a:srgbClr val="2B2B2B"/>
+                          </a:solidFill>
+                          <a:latin typeface="Calibri"/>
+                        </a:rPr>
+                        <a:t>Lo resuelves en CDigital dentro de su ventana. No se sube archivo.</a:t>
                       </a:r>
                     </a:p>
                   </a:txBody>
@@ -10541,13 +10843,13 @@
                     <a:p>
                       <a:pPr algn="l"/>
                       <a:r>
-                        <a:rPr sz="1200" b="0" i="0">
+                        <a:rPr sz="1100" b="1" i="0">
                           <a:solidFill>
                             <a:srgbClr val="2B2B2B"/>
                           </a:solidFill>
                           <a:latin typeface="Calibri"/>
                         </a:rPr>
-                        <a:t>ACA 2</a:t>
+                        <a:t>ACA 1</a:t>
                       </a:r>
                     </a:p>
                   </a:txBody>
@@ -10564,13 +10866,13 @@
                     <a:p>
                       <a:pPr algn="l"/>
                       <a:r>
-                        <a:rPr sz="1200" b="0" i="0">
+                        <a:rPr sz="1100" b="0" i="0">
                           <a:solidFill>
                             <a:srgbClr val="2B2B2B"/>
                           </a:solidFill>
                           <a:latin typeface="Calibri"/>
                         </a:rPr>
-                        <a:t>Fundamentación referencial</a:t>
+                        <a:t>Tarea</a:t>
                       </a:r>
                     </a:p>
                   </a:txBody>
@@ -10587,13 +10889,59 @@
                     <a:p>
                       <a:pPr algn="l"/>
                       <a:r>
-                        <a:rPr sz="1200" b="0" i="0">
+                        <a:rPr sz="1100" b="0" i="0">
+                          <a:solidFill>
+                            <a:srgbClr val="2B2B2B"/>
+                          </a:solidFill>
+                          <a:latin typeface="Calibri"/>
+                        </a:rPr>
+                        <a:t>2 (25%)</a:t>
+                      </a:r>
+                    </a:p>
+                  </a:txBody>
+                  <a:tcPr anchor="ctr" marL="109728" marR="91440" marT="36576" marB="36576">
+                    <a:solidFill>
+                      <a:srgbClr val="F2F2F2"/>
+                    </a:solidFill>
+                  </a:tcPr>
+                </a:tc>
+                <a:tc>
+                  <a:txBody>
+                    <a:bodyPr/>
+                    <a:lstStyle/>
+                    <a:p>
+                      <a:pPr algn="l"/>
+                      <a:r>
+                        <a:rPr sz="1100" b="1" i="0">
                           <a:solidFill>
                             <a:srgbClr val="2B2B2B"/>
                           </a:solidFill>
                           <a:latin typeface="Calibri"/>
                         </a:rPr>
                         <a:t>25%</a:t>
+                      </a:r>
+                    </a:p>
+                  </a:txBody>
+                  <a:tcPr anchor="ctr" marL="109728" marR="91440" marT="36576" marB="36576">
+                    <a:solidFill>
+                      <a:srgbClr val="F2F2F2"/>
+                    </a:solidFill>
+                  </a:tcPr>
+                </a:tc>
+                <a:tc>
+                  <a:txBody>
+                    <a:bodyPr/>
+                    <a:lstStyle/>
+                    <a:p>
+                      <a:pPr algn="l"/>
+                      <a:r>
+                        <a:rPr sz="1100" b="0" i="0">
+                          <a:solidFill>
+                            <a:srgbClr val="2B2B2B"/>
+                          </a:solidFill>
+                          <a:latin typeface="Calibri"/>
+                        </a:rPr>
+                        <a:t>Subes el documento (plantilla APA CUN) al espacio de la tarea.</a:t>
                       </a:r>
                     </a:p>
                   </a:txBody>
@@ -10612,13 +10960,13 @@
                     <a:p>
                       <a:pPr algn="l"/>
                       <a:r>
-                        <a:rPr sz="1200" b="0" i="0">
+                        <a:rPr sz="1100" b="1" i="0">
                           <a:solidFill>
                             <a:srgbClr val="2B2B2B"/>
                           </a:solidFill>
                           <a:latin typeface="Calibri"/>
                         </a:rPr>
-                        <a:t>ACA 3</a:t>
+                        <a:t>ACA FINAL</a:t>
                       </a:r>
                     </a:p>
                   </a:txBody>
@@ -10635,13 +10983,13 @@
                     <a:p>
                       <a:pPr algn="l"/>
                       <a:r>
-                        <a:rPr sz="1200" b="0" i="0">
+                        <a:rPr sz="1100" b="0" i="0">
                           <a:solidFill>
                             <a:srgbClr val="2B2B2B"/>
                           </a:solidFill>
                           <a:latin typeface="Calibri"/>
                         </a:rPr>
-                        <a:t>Anteproyecto final</a:t>
+                        <a:t>Tarea</a:t>
                       </a:r>
                     </a:p>
                   </a:txBody>
@@ -10658,7 +11006,30 @@
                     <a:p>
                       <a:pPr algn="l"/>
                       <a:r>
-                        <a:rPr sz="1200" b="0" i="0">
+                        <a:rPr sz="1100" b="0" i="0">
+                          <a:solidFill>
+                            <a:srgbClr val="2B2B2B"/>
+                          </a:solidFill>
+                          <a:latin typeface="Calibri"/>
+                        </a:rPr>
+                        <a:t>3 (50%)</a:t>
+                      </a:r>
+                    </a:p>
+                  </a:txBody>
+                  <a:tcPr anchor="ctr" marL="109728" marR="91440" marT="36576" marB="36576">
+                    <a:solidFill>
+                      <a:srgbClr val="FFFFFF"/>
+                    </a:solidFill>
+                  </a:tcPr>
+                </a:tc>
+                <a:tc>
+                  <a:txBody>
+                    <a:bodyPr/>
+                    <a:lstStyle/>
+                    <a:p>
+                      <a:pPr algn="l"/>
+                      <a:r>
+                        <a:rPr sz="1100" b="1" i="0">
                           <a:solidFill>
                             <a:srgbClr val="2B2B2B"/>
                           </a:solidFill>
@@ -10674,6 +11045,263 @@
                     </a:solidFill>
                   </a:tcPr>
                 </a:tc>
+                <a:tc>
+                  <a:txBody>
+                    <a:bodyPr/>
+                    <a:lstStyle/>
+                    <a:p>
+                      <a:pPr algn="l"/>
+                      <a:r>
+                        <a:rPr sz="1100" b="0" i="0">
+                          <a:solidFill>
+                            <a:srgbClr val="2B2B2B"/>
+                          </a:solidFill>
+                          <a:latin typeface="Calibri"/>
+                        </a:rPr>
+                        <a:t>Subes el documento (plantilla APA CUN) al espacio de la tarea.</a:t>
+                      </a:r>
+                    </a:p>
+                  </a:txBody>
+                  <a:tcPr anchor="ctr" marL="109728" marR="91440" marT="36576" marB="36576">
+                    <a:solidFill>
+                      <a:srgbClr val="FFFFFF"/>
+                    </a:solidFill>
+                  </a:tcPr>
+                </a:tc>
+              </a:tr>
+              <a:tr h="502920">
+                <a:tc>
+                  <a:txBody>
+                    <a:bodyPr/>
+                    <a:lstStyle/>
+                    <a:p>
+                      <a:pPr algn="l"/>
+                      <a:r>
+                        <a:rPr sz="1100" b="1" i="0">
+                          <a:solidFill>
+                            <a:srgbClr val="2B2B2B"/>
+                          </a:solidFill>
+                          <a:latin typeface="Calibri"/>
+                        </a:rPr>
+                        <a:t>Autoevaluación</a:t>
+                      </a:r>
+                    </a:p>
+                  </a:txBody>
+                  <a:tcPr anchor="ctr" marL="109728" marR="91440" marT="36576" marB="36576">
+                    <a:solidFill>
+                      <a:srgbClr val="F2F2F2"/>
+                    </a:solidFill>
+                  </a:tcPr>
+                </a:tc>
+                <a:tc>
+                  <a:txBody>
+                    <a:bodyPr/>
+                    <a:lstStyle/>
+                    <a:p>
+                      <a:pPr algn="l"/>
+                      <a:r>
+                        <a:rPr sz="1100" b="0" i="0">
+                          <a:solidFill>
+                            <a:srgbClr val="2B2B2B"/>
+                          </a:solidFill>
+                          <a:latin typeface="Calibri"/>
+                        </a:rPr>
+                        <a:t>Cuestionario</a:t>
+                      </a:r>
+                    </a:p>
+                  </a:txBody>
+                  <a:tcPr anchor="ctr" marL="109728" marR="91440" marT="36576" marB="36576">
+                    <a:solidFill>
+                      <a:srgbClr val="F2F2F2"/>
+                    </a:solidFill>
+                  </a:tcPr>
+                </a:tc>
+                <a:tc>
+                  <a:txBody>
+                    <a:bodyPr/>
+                    <a:lstStyle/>
+                    <a:p>
+                      <a:pPr algn="l"/>
+                      <a:r>
+                        <a:rPr sz="1100" b="0" i="0">
+                          <a:solidFill>
+                            <a:srgbClr val="2B2B2B"/>
+                          </a:solidFill>
+                          <a:latin typeface="Calibri"/>
+                        </a:rPr>
+                        <a:t>3 (50%)</a:t>
+                      </a:r>
+                    </a:p>
+                  </a:txBody>
+                  <a:tcPr anchor="ctr" marL="109728" marR="91440" marT="36576" marB="36576">
+                    <a:solidFill>
+                      <a:srgbClr val="F2F2F2"/>
+                    </a:solidFill>
+                  </a:tcPr>
+                </a:tc>
+                <a:tc>
+                  <a:txBody>
+                    <a:bodyPr/>
+                    <a:lstStyle/>
+                    <a:p>
+                      <a:pPr algn="l"/>
+                      <a:r>
+                        <a:rPr sz="1100" b="1" i="0">
+                          <a:solidFill>
+                            <a:srgbClr val="2B2B2B"/>
+                          </a:solidFill>
+                          <a:latin typeface="Calibri"/>
+                        </a:rPr>
+                        <a:t>4%</a:t>
+                      </a:r>
+                    </a:p>
+                  </a:txBody>
+                  <a:tcPr anchor="ctr" marL="109728" marR="91440" marT="36576" marB="36576">
+                    <a:solidFill>
+                      <a:srgbClr val="F2F2F2"/>
+                    </a:solidFill>
+                  </a:tcPr>
+                </a:tc>
+                <a:tc>
+                  <a:txBody>
+                    <a:bodyPr/>
+                    <a:lstStyle/>
+                    <a:p>
+                      <a:pPr algn="l"/>
+                      <a:r>
+                        <a:rPr sz="1100" b="0" i="0">
+                          <a:solidFill>
+                            <a:srgbClr val="2B2B2B"/>
+                          </a:solidFill>
+                          <a:latin typeface="Calibri"/>
+                        </a:rPr>
+                        <a:t>La diligencias tú mismo en el aula (cuestionario individual).</a:t>
+                      </a:r>
+                    </a:p>
+                  </a:txBody>
+                  <a:tcPr anchor="ctr" marL="109728" marR="91440" marT="36576" marB="36576">
+                    <a:solidFill>
+                      <a:srgbClr val="F2F2F2"/>
+                    </a:solidFill>
+                  </a:tcPr>
+                </a:tc>
+              </a:tr>
+              <a:tr h="502920">
+                <a:tc>
+                  <a:txBody>
+                    <a:bodyPr/>
+                    <a:lstStyle/>
+                    <a:p>
+                      <a:pPr algn="l"/>
+                      <a:r>
+                        <a:rPr sz="1100" b="1" i="0">
+                          <a:solidFill>
+                            <a:srgbClr val="2B2B2B"/>
+                          </a:solidFill>
+                          <a:latin typeface="Calibri"/>
+                        </a:rPr>
+                        <a:t>Coevaluación</a:t>
+                      </a:r>
+                    </a:p>
+                  </a:txBody>
+                  <a:tcPr anchor="ctr" marL="109728" marR="91440" marT="36576" marB="36576">
+                    <a:solidFill>
+                      <a:srgbClr val="FFFFFF"/>
+                    </a:solidFill>
+                  </a:tcPr>
+                </a:tc>
+                <a:tc>
+                  <a:txBody>
+                    <a:bodyPr/>
+                    <a:lstStyle/>
+                    <a:p>
+                      <a:pPr algn="l"/>
+                      <a:r>
+                        <a:rPr sz="1100" b="0" i="0">
+                          <a:solidFill>
+                            <a:srgbClr val="2B2B2B"/>
+                          </a:solidFill>
+                          <a:latin typeface="Calibri"/>
+                        </a:rPr>
+                        <a:t>Foro</a:t>
+                      </a:r>
+                    </a:p>
+                  </a:txBody>
+                  <a:tcPr anchor="ctr" marL="109728" marR="91440" marT="36576" marB="36576">
+                    <a:solidFill>
+                      <a:srgbClr val="FFFFFF"/>
+                    </a:solidFill>
+                  </a:tcPr>
+                </a:tc>
+                <a:tc>
+                  <a:txBody>
+                    <a:bodyPr/>
+                    <a:lstStyle/>
+                    <a:p>
+                      <a:pPr algn="l"/>
+                      <a:r>
+                        <a:rPr sz="1100" b="0" i="0">
+                          <a:solidFill>
+                            <a:srgbClr val="2B2B2B"/>
+                          </a:solidFill>
+                          <a:latin typeface="Calibri"/>
+                        </a:rPr>
+                        <a:t>3 (50%)</a:t>
+                      </a:r>
+                    </a:p>
+                  </a:txBody>
+                  <a:tcPr anchor="ctr" marL="109728" marR="91440" marT="36576" marB="36576">
+                    <a:solidFill>
+                      <a:srgbClr val="FFFFFF"/>
+                    </a:solidFill>
+                  </a:tcPr>
+                </a:tc>
+                <a:tc>
+                  <a:txBody>
+                    <a:bodyPr/>
+                    <a:lstStyle/>
+                    <a:p>
+                      <a:pPr algn="l"/>
+                      <a:r>
+                        <a:rPr sz="1100" b="1" i="0">
+                          <a:solidFill>
+                            <a:srgbClr val="2B2B2B"/>
+                          </a:solidFill>
+                          <a:latin typeface="Calibri"/>
+                        </a:rPr>
+                        <a:t>4%</a:t>
+                      </a:r>
+                    </a:p>
+                  </a:txBody>
+                  <a:tcPr anchor="ctr" marL="109728" marR="91440" marT="36576" marB="36576">
+                    <a:solidFill>
+                      <a:srgbClr val="FFFFFF"/>
+                    </a:solidFill>
+                  </a:tcPr>
+                </a:tc>
+                <a:tc>
+                  <a:txBody>
+                    <a:bodyPr/>
+                    <a:lstStyle/>
+                    <a:p>
+                      <a:pPr algn="l"/>
+                      <a:r>
+                        <a:rPr sz="1100" b="0" i="0">
+                          <a:solidFill>
+                            <a:srgbClr val="2B2B2B"/>
+                          </a:solidFill>
+                          <a:latin typeface="Calibri"/>
+                        </a:rPr>
+                        <a:t>Participas en el foro valorando el trabajo de tus pares.</a:t>
+                      </a:r>
+                    </a:p>
+                  </a:txBody>
+                  <a:tcPr anchor="ctr" marL="109728" marR="91440" marT="36576" marB="36576">
+                    <a:solidFill>
+                      <a:srgbClr val="FFFFFF"/>
+                    </a:solidFill>
+                  </a:tcPr>
+                </a:tc>
               </a:tr>
             </a:tbl>
           </a:graphicData>
@@ -10687,7 +11315,7 @@
         </p:nvSpPr>
         <p:spPr>
           <a:xfrm>
-            <a:off x="640080" y="4160520"/>
+            <a:off x="640080" y="5166360"/>
             <a:ext cx="10911535" cy="548640"/>
           </a:xfrm>
           <a:prstGeom prst="rect">
@@ -10708,7 +11336,7 @@
                 </a:solidFill>
                 <a:latin typeface="Calibri"/>
               </a:rPr>
-              <a:t>Las ACAs son </a:t>
+              <a:t>Se </a:t>
             </a:r>
             <a:r>
               <a:rPr sz="1200" b="1" i="1">
@@ -10717,7 +11345,7 @@
                 </a:solidFill>
                 <a:latin typeface="Calibri"/>
               </a:rPr>
-              <a:t>3</a:t>
+              <a:t>sube</a:t>
             </a:r>
             <a:r>
               <a:rPr sz="1200" b="0" i="1">
@@ -10726,7 +11354,7 @@
                 </a:solidFill>
                 <a:latin typeface="Calibri"/>
               </a:rPr>
-              <a:t>. La </a:t>
+              <a:t> documento únicamente en </a:t>
             </a:r>
             <a:r>
               <a:rPr sz="1200" b="1" i="1">
@@ -10735,7 +11363,7 @@
                 </a:solidFill>
                 <a:latin typeface="Calibri"/>
               </a:rPr>
-              <a:t>coevaluación (4%)</a:t>
+              <a:t>ACA 1 y ACA FINAL</a:t>
             </a:r>
             <a:r>
               <a:rPr sz="1200" b="0" i="1">
@@ -10744,7 +11372,7 @@
                 </a:solidFill>
                 <a:latin typeface="Calibri"/>
               </a:rPr>
-              <a:t> y la </a:t>
+              <a:t>; los cuestionarios se </a:t>
             </a:r>
             <a:r>
               <a:rPr sz="1200" b="1" i="1">
@@ -10753,7 +11381,7 @@
                 </a:solidFill>
                 <a:latin typeface="Calibri"/>
               </a:rPr>
-              <a:t>autoevaluación (4%)</a:t>
+              <a:t>resuelven</a:t>
             </a:r>
             <a:r>
               <a:rPr sz="1200" b="0" i="1">
@@ -10762,7 +11390,7 @@
                 </a:solidFill>
                 <a:latin typeface="Calibri"/>
               </a:rPr>
-              <a:t> </a:t>
+              <a:t> en el aula y la </a:t>
             </a:r>
             <a:r>
               <a:rPr sz="1200" b="1" i="1">
@@ -10771,7 +11399,7 @@
                 </a:solidFill>
                 <a:latin typeface="Calibri"/>
               </a:rPr>
-              <a:t>no son ACAs</a:t>
+              <a:t>coevaluación es un foro</a:t>
             </a:r>
             <a:r>
               <a:rPr sz="1200" b="0" i="1">
@@ -10780,7 +11408,7 @@
                 </a:solidFill>
                 <a:latin typeface="Calibri"/>
               </a:rPr>
-              <a:t>: son instrumentos individuales que cada quien diligencia en CDigital al cierre. Enunciados e instructivos: `Clases/Recursos/ACAs/`.</a:t>
+              <a:t>. Enunciados y ventanas: `Clases/Recursos/ACAs/`.</a:t>
             </a:r>
           </a:p>
         </p:txBody>
@@ -11411,9 +12039,9 @@
                 <a:tableStyleId>{2D5ABB26-0587-4C30-8999-92F81FD0307C}</a:tableStyleId>
               </a:tblPr>
               <a:tblGrid>
-                <a:gridCol w="1091153"/>
-                <a:gridCol w="7241291"/>
-                <a:gridCol w="2579090"/>
+                <a:gridCol w="991957"/>
+                <a:gridCol w="6844508"/>
+                <a:gridCol w="3075069"/>
               </a:tblGrid>
               <a:tr h="502920">
                 <a:tc>
@@ -11523,7 +12151,7 @@
                           </a:solidFill>
                           <a:latin typeface="Calibri"/>
                         </a:rPr>
-                        <a:t>Presentación del curso, del Docente, de ustedes y de las ACAs (hoy)</a:t>
+                        <a:t>Presentación del curso, del Docente, de ustedes y de cómo se evalúa (hoy)</a:t>
                       </a:r>
                     </a:p>
                   </a:txBody>
@@ -11617,7 +12245,16 @@
                           </a:solidFill>
                           <a:latin typeface="Calibri"/>
                         </a:rPr>
-                        <a:t>ACA 1</a:t>
+                        <a:t>Corte 1 · </a:t>
+                      </a:r>
+                      <a:r>
+                        <a:rPr sz="1100" b="1" i="0">
+                          <a:solidFill>
+                            <a:srgbClr val="2B2B2B"/>
+                          </a:solidFill>
+                          <a:latin typeface="Calibri"/>
+                        </a:rPr>
+                        <a:t>Quiz</a:t>
                       </a:r>
                     </a:p>
                   </a:txBody>
@@ -11688,7 +12325,16 @@
                           </a:solidFill>
                           <a:latin typeface="Calibri"/>
                         </a:rPr>
-                        <a:t>ACA 1</a:t>
+                        <a:t>Corte 1 · </a:t>
+                      </a:r>
+                      <a:r>
+                        <a:rPr sz="1100" b="1" i="0">
+                          <a:solidFill>
+                            <a:srgbClr val="2B2B2B"/>
+                          </a:solidFill>
+                          <a:latin typeface="Calibri"/>
+                        </a:rPr>
+                        <a:t>Quiz</a:t>
                       </a:r>
                     </a:p>
                   </a:txBody>
@@ -11736,7 +12382,7 @@
                           </a:solidFill>
                           <a:latin typeface="Calibri"/>
                         </a:rPr>
-                        <a:t>Retroalimentación de la ACA 1 · antecedentes de investigación</a:t>
+                        <a:t>Retroalimentación del corte 1 · antecedentes de investigación</a:t>
                       </a:r>
                     </a:p>
                   </a:txBody>
@@ -11759,7 +12405,16 @@
                           </a:solidFill>
                           <a:latin typeface="Calibri"/>
                         </a:rPr>
-                        <a:t>ACA 2</a:t>
+                        <a:t>Corte 2 · </a:t>
+                      </a:r>
+                      <a:r>
+                        <a:rPr sz="1100" b="1" i="0">
+                          <a:solidFill>
+                            <a:srgbClr val="2B2B2B"/>
+                          </a:solidFill>
+                          <a:latin typeface="Calibri"/>
+                        </a:rPr>
+                        <a:t>ACA 1</a:t>
                       </a:r>
                     </a:p>
                   </a:txBody>
@@ -11830,7 +12485,16 @@
                           </a:solidFill>
                           <a:latin typeface="Calibri"/>
                         </a:rPr>
-                        <a:t>ACA 2</a:t>
+                        <a:t>Corte 2 · </a:t>
+                      </a:r>
+                      <a:r>
+                        <a:rPr sz="1100" b="1" i="0">
+                          <a:solidFill>
+                            <a:srgbClr val="2B2B2B"/>
+                          </a:solidFill>
+                          <a:latin typeface="Calibri"/>
+                        </a:rPr>
+                        <a:t>ACA 1</a:t>
                       </a:r>
                     </a:p>
                   </a:txBody>
@@ -11901,7 +12565,16 @@
                           </a:solidFill>
                           <a:latin typeface="Calibri"/>
                         </a:rPr>
-                        <a:t>ACA 2</a:t>
+                        <a:t>Corte 2 · </a:t>
+                      </a:r>
+                      <a:r>
+                        <a:rPr sz="1100" b="1" i="0">
+                          <a:solidFill>
+                            <a:srgbClr val="2B2B2B"/>
+                          </a:solidFill>
+                          <a:latin typeface="Calibri"/>
+                        </a:rPr>
+                        <a:t>ACA 1</a:t>
                       </a:r>
                     </a:p>
                   </a:txBody>
@@ -11972,7 +12645,16 @@
                           </a:solidFill>
                           <a:latin typeface="Calibri"/>
                         </a:rPr>
-                        <a:t>ACA 2</a:t>
+                        <a:t>Corte 2 · </a:t>
+                      </a:r>
+                      <a:r>
+                        <a:rPr sz="1100" b="1" i="0">
+                          <a:solidFill>
+                            <a:srgbClr val="2B2B2B"/>
+                          </a:solidFill>
+                          <a:latin typeface="Calibri"/>
+                        </a:rPr>
+                        <a:t>ACA 1</a:t>
                       </a:r>
                     </a:p>
                   </a:txBody>
@@ -12217,9 +12899,9 @@
                 <a:tableStyleId>{2D5ABB26-0587-4C30-8999-92F81FD0307C}</a:tableStyleId>
               </a:tblPr>
               <a:tblGrid>
-                <a:gridCol w="1091153"/>
-                <a:gridCol w="7241291"/>
-                <a:gridCol w="2579090"/>
+                <a:gridCol w="991957"/>
+                <a:gridCol w="6844508"/>
+                <a:gridCol w="3075069"/>
               </a:tblGrid>
               <a:tr h="502920">
                 <a:tc>
@@ -12361,7 +13043,16 @@
                           </a:solidFill>
                           <a:latin typeface="Calibri"/>
                         </a:rPr>
-                        <a:t>ACA 3</a:t>
+                        <a:t>Corte 3 · </a:t>
+                      </a:r>
+                      <a:r>
+                        <a:rPr sz="1100" b="1" i="0">
+                          <a:solidFill>
+                            <a:srgbClr val="2B2B2B"/>
+                          </a:solidFill>
+                          <a:latin typeface="Calibri"/>
+                        </a:rPr>
+                        <a:t>ACA FINAL</a:t>
                       </a:r>
                     </a:p>
                   </a:txBody>
@@ -12432,7 +13123,16 @@
                           </a:solidFill>
                           <a:latin typeface="Calibri"/>
                         </a:rPr>
-                        <a:t>ACA 3</a:t>
+                        <a:t>Corte 3 · </a:t>
+                      </a:r>
+                      <a:r>
+                        <a:rPr sz="1100" b="1" i="0">
+                          <a:solidFill>
+                            <a:srgbClr val="2B2B2B"/>
+                          </a:solidFill>
+                          <a:latin typeface="Calibri"/>
+                        </a:rPr>
+                        <a:t>ACA FINAL</a:t>
                       </a:r>
                     </a:p>
                   </a:txBody>
@@ -12480,7 +13180,7 @@
                           </a:solidFill>
                           <a:latin typeface="Calibri"/>
                         </a:rPr>
-                        <a:t>Integración y evaluación · coevaluación y autoevaluación (instrumentos individuales, no son ACAs)</a:t>
+                        <a:t>Integración y evaluación · coevaluación (foro) y autoevaluación (cuestionario): instrumentos individuales</a:t>
                       </a:r>
                     </a:p>
                   </a:txBody>
@@ -12796,7 +13496,7 @@
                 </a:solidFill>
                 <a:latin typeface="Calibri"/>
               </a:rPr>
-              <a:t>●   No son tres trabajos sueltos: es </a:t>
+              <a:t>●   No son trabajos sueltos: es </a:t>
             </a:r>
             <a:r>
               <a:rPr sz="1500" b="1" i="0">
@@ -12814,7 +13514,7 @@
                 </a:solidFill>
                 <a:latin typeface="Calibri"/>
               </a:rPr>
-              <a:t> entrega tras entrega.</a:t>
+              <a:t> corte tras corte.</a:t>
             </a:r>
           </a:p>
           <a:p>
@@ -12830,7 +13530,25 @@
                 </a:solidFill>
                 <a:latin typeface="Calibri"/>
               </a:rPr>
-              <a:t>●   La ACA 3 es ese archivo completo e integrado, no un fragmento nuevo escrito la última semana.</a:t>
+              <a:t>●   La </a:t>
+            </a:r>
+            <a:r>
+              <a:rPr sz="1500" b="1" i="0">
+                <a:solidFill>
+                  <a:srgbClr val="2B2B2B"/>
+                </a:solidFill>
+                <a:latin typeface="Calibri"/>
+              </a:rPr>
+              <a:t>ACA FINAL</a:t>
+            </a:r>
+            <a:r>
+              <a:rPr sz="1500" b="0" i="0">
+                <a:solidFill>
+                  <a:srgbClr val="2B2B2B"/>
+                </a:solidFill>
+                <a:latin typeface="Calibri"/>
+              </a:rPr>
+              <a:t> del aula es ese archivo completo e integrado, no un fragmento nuevo escrito la última semana.</a:t>
             </a:r>
           </a:p>
           <a:p>

--- a/Especializacion/Proyecto I/Clases/Sesion 01 - Presentación del curso · docente · estudiantes · ACAs/Presentacion.pptx
+++ b/Especializacion/Proyecto I/Clases/Sesion 01 - Presentación del curso · docente · estudiantes · ACAs/Presentacion.pptx
@@ -26,6 +26,7 @@
     <p:sldId id="274" r:id="rId25"/>
     <p:sldId id="275" r:id="rId26"/>
     <p:sldId id="276" r:id="rId27"/>
+    <p:sldId id="277" r:id="rId28"/>
   </p:sldIdLst>
   <p:sldSz cx="12191695" cy="6858000" type="screen4x3"/>
   <p:notesSz cx="6858000" cy="9144000"/>
@@ -3386,6 +3387,457 @@
 </file>
 
 <file path=ppt/slides/slide10.xml><?xml version="1.0" encoding="utf-8"?>
+<p:sld xmlns:a="http://schemas.openxmlformats.org/drawingml/2006/main" xmlns:p="http://schemas.openxmlformats.org/presentationml/2006/main" xmlns:r="http://schemas.openxmlformats.org/officeDocument/2006/relationships">
+  <p:cSld>
+    <p:bg>
+      <p:bgPr>
+        <a:solidFill>
+          <a:srgbClr val="FFFFFF"/>
+        </a:solidFill>
+        <a:effectLst/>
+      </p:bgPr>
+    </p:bg>
+    <p:spTree>
+      <p:nvGrpSpPr>
+        <p:cNvPr id="1" name=""/>
+        <p:cNvGrpSpPr/>
+        <p:nvPr/>
+      </p:nvGrpSpPr>
+      <p:grpSpPr/>
+      <p:sp>
+        <p:nvSpPr>
+          <p:cNvPr id="2" name="Rectangle 1"/>
+          <p:cNvSpPr/>
+          <p:nvPr/>
+        </p:nvSpPr>
+        <p:spPr>
+          <a:xfrm>
+            <a:off x="0" y="0"/>
+            <a:ext cx="12191695" cy="1188720"/>
+          </a:xfrm>
+          <a:prstGeom prst="rect">
+            <a:avLst/>
+          </a:prstGeom>
+          <a:solidFill>
+            <a:srgbClr val="0C2340"/>
+          </a:solidFill>
+          <a:ln>
+            <a:noFill/>
+          </a:ln>
+          <a:effectLst/>
+        </p:spPr>
+        <p:style>
+          <a:lnRef idx="1">
+            <a:schemeClr val="accent1"/>
+          </a:lnRef>
+          <a:fillRef idx="3">
+            <a:schemeClr val="accent1"/>
+          </a:fillRef>
+          <a:effectRef idx="2">
+            <a:schemeClr val="accent1"/>
+          </a:effectRef>
+          <a:fontRef idx="minor">
+            <a:schemeClr val="lt1"/>
+          </a:fontRef>
+        </p:style>
+        <p:txBody>
+          <a:bodyPr rtlCol="0" anchor="ctr"/>
+          <a:lstStyle/>
+          <a:p>
+            <a:pPr algn="ctr"/>
+          </a:p>
+        </p:txBody>
+      </p:sp>
+      <p:sp>
+        <p:nvSpPr>
+          <p:cNvPr id="3" name="TextBox 2"/>
+          <p:cNvSpPr txBox="1"/>
+          <p:nvPr/>
+        </p:nvSpPr>
+        <p:spPr>
+          <a:xfrm>
+            <a:off x="640080" y="0"/>
+            <a:ext cx="9082735" cy="1188720"/>
+          </a:xfrm>
+          <a:prstGeom prst="rect">
+            <a:avLst/>
+          </a:prstGeom>
+          <a:noFill/>
+        </p:spPr>
+        <p:txBody>
+          <a:bodyPr wrap="square" anchor="ctr" lIns="0" rIns="0" tIns="0" bIns="0">
+            <a:spAutoFit/>
+          </a:bodyPr>
+          <a:lstStyle/>
+          <a:p>
+            <a:pPr algn="ctr"/>
+            <a:r>
+              <a:rPr sz="2600" b="1" i="0">
+                <a:solidFill>
+                  <a:srgbClr val="FFFFFF"/>
+                </a:solidFill>
+                <a:latin typeface="Calibri"/>
+              </a:rPr>
+              <a:t>El producto del curso: qué archivo entregan al final</a:t>
+            </a:r>
+          </a:p>
+        </p:txBody>
+      </p:sp>
+      <p:sp>
+        <p:nvSpPr>
+          <p:cNvPr id="4" name="TextBox 3"/>
+          <p:cNvSpPr txBox="1"/>
+          <p:nvPr/>
+        </p:nvSpPr>
+        <p:spPr>
+          <a:xfrm>
+            <a:off x="640080" y="1691639"/>
+            <a:ext cx="10911535" cy="4617720"/>
+          </a:xfrm>
+          <a:prstGeom prst="rect">
+            <a:avLst/>
+          </a:prstGeom>
+          <a:noFill/>
+        </p:spPr>
+        <p:txBody>
+          <a:bodyPr wrap="square" anchor="t" lIns="0" rIns="0" tIns="0" bIns="0">
+            <a:spAutoFit/>
+          </a:bodyPr>
+          <a:lstStyle/>
+          <a:p>
+            <a:pPr>
+              <a:spcAft>
+                <a:spcPts val="1000"/>
+              </a:spcAft>
+            </a:pPr>
+            <a:r>
+              <a:rPr sz="1600" b="0" i="0">
+                <a:solidFill>
+                  <a:srgbClr val="2B2B2B"/>
+                </a:solidFill>
+                <a:latin typeface="Calibri"/>
+              </a:rPr>
+              <a:t>–   Al terminar el curso ustedes suben </a:t>
+            </a:r>
+            <a:r>
+              <a:rPr sz="1600" b="1" i="0">
+                <a:solidFill>
+                  <a:srgbClr val="2B2B2B"/>
+                </a:solidFill>
+                <a:latin typeface="Calibri"/>
+              </a:rPr>
+              <a:t>un solo documento: el anteproyecto</a:t>
+            </a:r>
+            <a:r>
+              <a:rPr sz="1600" b="0" i="0">
+                <a:solidFill>
+                  <a:srgbClr val="2B2B2B"/>
+                </a:solidFill>
+                <a:latin typeface="Calibri"/>
+              </a:rPr>
+              <a:t> de su investigación.</a:t>
+            </a:r>
+          </a:p>
+          <a:p>
+            <a:pPr lvl="1">
+              <a:spcAft>
+                <a:spcPts val="600"/>
+              </a:spcAft>
+            </a:pPr>
+            <a:r>
+              <a:rPr sz="1500" b="0" i="0">
+                <a:solidFill>
+                  <a:srgbClr val="2B2B2B"/>
+                </a:solidFill>
+                <a:latin typeface="Calibri"/>
+              </a:rPr>
+              <a:t>●   No son trabajos sueltos: es </a:t>
+            </a:r>
+            <a:r>
+              <a:rPr sz="1500" b="1" i="0">
+                <a:solidFill>
+                  <a:srgbClr val="2B2B2B"/>
+                </a:solidFill>
+                <a:latin typeface="Calibri"/>
+              </a:rPr>
+              <a:t>un mismo archivo que crece</a:t>
+            </a:r>
+            <a:r>
+              <a:rPr sz="1500" b="0" i="0">
+                <a:solidFill>
+                  <a:srgbClr val="2B2B2B"/>
+                </a:solidFill>
+                <a:latin typeface="Calibri"/>
+              </a:rPr>
+              <a:t> corte tras corte.</a:t>
+            </a:r>
+          </a:p>
+          <a:p>
+            <a:pPr lvl="1">
+              <a:spcAft>
+                <a:spcPts val="600"/>
+              </a:spcAft>
+            </a:pPr>
+            <a:r>
+              <a:rPr sz="1500" b="0" i="0">
+                <a:solidFill>
+                  <a:srgbClr val="2B2B2B"/>
+                </a:solidFill>
+                <a:latin typeface="Calibri"/>
+              </a:rPr>
+              <a:t>●   La </a:t>
+            </a:r>
+            <a:r>
+              <a:rPr sz="1500" b="1" i="0">
+                <a:solidFill>
+                  <a:srgbClr val="2B2B2B"/>
+                </a:solidFill>
+                <a:latin typeface="Calibri"/>
+              </a:rPr>
+              <a:t>ACA FINAL</a:t>
+            </a:r>
+            <a:r>
+              <a:rPr sz="1500" b="0" i="0">
+                <a:solidFill>
+                  <a:srgbClr val="2B2B2B"/>
+                </a:solidFill>
+                <a:latin typeface="Calibri"/>
+              </a:rPr>
+              <a:t> del aula es ese archivo completo e integrado, no un fragmento nuevo escrito la última semana.</a:t>
+            </a:r>
+          </a:p>
+          <a:p>
+            <a:pPr>
+              <a:spcAft>
+                <a:spcPts val="1000"/>
+              </a:spcAft>
+            </a:pPr>
+            <a:r>
+              <a:rPr sz="1600" b="0" i="0">
+                <a:solidFill>
+                  <a:srgbClr val="2B2B2B"/>
+                </a:solidFill>
+                <a:latin typeface="Calibri"/>
+              </a:rPr>
+              <a:t>–   Va en la </a:t>
+            </a:r>
+            <a:r>
+              <a:rPr sz="1600" b="1" i="0">
+                <a:solidFill>
+                  <a:srgbClr val="2B2B2B"/>
+                </a:solidFill>
+                <a:latin typeface="Calibri"/>
+              </a:rPr>
+              <a:t>plantilla APA CUN de proyecto de grado</a:t>
+            </a:r>
+            <a:r>
+              <a:rPr sz="1600" b="0" i="0">
+                <a:solidFill>
+                  <a:srgbClr val="2B2B2B"/>
+                </a:solidFill>
+                <a:latin typeface="Calibri"/>
+              </a:rPr>
+              <a:t>, la misma desde el primer día.</a:t>
+            </a:r>
+          </a:p>
+          <a:p>
+            <a:pPr lvl="1">
+              <a:spcAft>
+                <a:spcPts val="600"/>
+              </a:spcAft>
+            </a:pPr>
+            <a:r>
+              <a:rPr sz="1500" b="0" i="0">
+                <a:solidFill>
+                  <a:srgbClr val="2B2B2B"/>
+                </a:solidFill>
+                <a:latin typeface="Calibri"/>
+              </a:rPr>
+              <a:t>●   Está en `Clases/Recursos/Plantilla_APA_CUN_Proyecto de grado.docx`; ábranla en Google Docs y trabajen ahí.</a:t>
+            </a:r>
+          </a:p>
+          <a:p>
+            <a:pPr>
+              <a:spcAft>
+                <a:spcPts val="1000"/>
+              </a:spcAft>
+            </a:pPr>
+            <a:r>
+              <a:rPr sz="1600" b="0" i="0">
+                <a:solidFill>
+                  <a:srgbClr val="2B2B2B"/>
+                </a:solidFill>
+                <a:latin typeface="Calibri"/>
+              </a:rPr>
+              <a:t>–   </a:t>
+            </a:r>
+            <a:r>
+              <a:rPr sz="1600" b="1" i="0">
+                <a:solidFill>
+                  <a:srgbClr val="2B2B2B"/>
+                </a:solidFill>
+                <a:latin typeface="Calibri"/>
+              </a:rPr>
+              <a:t>¿Para qué les sirve después?</a:t>
+            </a:r>
+            <a:r>
+              <a:rPr sz="1600" b="0" i="0">
+                <a:solidFill>
+                  <a:srgbClr val="2B2B2B"/>
+                </a:solidFill>
+                <a:latin typeface="Calibri"/>
+              </a:rPr>
+              <a:t> Es el punto de partida de </a:t>
+            </a:r>
+            <a:r>
+              <a:rPr sz="1600" b="1" i="0">
+                <a:solidFill>
+                  <a:srgbClr val="2B2B2B"/>
+                </a:solidFill>
+                <a:latin typeface="Calibri"/>
+              </a:rPr>
+              <a:t>Proyecto II</a:t>
+            </a:r>
+            <a:r>
+              <a:rPr sz="1600" b="0" i="0">
+                <a:solidFill>
+                  <a:srgbClr val="2B2B2B"/>
+                </a:solidFill>
+                <a:latin typeface="Calibri"/>
+              </a:rPr>
+              <a:t>, donde el proyecto se ejecuta.</a:t>
+            </a:r>
+          </a:p>
+          <a:p>
+            <a:pPr lvl="1">
+              <a:spcAft>
+                <a:spcPts val="600"/>
+              </a:spcAft>
+            </a:pPr>
+            <a:r>
+              <a:rPr sz="1500" b="0" i="0">
+                <a:solidFill>
+                  <a:srgbClr val="2B2B2B"/>
+                </a:solidFill>
+                <a:latin typeface="Calibri"/>
+              </a:rPr>
+              <a:t>●   Y es la base de lo que sustentarán al cerrar el programa: no es un trabajo que se archiva y se olvida.</a:t>
+            </a:r>
+          </a:p>
+          <a:p>
+            <a:pPr>
+              <a:spcAft>
+                <a:spcPts val="1000"/>
+              </a:spcAft>
+            </a:pPr>
+            <a:r>
+              <a:rPr sz="1600" b="0" i="0">
+                <a:solidFill>
+                  <a:srgbClr val="2B2B2B"/>
+                </a:solidFill>
+                <a:latin typeface="Calibri"/>
+              </a:rPr>
+              <a:t>–   Frontera del curso, sin excepciones: en </a:t>
+            </a:r>
+            <a:r>
+              <a:rPr sz="1600" b="1" i="0">
+                <a:solidFill>
+                  <a:srgbClr val="2B2B2B"/>
+                </a:solidFill>
+                <a:latin typeface="Calibri"/>
+              </a:rPr>
+              <a:t>Proyecto I los instrumentos se proponen; nunca se aplican</a:t>
+            </a:r>
+            <a:r>
+              <a:rPr sz="1600" b="0" i="0">
+                <a:solidFill>
+                  <a:srgbClr val="2B2B2B"/>
+                </a:solidFill>
+                <a:latin typeface="Calibri"/>
+              </a:rPr>
+              <a:t>.</a:t>
+            </a:r>
+          </a:p>
+        </p:txBody>
+      </p:sp>
+      <p:sp>
+        <p:nvSpPr>
+          <p:cNvPr id="5" name="TextBox 4"/>
+          <p:cNvSpPr txBox="1"/>
+          <p:nvPr/>
+        </p:nvSpPr>
+        <p:spPr>
+          <a:xfrm>
+            <a:off x="11094415" y="6446520"/>
+            <a:ext cx="548640" cy="274320"/>
+          </a:xfrm>
+          <a:prstGeom prst="rect">
+            <a:avLst/>
+          </a:prstGeom>
+          <a:noFill/>
+        </p:spPr>
+        <p:txBody>
+          <a:bodyPr wrap="square" anchor="t" lIns="0" rIns="0" tIns="0" bIns="0">
+            <a:spAutoFit/>
+          </a:bodyPr>
+          <a:lstStyle/>
+          <a:p>
+            <a:pPr algn="r"/>
+            <a:r>
+              <a:rPr sz="1000" b="1" i="0">
+                <a:solidFill>
+                  <a:srgbClr val="8F989D"/>
+                </a:solidFill>
+                <a:latin typeface="Calibri"/>
+              </a:rPr>
+              <a:t>10</a:t>
+            </a:r>
+          </a:p>
+        </p:txBody>
+      </p:sp>
+      <p:sp>
+        <p:nvSpPr>
+          <p:cNvPr id="6" name="TextBox 5"/>
+          <p:cNvSpPr txBox="1"/>
+          <p:nvPr/>
+        </p:nvSpPr>
+        <p:spPr>
+          <a:xfrm>
+            <a:off x="640080" y="5943600"/>
+            <a:ext cx="9997135" cy="457200"/>
+          </a:xfrm>
+          <a:prstGeom prst="rect">
+            <a:avLst/>
+          </a:prstGeom>
+          <a:noFill/>
+        </p:spPr>
+        <p:txBody>
+          <a:bodyPr wrap="square" anchor="t" lIns="0" rIns="0" tIns="0" bIns="0">
+            <a:spAutoFit/>
+          </a:bodyPr>
+          <a:lstStyle/>
+          <a:p>
+            <a:r>
+              <a:rPr sz="1200" b="0" i="1">
+                <a:solidFill>
+                  <a:srgbClr val="2B2B2B"/>
+                </a:solidFill>
+                <a:latin typeface="Calibri"/>
+              </a:rPr>
+              <a:t>Piénsenlo así: todo el semestre queda en un archivo. Cuídenlo, guarden versiones y compártanlo con todo el equipo desde hoy.</a:t>
+            </a:r>
+          </a:p>
+        </p:txBody>
+      </p:sp>
+    </p:spTree>
+  </p:cSld>
+  <p:clrMapOvr>
+    <a:masterClrMapping/>
+  </p:clrMapOvr>
+</p:sld>
+</file>
+
+<file path=ppt/slides/slide11.xml><?xml version="1.0" encoding="utf-8"?>
 <p:sld xmlns:a="http://schemas.openxmlformats.org/drawingml/2006/main" xmlns:p="http://schemas.openxmlformats.org/presentationml/2006/main" xmlns:r="http://schemas.openxmlformats.org/officeDocument/2006/relationships">
   <p:cSld>
     <p:bg>
@@ -4148,636 +4600,7 @@
                 </a:solidFill>
                 <a:latin typeface="Calibri"/>
               </a:rPr>
-              <a:t>10</a:t>
-            </a:r>
-          </a:p>
-        </p:txBody>
-      </p:sp>
-    </p:spTree>
-  </p:cSld>
-  <p:clrMapOvr>
-    <a:masterClrMapping/>
-  </p:clrMapOvr>
-</p:sld>
-</file>
-
-<file path=ppt/slides/slide11.xml><?xml version="1.0" encoding="utf-8"?>
-<p:sld xmlns:a="http://schemas.openxmlformats.org/drawingml/2006/main" xmlns:p="http://schemas.openxmlformats.org/presentationml/2006/main" xmlns:r="http://schemas.openxmlformats.org/officeDocument/2006/relationships">
-  <p:cSld>
-    <p:bg>
-      <p:bgPr>
-        <a:solidFill>
-          <a:srgbClr val="FFFFFF"/>
-        </a:solidFill>
-        <a:effectLst/>
-      </p:bgPr>
-    </p:bg>
-    <p:spTree>
-      <p:nvGrpSpPr>
-        <p:cNvPr id="1" name=""/>
-        <p:cNvGrpSpPr/>
-        <p:nvPr/>
-      </p:nvGrpSpPr>
-      <p:grpSpPr/>
-      <p:sp>
-        <p:nvSpPr>
-          <p:cNvPr id="2" name="Rectangle 1"/>
-          <p:cNvSpPr/>
-          <p:nvPr/>
-        </p:nvSpPr>
-        <p:spPr>
-          <a:xfrm>
-            <a:off x="0" y="0"/>
-            <a:ext cx="12191695" cy="1188720"/>
-          </a:xfrm>
-          <a:prstGeom prst="rect">
-            <a:avLst/>
-          </a:prstGeom>
-          <a:solidFill>
-            <a:srgbClr val="0C2340"/>
-          </a:solidFill>
-          <a:ln>
-            <a:noFill/>
-          </a:ln>
-          <a:effectLst/>
-        </p:spPr>
-        <p:style>
-          <a:lnRef idx="1">
-            <a:schemeClr val="accent1"/>
-          </a:lnRef>
-          <a:fillRef idx="3">
-            <a:schemeClr val="accent1"/>
-          </a:fillRef>
-          <a:effectRef idx="2">
-            <a:schemeClr val="accent1"/>
-          </a:effectRef>
-          <a:fontRef idx="minor">
-            <a:schemeClr val="lt1"/>
-          </a:fontRef>
-        </p:style>
-        <p:txBody>
-          <a:bodyPr rtlCol="0" anchor="ctr"/>
-          <a:lstStyle/>
-          <a:p>
-            <a:pPr algn="ctr"/>
-          </a:p>
-        </p:txBody>
-      </p:sp>
-      <p:sp>
-        <p:nvSpPr>
-          <p:cNvPr id="3" name="TextBox 2"/>
-          <p:cNvSpPr txBox="1"/>
-          <p:nvPr/>
-        </p:nvSpPr>
-        <p:spPr>
-          <a:xfrm>
-            <a:off x="640080" y="0"/>
-            <a:ext cx="9082735" cy="1188720"/>
-          </a:xfrm>
-          <a:prstGeom prst="rect">
-            <a:avLst/>
-          </a:prstGeom>
-          <a:noFill/>
-        </p:spPr>
-        <p:txBody>
-          <a:bodyPr wrap="square" anchor="ctr" lIns="0" rIns="0" tIns="0" bIns="0">
-            <a:spAutoFit/>
-          </a:bodyPr>
-          <a:lstStyle/>
-          <a:p>
-            <a:pPr algn="ctr"/>
-            <a:r>
-              <a:rPr sz="2600" b="1" i="0">
-                <a:solidFill>
-                  <a:srgbClr val="FFFFFF"/>
-                </a:solidFill>
-                <a:latin typeface="Calibri"/>
-              </a:rPr>
-              <a:t>Cómo se entrega: paso a paso en CDigital</a:t>
-            </a:r>
-          </a:p>
-        </p:txBody>
-      </p:sp>
-      <p:sp>
-        <p:nvSpPr>
-          <p:cNvPr id="4" name="TextBox 3"/>
-          <p:cNvSpPr txBox="1"/>
-          <p:nvPr/>
-        </p:nvSpPr>
-        <p:spPr>
-          <a:xfrm>
-            <a:off x="640080" y="1691639"/>
-            <a:ext cx="10911535" cy="4617720"/>
-          </a:xfrm>
-          <a:prstGeom prst="rect">
-            <a:avLst/>
-          </a:prstGeom>
-          <a:noFill/>
-        </p:spPr>
-        <p:txBody>
-          <a:bodyPr wrap="square" anchor="t" lIns="0" rIns="0" tIns="0" bIns="0">
-            <a:spAutoFit/>
-          </a:bodyPr>
-          <a:lstStyle/>
-          <a:p>
-            <a:pPr>
-              <a:spcAft>
-                <a:spcPts val="1000"/>
-              </a:spcAft>
-            </a:pPr>
-            <a:r>
-              <a:rPr sz="1500" b="0" i="0">
-                <a:solidFill>
-                  <a:srgbClr val="2B2B2B"/>
-                </a:solidFill>
-                <a:latin typeface="Calibri"/>
-              </a:rPr>
-              <a:t>–   </a:t>
-            </a:r>
-            <a:r>
-              <a:rPr sz="1500" b="1" i="0">
-                <a:solidFill>
-                  <a:srgbClr val="2B2B2B"/>
-                </a:solidFill>
-                <a:latin typeface="Calibri"/>
-              </a:rPr>
-              <a:t>1.</a:t>
-            </a:r>
-            <a:r>
-              <a:rPr sz="1500" b="0" i="0">
-                <a:solidFill>
-                  <a:srgbClr val="2B2B2B"/>
-                </a:solidFill>
-                <a:latin typeface="Calibri"/>
-              </a:rPr>
-              <a:t> Trabajen la </a:t>
-            </a:r>
-            <a:r>
-              <a:rPr sz="1500" b="1" i="0">
-                <a:solidFill>
-                  <a:srgbClr val="2B2B2B"/>
-                </a:solidFill>
-                <a:latin typeface="Calibri"/>
-              </a:rPr>
-              <a:t>plantilla APA CUN en Google Docs</a:t>
-            </a:r>
-            <a:r>
-              <a:rPr sz="1500" b="0" i="0">
-                <a:solidFill>
-                  <a:srgbClr val="2B2B2B"/>
-                </a:solidFill>
-                <a:latin typeface="Calibri"/>
-              </a:rPr>
-              <a:t>: un documento por equipo, con permiso de edición para todos.</a:t>
-            </a:r>
-          </a:p>
-          <a:p>
-            <a:pPr>
-              <a:spcAft>
-                <a:spcPts val="1000"/>
-              </a:spcAft>
-            </a:pPr>
-            <a:r>
-              <a:rPr sz="1500" b="0" i="0">
-                <a:solidFill>
-                  <a:srgbClr val="2B2B2B"/>
-                </a:solidFill>
-                <a:latin typeface="Calibri"/>
-              </a:rPr>
-              <a:t>–   </a:t>
-            </a:r>
-            <a:r>
-              <a:rPr sz="1500" b="1" i="0">
-                <a:solidFill>
-                  <a:srgbClr val="2B2B2B"/>
-                </a:solidFill>
-                <a:latin typeface="Calibri"/>
-              </a:rPr>
-              <a:t>2.</a:t>
-            </a:r>
-            <a:r>
-              <a:rPr sz="1500" b="0" i="0">
-                <a:solidFill>
-                  <a:srgbClr val="2B2B2B"/>
-                </a:solidFill>
-                <a:latin typeface="Calibri"/>
-              </a:rPr>
-              <a:t> Antes de entregar, </a:t>
-            </a:r>
-            <a:r>
-              <a:rPr sz="1500" b="1" i="0">
-                <a:solidFill>
-                  <a:srgbClr val="2B2B2B"/>
-                </a:solidFill>
-                <a:latin typeface="Calibri"/>
-              </a:rPr>
-              <a:t>descarguen como PDF</a:t>
-            </a:r>
-            <a:r>
-              <a:rPr sz="1500" b="0" i="0">
-                <a:solidFill>
-                  <a:srgbClr val="2B2B2B"/>
-                </a:solidFill>
-                <a:latin typeface="Calibri"/>
-              </a:rPr>
-              <a:t>: así nadie recibe un documento a medio formatear.</a:t>
-            </a:r>
-          </a:p>
-          <a:p>
-            <a:pPr>
-              <a:spcAft>
-                <a:spcPts val="1000"/>
-              </a:spcAft>
-            </a:pPr>
-            <a:r>
-              <a:rPr sz="1500" b="0" i="0">
-                <a:solidFill>
-                  <a:srgbClr val="2B2B2B"/>
-                </a:solidFill>
-                <a:latin typeface="Calibri"/>
-              </a:rPr>
-              <a:t>–   </a:t>
-            </a:r>
-            <a:r>
-              <a:rPr sz="1500" b="1" i="0">
-                <a:solidFill>
-                  <a:srgbClr val="2B2B2B"/>
-                </a:solidFill>
-                <a:latin typeface="Calibri"/>
-              </a:rPr>
-              <a:t>3.</a:t>
-            </a:r>
-            <a:r>
-              <a:rPr sz="1500" b="0" i="0">
-                <a:solidFill>
-                  <a:srgbClr val="2B2B2B"/>
-                </a:solidFill>
-                <a:latin typeface="Calibri"/>
-              </a:rPr>
-              <a:t> Nombren el archivo con el ítem del aula: </a:t>
-            </a:r>
-            <a:r>
-              <a:rPr sz="1500" b="1" i="0">
-                <a:solidFill>
-                  <a:srgbClr val="2B2B2B"/>
-                </a:solidFill>
-                <a:latin typeface="Calibri"/>
-              </a:rPr>
-              <a:t>ACA1_Apellido1-Apellido2-Apellido3</a:t>
-            </a:r>
-            <a:r>
-              <a:rPr sz="1500" b="0" i="0">
-                <a:solidFill>
-                  <a:srgbClr val="2B2B2B"/>
-                </a:solidFill>
-                <a:latin typeface="Calibri"/>
-              </a:rPr>
-              <a:t> en el corte 2 y </a:t>
-            </a:r>
-            <a:r>
-              <a:rPr sz="1500" b="1" i="0">
-                <a:solidFill>
-                  <a:srgbClr val="2B2B2B"/>
-                </a:solidFill>
-                <a:latin typeface="Calibri"/>
-              </a:rPr>
-              <a:t>ACAFinal_Apellido1-Apellido2-Apellido3</a:t>
-            </a:r>
-            <a:r>
-              <a:rPr sz="1500" b="0" i="0">
-                <a:solidFill>
-                  <a:srgbClr val="2B2B2B"/>
-                </a:solidFill>
-                <a:latin typeface="Calibri"/>
-              </a:rPr>
-              <a:t> en el cierre.</a:t>
-            </a:r>
-          </a:p>
-          <a:p>
-            <a:pPr>
-              <a:spcAft>
-                <a:spcPts val="1000"/>
-              </a:spcAft>
-            </a:pPr>
-            <a:r>
-              <a:rPr sz="1500" b="0" i="0">
-                <a:solidFill>
-                  <a:srgbClr val="2B2B2B"/>
-                </a:solidFill>
-                <a:latin typeface="Calibri"/>
-              </a:rPr>
-              <a:t>–   </a:t>
-            </a:r>
-            <a:r>
-              <a:rPr sz="1500" b="1" i="0">
-                <a:solidFill>
-                  <a:srgbClr val="2B2B2B"/>
-                </a:solidFill>
-                <a:latin typeface="Calibri"/>
-              </a:rPr>
-              <a:t>4.</a:t>
-            </a:r>
-            <a:r>
-              <a:rPr sz="1500" b="0" i="0">
-                <a:solidFill>
-                  <a:srgbClr val="2B2B2B"/>
-                </a:solidFill>
-                <a:latin typeface="Calibri"/>
-              </a:rPr>
-              <a:t> </a:t>
-            </a:r>
-            <a:r>
-              <a:rPr sz="1500" b="1" i="0">
-                <a:solidFill>
-                  <a:srgbClr val="2B2B2B"/>
-                </a:solidFill>
-                <a:latin typeface="Calibri"/>
-              </a:rPr>
-              <a:t>Un solo integrante</a:t>
-            </a:r>
-            <a:r>
-              <a:rPr sz="1500" b="0" i="0">
-                <a:solidFill>
-                  <a:srgbClr val="2B2B2B"/>
-                </a:solidFill>
-                <a:latin typeface="Calibri"/>
-              </a:rPr>
-              <a:t> lo sube en el espacio de ese ítem en </a:t>
-            </a:r>
-            <a:r>
-              <a:rPr sz="1500" b="1" i="0">
-                <a:solidFill>
-                  <a:srgbClr val="2B2B2B"/>
-                </a:solidFill>
-                <a:latin typeface="Calibri"/>
-              </a:rPr>
-              <a:t>CDigital</a:t>
-            </a:r>
-            <a:r>
-              <a:rPr sz="1500" b="0" i="0">
-                <a:solidFill>
-                  <a:srgbClr val="2B2B2B"/>
-                </a:solidFill>
-                <a:latin typeface="Calibri"/>
-              </a:rPr>
-              <a:t>; los demás verifican que quedó cargado.</a:t>
-            </a:r>
-          </a:p>
-          <a:p>
-            <a:pPr lvl="1">
-              <a:spcAft>
-                <a:spcPts val="600"/>
-              </a:spcAft>
-            </a:pPr>
-            <a:r>
-              <a:rPr sz="1400" b="0" i="0">
-                <a:solidFill>
-                  <a:srgbClr val="2B2B2B"/>
-                </a:solidFill>
-                <a:latin typeface="Calibri"/>
-              </a:rPr>
-              <a:t>●   </a:t>
-            </a:r>
-            <a:r>
-              <a:rPr sz="1400" b="1" i="0">
-                <a:solidFill>
-                  <a:srgbClr val="2B2B2B"/>
-                </a:solidFill>
-                <a:latin typeface="Calibri"/>
-              </a:rPr>
-              <a:t>El Quiz del corte 1 no se sube:</a:t>
-            </a:r>
-            <a:r>
-              <a:rPr sz="1400" b="0" i="0">
-                <a:solidFill>
-                  <a:srgbClr val="2B2B2B"/>
-                </a:solidFill>
-                <a:latin typeface="Calibri"/>
-              </a:rPr>
-              <a:t> es un cuestionario individual que se resuelve en el aula dentro de su ventana.</a:t>
-            </a:r>
-          </a:p>
-          <a:p>
-            <a:pPr>
-              <a:spcAft>
-                <a:spcPts val="1000"/>
-              </a:spcAft>
-            </a:pPr>
-            <a:r>
-              <a:rPr sz="1500" b="0" i="0">
-                <a:solidFill>
-                  <a:srgbClr val="2B2B2B"/>
-                </a:solidFill>
-                <a:latin typeface="Calibri"/>
-              </a:rPr>
-              <a:t>–   </a:t>
-            </a:r>
-            <a:r>
-              <a:rPr sz="1500" b="1" i="0">
-                <a:solidFill>
-                  <a:srgbClr val="2B2B2B"/>
-                </a:solidFill>
-                <a:latin typeface="Calibri"/>
-              </a:rPr>
-              <a:t>5.</a:t>
-            </a:r>
-            <a:r>
-              <a:rPr sz="1500" b="0" i="0">
-                <a:solidFill>
-                  <a:srgbClr val="2B2B2B"/>
-                </a:solidFill>
-                <a:latin typeface="Calibri"/>
-              </a:rPr>
-              <a:t> Revisen que la portada traiga los </a:t>
-            </a:r>
-            <a:r>
-              <a:rPr sz="1500" b="1" i="0">
-                <a:solidFill>
-                  <a:srgbClr val="2B2B2B"/>
-                </a:solidFill>
-                <a:latin typeface="Calibri"/>
-              </a:rPr>
-              <a:t>nombres completos de todos</a:t>
-            </a:r>
-            <a:r>
-              <a:rPr sz="1500" b="0" i="0">
-                <a:solidFill>
-                  <a:srgbClr val="2B2B2B"/>
-                </a:solidFill>
-                <a:latin typeface="Calibri"/>
-              </a:rPr>
-              <a:t>: si falta alguien, esa persona no tiene nota.</a:t>
-            </a:r>
-          </a:p>
-          <a:p>
-            <a:pPr>
-              <a:spcAft>
-                <a:spcPts val="1000"/>
-              </a:spcAft>
-            </a:pPr>
-            <a:r>
-              <a:rPr sz="1500" b="0" i="0">
-                <a:solidFill>
-                  <a:srgbClr val="2B2B2B"/>
-                </a:solidFill>
-                <a:latin typeface="Calibri"/>
-              </a:rPr>
-              <a:t>–   </a:t>
-            </a:r>
-            <a:r>
-              <a:rPr sz="1500" b="1" i="0">
-                <a:solidFill>
-                  <a:srgbClr val="2B2B2B"/>
-                </a:solidFill>
-                <a:latin typeface="Calibri"/>
-              </a:rPr>
-              <a:t>Lo que no está en CDigital, no está entregado.</a:t>
-            </a:r>
-            <a:r>
-              <a:rPr sz="1500" b="0" i="0">
-                <a:solidFill>
-                  <a:srgbClr val="2B2B2B"/>
-                </a:solidFill>
-                <a:latin typeface="Calibri"/>
-              </a:rPr>
-              <a:t> Correo, chat o WhatsApp no son canal de entrega.</a:t>
-            </a:r>
-          </a:p>
-          <a:p>
-            <a:pPr>
-              <a:spcAft>
-                <a:spcPts val="1000"/>
-              </a:spcAft>
-            </a:pPr>
-            <a:r>
-              <a:rPr sz="1500" b="0" i="0">
-                <a:solidFill>
-                  <a:srgbClr val="2B2B2B"/>
-                </a:solidFill>
-                <a:latin typeface="Calibri"/>
-              </a:rPr>
-              <a:t>–   </a:t>
-            </a:r>
-            <a:r>
-              <a:rPr sz="1500" b="1" i="0">
-                <a:solidFill>
-                  <a:srgbClr val="2B2B2B"/>
-                </a:solidFill>
-                <a:latin typeface="Calibri"/>
-              </a:rPr>
-              <a:t>Entrega tardía:</a:t>
-            </a:r>
-            <a:r>
-              <a:rPr sz="1500" b="0" i="0">
-                <a:solidFill>
-                  <a:srgbClr val="2B2B2B"/>
-                </a:solidFill>
-                <a:latin typeface="Calibri"/>
-              </a:rPr>
-              <a:t> el espacio cierra a la hora publicada en el enunciado. Si algo pasa, se avisa </a:t>
-            </a:r>
-            <a:r>
-              <a:rPr sz="1500" b="1" i="0">
-                <a:solidFill>
-                  <a:srgbClr val="2B2B2B"/>
-                </a:solidFill>
-                <a:latin typeface="Calibri"/>
-              </a:rPr>
-              <a:t>antes</a:t>
-            </a:r>
-            <a:r>
-              <a:rPr sz="1500" b="0" i="0">
-                <a:solidFill>
-                  <a:srgbClr val="2B2B2B"/>
-                </a:solidFill>
-                <a:latin typeface="Calibri"/>
-              </a:rPr>
-              <a:t> del cierre.</a:t>
-            </a:r>
-          </a:p>
-          <a:p>
-            <a:pPr lvl="1">
-              <a:spcAft>
-                <a:spcPts val="600"/>
-              </a:spcAft>
-            </a:pPr>
-            <a:r>
-              <a:rPr sz="1400" b="0" i="0">
-                <a:solidFill>
-                  <a:srgbClr val="2B2B2B"/>
-                </a:solidFill>
-                <a:latin typeface="Calibri"/>
-              </a:rPr>
-              <a:t>●   Quedarse sin internet a las 11:50 p. m. no es un imprevisto: es haber esperado hasta las 11:50 p. m.</a:t>
-            </a:r>
-          </a:p>
-        </p:txBody>
-      </p:sp>
-      <p:sp>
-        <p:nvSpPr>
-          <p:cNvPr id="5" name="TextBox 4"/>
-          <p:cNvSpPr txBox="1"/>
-          <p:nvPr/>
-        </p:nvSpPr>
-        <p:spPr>
-          <a:xfrm>
-            <a:off x="11094415" y="6446520"/>
-            <a:ext cx="548640" cy="274320"/>
-          </a:xfrm>
-          <a:prstGeom prst="rect">
-            <a:avLst/>
-          </a:prstGeom>
-          <a:noFill/>
-        </p:spPr>
-        <p:txBody>
-          <a:bodyPr wrap="square" anchor="t" lIns="0" rIns="0" tIns="0" bIns="0">
-            <a:spAutoFit/>
-          </a:bodyPr>
-          <a:lstStyle/>
-          <a:p>
-            <a:pPr algn="r"/>
-            <a:r>
-              <a:rPr sz="1000" b="1" i="0">
-                <a:solidFill>
-                  <a:srgbClr val="8F989D"/>
-                </a:solidFill>
-                <a:latin typeface="Calibri"/>
-              </a:rPr>
               <a:t>11</a:t>
-            </a:r>
-          </a:p>
-        </p:txBody>
-      </p:sp>
-      <p:sp>
-        <p:nvSpPr>
-          <p:cNvPr id="6" name="TextBox 5"/>
-          <p:cNvSpPr txBox="1"/>
-          <p:nvPr/>
-        </p:nvSpPr>
-        <p:spPr>
-          <a:xfrm>
-            <a:off x="640080" y="5943600"/>
-            <a:ext cx="9997135" cy="457200"/>
-          </a:xfrm>
-          <a:prstGeom prst="rect">
-            <a:avLst/>
-          </a:prstGeom>
-          <a:noFill/>
-        </p:spPr>
-        <p:txBody>
-          <a:bodyPr wrap="square" anchor="t" lIns="0" rIns="0" tIns="0" bIns="0">
-            <a:spAutoFit/>
-          </a:bodyPr>
-          <a:lstStyle/>
-          <a:p>
-            <a:r>
-              <a:rPr sz="1200" b="0" i="1">
-                <a:solidFill>
-                  <a:srgbClr val="2B2B2B"/>
-                </a:solidFill>
-                <a:latin typeface="Calibri"/>
-              </a:rPr>
-              <a:t>Consejo del Docente: suban una versión el día anterior. Mientras el espacio esté abierto siempre se puede reemplazar por una mejor.</a:t>
             </a:r>
           </a:p>
         </p:txBody>
@@ -4882,65 +4705,21 @@
                 </a:solidFill>
                 <a:latin typeface="Calibri"/>
               </a:rPr>
-              <a:t>Integridad académica: la línea que no se cruza</a:t>
-            </a:r>
-          </a:p>
-        </p:txBody>
-      </p:sp>
-      <p:sp>
-        <p:nvSpPr>
-          <p:cNvPr id="4" name="Rounded Rectangle 3"/>
-          <p:cNvSpPr/>
-          <p:nvPr/>
-        </p:nvSpPr>
-        <p:spPr>
-          <a:xfrm>
-            <a:off x="640080" y="1737360"/>
-            <a:ext cx="10911535" cy="1481328"/>
-          </a:xfrm>
-          <a:prstGeom prst="roundRect">
-            <a:avLst/>
-          </a:prstGeom>
-          <a:solidFill>
-            <a:srgbClr val="FBE4E4"/>
-          </a:solidFill>
-          <a:ln>
-            <a:noFill/>
-          </a:ln>
-          <a:effectLst/>
-        </p:spPr>
-        <p:style>
-          <a:lnRef idx="1">
-            <a:schemeClr val="accent1"/>
-          </a:lnRef>
-          <a:fillRef idx="3">
-            <a:schemeClr val="accent1"/>
-          </a:fillRef>
-          <a:effectRef idx="2">
-            <a:schemeClr val="accent1"/>
-          </a:effectRef>
-          <a:fontRef idx="minor">
-            <a:schemeClr val="lt1"/>
-          </a:fontRef>
-        </p:style>
-        <p:txBody>
-          <a:bodyPr rtlCol="0" anchor="ctr"/>
-          <a:lstStyle/>
-          <a:p>
-            <a:pPr algn="ctr"/>
-          </a:p>
-        </p:txBody>
-      </p:sp>
-      <p:sp>
-        <p:nvSpPr>
-          <p:cNvPr id="5" name="TextBox 4"/>
+              <a:t>Cómo se entrega: paso a paso en CDigital</a:t>
+            </a:r>
+          </a:p>
+        </p:txBody>
+      </p:sp>
+      <p:sp>
+        <p:nvSpPr>
+          <p:cNvPr id="4" name="TextBox 3"/>
           <p:cNvSpPr txBox="1"/>
           <p:nvPr/>
         </p:nvSpPr>
         <p:spPr>
           <a:xfrm>
-            <a:off x="868680" y="1847088"/>
-            <a:ext cx="10454335" cy="1261872"/>
+            <a:off x="640080" y="1691639"/>
+            <a:ext cx="10911535" cy="4617720"/>
           </a:xfrm>
           <a:prstGeom prst="rect">
             <a:avLst/>
@@ -4953,97 +4732,449 @@
           </a:bodyPr>
           <a:lstStyle/>
           <a:p>
-            <a:r>
-              <a:rPr sz="1300" b="1" i="0">
-                <a:solidFill>
-                  <a:srgbClr val="0C2340"/>
-                </a:solidFill>
-                <a:latin typeface="Calibri"/>
-              </a:rPr>
-              <a:t>⚠️ Importante</a:t>
-            </a:r>
-          </a:p>
-          <a:p>
             <a:pPr>
-              <a:spcBef>
-                <a:spcPts val="400"/>
-              </a:spcBef>
+              <a:spcAft>
+                <a:spcPts val="1000"/>
+              </a:spcAft>
             </a:pPr>
             <a:r>
-              <a:rPr sz="1300" b="1" i="0">
-                <a:solidFill>
-                  <a:srgbClr val="2B2B2B"/>
-                </a:solidFill>
-                <a:latin typeface="Calibri"/>
-              </a:rPr>
-              <a:t>Plagio es tomar lo ajeno y no decirlo.</a:t>
-            </a:r>
-            <a:r>
-              <a:rPr sz="1300" b="0" i="0">
-                <a:solidFill>
-                  <a:srgbClr val="2B2B2B"/>
-                </a:solidFill>
-                <a:latin typeface="Calibri"/>
-              </a:rPr>
-              <a:t> Cuenta como plagio pegar texto de una fuente sin comillas ni cita, traducir un párrafo ajeno y firmarlo, reusar un trabajo propio de otro semestre como si fuera nuevo, y entregar el documento de otro equipo con la portada cambiada.</a:t>
-            </a:r>
-          </a:p>
-        </p:txBody>
-      </p:sp>
-      <p:sp>
-        <p:nvSpPr>
-          <p:cNvPr id="6" name="Rounded Rectangle 5"/>
-          <p:cNvSpPr/>
-          <p:nvPr/>
-        </p:nvSpPr>
-        <p:spPr>
-          <a:xfrm>
-            <a:off x="640080" y="3447288"/>
-            <a:ext cx="10911535" cy="1225296"/>
-          </a:xfrm>
-          <a:prstGeom prst="roundRect">
-            <a:avLst/>
-          </a:prstGeom>
-          <a:solidFill>
-            <a:srgbClr val="E8F5EC"/>
-          </a:solidFill>
-          <a:ln>
-            <a:noFill/>
-          </a:ln>
-          <a:effectLst/>
-        </p:spPr>
-        <p:style>
-          <a:lnRef idx="1">
-            <a:schemeClr val="accent1"/>
-          </a:lnRef>
-          <a:fillRef idx="3">
-            <a:schemeClr val="accent1"/>
-          </a:fillRef>
-          <a:effectRef idx="2">
-            <a:schemeClr val="accent1"/>
-          </a:effectRef>
-          <a:fontRef idx="minor">
-            <a:schemeClr val="lt1"/>
-          </a:fontRef>
-        </p:style>
-        <p:txBody>
-          <a:bodyPr rtlCol="0" anchor="ctr"/>
-          <a:lstStyle/>
-          <a:p>
-            <a:pPr algn="ctr"/>
-          </a:p>
-        </p:txBody>
-      </p:sp>
-      <p:sp>
-        <p:nvSpPr>
-          <p:cNvPr id="7" name="TextBox 6"/>
+              <a:rPr sz="1500" b="0" i="0">
+                <a:solidFill>
+                  <a:srgbClr val="2B2B2B"/>
+                </a:solidFill>
+                <a:latin typeface="Calibri"/>
+              </a:rPr>
+              <a:t>–   </a:t>
+            </a:r>
+            <a:r>
+              <a:rPr sz="1500" b="1" i="0">
+                <a:solidFill>
+                  <a:srgbClr val="2B2B2B"/>
+                </a:solidFill>
+                <a:latin typeface="Calibri"/>
+              </a:rPr>
+              <a:t>1.</a:t>
+            </a:r>
+            <a:r>
+              <a:rPr sz="1500" b="0" i="0">
+                <a:solidFill>
+                  <a:srgbClr val="2B2B2B"/>
+                </a:solidFill>
+                <a:latin typeface="Calibri"/>
+              </a:rPr>
+              <a:t> Trabajen la </a:t>
+            </a:r>
+            <a:r>
+              <a:rPr sz="1500" b="1" i="0">
+                <a:solidFill>
+                  <a:srgbClr val="2B2B2B"/>
+                </a:solidFill>
+                <a:latin typeface="Calibri"/>
+              </a:rPr>
+              <a:t>plantilla APA CUN en Google Docs</a:t>
+            </a:r>
+            <a:r>
+              <a:rPr sz="1500" b="0" i="0">
+                <a:solidFill>
+                  <a:srgbClr val="2B2B2B"/>
+                </a:solidFill>
+                <a:latin typeface="Calibri"/>
+              </a:rPr>
+              <a:t>: un documento por equipo, con permiso de edición para todos.</a:t>
+            </a:r>
+          </a:p>
+          <a:p>
+            <a:pPr>
+              <a:spcAft>
+                <a:spcPts val="1000"/>
+              </a:spcAft>
+            </a:pPr>
+            <a:r>
+              <a:rPr sz="1500" b="0" i="0">
+                <a:solidFill>
+                  <a:srgbClr val="2B2B2B"/>
+                </a:solidFill>
+                <a:latin typeface="Calibri"/>
+              </a:rPr>
+              <a:t>–   </a:t>
+            </a:r>
+            <a:r>
+              <a:rPr sz="1500" b="1" i="0">
+                <a:solidFill>
+                  <a:srgbClr val="2B2B2B"/>
+                </a:solidFill>
+                <a:latin typeface="Calibri"/>
+              </a:rPr>
+              <a:t>2.</a:t>
+            </a:r>
+            <a:r>
+              <a:rPr sz="1500" b="0" i="0">
+                <a:solidFill>
+                  <a:srgbClr val="2B2B2B"/>
+                </a:solidFill>
+                <a:latin typeface="Calibri"/>
+              </a:rPr>
+              <a:t> Antes de entregar, </a:t>
+            </a:r>
+            <a:r>
+              <a:rPr sz="1500" b="1" i="0">
+                <a:solidFill>
+                  <a:srgbClr val="2B2B2B"/>
+                </a:solidFill>
+                <a:latin typeface="Calibri"/>
+              </a:rPr>
+              <a:t>descarguen como PDF</a:t>
+            </a:r>
+            <a:r>
+              <a:rPr sz="1500" b="0" i="0">
+                <a:solidFill>
+                  <a:srgbClr val="2B2B2B"/>
+                </a:solidFill>
+                <a:latin typeface="Calibri"/>
+              </a:rPr>
+              <a:t>: así nadie recibe un documento a medio formatear.</a:t>
+            </a:r>
+          </a:p>
+          <a:p>
+            <a:pPr>
+              <a:spcAft>
+                <a:spcPts val="1000"/>
+              </a:spcAft>
+            </a:pPr>
+            <a:r>
+              <a:rPr sz="1500" b="0" i="0">
+                <a:solidFill>
+                  <a:srgbClr val="2B2B2B"/>
+                </a:solidFill>
+                <a:latin typeface="Calibri"/>
+              </a:rPr>
+              <a:t>–   </a:t>
+            </a:r>
+            <a:r>
+              <a:rPr sz="1500" b="1" i="0">
+                <a:solidFill>
+                  <a:srgbClr val="2B2B2B"/>
+                </a:solidFill>
+                <a:latin typeface="Calibri"/>
+              </a:rPr>
+              <a:t>3.</a:t>
+            </a:r>
+            <a:r>
+              <a:rPr sz="1500" b="0" i="0">
+                <a:solidFill>
+                  <a:srgbClr val="2B2B2B"/>
+                </a:solidFill>
+                <a:latin typeface="Calibri"/>
+              </a:rPr>
+              <a:t> Nombren el archivo con el ítem del aula: </a:t>
+            </a:r>
+            <a:r>
+              <a:rPr sz="1500" b="1" i="0">
+                <a:solidFill>
+                  <a:srgbClr val="2B2B2B"/>
+                </a:solidFill>
+                <a:latin typeface="Calibri"/>
+              </a:rPr>
+              <a:t>ACA1_Apellido1-Apellido2-Apellido3</a:t>
+            </a:r>
+            <a:r>
+              <a:rPr sz="1500" b="0" i="0">
+                <a:solidFill>
+                  <a:srgbClr val="2B2B2B"/>
+                </a:solidFill>
+                <a:latin typeface="Calibri"/>
+              </a:rPr>
+              <a:t> en el corte 2 y </a:t>
+            </a:r>
+            <a:r>
+              <a:rPr sz="1500" b="1" i="0">
+                <a:solidFill>
+                  <a:srgbClr val="2B2B2B"/>
+                </a:solidFill>
+                <a:latin typeface="Calibri"/>
+              </a:rPr>
+              <a:t>ACAFinal_Apellido1-Apellido2-Apellido3</a:t>
+            </a:r>
+            <a:r>
+              <a:rPr sz="1500" b="0" i="0">
+                <a:solidFill>
+                  <a:srgbClr val="2B2B2B"/>
+                </a:solidFill>
+                <a:latin typeface="Calibri"/>
+              </a:rPr>
+              <a:t> en el cierre.</a:t>
+            </a:r>
+          </a:p>
+          <a:p>
+            <a:pPr>
+              <a:spcAft>
+                <a:spcPts val="1000"/>
+              </a:spcAft>
+            </a:pPr>
+            <a:r>
+              <a:rPr sz="1500" b="0" i="0">
+                <a:solidFill>
+                  <a:srgbClr val="2B2B2B"/>
+                </a:solidFill>
+                <a:latin typeface="Calibri"/>
+              </a:rPr>
+              <a:t>–   </a:t>
+            </a:r>
+            <a:r>
+              <a:rPr sz="1500" b="1" i="0">
+                <a:solidFill>
+                  <a:srgbClr val="2B2B2B"/>
+                </a:solidFill>
+                <a:latin typeface="Calibri"/>
+              </a:rPr>
+              <a:t>4.</a:t>
+            </a:r>
+            <a:r>
+              <a:rPr sz="1500" b="0" i="0">
+                <a:solidFill>
+                  <a:srgbClr val="2B2B2B"/>
+                </a:solidFill>
+                <a:latin typeface="Calibri"/>
+              </a:rPr>
+              <a:t> </a:t>
+            </a:r>
+            <a:r>
+              <a:rPr sz="1500" b="1" i="0">
+                <a:solidFill>
+                  <a:srgbClr val="2B2B2B"/>
+                </a:solidFill>
+                <a:latin typeface="Calibri"/>
+              </a:rPr>
+              <a:t>Un solo integrante</a:t>
+            </a:r>
+            <a:r>
+              <a:rPr sz="1500" b="0" i="0">
+                <a:solidFill>
+                  <a:srgbClr val="2B2B2B"/>
+                </a:solidFill>
+                <a:latin typeface="Calibri"/>
+              </a:rPr>
+              <a:t> lo sube en el espacio de ese ítem en </a:t>
+            </a:r>
+            <a:r>
+              <a:rPr sz="1500" b="1" i="0">
+                <a:solidFill>
+                  <a:srgbClr val="2B2B2B"/>
+                </a:solidFill>
+                <a:latin typeface="Calibri"/>
+              </a:rPr>
+              <a:t>CDigital</a:t>
+            </a:r>
+            <a:r>
+              <a:rPr sz="1500" b="0" i="0">
+                <a:solidFill>
+                  <a:srgbClr val="2B2B2B"/>
+                </a:solidFill>
+                <a:latin typeface="Calibri"/>
+              </a:rPr>
+              <a:t>; los demás verifican que quedó cargado.</a:t>
+            </a:r>
+          </a:p>
+          <a:p>
+            <a:pPr lvl="1">
+              <a:spcAft>
+                <a:spcPts val="600"/>
+              </a:spcAft>
+            </a:pPr>
+            <a:r>
+              <a:rPr sz="1400" b="0" i="0">
+                <a:solidFill>
+                  <a:srgbClr val="2B2B2B"/>
+                </a:solidFill>
+                <a:latin typeface="Calibri"/>
+              </a:rPr>
+              <a:t>●   </a:t>
+            </a:r>
+            <a:r>
+              <a:rPr sz="1400" b="1" i="0">
+                <a:solidFill>
+                  <a:srgbClr val="2B2B2B"/>
+                </a:solidFill>
+                <a:latin typeface="Calibri"/>
+              </a:rPr>
+              <a:t>El Quiz del corte 1 no se sube:</a:t>
+            </a:r>
+            <a:r>
+              <a:rPr sz="1400" b="0" i="0">
+                <a:solidFill>
+                  <a:srgbClr val="2B2B2B"/>
+                </a:solidFill>
+                <a:latin typeface="Calibri"/>
+              </a:rPr>
+              <a:t> es un cuestionario individual que se resuelve en el aula dentro de su ventana.</a:t>
+            </a:r>
+          </a:p>
+          <a:p>
+            <a:pPr>
+              <a:spcAft>
+                <a:spcPts val="1000"/>
+              </a:spcAft>
+            </a:pPr>
+            <a:r>
+              <a:rPr sz="1500" b="0" i="0">
+                <a:solidFill>
+                  <a:srgbClr val="2B2B2B"/>
+                </a:solidFill>
+                <a:latin typeface="Calibri"/>
+              </a:rPr>
+              <a:t>–   </a:t>
+            </a:r>
+            <a:r>
+              <a:rPr sz="1500" b="1" i="0">
+                <a:solidFill>
+                  <a:srgbClr val="2B2B2B"/>
+                </a:solidFill>
+                <a:latin typeface="Calibri"/>
+              </a:rPr>
+              <a:t>5.</a:t>
+            </a:r>
+            <a:r>
+              <a:rPr sz="1500" b="0" i="0">
+                <a:solidFill>
+                  <a:srgbClr val="2B2B2B"/>
+                </a:solidFill>
+                <a:latin typeface="Calibri"/>
+              </a:rPr>
+              <a:t> Revisen que la portada traiga los </a:t>
+            </a:r>
+            <a:r>
+              <a:rPr sz="1500" b="1" i="0">
+                <a:solidFill>
+                  <a:srgbClr val="2B2B2B"/>
+                </a:solidFill>
+                <a:latin typeface="Calibri"/>
+              </a:rPr>
+              <a:t>nombres completos de todos</a:t>
+            </a:r>
+            <a:r>
+              <a:rPr sz="1500" b="0" i="0">
+                <a:solidFill>
+                  <a:srgbClr val="2B2B2B"/>
+                </a:solidFill>
+                <a:latin typeface="Calibri"/>
+              </a:rPr>
+              <a:t>: si falta alguien, esa persona no tiene nota.</a:t>
+            </a:r>
+          </a:p>
+          <a:p>
+            <a:pPr>
+              <a:spcAft>
+                <a:spcPts val="1000"/>
+              </a:spcAft>
+            </a:pPr>
+            <a:r>
+              <a:rPr sz="1500" b="0" i="0">
+                <a:solidFill>
+                  <a:srgbClr val="2B2B2B"/>
+                </a:solidFill>
+                <a:latin typeface="Calibri"/>
+              </a:rPr>
+              <a:t>–   </a:t>
+            </a:r>
+            <a:r>
+              <a:rPr sz="1500" b="1" i="0">
+                <a:solidFill>
+                  <a:srgbClr val="2B2B2B"/>
+                </a:solidFill>
+                <a:latin typeface="Calibri"/>
+              </a:rPr>
+              <a:t>Lo que no está en CDigital, no está entregado.</a:t>
+            </a:r>
+            <a:r>
+              <a:rPr sz="1500" b="0" i="0">
+                <a:solidFill>
+                  <a:srgbClr val="2B2B2B"/>
+                </a:solidFill>
+                <a:latin typeface="Calibri"/>
+              </a:rPr>
+              <a:t> Correo, chat o WhatsApp no son canal de entrega.</a:t>
+            </a:r>
+          </a:p>
+          <a:p>
+            <a:pPr>
+              <a:spcAft>
+                <a:spcPts val="1000"/>
+              </a:spcAft>
+            </a:pPr>
+            <a:r>
+              <a:rPr sz="1500" b="0" i="0">
+                <a:solidFill>
+                  <a:srgbClr val="2B2B2B"/>
+                </a:solidFill>
+                <a:latin typeface="Calibri"/>
+              </a:rPr>
+              <a:t>–   </a:t>
+            </a:r>
+            <a:r>
+              <a:rPr sz="1500" b="1" i="0">
+                <a:solidFill>
+                  <a:srgbClr val="2B2B2B"/>
+                </a:solidFill>
+                <a:latin typeface="Calibri"/>
+              </a:rPr>
+              <a:t>Entrega tardía:</a:t>
+            </a:r>
+            <a:r>
+              <a:rPr sz="1500" b="0" i="0">
+                <a:solidFill>
+                  <a:srgbClr val="2B2B2B"/>
+                </a:solidFill>
+                <a:latin typeface="Calibri"/>
+              </a:rPr>
+              <a:t> el espacio cierra a la hora publicada en el enunciado. Si algo pasa, se avisa </a:t>
+            </a:r>
+            <a:r>
+              <a:rPr sz="1500" b="1" i="0">
+                <a:solidFill>
+                  <a:srgbClr val="2B2B2B"/>
+                </a:solidFill>
+                <a:latin typeface="Calibri"/>
+              </a:rPr>
+              <a:t>antes</a:t>
+            </a:r>
+            <a:r>
+              <a:rPr sz="1500" b="0" i="0">
+                <a:solidFill>
+                  <a:srgbClr val="2B2B2B"/>
+                </a:solidFill>
+                <a:latin typeface="Calibri"/>
+              </a:rPr>
+              <a:t> del cierre.</a:t>
+            </a:r>
+          </a:p>
+          <a:p>
+            <a:pPr lvl="1">
+              <a:spcAft>
+                <a:spcPts val="600"/>
+              </a:spcAft>
+            </a:pPr>
+            <a:r>
+              <a:rPr sz="1400" b="0" i="0">
+                <a:solidFill>
+                  <a:srgbClr val="2B2B2B"/>
+                </a:solidFill>
+                <a:latin typeface="Calibri"/>
+              </a:rPr>
+              <a:t>●   Quedarse sin internet a las 11:50 p. m. no es un imprevisto: es haber esperado hasta las 11:50 p. m.</a:t>
+            </a:r>
+          </a:p>
+        </p:txBody>
+      </p:sp>
+      <p:sp>
+        <p:nvSpPr>
+          <p:cNvPr id="5" name="TextBox 4"/>
           <p:cNvSpPr txBox="1"/>
           <p:nvPr/>
         </p:nvSpPr>
         <p:spPr>
           <a:xfrm>
-            <a:off x="868680" y="3557016"/>
-            <a:ext cx="10454335" cy="1005840"/>
+            <a:off x="11094415" y="6446520"/>
+            <a:ext cx="548640" cy="274320"/>
           </a:xfrm>
           <a:prstGeom prst="rect">
             <a:avLst/>
@@ -5056,115 +5187,29 @@
           </a:bodyPr>
           <a:lstStyle/>
           <a:p>
-            <a:r>
-              <a:rPr sz="1300" b="1" i="0">
-                <a:solidFill>
-                  <a:srgbClr val="0C2340"/>
-                </a:solidFill>
-                <a:latin typeface="Calibri"/>
-              </a:rPr>
-              <a:t>ℹ️ Nota institucional</a:t>
-            </a:r>
-          </a:p>
-          <a:p>
-            <a:pPr>
-              <a:spcBef>
-                <a:spcPts val="400"/>
-              </a:spcBef>
-            </a:pPr>
-            <a:r>
-              <a:rPr sz="1300" b="1" i="0">
-                <a:solidFill>
-                  <a:srgbClr val="2B2B2B"/>
-                </a:solidFill>
-                <a:latin typeface="Calibri"/>
-              </a:rPr>
-              <a:t>Citar no debilita el trabajo: lo sostiene.</a:t>
-            </a:r>
-            <a:r>
-              <a:rPr sz="1300" b="0" i="0">
-                <a:solidFill>
-                  <a:srgbClr val="2B2B2B"/>
-                </a:solidFill>
-                <a:latin typeface="Calibri"/>
-              </a:rPr>
-              <a:t> En este curso se cita en </a:t>
-            </a:r>
-            <a:r>
-              <a:rPr sz="1300" b="1" i="0">
-                <a:solidFill>
-                  <a:srgbClr val="2B2B2B"/>
-                </a:solidFill>
-                <a:latin typeface="Calibri"/>
-              </a:rPr>
-              <a:t>APA 7</a:t>
-            </a:r>
-            <a:r>
-              <a:rPr sz="1300" b="0" i="0">
-                <a:solidFill>
-                  <a:srgbClr val="2B2B2B"/>
-                </a:solidFill>
-                <a:latin typeface="Calibri"/>
-              </a:rPr>
-              <a:t>, dentro del texto y en la lista final de referencias. Una idea que no es suya y no está citada es un problema; esa misma idea citada es un argumento con respaldo.</a:t>
-            </a:r>
-          </a:p>
-        </p:txBody>
-      </p:sp>
-      <p:sp>
-        <p:nvSpPr>
-          <p:cNvPr id="8" name="Rounded Rectangle 7"/>
-          <p:cNvSpPr/>
-          <p:nvPr/>
-        </p:nvSpPr>
-        <p:spPr>
-          <a:xfrm>
-            <a:off x="640080" y="4901184"/>
-            <a:ext cx="10911535" cy="1225296"/>
-          </a:xfrm>
-          <a:prstGeom prst="roundRect">
-            <a:avLst/>
-          </a:prstGeom>
-          <a:solidFill>
-            <a:srgbClr val="FDECD8"/>
-          </a:solidFill>
-          <a:ln>
-            <a:noFill/>
-          </a:ln>
-          <a:effectLst/>
-        </p:spPr>
-        <p:style>
-          <a:lnRef idx="1">
-            <a:schemeClr val="accent1"/>
-          </a:lnRef>
-          <a:fillRef idx="3">
-            <a:schemeClr val="accent1"/>
-          </a:fillRef>
-          <a:effectRef idx="2">
-            <a:schemeClr val="accent1"/>
-          </a:effectRef>
-          <a:fontRef idx="minor">
-            <a:schemeClr val="lt1"/>
-          </a:fontRef>
-        </p:style>
-        <p:txBody>
-          <a:bodyPr rtlCol="0" anchor="ctr"/>
-          <a:lstStyle/>
-          <a:p>
-            <a:pPr algn="ctr"/>
-          </a:p>
-        </p:txBody>
-      </p:sp>
-      <p:sp>
-        <p:nvSpPr>
-          <p:cNvPr id="9" name="TextBox 8"/>
+            <a:pPr algn="r"/>
+            <a:r>
+              <a:rPr sz="1000" b="1" i="0">
+                <a:solidFill>
+                  <a:srgbClr val="8F989D"/>
+                </a:solidFill>
+                <a:latin typeface="Calibri"/>
+              </a:rPr>
+              <a:t>12</a:t>
+            </a:r>
+          </a:p>
+        </p:txBody>
+      </p:sp>
+      <p:sp>
+        <p:nvSpPr>
+          <p:cNvPr id="6" name="TextBox 5"/>
           <p:cNvSpPr txBox="1"/>
           <p:nvPr/>
         </p:nvSpPr>
         <p:spPr>
           <a:xfrm>
-            <a:off x="868680" y="5010912"/>
-            <a:ext cx="10454335" cy="1005840"/>
+            <a:off x="640080" y="5943600"/>
+            <a:ext cx="9997135" cy="457200"/>
           </a:xfrm>
           <a:prstGeom prst="rect">
             <a:avLst/>
@@ -5178,73 +5223,13 @@
           <a:lstStyle/>
           <a:p>
             <a:r>
-              <a:rPr sz="1300" b="1" i="0">
-                <a:solidFill>
-                  <a:srgbClr val="0C2340"/>
-                </a:solidFill>
-                <a:latin typeface="Calibri"/>
-              </a:rPr>
-              <a:t>💡 Aclaración</a:t>
-            </a:r>
-          </a:p>
-          <a:p>
-            <a:pPr>
-              <a:spcBef>
-                <a:spcPts val="400"/>
-              </a:spcBef>
-            </a:pPr>
-            <a:r>
-              <a:rPr sz="1300" b="1" i="0">
-                <a:solidFill>
-                  <a:srgbClr val="2B2B2B"/>
-                </a:solidFill>
-                <a:latin typeface="Calibri"/>
-              </a:rPr>
-              <a:t>Si se detecta, hay debido proceso.</a:t>
-            </a:r>
-            <a:r>
-              <a:rPr sz="1300" b="0" i="0">
-                <a:solidFill>
-                  <a:srgbClr val="2B2B2B"/>
-                </a:solidFill>
-                <a:latin typeface="Calibri"/>
-              </a:rPr>
-              <a:t> No depende del ánimo del Docente: es un procedimiento institucional, con notificación y derecho a descargos. Por eso siempre conviene preguntar antes que improvisar.</a:t>
-            </a:r>
-          </a:p>
-        </p:txBody>
-      </p:sp>
-      <p:sp>
-        <p:nvSpPr>
-          <p:cNvPr id="10" name="TextBox 9"/>
-          <p:cNvSpPr txBox="1"/>
-          <p:nvPr/>
-        </p:nvSpPr>
-        <p:spPr>
-          <a:xfrm>
-            <a:off x="11094415" y="6446520"/>
-            <a:ext cx="548640" cy="274320"/>
-          </a:xfrm>
-          <a:prstGeom prst="rect">
-            <a:avLst/>
-          </a:prstGeom>
-          <a:noFill/>
-        </p:spPr>
-        <p:txBody>
-          <a:bodyPr wrap="square" anchor="t" lIns="0" rIns="0" tIns="0" bIns="0">
-            <a:spAutoFit/>
-          </a:bodyPr>
-          <a:lstStyle/>
-          <a:p>
-            <a:pPr algn="r"/>
-            <a:r>
-              <a:rPr sz="1000" b="1" i="0">
-                <a:solidFill>
-                  <a:srgbClr val="8F989D"/>
-                </a:solidFill>
-                <a:latin typeface="Calibri"/>
-              </a:rPr>
-              <a:t>12</a:t>
+              <a:rPr sz="1200" b="0" i="1">
+                <a:solidFill>
+                  <a:srgbClr val="2B2B2B"/>
+                </a:solidFill>
+                <a:latin typeface="Calibri"/>
+              </a:rPr>
+              <a:t>Consejo del Docente: suban una versión el día anterior. Mientras el espacio esté abierto siempre se puede reemplazar por una mejor.</a:t>
             </a:r>
           </a:p>
         </p:txBody>
@@ -5349,21 +5334,65 @@
                 </a:solidFill>
                 <a:latin typeface="Calibri"/>
               </a:rPr>
-              <a:t>IA generativa: se puede usar, con tres condiciones</a:t>
-            </a:r>
-          </a:p>
-        </p:txBody>
-      </p:sp>
-      <p:sp>
-        <p:nvSpPr>
-          <p:cNvPr id="4" name="TextBox 3"/>
+              <a:t>Integridad académica: la línea que no se cruza</a:t>
+            </a:r>
+          </a:p>
+        </p:txBody>
+      </p:sp>
+      <p:sp>
+        <p:nvSpPr>
+          <p:cNvPr id="4" name="Rounded Rectangle 3"/>
+          <p:cNvSpPr/>
+          <p:nvPr/>
+        </p:nvSpPr>
+        <p:spPr>
+          <a:xfrm>
+            <a:off x="640080" y="1737360"/>
+            <a:ext cx="10911535" cy="1481328"/>
+          </a:xfrm>
+          <a:prstGeom prst="roundRect">
+            <a:avLst/>
+          </a:prstGeom>
+          <a:solidFill>
+            <a:srgbClr val="FBE4E4"/>
+          </a:solidFill>
+          <a:ln>
+            <a:noFill/>
+          </a:ln>
+          <a:effectLst/>
+        </p:spPr>
+        <p:style>
+          <a:lnRef idx="1">
+            <a:schemeClr val="accent1"/>
+          </a:lnRef>
+          <a:fillRef idx="3">
+            <a:schemeClr val="accent1"/>
+          </a:fillRef>
+          <a:effectRef idx="2">
+            <a:schemeClr val="accent1"/>
+          </a:effectRef>
+          <a:fontRef idx="minor">
+            <a:schemeClr val="lt1"/>
+          </a:fontRef>
+        </p:style>
+        <p:txBody>
+          <a:bodyPr rtlCol="0" anchor="ctr"/>
+          <a:lstStyle/>
+          <a:p>
+            <a:pPr algn="ctr"/>
+          </a:p>
+        </p:txBody>
+      </p:sp>
+      <p:sp>
+        <p:nvSpPr>
+          <p:cNvPr id="5" name="TextBox 4"/>
           <p:cNvSpPr txBox="1"/>
           <p:nvPr/>
         </p:nvSpPr>
         <p:spPr>
           <a:xfrm>
-            <a:off x="640080" y="1691639"/>
-            <a:ext cx="10911535" cy="4617720"/>
+            <a:off x="868680" y="1847088"/>
+            <a:ext cx="10454335" cy="1261872"/>
           </a:xfrm>
           <a:prstGeom prst="rect">
             <a:avLst/>
@@ -5376,235 +5405,97 @@
           </a:bodyPr>
           <a:lstStyle/>
           <a:p>
+            <a:r>
+              <a:rPr sz="1300" b="1" i="0">
+                <a:solidFill>
+                  <a:srgbClr val="0C2340"/>
+                </a:solidFill>
+                <a:latin typeface="Calibri"/>
+              </a:rPr>
+              <a:t>⚠️ Importante</a:t>
+            </a:r>
+          </a:p>
+          <a:p>
             <a:pPr>
-              <a:spcAft>
-                <a:spcPts val="1000"/>
-              </a:spcAft>
+              <a:spcBef>
+                <a:spcPts val="400"/>
+              </a:spcBef>
             </a:pPr>
             <a:r>
-              <a:rPr sz="1600" b="0" i="0">
-                <a:solidFill>
-                  <a:srgbClr val="2B2B2B"/>
-                </a:solidFill>
-                <a:latin typeface="Calibri"/>
-              </a:rPr>
-              <a:t>–   En este curso </a:t>
-            </a:r>
-            <a:r>
-              <a:rPr sz="1600" b="1" i="0">
-                <a:solidFill>
-                  <a:srgbClr val="2B2B2B"/>
-                </a:solidFill>
-                <a:latin typeface="Calibri"/>
-              </a:rPr>
-              <a:t>no se prohíbe</a:t>
-            </a:r>
-            <a:r>
-              <a:rPr sz="1600" b="0" i="0">
-                <a:solidFill>
-                  <a:srgbClr val="2B2B2B"/>
-                </a:solidFill>
-                <a:latin typeface="Calibri"/>
-              </a:rPr>
-              <a:t> usar IA generativa. Se exige usarla con criterio y decirlo por escrito.</a:t>
-            </a:r>
-          </a:p>
-          <a:p>
-            <a:pPr>
-              <a:spcAft>
-                <a:spcPts val="1000"/>
-              </a:spcAft>
-            </a:pPr>
-            <a:r>
-              <a:rPr sz="1600" b="0" i="0">
-                <a:solidFill>
-                  <a:srgbClr val="2B2B2B"/>
-                </a:solidFill>
-                <a:latin typeface="Calibri"/>
-              </a:rPr>
-              <a:t>–   </a:t>
-            </a:r>
-            <a:r>
-              <a:rPr sz="1600" b="1" i="0">
-                <a:solidFill>
-                  <a:srgbClr val="2B2B2B"/>
-                </a:solidFill>
-                <a:latin typeface="Calibri"/>
-              </a:rPr>
-              <a:t>Condición 1 — Declararla.</a:t>
-            </a:r>
-            <a:r>
-              <a:rPr sz="1600" b="0" i="0">
-                <a:solidFill>
-                  <a:srgbClr val="2B2B2B"/>
-                </a:solidFill>
-                <a:latin typeface="Calibri"/>
-              </a:rPr>
-              <a:t> Una nota al final del documento: qué herramienta usaron y para qué (ideas, redacción, tablas).</a:t>
-            </a:r>
-          </a:p>
-          <a:p>
-            <a:pPr>
-              <a:spcAft>
-                <a:spcPts val="1000"/>
-              </a:spcAft>
-            </a:pPr>
-            <a:r>
-              <a:rPr sz="1600" b="0" i="0">
-                <a:solidFill>
-                  <a:srgbClr val="2B2B2B"/>
-                </a:solidFill>
-                <a:latin typeface="Calibri"/>
-              </a:rPr>
-              <a:t>–   </a:t>
-            </a:r>
-            <a:r>
-              <a:rPr sz="1600" b="1" i="0">
-                <a:solidFill>
-                  <a:srgbClr val="2B2B2B"/>
-                </a:solidFill>
-                <a:latin typeface="Calibri"/>
-              </a:rPr>
-              <a:t>Condición 2 — Verificar todo.</a:t>
-            </a:r>
-            <a:r>
-              <a:rPr sz="1600" b="0" i="0">
-                <a:solidFill>
-                  <a:srgbClr val="2B2B2B"/>
-                </a:solidFill>
-                <a:latin typeface="Calibri"/>
-              </a:rPr>
-              <a:t> Cada dato y cada fuente que sugiera la herramienta se comprueba en el original.</a:t>
-            </a:r>
-          </a:p>
-          <a:p>
-            <a:pPr lvl="1">
-              <a:spcAft>
-                <a:spcPts val="600"/>
-              </a:spcAft>
-            </a:pPr>
-            <a:r>
-              <a:rPr sz="1500" b="0" i="0">
-                <a:solidFill>
-                  <a:srgbClr val="2B2B2B"/>
-                </a:solidFill>
-                <a:latin typeface="Calibri"/>
-              </a:rPr>
-              <a:t>●   Los modelos </a:t>
-            </a:r>
-            <a:r>
-              <a:rPr sz="1500" b="1" i="0">
-                <a:solidFill>
-                  <a:srgbClr val="2B2B2B"/>
-                </a:solidFill>
-                <a:latin typeface="Calibri"/>
-              </a:rPr>
-              <a:t>inventan referencias</a:t>
-            </a:r>
-            <a:r>
-              <a:rPr sz="1500" b="0" i="0">
-                <a:solidFill>
-                  <a:srgbClr val="2B2B2B"/>
-                </a:solidFill>
-                <a:latin typeface="Calibri"/>
-              </a:rPr>
-              <a:t> con apariencia impecable: autor creíble, año creíble, enlace que no existe.</a:t>
-            </a:r>
-          </a:p>
-          <a:p>
-            <a:pPr lvl="1">
-              <a:spcAft>
-                <a:spcPts val="600"/>
-              </a:spcAft>
-            </a:pPr>
-            <a:r>
-              <a:rPr sz="1500" b="0" i="0">
-                <a:solidFill>
-                  <a:srgbClr val="2B2B2B"/>
-                </a:solidFill>
-                <a:latin typeface="Calibri"/>
-              </a:rPr>
-              <a:t>●   Citar una referencia inexistente no es un error de formato: es una fuente falsa dentro de un trabajo académico.</a:t>
-            </a:r>
-          </a:p>
-          <a:p>
-            <a:pPr>
-              <a:spcAft>
-                <a:spcPts val="1000"/>
-              </a:spcAft>
-            </a:pPr>
-            <a:r>
-              <a:rPr sz="1600" b="0" i="0">
-                <a:solidFill>
-                  <a:srgbClr val="2B2B2B"/>
-                </a:solidFill>
-                <a:latin typeface="Calibri"/>
-              </a:rPr>
-              <a:t>–   </a:t>
-            </a:r>
-            <a:r>
-              <a:rPr sz="1600" b="1" i="0">
-                <a:solidFill>
-                  <a:srgbClr val="2B2B2B"/>
-                </a:solidFill>
-                <a:latin typeface="Calibri"/>
-              </a:rPr>
-              <a:t>Condición 3 — La autoría es suya.</a:t>
-            </a:r>
-            <a:r>
-              <a:rPr sz="1600" b="0" i="0">
-                <a:solidFill>
-                  <a:srgbClr val="2B2B2B"/>
-                </a:solidFill>
-                <a:latin typeface="Calibri"/>
-              </a:rPr>
-              <a:t> La decisión, el criterio y la defensa del documento son del equipo.</a:t>
-            </a:r>
-          </a:p>
-          <a:p>
-            <a:pPr lvl="1">
-              <a:spcAft>
-                <a:spcPts val="600"/>
-              </a:spcAft>
-            </a:pPr>
-            <a:r>
-              <a:rPr sz="1500" b="0" i="0">
-                <a:solidFill>
-                  <a:srgbClr val="2B2B2B"/>
-                </a:solidFill>
-                <a:latin typeface="Calibri"/>
-              </a:rPr>
-              <a:t>●   Si no pueden explicar en voz alta un párrafo de su propio anteproyecto, ese párrafo todavía no es suyo.</a:t>
-            </a:r>
-          </a:p>
-          <a:p>
-            <a:pPr>
-              <a:spcAft>
-                <a:spcPts val="1000"/>
-              </a:spcAft>
-            </a:pPr>
-            <a:r>
-              <a:rPr sz="1600" b="0" i="0">
-                <a:solidFill>
-                  <a:srgbClr val="2B2B2B"/>
-                </a:solidFill>
-                <a:latin typeface="Calibri"/>
-              </a:rPr>
-              <a:t>–   Uso sensato: ordenar ideas, mejorar redacción, sugerir ejemplos. Uso inútil: pedirle el trabajo entero.</a:t>
-            </a:r>
-          </a:p>
-        </p:txBody>
-      </p:sp>
-      <p:sp>
-        <p:nvSpPr>
-          <p:cNvPr id="5" name="TextBox 4"/>
+              <a:rPr sz="1300" b="1" i="0">
+                <a:solidFill>
+                  <a:srgbClr val="2B2B2B"/>
+                </a:solidFill>
+                <a:latin typeface="Calibri"/>
+              </a:rPr>
+              <a:t>Plagio es tomar lo ajeno y no decirlo.</a:t>
+            </a:r>
+            <a:r>
+              <a:rPr sz="1300" b="0" i="0">
+                <a:solidFill>
+                  <a:srgbClr val="2B2B2B"/>
+                </a:solidFill>
+                <a:latin typeface="Calibri"/>
+              </a:rPr>
+              <a:t> Cuenta como plagio pegar texto de una fuente sin comillas ni cita, traducir un párrafo ajeno y firmarlo, reusar un trabajo propio de otro semestre como si fuera nuevo, y entregar el documento de otro equipo con la portada cambiada.</a:t>
+            </a:r>
+          </a:p>
+        </p:txBody>
+      </p:sp>
+      <p:sp>
+        <p:nvSpPr>
+          <p:cNvPr id="6" name="Rounded Rectangle 5"/>
+          <p:cNvSpPr/>
+          <p:nvPr/>
+        </p:nvSpPr>
+        <p:spPr>
+          <a:xfrm>
+            <a:off x="640080" y="3447288"/>
+            <a:ext cx="10911535" cy="1225296"/>
+          </a:xfrm>
+          <a:prstGeom prst="roundRect">
+            <a:avLst/>
+          </a:prstGeom>
+          <a:solidFill>
+            <a:srgbClr val="E8F5EC"/>
+          </a:solidFill>
+          <a:ln>
+            <a:noFill/>
+          </a:ln>
+          <a:effectLst/>
+        </p:spPr>
+        <p:style>
+          <a:lnRef idx="1">
+            <a:schemeClr val="accent1"/>
+          </a:lnRef>
+          <a:fillRef idx="3">
+            <a:schemeClr val="accent1"/>
+          </a:fillRef>
+          <a:effectRef idx="2">
+            <a:schemeClr val="accent1"/>
+          </a:effectRef>
+          <a:fontRef idx="minor">
+            <a:schemeClr val="lt1"/>
+          </a:fontRef>
+        </p:style>
+        <p:txBody>
+          <a:bodyPr rtlCol="0" anchor="ctr"/>
+          <a:lstStyle/>
+          <a:p>
+            <a:pPr algn="ctr"/>
+          </a:p>
+        </p:txBody>
+      </p:sp>
+      <p:sp>
+        <p:nvSpPr>
+          <p:cNvPr id="7" name="TextBox 6"/>
           <p:cNvSpPr txBox="1"/>
           <p:nvPr/>
         </p:nvSpPr>
         <p:spPr>
           <a:xfrm>
-            <a:off x="11094415" y="6446520"/>
-            <a:ext cx="548640" cy="274320"/>
+            <a:off x="868680" y="3557016"/>
+            <a:ext cx="10454335" cy="1005840"/>
           </a:xfrm>
           <a:prstGeom prst="rect">
             <a:avLst/>
@@ -5617,29 +5508,115 @@
           </a:bodyPr>
           <a:lstStyle/>
           <a:p>
-            <a:pPr algn="r"/>
-            <a:r>
-              <a:rPr sz="1000" b="1" i="0">
-                <a:solidFill>
-                  <a:srgbClr val="8F989D"/>
-                </a:solidFill>
-                <a:latin typeface="Calibri"/>
-              </a:rPr>
-              <a:t>13</a:t>
-            </a:r>
-          </a:p>
-        </p:txBody>
-      </p:sp>
-      <p:sp>
-        <p:nvSpPr>
-          <p:cNvPr id="6" name="TextBox 5"/>
+            <a:r>
+              <a:rPr sz="1300" b="1" i="0">
+                <a:solidFill>
+                  <a:srgbClr val="0C2340"/>
+                </a:solidFill>
+                <a:latin typeface="Calibri"/>
+              </a:rPr>
+              <a:t>ℹ️ Nota institucional</a:t>
+            </a:r>
+          </a:p>
+          <a:p>
+            <a:pPr>
+              <a:spcBef>
+                <a:spcPts val="400"/>
+              </a:spcBef>
+            </a:pPr>
+            <a:r>
+              <a:rPr sz="1300" b="1" i="0">
+                <a:solidFill>
+                  <a:srgbClr val="2B2B2B"/>
+                </a:solidFill>
+                <a:latin typeface="Calibri"/>
+              </a:rPr>
+              <a:t>Citar no debilita el trabajo: lo sostiene.</a:t>
+            </a:r>
+            <a:r>
+              <a:rPr sz="1300" b="0" i="0">
+                <a:solidFill>
+                  <a:srgbClr val="2B2B2B"/>
+                </a:solidFill>
+                <a:latin typeface="Calibri"/>
+              </a:rPr>
+              <a:t> En este curso se cita en </a:t>
+            </a:r>
+            <a:r>
+              <a:rPr sz="1300" b="1" i="0">
+                <a:solidFill>
+                  <a:srgbClr val="2B2B2B"/>
+                </a:solidFill>
+                <a:latin typeface="Calibri"/>
+              </a:rPr>
+              <a:t>APA 7</a:t>
+            </a:r>
+            <a:r>
+              <a:rPr sz="1300" b="0" i="0">
+                <a:solidFill>
+                  <a:srgbClr val="2B2B2B"/>
+                </a:solidFill>
+                <a:latin typeface="Calibri"/>
+              </a:rPr>
+              <a:t>, dentro del texto y en la lista final de referencias. Una idea que no es suya y no está citada es un problema; esa misma idea citada es un argumento con respaldo.</a:t>
+            </a:r>
+          </a:p>
+        </p:txBody>
+      </p:sp>
+      <p:sp>
+        <p:nvSpPr>
+          <p:cNvPr id="8" name="Rounded Rectangle 7"/>
+          <p:cNvSpPr/>
+          <p:nvPr/>
+        </p:nvSpPr>
+        <p:spPr>
+          <a:xfrm>
+            <a:off x="640080" y="4901184"/>
+            <a:ext cx="10911535" cy="1225296"/>
+          </a:xfrm>
+          <a:prstGeom prst="roundRect">
+            <a:avLst/>
+          </a:prstGeom>
+          <a:solidFill>
+            <a:srgbClr val="FDECD8"/>
+          </a:solidFill>
+          <a:ln>
+            <a:noFill/>
+          </a:ln>
+          <a:effectLst/>
+        </p:spPr>
+        <p:style>
+          <a:lnRef idx="1">
+            <a:schemeClr val="accent1"/>
+          </a:lnRef>
+          <a:fillRef idx="3">
+            <a:schemeClr val="accent1"/>
+          </a:fillRef>
+          <a:effectRef idx="2">
+            <a:schemeClr val="accent1"/>
+          </a:effectRef>
+          <a:fontRef idx="minor">
+            <a:schemeClr val="lt1"/>
+          </a:fontRef>
+        </p:style>
+        <p:txBody>
+          <a:bodyPr rtlCol="0" anchor="ctr"/>
+          <a:lstStyle/>
+          <a:p>
+            <a:pPr algn="ctr"/>
+          </a:p>
+        </p:txBody>
+      </p:sp>
+      <p:sp>
+        <p:nvSpPr>
+          <p:cNvPr id="9" name="TextBox 8"/>
           <p:cNvSpPr txBox="1"/>
           <p:nvPr/>
         </p:nvSpPr>
         <p:spPr>
           <a:xfrm>
-            <a:off x="640080" y="5943600"/>
-            <a:ext cx="9997135" cy="457200"/>
+            <a:off x="868680" y="5010912"/>
+            <a:ext cx="10454335" cy="1005840"/>
           </a:xfrm>
           <a:prstGeom prst="rect">
             <a:avLst/>
@@ -5653,13 +5630,73 @@
           <a:lstStyle/>
           <a:p>
             <a:r>
-              <a:rPr sz="1200" b="0" i="1">
-                <a:solidFill>
-                  <a:srgbClr val="2B2B2B"/>
-                </a:solidFill>
-                <a:latin typeface="Calibri"/>
-              </a:rPr>
-              <a:t>Prueba rápida antes de entregar: abran el documento en cualquier página y explíquenla con sus palabras. Si no pueden, reescríbanla.</a:t>
+              <a:rPr sz="1300" b="1" i="0">
+                <a:solidFill>
+                  <a:srgbClr val="0C2340"/>
+                </a:solidFill>
+                <a:latin typeface="Calibri"/>
+              </a:rPr>
+              <a:t>💡 Aclaración</a:t>
+            </a:r>
+          </a:p>
+          <a:p>
+            <a:pPr>
+              <a:spcBef>
+                <a:spcPts val="400"/>
+              </a:spcBef>
+            </a:pPr>
+            <a:r>
+              <a:rPr sz="1300" b="1" i="0">
+                <a:solidFill>
+                  <a:srgbClr val="2B2B2B"/>
+                </a:solidFill>
+                <a:latin typeface="Calibri"/>
+              </a:rPr>
+              <a:t>Si se detecta, hay debido proceso.</a:t>
+            </a:r>
+            <a:r>
+              <a:rPr sz="1300" b="0" i="0">
+                <a:solidFill>
+                  <a:srgbClr val="2B2B2B"/>
+                </a:solidFill>
+                <a:latin typeface="Calibri"/>
+              </a:rPr>
+              <a:t> No depende del ánimo del Docente: es un procedimiento institucional, con notificación y derecho a descargos. Por eso siempre conviene preguntar antes que improvisar.</a:t>
+            </a:r>
+          </a:p>
+        </p:txBody>
+      </p:sp>
+      <p:sp>
+        <p:nvSpPr>
+          <p:cNvPr id="10" name="TextBox 9"/>
+          <p:cNvSpPr txBox="1"/>
+          <p:nvPr/>
+        </p:nvSpPr>
+        <p:spPr>
+          <a:xfrm>
+            <a:off x="11094415" y="6446520"/>
+            <a:ext cx="548640" cy="274320"/>
+          </a:xfrm>
+          <a:prstGeom prst="rect">
+            <a:avLst/>
+          </a:prstGeom>
+          <a:noFill/>
+        </p:spPr>
+        <p:txBody>
+          <a:bodyPr wrap="square" anchor="t" lIns="0" rIns="0" tIns="0" bIns="0">
+            <a:spAutoFit/>
+          </a:bodyPr>
+          <a:lstStyle/>
+          <a:p>
+            <a:pPr algn="r"/>
+            <a:r>
+              <a:rPr sz="1000" b="1" i="0">
+                <a:solidFill>
+                  <a:srgbClr val="8F989D"/>
+                </a:solidFill>
+                <a:latin typeface="Calibri"/>
+              </a:rPr>
+              <a:t>13</a:t>
             </a:r>
           </a:p>
         </p:txBody>
@@ -5673,6 +5710,421 @@
 </file>
 
 <file path=ppt/slides/slide14.xml><?xml version="1.0" encoding="utf-8"?>
+<p:sld xmlns:a="http://schemas.openxmlformats.org/drawingml/2006/main" xmlns:p="http://schemas.openxmlformats.org/presentationml/2006/main" xmlns:r="http://schemas.openxmlformats.org/officeDocument/2006/relationships">
+  <p:cSld>
+    <p:bg>
+      <p:bgPr>
+        <a:solidFill>
+          <a:srgbClr val="FFFFFF"/>
+        </a:solidFill>
+        <a:effectLst/>
+      </p:bgPr>
+    </p:bg>
+    <p:spTree>
+      <p:nvGrpSpPr>
+        <p:cNvPr id="1" name=""/>
+        <p:cNvGrpSpPr/>
+        <p:nvPr/>
+      </p:nvGrpSpPr>
+      <p:grpSpPr/>
+      <p:sp>
+        <p:nvSpPr>
+          <p:cNvPr id="2" name="Rectangle 1"/>
+          <p:cNvSpPr/>
+          <p:nvPr/>
+        </p:nvSpPr>
+        <p:spPr>
+          <a:xfrm>
+            <a:off x="0" y="0"/>
+            <a:ext cx="12191695" cy="1188720"/>
+          </a:xfrm>
+          <a:prstGeom prst="rect">
+            <a:avLst/>
+          </a:prstGeom>
+          <a:solidFill>
+            <a:srgbClr val="0C2340"/>
+          </a:solidFill>
+          <a:ln>
+            <a:noFill/>
+          </a:ln>
+          <a:effectLst/>
+        </p:spPr>
+        <p:style>
+          <a:lnRef idx="1">
+            <a:schemeClr val="accent1"/>
+          </a:lnRef>
+          <a:fillRef idx="3">
+            <a:schemeClr val="accent1"/>
+          </a:fillRef>
+          <a:effectRef idx="2">
+            <a:schemeClr val="accent1"/>
+          </a:effectRef>
+          <a:fontRef idx="minor">
+            <a:schemeClr val="lt1"/>
+          </a:fontRef>
+        </p:style>
+        <p:txBody>
+          <a:bodyPr rtlCol="0" anchor="ctr"/>
+          <a:lstStyle/>
+          <a:p>
+            <a:pPr algn="ctr"/>
+          </a:p>
+        </p:txBody>
+      </p:sp>
+      <p:sp>
+        <p:nvSpPr>
+          <p:cNvPr id="3" name="TextBox 2"/>
+          <p:cNvSpPr txBox="1"/>
+          <p:nvPr/>
+        </p:nvSpPr>
+        <p:spPr>
+          <a:xfrm>
+            <a:off x="640080" y="0"/>
+            <a:ext cx="9082735" cy="1188720"/>
+          </a:xfrm>
+          <a:prstGeom prst="rect">
+            <a:avLst/>
+          </a:prstGeom>
+          <a:noFill/>
+        </p:spPr>
+        <p:txBody>
+          <a:bodyPr wrap="square" anchor="ctr" lIns="0" rIns="0" tIns="0" bIns="0">
+            <a:spAutoFit/>
+          </a:bodyPr>
+          <a:lstStyle/>
+          <a:p>
+            <a:pPr algn="ctr"/>
+            <a:r>
+              <a:rPr sz="2600" b="1" i="0">
+                <a:solidFill>
+                  <a:srgbClr val="FFFFFF"/>
+                </a:solidFill>
+                <a:latin typeface="Calibri"/>
+              </a:rPr>
+              <a:t>IA generativa: se puede usar, con tres condiciones</a:t>
+            </a:r>
+          </a:p>
+        </p:txBody>
+      </p:sp>
+      <p:sp>
+        <p:nvSpPr>
+          <p:cNvPr id="4" name="TextBox 3"/>
+          <p:cNvSpPr txBox="1"/>
+          <p:nvPr/>
+        </p:nvSpPr>
+        <p:spPr>
+          <a:xfrm>
+            <a:off x="640080" y="1691639"/>
+            <a:ext cx="10911535" cy="4617720"/>
+          </a:xfrm>
+          <a:prstGeom prst="rect">
+            <a:avLst/>
+          </a:prstGeom>
+          <a:noFill/>
+        </p:spPr>
+        <p:txBody>
+          <a:bodyPr wrap="square" anchor="t" lIns="0" rIns="0" tIns="0" bIns="0">
+            <a:spAutoFit/>
+          </a:bodyPr>
+          <a:lstStyle/>
+          <a:p>
+            <a:pPr>
+              <a:spcAft>
+                <a:spcPts val="1000"/>
+              </a:spcAft>
+            </a:pPr>
+            <a:r>
+              <a:rPr sz="1600" b="0" i="0">
+                <a:solidFill>
+                  <a:srgbClr val="2B2B2B"/>
+                </a:solidFill>
+                <a:latin typeface="Calibri"/>
+              </a:rPr>
+              <a:t>–   En este curso </a:t>
+            </a:r>
+            <a:r>
+              <a:rPr sz="1600" b="1" i="0">
+                <a:solidFill>
+                  <a:srgbClr val="2B2B2B"/>
+                </a:solidFill>
+                <a:latin typeface="Calibri"/>
+              </a:rPr>
+              <a:t>no se prohíbe</a:t>
+            </a:r>
+            <a:r>
+              <a:rPr sz="1600" b="0" i="0">
+                <a:solidFill>
+                  <a:srgbClr val="2B2B2B"/>
+                </a:solidFill>
+                <a:latin typeface="Calibri"/>
+              </a:rPr>
+              <a:t> usar IA generativa. Se exige usarla con criterio y decirlo por escrito.</a:t>
+            </a:r>
+          </a:p>
+          <a:p>
+            <a:pPr>
+              <a:spcAft>
+                <a:spcPts val="1000"/>
+              </a:spcAft>
+            </a:pPr>
+            <a:r>
+              <a:rPr sz="1600" b="0" i="0">
+                <a:solidFill>
+                  <a:srgbClr val="2B2B2B"/>
+                </a:solidFill>
+                <a:latin typeface="Calibri"/>
+              </a:rPr>
+              <a:t>–   </a:t>
+            </a:r>
+            <a:r>
+              <a:rPr sz="1600" b="1" i="0">
+                <a:solidFill>
+                  <a:srgbClr val="2B2B2B"/>
+                </a:solidFill>
+                <a:latin typeface="Calibri"/>
+              </a:rPr>
+              <a:t>Condición 1 — Declararla.</a:t>
+            </a:r>
+            <a:r>
+              <a:rPr sz="1600" b="0" i="0">
+                <a:solidFill>
+                  <a:srgbClr val="2B2B2B"/>
+                </a:solidFill>
+                <a:latin typeface="Calibri"/>
+              </a:rPr>
+              <a:t> Una nota al final del documento: qué herramienta usaron y para qué (ideas, redacción, tablas).</a:t>
+            </a:r>
+          </a:p>
+          <a:p>
+            <a:pPr>
+              <a:spcAft>
+                <a:spcPts val="1000"/>
+              </a:spcAft>
+            </a:pPr>
+            <a:r>
+              <a:rPr sz="1600" b="0" i="0">
+                <a:solidFill>
+                  <a:srgbClr val="2B2B2B"/>
+                </a:solidFill>
+                <a:latin typeface="Calibri"/>
+              </a:rPr>
+              <a:t>–   </a:t>
+            </a:r>
+            <a:r>
+              <a:rPr sz="1600" b="1" i="0">
+                <a:solidFill>
+                  <a:srgbClr val="2B2B2B"/>
+                </a:solidFill>
+                <a:latin typeface="Calibri"/>
+              </a:rPr>
+              <a:t>Condición 2 — Verificar todo.</a:t>
+            </a:r>
+            <a:r>
+              <a:rPr sz="1600" b="0" i="0">
+                <a:solidFill>
+                  <a:srgbClr val="2B2B2B"/>
+                </a:solidFill>
+                <a:latin typeface="Calibri"/>
+              </a:rPr>
+              <a:t> Cada dato y cada fuente que sugiera la herramienta se comprueba en el original.</a:t>
+            </a:r>
+          </a:p>
+          <a:p>
+            <a:pPr lvl="1">
+              <a:spcAft>
+                <a:spcPts val="600"/>
+              </a:spcAft>
+            </a:pPr>
+            <a:r>
+              <a:rPr sz="1500" b="0" i="0">
+                <a:solidFill>
+                  <a:srgbClr val="2B2B2B"/>
+                </a:solidFill>
+                <a:latin typeface="Calibri"/>
+              </a:rPr>
+              <a:t>●   Los modelos </a:t>
+            </a:r>
+            <a:r>
+              <a:rPr sz="1500" b="1" i="0">
+                <a:solidFill>
+                  <a:srgbClr val="2B2B2B"/>
+                </a:solidFill>
+                <a:latin typeface="Calibri"/>
+              </a:rPr>
+              <a:t>inventan referencias</a:t>
+            </a:r>
+            <a:r>
+              <a:rPr sz="1500" b="0" i="0">
+                <a:solidFill>
+                  <a:srgbClr val="2B2B2B"/>
+                </a:solidFill>
+                <a:latin typeface="Calibri"/>
+              </a:rPr>
+              <a:t> con apariencia impecable: autor creíble, año creíble, enlace que no existe.</a:t>
+            </a:r>
+          </a:p>
+          <a:p>
+            <a:pPr lvl="1">
+              <a:spcAft>
+                <a:spcPts val="600"/>
+              </a:spcAft>
+            </a:pPr>
+            <a:r>
+              <a:rPr sz="1500" b="0" i="0">
+                <a:solidFill>
+                  <a:srgbClr val="2B2B2B"/>
+                </a:solidFill>
+                <a:latin typeface="Calibri"/>
+              </a:rPr>
+              <a:t>●   Citar una referencia inexistente no es un error de formato: es una fuente falsa dentro de un trabajo académico.</a:t>
+            </a:r>
+          </a:p>
+          <a:p>
+            <a:pPr>
+              <a:spcAft>
+                <a:spcPts val="1000"/>
+              </a:spcAft>
+            </a:pPr>
+            <a:r>
+              <a:rPr sz="1600" b="0" i="0">
+                <a:solidFill>
+                  <a:srgbClr val="2B2B2B"/>
+                </a:solidFill>
+                <a:latin typeface="Calibri"/>
+              </a:rPr>
+              <a:t>–   </a:t>
+            </a:r>
+            <a:r>
+              <a:rPr sz="1600" b="1" i="0">
+                <a:solidFill>
+                  <a:srgbClr val="2B2B2B"/>
+                </a:solidFill>
+                <a:latin typeface="Calibri"/>
+              </a:rPr>
+              <a:t>Condición 3 — La autoría es suya.</a:t>
+            </a:r>
+            <a:r>
+              <a:rPr sz="1600" b="0" i="0">
+                <a:solidFill>
+                  <a:srgbClr val="2B2B2B"/>
+                </a:solidFill>
+                <a:latin typeface="Calibri"/>
+              </a:rPr>
+              <a:t> La decisión, el criterio y la defensa del documento son del equipo.</a:t>
+            </a:r>
+          </a:p>
+          <a:p>
+            <a:pPr lvl="1">
+              <a:spcAft>
+                <a:spcPts val="600"/>
+              </a:spcAft>
+            </a:pPr>
+            <a:r>
+              <a:rPr sz="1500" b="0" i="0">
+                <a:solidFill>
+                  <a:srgbClr val="2B2B2B"/>
+                </a:solidFill>
+                <a:latin typeface="Calibri"/>
+              </a:rPr>
+              <a:t>●   Si no pueden explicar en voz alta un párrafo de su propio anteproyecto, ese párrafo todavía no es suyo.</a:t>
+            </a:r>
+          </a:p>
+          <a:p>
+            <a:pPr>
+              <a:spcAft>
+                <a:spcPts val="1000"/>
+              </a:spcAft>
+            </a:pPr>
+            <a:r>
+              <a:rPr sz="1600" b="0" i="0">
+                <a:solidFill>
+                  <a:srgbClr val="2B2B2B"/>
+                </a:solidFill>
+                <a:latin typeface="Calibri"/>
+              </a:rPr>
+              <a:t>–   Uso sensato: ordenar ideas, mejorar redacción, sugerir ejemplos. Uso inútil: pedirle el trabajo entero.</a:t>
+            </a:r>
+          </a:p>
+        </p:txBody>
+      </p:sp>
+      <p:sp>
+        <p:nvSpPr>
+          <p:cNvPr id="5" name="TextBox 4"/>
+          <p:cNvSpPr txBox="1"/>
+          <p:nvPr/>
+        </p:nvSpPr>
+        <p:spPr>
+          <a:xfrm>
+            <a:off x="11094415" y="6446520"/>
+            <a:ext cx="548640" cy="274320"/>
+          </a:xfrm>
+          <a:prstGeom prst="rect">
+            <a:avLst/>
+          </a:prstGeom>
+          <a:noFill/>
+        </p:spPr>
+        <p:txBody>
+          <a:bodyPr wrap="square" anchor="t" lIns="0" rIns="0" tIns="0" bIns="0">
+            <a:spAutoFit/>
+          </a:bodyPr>
+          <a:lstStyle/>
+          <a:p>
+            <a:pPr algn="r"/>
+            <a:r>
+              <a:rPr sz="1000" b="1" i="0">
+                <a:solidFill>
+                  <a:srgbClr val="8F989D"/>
+                </a:solidFill>
+                <a:latin typeface="Calibri"/>
+              </a:rPr>
+              <a:t>14</a:t>
+            </a:r>
+          </a:p>
+        </p:txBody>
+      </p:sp>
+      <p:sp>
+        <p:nvSpPr>
+          <p:cNvPr id="6" name="TextBox 5"/>
+          <p:cNvSpPr txBox="1"/>
+          <p:nvPr/>
+        </p:nvSpPr>
+        <p:spPr>
+          <a:xfrm>
+            <a:off x="640080" y="5943600"/>
+            <a:ext cx="9997135" cy="457200"/>
+          </a:xfrm>
+          <a:prstGeom prst="rect">
+            <a:avLst/>
+          </a:prstGeom>
+          <a:noFill/>
+        </p:spPr>
+        <p:txBody>
+          <a:bodyPr wrap="square" anchor="t" lIns="0" rIns="0" tIns="0" bIns="0">
+            <a:spAutoFit/>
+          </a:bodyPr>
+          <a:lstStyle/>
+          <a:p>
+            <a:r>
+              <a:rPr sz="1200" b="0" i="1">
+                <a:solidFill>
+                  <a:srgbClr val="2B2B2B"/>
+                </a:solidFill>
+                <a:latin typeface="Calibri"/>
+              </a:rPr>
+              <a:t>Prueba rápida antes de entregar: abran el documento en cualquier página y explíquenla con sus palabras. Si no pueden, reescríbanla.</a:t>
+            </a:r>
+          </a:p>
+        </p:txBody>
+      </p:sp>
+    </p:spTree>
+  </p:cSld>
+  <p:clrMapOvr>
+    <a:masterClrMapping/>
+  </p:clrMapOvr>
+</p:sld>
+</file>
+
+<file path=ppt/slides/slide15.xml><?xml version="1.0" encoding="utf-8"?>
 <p:sld xmlns:a="http://schemas.openxmlformats.org/drawingml/2006/main" xmlns:p="http://schemas.openxmlformats.org/presentationml/2006/main" xmlns:r="http://schemas.openxmlformats.org/officeDocument/2006/relationships">
   <p:cSld>
     <p:bg>
@@ -6288,492 +6740,7 @@
                 </a:solidFill>
                 <a:latin typeface="Calibri"/>
               </a:rPr>
-              <a:t>14</a:t>
-            </a:r>
-          </a:p>
-        </p:txBody>
-      </p:sp>
-    </p:spTree>
-  </p:cSld>
-  <p:clrMapOvr>
-    <a:masterClrMapping/>
-  </p:clrMapOvr>
-</p:sld>
-</file>
-
-<file path=ppt/slides/slide15.xml><?xml version="1.0" encoding="utf-8"?>
-<p:sld xmlns:a="http://schemas.openxmlformats.org/drawingml/2006/main" xmlns:p="http://schemas.openxmlformats.org/presentationml/2006/main" xmlns:r="http://schemas.openxmlformats.org/officeDocument/2006/relationships">
-  <p:cSld>
-    <p:bg>
-      <p:bgPr>
-        <a:solidFill>
-          <a:srgbClr val="FFFFFF"/>
-        </a:solidFill>
-        <a:effectLst/>
-      </p:bgPr>
-    </p:bg>
-    <p:spTree>
-      <p:nvGrpSpPr>
-        <p:cNvPr id="1" name=""/>
-        <p:cNvGrpSpPr/>
-        <p:nvPr/>
-      </p:nvGrpSpPr>
-      <p:grpSpPr/>
-      <p:sp>
-        <p:nvSpPr>
-          <p:cNvPr id="2" name="Rectangle 1"/>
-          <p:cNvSpPr/>
-          <p:nvPr/>
-        </p:nvSpPr>
-        <p:spPr>
-          <a:xfrm>
-            <a:off x="0" y="0"/>
-            <a:ext cx="12191695" cy="1188720"/>
-          </a:xfrm>
-          <a:prstGeom prst="rect">
-            <a:avLst/>
-          </a:prstGeom>
-          <a:solidFill>
-            <a:srgbClr val="0C2340"/>
-          </a:solidFill>
-          <a:ln>
-            <a:noFill/>
-          </a:ln>
-          <a:effectLst/>
-        </p:spPr>
-        <p:style>
-          <a:lnRef idx="1">
-            <a:schemeClr val="accent1"/>
-          </a:lnRef>
-          <a:fillRef idx="3">
-            <a:schemeClr val="accent1"/>
-          </a:fillRef>
-          <a:effectRef idx="2">
-            <a:schemeClr val="accent1"/>
-          </a:effectRef>
-          <a:fontRef idx="minor">
-            <a:schemeClr val="lt1"/>
-          </a:fontRef>
-        </p:style>
-        <p:txBody>
-          <a:bodyPr rtlCol="0" anchor="ctr"/>
-          <a:lstStyle/>
-          <a:p>
-            <a:pPr algn="ctr"/>
-          </a:p>
-        </p:txBody>
-      </p:sp>
-      <p:sp>
-        <p:nvSpPr>
-          <p:cNvPr id="3" name="TextBox 2"/>
-          <p:cNvSpPr txBox="1"/>
-          <p:nvPr/>
-        </p:nvSpPr>
-        <p:spPr>
-          <a:xfrm>
-            <a:off x="640080" y="0"/>
-            <a:ext cx="9082735" cy="1188720"/>
-          </a:xfrm>
-          <a:prstGeom prst="rect">
-            <a:avLst/>
-          </a:prstGeom>
-          <a:noFill/>
-        </p:spPr>
-        <p:txBody>
-          <a:bodyPr wrap="square" anchor="ctr" lIns="0" rIns="0" tIns="0" bIns="0">
-            <a:spAutoFit/>
-          </a:bodyPr>
-          <a:lstStyle/>
-          <a:p>
-            <a:pPr algn="ctr"/>
-            <a:r>
-              <a:rPr sz="2600" b="1" i="0">
-                <a:solidFill>
-                  <a:srgbClr val="FFFFFF"/>
-                </a:solidFill>
-                <a:latin typeface="Calibri"/>
-              </a:rPr>
-              <a:t>Cómo pedir ayuda: canales, tutorías y tiempos de respuesta</a:t>
-            </a:r>
-          </a:p>
-        </p:txBody>
-      </p:sp>
-      <p:sp>
-        <p:nvSpPr>
-          <p:cNvPr id="4" name="TextBox 3"/>
-          <p:cNvSpPr txBox="1"/>
-          <p:nvPr/>
-        </p:nvSpPr>
-        <p:spPr>
-          <a:xfrm>
-            <a:off x="640080" y="1691639"/>
-            <a:ext cx="10911535" cy="4617720"/>
-          </a:xfrm>
-          <a:prstGeom prst="rect">
-            <a:avLst/>
-          </a:prstGeom>
-          <a:noFill/>
-        </p:spPr>
-        <p:txBody>
-          <a:bodyPr wrap="square" anchor="t" lIns="0" rIns="0" tIns="0" bIns="0">
-            <a:spAutoFit/>
-          </a:bodyPr>
-          <a:lstStyle/>
-          <a:p>
-            <a:pPr>
-              <a:spcAft>
-                <a:spcPts val="1000"/>
-              </a:spcAft>
-            </a:pPr>
-            <a:r>
-              <a:rPr sz="1600" b="0" i="0">
-                <a:solidFill>
-                  <a:srgbClr val="2B2B2B"/>
-                </a:solidFill>
-                <a:latin typeface="Calibri"/>
-              </a:rPr>
-              <a:t>–   </a:t>
-            </a:r>
-            <a:r>
-              <a:rPr sz="1600" b="1" i="0">
-                <a:solidFill>
-                  <a:srgbClr val="2B2B2B"/>
-                </a:solidFill>
-                <a:latin typeface="Calibri"/>
-              </a:rPr>
-              <a:t>En clase:</a:t>
-            </a:r>
-            <a:r>
-              <a:rPr sz="1600" b="0" i="0">
-                <a:solidFill>
-                  <a:srgbClr val="2B2B2B"/>
-                </a:solidFill>
-                <a:latin typeface="Calibri"/>
-              </a:rPr>
-              <a:t> la segunda hora es tutoría en vivo. Es el canal más rápido y ya está dentro de su horario.</a:t>
-            </a:r>
-          </a:p>
-          <a:p>
-            <a:pPr>
-              <a:spcAft>
-                <a:spcPts val="1000"/>
-              </a:spcAft>
-            </a:pPr>
-            <a:r>
-              <a:rPr sz="1600" b="0" i="0">
-                <a:solidFill>
-                  <a:srgbClr val="2B2B2B"/>
-                </a:solidFill>
-                <a:latin typeface="Calibri"/>
-              </a:rPr>
-              <a:t>–   </a:t>
-            </a:r>
-            <a:r>
-              <a:rPr sz="1600" b="1" i="0">
-                <a:solidFill>
-                  <a:srgbClr val="2B2B2B"/>
-                </a:solidFill>
-                <a:latin typeface="Calibri"/>
-              </a:rPr>
-              <a:t>Tutorías por equipo:</a:t>
-            </a:r>
-            <a:r>
-              <a:rPr sz="1600" b="0" i="0">
-                <a:solidFill>
-                  <a:srgbClr val="2B2B2B"/>
-                </a:solidFill>
-                <a:latin typeface="Calibri"/>
-              </a:rPr>
-              <a:t> se </a:t>
-            </a:r>
-            <a:r>
-              <a:rPr sz="1600" b="1" i="0">
-                <a:solidFill>
-                  <a:srgbClr val="2B2B2B"/>
-                </a:solidFill>
-                <a:latin typeface="Calibri"/>
-              </a:rPr>
-              <a:t>acuerdan en la semana</a:t>
-            </a:r>
-            <a:r>
-              <a:rPr sz="1600" b="0" i="0">
-                <a:solidFill>
-                  <a:srgbClr val="2B2B2B"/>
-                </a:solidFill>
-                <a:latin typeface="Calibri"/>
-              </a:rPr>
-              <a:t> con el Docente. No hay atención espontánea sin cita.</a:t>
-            </a:r>
-          </a:p>
-          <a:p>
-            <a:pPr lvl="1">
-              <a:spcAft>
-                <a:spcPts val="600"/>
-              </a:spcAft>
-            </a:pPr>
-            <a:r>
-              <a:rPr sz="1500" b="0" i="0">
-                <a:solidFill>
-                  <a:srgbClr val="2B2B2B"/>
-                </a:solidFill>
-                <a:latin typeface="Calibri"/>
-              </a:rPr>
-              <a:t>●   Al pedirla, digan qué necesitan y qué tienen escrito; se agenda y se atiende con el documento abierto.</a:t>
-            </a:r>
-          </a:p>
-          <a:p>
-            <a:pPr>
-              <a:spcAft>
-                <a:spcPts val="1000"/>
-              </a:spcAft>
-            </a:pPr>
-            <a:r>
-              <a:rPr sz="1600" b="0" i="0">
-                <a:solidFill>
-                  <a:srgbClr val="2B2B2B"/>
-                </a:solidFill>
-                <a:latin typeface="Calibri"/>
-              </a:rPr>
-              <a:t>–   </a:t>
-            </a:r>
-            <a:r>
-              <a:rPr sz="1600" b="1" i="0">
-                <a:solidFill>
-                  <a:srgbClr val="2B2B2B"/>
-                </a:solidFill>
-                <a:latin typeface="Calibri"/>
-              </a:rPr>
-              <a:t>Cada estudiante que asiste a tutoría registra su asistencia</a:t>
-            </a:r>
-            <a:r>
-              <a:rPr sz="1600" b="0" i="0">
-                <a:solidFill>
-                  <a:srgbClr val="2B2B2B"/>
-                </a:solidFill>
-                <a:latin typeface="Calibri"/>
-              </a:rPr>
-              <a:t> en el formulario del curso:</a:t>
-            </a:r>
-          </a:p>
-          <a:p>
-            <a:pPr lvl="1">
-              <a:spcAft>
-                <a:spcPts val="600"/>
-              </a:spcAft>
-            </a:pPr>
-            <a:r>
-              <a:rPr sz="1500" b="0" i="0">
-                <a:solidFill>
-                  <a:srgbClr val="2B2B2B"/>
-                </a:solidFill>
-                <a:latin typeface="Calibri"/>
-              </a:rPr>
-              <a:t>●   </a:t>
-            </a:r>
-            <a:r>
-              <a:rPr sz="1500" b="1" i="0">
-                <a:solidFill>
-                  <a:srgbClr val="2B2B2B"/>
-                </a:solidFill>
-                <a:latin typeface="Calibri"/>
-              </a:rPr>
-              <a:t>https://forms.gle/oZ8xCYiUo3KEWr1d9</a:t>
-            </a:r>
-            <a:r>
-              <a:rPr sz="1500" b="0" i="0">
-                <a:solidFill>
-                  <a:srgbClr val="2B2B2B"/>
-                </a:solidFill>
-                <a:latin typeface="Calibri"/>
-              </a:rPr>
-              <a:t> — también queda publicado en CDigital.</a:t>
-            </a:r>
-          </a:p>
-          <a:p>
-            <a:pPr lvl="1">
-              <a:spcAft>
-                <a:spcPts val="600"/>
-              </a:spcAft>
-            </a:pPr>
-            <a:r>
-              <a:rPr sz="1500" b="0" i="0">
-                <a:solidFill>
-                  <a:srgbClr val="2B2B2B"/>
-                </a:solidFill>
-                <a:latin typeface="Calibri"/>
-              </a:rPr>
-              <a:t>●   Ese registro es </a:t>
-            </a:r>
-            <a:r>
-              <a:rPr sz="1500" b="1" i="0">
-                <a:solidFill>
-                  <a:srgbClr val="2B2B2B"/>
-                </a:solidFill>
-                <a:latin typeface="Calibri"/>
-              </a:rPr>
-              <a:t>su evidencia</a:t>
-            </a:r>
-            <a:r>
-              <a:rPr sz="1500" b="0" i="0">
-                <a:solidFill>
-                  <a:srgbClr val="2B2B2B"/>
-                </a:solidFill>
-                <a:latin typeface="Calibri"/>
-              </a:rPr>
-              <a:t> de acompañamiento ante el programa: sin registro, la tutoría no consta.</a:t>
-            </a:r>
-          </a:p>
-          <a:p>
-            <a:pPr>
-              <a:spcAft>
-                <a:spcPts val="1000"/>
-              </a:spcAft>
-            </a:pPr>
-            <a:r>
-              <a:rPr sz="1600" b="0" i="0">
-                <a:solidFill>
-                  <a:srgbClr val="2B2B2B"/>
-                </a:solidFill>
-                <a:latin typeface="Calibri"/>
-              </a:rPr>
-              <a:t>–   </a:t>
-            </a:r>
-            <a:r>
-              <a:rPr sz="1600" b="1" i="0">
-                <a:solidFill>
-                  <a:srgbClr val="2B2B2B"/>
-                </a:solidFill>
-                <a:latin typeface="Calibri"/>
-              </a:rPr>
-              <a:t>Foro y mensajería de CDigital:</a:t>
-            </a:r>
-            <a:r>
-              <a:rPr sz="1600" b="0" i="0">
-                <a:solidFill>
-                  <a:srgbClr val="2B2B2B"/>
-                </a:solidFill>
-                <a:latin typeface="Calibri"/>
-              </a:rPr>
-              <a:t> para dudas que le sirven a todo el curso. Respuesta en días hábiles.</a:t>
-            </a:r>
-          </a:p>
-          <a:p>
-            <a:pPr>
-              <a:spcAft>
-                <a:spcPts val="1000"/>
-              </a:spcAft>
-            </a:pPr>
-            <a:r>
-              <a:rPr sz="1600" b="0" i="0">
-                <a:solidFill>
-                  <a:srgbClr val="2B2B2B"/>
-                </a:solidFill>
-                <a:latin typeface="Calibri"/>
-              </a:rPr>
-              <a:t>–   </a:t>
-            </a:r>
-            <a:r>
-              <a:rPr sz="1600" b="1" i="0">
-                <a:solidFill>
-                  <a:srgbClr val="2B2B2B"/>
-                </a:solidFill>
-                <a:latin typeface="Calibri"/>
-              </a:rPr>
-              <a:t>Antes de preguntar:</a:t>
-            </a:r>
-            <a:r>
-              <a:rPr sz="1600" b="0" i="0">
-                <a:solidFill>
-                  <a:srgbClr val="2B2B2B"/>
-                </a:solidFill>
-                <a:latin typeface="Calibri"/>
-              </a:rPr>
-              <a:t> revisen el enunciado del corte y la plantilla. La mitad de las dudas ya está resuelta ahí.</a:t>
-            </a:r>
-          </a:p>
-          <a:p>
-            <a:pPr>
-              <a:spcAft>
-                <a:spcPts val="1000"/>
-              </a:spcAft>
-            </a:pPr>
-            <a:r>
-              <a:rPr sz="1600" b="0" i="0">
-                <a:solidFill>
-                  <a:srgbClr val="2B2B2B"/>
-                </a:solidFill>
-                <a:latin typeface="Calibri"/>
-              </a:rPr>
-              <a:t>–   Pregunta bien hecha = sección concreta + qué intentaron + qué no les cuadra. «No entendí nada» no se puede responder.</a:t>
-            </a:r>
-          </a:p>
-        </p:txBody>
-      </p:sp>
-      <p:sp>
-        <p:nvSpPr>
-          <p:cNvPr id="5" name="TextBox 4"/>
-          <p:cNvSpPr txBox="1"/>
-          <p:nvPr/>
-        </p:nvSpPr>
-        <p:spPr>
-          <a:xfrm>
-            <a:off x="11094415" y="6446520"/>
-            <a:ext cx="548640" cy="274320"/>
-          </a:xfrm>
-          <a:prstGeom prst="rect">
-            <a:avLst/>
-          </a:prstGeom>
-          <a:noFill/>
-        </p:spPr>
-        <p:txBody>
-          <a:bodyPr wrap="square" anchor="t" lIns="0" rIns="0" tIns="0" bIns="0">
-            <a:spAutoFit/>
-          </a:bodyPr>
-          <a:lstStyle/>
-          <a:p>
-            <a:pPr algn="r"/>
-            <a:r>
-              <a:rPr sz="1000" b="1" i="0">
-                <a:solidFill>
-                  <a:srgbClr val="8F989D"/>
-                </a:solidFill>
-                <a:latin typeface="Calibri"/>
-              </a:rPr>
               <a:t>15</a:t>
-            </a:r>
-          </a:p>
-        </p:txBody>
-      </p:sp>
-      <p:sp>
-        <p:nvSpPr>
-          <p:cNvPr id="6" name="TextBox 5"/>
-          <p:cNvSpPr txBox="1"/>
-          <p:nvPr/>
-        </p:nvSpPr>
-        <p:spPr>
-          <a:xfrm>
-            <a:off x="640080" y="5943600"/>
-            <a:ext cx="9997135" cy="457200"/>
-          </a:xfrm>
-          <a:prstGeom prst="rect">
-            <a:avLst/>
-          </a:prstGeom>
-          <a:noFill/>
-        </p:spPr>
-        <p:txBody>
-          <a:bodyPr wrap="square" anchor="t" lIns="0" rIns="0" tIns="0" bIns="0">
-            <a:spAutoFit/>
-          </a:bodyPr>
-          <a:lstStyle/>
-          <a:p>
-            <a:r>
-              <a:rPr sz="1200" b="0" i="1">
-                <a:solidFill>
-                  <a:srgbClr val="2B2B2B"/>
-                </a:solidFill>
-                <a:latin typeface="Calibri"/>
-              </a:rPr>
-              <a:t>Las tutorías por grupo se acuerdan en la semana con el Docente (no hay atención espontánea sin cita).</a:t>
             </a:r>
           </a:p>
         </p:txBody>
@@ -6878,65 +6845,21 @@
                 </a:solidFill>
                 <a:latin typeface="Calibri"/>
               </a:rPr>
-              <a:t>Acuerdos de convivencia del encuentro</a:t>
-            </a:r>
-          </a:p>
-        </p:txBody>
-      </p:sp>
-      <p:sp>
-        <p:nvSpPr>
-          <p:cNvPr id="4" name="Rounded Rectangle 3"/>
-          <p:cNvSpPr/>
-          <p:nvPr/>
-        </p:nvSpPr>
-        <p:spPr>
-          <a:xfrm>
-            <a:off x="640080" y="1737360"/>
-            <a:ext cx="10911535" cy="1225296"/>
-          </a:xfrm>
-          <a:prstGeom prst="roundRect">
-            <a:avLst/>
-          </a:prstGeom>
-          <a:solidFill>
-            <a:srgbClr val="E8F5EC"/>
-          </a:solidFill>
-          <a:ln>
-            <a:noFill/>
-          </a:ln>
-          <a:effectLst/>
-        </p:spPr>
-        <p:style>
-          <a:lnRef idx="1">
-            <a:schemeClr val="accent1"/>
-          </a:lnRef>
-          <a:fillRef idx="3">
-            <a:schemeClr val="accent1"/>
-          </a:fillRef>
-          <a:effectRef idx="2">
-            <a:schemeClr val="accent1"/>
-          </a:effectRef>
-          <a:fontRef idx="minor">
-            <a:schemeClr val="lt1"/>
-          </a:fontRef>
-        </p:style>
-        <p:txBody>
-          <a:bodyPr rtlCol="0" anchor="ctr"/>
-          <a:lstStyle/>
-          <a:p>
-            <a:pPr algn="ctr"/>
-          </a:p>
-        </p:txBody>
-      </p:sp>
-      <p:sp>
-        <p:nvSpPr>
-          <p:cNvPr id="5" name="TextBox 4"/>
+              <a:t>Cómo pedir ayuda: canales, tutorías y tiempos de respuesta</a:t>
+            </a:r>
+          </a:p>
+        </p:txBody>
+      </p:sp>
+      <p:sp>
+        <p:nvSpPr>
+          <p:cNvPr id="4" name="TextBox 3"/>
           <p:cNvSpPr txBox="1"/>
           <p:nvPr/>
         </p:nvSpPr>
         <p:spPr>
           <a:xfrm>
-            <a:off x="868680" y="1847088"/>
-            <a:ext cx="10454335" cy="1005840"/>
+            <a:off x="640080" y="1691639"/>
+            <a:ext cx="10911535" cy="4617720"/>
           </a:xfrm>
           <a:prstGeom prst="rect">
             <a:avLst/>
@@ -6949,97 +6872,305 @@
           </a:bodyPr>
           <a:lstStyle/>
           <a:p>
-            <a:r>
-              <a:rPr sz="1300" b="1" i="0">
-                <a:solidFill>
-                  <a:srgbClr val="0C2340"/>
-                </a:solidFill>
-                <a:latin typeface="Calibri"/>
-              </a:rPr>
-              <a:t>ℹ️ Nota institucional</a:t>
-            </a:r>
-          </a:p>
-          <a:p>
             <a:pPr>
-              <a:spcBef>
-                <a:spcPts val="400"/>
-              </a:spcBef>
+              <a:spcAft>
+                <a:spcPts val="1000"/>
+              </a:spcAft>
             </a:pPr>
             <a:r>
-              <a:rPr sz="1300" b="1" i="0">
-                <a:solidFill>
-                  <a:srgbClr val="2B2B2B"/>
-                </a:solidFill>
-                <a:latin typeface="Calibri"/>
-              </a:rPr>
-              <a:t>Puntualidad y cámara.</a:t>
-            </a:r>
-            <a:r>
-              <a:rPr sz="1300" b="0" i="0">
-                <a:solidFill>
-                  <a:srgbClr val="2B2B2B"/>
-                </a:solidFill>
-                <a:latin typeface="Calibri"/>
-              </a:rPr>
-              <a:t> Empezamos a la hora en punto. Cámara encendida al menos en la presentación y en la tutoría de su equipo: revisar un avance a ciegas no funciona. Micrófono en silencio mientras alguien expone.</a:t>
-            </a:r>
-          </a:p>
-        </p:txBody>
-      </p:sp>
-      <p:sp>
-        <p:nvSpPr>
-          <p:cNvPr id="6" name="Rounded Rectangle 5"/>
-          <p:cNvSpPr/>
-          <p:nvPr/>
-        </p:nvSpPr>
-        <p:spPr>
-          <a:xfrm>
-            <a:off x="640080" y="3191256"/>
-            <a:ext cx="10911535" cy="1225296"/>
-          </a:xfrm>
-          <a:prstGeom prst="roundRect">
-            <a:avLst/>
-          </a:prstGeom>
-          <a:solidFill>
-            <a:srgbClr val="FDECD8"/>
-          </a:solidFill>
-          <a:ln>
-            <a:noFill/>
-          </a:ln>
-          <a:effectLst/>
-        </p:spPr>
-        <p:style>
-          <a:lnRef idx="1">
-            <a:schemeClr val="accent1"/>
-          </a:lnRef>
-          <a:fillRef idx="3">
-            <a:schemeClr val="accent1"/>
-          </a:fillRef>
-          <a:effectRef idx="2">
-            <a:schemeClr val="accent1"/>
-          </a:effectRef>
-          <a:fontRef idx="minor">
-            <a:schemeClr val="lt1"/>
-          </a:fontRef>
-        </p:style>
-        <p:txBody>
-          <a:bodyPr rtlCol="0" anchor="ctr"/>
-          <a:lstStyle/>
-          <a:p>
-            <a:pPr algn="ctr"/>
-          </a:p>
-        </p:txBody>
-      </p:sp>
-      <p:sp>
-        <p:nvSpPr>
-          <p:cNvPr id="7" name="TextBox 6"/>
+              <a:rPr sz="1600" b="0" i="0">
+                <a:solidFill>
+                  <a:srgbClr val="2B2B2B"/>
+                </a:solidFill>
+                <a:latin typeface="Calibri"/>
+              </a:rPr>
+              <a:t>–   </a:t>
+            </a:r>
+            <a:r>
+              <a:rPr sz="1600" b="1" i="0">
+                <a:solidFill>
+                  <a:srgbClr val="2B2B2B"/>
+                </a:solidFill>
+                <a:latin typeface="Calibri"/>
+              </a:rPr>
+              <a:t>En clase:</a:t>
+            </a:r>
+            <a:r>
+              <a:rPr sz="1600" b="0" i="0">
+                <a:solidFill>
+                  <a:srgbClr val="2B2B2B"/>
+                </a:solidFill>
+                <a:latin typeface="Calibri"/>
+              </a:rPr>
+              <a:t> la segunda hora es tutoría en vivo. Es el canal más rápido y ya está dentro de su horario.</a:t>
+            </a:r>
+          </a:p>
+          <a:p>
+            <a:pPr>
+              <a:spcAft>
+                <a:spcPts val="1000"/>
+              </a:spcAft>
+            </a:pPr>
+            <a:r>
+              <a:rPr sz="1600" b="0" i="0">
+                <a:solidFill>
+                  <a:srgbClr val="2B2B2B"/>
+                </a:solidFill>
+                <a:latin typeface="Calibri"/>
+              </a:rPr>
+              <a:t>–   </a:t>
+            </a:r>
+            <a:r>
+              <a:rPr sz="1600" b="1" i="0">
+                <a:solidFill>
+                  <a:srgbClr val="2B2B2B"/>
+                </a:solidFill>
+                <a:latin typeface="Calibri"/>
+              </a:rPr>
+              <a:t>Tutorías por equipo:</a:t>
+            </a:r>
+            <a:r>
+              <a:rPr sz="1600" b="0" i="0">
+                <a:solidFill>
+                  <a:srgbClr val="2B2B2B"/>
+                </a:solidFill>
+                <a:latin typeface="Calibri"/>
+              </a:rPr>
+              <a:t> se </a:t>
+            </a:r>
+            <a:r>
+              <a:rPr sz="1600" b="1" i="0">
+                <a:solidFill>
+                  <a:srgbClr val="2B2B2B"/>
+                </a:solidFill>
+                <a:latin typeface="Calibri"/>
+              </a:rPr>
+              <a:t>acuerdan en la semana</a:t>
+            </a:r>
+            <a:r>
+              <a:rPr sz="1600" b="0" i="0">
+                <a:solidFill>
+                  <a:srgbClr val="2B2B2B"/>
+                </a:solidFill>
+                <a:latin typeface="Calibri"/>
+              </a:rPr>
+              <a:t> con el Docente. No hay atención espontánea sin cita.</a:t>
+            </a:r>
+          </a:p>
+          <a:p>
+            <a:pPr lvl="1">
+              <a:spcAft>
+                <a:spcPts val="600"/>
+              </a:spcAft>
+            </a:pPr>
+            <a:r>
+              <a:rPr sz="1500" b="0" i="0">
+                <a:solidFill>
+                  <a:srgbClr val="2B2B2B"/>
+                </a:solidFill>
+                <a:latin typeface="Calibri"/>
+              </a:rPr>
+              <a:t>●   Al pedirla, digan qué necesitan y qué tienen escrito; se agenda y se atiende con el documento abierto.</a:t>
+            </a:r>
+          </a:p>
+          <a:p>
+            <a:pPr>
+              <a:spcAft>
+                <a:spcPts val="1000"/>
+              </a:spcAft>
+            </a:pPr>
+            <a:r>
+              <a:rPr sz="1600" b="0" i="0">
+                <a:solidFill>
+                  <a:srgbClr val="2B2B2B"/>
+                </a:solidFill>
+                <a:latin typeface="Calibri"/>
+              </a:rPr>
+              <a:t>–   </a:t>
+            </a:r>
+            <a:r>
+              <a:rPr sz="1600" b="1" i="0">
+                <a:solidFill>
+                  <a:srgbClr val="2B2B2B"/>
+                </a:solidFill>
+                <a:latin typeface="Calibri"/>
+              </a:rPr>
+              <a:t>Cada estudiante que asiste a tutoría registra su asistencia</a:t>
+            </a:r>
+            <a:r>
+              <a:rPr sz="1600" b="0" i="0">
+                <a:solidFill>
+                  <a:srgbClr val="2B2B2B"/>
+                </a:solidFill>
+                <a:latin typeface="Calibri"/>
+              </a:rPr>
+              <a:t> en el formulario del curso:</a:t>
+            </a:r>
+          </a:p>
+          <a:p>
+            <a:pPr lvl="1">
+              <a:spcAft>
+                <a:spcPts val="600"/>
+              </a:spcAft>
+            </a:pPr>
+            <a:r>
+              <a:rPr sz="1500" b="0" i="0">
+                <a:solidFill>
+                  <a:srgbClr val="2B2B2B"/>
+                </a:solidFill>
+                <a:latin typeface="Calibri"/>
+              </a:rPr>
+              <a:t>●   </a:t>
+            </a:r>
+            <a:r>
+              <a:rPr sz="1500" b="1" i="0">
+                <a:solidFill>
+                  <a:srgbClr val="2B2B2B"/>
+                </a:solidFill>
+                <a:latin typeface="Calibri"/>
+              </a:rPr>
+              <a:t>https://forms.gle/oZ8xCYiUo3KEWr1d9</a:t>
+            </a:r>
+            <a:r>
+              <a:rPr sz="1500" b="0" i="0">
+                <a:solidFill>
+                  <a:srgbClr val="2B2B2B"/>
+                </a:solidFill>
+                <a:latin typeface="Calibri"/>
+              </a:rPr>
+              <a:t> — también queda publicado en CDigital.</a:t>
+            </a:r>
+          </a:p>
+          <a:p>
+            <a:pPr lvl="1">
+              <a:spcAft>
+                <a:spcPts val="600"/>
+              </a:spcAft>
+            </a:pPr>
+            <a:r>
+              <a:rPr sz="1500" b="0" i="0">
+                <a:solidFill>
+                  <a:srgbClr val="2B2B2B"/>
+                </a:solidFill>
+                <a:latin typeface="Calibri"/>
+              </a:rPr>
+              <a:t>●   Ese registro es </a:t>
+            </a:r>
+            <a:r>
+              <a:rPr sz="1500" b="1" i="0">
+                <a:solidFill>
+                  <a:srgbClr val="2B2B2B"/>
+                </a:solidFill>
+                <a:latin typeface="Calibri"/>
+              </a:rPr>
+              <a:t>su evidencia</a:t>
+            </a:r>
+            <a:r>
+              <a:rPr sz="1500" b="0" i="0">
+                <a:solidFill>
+                  <a:srgbClr val="2B2B2B"/>
+                </a:solidFill>
+                <a:latin typeface="Calibri"/>
+              </a:rPr>
+              <a:t> de acompañamiento ante el programa: sin registro, la tutoría no consta.</a:t>
+            </a:r>
+          </a:p>
+          <a:p>
+            <a:pPr>
+              <a:spcAft>
+                <a:spcPts val="1000"/>
+              </a:spcAft>
+            </a:pPr>
+            <a:r>
+              <a:rPr sz="1600" b="0" i="0">
+                <a:solidFill>
+                  <a:srgbClr val="2B2B2B"/>
+                </a:solidFill>
+                <a:latin typeface="Calibri"/>
+              </a:rPr>
+              <a:t>–   </a:t>
+            </a:r>
+            <a:r>
+              <a:rPr sz="1600" b="1" i="0">
+                <a:solidFill>
+                  <a:srgbClr val="2B2B2B"/>
+                </a:solidFill>
+                <a:latin typeface="Calibri"/>
+              </a:rPr>
+              <a:t>Foro y mensajería de CDigital:</a:t>
+            </a:r>
+            <a:r>
+              <a:rPr sz="1600" b="0" i="0">
+                <a:solidFill>
+                  <a:srgbClr val="2B2B2B"/>
+                </a:solidFill>
+                <a:latin typeface="Calibri"/>
+              </a:rPr>
+              <a:t> para dudas que le sirven a todo el curso. Respuesta en días hábiles.</a:t>
+            </a:r>
+          </a:p>
+          <a:p>
+            <a:pPr>
+              <a:spcAft>
+                <a:spcPts val="1000"/>
+              </a:spcAft>
+            </a:pPr>
+            <a:r>
+              <a:rPr sz="1600" b="0" i="0">
+                <a:solidFill>
+                  <a:srgbClr val="2B2B2B"/>
+                </a:solidFill>
+                <a:latin typeface="Calibri"/>
+              </a:rPr>
+              <a:t>–   </a:t>
+            </a:r>
+            <a:r>
+              <a:rPr sz="1600" b="1" i="0">
+                <a:solidFill>
+                  <a:srgbClr val="2B2B2B"/>
+                </a:solidFill>
+                <a:latin typeface="Calibri"/>
+              </a:rPr>
+              <a:t>Antes de preguntar:</a:t>
+            </a:r>
+            <a:r>
+              <a:rPr sz="1600" b="0" i="0">
+                <a:solidFill>
+                  <a:srgbClr val="2B2B2B"/>
+                </a:solidFill>
+                <a:latin typeface="Calibri"/>
+              </a:rPr>
+              <a:t> revisen el enunciado del corte y la plantilla. La mitad de las dudas ya está resuelta ahí.</a:t>
+            </a:r>
+          </a:p>
+          <a:p>
+            <a:pPr>
+              <a:spcAft>
+                <a:spcPts val="1000"/>
+              </a:spcAft>
+            </a:pPr>
+            <a:r>
+              <a:rPr sz="1600" b="0" i="0">
+                <a:solidFill>
+                  <a:srgbClr val="2B2B2B"/>
+                </a:solidFill>
+                <a:latin typeface="Calibri"/>
+              </a:rPr>
+              <a:t>–   Pregunta bien hecha = sección concreta + qué intentaron + qué no les cuadra. «No entendí nada» no se puede responder.</a:t>
+            </a:r>
+          </a:p>
+        </p:txBody>
+      </p:sp>
+      <p:sp>
+        <p:nvSpPr>
+          <p:cNvPr id="5" name="TextBox 4"/>
           <p:cNvSpPr txBox="1"/>
           <p:nvPr/>
         </p:nvSpPr>
         <p:spPr>
           <a:xfrm>
-            <a:off x="868680" y="3300984"/>
-            <a:ext cx="10454335" cy="1005840"/>
+            <a:off x="11094415" y="6446520"/>
+            <a:ext cx="548640" cy="274320"/>
           </a:xfrm>
           <a:prstGeom prst="rect">
             <a:avLst/>
@@ -7052,97 +7183,29 @@
           </a:bodyPr>
           <a:lstStyle/>
           <a:p>
-            <a:r>
-              <a:rPr sz="1300" b="1" i="0">
-                <a:solidFill>
-                  <a:srgbClr val="0C2340"/>
-                </a:solidFill>
-                <a:latin typeface="Calibri"/>
-              </a:rPr>
-              <a:t>💡 Aclaración</a:t>
-            </a:r>
-          </a:p>
-          <a:p>
-            <a:pPr>
-              <a:spcBef>
-                <a:spcPts val="400"/>
-              </a:spcBef>
-            </a:pPr>
-            <a:r>
-              <a:rPr sz="1300" b="1" i="0">
-                <a:solidFill>
-                  <a:srgbClr val="2B2B2B"/>
-                </a:solidFill>
-                <a:latin typeface="Calibri"/>
-              </a:rPr>
-              <a:t>Participar es parte del método.</a:t>
-            </a:r>
-            <a:r>
-              <a:rPr sz="1300" b="0" i="0">
-                <a:solidFill>
-                  <a:srgbClr val="2B2B2B"/>
-                </a:solidFill>
-                <a:latin typeface="Calibri"/>
-              </a:rPr>
-              <a:t> Cuando el Docente pregunta, el silencio también es una respuesta: alarga la clase. Interrumpan para preguntar; es preferible una duda a destiempo que un capítulo entero mal escrito.</a:t>
-            </a:r>
-          </a:p>
-        </p:txBody>
-      </p:sp>
-      <p:sp>
-        <p:nvSpPr>
-          <p:cNvPr id="8" name="Rounded Rectangle 7"/>
-          <p:cNvSpPr/>
-          <p:nvPr/>
-        </p:nvSpPr>
-        <p:spPr>
-          <a:xfrm>
-            <a:off x="640080" y="4645152"/>
-            <a:ext cx="10911535" cy="1225296"/>
-          </a:xfrm>
-          <a:prstGeom prst="roundRect">
-            <a:avLst/>
-          </a:prstGeom>
-          <a:solidFill>
-            <a:srgbClr val="FBE4E4"/>
-          </a:solidFill>
-          <a:ln>
-            <a:noFill/>
-          </a:ln>
-          <a:effectLst/>
-        </p:spPr>
-        <p:style>
-          <a:lnRef idx="1">
-            <a:schemeClr val="accent1"/>
-          </a:lnRef>
-          <a:fillRef idx="3">
-            <a:schemeClr val="accent1"/>
-          </a:fillRef>
-          <a:effectRef idx="2">
-            <a:schemeClr val="accent1"/>
-          </a:effectRef>
-          <a:fontRef idx="minor">
-            <a:schemeClr val="lt1"/>
-          </a:fontRef>
-        </p:style>
-        <p:txBody>
-          <a:bodyPr rtlCol="0" anchor="ctr"/>
-          <a:lstStyle/>
-          <a:p>
-            <a:pPr algn="ctr"/>
-          </a:p>
-        </p:txBody>
-      </p:sp>
-      <p:sp>
-        <p:nvSpPr>
-          <p:cNvPr id="9" name="TextBox 8"/>
+            <a:pPr algn="r"/>
+            <a:r>
+              <a:rPr sz="1000" b="1" i="0">
+                <a:solidFill>
+                  <a:srgbClr val="8F989D"/>
+                </a:solidFill>
+                <a:latin typeface="Calibri"/>
+              </a:rPr>
+              <a:t>16</a:t>
+            </a:r>
+          </a:p>
+        </p:txBody>
+      </p:sp>
+      <p:sp>
+        <p:nvSpPr>
+          <p:cNvPr id="6" name="TextBox 5"/>
           <p:cNvSpPr txBox="1"/>
           <p:nvPr/>
         </p:nvSpPr>
         <p:spPr>
           <a:xfrm>
-            <a:off x="868680" y="4754880"/>
-            <a:ext cx="10454335" cy="1005840"/>
+            <a:off x="640080" y="5943600"/>
+            <a:ext cx="9997135" cy="457200"/>
           </a:xfrm>
           <a:prstGeom prst="rect">
             <a:avLst/>
@@ -7156,73 +7219,13 @@
           <a:lstStyle/>
           <a:p>
             <a:r>
-              <a:rPr sz="1300" b="1" i="0">
-                <a:solidFill>
-                  <a:srgbClr val="0C2340"/>
-                </a:solidFill>
-                <a:latin typeface="Calibri"/>
-              </a:rPr>
-              <a:t>⚠️ Importante</a:t>
-            </a:r>
-          </a:p>
-          <a:p>
-            <a:pPr>
-              <a:spcBef>
-                <a:spcPts val="400"/>
-              </a:spcBef>
-            </a:pPr>
-            <a:r>
-              <a:rPr sz="1300" b="1" i="0">
-                <a:solidFill>
-                  <a:srgbClr val="2B2B2B"/>
-                </a:solidFill>
-                <a:latin typeface="Calibri"/>
-              </a:rPr>
-              <a:t>Respeto en el foro y en el chat.</a:t>
-            </a:r>
-            <a:r>
-              <a:rPr sz="1300" b="0" i="0">
-                <a:solidFill>
-                  <a:srgbClr val="2B2B2B"/>
-                </a:solidFill>
-                <a:latin typeface="Calibri"/>
-              </a:rPr>
-              <a:t> Se critica el documento, nunca a la persona. La retroalimentación entre equipos se escribe con la misma cortesía con la que quisieran recibirla. El encuentro se graba.</a:t>
-            </a:r>
-          </a:p>
-        </p:txBody>
-      </p:sp>
-      <p:sp>
-        <p:nvSpPr>
-          <p:cNvPr id="10" name="TextBox 9"/>
-          <p:cNvSpPr txBox="1"/>
-          <p:nvPr/>
-        </p:nvSpPr>
-        <p:spPr>
-          <a:xfrm>
-            <a:off x="11094415" y="6446520"/>
-            <a:ext cx="548640" cy="274320"/>
-          </a:xfrm>
-          <a:prstGeom prst="rect">
-            <a:avLst/>
-          </a:prstGeom>
-          <a:noFill/>
-        </p:spPr>
-        <p:txBody>
-          <a:bodyPr wrap="square" anchor="t" lIns="0" rIns="0" tIns="0" bIns="0">
-            <a:spAutoFit/>
-          </a:bodyPr>
-          <a:lstStyle/>
-          <a:p>
-            <a:pPr algn="r"/>
-            <a:r>
-              <a:rPr sz="1000" b="1" i="0">
-                <a:solidFill>
-                  <a:srgbClr val="8F989D"/>
-                </a:solidFill>
-                <a:latin typeface="Calibri"/>
-              </a:rPr>
-              <a:t>16</a:t>
+              <a:rPr sz="1200" b="0" i="1">
+                <a:solidFill>
+                  <a:srgbClr val="2B2B2B"/>
+                </a:solidFill>
+                <a:latin typeface="Calibri"/>
+              </a:rPr>
+              <a:t>Las tutorías por grupo se acuerdan en la semana con el Docente (no hay atención espontánea sin cita).</a:t>
             </a:r>
           </a:p>
         </p:txBody>
@@ -7327,21 +7330,65 @@
                 </a:solidFill>
                 <a:latin typeface="Calibri"/>
               </a:rPr>
-              <a:t>Antes de la Sesión 02: lectura autónoma y qué traer</a:t>
-            </a:r>
-          </a:p>
-        </p:txBody>
-      </p:sp>
-      <p:sp>
-        <p:nvSpPr>
-          <p:cNvPr id="4" name="TextBox 3"/>
+              <a:t>Acuerdos de convivencia del encuentro</a:t>
+            </a:r>
+          </a:p>
+        </p:txBody>
+      </p:sp>
+      <p:sp>
+        <p:nvSpPr>
+          <p:cNvPr id="4" name="Rounded Rectangle 3"/>
+          <p:cNvSpPr/>
+          <p:nvPr/>
+        </p:nvSpPr>
+        <p:spPr>
+          <a:xfrm>
+            <a:off x="640080" y="1737360"/>
+            <a:ext cx="10911535" cy="1225296"/>
+          </a:xfrm>
+          <a:prstGeom prst="roundRect">
+            <a:avLst/>
+          </a:prstGeom>
+          <a:solidFill>
+            <a:srgbClr val="E8F5EC"/>
+          </a:solidFill>
+          <a:ln>
+            <a:noFill/>
+          </a:ln>
+          <a:effectLst/>
+        </p:spPr>
+        <p:style>
+          <a:lnRef idx="1">
+            <a:schemeClr val="accent1"/>
+          </a:lnRef>
+          <a:fillRef idx="3">
+            <a:schemeClr val="accent1"/>
+          </a:fillRef>
+          <a:effectRef idx="2">
+            <a:schemeClr val="accent1"/>
+          </a:effectRef>
+          <a:fontRef idx="minor">
+            <a:schemeClr val="lt1"/>
+          </a:fontRef>
+        </p:style>
+        <p:txBody>
+          <a:bodyPr rtlCol="0" anchor="ctr"/>
+          <a:lstStyle/>
+          <a:p>
+            <a:pPr algn="ctr"/>
+          </a:p>
+        </p:txBody>
+      </p:sp>
+      <p:sp>
+        <p:nvSpPr>
+          <p:cNvPr id="5" name="TextBox 4"/>
           <p:cNvSpPr txBox="1"/>
           <p:nvPr/>
         </p:nvSpPr>
         <p:spPr>
           <a:xfrm>
-            <a:off x="640080" y="1691639"/>
-            <a:ext cx="10911535" cy="4617720"/>
+            <a:off x="868680" y="1847088"/>
+            <a:ext cx="10454335" cy="1005840"/>
           </a:xfrm>
           <a:prstGeom prst="rect">
             <a:avLst/>
@@ -7354,341 +7401,97 @@
           </a:bodyPr>
           <a:lstStyle/>
           <a:p>
+            <a:r>
+              <a:rPr sz="1300" b="1" i="0">
+                <a:solidFill>
+                  <a:srgbClr val="0C2340"/>
+                </a:solidFill>
+                <a:latin typeface="Calibri"/>
+              </a:rPr>
+              <a:t>ℹ️ Nota institucional</a:t>
+            </a:r>
+          </a:p>
+          <a:p>
             <a:pPr>
-              <a:spcAft>
-                <a:spcPts val="1000"/>
-              </a:spcAft>
+              <a:spcBef>
+                <a:spcPts val="400"/>
+              </a:spcBef>
             </a:pPr>
             <a:r>
-              <a:rPr sz="1500" b="0" i="0">
-                <a:solidFill>
-                  <a:srgbClr val="2B2B2B"/>
-                </a:solidFill>
-                <a:latin typeface="Calibri"/>
-              </a:rPr>
-              <a:t>–   </a:t>
-            </a:r>
-            <a:r>
-              <a:rPr sz="1500" b="1" i="0">
-                <a:solidFill>
-                  <a:srgbClr val="2B2B2B"/>
-                </a:solidFill>
-                <a:latin typeface="Calibri"/>
-              </a:rPr>
-              <a:t>Lectura autónoma de esta semana:</a:t>
-            </a:r>
-            <a:r>
-              <a:rPr sz="1500" b="0" i="0">
-                <a:solidFill>
-                  <a:srgbClr val="2B2B2B"/>
-                </a:solidFill>
-                <a:latin typeface="Calibri"/>
-              </a:rPr>
-              <a:t> la unidad de </a:t>
-            </a:r>
-            <a:r>
-              <a:rPr sz="1500" b="1" i="0">
-                <a:solidFill>
-                  <a:srgbClr val="2B2B2B"/>
-                </a:solidFill>
-                <a:latin typeface="Calibri"/>
-              </a:rPr>
-              <a:t>fundamentos y enfoque de investigación (U1 del programa)</a:t>
-            </a:r>
-            <a:r>
-              <a:rPr sz="1500" b="0" i="0">
-                <a:solidFill>
-                  <a:srgbClr val="2B2B2B"/>
-                </a:solidFill>
-                <a:latin typeface="Calibri"/>
-              </a:rPr>
-              <a:t>.</a:t>
-            </a:r>
-          </a:p>
-          <a:p>
-            <a:pPr lvl="1">
-              <a:spcAft>
-                <a:spcPts val="600"/>
-              </a:spcAft>
-            </a:pPr>
-            <a:r>
-              <a:rPr sz="1400" b="0" i="0">
-                <a:solidFill>
-                  <a:srgbClr val="2B2B2B"/>
-                </a:solidFill>
-                <a:latin typeface="Calibri"/>
-              </a:rPr>
-              <a:t>●   Hoy no la dictamos: la leen ustedes y la retomamos al abrir la Sesión 02.</a:t>
-            </a:r>
-          </a:p>
-          <a:p>
-            <a:pPr lvl="1">
-              <a:spcAft>
-                <a:spcPts val="600"/>
-              </a:spcAft>
-            </a:pPr>
-            <a:r>
-              <a:rPr sz="1400" b="0" i="0">
-                <a:solidFill>
-                  <a:srgbClr val="2B2B2B"/>
-                </a:solidFill>
-                <a:latin typeface="Calibri"/>
-              </a:rPr>
-              <a:t>●   </a:t>
-            </a:r>
-            <a:r>
-              <a:rPr sz="1400" b="1" i="0">
-                <a:solidFill>
-                  <a:srgbClr val="2B2B2B"/>
-                </a:solidFill>
-                <a:latin typeface="Calibri"/>
-              </a:rPr>
-              <a:t>Dónde está:</a:t>
-            </a:r>
-            <a:r>
-              <a:rPr sz="1400" b="0" i="0">
-                <a:solidFill>
-                  <a:srgbClr val="2B2B2B"/>
-                </a:solidFill>
-                <a:latin typeface="Calibri"/>
-              </a:rPr>
-              <a:t> ya viene en tu carpeta del curso, en `Sesion 01 - …/` (los PDF `Lectura 1 (obligatoria)…`, `Lectura 2 (guia)…` y `Lectura 3 (recomendada)…`, más el archivo `Lectura autonoma - Sesion 01.txt` con la cita, el enlace y qué traer). También queda publicada en CDigital.</a:t>
-            </a:r>
-          </a:p>
-          <a:p>
-            <a:pPr lvl="1">
-              <a:spcAft>
-                <a:spcPts val="600"/>
-              </a:spcAft>
-            </a:pPr>
-            <a:r>
-              <a:rPr sz="1400" b="0" i="0">
-                <a:solidFill>
-                  <a:srgbClr val="2B2B2B"/>
-                </a:solidFill>
-                <a:latin typeface="Calibri"/>
-              </a:rPr>
-              <a:t>●   Mientras leen, anoten </a:t>
-            </a:r>
-            <a:r>
-              <a:rPr sz="1400" b="1" i="0">
-                <a:solidFill>
-                  <a:srgbClr val="2B2B2B"/>
-                </a:solidFill>
-                <a:latin typeface="Calibri"/>
-              </a:rPr>
-              <a:t>tres términos</a:t>
-            </a:r>
-            <a:r>
-              <a:rPr sz="1400" b="0" i="0">
-                <a:solidFill>
-                  <a:srgbClr val="2B2B2B"/>
-                </a:solidFill>
-                <a:latin typeface="Calibri"/>
-              </a:rPr>
-              <a:t> que no les queden claros. Con esos tres arrancamos la próxima clase.</a:t>
-            </a:r>
-          </a:p>
-          <a:p>
-            <a:pPr>
-              <a:spcAft>
-                <a:spcPts val="1000"/>
-              </a:spcAft>
-            </a:pPr>
-            <a:r>
-              <a:rPr sz="1500" b="0" i="0">
-                <a:solidFill>
-                  <a:srgbClr val="2B2B2B"/>
-                </a:solidFill>
-                <a:latin typeface="Calibri"/>
-              </a:rPr>
-              <a:t>–   </a:t>
-            </a:r>
-            <a:r>
-              <a:rPr sz="1500" b="1" i="0">
-                <a:solidFill>
-                  <a:srgbClr val="2B2B2B"/>
-                </a:solidFill>
-                <a:latin typeface="Calibri"/>
-              </a:rPr>
-              <a:t>Confirmen su equipo</a:t>
-            </a:r>
-            <a:r>
-              <a:rPr sz="1500" b="0" i="0">
-                <a:solidFill>
-                  <a:srgbClr val="2B2B2B"/>
-                </a:solidFill>
-                <a:latin typeface="Calibri"/>
-              </a:rPr>
-              <a:t> (máximo 3 personas) y avísenlo. Si aún no tienen con quién, díganlo esta semana y el Docente ayuda a armarlo.</a:t>
-            </a:r>
-          </a:p>
-          <a:p>
-            <a:pPr>
-              <a:spcAft>
-                <a:spcPts val="1000"/>
-              </a:spcAft>
-            </a:pPr>
-            <a:r>
-              <a:rPr sz="1500" b="0" i="0">
-                <a:solidFill>
-                  <a:srgbClr val="2B2B2B"/>
-                </a:solidFill>
-                <a:latin typeface="Calibri"/>
-              </a:rPr>
-              <a:t>–   </a:t>
-            </a:r>
-            <a:r>
-              <a:rPr sz="1500" b="1" i="0">
-                <a:solidFill>
-                  <a:srgbClr val="2B2B2B"/>
-                </a:solidFill>
-                <a:latin typeface="Calibri"/>
-              </a:rPr>
-              <a:t>Abran la guía del primer corte</a:t>
-            </a:r>
-            <a:r>
-              <a:rPr sz="1500" b="0" i="0">
-                <a:solidFill>
-                  <a:srgbClr val="2B2B2B"/>
-                </a:solidFill>
-                <a:latin typeface="Calibri"/>
-              </a:rPr>
-              <a:t> en `Clases/Recursos/ACAs/` — `Quiz (25%)` — y léanla completa, criterios incluidos: eso es lo que comprueba el </a:t>
-            </a:r>
-            <a:r>
-              <a:rPr sz="1500" b="1" i="0">
-                <a:solidFill>
-                  <a:srgbClr val="2B2B2B"/>
-                </a:solidFill>
-                <a:latin typeface="Calibri"/>
-              </a:rPr>
-              <a:t>Quiz</a:t>
-            </a:r>
-            <a:r>
-              <a:rPr sz="1500" b="0" i="0">
-                <a:solidFill>
-                  <a:srgbClr val="2B2B2B"/>
-                </a:solidFill>
-                <a:latin typeface="Calibri"/>
-              </a:rPr>
-              <a:t>.</a:t>
-            </a:r>
-          </a:p>
-          <a:p>
-            <a:pPr>
-              <a:spcAft>
-                <a:spcPts val="1000"/>
-              </a:spcAft>
-            </a:pPr>
-            <a:r>
-              <a:rPr sz="1500" b="0" i="0">
-                <a:solidFill>
-                  <a:srgbClr val="2B2B2B"/>
-                </a:solidFill>
-                <a:latin typeface="Calibri"/>
-              </a:rPr>
-              <a:t>–   </a:t>
-            </a:r>
-            <a:r>
-              <a:rPr sz="1500" b="1" i="0">
-                <a:solidFill>
-                  <a:srgbClr val="2B2B2B"/>
-                </a:solidFill>
-                <a:latin typeface="Calibri"/>
-              </a:rPr>
-              <a:t>Creen el documento del equipo</a:t>
-            </a:r>
-            <a:r>
-              <a:rPr sz="1500" b="0" i="0">
-                <a:solidFill>
-                  <a:srgbClr val="2B2B2B"/>
-                </a:solidFill>
-                <a:latin typeface="Calibri"/>
-              </a:rPr>
-              <a:t> en Google Docs con la plantilla APA CUN y compártanlo con todos los integrantes.</a:t>
-            </a:r>
-          </a:p>
-          <a:p>
-            <a:pPr>
-              <a:spcAft>
-                <a:spcPts val="1000"/>
-              </a:spcAft>
-            </a:pPr>
-            <a:r>
-              <a:rPr sz="1500" b="0" i="0">
-                <a:solidFill>
-                  <a:srgbClr val="2B2B2B"/>
-                </a:solidFill>
-                <a:latin typeface="Calibri"/>
-              </a:rPr>
-              <a:t>–   </a:t>
-            </a:r>
-            <a:r>
-              <a:rPr sz="1500" b="1" i="0">
-                <a:solidFill>
-                  <a:srgbClr val="2B2B2B"/>
-                </a:solidFill>
-                <a:latin typeface="Calibri"/>
-              </a:rPr>
-              <a:t>Traigan a la Sesión 02</a:t>
-            </a:r>
-            <a:r>
-              <a:rPr sz="1500" b="0" i="0">
-                <a:solidFill>
-                  <a:srgbClr val="2B2B2B"/>
-                </a:solidFill>
-                <a:latin typeface="Calibri"/>
-              </a:rPr>
-              <a:t> una idea de tema escrita </a:t>
-            </a:r>
-            <a:r>
-              <a:rPr sz="1500" b="1" i="0">
-                <a:solidFill>
-                  <a:srgbClr val="2B2B2B"/>
-                </a:solidFill>
-                <a:latin typeface="Calibri"/>
-              </a:rPr>
-              <a:t>en una frase</a:t>
-            </a:r>
-            <a:r>
-              <a:rPr sz="1500" b="0" i="0">
-                <a:solidFill>
-                  <a:srgbClr val="2B2B2B"/>
-                </a:solidFill>
-                <a:latin typeface="Calibri"/>
-              </a:rPr>
-              <a:t> y el contexto donde ocurre (empresa, aula, proceso).</a:t>
-            </a:r>
-          </a:p>
-          <a:p>
-            <a:pPr lvl="1">
-              <a:spcAft>
-                <a:spcPts val="600"/>
-              </a:spcAft>
-            </a:pPr>
-            <a:r>
-              <a:rPr sz="1400" b="0" i="0">
-                <a:solidFill>
-                  <a:srgbClr val="2B2B2B"/>
-                </a:solidFill>
-                <a:latin typeface="Calibri"/>
-              </a:rPr>
-              <a:t>●   Con eso trabajamos en clase. Quien llegue sin la frase se pasará la sesión viendo trabajar a los demás.</a:t>
-            </a:r>
-          </a:p>
-        </p:txBody>
-      </p:sp>
-      <p:sp>
-        <p:nvSpPr>
-          <p:cNvPr id="5" name="TextBox 4"/>
+              <a:rPr sz="1300" b="1" i="0">
+                <a:solidFill>
+                  <a:srgbClr val="2B2B2B"/>
+                </a:solidFill>
+                <a:latin typeface="Calibri"/>
+              </a:rPr>
+              <a:t>Puntualidad y cámara.</a:t>
+            </a:r>
+            <a:r>
+              <a:rPr sz="1300" b="0" i="0">
+                <a:solidFill>
+                  <a:srgbClr val="2B2B2B"/>
+                </a:solidFill>
+                <a:latin typeface="Calibri"/>
+              </a:rPr>
+              <a:t> Empezamos a la hora en punto. Cámara encendida al menos en la presentación y en la tutoría de su equipo: revisar un avance a ciegas no funciona. Micrófono en silencio mientras alguien expone.</a:t>
+            </a:r>
+          </a:p>
+        </p:txBody>
+      </p:sp>
+      <p:sp>
+        <p:nvSpPr>
+          <p:cNvPr id="6" name="Rounded Rectangle 5"/>
+          <p:cNvSpPr/>
+          <p:nvPr/>
+        </p:nvSpPr>
+        <p:spPr>
+          <a:xfrm>
+            <a:off x="640080" y="3191256"/>
+            <a:ext cx="10911535" cy="1225296"/>
+          </a:xfrm>
+          <a:prstGeom prst="roundRect">
+            <a:avLst/>
+          </a:prstGeom>
+          <a:solidFill>
+            <a:srgbClr val="FDECD8"/>
+          </a:solidFill>
+          <a:ln>
+            <a:noFill/>
+          </a:ln>
+          <a:effectLst/>
+        </p:spPr>
+        <p:style>
+          <a:lnRef idx="1">
+            <a:schemeClr val="accent1"/>
+          </a:lnRef>
+          <a:fillRef idx="3">
+            <a:schemeClr val="accent1"/>
+          </a:fillRef>
+          <a:effectRef idx="2">
+            <a:schemeClr val="accent1"/>
+          </a:effectRef>
+          <a:fontRef idx="minor">
+            <a:schemeClr val="lt1"/>
+          </a:fontRef>
+        </p:style>
+        <p:txBody>
+          <a:bodyPr rtlCol="0" anchor="ctr"/>
+          <a:lstStyle/>
+          <a:p>
+            <a:pPr algn="ctr"/>
+          </a:p>
+        </p:txBody>
+      </p:sp>
+      <p:sp>
+        <p:nvSpPr>
+          <p:cNvPr id="7" name="TextBox 6"/>
           <p:cNvSpPr txBox="1"/>
           <p:nvPr/>
         </p:nvSpPr>
         <p:spPr>
           <a:xfrm>
-            <a:off x="11094415" y="6446520"/>
-            <a:ext cx="548640" cy="274320"/>
+            <a:off x="868680" y="3300984"/>
+            <a:ext cx="10454335" cy="1005840"/>
           </a:xfrm>
           <a:prstGeom prst="rect">
             <a:avLst/>
@@ -7701,29 +7504,97 @@
           </a:bodyPr>
           <a:lstStyle/>
           <a:p>
-            <a:pPr algn="r"/>
-            <a:r>
-              <a:rPr sz="1000" b="1" i="0">
-                <a:solidFill>
-                  <a:srgbClr val="8F989D"/>
-                </a:solidFill>
-                <a:latin typeface="Calibri"/>
-              </a:rPr>
-              <a:t>17</a:t>
-            </a:r>
-          </a:p>
-        </p:txBody>
-      </p:sp>
-      <p:sp>
-        <p:nvSpPr>
-          <p:cNvPr id="6" name="TextBox 5"/>
+            <a:r>
+              <a:rPr sz="1300" b="1" i="0">
+                <a:solidFill>
+                  <a:srgbClr val="0C2340"/>
+                </a:solidFill>
+                <a:latin typeface="Calibri"/>
+              </a:rPr>
+              <a:t>💡 Aclaración</a:t>
+            </a:r>
+          </a:p>
+          <a:p>
+            <a:pPr>
+              <a:spcBef>
+                <a:spcPts val="400"/>
+              </a:spcBef>
+            </a:pPr>
+            <a:r>
+              <a:rPr sz="1300" b="1" i="0">
+                <a:solidFill>
+                  <a:srgbClr val="2B2B2B"/>
+                </a:solidFill>
+                <a:latin typeface="Calibri"/>
+              </a:rPr>
+              <a:t>Participar es parte del método.</a:t>
+            </a:r>
+            <a:r>
+              <a:rPr sz="1300" b="0" i="0">
+                <a:solidFill>
+                  <a:srgbClr val="2B2B2B"/>
+                </a:solidFill>
+                <a:latin typeface="Calibri"/>
+              </a:rPr>
+              <a:t> Cuando el Docente pregunta, el silencio también es una respuesta: alarga la clase. Interrumpan para preguntar; es preferible una duda a destiempo que un capítulo entero mal escrito.</a:t>
+            </a:r>
+          </a:p>
+        </p:txBody>
+      </p:sp>
+      <p:sp>
+        <p:nvSpPr>
+          <p:cNvPr id="8" name="Rounded Rectangle 7"/>
+          <p:cNvSpPr/>
+          <p:nvPr/>
+        </p:nvSpPr>
+        <p:spPr>
+          <a:xfrm>
+            <a:off x="640080" y="4645152"/>
+            <a:ext cx="10911535" cy="1225296"/>
+          </a:xfrm>
+          <a:prstGeom prst="roundRect">
+            <a:avLst/>
+          </a:prstGeom>
+          <a:solidFill>
+            <a:srgbClr val="FBE4E4"/>
+          </a:solidFill>
+          <a:ln>
+            <a:noFill/>
+          </a:ln>
+          <a:effectLst/>
+        </p:spPr>
+        <p:style>
+          <a:lnRef idx="1">
+            <a:schemeClr val="accent1"/>
+          </a:lnRef>
+          <a:fillRef idx="3">
+            <a:schemeClr val="accent1"/>
+          </a:fillRef>
+          <a:effectRef idx="2">
+            <a:schemeClr val="accent1"/>
+          </a:effectRef>
+          <a:fontRef idx="minor">
+            <a:schemeClr val="lt1"/>
+          </a:fontRef>
+        </p:style>
+        <p:txBody>
+          <a:bodyPr rtlCol="0" anchor="ctr"/>
+          <a:lstStyle/>
+          <a:p>
+            <a:pPr algn="ctr"/>
+          </a:p>
+        </p:txBody>
+      </p:sp>
+      <p:sp>
+        <p:nvSpPr>
+          <p:cNvPr id="9" name="TextBox 8"/>
           <p:cNvSpPr txBox="1"/>
           <p:nvPr/>
         </p:nvSpPr>
         <p:spPr>
           <a:xfrm>
-            <a:off x="640080" y="5943600"/>
-            <a:ext cx="9997135" cy="457200"/>
+            <a:off x="868680" y="4754880"/>
+            <a:ext cx="10454335" cy="1005840"/>
           </a:xfrm>
           <a:prstGeom prst="rect">
             <a:avLst/>
@@ -7737,13 +7608,73 @@
           <a:lstStyle/>
           <a:p>
             <a:r>
-              <a:rPr sz="1200" b="0" i="1">
-                <a:solidFill>
-                  <a:srgbClr val="2B2B2B"/>
-                </a:solidFill>
-                <a:latin typeface="Calibri"/>
-              </a:rPr>
-              <a:t>Nada de esto se califica hoy, pero todo se nota en la Sesión 02: la clase avanza sobre lo que ustedes traigan escrito.</a:t>
+              <a:rPr sz="1300" b="1" i="0">
+                <a:solidFill>
+                  <a:srgbClr val="0C2340"/>
+                </a:solidFill>
+                <a:latin typeface="Calibri"/>
+              </a:rPr>
+              <a:t>⚠️ Importante</a:t>
+            </a:r>
+          </a:p>
+          <a:p>
+            <a:pPr>
+              <a:spcBef>
+                <a:spcPts val="400"/>
+              </a:spcBef>
+            </a:pPr>
+            <a:r>
+              <a:rPr sz="1300" b="1" i="0">
+                <a:solidFill>
+                  <a:srgbClr val="2B2B2B"/>
+                </a:solidFill>
+                <a:latin typeface="Calibri"/>
+              </a:rPr>
+              <a:t>Respeto en el foro y en el chat.</a:t>
+            </a:r>
+            <a:r>
+              <a:rPr sz="1300" b="0" i="0">
+                <a:solidFill>
+                  <a:srgbClr val="2B2B2B"/>
+                </a:solidFill>
+                <a:latin typeface="Calibri"/>
+              </a:rPr>
+              <a:t> Se critica el documento, nunca a la persona. La retroalimentación entre equipos se escribe con la misma cortesía con la que quisieran recibirla. El encuentro se graba.</a:t>
+            </a:r>
+          </a:p>
+        </p:txBody>
+      </p:sp>
+      <p:sp>
+        <p:nvSpPr>
+          <p:cNvPr id="10" name="TextBox 9"/>
+          <p:cNvSpPr txBox="1"/>
+          <p:nvPr/>
+        </p:nvSpPr>
+        <p:spPr>
+          <a:xfrm>
+            <a:off x="11094415" y="6446520"/>
+            <a:ext cx="548640" cy="274320"/>
+          </a:xfrm>
+          <a:prstGeom prst="rect">
+            <a:avLst/>
+          </a:prstGeom>
+          <a:noFill/>
+        </p:spPr>
+        <p:txBody>
+          <a:bodyPr wrap="square" anchor="t" lIns="0" rIns="0" tIns="0" bIns="0">
+            <a:spAutoFit/>
+          </a:bodyPr>
+          <a:lstStyle/>
+          <a:p>
+            <a:pPr algn="r"/>
+            <a:r>
+              <a:rPr sz="1000" b="1" i="0">
+                <a:solidFill>
+                  <a:srgbClr val="8F989D"/>
+                </a:solidFill>
+                <a:latin typeface="Calibri"/>
+              </a:rPr>
+              <a:t>17</a:t>
             </a:r>
           </a:p>
         </p:txBody>
@@ -7848,65 +7779,21 @@
                 </a:solidFill>
                 <a:latin typeface="Calibri"/>
               </a:rPr>
-              <a:t>Las preguntas que siempre salen el primer día</a:t>
-            </a:r>
-          </a:p>
-        </p:txBody>
-      </p:sp>
-      <p:sp>
-        <p:nvSpPr>
-          <p:cNvPr id="4" name="Rounded Rectangle 3"/>
-          <p:cNvSpPr/>
-          <p:nvPr/>
-        </p:nvSpPr>
-        <p:spPr>
-          <a:xfrm>
-            <a:off x="640080" y="1737360"/>
-            <a:ext cx="10911535" cy="1225296"/>
-          </a:xfrm>
-          <a:prstGeom prst="roundRect">
-            <a:avLst/>
-          </a:prstGeom>
-          <a:solidFill>
-            <a:srgbClr val="E8F5EC"/>
-          </a:solidFill>
-          <a:ln>
-            <a:noFill/>
-          </a:ln>
-          <a:effectLst/>
-        </p:spPr>
-        <p:style>
-          <a:lnRef idx="1">
-            <a:schemeClr val="accent1"/>
-          </a:lnRef>
-          <a:fillRef idx="3">
-            <a:schemeClr val="accent1"/>
-          </a:fillRef>
-          <a:effectRef idx="2">
-            <a:schemeClr val="accent1"/>
-          </a:effectRef>
-          <a:fontRef idx="minor">
-            <a:schemeClr val="lt1"/>
-          </a:fontRef>
-        </p:style>
-        <p:txBody>
-          <a:bodyPr rtlCol="0" anchor="ctr"/>
-          <a:lstStyle/>
-          <a:p>
-            <a:pPr algn="ctr"/>
-          </a:p>
-        </p:txBody>
-      </p:sp>
-      <p:sp>
-        <p:nvSpPr>
-          <p:cNvPr id="5" name="TextBox 4"/>
+              <a:t>Antes de la Sesión 02: lectura autónoma y qué traer</a:t>
+            </a:r>
+          </a:p>
+        </p:txBody>
+      </p:sp>
+      <p:sp>
+        <p:nvSpPr>
+          <p:cNvPr id="4" name="TextBox 3"/>
           <p:cNvSpPr txBox="1"/>
           <p:nvPr/>
         </p:nvSpPr>
         <p:spPr>
           <a:xfrm>
-            <a:off x="868680" y="1847088"/>
-            <a:ext cx="10454335" cy="1005840"/>
+            <a:off x="640080" y="1691639"/>
+            <a:ext cx="10911535" cy="4617720"/>
           </a:xfrm>
           <a:prstGeom prst="rect">
             <a:avLst/>
@@ -7919,97 +7806,341 @@
           </a:bodyPr>
           <a:lstStyle/>
           <a:p>
-            <a:r>
-              <a:rPr sz="1300" b="1" i="0">
-                <a:solidFill>
-                  <a:srgbClr val="0C2340"/>
-                </a:solidFill>
-                <a:latin typeface="Calibri"/>
-              </a:rPr>
-              <a:t>ℹ️ Nota institucional</a:t>
-            </a:r>
-          </a:p>
-          <a:p>
             <a:pPr>
-              <a:spcBef>
-                <a:spcPts val="400"/>
-              </a:spcBef>
+              <a:spcAft>
+                <a:spcPts val="1000"/>
+              </a:spcAft>
             </a:pPr>
             <a:r>
-              <a:rPr sz="1300" b="1" i="0">
-                <a:solidFill>
-                  <a:srgbClr val="2B2B2B"/>
-                </a:solidFill>
-                <a:latin typeface="Calibri"/>
-              </a:rPr>
-              <a:t>«¿Esta materia se pierde fácil?»</a:t>
-            </a:r>
-            <a:r>
-              <a:rPr sz="1300" b="0" i="0">
-                <a:solidFill>
-                  <a:srgbClr val="2B2B2B"/>
-                </a:solidFill>
-                <a:latin typeface="Calibri"/>
-              </a:rPr>
-              <a:t> No se pierde por dificultad: se pierde por entregar tarde o por entregar un documento que nadie leyó antes de subirlo. Quien trae avance cada semana llega al final con el anteproyecto prácticamente listo.</a:t>
-            </a:r>
-          </a:p>
-        </p:txBody>
-      </p:sp>
-      <p:sp>
-        <p:nvSpPr>
-          <p:cNvPr id="6" name="Rounded Rectangle 5"/>
-          <p:cNvSpPr/>
-          <p:nvPr/>
-        </p:nvSpPr>
-        <p:spPr>
-          <a:xfrm>
-            <a:off x="640080" y="3191256"/>
-            <a:ext cx="10911535" cy="1225296"/>
-          </a:xfrm>
-          <a:prstGeom prst="roundRect">
-            <a:avLst/>
-          </a:prstGeom>
-          <a:solidFill>
-            <a:srgbClr val="FDECD8"/>
-          </a:solidFill>
-          <a:ln>
-            <a:noFill/>
-          </a:ln>
-          <a:effectLst/>
-        </p:spPr>
-        <p:style>
-          <a:lnRef idx="1">
-            <a:schemeClr val="accent1"/>
-          </a:lnRef>
-          <a:fillRef idx="3">
-            <a:schemeClr val="accent1"/>
-          </a:fillRef>
-          <a:effectRef idx="2">
-            <a:schemeClr val="accent1"/>
-          </a:effectRef>
-          <a:fontRef idx="minor">
-            <a:schemeClr val="lt1"/>
-          </a:fontRef>
-        </p:style>
-        <p:txBody>
-          <a:bodyPr rtlCol="0" anchor="ctr"/>
-          <a:lstStyle/>
-          <a:p>
-            <a:pPr algn="ctr"/>
-          </a:p>
-        </p:txBody>
-      </p:sp>
-      <p:sp>
-        <p:nvSpPr>
-          <p:cNvPr id="7" name="TextBox 6"/>
+              <a:rPr sz="1500" b="0" i="0">
+                <a:solidFill>
+                  <a:srgbClr val="2B2B2B"/>
+                </a:solidFill>
+                <a:latin typeface="Calibri"/>
+              </a:rPr>
+              <a:t>–   </a:t>
+            </a:r>
+            <a:r>
+              <a:rPr sz="1500" b="1" i="0">
+                <a:solidFill>
+                  <a:srgbClr val="2B2B2B"/>
+                </a:solidFill>
+                <a:latin typeface="Calibri"/>
+              </a:rPr>
+              <a:t>Lectura autónoma de esta semana:</a:t>
+            </a:r>
+            <a:r>
+              <a:rPr sz="1500" b="0" i="0">
+                <a:solidFill>
+                  <a:srgbClr val="2B2B2B"/>
+                </a:solidFill>
+                <a:latin typeface="Calibri"/>
+              </a:rPr>
+              <a:t> la unidad de </a:t>
+            </a:r>
+            <a:r>
+              <a:rPr sz="1500" b="1" i="0">
+                <a:solidFill>
+                  <a:srgbClr val="2B2B2B"/>
+                </a:solidFill>
+                <a:latin typeface="Calibri"/>
+              </a:rPr>
+              <a:t>fundamentos y enfoque de investigación (U1 del programa)</a:t>
+            </a:r>
+            <a:r>
+              <a:rPr sz="1500" b="0" i="0">
+                <a:solidFill>
+                  <a:srgbClr val="2B2B2B"/>
+                </a:solidFill>
+                <a:latin typeface="Calibri"/>
+              </a:rPr>
+              <a:t>.</a:t>
+            </a:r>
+          </a:p>
+          <a:p>
+            <a:pPr lvl="1">
+              <a:spcAft>
+                <a:spcPts val="600"/>
+              </a:spcAft>
+            </a:pPr>
+            <a:r>
+              <a:rPr sz="1400" b="0" i="0">
+                <a:solidFill>
+                  <a:srgbClr val="2B2B2B"/>
+                </a:solidFill>
+                <a:latin typeface="Calibri"/>
+              </a:rPr>
+              <a:t>●   Hoy no la dictamos: la leen ustedes y la retomamos al abrir la Sesión 02.</a:t>
+            </a:r>
+          </a:p>
+          <a:p>
+            <a:pPr lvl="1">
+              <a:spcAft>
+                <a:spcPts val="600"/>
+              </a:spcAft>
+            </a:pPr>
+            <a:r>
+              <a:rPr sz="1400" b="0" i="0">
+                <a:solidFill>
+                  <a:srgbClr val="2B2B2B"/>
+                </a:solidFill>
+                <a:latin typeface="Calibri"/>
+              </a:rPr>
+              <a:t>●   </a:t>
+            </a:r>
+            <a:r>
+              <a:rPr sz="1400" b="1" i="0">
+                <a:solidFill>
+                  <a:srgbClr val="2B2B2B"/>
+                </a:solidFill>
+                <a:latin typeface="Calibri"/>
+              </a:rPr>
+              <a:t>Dónde está:</a:t>
+            </a:r>
+            <a:r>
+              <a:rPr sz="1400" b="0" i="0">
+                <a:solidFill>
+                  <a:srgbClr val="2B2B2B"/>
+                </a:solidFill>
+                <a:latin typeface="Calibri"/>
+              </a:rPr>
+              <a:t> ya viene en tu carpeta del curso, en `Sesion 01 - …/` (los PDF `Lectura 1 (obligatoria)…`, `Lectura 2 (guia)…` y `Lectura 3 (recomendada)…`, más el archivo `Lectura autonoma - Sesion 01.txt` con la cita, el enlace y qué traer). También queda publicada en CDigital.</a:t>
+            </a:r>
+          </a:p>
+          <a:p>
+            <a:pPr lvl="1">
+              <a:spcAft>
+                <a:spcPts val="600"/>
+              </a:spcAft>
+            </a:pPr>
+            <a:r>
+              <a:rPr sz="1400" b="0" i="0">
+                <a:solidFill>
+                  <a:srgbClr val="2B2B2B"/>
+                </a:solidFill>
+                <a:latin typeface="Calibri"/>
+              </a:rPr>
+              <a:t>●   Mientras leen, anoten </a:t>
+            </a:r>
+            <a:r>
+              <a:rPr sz="1400" b="1" i="0">
+                <a:solidFill>
+                  <a:srgbClr val="2B2B2B"/>
+                </a:solidFill>
+                <a:latin typeface="Calibri"/>
+              </a:rPr>
+              <a:t>tres términos</a:t>
+            </a:r>
+            <a:r>
+              <a:rPr sz="1400" b="0" i="0">
+                <a:solidFill>
+                  <a:srgbClr val="2B2B2B"/>
+                </a:solidFill>
+                <a:latin typeface="Calibri"/>
+              </a:rPr>
+              <a:t> que no les queden claros. Con esos tres arrancamos la próxima clase.</a:t>
+            </a:r>
+          </a:p>
+          <a:p>
+            <a:pPr>
+              <a:spcAft>
+                <a:spcPts val="1000"/>
+              </a:spcAft>
+            </a:pPr>
+            <a:r>
+              <a:rPr sz="1500" b="0" i="0">
+                <a:solidFill>
+                  <a:srgbClr val="2B2B2B"/>
+                </a:solidFill>
+                <a:latin typeface="Calibri"/>
+              </a:rPr>
+              <a:t>–   </a:t>
+            </a:r>
+            <a:r>
+              <a:rPr sz="1500" b="1" i="0">
+                <a:solidFill>
+                  <a:srgbClr val="2B2B2B"/>
+                </a:solidFill>
+                <a:latin typeface="Calibri"/>
+              </a:rPr>
+              <a:t>Confirmen su equipo</a:t>
+            </a:r>
+            <a:r>
+              <a:rPr sz="1500" b="0" i="0">
+                <a:solidFill>
+                  <a:srgbClr val="2B2B2B"/>
+                </a:solidFill>
+                <a:latin typeface="Calibri"/>
+              </a:rPr>
+              <a:t> (máximo 3 personas) y avísenlo. Si aún no tienen con quién, díganlo esta semana y el Docente ayuda a armarlo.</a:t>
+            </a:r>
+          </a:p>
+          <a:p>
+            <a:pPr>
+              <a:spcAft>
+                <a:spcPts val="1000"/>
+              </a:spcAft>
+            </a:pPr>
+            <a:r>
+              <a:rPr sz="1500" b="0" i="0">
+                <a:solidFill>
+                  <a:srgbClr val="2B2B2B"/>
+                </a:solidFill>
+                <a:latin typeface="Calibri"/>
+              </a:rPr>
+              <a:t>–   </a:t>
+            </a:r>
+            <a:r>
+              <a:rPr sz="1500" b="1" i="0">
+                <a:solidFill>
+                  <a:srgbClr val="2B2B2B"/>
+                </a:solidFill>
+                <a:latin typeface="Calibri"/>
+              </a:rPr>
+              <a:t>Abran la guía del primer corte</a:t>
+            </a:r>
+            <a:r>
+              <a:rPr sz="1500" b="0" i="0">
+                <a:solidFill>
+                  <a:srgbClr val="2B2B2B"/>
+                </a:solidFill>
+                <a:latin typeface="Calibri"/>
+              </a:rPr>
+              <a:t> en `Clases/Recursos/ACAs/` — `Quiz (25%)` — y léanla completa, criterios incluidos: eso es lo que comprueba el </a:t>
+            </a:r>
+            <a:r>
+              <a:rPr sz="1500" b="1" i="0">
+                <a:solidFill>
+                  <a:srgbClr val="2B2B2B"/>
+                </a:solidFill>
+                <a:latin typeface="Calibri"/>
+              </a:rPr>
+              <a:t>Quiz</a:t>
+            </a:r>
+            <a:r>
+              <a:rPr sz="1500" b="0" i="0">
+                <a:solidFill>
+                  <a:srgbClr val="2B2B2B"/>
+                </a:solidFill>
+                <a:latin typeface="Calibri"/>
+              </a:rPr>
+              <a:t>.</a:t>
+            </a:r>
+          </a:p>
+          <a:p>
+            <a:pPr>
+              <a:spcAft>
+                <a:spcPts val="1000"/>
+              </a:spcAft>
+            </a:pPr>
+            <a:r>
+              <a:rPr sz="1500" b="0" i="0">
+                <a:solidFill>
+                  <a:srgbClr val="2B2B2B"/>
+                </a:solidFill>
+                <a:latin typeface="Calibri"/>
+              </a:rPr>
+              <a:t>–   </a:t>
+            </a:r>
+            <a:r>
+              <a:rPr sz="1500" b="1" i="0">
+                <a:solidFill>
+                  <a:srgbClr val="2B2B2B"/>
+                </a:solidFill>
+                <a:latin typeface="Calibri"/>
+              </a:rPr>
+              <a:t>Creen el documento del equipo</a:t>
+            </a:r>
+            <a:r>
+              <a:rPr sz="1500" b="0" i="0">
+                <a:solidFill>
+                  <a:srgbClr val="2B2B2B"/>
+                </a:solidFill>
+                <a:latin typeface="Calibri"/>
+              </a:rPr>
+              <a:t> en Google Docs con la plantilla APA CUN y compártanlo con todos los integrantes.</a:t>
+            </a:r>
+          </a:p>
+          <a:p>
+            <a:pPr>
+              <a:spcAft>
+                <a:spcPts val="1000"/>
+              </a:spcAft>
+            </a:pPr>
+            <a:r>
+              <a:rPr sz="1500" b="0" i="0">
+                <a:solidFill>
+                  <a:srgbClr val="2B2B2B"/>
+                </a:solidFill>
+                <a:latin typeface="Calibri"/>
+              </a:rPr>
+              <a:t>–   </a:t>
+            </a:r>
+            <a:r>
+              <a:rPr sz="1500" b="1" i="0">
+                <a:solidFill>
+                  <a:srgbClr val="2B2B2B"/>
+                </a:solidFill>
+                <a:latin typeface="Calibri"/>
+              </a:rPr>
+              <a:t>Traigan a la Sesión 02</a:t>
+            </a:r>
+            <a:r>
+              <a:rPr sz="1500" b="0" i="0">
+                <a:solidFill>
+                  <a:srgbClr val="2B2B2B"/>
+                </a:solidFill>
+                <a:latin typeface="Calibri"/>
+              </a:rPr>
+              <a:t> una idea de tema escrita </a:t>
+            </a:r>
+            <a:r>
+              <a:rPr sz="1500" b="1" i="0">
+                <a:solidFill>
+                  <a:srgbClr val="2B2B2B"/>
+                </a:solidFill>
+                <a:latin typeface="Calibri"/>
+              </a:rPr>
+              <a:t>en una frase</a:t>
+            </a:r>
+            <a:r>
+              <a:rPr sz="1500" b="0" i="0">
+                <a:solidFill>
+                  <a:srgbClr val="2B2B2B"/>
+                </a:solidFill>
+                <a:latin typeface="Calibri"/>
+              </a:rPr>
+              <a:t> y el contexto donde ocurre (empresa, aula, proceso).</a:t>
+            </a:r>
+          </a:p>
+          <a:p>
+            <a:pPr lvl="1">
+              <a:spcAft>
+                <a:spcPts val="600"/>
+              </a:spcAft>
+            </a:pPr>
+            <a:r>
+              <a:rPr sz="1400" b="0" i="0">
+                <a:solidFill>
+                  <a:srgbClr val="2B2B2B"/>
+                </a:solidFill>
+                <a:latin typeface="Calibri"/>
+              </a:rPr>
+              <a:t>●   Con eso trabajamos en clase. Quien llegue sin la frase se pasará la sesión viendo trabajar a los demás.</a:t>
+            </a:r>
+          </a:p>
+        </p:txBody>
+      </p:sp>
+      <p:sp>
+        <p:nvSpPr>
+          <p:cNvPr id="5" name="TextBox 4"/>
           <p:cNvSpPr txBox="1"/>
           <p:nvPr/>
         </p:nvSpPr>
         <p:spPr>
           <a:xfrm>
-            <a:off x="868680" y="3300984"/>
-            <a:ext cx="10454335" cy="1005840"/>
+            <a:off x="11094415" y="6446520"/>
+            <a:ext cx="548640" cy="274320"/>
           </a:xfrm>
           <a:prstGeom prst="rect">
             <a:avLst/>
@@ -8022,97 +8153,29 @@
           </a:bodyPr>
           <a:lstStyle/>
           <a:p>
-            <a:r>
-              <a:rPr sz="1300" b="1" i="0">
-                <a:solidFill>
-                  <a:srgbClr val="0C2340"/>
-                </a:solidFill>
-                <a:latin typeface="Calibri"/>
-              </a:rPr>
-              <a:t>💡 Aclaración</a:t>
-            </a:r>
-          </a:p>
-          <a:p>
-            <a:pPr>
-              <a:spcBef>
-                <a:spcPts val="400"/>
-              </a:spcBef>
-            </a:pPr>
-            <a:r>
-              <a:rPr sz="1300" b="1" i="0">
-                <a:solidFill>
-                  <a:srgbClr val="2B2B2B"/>
-                </a:solidFill>
-                <a:latin typeface="Calibri"/>
-              </a:rPr>
-              <a:t>«¿Puedo trabajar solo?»</a:t>
-            </a:r>
-            <a:r>
-              <a:rPr sz="1300" b="0" i="0">
-                <a:solidFill>
-                  <a:srgbClr val="2B2B2B"/>
-                </a:solidFill>
-                <a:latin typeface="Calibri"/>
-              </a:rPr>
-              <a:t> Sí, pero el equipo es de máximo 3 y la carga de trabajo es la misma para uno que para tres. Decídanlo esta semana: después del primer corte no conviene cambiar de equipo ni de tema.</a:t>
-            </a:r>
-          </a:p>
-        </p:txBody>
-      </p:sp>
-      <p:sp>
-        <p:nvSpPr>
-          <p:cNvPr id="8" name="Rounded Rectangle 7"/>
-          <p:cNvSpPr/>
-          <p:nvPr/>
-        </p:nvSpPr>
-        <p:spPr>
-          <a:xfrm>
-            <a:off x="640080" y="4645152"/>
-            <a:ext cx="10911535" cy="1225296"/>
-          </a:xfrm>
-          <a:prstGeom prst="roundRect">
-            <a:avLst/>
-          </a:prstGeom>
-          <a:solidFill>
-            <a:srgbClr val="FBE4E4"/>
-          </a:solidFill>
-          <a:ln>
-            <a:noFill/>
-          </a:ln>
-          <a:effectLst/>
-        </p:spPr>
-        <p:style>
-          <a:lnRef idx="1">
-            <a:schemeClr val="accent1"/>
-          </a:lnRef>
-          <a:fillRef idx="3">
-            <a:schemeClr val="accent1"/>
-          </a:fillRef>
-          <a:effectRef idx="2">
-            <a:schemeClr val="accent1"/>
-          </a:effectRef>
-          <a:fontRef idx="minor">
-            <a:schemeClr val="lt1"/>
-          </a:fontRef>
-        </p:style>
-        <p:txBody>
-          <a:bodyPr rtlCol="0" anchor="ctr"/>
-          <a:lstStyle/>
-          <a:p>
-            <a:pPr algn="ctr"/>
-          </a:p>
-        </p:txBody>
-      </p:sp>
-      <p:sp>
-        <p:nvSpPr>
-          <p:cNvPr id="9" name="TextBox 8"/>
+            <a:pPr algn="r"/>
+            <a:r>
+              <a:rPr sz="1000" b="1" i="0">
+                <a:solidFill>
+                  <a:srgbClr val="8F989D"/>
+                </a:solidFill>
+                <a:latin typeface="Calibri"/>
+              </a:rPr>
+              <a:t>18</a:t>
+            </a:r>
+          </a:p>
+        </p:txBody>
+      </p:sp>
+      <p:sp>
+        <p:nvSpPr>
+          <p:cNvPr id="6" name="TextBox 5"/>
           <p:cNvSpPr txBox="1"/>
           <p:nvPr/>
         </p:nvSpPr>
         <p:spPr>
           <a:xfrm>
-            <a:off x="868680" y="4754880"/>
-            <a:ext cx="10454335" cy="1005840"/>
+            <a:off x="640080" y="5943600"/>
+            <a:ext cx="9997135" cy="457200"/>
           </a:xfrm>
           <a:prstGeom prst="rect">
             <a:avLst/>
@@ -8126,73 +8189,13 @@
           <a:lstStyle/>
           <a:p>
             <a:r>
-              <a:rPr sz="1300" b="1" i="0">
-                <a:solidFill>
-                  <a:srgbClr val="0C2340"/>
-                </a:solidFill>
-                <a:latin typeface="Calibri"/>
-              </a:rPr>
-              <a:t>⚠️ Importante</a:t>
-            </a:r>
-          </a:p>
-          <a:p>
-            <a:pPr>
-              <a:spcBef>
-                <a:spcPts val="400"/>
-              </a:spcBef>
-            </a:pPr>
-            <a:r>
-              <a:rPr sz="1300" b="1" i="0">
-                <a:solidFill>
-                  <a:srgbClr val="2B2B2B"/>
-                </a:solidFill>
-                <a:latin typeface="Calibri"/>
-              </a:rPr>
-              <a:t>«¿Sirve un trabajo de otro semestre?»</a:t>
-            </a:r>
-            <a:r>
-              <a:rPr sz="1300" b="0" i="0">
-                <a:solidFill>
-                  <a:srgbClr val="2B2B2B"/>
-                </a:solidFill>
-                <a:latin typeface="Calibri"/>
-              </a:rPr>
-              <a:t> Como punto de partida sí, si usted lo declara y lo reformula para este curso. Entregarlo tal cual como si fuera nuevo también es plagio y entra en el mismo debido proceso.</a:t>
-            </a:r>
-          </a:p>
-        </p:txBody>
-      </p:sp>
-      <p:sp>
-        <p:nvSpPr>
-          <p:cNvPr id="10" name="TextBox 9"/>
-          <p:cNvSpPr txBox="1"/>
-          <p:nvPr/>
-        </p:nvSpPr>
-        <p:spPr>
-          <a:xfrm>
-            <a:off x="11094415" y="6446520"/>
-            <a:ext cx="548640" cy="274320"/>
-          </a:xfrm>
-          <a:prstGeom prst="rect">
-            <a:avLst/>
-          </a:prstGeom>
-          <a:noFill/>
-        </p:spPr>
-        <p:txBody>
-          <a:bodyPr wrap="square" anchor="t" lIns="0" rIns="0" tIns="0" bIns="0">
-            <a:spAutoFit/>
-          </a:bodyPr>
-          <a:lstStyle/>
-          <a:p>
-            <a:pPr algn="r"/>
-            <a:r>
-              <a:rPr sz="1000" b="1" i="0">
-                <a:solidFill>
-                  <a:srgbClr val="8F989D"/>
-                </a:solidFill>
-                <a:latin typeface="Calibri"/>
-              </a:rPr>
-              <a:t>18</a:t>
+              <a:rPr sz="1200" b="0" i="1">
+                <a:solidFill>
+                  <a:srgbClr val="2B2B2B"/>
+                </a:solidFill>
+                <a:latin typeface="Calibri"/>
+              </a:rPr>
+              <a:t>Nada de esto se califica hoy, pero todo se nota en la Sesión 02: la clase avanza sobre lo que ustedes traigan escrito.</a:t>
             </a:r>
           </a:p>
         </p:txBody>
@@ -8297,7 +8300,7 @@
                 </a:solidFill>
                 <a:latin typeface="Calibri"/>
               </a:rPr>
-              <a:t>ACUERDOS DE TRABAJO</a:t>
+              <a:t>Las preguntas que siempre salen el primer día</a:t>
             </a:r>
           </a:p>
         </p:txBody>
@@ -8311,7 +8314,7 @@
         <p:spPr>
           <a:xfrm>
             <a:off x="640080" y="1737360"/>
-            <a:ext cx="10911535" cy="713232"/>
+            <a:ext cx="10911535" cy="1225296"/>
           </a:xfrm>
           <a:prstGeom prst="roundRect">
             <a:avLst/>
@@ -8355,7 +8358,7 @@
         <p:spPr>
           <a:xfrm>
             <a:off x="868680" y="1847088"/>
-            <a:ext cx="10454335" cy="493776"/>
+            <a:ext cx="10454335" cy="1005840"/>
           </a:xfrm>
           <a:prstGeom prst="rect">
             <a:avLst/>
@@ -8391,7 +8394,7 @@
                 </a:solidFill>
                 <a:latin typeface="Calibri"/>
               </a:rPr>
-              <a:t>Entrega oficial: CDigital.</a:t>
+              <a:t>«¿Esta materia se pierde fácil?»</a:t>
             </a:r>
             <a:r>
               <a:rPr sz="1300" b="0" i="0">
@@ -8400,7 +8403,7 @@
                 </a:solidFill>
                 <a:latin typeface="Calibri"/>
               </a:rPr>
-              <a:t> Lo que no esté ahí, no está entregado.</a:t>
+              <a:t> No se pierde por dificultad: se pierde por entregar tarde o por entregar un documento que nadie leyó antes de subirlo. Quien trae avance cada semana llega al final con el anteproyecto prácticamente listo.</a:t>
             </a:r>
           </a:p>
         </p:txBody>
@@ -8413,8 +8416,8 @@
         </p:nvSpPr>
         <p:spPr>
           <a:xfrm>
-            <a:off x="640080" y="2679191"/>
-            <a:ext cx="10911535" cy="969264"/>
+            <a:off x="640080" y="3191256"/>
+            <a:ext cx="10911535" cy="1225296"/>
           </a:xfrm>
           <a:prstGeom prst="roundRect">
             <a:avLst/>
@@ -8457,8 +8460,8 @@
         </p:nvSpPr>
         <p:spPr>
           <a:xfrm>
-            <a:off x="868680" y="2788920"/>
-            <a:ext cx="10454335" cy="749808"/>
+            <a:off x="868680" y="3300984"/>
+            <a:ext cx="10454335" cy="1005840"/>
           </a:xfrm>
           <a:prstGeom prst="rect">
             <a:avLst/>
@@ -8488,13 +8491,22 @@
               </a:spcBef>
             </a:pPr>
             <a:r>
+              <a:rPr sz="1300" b="1" i="0">
+                <a:solidFill>
+                  <a:srgbClr val="2B2B2B"/>
+                </a:solidFill>
+                <a:latin typeface="Calibri"/>
+              </a:rPr>
+              <a:t>«¿Puedo trabajar solo?»</a:t>
+            </a:r>
+            <a:r>
               <a:rPr sz="1300" b="0" i="0">
                 <a:solidFill>
                   <a:srgbClr val="2B2B2B"/>
                 </a:solidFill>
                 <a:latin typeface="Calibri"/>
               </a:rPr>
-              <a:t>Las tutorías por grupo se acuerdan en la semana con el Docente (no hay atención espontánea sin cita).</a:t>
+              <a:t> Sí, pero el equipo es de máximo 3 y la carga de trabajo es la misma para uno que para tres. Decídanlo esta semana: después del primer corte no conviene cambiar de equipo ni de tema.</a:t>
             </a:r>
           </a:p>
         </p:txBody>
@@ -8507,14 +8519,14 @@
         </p:nvSpPr>
         <p:spPr>
           <a:xfrm>
-            <a:off x="640080" y="3877056"/>
-            <a:ext cx="10911535" cy="713232"/>
+            <a:off x="640080" y="4645152"/>
+            <a:ext cx="10911535" cy="1225296"/>
           </a:xfrm>
           <a:prstGeom prst="roundRect">
             <a:avLst/>
           </a:prstGeom>
           <a:solidFill>
-            <a:srgbClr val="FDECD8"/>
+            <a:srgbClr val="FBE4E4"/>
           </a:solidFill>
           <a:ln>
             <a:noFill/>
@@ -8551,8 +8563,8 @@
         </p:nvSpPr>
         <p:spPr>
           <a:xfrm>
-            <a:off x="868680" y="3986784"/>
-            <a:ext cx="10454335" cy="493776"/>
+            <a:off x="868680" y="4754880"/>
+            <a:ext cx="10454335" cy="1005840"/>
           </a:xfrm>
           <a:prstGeom prst="rect">
             <a:avLst/>
@@ -8572,7 +8584,7 @@
                 </a:solidFill>
                 <a:latin typeface="Calibri"/>
               </a:rPr>
-              <a:t>💡 Aclaración</a:t>
+              <a:t>⚠️ Importante</a:t>
             </a:r>
           </a:p>
           <a:p>
@@ -8582,150 +8594,29 @@
               </a:spcBef>
             </a:pPr>
             <a:r>
+              <a:rPr sz="1300" b="1" i="0">
+                <a:solidFill>
+                  <a:srgbClr val="2B2B2B"/>
+                </a:solidFill>
+                <a:latin typeface="Calibri"/>
+              </a:rPr>
+              <a:t>«¿Sirve un trabajo de otro semestre?»</a:t>
+            </a:r>
+            <a:r>
               <a:rPr sz="1300" b="0" i="0">
                 <a:solidFill>
                   <a:srgbClr val="2B2B2B"/>
                 </a:solidFill>
                 <a:latin typeface="Calibri"/>
               </a:rPr>
-              <a:t>Traer el avance </a:t>
-            </a:r>
-            <a:r>
-              <a:rPr sz="1300" b="1" i="0">
-                <a:solidFill>
-                  <a:srgbClr val="2B2B2B"/>
-                </a:solidFill>
-                <a:latin typeface="Calibri"/>
-              </a:rPr>
-              <a:t>escrito</a:t>
-            </a:r>
-            <a:r>
-              <a:rPr sz="1300" b="0" i="0">
-                <a:solidFill>
-                  <a:srgbClr val="2B2B2B"/>
-                </a:solidFill>
-                <a:latin typeface="Calibri"/>
-              </a:rPr>
-              <a:t> a cada encuentro: se trabaja sobre lo que ya existe.</a:t>
-            </a:r>
-          </a:p>
-        </p:txBody>
-      </p:sp>
-      <p:sp>
-        <p:nvSpPr>
-          <p:cNvPr id="10" name="Rounded Rectangle 9"/>
-          <p:cNvSpPr/>
-          <p:nvPr/>
-        </p:nvSpPr>
-        <p:spPr>
-          <a:xfrm>
-            <a:off x="640080" y="4818888"/>
-            <a:ext cx="10911535" cy="713232"/>
-          </a:xfrm>
-          <a:prstGeom prst="roundRect">
-            <a:avLst/>
-          </a:prstGeom>
-          <a:solidFill>
-            <a:srgbClr val="FBE4E4"/>
-          </a:solidFill>
-          <a:ln>
-            <a:noFill/>
-          </a:ln>
-          <a:effectLst/>
-        </p:spPr>
-        <p:style>
-          <a:lnRef idx="1">
-            <a:schemeClr val="accent1"/>
-          </a:lnRef>
-          <a:fillRef idx="3">
-            <a:schemeClr val="accent1"/>
-          </a:fillRef>
-          <a:effectRef idx="2">
-            <a:schemeClr val="accent1"/>
-          </a:effectRef>
-          <a:fontRef idx="minor">
-            <a:schemeClr val="lt1"/>
-          </a:fontRef>
-        </p:style>
-        <p:txBody>
-          <a:bodyPr rtlCol="0" anchor="ctr"/>
-          <a:lstStyle/>
-          <a:p>
-            <a:pPr algn="ctr"/>
-          </a:p>
-        </p:txBody>
-      </p:sp>
-      <p:sp>
-        <p:nvSpPr>
-          <p:cNvPr id="11" name="TextBox 10"/>
-          <p:cNvSpPr txBox="1"/>
-          <p:nvPr/>
-        </p:nvSpPr>
-        <p:spPr>
-          <a:xfrm>
-            <a:off x="868680" y="4928616"/>
-            <a:ext cx="10454335" cy="493776"/>
-          </a:xfrm>
-          <a:prstGeom prst="rect">
-            <a:avLst/>
-          </a:prstGeom>
-          <a:noFill/>
-        </p:spPr>
-        <p:txBody>
-          <a:bodyPr wrap="square" anchor="t" lIns="0" rIns="0" tIns="0" bIns="0">
-            <a:spAutoFit/>
-          </a:bodyPr>
-          <a:lstStyle/>
-          <a:p>
-            <a:r>
-              <a:rPr sz="1300" b="1" i="0">
-                <a:solidFill>
-                  <a:srgbClr val="0C2340"/>
-                </a:solidFill>
-                <a:latin typeface="Calibri"/>
-              </a:rPr>
-              <a:t>⚠️ Importante</a:t>
-            </a:r>
-          </a:p>
-          <a:p>
-            <a:pPr>
-              <a:spcBef>
-                <a:spcPts val="400"/>
-              </a:spcBef>
-            </a:pPr>
-            <a:r>
-              <a:rPr sz="1300" b="0" i="0">
-                <a:solidFill>
-                  <a:srgbClr val="2B2B2B"/>
-                </a:solidFill>
-                <a:latin typeface="Calibri"/>
-              </a:rPr>
-              <a:t>Integridad académica: citar siempre en </a:t>
-            </a:r>
-            <a:r>
-              <a:rPr sz="1300" b="1" i="0">
-                <a:solidFill>
-                  <a:srgbClr val="2B2B2B"/>
-                </a:solidFill>
-                <a:latin typeface="Calibri"/>
-              </a:rPr>
-              <a:t>APA 7</a:t>
-            </a:r>
-            <a:r>
-              <a:rPr sz="1300" b="0" i="0">
-                <a:solidFill>
-                  <a:srgbClr val="2B2B2B"/>
-                </a:solidFill>
-                <a:latin typeface="Calibri"/>
-              </a:rPr>
-              <a:t>. El plagio tiene debido proceso.</a:t>
-            </a:r>
-          </a:p>
-        </p:txBody>
-      </p:sp>
-      <p:sp>
-        <p:nvSpPr>
-          <p:cNvPr id="12" name="TextBox 11"/>
+              <a:t> Como punto de partida sí, si usted lo declara y lo reformula para este curso. Entregarlo tal cual como si fuera nuevo también es plagio y entra en el mismo debido proceso.</a:t>
+            </a:r>
+          </a:p>
+        </p:txBody>
+      </p:sp>
+      <p:sp>
+        <p:nvSpPr>
+          <p:cNvPr id="10" name="TextBox 9"/>
           <p:cNvSpPr txBox="1"/>
           <p:nvPr/>
         </p:nvSpPr>
@@ -9226,21 +9117,65 @@
                 </a:solidFill>
                 <a:latin typeface="Calibri"/>
               </a:rPr>
-              <a:t>PARA LA PRÓXIMA SESIÓN</a:t>
-            </a:r>
-          </a:p>
-        </p:txBody>
-      </p:sp>
-      <p:sp>
-        <p:nvSpPr>
-          <p:cNvPr id="4" name="TextBox 3"/>
+              <a:t>ACUERDOS DE TRABAJO</a:t>
+            </a:r>
+          </a:p>
+        </p:txBody>
+      </p:sp>
+      <p:sp>
+        <p:nvSpPr>
+          <p:cNvPr id="4" name="Rounded Rectangle 3"/>
+          <p:cNvSpPr/>
+          <p:nvPr/>
+        </p:nvSpPr>
+        <p:spPr>
+          <a:xfrm>
+            <a:off x="640080" y="1737360"/>
+            <a:ext cx="10911535" cy="713232"/>
+          </a:xfrm>
+          <a:prstGeom prst="roundRect">
+            <a:avLst/>
+          </a:prstGeom>
+          <a:solidFill>
+            <a:srgbClr val="E8F5EC"/>
+          </a:solidFill>
+          <a:ln>
+            <a:noFill/>
+          </a:ln>
+          <a:effectLst/>
+        </p:spPr>
+        <p:style>
+          <a:lnRef idx="1">
+            <a:schemeClr val="accent1"/>
+          </a:lnRef>
+          <a:fillRef idx="3">
+            <a:schemeClr val="accent1"/>
+          </a:fillRef>
+          <a:effectRef idx="2">
+            <a:schemeClr val="accent1"/>
+          </a:effectRef>
+          <a:fontRef idx="minor">
+            <a:schemeClr val="lt1"/>
+          </a:fontRef>
+        </p:style>
+        <p:txBody>
+          <a:bodyPr rtlCol="0" anchor="ctr"/>
+          <a:lstStyle/>
+          <a:p>
+            <a:pPr algn="ctr"/>
+          </a:p>
+        </p:txBody>
+      </p:sp>
+      <p:sp>
+        <p:nvSpPr>
+          <p:cNvPr id="5" name="TextBox 4"/>
           <p:cNvSpPr txBox="1"/>
           <p:nvPr/>
         </p:nvSpPr>
         <p:spPr>
           <a:xfrm>
-            <a:off x="640080" y="1691639"/>
-            <a:ext cx="10911535" cy="4617720"/>
+            <a:off x="868680" y="1847088"/>
+            <a:ext cx="10454335" cy="493776"/>
           </a:xfrm>
           <a:prstGeom prst="rect">
             <a:avLst/>
@@ -9253,94 +9188,364 @@
           </a:bodyPr>
           <a:lstStyle/>
           <a:p>
+            <a:r>
+              <a:rPr sz="1300" b="1" i="0">
+                <a:solidFill>
+                  <a:srgbClr val="0C2340"/>
+                </a:solidFill>
+                <a:latin typeface="Calibri"/>
+              </a:rPr>
+              <a:t>ℹ️ Nota institucional</a:t>
+            </a:r>
+          </a:p>
+          <a:p>
             <a:pPr>
-              <a:spcAft>
-                <a:spcPts val="1000"/>
-              </a:spcAft>
+              <a:spcBef>
+                <a:spcPts val="400"/>
+              </a:spcBef>
             </a:pPr>
             <a:r>
-              <a:rPr sz="1600" b="0" i="0">
-                <a:solidFill>
-                  <a:srgbClr val="2B2B2B"/>
-                </a:solidFill>
-                <a:latin typeface="Calibri"/>
-              </a:rPr>
-              <a:t>–   </a:t>
-            </a:r>
-            <a:r>
-              <a:rPr sz="1600" b="1" i="0">
-                <a:solidFill>
-                  <a:srgbClr val="2B2B2B"/>
-                </a:solidFill>
-                <a:latin typeface="Calibri"/>
-              </a:rPr>
-              <a:t>Lectura autónoma:</a:t>
-            </a:r>
-            <a:r>
-              <a:rPr sz="1600" b="0" i="0">
-                <a:solidFill>
-                  <a:srgbClr val="2B2B2B"/>
-                </a:solidFill>
-                <a:latin typeface="Calibri"/>
-              </a:rPr>
-              <a:t> ESP329 U1 (Fundamentos y enfoque de investigación) — la retomamos al abrir la Sesión 02.</a:t>
+              <a:rPr sz="1300" b="1" i="0">
+                <a:solidFill>
+                  <a:srgbClr val="2B2B2B"/>
+                </a:solidFill>
+                <a:latin typeface="Calibri"/>
+              </a:rPr>
+              <a:t>Entrega oficial: CDigital.</a:t>
+            </a:r>
+            <a:r>
+              <a:rPr sz="1300" b="0" i="0">
+                <a:solidFill>
+                  <a:srgbClr val="2B2B2B"/>
+                </a:solidFill>
+                <a:latin typeface="Calibri"/>
+              </a:rPr>
+              <a:t> Lo que no esté ahí, no está entregado.</a:t>
+            </a:r>
+          </a:p>
+        </p:txBody>
+      </p:sp>
+      <p:sp>
+        <p:nvSpPr>
+          <p:cNvPr id="6" name="Rounded Rectangle 5"/>
+          <p:cNvSpPr/>
+          <p:nvPr/>
+        </p:nvSpPr>
+        <p:spPr>
+          <a:xfrm>
+            <a:off x="640080" y="2679191"/>
+            <a:ext cx="10911535" cy="969264"/>
+          </a:xfrm>
+          <a:prstGeom prst="roundRect">
+            <a:avLst/>
+          </a:prstGeom>
+          <a:solidFill>
+            <a:srgbClr val="FDECD8"/>
+          </a:solidFill>
+          <a:ln>
+            <a:noFill/>
+          </a:ln>
+          <a:effectLst/>
+        </p:spPr>
+        <p:style>
+          <a:lnRef idx="1">
+            <a:schemeClr val="accent1"/>
+          </a:lnRef>
+          <a:fillRef idx="3">
+            <a:schemeClr val="accent1"/>
+          </a:fillRef>
+          <a:effectRef idx="2">
+            <a:schemeClr val="accent1"/>
+          </a:effectRef>
+          <a:fontRef idx="minor">
+            <a:schemeClr val="lt1"/>
+          </a:fontRef>
+        </p:style>
+        <p:txBody>
+          <a:bodyPr rtlCol="0" anchor="ctr"/>
+          <a:lstStyle/>
+          <a:p>
+            <a:pPr algn="ctr"/>
+          </a:p>
+        </p:txBody>
+      </p:sp>
+      <p:sp>
+        <p:nvSpPr>
+          <p:cNvPr id="7" name="TextBox 6"/>
+          <p:cNvSpPr txBox="1"/>
+          <p:nvPr/>
+        </p:nvSpPr>
+        <p:spPr>
+          <a:xfrm>
+            <a:off x="868680" y="2788920"/>
+            <a:ext cx="10454335" cy="749808"/>
+          </a:xfrm>
+          <a:prstGeom prst="rect">
+            <a:avLst/>
+          </a:prstGeom>
+          <a:noFill/>
+        </p:spPr>
+        <p:txBody>
+          <a:bodyPr wrap="square" anchor="t" lIns="0" rIns="0" tIns="0" bIns="0">
+            <a:spAutoFit/>
+          </a:bodyPr>
+          <a:lstStyle/>
+          <a:p>
+            <a:r>
+              <a:rPr sz="1300" b="1" i="0">
+                <a:solidFill>
+                  <a:srgbClr val="0C2340"/>
+                </a:solidFill>
+                <a:latin typeface="Calibri"/>
+              </a:rPr>
+              <a:t>💡 Aclaración</a:t>
             </a:r>
           </a:p>
           <a:p>
             <a:pPr>
-              <a:spcAft>
-                <a:spcPts val="1000"/>
-              </a:spcAft>
+              <a:spcBef>
+                <a:spcPts val="400"/>
+              </a:spcBef>
             </a:pPr>
             <a:r>
-              <a:rPr sz="1600" b="0" i="0">
-                <a:solidFill>
-                  <a:srgbClr val="2B2B2B"/>
-                </a:solidFill>
-                <a:latin typeface="Calibri"/>
-              </a:rPr>
-              <a:t>–   Revisar la </a:t>
-            </a:r>
-            <a:r>
-              <a:rPr sz="1600" b="1" i="0">
-                <a:solidFill>
-                  <a:srgbClr val="2B2B2B"/>
-                </a:solidFill>
-                <a:latin typeface="Calibri"/>
-              </a:rPr>
-              <a:t>Presentación del Curso</a:t>
-            </a:r>
-            <a:r>
-              <a:rPr sz="1600" b="0" i="0">
-                <a:solidFill>
-                  <a:srgbClr val="2B2B2B"/>
-                </a:solidFill>
-                <a:latin typeface="Calibri"/>
-              </a:rPr>
-              <a:t> completa (fechas, evaluación, contenido de todas las sesiones).</a:t>
+              <a:rPr sz="1300" b="0" i="0">
+                <a:solidFill>
+                  <a:srgbClr val="2B2B2B"/>
+                </a:solidFill>
+                <a:latin typeface="Calibri"/>
+              </a:rPr>
+              <a:t>Las tutorías por grupo se acuerdan en la semana con el Docente (no hay atención espontánea sin cita).</a:t>
+            </a:r>
+          </a:p>
+        </p:txBody>
+      </p:sp>
+      <p:sp>
+        <p:nvSpPr>
+          <p:cNvPr id="8" name="Rounded Rectangle 7"/>
+          <p:cNvSpPr/>
+          <p:nvPr/>
+        </p:nvSpPr>
+        <p:spPr>
+          <a:xfrm>
+            <a:off x="640080" y="3877056"/>
+            <a:ext cx="10911535" cy="713232"/>
+          </a:xfrm>
+          <a:prstGeom prst="roundRect">
+            <a:avLst/>
+          </a:prstGeom>
+          <a:solidFill>
+            <a:srgbClr val="FDECD8"/>
+          </a:solidFill>
+          <a:ln>
+            <a:noFill/>
+          </a:ln>
+          <a:effectLst/>
+        </p:spPr>
+        <p:style>
+          <a:lnRef idx="1">
+            <a:schemeClr val="accent1"/>
+          </a:lnRef>
+          <a:fillRef idx="3">
+            <a:schemeClr val="accent1"/>
+          </a:fillRef>
+          <a:effectRef idx="2">
+            <a:schemeClr val="accent1"/>
+          </a:effectRef>
+          <a:fontRef idx="minor">
+            <a:schemeClr val="lt1"/>
+          </a:fontRef>
+        </p:style>
+        <p:txBody>
+          <a:bodyPr rtlCol="0" anchor="ctr"/>
+          <a:lstStyle/>
+          <a:p>
+            <a:pPr algn="ctr"/>
+          </a:p>
+        </p:txBody>
+      </p:sp>
+      <p:sp>
+        <p:nvSpPr>
+          <p:cNvPr id="9" name="TextBox 8"/>
+          <p:cNvSpPr txBox="1"/>
+          <p:nvPr/>
+        </p:nvSpPr>
+        <p:spPr>
+          <a:xfrm>
+            <a:off x="868680" y="3986784"/>
+            <a:ext cx="10454335" cy="493776"/>
+          </a:xfrm>
+          <a:prstGeom prst="rect">
+            <a:avLst/>
+          </a:prstGeom>
+          <a:noFill/>
+        </p:spPr>
+        <p:txBody>
+          <a:bodyPr wrap="square" anchor="t" lIns="0" rIns="0" tIns="0" bIns="0">
+            <a:spAutoFit/>
+          </a:bodyPr>
+          <a:lstStyle/>
+          <a:p>
+            <a:r>
+              <a:rPr sz="1300" b="1" i="0">
+                <a:solidFill>
+                  <a:srgbClr val="0C2340"/>
+                </a:solidFill>
+                <a:latin typeface="Calibri"/>
+              </a:rPr>
+              <a:t>💡 Aclaración</a:t>
             </a:r>
           </a:p>
           <a:p>
             <a:pPr>
-              <a:spcAft>
-                <a:spcPts val="1000"/>
-              </a:spcAft>
+              <a:spcBef>
+                <a:spcPts val="400"/>
+              </a:spcBef>
             </a:pPr>
             <a:r>
-              <a:rPr sz="1600" b="0" i="0">
-                <a:solidFill>
-                  <a:srgbClr val="2B2B2B"/>
-                </a:solidFill>
-                <a:latin typeface="Calibri"/>
-              </a:rPr>
-              <a:t>–   Abrir los enunciados de `Clases/Recursos/ACAs/`: son la guía escrita de lo que evalúa cada corte.</a:t>
-            </a:r>
-          </a:p>
-        </p:txBody>
-      </p:sp>
-      <p:sp>
-        <p:nvSpPr>
-          <p:cNvPr id="5" name="TextBox 4"/>
+              <a:rPr sz="1300" b="0" i="0">
+                <a:solidFill>
+                  <a:srgbClr val="2B2B2B"/>
+                </a:solidFill>
+                <a:latin typeface="Calibri"/>
+              </a:rPr>
+              <a:t>Traer el avance </a:t>
+            </a:r>
+            <a:r>
+              <a:rPr sz="1300" b="1" i="0">
+                <a:solidFill>
+                  <a:srgbClr val="2B2B2B"/>
+                </a:solidFill>
+                <a:latin typeface="Calibri"/>
+              </a:rPr>
+              <a:t>escrito</a:t>
+            </a:r>
+            <a:r>
+              <a:rPr sz="1300" b="0" i="0">
+                <a:solidFill>
+                  <a:srgbClr val="2B2B2B"/>
+                </a:solidFill>
+                <a:latin typeface="Calibri"/>
+              </a:rPr>
+              <a:t> a cada encuentro: se trabaja sobre lo que ya existe.</a:t>
+            </a:r>
+          </a:p>
+        </p:txBody>
+      </p:sp>
+      <p:sp>
+        <p:nvSpPr>
+          <p:cNvPr id="10" name="Rounded Rectangle 9"/>
+          <p:cNvSpPr/>
+          <p:nvPr/>
+        </p:nvSpPr>
+        <p:spPr>
+          <a:xfrm>
+            <a:off x="640080" y="4818888"/>
+            <a:ext cx="10911535" cy="713232"/>
+          </a:xfrm>
+          <a:prstGeom prst="roundRect">
+            <a:avLst/>
+          </a:prstGeom>
+          <a:solidFill>
+            <a:srgbClr val="FBE4E4"/>
+          </a:solidFill>
+          <a:ln>
+            <a:noFill/>
+          </a:ln>
+          <a:effectLst/>
+        </p:spPr>
+        <p:style>
+          <a:lnRef idx="1">
+            <a:schemeClr val="accent1"/>
+          </a:lnRef>
+          <a:fillRef idx="3">
+            <a:schemeClr val="accent1"/>
+          </a:fillRef>
+          <a:effectRef idx="2">
+            <a:schemeClr val="accent1"/>
+          </a:effectRef>
+          <a:fontRef idx="minor">
+            <a:schemeClr val="lt1"/>
+          </a:fontRef>
+        </p:style>
+        <p:txBody>
+          <a:bodyPr rtlCol="0" anchor="ctr"/>
+          <a:lstStyle/>
+          <a:p>
+            <a:pPr algn="ctr"/>
+          </a:p>
+        </p:txBody>
+      </p:sp>
+      <p:sp>
+        <p:nvSpPr>
+          <p:cNvPr id="11" name="TextBox 10"/>
+          <p:cNvSpPr txBox="1"/>
+          <p:nvPr/>
+        </p:nvSpPr>
+        <p:spPr>
+          <a:xfrm>
+            <a:off x="868680" y="4928616"/>
+            <a:ext cx="10454335" cy="493776"/>
+          </a:xfrm>
+          <a:prstGeom prst="rect">
+            <a:avLst/>
+          </a:prstGeom>
+          <a:noFill/>
+        </p:spPr>
+        <p:txBody>
+          <a:bodyPr wrap="square" anchor="t" lIns="0" rIns="0" tIns="0" bIns="0">
+            <a:spAutoFit/>
+          </a:bodyPr>
+          <a:lstStyle/>
+          <a:p>
+            <a:r>
+              <a:rPr sz="1300" b="1" i="0">
+                <a:solidFill>
+                  <a:srgbClr val="0C2340"/>
+                </a:solidFill>
+                <a:latin typeface="Calibri"/>
+              </a:rPr>
+              <a:t>⚠️ Importante</a:t>
+            </a:r>
+          </a:p>
+          <a:p>
+            <a:pPr>
+              <a:spcBef>
+                <a:spcPts val="400"/>
+              </a:spcBef>
+            </a:pPr>
+            <a:r>
+              <a:rPr sz="1300" b="0" i="0">
+                <a:solidFill>
+                  <a:srgbClr val="2B2B2B"/>
+                </a:solidFill>
+                <a:latin typeface="Calibri"/>
+              </a:rPr>
+              <a:t>Integridad académica: citar siempre en </a:t>
+            </a:r>
+            <a:r>
+              <a:rPr sz="1300" b="1" i="0">
+                <a:solidFill>
+                  <a:srgbClr val="2B2B2B"/>
+                </a:solidFill>
+                <a:latin typeface="Calibri"/>
+              </a:rPr>
+              <a:t>APA 7</a:t>
+            </a:r>
+            <a:r>
+              <a:rPr sz="1300" b="0" i="0">
+                <a:solidFill>
+                  <a:srgbClr val="2B2B2B"/>
+                </a:solidFill>
+                <a:latin typeface="Calibri"/>
+              </a:rPr>
+              <a:t>. El plagio tiene debido proceso.</a:t>
+            </a:r>
+          </a:p>
+        </p:txBody>
+      </p:sp>
+      <p:sp>
+        <p:nvSpPr>
+          <p:cNvPr id="12" name="TextBox 11"/>
           <p:cNvSpPr txBox="1"/>
           <p:nvPr/>
         </p:nvSpPr>
@@ -9408,6 +9613,253 @@
         <p:spPr>
           <a:xfrm>
             <a:off x="0" y="0"/>
+            <a:ext cx="12191695" cy="1188720"/>
+          </a:xfrm>
+          <a:prstGeom prst="rect">
+            <a:avLst/>
+          </a:prstGeom>
+          <a:solidFill>
+            <a:srgbClr val="0C2340"/>
+          </a:solidFill>
+          <a:ln>
+            <a:noFill/>
+          </a:ln>
+          <a:effectLst/>
+        </p:spPr>
+        <p:style>
+          <a:lnRef idx="1">
+            <a:schemeClr val="accent1"/>
+          </a:lnRef>
+          <a:fillRef idx="3">
+            <a:schemeClr val="accent1"/>
+          </a:fillRef>
+          <a:effectRef idx="2">
+            <a:schemeClr val="accent1"/>
+          </a:effectRef>
+          <a:fontRef idx="minor">
+            <a:schemeClr val="lt1"/>
+          </a:fontRef>
+        </p:style>
+        <p:txBody>
+          <a:bodyPr rtlCol="0" anchor="ctr"/>
+          <a:lstStyle/>
+          <a:p>
+            <a:pPr algn="ctr"/>
+          </a:p>
+        </p:txBody>
+      </p:sp>
+      <p:sp>
+        <p:nvSpPr>
+          <p:cNvPr id="3" name="TextBox 2"/>
+          <p:cNvSpPr txBox="1"/>
+          <p:nvPr/>
+        </p:nvSpPr>
+        <p:spPr>
+          <a:xfrm>
+            <a:off x="640080" y="0"/>
+            <a:ext cx="9082735" cy="1188720"/>
+          </a:xfrm>
+          <a:prstGeom prst="rect">
+            <a:avLst/>
+          </a:prstGeom>
+          <a:noFill/>
+        </p:spPr>
+        <p:txBody>
+          <a:bodyPr wrap="square" anchor="ctr" lIns="0" rIns="0" tIns="0" bIns="0">
+            <a:spAutoFit/>
+          </a:bodyPr>
+          <a:lstStyle/>
+          <a:p>
+            <a:pPr algn="ctr"/>
+            <a:r>
+              <a:rPr sz="2600" b="1" i="0">
+                <a:solidFill>
+                  <a:srgbClr val="FFFFFF"/>
+                </a:solidFill>
+                <a:latin typeface="Calibri"/>
+              </a:rPr>
+              <a:t>PARA LA PRÓXIMA SESIÓN</a:t>
+            </a:r>
+          </a:p>
+        </p:txBody>
+      </p:sp>
+      <p:sp>
+        <p:nvSpPr>
+          <p:cNvPr id="4" name="TextBox 3"/>
+          <p:cNvSpPr txBox="1"/>
+          <p:nvPr/>
+        </p:nvSpPr>
+        <p:spPr>
+          <a:xfrm>
+            <a:off x="640080" y="1691639"/>
+            <a:ext cx="10911535" cy="4617720"/>
+          </a:xfrm>
+          <a:prstGeom prst="rect">
+            <a:avLst/>
+          </a:prstGeom>
+          <a:noFill/>
+        </p:spPr>
+        <p:txBody>
+          <a:bodyPr wrap="square" anchor="t" lIns="0" rIns="0" tIns="0" bIns="0">
+            <a:spAutoFit/>
+          </a:bodyPr>
+          <a:lstStyle/>
+          <a:p>
+            <a:pPr>
+              <a:spcAft>
+                <a:spcPts val="1000"/>
+              </a:spcAft>
+            </a:pPr>
+            <a:r>
+              <a:rPr sz="1600" b="0" i="0">
+                <a:solidFill>
+                  <a:srgbClr val="2B2B2B"/>
+                </a:solidFill>
+                <a:latin typeface="Calibri"/>
+              </a:rPr>
+              <a:t>–   </a:t>
+            </a:r>
+            <a:r>
+              <a:rPr sz="1600" b="1" i="0">
+                <a:solidFill>
+                  <a:srgbClr val="2B2B2B"/>
+                </a:solidFill>
+                <a:latin typeface="Calibri"/>
+              </a:rPr>
+              <a:t>Lectura autónoma:</a:t>
+            </a:r>
+            <a:r>
+              <a:rPr sz="1600" b="0" i="0">
+                <a:solidFill>
+                  <a:srgbClr val="2B2B2B"/>
+                </a:solidFill>
+                <a:latin typeface="Calibri"/>
+              </a:rPr>
+              <a:t> ESP329 U1 (Fundamentos y enfoque de investigación) — la retomamos al abrir la Sesión 02.</a:t>
+            </a:r>
+          </a:p>
+          <a:p>
+            <a:pPr>
+              <a:spcAft>
+                <a:spcPts val="1000"/>
+              </a:spcAft>
+            </a:pPr>
+            <a:r>
+              <a:rPr sz="1600" b="0" i="0">
+                <a:solidFill>
+                  <a:srgbClr val="2B2B2B"/>
+                </a:solidFill>
+                <a:latin typeface="Calibri"/>
+              </a:rPr>
+              <a:t>–   Revisar la </a:t>
+            </a:r>
+            <a:r>
+              <a:rPr sz="1600" b="1" i="0">
+                <a:solidFill>
+                  <a:srgbClr val="2B2B2B"/>
+                </a:solidFill>
+                <a:latin typeface="Calibri"/>
+              </a:rPr>
+              <a:t>Presentación del Curso</a:t>
+            </a:r>
+            <a:r>
+              <a:rPr sz="1600" b="0" i="0">
+                <a:solidFill>
+                  <a:srgbClr val="2B2B2B"/>
+                </a:solidFill>
+                <a:latin typeface="Calibri"/>
+              </a:rPr>
+              <a:t> completa (fechas, evaluación, contenido de todas las sesiones).</a:t>
+            </a:r>
+          </a:p>
+          <a:p>
+            <a:pPr>
+              <a:spcAft>
+                <a:spcPts val="1000"/>
+              </a:spcAft>
+            </a:pPr>
+            <a:r>
+              <a:rPr sz="1600" b="0" i="0">
+                <a:solidFill>
+                  <a:srgbClr val="2B2B2B"/>
+                </a:solidFill>
+                <a:latin typeface="Calibri"/>
+              </a:rPr>
+              <a:t>–   Abrir los enunciados de `Clases/Recursos/ACAs/`: son la guía escrita de lo que evalúa cada corte.</a:t>
+            </a:r>
+          </a:p>
+        </p:txBody>
+      </p:sp>
+      <p:sp>
+        <p:nvSpPr>
+          <p:cNvPr id="5" name="TextBox 4"/>
+          <p:cNvSpPr txBox="1"/>
+          <p:nvPr/>
+        </p:nvSpPr>
+        <p:spPr>
+          <a:xfrm>
+            <a:off x="11094415" y="6446520"/>
+            <a:ext cx="548640" cy="274320"/>
+          </a:xfrm>
+          <a:prstGeom prst="rect">
+            <a:avLst/>
+          </a:prstGeom>
+          <a:noFill/>
+        </p:spPr>
+        <p:txBody>
+          <a:bodyPr wrap="square" anchor="t" lIns="0" rIns="0" tIns="0" bIns="0">
+            <a:spAutoFit/>
+          </a:bodyPr>
+          <a:lstStyle/>
+          <a:p>
+            <a:pPr algn="r"/>
+            <a:r>
+              <a:rPr sz="1000" b="1" i="0">
+                <a:solidFill>
+                  <a:srgbClr val="8F989D"/>
+                </a:solidFill>
+                <a:latin typeface="Calibri"/>
+              </a:rPr>
+              <a:t>21</a:t>
+            </a:r>
+          </a:p>
+        </p:txBody>
+      </p:sp>
+    </p:spTree>
+  </p:cSld>
+  <p:clrMapOvr>
+    <a:masterClrMapping/>
+  </p:clrMapOvr>
+</p:sld>
+</file>
+
+<file path=ppt/slides/slide22.xml><?xml version="1.0" encoding="utf-8"?>
+<p:sld xmlns:a="http://schemas.openxmlformats.org/drawingml/2006/main" xmlns:p="http://schemas.openxmlformats.org/presentationml/2006/main" xmlns:r="http://schemas.openxmlformats.org/officeDocument/2006/relationships">
+  <p:cSld>
+    <p:bg>
+      <p:bgPr>
+        <a:solidFill>
+          <a:srgbClr val="FFFFFF"/>
+        </a:solidFill>
+        <a:effectLst/>
+      </p:bgPr>
+    </p:bg>
+    <p:spTree>
+      <p:nvGrpSpPr>
+        <p:cNvPr id="1" name=""/>
+        <p:cNvGrpSpPr/>
+        <p:nvPr/>
+      </p:nvGrpSpPr>
+      <p:grpSpPr/>
+      <p:sp>
+        <p:nvSpPr>
+          <p:cNvPr id="2" name="Rectangle 1"/>
+          <p:cNvSpPr/>
+          <p:nvPr/>
+        </p:nvSpPr>
+        <p:spPr>
+          <a:xfrm>
+            <a:off x="0" y="0"/>
             <a:ext cx="12191695" cy="164592"/>
           </a:xfrm>
           <a:prstGeom prst="rect">
@@ -10045,7 +10497,7 @@
                 </a:solidFill>
                 <a:latin typeface="Calibri"/>
               </a:rPr>
-              <a:t>Preséntate: quién eres y qué esperas del curso</a:t>
+              <a:t>Formulario de Google · encuestas y Q&amp;A en el propio Meet</a:t>
             </a:r>
           </a:p>
         </p:txBody>
@@ -10078,7 +10530,7 @@
               </a:spcAft>
             </a:pPr>
             <a:r>
-              <a:rPr sz="1400" b="0" i="0">
+              <a:rPr sz="1300" b="0" i="0">
                 <a:solidFill>
                   <a:srgbClr val="2B2B2B"/>
                 </a:solidFill>
@@ -10087,22 +10539,22 @@
               <a:t>–   </a:t>
             </a:r>
             <a:r>
-              <a:rPr sz="1400" b="1" i="0">
-                <a:solidFill>
-                  <a:srgbClr val="2B2B2B"/>
-                </a:solidFill>
-                <a:latin typeface="Calibri"/>
-              </a:rPr>
-              <a:t>Escanea o abre:</a:t>
-            </a:r>
-            <a:r>
-              <a:rPr sz="1400" b="0" i="0">
-                <a:solidFill>
-                  <a:srgbClr val="2B2B2B"/>
-                </a:solidFill>
-                <a:latin typeface="Calibri"/>
-              </a:rPr>
-              <a:t> https://padlet.com/andres_dfx/cun-wruz81hmf9k06gd7</a:t>
+              <a:rPr sz="1300" b="1" i="0">
+                <a:solidFill>
+                  <a:srgbClr val="2B2B2B"/>
+                </a:solidFill>
+                <a:latin typeface="Calibri"/>
+              </a:rPr>
+              <a:t>Escanea el QR o abre:</a:t>
+            </a:r>
+            <a:r>
+              <a:rPr sz="1300" b="0" i="0">
+                <a:solidFill>
+                  <a:srgbClr val="2B2B2B"/>
+                </a:solidFill>
+                <a:latin typeface="Calibri"/>
+              </a:rPr>
+              <a:t> [URL Formulario Preséntate — pendiente · PROYECTO I]</a:t>
             </a:r>
           </a:p>
           <a:p>
@@ -10112,16 +10564,34 @@
               </a:spcAft>
             </a:pPr>
             <a:r>
-              <a:rPr sz="1400" b="0" i="0">
-                <a:solidFill>
-                  <a:srgbClr val="2B2B2B"/>
-                </a:solidFill>
-                <a:latin typeface="Calibri"/>
-              </a:rPr>
-              <a:t>–   En un post-it escribe: </a:t>
-            </a:r>
-            <a:r>
-              <a:rPr sz="1400" b="1" i="0">
+              <a:rPr sz="1300" b="0" i="0">
+                <a:solidFill>
+                  <a:srgbClr val="2B2B2B"/>
+                </a:solidFill>
+                <a:latin typeface="Calibri"/>
+              </a:rPr>
+              <a:t>–   </a:t>
+            </a:r>
+            <a:r>
+              <a:rPr sz="1300" b="1" i="0">
+                <a:solidFill>
+                  <a:srgbClr val="2B2B2B"/>
+                </a:solidFill>
+                <a:latin typeface="Calibri"/>
+              </a:rPr>
+              <a:t>Qué respondes (1 min):</a:t>
+            </a:r>
+            <a:r>
+              <a:rPr sz="1300" b="0" i="0">
+                <a:solidFill>
+                  <a:srgbClr val="2B2B2B"/>
+                </a:solidFill>
+                <a:latin typeface="Calibri"/>
+              </a:rPr>
+              <a:t> tu </a:t>
+            </a:r>
+            <a:r>
+              <a:rPr sz="1300" b="1" i="0">
                 <a:solidFill>
                   <a:srgbClr val="2B2B2B"/>
                 </a:solidFill>
@@ -10130,49 +10600,49 @@
               <a:t>nombre</a:t>
             </a:r>
             <a:r>
-              <a:rPr sz="1400" b="0" i="0">
-                <a:solidFill>
-                  <a:srgbClr val="2B2B2B"/>
-                </a:solidFill>
-                <a:latin typeface="Calibri"/>
-              </a:rPr>
-              <a:t> + </a:t>
-            </a:r>
-            <a:r>
-              <a:rPr sz="1400" b="1" i="0">
-                <a:solidFill>
-                  <a:srgbClr val="2B2B2B"/>
-                </a:solidFill>
-                <a:latin typeface="Calibri"/>
-              </a:rPr>
-              <a:t>expectativa del curso</a:t>
-            </a:r>
-            <a:r>
-              <a:rPr sz="1400" b="0" i="0">
-                <a:solidFill>
-                  <a:srgbClr val="2B2B2B"/>
-                </a:solidFill>
-                <a:latin typeface="Calibri"/>
-              </a:rPr>
-              <a:t> o </a:t>
-            </a:r>
-            <a:r>
-              <a:rPr sz="1400" b="1" i="0">
-                <a:solidFill>
-                  <a:srgbClr val="2B2B2B"/>
-                </a:solidFill>
-                <a:latin typeface="Calibri"/>
-              </a:rPr>
-              <a:t>tema de interés</a:t>
-            </a:r>
-            <a:r>
-              <a:rPr sz="1400" b="0" i="0">
-                <a:solidFill>
-                  <a:srgbClr val="2B2B2B"/>
-                </a:solidFill>
-                <a:latin typeface="Calibri"/>
-              </a:rPr>
-              <a:t> (1 frase).</a:t>
+              <a:rPr sz="1300" b="0" i="0">
+                <a:solidFill>
+                  <a:srgbClr val="2B2B2B"/>
+                </a:solidFill>
+                <a:latin typeface="Calibri"/>
+              </a:rPr>
+              <a:t> + expectativa del curso + </a:t>
+            </a:r>
+            <a:r>
+              <a:rPr sz="1300" b="1" i="0">
+                <a:solidFill>
+                  <a:srgbClr val="2B2B2B"/>
+                </a:solidFill>
+                <a:latin typeface="Calibri"/>
+              </a:rPr>
+              <a:t>tema tentativo</a:t>
+            </a:r>
+            <a:r>
+              <a:rPr sz="1300" b="0" i="0">
+                <a:solidFill>
+                  <a:srgbClr val="2B2B2B"/>
+                </a:solidFill>
+                <a:latin typeface="Calibri"/>
+              </a:rPr>
+              <a:t> de investigación (1 frase). Entras con tu correo </a:t>
+            </a:r>
+            <a:r>
+              <a:rPr sz="1300" b="1" i="0">
+                <a:solidFill>
+                  <a:srgbClr val="2B2B2B"/>
+                </a:solidFill>
+                <a:latin typeface="Calibri"/>
+              </a:rPr>
+              <a:t>@cun.edu.co</a:t>
+            </a:r>
+            <a:r>
+              <a:rPr sz="1300" b="0" i="0">
+                <a:solidFill>
+                  <a:srgbClr val="2B2B2B"/>
+                </a:solidFill>
+                <a:latin typeface="Calibri"/>
+              </a:rPr>
+              <a:t>: no hay que crear cuenta ni instalar nada.</a:t>
             </a:r>
           </a:p>
           <a:p>
@@ -10182,31 +10652,31 @@
               </a:spcAft>
             </a:pPr>
             <a:r>
-              <a:rPr sz="1400" b="0" i="0">
-                <a:solidFill>
-                  <a:srgbClr val="2B2B2B"/>
-                </a:solidFill>
-                <a:latin typeface="Calibri"/>
-              </a:rPr>
-              <a:t>–   Tablero oficial: </a:t>
-            </a:r>
-            <a:r>
-              <a:rPr sz="1400" b="1" i="0">
-                <a:solidFill>
-                  <a:srgbClr val="2B2B2B"/>
-                </a:solidFill>
-                <a:latin typeface="Calibri"/>
-              </a:rPr>
-              <a:t>Padlet</a:t>
-            </a:r>
-            <a:r>
-              <a:rPr sz="1400" b="0" i="0">
-                <a:solidFill>
-                  <a:srgbClr val="2B2B2B"/>
-                </a:solidFill>
-                <a:latin typeface="Calibri"/>
-              </a:rPr>
-              <a:t> (mismo enlace en los 5 cursos).</a:t>
+              <a:rPr sz="1300" b="0" i="0">
+                <a:solidFill>
+                  <a:srgbClr val="2B2B2B"/>
+                </a:solidFill>
+                <a:latin typeface="Calibri"/>
+              </a:rPr>
+              <a:t>–   </a:t>
+            </a:r>
+            <a:r>
+              <a:rPr sz="1300" b="1" i="0">
+                <a:solidFill>
+                  <a:srgbClr val="2B2B2B"/>
+                </a:solidFill>
+                <a:latin typeface="Calibri"/>
+              </a:rPr>
+              <a:t>Ahora, ~3 min.</a:t>
+            </a:r>
+            <a:r>
+              <a:rPr sz="1300" b="0" i="0">
+                <a:solidFill>
+                  <a:srgbClr val="2B2B2B"/>
+                </a:solidFill>
+                <a:latin typeface="Calibri"/>
+              </a:rPr>
+              <a:t> Somos 50: no alcanzamos a presentarnos uno por uno, así que el formulario nos ordena.</a:t>
             </a:r>
           </a:p>
           <a:p>
@@ -10216,13 +10686,171 @@
               </a:spcAft>
             </a:pPr>
             <a:r>
-              <a:rPr sz="1400" b="0" i="0">
-                <a:solidFill>
-                  <a:srgbClr val="2B2B2B"/>
-                </a:solidFill>
-                <a:latin typeface="Calibri"/>
-              </a:rPr>
-              <a:t>–   Ahora (~7 min). Leemos juntos 3–4 notas (sin juzgar).</a:t>
+              <a:rPr sz="1300" b="0" i="0">
+                <a:solidFill>
+                  <a:srgbClr val="2B2B2B"/>
+                </a:solidFill>
+                <a:latin typeface="Calibri"/>
+              </a:rPr>
+              <a:t>–   </a:t>
+            </a:r>
+            <a:r>
+              <a:rPr sz="1300" b="1" i="0">
+                <a:solidFill>
+                  <a:srgbClr val="2B2B2B"/>
+                </a:solidFill>
+                <a:latin typeface="Calibri"/>
+              </a:rPr>
+              <a:t>Con eso, hoy:</a:t>
+            </a:r>
+            <a:r>
+              <a:rPr sz="1300" b="0" i="0">
+                <a:solidFill>
+                  <a:srgbClr val="2B2B2B"/>
+                </a:solidFill>
+                <a:latin typeface="Calibri"/>
+              </a:rPr>
+              <a:t> el Docente lee en voz alta </a:t>
+            </a:r>
+            <a:r>
+              <a:rPr sz="1300" b="1" i="0">
+                <a:solidFill>
+                  <a:srgbClr val="2B2B2B"/>
+                </a:solidFill>
+                <a:latin typeface="Calibri"/>
+              </a:rPr>
+              <a:t>5 o 6 respuestas</a:t>
+            </a:r>
+            <a:r>
+              <a:rPr sz="1300" b="0" i="0">
+                <a:solidFill>
+                  <a:srgbClr val="2B2B2B"/>
+                </a:solidFill>
+                <a:latin typeface="Calibri"/>
+              </a:rPr>
+              <a:t> y proyecta el </a:t>
+            </a:r>
+            <a:r>
+              <a:rPr sz="1300" b="1" i="0">
+                <a:solidFill>
+                  <a:srgbClr val="2B2B2B"/>
+                </a:solidFill>
+                <a:latin typeface="Calibri"/>
+              </a:rPr>
+              <a:t>resumen</a:t>
+            </a:r>
+            <a:r>
+              <a:rPr sz="1300" b="0" i="0">
+                <a:solidFill>
+                  <a:srgbClr val="2B2B2B"/>
+                </a:solidFill>
+                <a:latin typeface="Calibri"/>
+              </a:rPr>
+              <a:t> del formulario — ahí quedan todas a la vista, no solo las leídas.</a:t>
+            </a:r>
+          </a:p>
+          <a:p>
+            <a:pPr>
+              <a:spcAft>
+                <a:spcPts val="1000"/>
+              </a:spcAft>
+            </a:pPr>
+            <a:r>
+              <a:rPr sz="1300" b="0" i="0">
+                <a:solidFill>
+                  <a:srgbClr val="2B2B2B"/>
+                </a:solidFill>
+                <a:latin typeface="Calibri"/>
+              </a:rPr>
+              <a:t>–   </a:t>
+            </a:r>
+            <a:r>
+              <a:rPr sz="1300" b="1" i="0">
+                <a:solidFill>
+                  <a:srgbClr val="2B2B2B"/>
+                </a:solidFill>
+                <a:latin typeface="Calibri"/>
+              </a:rPr>
+              <a:t>En vivo:</a:t>
+            </a:r>
+            <a:r>
+              <a:rPr sz="1300" b="0" i="0">
+                <a:solidFill>
+                  <a:srgbClr val="2B2B2B"/>
+                </a:solidFill>
+                <a:latin typeface="Calibri"/>
+              </a:rPr>
+              <a:t> las preguntas y las votaciones van por la </a:t>
+            </a:r>
+            <a:r>
+              <a:rPr sz="1300" b="1" i="0">
+                <a:solidFill>
+                  <a:srgbClr val="2B2B2B"/>
+                </a:solidFill>
+                <a:latin typeface="Calibri"/>
+              </a:rPr>
+              <a:t>encuesta</a:t>
+            </a:r>
+            <a:r>
+              <a:rPr sz="1300" b="0" i="0">
+                <a:solidFill>
+                  <a:srgbClr val="2B2B2B"/>
+                </a:solidFill>
+                <a:latin typeface="Calibri"/>
+              </a:rPr>
+              <a:t> y el </a:t>
+            </a:r>
+            <a:r>
+              <a:rPr sz="1300" b="1" i="0">
+                <a:solidFill>
+                  <a:srgbClr val="2B2B2B"/>
+                </a:solidFill>
+                <a:latin typeface="Calibri"/>
+              </a:rPr>
+              <a:t>Q&amp;A</a:t>
+            </a:r>
+            <a:r>
+              <a:rPr sz="1300" b="0" i="0">
+                <a:solidFill>
+                  <a:srgbClr val="2B2B2B"/>
+                </a:solidFill>
+                <a:latin typeface="Calibri"/>
+              </a:rPr>
+              <a:t> del propio Meet; no hay que abrir ninguna otra plataforma.</a:t>
+            </a:r>
+          </a:p>
+          <a:p>
+            <a:pPr>
+              <a:spcAft>
+                <a:spcPts val="1000"/>
+              </a:spcAft>
+            </a:pPr>
+            <a:r>
+              <a:rPr sz="1300" b="0" i="0">
+                <a:solidFill>
+                  <a:srgbClr val="2B2B2B"/>
+                </a:solidFill>
+                <a:latin typeface="Calibri"/>
+              </a:rPr>
+              <a:t>–   </a:t>
+            </a:r>
+            <a:r>
+              <a:rPr sz="1300" b="1" i="0">
+                <a:solidFill>
+                  <a:srgbClr val="2B2B2B"/>
+                </a:solidFill>
+                <a:latin typeface="Calibri"/>
+              </a:rPr>
+              <a:t>Después:</a:t>
+            </a:r>
+            <a:r>
+              <a:rPr sz="1300" b="0" i="0">
+                <a:solidFill>
+                  <a:srgbClr val="2B2B2B"/>
+                </a:solidFill>
+                <a:latin typeface="Calibri"/>
+              </a:rPr>
+              <a:t> las respuestas quedan en una hoja que el Docente usa todo el periodo (equipos, ejemplos y seguimiento).</a:t>
             </a:r>
           </a:p>
         </p:txBody>
@@ -10271,40 +10899,16 @@
           </a:p>
         </p:txBody>
       </p:sp>
-      <p:pic>
-        <p:nvPicPr>
-          <p:cNvPr id="7" name="Picture 6" descr="qr_presentacion_estudiantes.png"/>
-          <p:cNvPicPr>
-            <a:picLocks noChangeAspect="1"/>
-          </p:cNvPicPr>
-          <p:nvPr/>
-        </p:nvPicPr>
-        <p:blipFill>
-          <a:blip r:embed="rId2"/>
-          <a:stretch>
-            <a:fillRect/>
-          </a:stretch>
-        </p:blipFill>
-        <p:spPr>
-          <a:xfrm>
-            <a:off x="8442655" y="2103120"/>
-            <a:ext cx="3108960" cy="3108960"/>
-          </a:xfrm>
-          <a:prstGeom prst="rect">
-            <a:avLst/>
-          </a:prstGeom>
-        </p:spPr>
-      </p:pic>
-      <p:sp>
-        <p:nvSpPr>
-          <p:cNvPr id="8" name="TextBox 7"/>
+      <p:sp>
+        <p:nvSpPr>
+          <p:cNvPr id="7" name="TextBox 6"/>
           <p:cNvSpPr txBox="1"/>
           <p:nvPr/>
         </p:nvSpPr>
         <p:spPr>
           <a:xfrm>
-            <a:off x="8332927" y="5230367"/>
-            <a:ext cx="3328415" cy="256032"/>
+            <a:off x="8579815" y="2926079"/>
+            <a:ext cx="2834640" cy="1463040"/>
           </a:xfrm>
           <a:prstGeom prst="rect">
             <a:avLst/>
@@ -10312,34 +10916,50 @@
           <a:noFill/>
         </p:spPr>
         <p:txBody>
-          <a:bodyPr wrap="square" anchor="t" lIns="0" rIns="0" tIns="0" bIns="0">
+          <a:bodyPr wrap="square" anchor="ctr" lIns="0" rIns="0" tIns="0" bIns="0">
             <a:spAutoFit/>
           </a:bodyPr>
           <a:lstStyle/>
           <a:p>
             <a:pPr algn="ctr"/>
             <a:r>
-              <a:rPr sz="1200" b="1" i="0">
+              <a:rPr sz="1800" b="1" i="0">
                 <a:solidFill>
                   <a:srgbClr val="0C2340"/>
                 </a:solidFill>
                 <a:latin typeface="Calibri"/>
               </a:rPr>
-              <a:t>Escanea o abre</a:t>
-            </a:r>
-          </a:p>
-        </p:txBody>
-      </p:sp>
-      <p:sp>
-        <p:nvSpPr>
-          <p:cNvPr id="9" name="TextBox 8"/>
+              <a:t>QR pendiente</a:t>
+            </a:r>
+          </a:p>
+          <a:p>
+            <a:pPr algn="ctr">
+              <a:spcBef>
+                <a:spcPts val="1000"/>
+              </a:spcBef>
+            </a:pPr>
+            <a:r>
+              <a:rPr sz="1200" b="0" i="0">
+                <a:solidFill>
+                  <a:srgbClr val="2B2B2B"/>
+                </a:solidFill>
+                <a:latin typeface="Calibri"/>
+              </a:rPr>
+              <a:t>Se genera cuando el formulario tenga enlace real.</a:t>
+            </a:r>
+          </a:p>
+        </p:txBody>
+      </p:sp>
+      <p:sp>
+        <p:nvSpPr>
+          <p:cNvPr id="8" name="TextBox 7"/>
           <p:cNvSpPr txBox="1"/>
           <p:nvPr/>
         </p:nvSpPr>
         <p:spPr>
           <a:xfrm>
-            <a:off x="8332927" y="5468112"/>
-            <a:ext cx="3328415" cy="411480"/>
+            <a:off x="8332927" y="5230367"/>
+            <a:ext cx="3328415" cy="640080"/>
           </a:xfrm>
           <a:prstGeom prst="rect">
             <a:avLst/>
@@ -10360,14 +10980,14 @@
                 </a:solidFill>
                 <a:latin typeface="Calibri"/>
               </a:rPr>
-              <a:t>https://padlet.com/andres_dfx/cun-wruz81hmf9k06gd7</a:t>
-            </a:r>
-          </a:p>
-        </p:txBody>
-      </p:sp>
-      <p:sp>
-        <p:nvSpPr>
-          <p:cNvPr id="10" name="TextBox 9"/>
+              <a:t>[URL Formulario Preséntate — pendiente · PROYECTO I]</a:t>
+            </a:r>
+          </a:p>
+        </p:txBody>
+      </p:sp>
+      <p:sp>
+        <p:nvSpPr>
+          <p:cNvPr id="9" name="TextBox 8"/>
           <p:cNvSpPr txBox="1"/>
           <p:nvPr/>
         </p:nvSpPr>
@@ -11548,7 +12168,7 @@
                 </a:solidFill>
                 <a:latin typeface="Calibri"/>
               </a:rPr>
-              <a:t>Cómo trabajamos: el encuentro tiene dos mitades</a:t>
+              <a:t>Preséntate: el formulario del curso (y por qué no un muro)</a:t>
             </a:r>
           </a:p>
         </p:txBody>
@@ -11581,31 +12201,65 @@
               </a:spcAft>
             </a:pPr>
             <a:r>
-              <a:rPr sz="1600" b="0" i="0">
-                <a:solidFill>
-                  <a:srgbClr val="2B2B2B"/>
-                </a:solidFill>
-                <a:latin typeface="Calibri"/>
-              </a:rPr>
-              <a:t>–   Nos vemos </a:t>
-            </a:r>
-            <a:r>
-              <a:rPr sz="1600" b="1" i="0">
-                <a:solidFill>
-                  <a:srgbClr val="2B2B2B"/>
-                </a:solidFill>
-                <a:latin typeface="Calibri"/>
-              </a:rPr>
-              <a:t>una vez por semana, dos horas</a:t>
-            </a:r>
-            <a:r>
-              <a:rPr sz="1600" b="0" i="0">
-                <a:solidFill>
-                  <a:srgbClr val="2B2B2B"/>
-                </a:solidFill>
-                <a:latin typeface="Calibri"/>
-              </a:rPr>
-              <a:t>. No son dos horas de exposición.</a:t>
+              <a:rPr sz="1500" b="0" i="0">
+                <a:solidFill>
+                  <a:srgbClr val="2B2B2B"/>
+                </a:solidFill>
+                <a:latin typeface="Calibri"/>
+              </a:rPr>
+              <a:t>–   Somos </a:t>
+            </a:r>
+            <a:r>
+              <a:rPr sz="1500" b="1" i="0">
+                <a:solidFill>
+                  <a:srgbClr val="2B2B2B"/>
+                </a:solidFill>
+                <a:latin typeface="Calibri"/>
+              </a:rPr>
+              <a:t>50 matriculados</a:t>
+            </a:r>
+            <a:r>
+              <a:rPr sz="1500" b="0" i="0">
+                <a:solidFill>
+                  <a:srgbClr val="2B2B2B"/>
+                </a:solidFill>
+                <a:latin typeface="Calibri"/>
+              </a:rPr>
+              <a:t>: un muro de notas no se alcanza a leer en clase y la mitad quedaría sin ser vista.</a:t>
+            </a:r>
+          </a:p>
+          <a:p>
+            <a:pPr>
+              <a:spcAft>
+                <a:spcPts val="1000"/>
+              </a:spcAft>
+            </a:pPr>
+            <a:r>
+              <a:rPr sz="1500" b="0" i="0">
+                <a:solidFill>
+                  <a:srgbClr val="2B2B2B"/>
+                </a:solidFill>
+                <a:latin typeface="Calibri"/>
+              </a:rPr>
+              <a:t>–   Por eso el rompehielos es un </a:t>
+            </a:r>
+            <a:r>
+              <a:rPr sz="1500" b="1" i="0">
+                <a:solidFill>
+                  <a:srgbClr val="2B2B2B"/>
+                </a:solidFill>
+                <a:latin typeface="Calibri"/>
+              </a:rPr>
+              <a:t>formulario de Google</a:t>
+            </a:r>
+            <a:r>
+              <a:rPr sz="1500" b="0" i="0">
+                <a:solidFill>
+                  <a:srgbClr val="2B2B2B"/>
+                </a:solidFill>
+                <a:latin typeface="Calibri"/>
+              </a:rPr>
+              <a:t>: el Docente lo pega en el chat del Meet y queda en el LEEME de `Clases/`.</a:t>
             </a:r>
           </a:p>
           <a:p>
@@ -11615,7 +12269,7 @@
               </a:spcAft>
             </a:pPr>
             <a:r>
-              <a:rPr sz="1500" b="0" i="0">
+              <a:rPr sz="1400" b="0" i="0">
                 <a:solidFill>
                   <a:srgbClr val="2B2B2B"/>
                 </a:solidFill>
@@ -11624,22 +12278,22 @@
               <a:t>●   </a:t>
             </a:r>
             <a:r>
-              <a:rPr sz="1500" b="1" i="0">
-                <a:solidFill>
-                  <a:srgbClr val="2B2B2B"/>
-                </a:solidFill>
-                <a:latin typeface="Calibri"/>
-              </a:rPr>
-              <a:t>Primera hora — contenido:</a:t>
-            </a:r>
-            <a:r>
-              <a:rPr sz="1500" b="0" i="0">
-                <a:solidFill>
-                  <a:srgbClr val="2B2B2B"/>
-                </a:solidFill>
-                <a:latin typeface="Calibri"/>
-              </a:rPr>
-              <a:t> el Docente explica el punto de la semana y modela un ejemplo en pantalla.</a:t>
+              <a:rPr sz="1400" b="1" i="0">
+                <a:solidFill>
+                  <a:srgbClr val="2B2B2B"/>
+                </a:solidFill>
+                <a:latin typeface="Calibri"/>
+              </a:rPr>
+              <a:t>Enlace:</a:t>
+            </a:r>
+            <a:r>
+              <a:rPr sz="1400" b="0" i="0">
+                <a:solidFill>
+                  <a:srgbClr val="2B2B2B"/>
+                </a:solidFill>
+                <a:latin typeface="Calibri"/>
+              </a:rPr>
+              <a:t> [URL Formulario «Preséntate» — pendiente]</a:t>
             </a:r>
           </a:p>
           <a:p>
@@ -11649,31 +12303,31 @@
               </a:spcAft>
             </a:pPr>
             <a:r>
-              <a:rPr sz="1500" b="0" i="0">
-                <a:solidFill>
-                  <a:srgbClr val="2B2B2B"/>
-                </a:solidFill>
-                <a:latin typeface="Calibri"/>
-              </a:rPr>
-              <a:t>●   </a:t>
-            </a:r>
-            <a:r>
-              <a:rPr sz="1500" b="1" i="0">
-                <a:solidFill>
-                  <a:srgbClr val="2B2B2B"/>
-                </a:solidFill>
-                <a:latin typeface="Calibri"/>
-              </a:rPr>
-              <a:t>Segunda hora — tutoría en vivo:</a:t>
-            </a:r>
-            <a:r>
-              <a:rPr sz="1500" b="0" i="0">
-                <a:solidFill>
-                  <a:srgbClr val="2B2B2B"/>
-                </a:solidFill>
-                <a:latin typeface="Calibri"/>
-              </a:rPr>
-              <a:t> cada equipo trabaja su avance y el Docente pasa por los equipos.</a:t>
+              <a:rPr sz="1400" b="0" i="0">
+                <a:solidFill>
+                  <a:srgbClr val="2B2B2B"/>
+                </a:solidFill>
+                <a:latin typeface="Calibri"/>
+              </a:rPr>
+              <a:t>●   Se entra con el correo </a:t>
+            </a:r>
+            <a:r>
+              <a:rPr sz="1400" b="1" i="0">
+                <a:solidFill>
+                  <a:srgbClr val="2B2B2B"/>
+                </a:solidFill>
+                <a:latin typeface="Calibri"/>
+              </a:rPr>
+              <a:t>@cun.edu.co</a:t>
+            </a:r>
+            <a:r>
+              <a:rPr sz="1400" b="0" i="0">
+                <a:solidFill>
+                  <a:srgbClr val="2B2B2B"/>
+                </a:solidFill>
+                <a:latin typeface="Calibri"/>
+              </a:rPr>
+              <a:t>: no hay que crear cuenta en ninguna plataforma nueva ni instalar nada.</a:t>
             </a:r>
           </a:p>
           <a:p>
@@ -11683,49 +12337,67 @@
               </a:spcAft>
             </a:pPr>
             <a:r>
-              <a:rPr sz="1600" b="0" i="0">
-                <a:solidFill>
-                  <a:srgbClr val="2B2B2B"/>
-                </a:solidFill>
-                <a:latin typeface="Calibri"/>
-              </a:rPr>
-              <a:t>–   El curso funciona </a:t>
-            </a:r>
-            <a:r>
-              <a:rPr sz="1600" b="1" i="0">
-                <a:solidFill>
-                  <a:srgbClr val="2B2B2B"/>
-                </a:solidFill>
-                <a:latin typeface="Calibri"/>
-              </a:rPr>
-              <a:t>al revés de lo que se acostumbra</a:t>
-            </a:r>
-            <a:r>
-              <a:rPr sz="1600" b="0" i="0">
-                <a:solidFill>
-                  <a:srgbClr val="2B2B2B"/>
-                </a:solidFill>
-                <a:latin typeface="Calibri"/>
-              </a:rPr>
-              <a:t>: se lee y se escribe </a:t>
-            </a:r>
-            <a:r>
-              <a:rPr sz="1600" b="1" i="0">
-                <a:solidFill>
-                  <a:srgbClr val="2B2B2B"/>
-                </a:solidFill>
-                <a:latin typeface="Calibri"/>
-              </a:rPr>
-              <a:t>antes</a:t>
-            </a:r>
-            <a:r>
-              <a:rPr sz="1600" b="0" i="0">
-                <a:solidFill>
-                  <a:srgbClr val="2B2B2B"/>
-                </a:solidFill>
-                <a:latin typeface="Calibri"/>
-              </a:rPr>
-              <a:t> de llegar al encuentro.</a:t>
+              <a:rPr sz="1500" b="0" i="0">
+                <a:solidFill>
+                  <a:srgbClr val="2B2B2B"/>
+                </a:solidFill>
+                <a:latin typeface="Calibri"/>
+              </a:rPr>
+              <a:t>–   </a:t>
+            </a:r>
+            <a:r>
+              <a:rPr sz="1500" b="1" i="0">
+                <a:solidFill>
+                  <a:srgbClr val="2B2B2B"/>
+                </a:solidFill>
+                <a:latin typeface="Calibri"/>
+              </a:rPr>
+              <a:t>Qué se responde</a:t>
+            </a:r>
+            <a:r>
+              <a:rPr sz="1500" b="0" i="0">
+                <a:solidFill>
+                  <a:srgbClr val="2B2B2B"/>
+                </a:solidFill>
+                <a:latin typeface="Calibri"/>
+              </a:rPr>
+              <a:t> (2–3 minutos, una sola vez): nombre, programa, </a:t>
+            </a:r>
+            <a:r>
+              <a:rPr sz="1500" b="1" i="0">
+                <a:solidFill>
+                  <a:srgbClr val="2B2B2B"/>
+                </a:solidFill>
+                <a:latin typeface="Calibri"/>
+              </a:rPr>
+              <a:t>expectativa del curso</a:t>
+            </a:r>
+            <a:r>
+              <a:rPr sz="1500" b="0" i="0">
+                <a:solidFill>
+                  <a:srgbClr val="2B2B2B"/>
+                </a:solidFill>
+                <a:latin typeface="Calibri"/>
+              </a:rPr>
+              <a:t> y </a:t>
+            </a:r>
+            <a:r>
+              <a:rPr sz="1500" b="1" i="0">
+                <a:solidFill>
+                  <a:srgbClr val="2B2B2B"/>
+                </a:solidFill>
+                <a:latin typeface="Calibri"/>
+              </a:rPr>
+              <a:t>tema tentativo</a:t>
+            </a:r>
+            <a:r>
+              <a:rPr sz="1500" b="0" i="0">
+                <a:solidFill>
+                  <a:srgbClr val="2B2B2B"/>
+                </a:solidFill>
+                <a:latin typeface="Calibri"/>
+              </a:rPr>
+              <a:t> de investigación en una frase.</a:t>
             </a:r>
           </a:p>
           <a:p>
@@ -11735,47 +12407,13 @@
               </a:spcAft>
             </a:pPr>
             <a:r>
-              <a:rPr sz="1500" b="0" i="0">
-                <a:solidFill>
-                  <a:srgbClr val="2B2B2B"/>
-                </a:solidFill>
-                <a:latin typeface="Calibri"/>
-              </a:rPr>
-              <a:t>●   A cada sesión se </a:t>
-            </a:r>
-            <a:r>
-              <a:rPr sz="1500" b="1" i="0">
-                <a:solidFill>
-                  <a:srgbClr val="2B2B2B"/>
-                </a:solidFill>
-                <a:latin typeface="Calibri"/>
-              </a:rPr>
-              <a:t>trae el avance escrito</a:t>
-            </a:r>
-            <a:r>
-              <a:rPr sz="1500" b="0" i="0">
-                <a:solidFill>
-                  <a:srgbClr val="2B2B2B"/>
-                </a:solidFill>
-                <a:latin typeface="Calibri"/>
-              </a:rPr>
-              <a:t>. Aquí se corrige lo que ya existe; no se empieza de cero en clase.</a:t>
-            </a:r>
-          </a:p>
-          <a:p>
-            <a:pPr lvl="1">
-              <a:spcAft>
-                <a:spcPts val="600"/>
-              </a:spcAft>
-            </a:pPr>
-            <a:r>
-              <a:rPr sz="1500" b="0" i="0">
-                <a:solidFill>
-                  <a:srgbClr val="2B2B2B"/>
-                </a:solidFill>
-                <a:latin typeface="Calibri"/>
-              </a:rPr>
-              <a:t>●   Quien llega sin nada escrito pierde la segunda hora: no hay avance que revisar.</a:t>
+              <a:rPr sz="1400" b="0" i="0">
+                <a:solidFill>
+                  <a:srgbClr val="2B2B2B"/>
+                </a:solidFill>
+                <a:latin typeface="Calibri"/>
+              </a:rPr>
+              <a:t>●   Digan también con quién piensan hacer equipo, si ya lo tienen: de ahí sale el armado de los equipos de máximo 3.</a:t>
             </a:r>
           </a:p>
           <a:p>
@@ -11785,37 +12423,37 @@
               </a:spcAft>
             </a:pPr>
             <a:r>
-              <a:rPr sz="1600" b="0" i="0">
-                <a:solidFill>
-                  <a:srgbClr val="2B2B2B"/>
-                </a:solidFill>
-                <a:latin typeface="Calibri"/>
-              </a:rPr>
-              <a:t>–   Se trabaja en </a:t>
-            </a:r>
-            <a:r>
-              <a:rPr sz="1600" b="1" i="0">
-                <a:solidFill>
-                  <a:srgbClr val="2B2B2B"/>
-                </a:solidFill>
-                <a:latin typeface="Calibri"/>
-              </a:rPr>
-              <a:t>equipos de máximo 3 personas</a:t>
-            </a:r>
-            <a:r>
-              <a:rPr sz="1600" b="0" i="0">
-                <a:solidFill>
-                  <a:srgbClr val="2B2B2B"/>
-                </a:solidFill>
-                <a:latin typeface="Calibri"/>
-              </a:rPr>
-              <a:t>, los mismos durante todo el curso.</a:t>
-            </a:r>
-          </a:p>
-          <a:p>
-            <a:pPr lvl="1">
+              <a:rPr sz="1500" b="0" i="0">
+                <a:solidFill>
+                  <a:srgbClr val="2B2B2B"/>
+                </a:solidFill>
+                <a:latin typeface="Calibri"/>
+              </a:rPr>
+              <a:t>–   </a:t>
+            </a:r>
+            <a:r>
+              <a:rPr sz="1500" b="1" i="0">
+                <a:solidFill>
+                  <a:srgbClr val="2B2B2B"/>
+                </a:solidFill>
+                <a:latin typeface="Calibri"/>
+              </a:rPr>
+              <a:t>Cuándo:</a:t>
+            </a:r>
+            <a:r>
+              <a:rPr sz="1500" b="0" i="0">
+                <a:solidFill>
+                  <a:srgbClr val="2B2B2B"/>
+                </a:solidFill>
+                <a:latin typeface="Calibri"/>
+              </a:rPr>
+              <a:t> en los primeros minutos del encuentro. Al cerrar, el Docente proyecta el resumen y lee en voz alta cinco o seis respuestas.</a:t>
+            </a:r>
+          </a:p>
+          <a:p>
+            <a:pPr>
               <a:spcAft>
-                <a:spcPts val="600"/>
+                <a:spcPts val="1000"/>
               </a:spcAft>
             </a:pPr>
             <a:r>
@@ -11825,13 +12463,67 @@
                 </a:solidFill>
                 <a:latin typeface="Calibri"/>
               </a:rPr>
-              <a:t>●   Un solo integrante sube la entrega grupal, pero la nota es del equipo, no de quien subió el archivo.</a:t>
-            </a:r>
-          </a:p>
-          <a:p>
-            <a:pPr lvl="1">
+              <a:t>–   </a:t>
+            </a:r>
+            <a:r>
+              <a:rPr sz="1500" b="1" i="0">
+                <a:solidFill>
+                  <a:srgbClr val="2B2B2B"/>
+                </a:solidFill>
+                <a:latin typeface="Calibri"/>
+              </a:rPr>
+              <a:t>En vivo se participa por el Meet:</a:t>
+            </a:r>
+            <a:r>
+              <a:rPr sz="1500" b="0" i="0">
+                <a:solidFill>
+                  <a:srgbClr val="2B2B2B"/>
+                </a:solidFill>
+                <a:latin typeface="Calibri"/>
+              </a:rPr>
+              <a:t> las </a:t>
+            </a:r>
+            <a:r>
+              <a:rPr sz="1500" b="1" i="0">
+                <a:solidFill>
+                  <a:srgbClr val="2B2B2B"/>
+                </a:solidFill>
+                <a:latin typeface="Calibri"/>
+              </a:rPr>
+              <a:t>encuestas</a:t>
+            </a:r>
+            <a:r>
+              <a:rPr sz="1500" b="0" i="0">
+                <a:solidFill>
+                  <a:srgbClr val="2B2B2B"/>
+                </a:solidFill>
+                <a:latin typeface="Calibri"/>
+              </a:rPr>
+              <a:t> y el </a:t>
+            </a:r>
+            <a:r>
+              <a:rPr sz="1500" b="1" i="0">
+                <a:solidFill>
+                  <a:srgbClr val="2B2B2B"/>
+                </a:solidFill>
+                <a:latin typeface="Calibri"/>
+              </a:rPr>
+              <a:t>Q&amp;A</a:t>
+            </a:r>
+            <a:r>
+              <a:rPr sz="1500" b="0" i="0">
+                <a:solidFill>
+                  <a:srgbClr val="2B2B2B"/>
+                </a:solidFill>
+                <a:latin typeface="Calibri"/>
+              </a:rPr>
+              <a:t> de la propia sala aguantan al curso completo.</a:t>
+            </a:r>
+          </a:p>
+          <a:p>
+            <a:pPr>
               <a:spcAft>
-                <a:spcPts val="600"/>
+                <a:spcPts val="1000"/>
               </a:spcAft>
             </a:pPr>
             <a:r>
@@ -11841,7 +12533,7 @@
                 </a:solidFill>
                 <a:latin typeface="Calibri"/>
               </a:rPr>
-              <a:t>●   ¿Prefieren trabajar solos? Se puede, y la carga es la misma. Decídanlo esta semana, no en octubre.</a:t>
+              <a:t>–   Queda abierto hasta la Sesión 02 para quien llegó tarde o no alcanzó a responder hoy.</a:t>
             </a:r>
           </a:p>
         </p:txBody>
@@ -11910,7 +12602,7 @@
                 </a:solidFill>
                 <a:latin typeface="Calibri"/>
               </a:rPr>
-              <a:t>Regla de oro: la clase avanza sobre el documento del equipo. Si el documento no crece, el curso no avanza.</a:t>
+              <a:t>Las respuestas quedan en una hoja que el Docente usa todo el periodo: agrupar temas parecidos, escoger los ejemplos de clase y armar los equipos.</a:t>
             </a:r>
           </a:p>
         </p:txBody>
@@ -11924,6 +12616,473 @@
 </file>
 
 <file path=ppt/slides/slide7.xml><?xml version="1.0" encoding="utf-8"?>
+<p:sld xmlns:a="http://schemas.openxmlformats.org/drawingml/2006/main" xmlns:p="http://schemas.openxmlformats.org/presentationml/2006/main" xmlns:r="http://schemas.openxmlformats.org/officeDocument/2006/relationships">
+  <p:cSld>
+    <p:bg>
+      <p:bgPr>
+        <a:solidFill>
+          <a:srgbClr val="FFFFFF"/>
+        </a:solidFill>
+        <a:effectLst/>
+      </p:bgPr>
+    </p:bg>
+    <p:spTree>
+      <p:nvGrpSpPr>
+        <p:cNvPr id="1" name=""/>
+        <p:cNvGrpSpPr/>
+        <p:nvPr/>
+      </p:nvGrpSpPr>
+      <p:grpSpPr/>
+      <p:sp>
+        <p:nvSpPr>
+          <p:cNvPr id="2" name="Rectangle 1"/>
+          <p:cNvSpPr/>
+          <p:nvPr/>
+        </p:nvSpPr>
+        <p:spPr>
+          <a:xfrm>
+            <a:off x="0" y="0"/>
+            <a:ext cx="12191695" cy="1188720"/>
+          </a:xfrm>
+          <a:prstGeom prst="rect">
+            <a:avLst/>
+          </a:prstGeom>
+          <a:solidFill>
+            <a:srgbClr val="0C2340"/>
+          </a:solidFill>
+          <a:ln>
+            <a:noFill/>
+          </a:ln>
+          <a:effectLst/>
+        </p:spPr>
+        <p:style>
+          <a:lnRef idx="1">
+            <a:schemeClr val="accent1"/>
+          </a:lnRef>
+          <a:fillRef idx="3">
+            <a:schemeClr val="accent1"/>
+          </a:fillRef>
+          <a:effectRef idx="2">
+            <a:schemeClr val="accent1"/>
+          </a:effectRef>
+          <a:fontRef idx="minor">
+            <a:schemeClr val="lt1"/>
+          </a:fontRef>
+        </p:style>
+        <p:txBody>
+          <a:bodyPr rtlCol="0" anchor="ctr"/>
+          <a:lstStyle/>
+          <a:p>
+            <a:pPr algn="ctr"/>
+          </a:p>
+        </p:txBody>
+      </p:sp>
+      <p:sp>
+        <p:nvSpPr>
+          <p:cNvPr id="3" name="TextBox 2"/>
+          <p:cNvSpPr txBox="1"/>
+          <p:nvPr/>
+        </p:nvSpPr>
+        <p:spPr>
+          <a:xfrm>
+            <a:off x="640080" y="0"/>
+            <a:ext cx="9082735" cy="1188720"/>
+          </a:xfrm>
+          <a:prstGeom prst="rect">
+            <a:avLst/>
+          </a:prstGeom>
+          <a:noFill/>
+        </p:spPr>
+        <p:txBody>
+          <a:bodyPr wrap="square" anchor="ctr" lIns="0" rIns="0" tIns="0" bIns="0">
+            <a:spAutoFit/>
+          </a:bodyPr>
+          <a:lstStyle/>
+          <a:p>
+            <a:pPr algn="ctr"/>
+            <a:r>
+              <a:rPr sz="2600" b="1" i="0">
+                <a:solidFill>
+                  <a:srgbClr val="FFFFFF"/>
+                </a:solidFill>
+                <a:latin typeface="Calibri"/>
+              </a:rPr>
+              <a:t>Cómo trabajamos: el encuentro tiene dos mitades</a:t>
+            </a:r>
+          </a:p>
+        </p:txBody>
+      </p:sp>
+      <p:sp>
+        <p:nvSpPr>
+          <p:cNvPr id="4" name="TextBox 3"/>
+          <p:cNvSpPr txBox="1"/>
+          <p:nvPr/>
+        </p:nvSpPr>
+        <p:spPr>
+          <a:xfrm>
+            <a:off x="640080" y="1691639"/>
+            <a:ext cx="10911535" cy="4617720"/>
+          </a:xfrm>
+          <a:prstGeom prst="rect">
+            <a:avLst/>
+          </a:prstGeom>
+          <a:noFill/>
+        </p:spPr>
+        <p:txBody>
+          <a:bodyPr wrap="square" anchor="t" lIns="0" rIns="0" tIns="0" bIns="0">
+            <a:spAutoFit/>
+          </a:bodyPr>
+          <a:lstStyle/>
+          <a:p>
+            <a:pPr>
+              <a:spcAft>
+                <a:spcPts val="1000"/>
+              </a:spcAft>
+            </a:pPr>
+            <a:r>
+              <a:rPr sz="1600" b="0" i="0">
+                <a:solidFill>
+                  <a:srgbClr val="2B2B2B"/>
+                </a:solidFill>
+                <a:latin typeface="Calibri"/>
+              </a:rPr>
+              <a:t>–   Nos vemos </a:t>
+            </a:r>
+            <a:r>
+              <a:rPr sz="1600" b="1" i="0">
+                <a:solidFill>
+                  <a:srgbClr val="2B2B2B"/>
+                </a:solidFill>
+                <a:latin typeface="Calibri"/>
+              </a:rPr>
+              <a:t>una vez por semana, dos horas</a:t>
+            </a:r>
+            <a:r>
+              <a:rPr sz="1600" b="0" i="0">
+                <a:solidFill>
+                  <a:srgbClr val="2B2B2B"/>
+                </a:solidFill>
+                <a:latin typeface="Calibri"/>
+              </a:rPr>
+              <a:t>. No son dos horas de exposición.</a:t>
+            </a:r>
+          </a:p>
+          <a:p>
+            <a:pPr lvl="1">
+              <a:spcAft>
+                <a:spcPts val="600"/>
+              </a:spcAft>
+            </a:pPr>
+            <a:r>
+              <a:rPr sz="1500" b="0" i="0">
+                <a:solidFill>
+                  <a:srgbClr val="2B2B2B"/>
+                </a:solidFill>
+                <a:latin typeface="Calibri"/>
+              </a:rPr>
+              <a:t>●   </a:t>
+            </a:r>
+            <a:r>
+              <a:rPr sz="1500" b="1" i="0">
+                <a:solidFill>
+                  <a:srgbClr val="2B2B2B"/>
+                </a:solidFill>
+                <a:latin typeface="Calibri"/>
+              </a:rPr>
+              <a:t>Primera hora — contenido:</a:t>
+            </a:r>
+            <a:r>
+              <a:rPr sz="1500" b="0" i="0">
+                <a:solidFill>
+                  <a:srgbClr val="2B2B2B"/>
+                </a:solidFill>
+                <a:latin typeface="Calibri"/>
+              </a:rPr>
+              <a:t> el Docente explica el punto de la semana y modela un ejemplo en pantalla.</a:t>
+            </a:r>
+          </a:p>
+          <a:p>
+            <a:pPr lvl="1">
+              <a:spcAft>
+                <a:spcPts val="600"/>
+              </a:spcAft>
+            </a:pPr>
+            <a:r>
+              <a:rPr sz="1500" b="0" i="0">
+                <a:solidFill>
+                  <a:srgbClr val="2B2B2B"/>
+                </a:solidFill>
+                <a:latin typeface="Calibri"/>
+              </a:rPr>
+              <a:t>●   </a:t>
+            </a:r>
+            <a:r>
+              <a:rPr sz="1500" b="1" i="0">
+                <a:solidFill>
+                  <a:srgbClr val="2B2B2B"/>
+                </a:solidFill>
+                <a:latin typeface="Calibri"/>
+              </a:rPr>
+              <a:t>Segunda hora — tutoría en vivo:</a:t>
+            </a:r>
+            <a:r>
+              <a:rPr sz="1500" b="0" i="0">
+                <a:solidFill>
+                  <a:srgbClr val="2B2B2B"/>
+                </a:solidFill>
+                <a:latin typeface="Calibri"/>
+              </a:rPr>
+              <a:t> cada equipo trabaja su avance y el Docente pasa por los equipos.</a:t>
+            </a:r>
+          </a:p>
+          <a:p>
+            <a:pPr>
+              <a:spcAft>
+                <a:spcPts val="1000"/>
+              </a:spcAft>
+            </a:pPr>
+            <a:r>
+              <a:rPr sz="1600" b="0" i="0">
+                <a:solidFill>
+                  <a:srgbClr val="2B2B2B"/>
+                </a:solidFill>
+                <a:latin typeface="Calibri"/>
+              </a:rPr>
+              <a:t>–   El curso funciona </a:t>
+            </a:r>
+            <a:r>
+              <a:rPr sz="1600" b="1" i="0">
+                <a:solidFill>
+                  <a:srgbClr val="2B2B2B"/>
+                </a:solidFill>
+                <a:latin typeface="Calibri"/>
+              </a:rPr>
+              <a:t>al revés de lo que se acostumbra</a:t>
+            </a:r>
+            <a:r>
+              <a:rPr sz="1600" b="0" i="0">
+                <a:solidFill>
+                  <a:srgbClr val="2B2B2B"/>
+                </a:solidFill>
+                <a:latin typeface="Calibri"/>
+              </a:rPr>
+              <a:t>: se lee y se escribe </a:t>
+            </a:r>
+            <a:r>
+              <a:rPr sz="1600" b="1" i="0">
+                <a:solidFill>
+                  <a:srgbClr val="2B2B2B"/>
+                </a:solidFill>
+                <a:latin typeface="Calibri"/>
+              </a:rPr>
+              <a:t>antes</a:t>
+            </a:r>
+            <a:r>
+              <a:rPr sz="1600" b="0" i="0">
+                <a:solidFill>
+                  <a:srgbClr val="2B2B2B"/>
+                </a:solidFill>
+                <a:latin typeface="Calibri"/>
+              </a:rPr>
+              <a:t> de llegar al encuentro.</a:t>
+            </a:r>
+          </a:p>
+          <a:p>
+            <a:pPr lvl="1">
+              <a:spcAft>
+                <a:spcPts val="600"/>
+              </a:spcAft>
+            </a:pPr>
+            <a:r>
+              <a:rPr sz="1500" b="0" i="0">
+                <a:solidFill>
+                  <a:srgbClr val="2B2B2B"/>
+                </a:solidFill>
+                <a:latin typeface="Calibri"/>
+              </a:rPr>
+              <a:t>●   A cada sesión se </a:t>
+            </a:r>
+            <a:r>
+              <a:rPr sz="1500" b="1" i="0">
+                <a:solidFill>
+                  <a:srgbClr val="2B2B2B"/>
+                </a:solidFill>
+                <a:latin typeface="Calibri"/>
+              </a:rPr>
+              <a:t>trae el avance escrito</a:t>
+            </a:r>
+            <a:r>
+              <a:rPr sz="1500" b="0" i="0">
+                <a:solidFill>
+                  <a:srgbClr val="2B2B2B"/>
+                </a:solidFill>
+                <a:latin typeface="Calibri"/>
+              </a:rPr>
+              <a:t>. Aquí se corrige lo que ya existe; no se empieza de cero en clase.</a:t>
+            </a:r>
+          </a:p>
+          <a:p>
+            <a:pPr lvl="1">
+              <a:spcAft>
+                <a:spcPts val="600"/>
+              </a:spcAft>
+            </a:pPr>
+            <a:r>
+              <a:rPr sz="1500" b="0" i="0">
+                <a:solidFill>
+                  <a:srgbClr val="2B2B2B"/>
+                </a:solidFill>
+                <a:latin typeface="Calibri"/>
+              </a:rPr>
+              <a:t>●   Quien llega sin nada escrito pierde la segunda hora: no hay avance que revisar.</a:t>
+            </a:r>
+          </a:p>
+          <a:p>
+            <a:pPr>
+              <a:spcAft>
+                <a:spcPts val="1000"/>
+              </a:spcAft>
+            </a:pPr>
+            <a:r>
+              <a:rPr sz="1600" b="0" i="0">
+                <a:solidFill>
+                  <a:srgbClr val="2B2B2B"/>
+                </a:solidFill>
+                <a:latin typeface="Calibri"/>
+              </a:rPr>
+              <a:t>–   Se trabaja en </a:t>
+            </a:r>
+            <a:r>
+              <a:rPr sz="1600" b="1" i="0">
+                <a:solidFill>
+                  <a:srgbClr val="2B2B2B"/>
+                </a:solidFill>
+                <a:latin typeface="Calibri"/>
+              </a:rPr>
+              <a:t>equipos de máximo 3 personas</a:t>
+            </a:r>
+            <a:r>
+              <a:rPr sz="1600" b="0" i="0">
+                <a:solidFill>
+                  <a:srgbClr val="2B2B2B"/>
+                </a:solidFill>
+                <a:latin typeface="Calibri"/>
+              </a:rPr>
+              <a:t>, los mismos durante todo el curso.</a:t>
+            </a:r>
+          </a:p>
+          <a:p>
+            <a:pPr lvl="1">
+              <a:spcAft>
+                <a:spcPts val="600"/>
+              </a:spcAft>
+            </a:pPr>
+            <a:r>
+              <a:rPr sz="1500" b="0" i="0">
+                <a:solidFill>
+                  <a:srgbClr val="2B2B2B"/>
+                </a:solidFill>
+                <a:latin typeface="Calibri"/>
+              </a:rPr>
+              <a:t>●   Un solo integrante sube la entrega grupal, pero la nota es del equipo, no de quien subió el archivo.</a:t>
+            </a:r>
+          </a:p>
+          <a:p>
+            <a:pPr lvl="1">
+              <a:spcAft>
+                <a:spcPts val="600"/>
+              </a:spcAft>
+            </a:pPr>
+            <a:r>
+              <a:rPr sz="1500" b="0" i="0">
+                <a:solidFill>
+                  <a:srgbClr val="2B2B2B"/>
+                </a:solidFill>
+                <a:latin typeface="Calibri"/>
+              </a:rPr>
+              <a:t>●   ¿Prefieren trabajar solos? Se puede, y la carga es la misma. Decídanlo esta semana, no en octubre.</a:t>
+            </a:r>
+          </a:p>
+        </p:txBody>
+      </p:sp>
+      <p:sp>
+        <p:nvSpPr>
+          <p:cNvPr id="5" name="TextBox 4"/>
+          <p:cNvSpPr txBox="1"/>
+          <p:nvPr/>
+        </p:nvSpPr>
+        <p:spPr>
+          <a:xfrm>
+            <a:off x="11094415" y="6446520"/>
+            <a:ext cx="548640" cy="274320"/>
+          </a:xfrm>
+          <a:prstGeom prst="rect">
+            <a:avLst/>
+          </a:prstGeom>
+          <a:noFill/>
+        </p:spPr>
+        <p:txBody>
+          <a:bodyPr wrap="square" anchor="t" lIns="0" rIns="0" tIns="0" bIns="0">
+            <a:spAutoFit/>
+          </a:bodyPr>
+          <a:lstStyle/>
+          <a:p>
+            <a:pPr algn="r"/>
+            <a:r>
+              <a:rPr sz="1000" b="1" i="0">
+                <a:solidFill>
+                  <a:srgbClr val="8F989D"/>
+                </a:solidFill>
+                <a:latin typeface="Calibri"/>
+              </a:rPr>
+              <a:t>7</a:t>
+            </a:r>
+          </a:p>
+        </p:txBody>
+      </p:sp>
+      <p:sp>
+        <p:nvSpPr>
+          <p:cNvPr id="6" name="TextBox 5"/>
+          <p:cNvSpPr txBox="1"/>
+          <p:nvPr/>
+        </p:nvSpPr>
+        <p:spPr>
+          <a:xfrm>
+            <a:off x="640080" y="5943600"/>
+            <a:ext cx="9997135" cy="457200"/>
+          </a:xfrm>
+          <a:prstGeom prst="rect">
+            <a:avLst/>
+          </a:prstGeom>
+          <a:noFill/>
+        </p:spPr>
+        <p:txBody>
+          <a:bodyPr wrap="square" anchor="t" lIns="0" rIns="0" tIns="0" bIns="0">
+            <a:spAutoFit/>
+          </a:bodyPr>
+          <a:lstStyle/>
+          <a:p>
+            <a:r>
+              <a:rPr sz="1200" b="0" i="1">
+                <a:solidFill>
+                  <a:srgbClr val="2B2B2B"/>
+                </a:solidFill>
+                <a:latin typeface="Calibri"/>
+              </a:rPr>
+              <a:t>Regla de oro: la clase avanza sobre el documento del equipo. Si el documento no crece, el curso no avanza.</a:t>
+            </a:r>
+          </a:p>
+        </p:txBody>
+      </p:sp>
+    </p:spTree>
+  </p:cSld>
+  <p:clrMapOvr>
+    <a:masterClrMapping/>
+  </p:clrMapOvr>
+</p:sld>
+</file>
+
+<file path=ppt/slides/slide8.xml><?xml version="1.0" encoding="utf-8"?>
 <p:sld xmlns:a="http://schemas.openxmlformats.org/drawingml/2006/main" xmlns:p="http://schemas.openxmlformats.org/presentationml/2006/main" xmlns:r="http://schemas.openxmlformats.org/officeDocument/2006/relationships">
   <p:cSld>
     <p:bg>
@@ -12770,7 +13929,7 @@
                 </a:solidFill>
                 <a:latin typeface="Calibri"/>
               </a:rPr>
-              <a:t>7</a:t>
+              <a:t>8</a:t>
             </a:r>
           </a:p>
         </p:txBody>
@@ -12783,7 +13942,7 @@
 </p:sld>
 </file>
 
-<file path=ppt/slides/slide8.xml><?xml version="1.0" encoding="utf-8"?>
+<file path=ppt/slides/slide9.xml><?xml version="1.0" encoding="utf-8"?>
 <p:sld xmlns:a="http://schemas.openxmlformats.org/drawingml/2006/main" xmlns:p="http://schemas.openxmlformats.org/presentationml/2006/main" xmlns:r="http://schemas.openxmlformats.org/officeDocument/2006/relationships">
   <p:cSld>
     <p:bg>
@@ -13318,458 +14477,7 @@
                 </a:solidFill>
                 <a:latin typeface="Calibri"/>
               </a:rPr>
-              <a:t>8</a:t>
-            </a:r>
-          </a:p>
-        </p:txBody>
-      </p:sp>
-    </p:spTree>
-  </p:cSld>
-  <p:clrMapOvr>
-    <a:masterClrMapping/>
-  </p:clrMapOvr>
-</p:sld>
-</file>
-
-<file path=ppt/slides/slide9.xml><?xml version="1.0" encoding="utf-8"?>
-<p:sld xmlns:a="http://schemas.openxmlformats.org/drawingml/2006/main" xmlns:p="http://schemas.openxmlformats.org/presentationml/2006/main" xmlns:r="http://schemas.openxmlformats.org/officeDocument/2006/relationships">
-  <p:cSld>
-    <p:bg>
-      <p:bgPr>
-        <a:solidFill>
-          <a:srgbClr val="FFFFFF"/>
-        </a:solidFill>
-        <a:effectLst/>
-      </p:bgPr>
-    </p:bg>
-    <p:spTree>
-      <p:nvGrpSpPr>
-        <p:cNvPr id="1" name=""/>
-        <p:cNvGrpSpPr/>
-        <p:nvPr/>
-      </p:nvGrpSpPr>
-      <p:grpSpPr/>
-      <p:sp>
-        <p:nvSpPr>
-          <p:cNvPr id="2" name="Rectangle 1"/>
-          <p:cNvSpPr/>
-          <p:nvPr/>
-        </p:nvSpPr>
-        <p:spPr>
-          <a:xfrm>
-            <a:off x="0" y="0"/>
-            <a:ext cx="12191695" cy="1188720"/>
-          </a:xfrm>
-          <a:prstGeom prst="rect">
-            <a:avLst/>
-          </a:prstGeom>
-          <a:solidFill>
-            <a:srgbClr val="0C2340"/>
-          </a:solidFill>
-          <a:ln>
-            <a:noFill/>
-          </a:ln>
-          <a:effectLst/>
-        </p:spPr>
-        <p:style>
-          <a:lnRef idx="1">
-            <a:schemeClr val="accent1"/>
-          </a:lnRef>
-          <a:fillRef idx="3">
-            <a:schemeClr val="accent1"/>
-          </a:fillRef>
-          <a:effectRef idx="2">
-            <a:schemeClr val="accent1"/>
-          </a:effectRef>
-          <a:fontRef idx="minor">
-            <a:schemeClr val="lt1"/>
-          </a:fontRef>
-        </p:style>
-        <p:txBody>
-          <a:bodyPr rtlCol="0" anchor="ctr"/>
-          <a:lstStyle/>
-          <a:p>
-            <a:pPr algn="ctr"/>
-          </a:p>
-        </p:txBody>
-      </p:sp>
-      <p:sp>
-        <p:nvSpPr>
-          <p:cNvPr id="3" name="TextBox 2"/>
-          <p:cNvSpPr txBox="1"/>
-          <p:nvPr/>
-        </p:nvSpPr>
-        <p:spPr>
-          <a:xfrm>
-            <a:off x="640080" y="0"/>
-            <a:ext cx="9082735" cy="1188720"/>
-          </a:xfrm>
-          <a:prstGeom prst="rect">
-            <a:avLst/>
-          </a:prstGeom>
-          <a:noFill/>
-        </p:spPr>
-        <p:txBody>
-          <a:bodyPr wrap="square" anchor="ctr" lIns="0" rIns="0" tIns="0" bIns="0">
-            <a:spAutoFit/>
-          </a:bodyPr>
-          <a:lstStyle/>
-          <a:p>
-            <a:pPr algn="ctr"/>
-            <a:r>
-              <a:rPr sz="2600" b="1" i="0">
-                <a:solidFill>
-                  <a:srgbClr val="FFFFFF"/>
-                </a:solidFill>
-                <a:latin typeface="Calibri"/>
-              </a:rPr>
-              <a:t>El producto del curso: qué archivo entregan al final</a:t>
-            </a:r>
-          </a:p>
-        </p:txBody>
-      </p:sp>
-      <p:sp>
-        <p:nvSpPr>
-          <p:cNvPr id="4" name="TextBox 3"/>
-          <p:cNvSpPr txBox="1"/>
-          <p:nvPr/>
-        </p:nvSpPr>
-        <p:spPr>
-          <a:xfrm>
-            <a:off x="640080" y="1691639"/>
-            <a:ext cx="10911535" cy="4617720"/>
-          </a:xfrm>
-          <a:prstGeom prst="rect">
-            <a:avLst/>
-          </a:prstGeom>
-          <a:noFill/>
-        </p:spPr>
-        <p:txBody>
-          <a:bodyPr wrap="square" anchor="t" lIns="0" rIns="0" tIns="0" bIns="0">
-            <a:spAutoFit/>
-          </a:bodyPr>
-          <a:lstStyle/>
-          <a:p>
-            <a:pPr>
-              <a:spcAft>
-                <a:spcPts val="1000"/>
-              </a:spcAft>
-            </a:pPr>
-            <a:r>
-              <a:rPr sz="1600" b="0" i="0">
-                <a:solidFill>
-                  <a:srgbClr val="2B2B2B"/>
-                </a:solidFill>
-                <a:latin typeface="Calibri"/>
-              </a:rPr>
-              <a:t>–   Al terminar el curso ustedes suben </a:t>
-            </a:r>
-            <a:r>
-              <a:rPr sz="1600" b="1" i="0">
-                <a:solidFill>
-                  <a:srgbClr val="2B2B2B"/>
-                </a:solidFill>
-                <a:latin typeface="Calibri"/>
-              </a:rPr>
-              <a:t>un solo documento: el anteproyecto</a:t>
-            </a:r>
-            <a:r>
-              <a:rPr sz="1600" b="0" i="0">
-                <a:solidFill>
-                  <a:srgbClr val="2B2B2B"/>
-                </a:solidFill>
-                <a:latin typeface="Calibri"/>
-              </a:rPr>
-              <a:t> de su investigación.</a:t>
-            </a:r>
-          </a:p>
-          <a:p>
-            <a:pPr lvl="1">
-              <a:spcAft>
-                <a:spcPts val="600"/>
-              </a:spcAft>
-            </a:pPr>
-            <a:r>
-              <a:rPr sz="1500" b="0" i="0">
-                <a:solidFill>
-                  <a:srgbClr val="2B2B2B"/>
-                </a:solidFill>
-                <a:latin typeface="Calibri"/>
-              </a:rPr>
-              <a:t>●   No son trabajos sueltos: es </a:t>
-            </a:r>
-            <a:r>
-              <a:rPr sz="1500" b="1" i="0">
-                <a:solidFill>
-                  <a:srgbClr val="2B2B2B"/>
-                </a:solidFill>
-                <a:latin typeface="Calibri"/>
-              </a:rPr>
-              <a:t>un mismo archivo que crece</a:t>
-            </a:r>
-            <a:r>
-              <a:rPr sz="1500" b="0" i="0">
-                <a:solidFill>
-                  <a:srgbClr val="2B2B2B"/>
-                </a:solidFill>
-                <a:latin typeface="Calibri"/>
-              </a:rPr>
-              <a:t> corte tras corte.</a:t>
-            </a:r>
-          </a:p>
-          <a:p>
-            <a:pPr lvl="1">
-              <a:spcAft>
-                <a:spcPts val="600"/>
-              </a:spcAft>
-            </a:pPr>
-            <a:r>
-              <a:rPr sz="1500" b="0" i="0">
-                <a:solidFill>
-                  <a:srgbClr val="2B2B2B"/>
-                </a:solidFill>
-                <a:latin typeface="Calibri"/>
-              </a:rPr>
-              <a:t>●   La </a:t>
-            </a:r>
-            <a:r>
-              <a:rPr sz="1500" b="1" i="0">
-                <a:solidFill>
-                  <a:srgbClr val="2B2B2B"/>
-                </a:solidFill>
-                <a:latin typeface="Calibri"/>
-              </a:rPr>
-              <a:t>ACA FINAL</a:t>
-            </a:r>
-            <a:r>
-              <a:rPr sz="1500" b="0" i="0">
-                <a:solidFill>
-                  <a:srgbClr val="2B2B2B"/>
-                </a:solidFill>
-                <a:latin typeface="Calibri"/>
-              </a:rPr>
-              <a:t> del aula es ese archivo completo e integrado, no un fragmento nuevo escrito la última semana.</a:t>
-            </a:r>
-          </a:p>
-          <a:p>
-            <a:pPr>
-              <a:spcAft>
-                <a:spcPts val="1000"/>
-              </a:spcAft>
-            </a:pPr>
-            <a:r>
-              <a:rPr sz="1600" b="0" i="0">
-                <a:solidFill>
-                  <a:srgbClr val="2B2B2B"/>
-                </a:solidFill>
-                <a:latin typeface="Calibri"/>
-              </a:rPr>
-              <a:t>–   Va en la </a:t>
-            </a:r>
-            <a:r>
-              <a:rPr sz="1600" b="1" i="0">
-                <a:solidFill>
-                  <a:srgbClr val="2B2B2B"/>
-                </a:solidFill>
-                <a:latin typeface="Calibri"/>
-              </a:rPr>
-              <a:t>plantilla APA CUN de proyecto de grado</a:t>
-            </a:r>
-            <a:r>
-              <a:rPr sz="1600" b="0" i="0">
-                <a:solidFill>
-                  <a:srgbClr val="2B2B2B"/>
-                </a:solidFill>
-                <a:latin typeface="Calibri"/>
-              </a:rPr>
-              <a:t>, la misma desde el primer día.</a:t>
-            </a:r>
-          </a:p>
-          <a:p>
-            <a:pPr lvl="1">
-              <a:spcAft>
-                <a:spcPts val="600"/>
-              </a:spcAft>
-            </a:pPr>
-            <a:r>
-              <a:rPr sz="1500" b="0" i="0">
-                <a:solidFill>
-                  <a:srgbClr val="2B2B2B"/>
-                </a:solidFill>
-                <a:latin typeface="Calibri"/>
-              </a:rPr>
-              <a:t>●   Está en `Clases/Recursos/Plantilla_APA_CUN_Proyecto de grado.docx`; ábranla en Google Docs y trabajen ahí.</a:t>
-            </a:r>
-          </a:p>
-          <a:p>
-            <a:pPr>
-              <a:spcAft>
-                <a:spcPts val="1000"/>
-              </a:spcAft>
-            </a:pPr>
-            <a:r>
-              <a:rPr sz="1600" b="0" i="0">
-                <a:solidFill>
-                  <a:srgbClr val="2B2B2B"/>
-                </a:solidFill>
-                <a:latin typeface="Calibri"/>
-              </a:rPr>
-              <a:t>–   </a:t>
-            </a:r>
-            <a:r>
-              <a:rPr sz="1600" b="1" i="0">
-                <a:solidFill>
-                  <a:srgbClr val="2B2B2B"/>
-                </a:solidFill>
-                <a:latin typeface="Calibri"/>
-              </a:rPr>
-              <a:t>¿Para qué les sirve después?</a:t>
-            </a:r>
-            <a:r>
-              <a:rPr sz="1600" b="0" i="0">
-                <a:solidFill>
-                  <a:srgbClr val="2B2B2B"/>
-                </a:solidFill>
-                <a:latin typeface="Calibri"/>
-              </a:rPr>
-              <a:t> Es el punto de partida de </a:t>
-            </a:r>
-            <a:r>
-              <a:rPr sz="1600" b="1" i="0">
-                <a:solidFill>
-                  <a:srgbClr val="2B2B2B"/>
-                </a:solidFill>
-                <a:latin typeface="Calibri"/>
-              </a:rPr>
-              <a:t>Proyecto II</a:t>
-            </a:r>
-            <a:r>
-              <a:rPr sz="1600" b="0" i="0">
-                <a:solidFill>
-                  <a:srgbClr val="2B2B2B"/>
-                </a:solidFill>
-                <a:latin typeface="Calibri"/>
-              </a:rPr>
-              <a:t>, donde el proyecto se ejecuta.</a:t>
-            </a:r>
-          </a:p>
-          <a:p>
-            <a:pPr lvl="1">
-              <a:spcAft>
-                <a:spcPts val="600"/>
-              </a:spcAft>
-            </a:pPr>
-            <a:r>
-              <a:rPr sz="1500" b="0" i="0">
-                <a:solidFill>
-                  <a:srgbClr val="2B2B2B"/>
-                </a:solidFill>
-                <a:latin typeface="Calibri"/>
-              </a:rPr>
-              <a:t>●   Y es la base de lo que sustentarán al cerrar el programa: no es un trabajo que se archiva y se olvida.</a:t>
-            </a:r>
-          </a:p>
-          <a:p>
-            <a:pPr>
-              <a:spcAft>
-                <a:spcPts val="1000"/>
-              </a:spcAft>
-            </a:pPr>
-            <a:r>
-              <a:rPr sz="1600" b="0" i="0">
-                <a:solidFill>
-                  <a:srgbClr val="2B2B2B"/>
-                </a:solidFill>
-                <a:latin typeface="Calibri"/>
-              </a:rPr>
-              <a:t>–   Frontera del curso, sin excepciones: en </a:t>
-            </a:r>
-            <a:r>
-              <a:rPr sz="1600" b="1" i="0">
-                <a:solidFill>
-                  <a:srgbClr val="2B2B2B"/>
-                </a:solidFill>
-                <a:latin typeface="Calibri"/>
-              </a:rPr>
-              <a:t>Proyecto I los instrumentos se proponen; nunca se aplican</a:t>
-            </a:r>
-            <a:r>
-              <a:rPr sz="1600" b="0" i="0">
-                <a:solidFill>
-                  <a:srgbClr val="2B2B2B"/>
-                </a:solidFill>
-                <a:latin typeface="Calibri"/>
-              </a:rPr>
-              <a:t>.</a:t>
-            </a:r>
-          </a:p>
-        </p:txBody>
-      </p:sp>
-      <p:sp>
-        <p:nvSpPr>
-          <p:cNvPr id="5" name="TextBox 4"/>
-          <p:cNvSpPr txBox="1"/>
-          <p:nvPr/>
-        </p:nvSpPr>
-        <p:spPr>
-          <a:xfrm>
-            <a:off x="11094415" y="6446520"/>
-            <a:ext cx="548640" cy="274320"/>
-          </a:xfrm>
-          <a:prstGeom prst="rect">
-            <a:avLst/>
-          </a:prstGeom>
-          <a:noFill/>
-        </p:spPr>
-        <p:txBody>
-          <a:bodyPr wrap="square" anchor="t" lIns="0" rIns="0" tIns="0" bIns="0">
-            <a:spAutoFit/>
-          </a:bodyPr>
-          <a:lstStyle/>
-          <a:p>
-            <a:pPr algn="r"/>
-            <a:r>
-              <a:rPr sz="1000" b="1" i="0">
-                <a:solidFill>
-                  <a:srgbClr val="8F989D"/>
-                </a:solidFill>
-                <a:latin typeface="Calibri"/>
-              </a:rPr>
               <a:t>9</a:t>
-            </a:r>
-          </a:p>
-        </p:txBody>
-      </p:sp>
-      <p:sp>
-        <p:nvSpPr>
-          <p:cNvPr id="6" name="TextBox 5"/>
-          <p:cNvSpPr txBox="1"/>
-          <p:nvPr/>
-        </p:nvSpPr>
-        <p:spPr>
-          <a:xfrm>
-            <a:off x="640080" y="5943600"/>
-            <a:ext cx="9997135" cy="457200"/>
-          </a:xfrm>
-          <a:prstGeom prst="rect">
-            <a:avLst/>
-          </a:prstGeom>
-          <a:noFill/>
-        </p:spPr>
-        <p:txBody>
-          <a:bodyPr wrap="square" anchor="t" lIns="0" rIns="0" tIns="0" bIns="0">
-            <a:spAutoFit/>
-          </a:bodyPr>
-          <a:lstStyle/>
-          <a:p>
-            <a:r>
-              <a:rPr sz="1200" b="0" i="1">
-                <a:solidFill>
-                  <a:srgbClr val="2B2B2B"/>
-                </a:solidFill>
-                <a:latin typeface="Calibri"/>
-              </a:rPr>
-              <a:t>Piénsenlo así: todo el semestre queda en un archivo. Cuídenlo, guarden versiones y compártanlo con todo el equipo desde hoy.</a:t>
             </a:r>
           </a:p>
         </p:txBody>

--- a/Especializacion/Proyecto I/Clases/Sesion 01 - Presentación del curso · docente · estudiantes · ACAs/Presentacion.pptx
+++ b/Especializacion/Proyecto I/Clases/Sesion 01 - Presentación del curso · docente · estudiantes · ACAs/Presentacion.pptx
@@ -26,7 +26,6 @@
     <p:sldId id="274" r:id="rId25"/>
     <p:sldId id="275" r:id="rId26"/>
     <p:sldId id="276" r:id="rId27"/>
-    <p:sldId id="277" r:id="rId28"/>
   </p:sldIdLst>
   <p:sldSz cx="12191695" cy="6858000" type="screen4x3"/>
   <p:notesSz cx="6858000" cy="9144000"/>
@@ -3387,457 +3386,6 @@
 </file>
 
 <file path=ppt/slides/slide10.xml><?xml version="1.0" encoding="utf-8"?>
-<p:sld xmlns:a="http://schemas.openxmlformats.org/drawingml/2006/main" xmlns:p="http://schemas.openxmlformats.org/presentationml/2006/main" xmlns:r="http://schemas.openxmlformats.org/officeDocument/2006/relationships">
-  <p:cSld>
-    <p:bg>
-      <p:bgPr>
-        <a:solidFill>
-          <a:srgbClr val="FFFFFF"/>
-        </a:solidFill>
-        <a:effectLst/>
-      </p:bgPr>
-    </p:bg>
-    <p:spTree>
-      <p:nvGrpSpPr>
-        <p:cNvPr id="1" name=""/>
-        <p:cNvGrpSpPr/>
-        <p:nvPr/>
-      </p:nvGrpSpPr>
-      <p:grpSpPr/>
-      <p:sp>
-        <p:nvSpPr>
-          <p:cNvPr id="2" name="Rectangle 1"/>
-          <p:cNvSpPr/>
-          <p:nvPr/>
-        </p:nvSpPr>
-        <p:spPr>
-          <a:xfrm>
-            <a:off x="0" y="0"/>
-            <a:ext cx="12191695" cy="1188720"/>
-          </a:xfrm>
-          <a:prstGeom prst="rect">
-            <a:avLst/>
-          </a:prstGeom>
-          <a:solidFill>
-            <a:srgbClr val="0C2340"/>
-          </a:solidFill>
-          <a:ln>
-            <a:noFill/>
-          </a:ln>
-          <a:effectLst/>
-        </p:spPr>
-        <p:style>
-          <a:lnRef idx="1">
-            <a:schemeClr val="accent1"/>
-          </a:lnRef>
-          <a:fillRef idx="3">
-            <a:schemeClr val="accent1"/>
-          </a:fillRef>
-          <a:effectRef idx="2">
-            <a:schemeClr val="accent1"/>
-          </a:effectRef>
-          <a:fontRef idx="minor">
-            <a:schemeClr val="lt1"/>
-          </a:fontRef>
-        </p:style>
-        <p:txBody>
-          <a:bodyPr rtlCol="0" anchor="ctr"/>
-          <a:lstStyle/>
-          <a:p>
-            <a:pPr algn="ctr"/>
-          </a:p>
-        </p:txBody>
-      </p:sp>
-      <p:sp>
-        <p:nvSpPr>
-          <p:cNvPr id="3" name="TextBox 2"/>
-          <p:cNvSpPr txBox="1"/>
-          <p:nvPr/>
-        </p:nvSpPr>
-        <p:spPr>
-          <a:xfrm>
-            <a:off x="640080" y="0"/>
-            <a:ext cx="9082735" cy="1188720"/>
-          </a:xfrm>
-          <a:prstGeom prst="rect">
-            <a:avLst/>
-          </a:prstGeom>
-          <a:noFill/>
-        </p:spPr>
-        <p:txBody>
-          <a:bodyPr wrap="square" anchor="ctr" lIns="0" rIns="0" tIns="0" bIns="0">
-            <a:spAutoFit/>
-          </a:bodyPr>
-          <a:lstStyle/>
-          <a:p>
-            <a:pPr algn="ctr"/>
-            <a:r>
-              <a:rPr sz="2600" b="1" i="0">
-                <a:solidFill>
-                  <a:srgbClr val="FFFFFF"/>
-                </a:solidFill>
-                <a:latin typeface="Calibri"/>
-              </a:rPr>
-              <a:t>El producto del curso: qué archivo entregan al final</a:t>
-            </a:r>
-          </a:p>
-        </p:txBody>
-      </p:sp>
-      <p:sp>
-        <p:nvSpPr>
-          <p:cNvPr id="4" name="TextBox 3"/>
-          <p:cNvSpPr txBox="1"/>
-          <p:nvPr/>
-        </p:nvSpPr>
-        <p:spPr>
-          <a:xfrm>
-            <a:off x="640080" y="1691639"/>
-            <a:ext cx="10911535" cy="4617720"/>
-          </a:xfrm>
-          <a:prstGeom prst="rect">
-            <a:avLst/>
-          </a:prstGeom>
-          <a:noFill/>
-        </p:spPr>
-        <p:txBody>
-          <a:bodyPr wrap="square" anchor="t" lIns="0" rIns="0" tIns="0" bIns="0">
-            <a:spAutoFit/>
-          </a:bodyPr>
-          <a:lstStyle/>
-          <a:p>
-            <a:pPr>
-              <a:spcAft>
-                <a:spcPts val="1000"/>
-              </a:spcAft>
-            </a:pPr>
-            <a:r>
-              <a:rPr sz="1600" b="0" i="0">
-                <a:solidFill>
-                  <a:srgbClr val="2B2B2B"/>
-                </a:solidFill>
-                <a:latin typeface="Calibri"/>
-              </a:rPr>
-              <a:t>–   Al terminar el curso ustedes suben </a:t>
-            </a:r>
-            <a:r>
-              <a:rPr sz="1600" b="1" i="0">
-                <a:solidFill>
-                  <a:srgbClr val="2B2B2B"/>
-                </a:solidFill>
-                <a:latin typeface="Calibri"/>
-              </a:rPr>
-              <a:t>un solo documento: el anteproyecto</a:t>
-            </a:r>
-            <a:r>
-              <a:rPr sz="1600" b="0" i="0">
-                <a:solidFill>
-                  <a:srgbClr val="2B2B2B"/>
-                </a:solidFill>
-                <a:latin typeface="Calibri"/>
-              </a:rPr>
-              <a:t> de su investigación.</a:t>
-            </a:r>
-          </a:p>
-          <a:p>
-            <a:pPr lvl="1">
-              <a:spcAft>
-                <a:spcPts val="600"/>
-              </a:spcAft>
-            </a:pPr>
-            <a:r>
-              <a:rPr sz="1500" b="0" i="0">
-                <a:solidFill>
-                  <a:srgbClr val="2B2B2B"/>
-                </a:solidFill>
-                <a:latin typeface="Calibri"/>
-              </a:rPr>
-              <a:t>●   No son trabajos sueltos: es </a:t>
-            </a:r>
-            <a:r>
-              <a:rPr sz="1500" b="1" i="0">
-                <a:solidFill>
-                  <a:srgbClr val="2B2B2B"/>
-                </a:solidFill>
-                <a:latin typeface="Calibri"/>
-              </a:rPr>
-              <a:t>un mismo archivo que crece</a:t>
-            </a:r>
-            <a:r>
-              <a:rPr sz="1500" b="0" i="0">
-                <a:solidFill>
-                  <a:srgbClr val="2B2B2B"/>
-                </a:solidFill>
-                <a:latin typeface="Calibri"/>
-              </a:rPr>
-              <a:t> corte tras corte.</a:t>
-            </a:r>
-          </a:p>
-          <a:p>
-            <a:pPr lvl="1">
-              <a:spcAft>
-                <a:spcPts val="600"/>
-              </a:spcAft>
-            </a:pPr>
-            <a:r>
-              <a:rPr sz="1500" b="0" i="0">
-                <a:solidFill>
-                  <a:srgbClr val="2B2B2B"/>
-                </a:solidFill>
-                <a:latin typeface="Calibri"/>
-              </a:rPr>
-              <a:t>●   La </a:t>
-            </a:r>
-            <a:r>
-              <a:rPr sz="1500" b="1" i="0">
-                <a:solidFill>
-                  <a:srgbClr val="2B2B2B"/>
-                </a:solidFill>
-                <a:latin typeface="Calibri"/>
-              </a:rPr>
-              <a:t>ACA FINAL</a:t>
-            </a:r>
-            <a:r>
-              <a:rPr sz="1500" b="0" i="0">
-                <a:solidFill>
-                  <a:srgbClr val="2B2B2B"/>
-                </a:solidFill>
-                <a:latin typeface="Calibri"/>
-              </a:rPr>
-              <a:t> del aula es ese archivo completo e integrado, no un fragmento nuevo escrito la última semana.</a:t>
-            </a:r>
-          </a:p>
-          <a:p>
-            <a:pPr>
-              <a:spcAft>
-                <a:spcPts val="1000"/>
-              </a:spcAft>
-            </a:pPr>
-            <a:r>
-              <a:rPr sz="1600" b="0" i="0">
-                <a:solidFill>
-                  <a:srgbClr val="2B2B2B"/>
-                </a:solidFill>
-                <a:latin typeface="Calibri"/>
-              </a:rPr>
-              <a:t>–   Va en la </a:t>
-            </a:r>
-            <a:r>
-              <a:rPr sz="1600" b="1" i="0">
-                <a:solidFill>
-                  <a:srgbClr val="2B2B2B"/>
-                </a:solidFill>
-                <a:latin typeface="Calibri"/>
-              </a:rPr>
-              <a:t>plantilla APA CUN de proyecto de grado</a:t>
-            </a:r>
-            <a:r>
-              <a:rPr sz="1600" b="0" i="0">
-                <a:solidFill>
-                  <a:srgbClr val="2B2B2B"/>
-                </a:solidFill>
-                <a:latin typeface="Calibri"/>
-              </a:rPr>
-              <a:t>, la misma desde el primer día.</a:t>
-            </a:r>
-          </a:p>
-          <a:p>
-            <a:pPr lvl="1">
-              <a:spcAft>
-                <a:spcPts val="600"/>
-              </a:spcAft>
-            </a:pPr>
-            <a:r>
-              <a:rPr sz="1500" b="0" i="0">
-                <a:solidFill>
-                  <a:srgbClr val="2B2B2B"/>
-                </a:solidFill>
-                <a:latin typeface="Calibri"/>
-              </a:rPr>
-              <a:t>●   Está en `Clases/Recursos/Plantilla_APA_CUN_Proyecto de grado.docx`; ábranla en Google Docs y trabajen ahí.</a:t>
-            </a:r>
-          </a:p>
-          <a:p>
-            <a:pPr>
-              <a:spcAft>
-                <a:spcPts val="1000"/>
-              </a:spcAft>
-            </a:pPr>
-            <a:r>
-              <a:rPr sz="1600" b="0" i="0">
-                <a:solidFill>
-                  <a:srgbClr val="2B2B2B"/>
-                </a:solidFill>
-                <a:latin typeface="Calibri"/>
-              </a:rPr>
-              <a:t>–   </a:t>
-            </a:r>
-            <a:r>
-              <a:rPr sz="1600" b="1" i="0">
-                <a:solidFill>
-                  <a:srgbClr val="2B2B2B"/>
-                </a:solidFill>
-                <a:latin typeface="Calibri"/>
-              </a:rPr>
-              <a:t>¿Para qué les sirve después?</a:t>
-            </a:r>
-            <a:r>
-              <a:rPr sz="1600" b="0" i="0">
-                <a:solidFill>
-                  <a:srgbClr val="2B2B2B"/>
-                </a:solidFill>
-                <a:latin typeface="Calibri"/>
-              </a:rPr>
-              <a:t> Es el punto de partida de </a:t>
-            </a:r>
-            <a:r>
-              <a:rPr sz="1600" b="1" i="0">
-                <a:solidFill>
-                  <a:srgbClr val="2B2B2B"/>
-                </a:solidFill>
-                <a:latin typeface="Calibri"/>
-              </a:rPr>
-              <a:t>Proyecto II</a:t>
-            </a:r>
-            <a:r>
-              <a:rPr sz="1600" b="0" i="0">
-                <a:solidFill>
-                  <a:srgbClr val="2B2B2B"/>
-                </a:solidFill>
-                <a:latin typeface="Calibri"/>
-              </a:rPr>
-              <a:t>, donde el proyecto se ejecuta.</a:t>
-            </a:r>
-          </a:p>
-          <a:p>
-            <a:pPr lvl="1">
-              <a:spcAft>
-                <a:spcPts val="600"/>
-              </a:spcAft>
-            </a:pPr>
-            <a:r>
-              <a:rPr sz="1500" b="0" i="0">
-                <a:solidFill>
-                  <a:srgbClr val="2B2B2B"/>
-                </a:solidFill>
-                <a:latin typeface="Calibri"/>
-              </a:rPr>
-              <a:t>●   Y es la base de lo que sustentarán al cerrar el programa: no es un trabajo que se archiva y se olvida.</a:t>
-            </a:r>
-          </a:p>
-          <a:p>
-            <a:pPr>
-              <a:spcAft>
-                <a:spcPts val="1000"/>
-              </a:spcAft>
-            </a:pPr>
-            <a:r>
-              <a:rPr sz="1600" b="0" i="0">
-                <a:solidFill>
-                  <a:srgbClr val="2B2B2B"/>
-                </a:solidFill>
-                <a:latin typeface="Calibri"/>
-              </a:rPr>
-              <a:t>–   Frontera del curso, sin excepciones: en </a:t>
-            </a:r>
-            <a:r>
-              <a:rPr sz="1600" b="1" i="0">
-                <a:solidFill>
-                  <a:srgbClr val="2B2B2B"/>
-                </a:solidFill>
-                <a:latin typeface="Calibri"/>
-              </a:rPr>
-              <a:t>Proyecto I los instrumentos se proponen; nunca se aplican</a:t>
-            </a:r>
-            <a:r>
-              <a:rPr sz="1600" b="0" i="0">
-                <a:solidFill>
-                  <a:srgbClr val="2B2B2B"/>
-                </a:solidFill>
-                <a:latin typeface="Calibri"/>
-              </a:rPr>
-              <a:t>.</a:t>
-            </a:r>
-          </a:p>
-        </p:txBody>
-      </p:sp>
-      <p:sp>
-        <p:nvSpPr>
-          <p:cNvPr id="5" name="TextBox 4"/>
-          <p:cNvSpPr txBox="1"/>
-          <p:nvPr/>
-        </p:nvSpPr>
-        <p:spPr>
-          <a:xfrm>
-            <a:off x="11094415" y="6446520"/>
-            <a:ext cx="548640" cy="274320"/>
-          </a:xfrm>
-          <a:prstGeom prst="rect">
-            <a:avLst/>
-          </a:prstGeom>
-          <a:noFill/>
-        </p:spPr>
-        <p:txBody>
-          <a:bodyPr wrap="square" anchor="t" lIns="0" rIns="0" tIns="0" bIns="0">
-            <a:spAutoFit/>
-          </a:bodyPr>
-          <a:lstStyle/>
-          <a:p>
-            <a:pPr algn="r"/>
-            <a:r>
-              <a:rPr sz="1000" b="1" i="0">
-                <a:solidFill>
-                  <a:srgbClr val="8F989D"/>
-                </a:solidFill>
-                <a:latin typeface="Calibri"/>
-              </a:rPr>
-              <a:t>10</a:t>
-            </a:r>
-          </a:p>
-        </p:txBody>
-      </p:sp>
-      <p:sp>
-        <p:nvSpPr>
-          <p:cNvPr id="6" name="TextBox 5"/>
-          <p:cNvSpPr txBox="1"/>
-          <p:nvPr/>
-        </p:nvSpPr>
-        <p:spPr>
-          <a:xfrm>
-            <a:off x="640080" y="5943600"/>
-            <a:ext cx="9997135" cy="457200"/>
-          </a:xfrm>
-          <a:prstGeom prst="rect">
-            <a:avLst/>
-          </a:prstGeom>
-          <a:noFill/>
-        </p:spPr>
-        <p:txBody>
-          <a:bodyPr wrap="square" anchor="t" lIns="0" rIns="0" tIns="0" bIns="0">
-            <a:spAutoFit/>
-          </a:bodyPr>
-          <a:lstStyle/>
-          <a:p>
-            <a:r>
-              <a:rPr sz="1200" b="0" i="1">
-                <a:solidFill>
-                  <a:srgbClr val="2B2B2B"/>
-                </a:solidFill>
-                <a:latin typeface="Calibri"/>
-              </a:rPr>
-              <a:t>Piénsenlo así: todo el semestre queda en un archivo. Cuídenlo, guarden versiones y compártanlo con todo el equipo desde hoy.</a:t>
-            </a:r>
-          </a:p>
-        </p:txBody>
-      </p:sp>
-    </p:spTree>
-  </p:cSld>
-  <p:clrMapOvr>
-    <a:masterClrMapping/>
-  </p:clrMapOvr>
-</p:sld>
-</file>
-
-<file path=ppt/slides/slide11.xml><?xml version="1.0" encoding="utf-8"?>
 <p:sld xmlns:a="http://schemas.openxmlformats.org/drawingml/2006/main" xmlns:p="http://schemas.openxmlformats.org/presentationml/2006/main" xmlns:r="http://schemas.openxmlformats.org/officeDocument/2006/relationships">
   <p:cSld>
     <p:bg>
@@ -4600,7 +4148,636 @@
                 </a:solidFill>
                 <a:latin typeface="Calibri"/>
               </a:rPr>
+              <a:t>10</a:t>
+            </a:r>
+          </a:p>
+        </p:txBody>
+      </p:sp>
+    </p:spTree>
+  </p:cSld>
+  <p:clrMapOvr>
+    <a:masterClrMapping/>
+  </p:clrMapOvr>
+</p:sld>
+</file>
+
+<file path=ppt/slides/slide11.xml><?xml version="1.0" encoding="utf-8"?>
+<p:sld xmlns:a="http://schemas.openxmlformats.org/drawingml/2006/main" xmlns:p="http://schemas.openxmlformats.org/presentationml/2006/main" xmlns:r="http://schemas.openxmlformats.org/officeDocument/2006/relationships">
+  <p:cSld>
+    <p:bg>
+      <p:bgPr>
+        <a:solidFill>
+          <a:srgbClr val="FFFFFF"/>
+        </a:solidFill>
+        <a:effectLst/>
+      </p:bgPr>
+    </p:bg>
+    <p:spTree>
+      <p:nvGrpSpPr>
+        <p:cNvPr id="1" name=""/>
+        <p:cNvGrpSpPr/>
+        <p:nvPr/>
+      </p:nvGrpSpPr>
+      <p:grpSpPr/>
+      <p:sp>
+        <p:nvSpPr>
+          <p:cNvPr id="2" name="Rectangle 1"/>
+          <p:cNvSpPr/>
+          <p:nvPr/>
+        </p:nvSpPr>
+        <p:spPr>
+          <a:xfrm>
+            <a:off x="0" y="0"/>
+            <a:ext cx="12191695" cy="1188720"/>
+          </a:xfrm>
+          <a:prstGeom prst="rect">
+            <a:avLst/>
+          </a:prstGeom>
+          <a:solidFill>
+            <a:srgbClr val="0C2340"/>
+          </a:solidFill>
+          <a:ln>
+            <a:noFill/>
+          </a:ln>
+          <a:effectLst/>
+        </p:spPr>
+        <p:style>
+          <a:lnRef idx="1">
+            <a:schemeClr val="accent1"/>
+          </a:lnRef>
+          <a:fillRef idx="3">
+            <a:schemeClr val="accent1"/>
+          </a:fillRef>
+          <a:effectRef idx="2">
+            <a:schemeClr val="accent1"/>
+          </a:effectRef>
+          <a:fontRef idx="minor">
+            <a:schemeClr val="lt1"/>
+          </a:fontRef>
+        </p:style>
+        <p:txBody>
+          <a:bodyPr rtlCol="0" anchor="ctr"/>
+          <a:lstStyle/>
+          <a:p>
+            <a:pPr algn="ctr"/>
+          </a:p>
+        </p:txBody>
+      </p:sp>
+      <p:sp>
+        <p:nvSpPr>
+          <p:cNvPr id="3" name="TextBox 2"/>
+          <p:cNvSpPr txBox="1"/>
+          <p:nvPr/>
+        </p:nvSpPr>
+        <p:spPr>
+          <a:xfrm>
+            <a:off x="640080" y="0"/>
+            <a:ext cx="9082735" cy="1188720"/>
+          </a:xfrm>
+          <a:prstGeom prst="rect">
+            <a:avLst/>
+          </a:prstGeom>
+          <a:noFill/>
+        </p:spPr>
+        <p:txBody>
+          <a:bodyPr wrap="square" anchor="ctr" lIns="0" rIns="0" tIns="0" bIns="0">
+            <a:spAutoFit/>
+          </a:bodyPr>
+          <a:lstStyle/>
+          <a:p>
+            <a:pPr algn="ctr"/>
+            <a:r>
+              <a:rPr sz="2600" b="1" i="0">
+                <a:solidFill>
+                  <a:srgbClr val="FFFFFF"/>
+                </a:solidFill>
+                <a:latin typeface="Calibri"/>
+              </a:rPr>
+              <a:t>Cómo se entrega: paso a paso en CDigital</a:t>
+            </a:r>
+          </a:p>
+        </p:txBody>
+      </p:sp>
+      <p:sp>
+        <p:nvSpPr>
+          <p:cNvPr id="4" name="TextBox 3"/>
+          <p:cNvSpPr txBox="1"/>
+          <p:nvPr/>
+        </p:nvSpPr>
+        <p:spPr>
+          <a:xfrm>
+            <a:off x="640080" y="1691639"/>
+            <a:ext cx="10911535" cy="4617720"/>
+          </a:xfrm>
+          <a:prstGeom prst="rect">
+            <a:avLst/>
+          </a:prstGeom>
+          <a:noFill/>
+        </p:spPr>
+        <p:txBody>
+          <a:bodyPr wrap="square" anchor="t" lIns="0" rIns="0" tIns="0" bIns="0">
+            <a:spAutoFit/>
+          </a:bodyPr>
+          <a:lstStyle/>
+          <a:p>
+            <a:pPr>
+              <a:spcAft>
+                <a:spcPts val="1000"/>
+              </a:spcAft>
+            </a:pPr>
+            <a:r>
+              <a:rPr sz="1500" b="0" i="0">
+                <a:solidFill>
+                  <a:srgbClr val="2B2B2B"/>
+                </a:solidFill>
+                <a:latin typeface="Calibri"/>
+              </a:rPr>
+              <a:t>–   </a:t>
+            </a:r>
+            <a:r>
+              <a:rPr sz="1500" b="1" i="0">
+                <a:solidFill>
+                  <a:srgbClr val="2B2B2B"/>
+                </a:solidFill>
+                <a:latin typeface="Calibri"/>
+              </a:rPr>
+              <a:t>1.</a:t>
+            </a:r>
+            <a:r>
+              <a:rPr sz="1500" b="0" i="0">
+                <a:solidFill>
+                  <a:srgbClr val="2B2B2B"/>
+                </a:solidFill>
+                <a:latin typeface="Calibri"/>
+              </a:rPr>
+              <a:t> Trabajen la </a:t>
+            </a:r>
+            <a:r>
+              <a:rPr sz="1500" b="1" i="0">
+                <a:solidFill>
+                  <a:srgbClr val="2B2B2B"/>
+                </a:solidFill>
+                <a:latin typeface="Calibri"/>
+              </a:rPr>
+              <a:t>plantilla APA CUN en Google Docs</a:t>
+            </a:r>
+            <a:r>
+              <a:rPr sz="1500" b="0" i="0">
+                <a:solidFill>
+                  <a:srgbClr val="2B2B2B"/>
+                </a:solidFill>
+                <a:latin typeface="Calibri"/>
+              </a:rPr>
+              <a:t>: un documento por equipo, con permiso de edición para todos.</a:t>
+            </a:r>
+          </a:p>
+          <a:p>
+            <a:pPr>
+              <a:spcAft>
+                <a:spcPts val="1000"/>
+              </a:spcAft>
+            </a:pPr>
+            <a:r>
+              <a:rPr sz="1500" b="0" i="0">
+                <a:solidFill>
+                  <a:srgbClr val="2B2B2B"/>
+                </a:solidFill>
+                <a:latin typeface="Calibri"/>
+              </a:rPr>
+              <a:t>–   </a:t>
+            </a:r>
+            <a:r>
+              <a:rPr sz="1500" b="1" i="0">
+                <a:solidFill>
+                  <a:srgbClr val="2B2B2B"/>
+                </a:solidFill>
+                <a:latin typeface="Calibri"/>
+              </a:rPr>
+              <a:t>2.</a:t>
+            </a:r>
+            <a:r>
+              <a:rPr sz="1500" b="0" i="0">
+                <a:solidFill>
+                  <a:srgbClr val="2B2B2B"/>
+                </a:solidFill>
+                <a:latin typeface="Calibri"/>
+              </a:rPr>
+              <a:t> Antes de entregar, </a:t>
+            </a:r>
+            <a:r>
+              <a:rPr sz="1500" b="1" i="0">
+                <a:solidFill>
+                  <a:srgbClr val="2B2B2B"/>
+                </a:solidFill>
+                <a:latin typeface="Calibri"/>
+              </a:rPr>
+              <a:t>descarguen como PDF</a:t>
+            </a:r>
+            <a:r>
+              <a:rPr sz="1500" b="0" i="0">
+                <a:solidFill>
+                  <a:srgbClr val="2B2B2B"/>
+                </a:solidFill>
+                <a:latin typeface="Calibri"/>
+              </a:rPr>
+              <a:t>: así nadie recibe un documento a medio formatear.</a:t>
+            </a:r>
+          </a:p>
+          <a:p>
+            <a:pPr>
+              <a:spcAft>
+                <a:spcPts val="1000"/>
+              </a:spcAft>
+            </a:pPr>
+            <a:r>
+              <a:rPr sz="1500" b="0" i="0">
+                <a:solidFill>
+                  <a:srgbClr val="2B2B2B"/>
+                </a:solidFill>
+                <a:latin typeface="Calibri"/>
+              </a:rPr>
+              <a:t>–   </a:t>
+            </a:r>
+            <a:r>
+              <a:rPr sz="1500" b="1" i="0">
+                <a:solidFill>
+                  <a:srgbClr val="2B2B2B"/>
+                </a:solidFill>
+                <a:latin typeface="Calibri"/>
+              </a:rPr>
+              <a:t>3.</a:t>
+            </a:r>
+            <a:r>
+              <a:rPr sz="1500" b="0" i="0">
+                <a:solidFill>
+                  <a:srgbClr val="2B2B2B"/>
+                </a:solidFill>
+                <a:latin typeface="Calibri"/>
+              </a:rPr>
+              <a:t> Nombren el archivo con el ítem del aula: </a:t>
+            </a:r>
+            <a:r>
+              <a:rPr sz="1500" b="1" i="0">
+                <a:solidFill>
+                  <a:srgbClr val="2B2B2B"/>
+                </a:solidFill>
+                <a:latin typeface="Calibri"/>
+              </a:rPr>
+              <a:t>ACA1_Apellido1-Apellido2-Apellido3</a:t>
+            </a:r>
+            <a:r>
+              <a:rPr sz="1500" b="0" i="0">
+                <a:solidFill>
+                  <a:srgbClr val="2B2B2B"/>
+                </a:solidFill>
+                <a:latin typeface="Calibri"/>
+              </a:rPr>
+              <a:t> en el corte 2 y </a:t>
+            </a:r>
+            <a:r>
+              <a:rPr sz="1500" b="1" i="0">
+                <a:solidFill>
+                  <a:srgbClr val="2B2B2B"/>
+                </a:solidFill>
+                <a:latin typeface="Calibri"/>
+              </a:rPr>
+              <a:t>ACAFinal_Apellido1-Apellido2-Apellido3</a:t>
+            </a:r>
+            <a:r>
+              <a:rPr sz="1500" b="0" i="0">
+                <a:solidFill>
+                  <a:srgbClr val="2B2B2B"/>
+                </a:solidFill>
+                <a:latin typeface="Calibri"/>
+              </a:rPr>
+              <a:t> en el cierre.</a:t>
+            </a:r>
+          </a:p>
+          <a:p>
+            <a:pPr>
+              <a:spcAft>
+                <a:spcPts val="1000"/>
+              </a:spcAft>
+            </a:pPr>
+            <a:r>
+              <a:rPr sz="1500" b="0" i="0">
+                <a:solidFill>
+                  <a:srgbClr val="2B2B2B"/>
+                </a:solidFill>
+                <a:latin typeface="Calibri"/>
+              </a:rPr>
+              <a:t>–   </a:t>
+            </a:r>
+            <a:r>
+              <a:rPr sz="1500" b="1" i="0">
+                <a:solidFill>
+                  <a:srgbClr val="2B2B2B"/>
+                </a:solidFill>
+                <a:latin typeface="Calibri"/>
+              </a:rPr>
+              <a:t>4.</a:t>
+            </a:r>
+            <a:r>
+              <a:rPr sz="1500" b="0" i="0">
+                <a:solidFill>
+                  <a:srgbClr val="2B2B2B"/>
+                </a:solidFill>
+                <a:latin typeface="Calibri"/>
+              </a:rPr>
+              <a:t> </a:t>
+            </a:r>
+            <a:r>
+              <a:rPr sz="1500" b="1" i="0">
+                <a:solidFill>
+                  <a:srgbClr val="2B2B2B"/>
+                </a:solidFill>
+                <a:latin typeface="Calibri"/>
+              </a:rPr>
+              <a:t>Un solo integrante</a:t>
+            </a:r>
+            <a:r>
+              <a:rPr sz="1500" b="0" i="0">
+                <a:solidFill>
+                  <a:srgbClr val="2B2B2B"/>
+                </a:solidFill>
+                <a:latin typeface="Calibri"/>
+              </a:rPr>
+              <a:t> lo sube en el espacio de ese ítem en </a:t>
+            </a:r>
+            <a:r>
+              <a:rPr sz="1500" b="1" i="0">
+                <a:solidFill>
+                  <a:srgbClr val="2B2B2B"/>
+                </a:solidFill>
+                <a:latin typeface="Calibri"/>
+              </a:rPr>
+              <a:t>CDigital</a:t>
+            </a:r>
+            <a:r>
+              <a:rPr sz="1500" b="0" i="0">
+                <a:solidFill>
+                  <a:srgbClr val="2B2B2B"/>
+                </a:solidFill>
+                <a:latin typeface="Calibri"/>
+              </a:rPr>
+              <a:t>; los demás verifican que quedó cargado.</a:t>
+            </a:r>
+          </a:p>
+          <a:p>
+            <a:pPr lvl="1">
+              <a:spcAft>
+                <a:spcPts val="600"/>
+              </a:spcAft>
+            </a:pPr>
+            <a:r>
+              <a:rPr sz="1400" b="0" i="0">
+                <a:solidFill>
+                  <a:srgbClr val="2B2B2B"/>
+                </a:solidFill>
+                <a:latin typeface="Calibri"/>
+              </a:rPr>
+              <a:t>●   </a:t>
+            </a:r>
+            <a:r>
+              <a:rPr sz="1400" b="1" i="0">
+                <a:solidFill>
+                  <a:srgbClr val="2B2B2B"/>
+                </a:solidFill>
+                <a:latin typeface="Calibri"/>
+              </a:rPr>
+              <a:t>El Quiz del corte 1 no se sube:</a:t>
+            </a:r>
+            <a:r>
+              <a:rPr sz="1400" b="0" i="0">
+                <a:solidFill>
+                  <a:srgbClr val="2B2B2B"/>
+                </a:solidFill>
+                <a:latin typeface="Calibri"/>
+              </a:rPr>
+              <a:t> es un cuestionario individual que se resuelve en el aula dentro de su ventana.</a:t>
+            </a:r>
+          </a:p>
+          <a:p>
+            <a:pPr>
+              <a:spcAft>
+                <a:spcPts val="1000"/>
+              </a:spcAft>
+            </a:pPr>
+            <a:r>
+              <a:rPr sz="1500" b="0" i="0">
+                <a:solidFill>
+                  <a:srgbClr val="2B2B2B"/>
+                </a:solidFill>
+                <a:latin typeface="Calibri"/>
+              </a:rPr>
+              <a:t>–   </a:t>
+            </a:r>
+            <a:r>
+              <a:rPr sz="1500" b="1" i="0">
+                <a:solidFill>
+                  <a:srgbClr val="2B2B2B"/>
+                </a:solidFill>
+                <a:latin typeface="Calibri"/>
+              </a:rPr>
+              <a:t>5.</a:t>
+            </a:r>
+            <a:r>
+              <a:rPr sz="1500" b="0" i="0">
+                <a:solidFill>
+                  <a:srgbClr val="2B2B2B"/>
+                </a:solidFill>
+                <a:latin typeface="Calibri"/>
+              </a:rPr>
+              <a:t> Revisen que la portada traiga los </a:t>
+            </a:r>
+            <a:r>
+              <a:rPr sz="1500" b="1" i="0">
+                <a:solidFill>
+                  <a:srgbClr val="2B2B2B"/>
+                </a:solidFill>
+                <a:latin typeface="Calibri"/>
+              </a:rPr>
+              <a:t>nombres completos de todos</a:t>
+            </a:r>
+            <a:r>
+              <a:rPr sz="1500" b="0" i="0">
+                <a:solidFill>
+                  <a:srgbClr val="2B2B2B"/>
+                </a:solidFill>
+                <a:latin typeface="Calibri"/>
+              </a:rPr>
+              <a:t>: si falta alguien, esa persona no tiene nota.</a:t>
+            </a:r>
+          </a:p>
+          <a:p>
+            <a:pPr>
+              <a:spcAft>
+                <a:spcPts val="1000"/>
+              </a:spcAft>
+            </a:pPr>
+            <a:r>
+              <a:rPr sz="1500" b="0" i="0">
+                <a:solidFill>
+                  <a:srgbClr val="2B2B2B"/>
+                </a:solidFill>
+                <a:latin typeface="Calibri"/>
+              </a:rPr>
+              <a:t>–   </a:t>
+            </a:r>
+            <a:r>
+              <a:rPr sz="1500" b="1" i="0">
+                <a:solidFill>
+                  <a:srgbClr val="2B2B2B"/>
+                </a:solidFill>
+                <a:latin typeface="Calibri"/>
+              </a:rPr>
+              <a:t>Lo que no está en CDigital, no está entregado.</a:t>
+            </a:r>
+            <a:r>
+              <a:rPr sz="1500" b="0" i="0">
+                <a:solidFill>
+                  <a:srgbClr val="2B2B2B"/>
+                </a:solidFill>
+                <a:latin typeface="Calibri"/>
+              </a:rPr>
+              <a:t> Correo, chat o WhatsApp no son canal de entrega.</a:t>
+            </a:r>
+          </a:p>
+          <a:p>
+            <a:pPr>
+              <a:spcAft>
+                <a:spcPts val="1000"/>
+              </a:spcAft>
+            </a:pPr>
+            <a:r>
+              <a:rPr sz="1500" b="0" i="0">
+                <a:solidFill>
+                  <a:srgbClr val="2B2B2B"/>
+                </a:solidFill>
+                <a:latin typeface="Calibri"/>
+              </a:rPr>
+              <a:t>–   </a:t>
+            </a:r>
+            <a:r>
+              <a:rPr sz="1500" b="1" i="0">
+                <a:solidFill>
+                  <a:srgbClr val="2B2B2B"/>
+                </a:solidFill>
+                <a:latin typeface="Calibri"/>
+              </a:rPr>
+              <a:t>Entrega tardía:</a:t>
+            </a:r>
+            <a:r>
+              <a:rPr sz="1500" b="0" i="0">
+                <a:solidFill>
+                  <a:srgbClr val="2B2B2B"/>
+                </a:solidFill>
+                <a:latin typeface="Calibri"/>
+              </a:rPr>
+              <a:t> el espacio cierra a la hora publicada en el enunciado. Si algo pasa, se avisa </a:t>
+            </a:r>
+            <a:r>
+              <a:rPr sz="1500" b="1" i="0">
+                <a:solidFill>
+                  <a:srgbClr val="2B2B2B"/>
+                </a:solidFill>
+                <a:latin typeface="Calibri"/>
+              </a:rPr>
+              <a:t>antes</a:t>
+            </a:r>
+            <a:r>
+              <a:rPr sz="1500" b="0" i="0">
+                <a:solidFill>
+                  <a:srgbClr val="2B2B2B"/>
+                </a:solidFill>
+                <a:latin typeface="Calibri"/>
+              </a:rPr>
+              <a:t> del cierre.</a:t>
+            </a:r>
+          </a:p>
+          <a:p>
+            <a:pPr lvl="1">
+              <a:spcAft>
+                <a:spcPts val="600"/>
+              </a:spcAft>
+            </a:pPr>
+            <a:r>
+              <a:rPr sz="1400" b="0" i="0">
+                <a:solidFill>
+                  <a:srgbClr val="2B2B2B"/>
+                </a:solidFill>
+                <a:latin typeface="Calibri"/>
+              </a:rPr>
+              <a:t>●   Quedarse sin internet a las 11:50 p. m. no es un imprevisto: es haber esperado hasta las 11:50 p. m.</a:t>
+            </a:r>
+          </a:p>
+        </p:txBody>
+      </p:sp>
+      <p:sp>
+        <p:nvSpPr>
+          <p:cNvPr id="5" name="TextBox 4"/>
+          <p:cNvSpPr txBox="1"/>
+          <p:nvPr/>
+        </p:nvSpPr>
+        <p:spPr>
+          <a:xfrm>
+            <a:off x="11094415" y="6446520"/>
+            <a:ext cx="548640" cy="274320"/>
+          </a:xfrm>
+          <a:prstGeom prst="rect">
+            <a:avLst/>
+          </a:prstGeom>
+          <a:noFill/>
+        </p:spPr>
+        <p:txBody>
+          <a:bodyPr wrap="square" anchor="t" lIns="0" rIns="0" tIns="0" bIns="0">
+            <a:spAutoFit/>
+          </a:bodyPr>
+          <a:lstStyle/>
+          <a:p>
+            <a:pPr algn="r"/>
+            <a:r>
+              <a:rPr sz="1000" b="1" i="0">
+                <a:solidFill>
+                  <a:srgbClr val="8F989D"/>
+                </a:solidFill>
+                <a:latin typeface="Calibri"/>
+              </a:rPr>
               <a:t>11</a:t>
+            </a:r>
+          </a:p>
+        </p:txBody>
+      </p:sp>
+      <p:sp>
+        <p:nvSpPr>
+          <p:cNvPr id="6" name="TextBox 5"/>
+          <p:cNvSpPr txBox="1"/>
+          <p:nvPr/>
+        </p:nvSpPr>
+        <p:spPr>
+          <a:xfrm>
+            <a:off x="640080" y="5943600"/>
+            <a:ext cx="9997135" cy="457200"/>
+          </a:xfrm>
+          <a:prstGeom prst="rect">
+            <a:avLst/>
+          </a:prstGeom>
+          <a:noFill/>
+        </p:spPr>
+        <p:txBody>
+          <a:bodyPr wrap="square" anchor="t" lIns="0" rIns="0" tIns="0" bIns="0">
+            <a:spAutoFit/>
+          </a:bodyPr>
+          <a:lstStyle/>
+          <a:p>
+            <a:r>
+              <a:rPr sz="1200" b="0" i="1">
+                <a:solidFill>
+                  <a:srgbClr val="2B2B2B"/>
+                </a:solidFill>
+                <a:latin typeface="Calibri"/>
+              </a:rPr>
+              <a:t>Consejo del Docente: suban una versión el día anterior. Mientras el espacio esté abierto siempre se puede reemplazar por una mejor.</a:t>
             </a:r>
           </a:p>
         </p:txBody>
@@ -4705,21 +4882,65 @@
                 </a:solidFill>
                 <a:latin typeface="Calibri"/>
               </a:rPr>
-              <a:t>Cómo se entrega: paso a paso en CDigital</a:t>
-            </a:r>
-          </a:p>
-        </p:txBody>
-      </p:sp>
-      <p:sp>
-        <p:nvSpPr>
-          <p:cNvPr id="4" name="TextBox 3"/>
+              <a:t>Integridad académica: la línea que no se cruza</a:t>
+            </a:r>
+          </a:p>
+        </p:txBody>
+      </p:sp>
+      <p:sp>
+        <p:nvSpPr>
+          <p:cNvPr id="4" name="Rounded Rectangle 3"/>
+          <p:cNvSpPr/>
+          <p:nvPr/>
+        </p:nvSpPr>
+        <p:spPr>
+          <a:xfrm>
+            <a:off x="640080" y="1737360"/>
+            <a:ext cx="10911535" cy="1481328"/>
+          </a:xfrm>
+          <a:prstGeom prst="roundRect">
+            <a:avLst/>
+          </a:prstGeom>
+          <a:solidFill>
+            <a:srgbClr val="FBE4E4"/>
+          </a:solidFill>
+          <a:ln>
+            <a:noFill/>
+          </a:ln>
+          <a:effectLst/>
+        </p:spPr>
+        <p:style>
+          <a:lnRef idx="1">
+            <a:schemeClr val="accent1"/>
+          </a:lnRef>
+          <a:fillRef idx="3">
+            <a:schemeClr val="accent1"/>
+          </a:fillRef>
+          <a:effectRef idx="2">
+            <a:schemeClr val="accent1"/>
+          </a:effectRef>
+          <a:fontRef idx="minor">
+            <a:schemeClr val="lt1"/>
+          </a:fontRef>
+        </p:style>
+        <p:txBody>
+          <a:bodyPr rtlCol="0" anchor="ctr"/>
+          <a:lstStyle/>
+          <a:p>
+            <a:pPr algn="ctr"/>
+          </a:p>
+        </p:txBody>
+      </p:sp>
+      <p:sp>
+        <p:nvSpPr>
+          <p:cNvPr id="5" name="TextBox 4"/>
           <p:cNvSpPr txBox="1"/>
           <p:nvPr/>
         </p:nvSpPr>
         <p:spPr>
           <a:xfrm>
-            <a:off x="640080" y="1691639"/>
-            <a:ext cx="10911535" cy="4617720"/>
+            <a:off x="868680" y="1847088"/>
+            <a:ext cx="10454335" cy="1261872"/>
           </a:xfrm>
           <a:prstGeom prst="rect">
             <a:avLst/>
@@ -4732,449 +4953,97 @@
           </a:bodyPr>
           <a:lstStyle/>
           <a:p>
+            <a:r>
+              <a:rPr sz="1300" b="1" i="0">
+                <a:solidFill>
+                  <a:srgbClr val="0C2340"/>
+                </a:solidFill>
+                <a:latin typeface="Calibri"/>
+              </a:rPr>
+              <a:t>⚠️ Importante</a:t>
+            </a:r>
+          </a:p>
+          <a:p>
             <a:pPr>
-              <a:spcAft>
-                <a:spcPts val="1000"/>
-              </a:spcAft>
+              <a:spcBef>
+                <a:spcPts val="400"/>
+              </a:spcBef>
             </a:pPr>
             <a:r>
-              <a:rPr sz="1500" b="0" i="0">
-                <a:solidFill>
-                  <a:srgbClr val="2B2B2B"/>
-                </a:solidFill>
-                <a:latin typeface="Calibri"/>
-              </a:rPr>
-              <a:t>–   </a:t>
-            </a:r>
-            <a:r>
-              <a:rPr sz="1500" b="1" i="0">
-                <a:solidFill>
-                  <a:srgbClr val="2B2B2B"/>
-                </a:solidFill>
-                <a:latin typeface="Calibri"/>
-              </a:rPr>
-              <a:t>1.</a:t>
-            </a:r>
-            <a:r>
-              <a:rPr sz="1500" b="0" i="0">
-                <a:solidFill>
-                  <a:srgbClr val="2B2B2B"/>
-                </a:solidFill>
-                <a:latin typeface="Calibri"/>
-              </a:rPr>
-              <a:t> Trabajen la </a:t>
-            </a:r>
-            <a:r>
-              <a:rPr sz="1500" b="1" i="0">
-                <a:solidFill>
-                  <a:srgbClr val="2B2B2B"/>
-                </a:solidFill>
-                <a:latin typeface="Calibri"/>
-              </a:rPr>
-              <a:t>plantilla APA CUN en Google Docs</a:t>
-            </a:r>
-            <a:r>
-              <a:rPr sz="1500" b="0" i="0">
-                <a:solidFill>
-                  <a:srgbClr val="2B2B2B"/>
-                </a:solidFill>
-                <a:latin typeface="Calibri"/>
-              </a:rPr>
-              <a:t>: un documento por equipo, con permiso de edición para todos.</a:t>
-            </a:r>
-          </a:p>
-          <a:p>
-            <a:pPr>
-              <a:spcAft>
-                <a:spcPts val="1000"/>
-              </a:spcAft>
-            </a:pPr>
-            <a:r>
-              <a:rPr sz="1500" b="0" i="0">
-                <a:solidFill>
-                  <a:srgbClr val="2B2B2B"/>
-                </a:solidFill>
-                <a:latin typeface="Calibri"/>
-              </a:rPr>
-              <a:t>–   </a:t>
-            </a:r>
-            <a:r>
-              <a:rPr sz="1500" b="1" i="0">
-                <a:solidFill>
-                  <a:srgbClr val="2B2B2B"/>
-                </a:solidFill>
-                <a:latin typeface="Calibri"/>
-              </a:rPr>
-              <a:t>2.</a:t>
-            </a:r>
-            <a:r>
-              <a:rPr sz="1500" b="0" i="0">
-                <a:solidFill>
-                  <a:srgbClr val="2B2B2B"/>
-                </a:solidFill>
-                <a:latin typeface="Calibri"/>
-              </a:rPr>
-              <a:t> Antes de entregar, </a:t>
-            </a:r>
-            <a:r>
-              <a:rPr sz="1500" b="1" i="0">
-                <a:solidFill>
-                  <a:srgbClr val="2B2B2B"/>
-                </a:solidFill>
-                <a:latin typeface="Calibri"/>
-              </a:rPr>
-              <a:t>descarguen como PDF</a:t>
-            </a:r>
-            <a:r>
-              <a:rPr sz="1500" b="0" i="0">
-                <a:solidFill>
-                  <a:srgbClr val="2B2B2B"/>
-                </a:solidFill>
-                <a:latin typeface="Calibri"/>
-              </a:rPr>
-              <a:t>: así nadie recibe un documento a medio formatear.</a:t>
-            </a:r>
-          </a:p>
-          <a:p>
-            <a:pPr>
-              <a:spcAft>
-                <a:spcPts val="1000"/>
-              </a:spcAft>
-            </a:pPr>
-            <a:r>
-              <a:rPr sz="1500" b="0" i="0">
-                <a:solidFill>
-                  <a:srgbClr val="2B2B2B"/>
-                </a:solidFill>
-                <a:latin typeface="Calibri"/>
-              </a:rPr>
-              <a:t>–   </a:t>
-            </a:r>
-            <a:r>
-              <a:rPr sz="1500" b="1" i="0">
-                <a:solidFill>
-                  <a:srgbClr val="2B2B2B"/>
-                </a:solidFill>
-                <a:latin typeface="Calibri"/>
-              </a:rPr>
-              <a:t>3.</a:t>
-            </a:r>
-            <a:r>
-              <a:rPr sz="1500" b="0" i="0">
-                <a:solidFill>
-                  <a:srgbClr val="2B2B2B"/>
-                </a:solidFill>
-                <a:latin typeface="Calibri"/>
-              </a:rPr>
-              <a:t> Nombren el archivo con el ítem del aula: </a:t>
-            </a:r>
-            <a:r>
-              <a:rPr sz="1500" b="1" i="0">
-                <a:solidFill>
-                  <a:srgbClr val="2B2B2B"/>
-                </a:solidFill>
-                <a:latin typeface="Calibri"/>
-              </a:rPr>
-              <a:t>ACA1_Apellido1-Apellido2-Apellido3</a:t>
-            </a:r>
-            <a:r>
-              <a:rPr sz="1500" b="0" i="0">
-                <a:solidFill>
-                  <a:srgbClr val="2B2B2B"/>
-                </a:solidFill>
-                <a:latin typeface="Calibri"/>
-              </a:rPr>
-              <a:t> en el corte 2 y </a:t>
-            </a:r>
-            <a:r>
-              <a:rPr sz="1500" b="1" i="0">
-                <a:solidFill>
-                  <a:srgbClr val="2B2B2B"/>
-                </a:solidFill>
-                <a:latin typeface="Calibri"/>
-              </a:rPr>
-              <a:t>ACAFinal_Apellido1-Apellido2-Apellido3</a:t>
-            </a:r>
-            <a:r>
-              <a:rPr sz="1500" b="0" i="0">
-                <a:solidFill>
-                  <a:srgbClr val="2B2B2B"/>
-                </a:solidFill>
-                <a:latin typeface="Calibri"/>
-              </a:rPr>
-              <a:t> en el cierre.</a:t>
-            </a:r>
-          </a:p>
-          <a:p>
-            <a:pPr>
-              <a:spcAft>
-                <a:spcPts val="1000"/>
-              </a:spcAft>
-            </a:pPr>
-            <a:r>
-              <a:rPr sz="1500" b="0" i="0">
-                <a:solidFill>
-                  <a:srgbClr val="2B2B2B"/>
-                </a:solidFill>
-                <a:latin typeface="Calibri"/>
-              </a:rPr>
-              <a:t>–   </a:t>
-            </a:r>
-            <a:r>
-              <a:rPr sz="1500" b="1" i="0">
-                <a:solidFill>
-                  <a:srgbClr val="2B2B2B"/>
-                </a:solidFill>
-                <a:latin typeface="Calibri"/>
-              </a:rPr>
-              <a:t>4.</a:t>
-            </a:r>
-            <a:r>
-              <a:rPr sz="1500" b="0" i="0">
-                <a:solidFill>
-                  <a:srgbClr val="2B2B2B"/>
-                </a:solidFill>
-                <a:latin typeface="Calibri"/>
-              </a:rPr>
-              <a:t> </a:t>
-            </a:r>
-            <a:r>
-              <a:rPr sz="1500" b="1" i="0">
-                <a:solidFill>
-                  <a:srgbClr val="2B2B2B"/>
-                </a:solidFill>
-                <a:latin typeface="Calibri"/>
-              </a:rPr>
-              <a:t>Un solo integrante</a:t>
-            </a:r>
-            <a:r>
-              <a:rPr sz="1500" b="0" i="0">
-                <a:solidFill>
-                  <a:srgbClr val="2B2B2B"/>
-                </a:solidFill>
-                <a:latin typeface="Calibri"/>
-              </a:rPr>
-              <a:t> lo sube en el espacio de ese ítem en </a:t>
-            </a:r>
-            <a:r>
-              <a:rPr sz="1500" b="1" i="0">
-                <a:solidFill>
-                  <a:srgbClr val="2B2B2B"/>
-                </a:solidFill>
-                <a:latin typeface="Calibri"/>
-              </a:rPr>
-              <a:t>CDigital</a:t>
-            </a:r>
-            <a:r>
-              <a:rPr sz="1500" b="0" i="0">
-                <a:solidFill>
-                  <a:srgbClr val="2B2B2B"/>
-                </a:solidFill>
-                <a:latin typeface="Calibri"/>
-              </a:rPr>
-              <a:t>; los demás verifican que quedó cargado.</a:t>
-            </a:r>
-          </a:p>
-          <a:p>
-            <a:pPr lvl="1">
-              <a:spcAft>
-                <a:spcPts val="600"/>
-              </a:spcAft>
-            </a:pPr>
-            <a:r>
-              <a:rPr sz="1400" b="0" i="0">
-                <a:solidFill>
-                  <a:srgbClr val="2B2B2B"/>
-                </a:solidFill>
-                <a:latin typeface="Calibri"/>
-              </a:rPr>
-              <a:t>●   </a:t>
-            </a:r>
-            <a:r>
-              <a:rPr sz="1400" b="1" i="0">
-                <a:solidFill>
-                  <a:srgbClr val="2B2B2B"/>
-                </a:solidFill>
-                <a:latin typeface="Calibri"/>
-              </a:rPr>
-              <a:t>El Quiz del corte 1 no se sube:</a:t>
-            </a:r>
-            <a:r>
-              <a:rPr sz="1400" b="0" i="0">
-                <a:solidFill>
-                  <a:srgbClr val="2B2B2B"/>
-                </a:solidFill>
-                <a:latin typeface="Calibri"/>
-              </a:rPr>
-              <a:t> es un cuestionario individual que se resuelve en el aula dentro de su ventana.</a:t>
-            </a:r>
-          </a:p>
-          <a:p>
-            <a:pPr>
-              <a:spcAft>
-                <a:spcPts val="1000"/>
-              </a:spcAft>
-            </a:pPr>
-            <a:r>
-              <a:rPr sz="1500" b="0" i="0">
-                <a:solidFill>
-                  <a:srgbClr val="2B2B2B"/>
-                </a:solidFill>
-                <a:latin typeface="Calibri"/>
-              </a:rPr>
-              <a:t>–   </a:t>
-            </a:r>
-            <a:r>
-              <a:rPr sz="1500" b="1" i="0">
-                <a:solidFill>
-                  <a:srgbClr val="2B2B2B"/>
-                </a:solidFill>
-                <a:latin typeface="Calibri"/>
-              </a:rPr>
-              <a:t>5.</a:t>
-            </a:r>
-            <a:r>
-              <a:rPr sz="1500" b="0" i="0">
-                <a:solidFill>
-                  <a:srgbClr val="2B2B2B"/>
-                </a:solidFill>
-                <a:latin typeface="Calibri"/>
-              </a:rPr>
-              <a:t> Revisen que la portada traiga los </a:t>
-            </a:r>
-            <a:r>
-              <a:rPr sz="1500" b="1" i="0">
-                <a:solidFill>
-                  <a:srgbClr val="2B2B2B"/>
-                </a:solidFill>
-                <a:latin typeface="Calibri"/>
-              </a:rPr>
-              <a:t>nombres completos de todos</a:t>
-            </a:r>
-            <a:r>
-              <a:rPr sz="1500" b="0" i="0">
-                <a:solidFill>
-                  <a:srgbClr val="2B2B2B"/>
-                </a:solidFill>
-                <a:latin typeface="Calibri"/>
-              </a:rPr>
-              <a:t>: si falta alguien, esa persona no tiene nota.</a:t>
-            </a:r>
-          </a:p>
-          <a:p>
-            <a:pPr>
-              <a:spcAft>
-                <a:spcPts val="1000"/>
-              </a:spcAft>
-            </a:pPr>
-            <a:r>
-              <a:rPr sz="1500" b="0" i="0">
-                <a:solidFill>
-                  <a:srgbClr val="2B2B2B"/>
-                </a:solidFill>
-                <a:latin typeface="Calibri"/>
-              </a:rPr>
-              <a:t>–   </a:t>
-            </a:r>
-            <a:r>
-              <a:rPr sz="1500" b="1" i="0">
-                <a:solidFill>
-                  <a:srgbClr val="2B2B2B"/>
-                </a:solidFill>
-                <a:latin typeface="Calibri"/>
-              </a:rPr>
-              <a:t>Lo que no está en CDigital, no está entregado.</a:t>
-            </a:r>
-            <a:r>
-              <a:rPr sz="1500" b="0" i="0">
-                <a:solidFill>
-                  <a:srgbClr val="2B2B2B"/>
-                </a:solidFill>
-                <a:latin typeface="Calibri"/>
-              </a:rPr>
-              <a:t> Correo, chat o WhatsApp no son canal de entrega.</a:t>
-            </a:r>
-          </a:p>
-          <a:p>
-            <a:pPr>
-              <a:spcAft>
-                <a:spcPts val="1000"/>
-              </a:spcAft>
-            </a:pPr>
-            <a:r>
-              <a:rPr sz="1500" b="0" i="0">
-                <a:solidFill>
-                  <a:srgbClr val="2B2B2B"/>
-                </a:solidFill>
-                <a:latin typeface="Calibri"/>
-              </a:rPr>
-              <a:t>–   </a:t>
-            </a:r>
-            <a:r>
-              <a:rPr sz="1500" b="1" i="0">
-                <a:solidFill>
-                  <a:srgbClr val="2B2B2B"/>
-                </a:solidFill>
-                <a:latin typeface="Calibri"/>
-              </a:rPr>
-              <a:t>Entrega tardía:</a:t>
-            </a:r>
-            <a:r>
-              <a:rPr sz="1500" b="0" i="0">
-                <a:solidFill>
-                  <a:srgbClr val="2B2B2B"/>
-                </a:solidFill>
-                <a:latin typeface="Calibri"/>
-              </a:rPr>
-              <a:t> el espacio cierra a la hora publicada en el enunciado. Si algo pasa, se avisa </a:t>
-            </a:r>
-            <a:r>
-              <a:rPr sz="1500" b="1" i="0">
-                <a:solidFill>
-                  <a:srgbClr val="2B2B2B"/>
-                </a:solidFill>
-                <a:latin typeface="Calibri"/>
-              </a:rPr>
-              <a:t>antes</a:t>
-            </a:r>
-            <a:r>
-              <a:rPr sz="1500" b="0" i="0">
-                <a:solidFill>
-                  <a:srgbClr val="2B2B2B"/>
-                </a:solidFill>
-                <a:latin typeface="Calibri"/>
-              </a:rPr>
-              <a:t> del cierre.</a:t>
-            </a:r>
-          </a:p>
-          <a:p>
-            <a:pPr lvl="1">
-              <a:spcAft>
-                <a:spcPts val="600"/>
-              </a:spcAft>
-            </a:pPr>
-            <a:r>
-              <a:rPr sz="1400" b="0" i="0">
-                <a:solidFill>
-                  <a:srgbClr val="2B2B2B"/>
-                </a:solidFill>
-                <a:latin typeface="Calibri"/>
-              </a:rPr>
-              <a:t>●   Quedarse sin internet a las 11:50 p. m. no es un imprevisto: es haber esperado hasta las 11:50 p. m.</a:t>
-            </a:r>
-          </a:p>
-        </p:txBody>
-      </p:sp>
-      <p:sp>
-        <p:nvSpPr>
-          <p:cNvPr id="5" name="TextBox 4"/>
+              <a:rPr sz="1300" b="1" i="0">
+                <a:solidFill>
+                  <a:srgbClr val="2B2B2B"/>
+                </a:solidFill>
+                <a:latin typeface="Calibri"/>
+              </a:rPr>
+              <a:t>Plagio es tomar lo ajeno y no decirlo.</a:t>
+            </a:r>
+            <a:r>
+              <a:rPr sz="1300" b="0" i="0">
+                <a:solidFill>
+                  <a:srgbClr val="2B2B2B"/>
+                </a:solidFill>
+                <a:latin typeface="Calibri"/>
+              </a:rPr>
+              <a:t> Cuenta como plagio pegar texto de una fuente sin comillas ni cita, traducir un párrafo ajeno y firmarlo, reusar un trabajo propio de otro semestre como si fuera nuevo, y entregar el documento de otro equipo con la portada cambiada.</a:t>
+            </a:r>
+          </a:p>
+        </p:txBody>
+      </p:sp>
+      <p:sp>
+        <p:nvSpPr>
+          <p:cNvPr id="6" name="Rounded Rectangle 5"/>
+          <p:cNvSpPr/>
+          <p:nvPr/>
+        </p:nvSpPr>
+        <p:spPr>
+          <a:xfrm>
+            <a:off x="640080" y="3447288"/>
+            <a:ext cx="10911535" cy="1225296"/>
+          </a:xfrm>
+          <a:prstGeom prst="roundRect">
+            <a:avLst/>
+          </a:prstGeom>
+          <a:solidFill>
+            <a:srgbClr val="E8F5EC"/>
+          </a:solidFill>
+          <a:ln>
+            <a:noFill/>
+          </a:ln>
+          <a:effectLst/>
+        </p:spPr>
+        <p:style>
+          <a:lnRef idx="1">
+            <a:schemeClr val="accent1"/>
+          </a:lnRef>
+          <a:fillRef idx="3">
+            <a:schemeClr val="accent1"/>
+          </a:fillRef>
+          <a:effectRef idx="2">
+            <a:schemeClr val="accent1"/>
+          </a:effectRef>
+          <a:fontRef idx="minor">
+            <a:schemeClr val="lt1"/>
+          </a:fontRef>
+        </p:style>
+        <p:txBody>
+          <a:bodyPr rtlCol="0" anchor="ctr"/>
+          <a:lstStyle/>
+          <a:p>
+            <a:pPr algn="ctr"/>
+          </a:p>
+        </p:txBody>
+      </p:sp>
+      <p:sp>
+        <p:nvSpPr>
+          <p:cNvPr id="7" name="TextBox 6"/>
           <p:cNvSpPr txBox="1"/>
           <p:nvPr/>
         </p:nvSpPr>
         <p:spPr>
           <a:xfrm>
-            <a:off x="11094415" y="6446520"/>
-            <a:ext cx="548640" cy="274320"/>
+            <a:off x="868680" y="3557016"/>
+            <a:ext cx="10454335" cy="1005840"/>
           </a:xfrm>
           <a:prstGeom prst="rect">
             <a:avLst/>
@@ -5187,29 +5056,115 @@
           </a:bodyPr>
           <a:lstStyle/>
           <a:p>
-            <a:pPr algn="r"/>
-            <a:r>
-              <a:rPr sz="1000" b="1" i="0">
-                <a:solidFill>
-                  <a:srgbClr val="8F989D"/>
-                </a:solidFill>
-                <a:latin typeface="Calibri"/>
-              </a:rPr>
-              <a:t>12</a:t>
-            </a:r>
-          </a:p>
-        </p:txBody>
-      </p:sp>
-      <p:sp>
-        <p:nvSpPr>
-          <p:cNvPr id="6" name="TextBox 5"/>
+            <a:r>
+              <a:rPr sz="1300" b="1" i="0">
+                <a:solidFill>
+                  <a:srgbClr val="0C2340"/>
+                </a:solidFill>
+                <a:latin typeface="Calibri"/>
+              </a:rPr>
+              <a:t>ℹ️ Nota institucional</a:t>
+            </a:r>
+          </a:p>
+          <a:p>
+            <a:pPr>
+              <a:spcBef>
+                <a:spcPts val="400"/>
+              </a:spcBef>
+            </a:pPr>
+            <a:r>
+              <a:rPr sz="1300" b="1" i="0">
+                <a:solidFill>
+                  <a:srgbClr val="2B2B2B"/>
+                </a:solidFill>
+                <a:latin typeface="Calibri"/>
+              </a:rPr>
+              <a:t>Citar no debilita el trabajo: lo sostiene.</a:t>
+            </a:r>
+            <a:r>
+              <a:rPr sz="1300" b="0" i="0">
+                <a:solidFill>
+                  <a:srgbClr val="2B2B2B"/>
+                </a:solidFill>
+                <a:latin typeface="Calibri"/>
+              </a:rPr>
+              <a:t> En este curso se cita en </a:t>
+            </a:r>
+            <a:r>
+              <a:rPr sz="1300" b="1" i="0">
+                <a:solidFill>
+                  <a:srgbClr val="2B2B2B"/>
+                </a:solidFill>
+                <a:latin typeface="Calibri"/>
+              </a:rPr>
+              <a:t>APA 7</a:t>
+            </a:r>
+            <a:r>
+              <a:rPr sz="1300" b="0" i="0">
+                <a:solidFill>
+                  <a:srgbClr val="2B2B2B"/>
+                </a:solidFill>
+                <a:latin typeface="Calibri"/>
+              </a:rPr>
+              <a:t>, dentro del texto y en la lista final de referencias. Una idea que no es suya y no está citada es un problema; esa misma idea citada es un argumento con respaldo.</a:t>
+            </a:r>
+          </a:p>
+        </p:txBody>
+      </p:sp>
+      <p:sp>
+        <p:nvSpPr>
+          <p:cNvPr id="8" name="Rounded Rectangle 7"/>
+          <p:cNvSpPr/>
+          <p:nvPr/>
+        </p:nvSpPr>
+        <p:spPr>
+          <a:xfrm>
+            <a:off x="640080" y="4901184"/>
+            <a:ext cx="10911535" cy="1225296"/>
+          </a:xfrm>
+          <a:prstGeom prst="roundRect">
+            <a:avLst/>
+          </a:prstGeom>
+          <a:solidFill>
+            <a:srgbClr val="FDECD8"/>
+          </a:solidFill>
+          <a:ln>
+            <a:noFill/>
+          </a:ln>
+          <a:effectLst/>
+        </p:spPr>
+        <p:style>
+          <a:lnRef idx="1">
+            <a:schemeClr val="accent1"/>
+          </a:lnRef>
+          <a:fillRef idx="3">
+            <a:schemeClr val="accent1"/>
+          </a:fillRef>
+          <a:effectRef idx="2">
+            <a:schemeClr val="accent1"/>
+          </a:effectRef>
+          <a:fontRef idx="minor">
+            <a:schemeClr val="lt1"/>
+          </a:fontRef>
+        </p:style>
+        <p:txBody>
+          <a:bodyPr rtlCol="0" anchor="ctr"/>
+          <a:lstStyle/>
+          <a:p>
+            <a:pPr algn="ctr"/>
+          </a:p>
+        </p:txBody>
+      </p:sp>
+      <p:sp>
+        <p:nvSpPr>
+          <p:cNvPr id="9" name="TextBox 8"/>
           <p:cNvSpPr txBox="1"/>
           <p:nvPr/>
         </p:nvSpPr>
         <p:spPr>
           <a:xfrm>
-            <a:off x="640080" y="5943600"/>
-            <a:ext cx="9997135" cy="457200"/>
+            <a:off x="868680" y="5010912"/>
+            <a:ext cx="10454335" cy="1005840"/>
           </a:xfrm>
           <a:prstGeom prst="rect">
             <a:avLst/>
@@ -5223,13 +5178,73 @@
           <a:lstStyle/>
           <a:p>
             <a:r>
-              <a:rPr sz="1200" b="0" i="1">
-                <a:solidFill>
-                  <a:srgbClr val="2B2B2B"/>
-                </a:solidFill>
-                <a:latin typeface="Calibri"/>
-              </a:rPr>
-              <a:t>Consejo del Docente: suban una versión el día anterior. Mientras el espacio esté abierto siempre se puede reemplazar por una mejor.</a:t>
+              <a:rPr sz="1300" b="1" i="0">
+                <a:solidFill>
+                  <a:srgbClr val="0C2340"/>
+                </a:solidFill>
+                <a:latin typeface="Calibri"/>
+              </a:rPr>
+              <a:t>💡 Aclaración</a:t>
+            </a:r>
+          </a:p>
+          <a:p>
+            <a:pPr>
+              <a:spcBef>
+                <a:spcPts val="400"/>
+              </a:spcBef>
+            </a:pPr>
+            <a:r>
+              <a:rPr sz="1300" b="1" i="0">
+                <a:solidFill>
+                  <a:srgbClr val="2B2B2B"/>
+                </a:solidFill>
+                <a:latin typeface="Calibri"/>
+              </a:rPr>
+              <a:t>Si se detecta, hay debido proceso.</a:t>
+            </a:r>
+            <a:r>
+              <a:rPr sz="1300" b="0" i="0">
+                <a:solidFill>
+                  <a:srgbClr val="2B2B2B"/>
+                </a:solidFill>
+                <a:latin typeface="Calibri"/>
+              </a:rPr>
+              <a:t> No depende del ánimo del Docente: es un procedimiento institucional, con notificación y derecho a descargos. Por eso siempre conviene preguntar antes que improvisar.</a:t>
+            </a:r>
+          </a:p>
+        </p:txBody>
+      </p:sp>
+      <p:sp>
+        <p:nvSpPr>
+          <p:cNvPr id="10" name="TextBox 9"/>
+          <p:cNvSpPr txBox="1"/>
+          <p:nvPr/>
+        </p:nvSpPr>
+        <p:spPr>
+          <a:xfrm>
+            <a:off x="11094415" y="6446520"/>
+            <a:ext cx="548640" cy="274320"/>
+          </a:xfrm>
+          <a:prstGeom prst="rect">
+            <a:avLst/>
+          </a:prstGeom>
+          <a:noFill/>
+        </p:spPr>
+        <p:txBody>
+          <a:bodyPr wrap="square" anchor="t" lIns="0" rIns="0" tIns="0" bIns="0">
+            <a:spAutoFit/>
+          </a:bodyPr>
+          <a:lstStyle/>
+          <a:p>
+            <a:pPr algn="r"/>
+            <a:r>
+              <a:rPr sz="1000" b="1" i="0">
+                <a:solidFill>
+                  <a:srgbClr val="8F989D"/>
+                </a:solidFill>
+                <a:latin typeface="Calibri"/>
+              </a:rPr>
+              <a:t>12</a:t>
             </a:r>
           </a:p>
         </p:txBody>
@@ -5334,65 +5349,21 @@
                 </a:solidFill>
                 <a:latin typeface="Calibri"/>
               </a:rPr>
-              <a:t>Integridad académica: la línea que no se cruza</a:t>
-            </a:r>
-          </a:p>
-        </p:txBody>
-      </p:sp>
-      <p:sp>
-        <p:nvSpPr>
-          <p:cNvPr id="4" name="Rounded Rectangle 3"/>
-          <p:cNvSpPr/>
-          <p:nvPr/>
-        </p:nvSpPr>
-        <p:spPr>
-          <a:xfrm>
-            <a:off x="640080" y="1737360"/>
-            <a:ext cx="10911535" cy="1481328"/>
-          </a:xfrm>
-          <a:prstGeom prst="roundRect">
-            <a:avLst/>
-          </a:prstGeom>
-          <a:solidFill>
-            <a:srgbClr val="FBE4E4"/>
-          </a:solidFill>
-          <a:ln>
-            <a:noFill/>
-          </a:ln>
-          <a:effectLst/>
-        </p:spPr>
-        <p:style>
-          <a:lnRef idx="1">
-            <a:schemeClr val="accent1"/>
-          </a:lnRef>
-          <a:fillRef idx="3">
-            <a:schemeClr val="accent1"/>
-          </a:fillRef>
-          <a:effectRef idx="2">
-            <a:schemeClr val="accent1"/>
-          </a:effectRef>
-          <a:fontRef idx="minor">
-            <a:schemeClr val="lt1"/>
-          </a:fontRef>
-        </p:style>
-        <p:txBody>
-          <a:bodyPr rtlCol="0" anchor="ctr"/>
-          <a:lstStyle/>
-          <a:p>
-            <a:pPr algn="ctr"/>
-          </a:p>
-        </p:txBody>
-      </p:sp>
-      <p:sp>
-        <p:nvSpPr>
-          <p:cNvPr id="5" name="TextBox 4"/>
+              <a:t>IA generativa: se puede usar, con tres condiciones</a:t>
+            </a:r>
+          </a:p>
+        </p:txBody>
+      </p:sp>
+      <p:sp>
+        <p:nvSpPr>
+          <p:cNvPr id="4" name="TextBox 3"/>
           <p:cNvSpPr txBox="1"/>
           <p:nvPr/>
         </p:nvSpPr>
         <p:spPr>
           <a:xfrm>
-            <a:off x="868680" y="1847088"/>
-            <a:ext cx="10454335" cy="1261872"/>
+            <a:off x="640080" y="1691639"/>
+            <a:ext cx="10911535" cy="4617720"/>
           </a:xfrm>
           <a:prstGeom prst="rect">
             <a:avLst/>
@@ -5405,97 +5376,235 @@
           </a:bodyPr>
           <a:lstStyle/>
           <a:p>
-            <a:r>
-              <a:rPr sz="1300" b="1" i="0">
-                <a:solidFill>
-                  <a:srgbClr val="0C2340"/>
-                </a:solidFill>
-                <a:latin typeface="Calibri"/>
-              </a:rPr>
-              <a:t>⚠️ Importante</a:t>
-            </a:r>
-          </a:p>
-          <a:p>
             <a:pPr>
-              <a:spcBef>
-                <a:spcPts val="400"/>
-              </a:spcBef>
+              <a:spcAft>
+                <a:spcPts val="1000"/>
+              </a:spcAft>
             </a:pPr>
             <a:r>
-              <a:rPr sz="1300" b="1" i="0">
-                <a:solidFill>
-                  <a:srgbClr val="2B2B2B"/>
-                </a:solidFill>
-                <a:latin typeface="Calibri"/>
-              </a:rPr>
-              <a:t>Plagio es tomar lo ajeno y no decirlo.</a:t>
-            </a:r>
-            <a:r>
-              <a:rPr sz="1300" b="0" i="0">
-                <a:solidFill>
-                  <a:srgbClr val="2B2B2B"/>
-                </a:solidFill>
-                <a:latin typeface="Calibri"/>
-              </a:rPr>
-              <a:t> Cuenta como plagio pegar texto de una fuente sin comillas ni cita, traducir un párrafo ajeno y firmarlo, reusar un trabajo propio de otro semestre como si fuera nuevo, y entregar el documento de otro equipo con la portada cambiada.</a:t>
-            </a:r>
-          </a:p>
-        </p:txBody>
-      </p:sp>
-      <p:sp>
-        <p:nvSpPr>
-          <p:cNvPr id="6" name="Rounded Rectangle 5"/>
-          <p:cNvSpPr/>
-          <p:nvPr/>
-        </p:nvSpPr>
-        <p:spPr>
-          <a:xfrm>
-            <a:off x="640080" y="3447288"/>
-            <a:ext cx="10911535" cy="1225296"/>
-          </a:xfrm>
-          <a:prstGeom prst="roundRect">
-            <a:avLst/>
-          </a:prstGeom>
-          <a:solidFill>
-            <a:srgbClr val="E8F5EC"/>
-          </a:solidFill>
-          <a:ln>
-            <a:noFill/>
-          </a:ln>
-          <a:effectLst/>
-        </p:spPr>
-        <p:style>
-          <a:lnRef idx="1">
-            <a:schemeClr val="accent1"/>
-          </a:lnRef>
-          <a:fillRef idx="3">
-            <a:schemeClr val="accent1"/>
-          </a:fillRef>
-          <a:effectRef idx="2">
-            <a:schemeClr val="accent1"/>
-          </a:effectRef>
-          <a:fontRef idx="minor">
-            <a:schemeClr val="lt1"/>
-          </a:fontRef>
-        </p:style>
-        <p:txBody>
-          <a:bodyPr rtlCol="0" anchor="ctr"/>
-          <a:lstStyle/>
-          <a:p>
-            <a:pPr algn="ctr"/>
-          </a:p>
-        </p:txBody>
-      </p:sp>
-      <p:sp>
-        <p:nvSpPr>
-          <p:cNvPr id="7" name="TextBox 6"/>
+              <a:rPr sz="1600" b="0" i="0">
+                <a:solidFill>
+                  <a:srgbClr val="2B2B2B"/>
+                </a:solidFill>
+                <a:latin typeface="Calibri"/>
+              </a:rPr>
+              <a:t>–   En este curso </a:t>
+            </a:r>
+            <a:r>
+              <a:rPr sz="1600" b="1" i="0">
+                <a:solidFill>
+                  <a:srgbClr val="2B2B2B"/>
+                </a:solidFill>
+                <a:latin typeface="Calibri"/>
+              </a:rPr>
+              <a:t>no se prohíbe</a:t>
+            </a:r>
+            <a:r>
+              <a:rPr sz="1600" b="0" i="0">
+                <a:solidFill>
+                  <a:srgbClr val="2B2B2B"/>
+                </a:solidFill>
+                <a:latin typeface="Calibri"/>
+              </a:rPr>
+              <a:t> usar IA generativa. Se exige usarla con criterio y decirlo por escrito.</a:t>
+            </a:r>
+          </a:p>
+          <a:p>
+            <a:pPr>
+              <a:spcAft>
+                <a:spcPts val="1000"/>
+              </a:spcAft>
+            </a:pPr>
+            <a:r>
+              <a:rPr sz="1600" b="0" i="0">
+                <a:solidFill>
+                  <a:srgbClr val="2B2B2B"/>
+                </a:solidFill>
+                <a:latin typeface="Calibri"/>
+              </a:rPr>
+              <a:t>–   </a:t>
+            </a:r>
+            <a:r>
+              <a:rPr sz="1600" b="1" i="0">
+                <a:solidFill>
+                  <a:srgbClr val="2B2B2B"/>
+                </a:solidFill>
+                <a:latin typeface="Calibri"/>
+              </a:rPr>
+              <a:t>Condición 1 — Declararla.</a:t>
+            </a:r>
+            <a:r>
+              <a:rPr sz="1600" b="0" i="0">
+                <a:solidFill>
+                  <a:srgbClr val="2B2B2B"/>
+                </a:solidFill>
+                <a:latin typeface="Calibri"/>
+              </a:rPr>
+              <a:t> Una nota al final del documento: qué herramienta usaron y para qué (ideas, redacción, tablas).</a:t>
+            </a:r>
+          </a:p>
+          <a:p>
+            <a:pPr>
+              <a:spcAft>
+                <a:spcPts val="1000"/>
+              </a:spcAft>
+            </a:pPr>
+            <a:r>
+              <a:rPr sz="1600" b="0" i="0">
+                <a:solidFill>
+                  <a:srgbClr val="2B2B2B"/>
+                </a:solidFill>
+                <a:latin typeface="Calibri"/>
+              </a:rPr>
+              <a:t>–   </a:t>
+            </a:r>
+            <a:r>
+              <a:rPr sz="1600" b="1" i="0">
+                <a:solidFill>
+                  <a:srgbClr val="2B2B2B"/>
+                </a:solidFill>
+                <a:latin typeface="Calibri"/>
+              </a:rPr>
+              <a:t>Condición 2 — Verificar todo.</a:t>
+            </a:r>
+            <a:r>
+              <a:rPr sz="1600" b="0" i="0">
+                <a:solidFill>
+                  <a:srgbClr val="2B2B2B"/>
+                </a:solidFill>
+                <a:latin typeface="Calibri"/>
+              </a:rPr>
+              <a:t> Cada dato y cada fuente que sugiera la herramienta se comprueba en el original.</a:t>
+            </a:r>
+          </a:p>
+          <a:p>
+            <a:pPr lvl="1">
+              <a:spcAft>
+                <a:spcPts val="600"/>
+              </a:spcAft>
+            </a:pPr>
+            <a:r>
+              <a:rPr sz="1500" b="0" i="0">
+                <a:solidFill>
+                  <a:srgbClr val="2B2B2B"/>
+                </a:solidFill>
+                <a:latin typeface="Calibri"/>
+              </a:rPr>
+              <a:t>●   Los modelos </a:t>
+            </a:r>
+            <a:r>
+              <a:rPr sz="1500" b="1" i="0">
+                <a:solidFill>
+                  <a:srgbClr val="2B2B2B"/>
+                </a:solidFill>
+                <a:latin typeface="Calibri"/>
+              </a:rPr>
+              <a:t>inventan referencias</a:t>
+            </a:r>
+            <a:r>
+              <a:rPr sz="1500" b="0" i="0">
+                <a:solidFill>
+                  <a:srgbClr val="2B2B2B"/>
+                </a:solidFill>
+                <a:latin typeface="Calibri"/>
+              </a:rPr>
+              <a:t> con apariencia impecable: autor creíble, año creíble, enlace que no existe.</a:t>
+            </a:r>
+          </a:p>
+          <a:p>
+            <a:pPr lvl="1">
+              <a:spcAft>
+                <a:spcPts val="600"/>
+              </a:spcAft>
+            </a:pPr>
+            <a:r>
+              <a:rPr sz="1500" b="0" i="0">
+                <a:solidFill>
+                  <a:srgbClr val="2B2B2B"/>
+                </a:solidFill>
+                <a:latin typeface="Calibri"/>
+              </a:rPr>
+              <a:t>●   Citar una referencia inexistente no es un error de formato: es una fuente falsa dentro de un trabajo académico.</a:t>
+            </a:r>
+          </a:p>
+          <a:p>
+            <a:pPr>
+              <a:spcAft>
+                <a:spcPts val="1000"/>
+              </a:spcAft>
+            </a:pPr>
+            <a:r>
+              <a:rPr sz="1600" b="0" i="0">
+                <a:solidFill>
+                  <a:srgbClr val="2B2B2B"/>
+                </a:solidFill>
+                <a:latin typeface="Calibri"/>
+              </a:rPr>
+              <a:t>–   </a:t>
+            </a:r>
+            <a:r>
+              <a:rPr sz="1600" b="1" i="0">
+                <a:solidFill>
+                  <a:srgbClr val="2B2B2B"/>
+                </a:solidFill>
+                <a:latin typeface="Calibri"/>
+              </a:rPr>
+              <a:t>Condición 3 — La autoría es suya.</a:t>
+            </a:r>
+            <a:r>
+              <a:rPr sz="1600" b="0" i="0">
+                <a:solidFill>
+                  <a:srgbClr val="2B2B2B"/>
+                </a:solidFill>
+                <a:latin typeface="Calibri"/>
+              </a:rPr>
+              <a:t> La decisión, el criterio y la defensa del documento son del equipo.</a:t>
+            </a:r>
+          </a:p>
+          <a:p>
+            <a:pPr lvl="1">
+              <a:spcAft>
+                <a:spcPts val="600"/>
+              </a:spcAft>
+            </a:pPr>
+            <a:r>
+              <a:rPr sz="1500" b="0" i="0">
+                <a:solidFill>
+                  <a:srgbClr val="2B2B2B"/>
+                </a:solidFill>
+                <a:latin typeface="Calibri"/>
+              </a:rPr>
+              <a:t>●   Si no pueden explicar en voz alta un párrafo de su propio anteproyecto, ese párrafo todavía no es suyo.</a:t>
+            </a:r>
+          </a:p>
+          <a:p>
+            <a:pPr>
+              <a:spcAft>
+                <a:spcPts val="1000"/>
+              </a:spcAft>
+            </a:pPr>
+            <a:r>
+              <a:rPr sz="1600" b="0" i="0">
+                <a:solidFill>
+                  <a:srgbClr val="2B2B2B"/>
+                </a:solidFill>
+                <a:latin typeface="Calibri"/>
+              </a:rPr>
+              <a:t>–   Uso sensato: ordenar ideas, mejorar redacción, sugerir ejemplos. Uso inútil: pedirle el trabajo entero.</a:t>
+            </a:r>
+          </a:p>
+        </p:txBody>
+      </p:sp>
+      <p:sp>
+        <p:nvSpPr>
+          <p:cNvPr id="5" name="TextBox 4"/>
           <p:cNvSpPr txBox="1"/>
           <p:nvPr/>
         </p:nvSpPr>
         <p:spPr>
           <a:xfrm>
-            <a:off x="868680" y="3557016"/>
-            <a:ext cx="10454335" cy="1005840"/>
+            <a:off x="11094415" y="6446520"/>
+            <a:ext cx="548640" cy="274320"/>
           </a:xfrm>
           <a:prstGeom prst="rect">
             <a:avLst/>
@@ -5508,115 +5617,29 @@
           </a:bodyPr>
           <a:lstStyle/>
           <a:p>
-            <a:r>
-              <a:rPr sz="1300" b="1" i="0">
-                <a:solidFill>
-                  <a:srgbClr val="0C2340"/>
-                </a:solidFill>
-                <a:latin typeface="Calibri"/>
-              </a:rPr>
-              <a:t>ℹ️ Nota institucional</a:t>
-            </a:r>
-          </a:p>
-          <a:p>
-            <a:pPr>
-              <a:spcBef>
-                <a:spcPts val="400"/>
-              </a:spcBef>
-            </a:pPr>
-            <a:r>
-              <a:rPr sz="1300" b="1" i="0">
-                <a:solidFill>
-                  <a:srgbClr val="2B2B2B"/>
-                </a:solidFill>
-                <a:latin typeface="Calibri"/>
-              </a:rPr>
-              <a:t>Citar no debilita el trabajo: lo sostiene.</a:t>
-            </a:r>
-            <a:r>
-              <a:rPr sz="1300" b="0" i="0">
-                <a:solidFill>
-                  <a:srgbClr val="2B2B2B"/>
-                </a:solidFill>
-                <a:latin typeface="Calibri"/>
-              </a:rPr>
-              <a:t> En este curso se cita en </a:t>
-            </a:r>
-            <a:r>
-              <a:rPr sz="1300" b="1" i="0">
-                <a:solidFill>
-                  <a:srgbClr val="2B2B2B"/>
-                </a:solidFill>
-                <a:latin typeface="Calibri"/>
-              </a:rPr>
-              <a:t>APA 7</a:t>
-            </a:r>
-            <a:r>
-              <a:rPr sz="1300" b="0" i="0">
-                <a:solidFill>
-                  <a:srgbClr val="2B2B2B"/>
-                </a:solidFill>
-                <a:latin typeface="Calibri"/>
-              </a:rPr>
-              <a:t>, dentro del texto y en la lista final de referencias. Una idea que no es suya y no está citada es un problema; esa misma idea citada es un argumento con respaldo.</a:t>
-            </a:r>
-          </a:p>
-        </p:txBody>
-      </p:sp>
-      <p:sp>
-        <p:nvSpPr>
-          <p:cNvPr id="8" name="Rounded Rectangle 7"/>
-          <p:cNvSpPr/>
-          <p:nvPr/>
-        </p:nvSpPr>
-        <p:spPr>
-          <a:xfrm>
-            <a:off x="640080" y="4901184"/>
-            <a:ext cx="10911535" cy="1225296"/>
-          </a:xfrm>
-          <a:prstGeom prst="roundRect">
-            <a:avLst/>
-          </a:prstGeom>
-          <a:solidFill>
-            <a:srgbClr val="FDECD8"/>
-          </a:solidFill>
-          <a:ln>
-            <a:noFill/>
-          </a:ln>
-          <a:effectLst/>
-        </p:spPr>
-        <p:style>
-          <a:lnRef idx="1">
-            <a:schemeClr val="accent1"/>
-          </a:lnRef>
-          <a:fillRef idx="3">
-            <a:schemeClr val="accent1"/>
-          </a:fillRef>
-          <a:effectRef idx="2">
-            <a:schemeClr val="accent1"/>
-          </a:effectRef>
-          <a:fontRef idx="minor">
-            <a:schemeClr val="lt1"/>
-          </a:fontRef>
-        </p:style>
-        <p:txBody>
-          <a:bodyPr rtlCol="0" anchor="ctr"/>
-          <a:lstStyle/>
-          <a:p>
-            <a:pPr algn="ctr"/>
-          </a:p>
-        </p:txBody>
-      </p:sp>
-      <p:sp>
-        <p:nvSpPr>
-          <p:cNvPr id="9" name="TextBox 8"/>
+            <a:pPr algn="r"/>
+            <a:r>
+              <a:rPr sz="1000" b="1" i="0">
+                <a:solidFill>
+                  <a:srgbClr val="8F989D"/>
+                </a:solidFill>
+                <a:latin typeface="Calibri"/>
+              </a:rPr>
+              <a:t>13</a:t>
+            </a:r>
+          </a:p>
+        </p:txBody>
+      </p:sp>
+      <p:sp>
+        <p:nvSpPr>
+          <p:cNvPr id="6" name="TextBox 5"/>
           <p:cNvSpPr txBox="1"/>
           <p:nvPr/>
         </p:nvSpPr>
         <p:spPr>
           <a:xfrm>
-            <a:off x="868680" y="5010912"/>
-            <a:ext cx="10454335" cy="1005840"/>
+            <a:off x="640080" y="5943600"/>
+            <a:ext cx="9997135" cy="457200"/>
           </a:xfrm>
           <a:prstGeom prst="rect">
             <a:avLst/>
@@ -5630,73 +5653,13 @@
           <a:lstStyle/>
           <a:p>
             <a:r>
-              <a:rPr sz="1300" b="1" i="0">
-                <a:solidFill>
-                  <a:srgbClr val="0C2340"/>
-                </a:solidFill>
-                <a:latin typeface="Calibri"/>
-              </a:rPr>
-              <a:t>💡 Aclaración</a:t>
-            </a:r>
-          </a:p>
-          <a:p>
-            <a:pPr>
-              <a:spcBef>
-                <a:spcPts val="400"/>
-              </a:spcBef>
-            </a:pPr>
-            <a:r>
-              <a:rPr sz="1300" b="1" i="0">
-                <a:solidFill>
-                  <a:srgbClr val="2B2B2B"/>
-                </a:solidFill>
-                <a:latin typeface="Calibri"/>
-              </a:rPr>
-              <a:t>Si se detecta, hay debido proceso.</a:t>
-            </a:r>
-            <a:r>
-              <a:rPr sz="1300" b="0" i="0">
-                <a:solidFill>
-                  <a:srgbClr val="2B2B2B"/>
-                </a:solidFill>
-                <a:latin typeface="Calibri"/>
-              </a:rPr>
-              <a:t> No depende del ánimo del Docente: es un procedimiento institucional, con notificación y derecho a descargos. Por eso siempre conviene preguntar antes que improvisar.</a:t>
-            </a:r>
-          </a:p>
-        </p:txBody>
-      </p:sp>
-      <p:sp>
-        <p:nvSpPr>
-          <p:cNvPr id="10" name="TextBox 9"/>
-          <p:cNvSpPr txBox="1"/>
-          <p:nvPr/>
-        </p:nvSpPr>
-        <p:spPr>
-          <a:xfrm>
-            <a:off x="11094415" y="6446520"/>
-            <a:ext cx="548640" cy="274320"/>
-          </a:xfrm>
-          <a:prstGeom prst="rect">
-            <a:avLst/>
-          </a:prstGeom>
-          <a:noFill/>
-        </p:spPr>
-        <p:txBody>
-          <a:bodyPr wrap="square" anchor="t" lIns="0" rIns="0" tIns="0" bIns="0">
-            <a:spAutoFit/>
-          </a:bodyPr>
-          <a:lstStyle/>
-          <a:p>
-            <a:pPr algn="r"/>
-            <a:r>
-              <a:rPr sz="1000" b="1" i="0">
-                <a:solidFill>
-                  <a:srgbClr val="8F989D"/>
-                </a:solidFill>
-                <a:latin typeface="Calibri"/>
-              </a:rPr>
-              <a:t>13</a:t>
+              <a:rPr sz="1200" b="0" i="1">
+                <a:solidFill>
+                  <a:srgbClr val="2B2B2B"/>
+                </a:solidFill>
+                <a:latin typeface="Calibri"/>
+              </a:rPr>
+              <a:t>Prueba rápida antes de entregar: abran el documento en cualquier página y explíquenla con sus palabras. Si no pueden, reescríbanla.</a:t>
             </a:r>
           </a:p>
         </p:txBody>
@@ -5710,421 +5673,6 @@
 </file>
 
 <file path=ppt/slides/slide14.xml><?xml version="1.0" encoding="utf-8"?>
-<p:sld xmlns:a="http://schemas.openxmlformats.org/drawingml/2006/main" xmlns:p="http://schemas.openxmlformats.org/presentationml/2006/main" xmlns:r="http://schemas.openxmlformats.org/officeDocument/2006/relationships">
-  <p:cSld>
-    <p:bg>
-      <p:bgPr>
-        <a:solidFill>
-          <a:srgbClr val="FFFFFF"/>
-        </a:solidFill>
-        <a:effectLst/>
-      </p:bgPr>
-    </p:bg>
-    <p:spTree>
-      <p:nvGrpSpPr>
-        <p:cNvPr id="1" name=""/>
-        <p:cNvGrpSpPr/>
-        <p:nvPr/>
-      </p:nvGrpSpPr>
-      <p:grpSpPr/>
-      <p:sp>
-        <p:nvSpPr>
-          <p:cNvPr id="2" name="Rectangle 1"/>
-          <p:cNvSpPr/>
-          <p:nvPr/>
-        </p:nvSpPr>
-        <p:spPr>
-          <a:xfrm>
-            <a:off x="0" y="0"/>
-            <a:ext cx="12191695" cy="1188720"/>
-          </a:xfrm>
-          <a:prstGeom prst="rect">
-            <a:avLst/>
-          </a:prstGeom>
-          <a:solidFill>
-            <a:srgbClr val="0C2340"/>
-          </a:solidFill>
-          <a:ln>
-            <a:noFill/>
-          </a:ln>
-          <a:effectLst/>
-        </p:spPr>
-        <p:style>
-          <a:lnRef idx="1">
-            <a:schemeClr val="accent1"/>
-          </a:lnRef>
-          <a:fillRef idx="3">
-            <a:schemeClr val="accent1"/>
-          </a:fillRef>
-          <a:effectRef idx="2">
-            <a:schemeClr val="accent1"/>
-          </a:effectRef>
-          <a:fontRef idx="minor">
-            <a:schemeClr val="lt1"/>
-          </a:fontRef>
-        </p:style>
-        <p:txBody>
-          <a:bodyPr rtlCol="0" anchor="ctr"/>
-          <a:lstStyle/>
-          <a:p>
-            <a:pPr algn="ctr"/>
-          </a:p>
-        </p:txBody>
-      </p:sp>
-      <p:sp>
-        <p:nvSpPr>
-          <p:cNvPr id="3" name="TextBox 2"/>
-          <p:cNvSpPr txBox="1"/>
-          <p:nvPr/>
-        </p:nvSpPr>
-        <p:spPr>
-          <a:xfrm>
-            <a:off x="640080" y="0"/>
-            <a:ext cx="9082735" cy="1188720"/>
-          </a:xfrm>
-          <a:prstGeom prst="rect">
-            <a:avLst/>
-          </a:prstGeom>
-          <a:noFill/>
-        </p:spPr>
-        <p:txBody>
-          <a:bodyPr wrap="square" anchor="ctr" lIns="0" rIns="0" tIns="0" bIns="0">
-            <a:spAutoFit/>
-          </a:bodyPr>
-          <a:lstStyle/>
-          <a:p>
-            <a:pPr algn="ctr"/>
-            <a:r>
-              <a:rPr sz="2600" b="1" i="0">
-                <a:solidFill>
-                  <a:srgbClr val="FFFFFF"/>
-                </a:solidFill>
-                <a:latin typeface="Calibri"/>
-              </a:rPr>
-              <a:t>IA generativa: se puede usar, con tres condiciones</a:t>
-            </a:r>
-          </a:p>
-        </p:txBody>
-      </p:sp>
-      <p:sp>
-        <p:nvSpPr>
-          <p:cNvPr id="4" name="TextBox 3"/>
-          <p:cNvSpPr txBox="1"/>
-          <p:nvPr/>
-        </p:nvSpPr>
-        <p:spPr>
-          <a:xfrm>
-            <a:off x="640080" y="1691639"/>
-            <a:ext cx="10911535" cy="4617720"/>
-          </a:xfrm>
-          <a:prstGeom prst="rect">
-            <a:avLst/>
-          </a:prstGeom>
-          <a:noFill/>
-        </p:spPr>
-        <p:txBody>
-          <a:bodyPr wrap="square" anchor="t" lIns="0" rIns="0" tIns="0" bIns="0">
-            <a:spAutoFit/>
-          </a:bodyPr>
-          <a:lstStyle/>
-          <a:p>
-            <a:pPr>
-              <a:spcAft>
-                <a:spcPts val="1000"/>
-              </a:spcAft>
-            </a:pPr>
-            <a:r>
-              <a:rPr sz="1600" b="0" i="0">
-                <a:solidFill>
-                  <a:srgbClr val="2B2B2B"/>
-                </a:solidFill>
-                <a:latin typeface="Calibri"/>
-              </a:rPr>
-              <a:t>–   En este curso </a:t>
-            </a:r>
-            <a:r>
-              <a:rPr sz="1600" b="1" i="0">
-                <a:solidFill>
-                  <a:srgbClr val="2B2B2B"/>
-                </a:solidFill>
-                <a:latin typeface="Calibri"/>
-              </a:rPr>
-              <a:t>no se prohíbe</a:t>
-            </a:r>
-            <a:r>
-              <a:rPr sz="1600" b="0" i="0">
-                <a:solidFill>
-                  <a:srgbClr val="2B2B2B"/>
-                </a:solidFill>
-                <a:latin typeface="Calibri"/>
-              </a:rPr>
-              <a:t> usar IA generativa. Se exige usarla con criterio y decirlo por escrito.</a:t>
-            </a:r>
-          </a:p>
-          <a:p>
-            <a:pPr>
-              <a:spcAft>
-                <a:spcPts val="1000"/>
-              </a:spcAft>
-            </a:pPr>
-            <a:r>
-              <a:rPr sz="1600" b="0" i="0">
-                <a:solidFill>
-                  <a:srgbClr val="2B2B2B"/>
-                </a:solidFill>
-                <a:latin typeface="Calibri"/>
-              </a:rPr>
-              <a:t>–   </a:t>
-            </a:r>
-            <a:r>
-              <a:rPr sz="1600" b="1" i="0">
-                <a:solidFill>
-                  <a:srgbClr val="2B2B2B"/>
-                </a:solidFill>
-                <a:latin typeface="Calibri"/>
-              </a:rPr>
-              <a:t>Condición 1 — Declararla.</a:t>
-            </a:r>
-            <a:r>
-              <a:rPr sz="1600" b="0" i="0">
-                <a:solidFill>
-                  <a:srgbClr val="2B2B2B"/>
-                </a:solidFill>
-                <a:latin typeface="Calibri"/>
-              </a:rPr>
-              <a:t> Una nota al final del documento: qué herramienta usaron y para qué (ideas, redacción, tablas).</a:t>
-            </a:r>
-          </a:p>
-          <a:p>
-            <a:pPr>
-              <a:spcAft>
-                <a:spcPts val="1000"/>
-              </a:spcAft>
-            </a:pPr>
-            <a:r>
-              <a:rPr sz="1600" b="0" i="0">
-                <a:solidFill>
-                  <a:srgbClr val="2B2B2B"/>
-                </a:solidFill>
-                <a:latin typeface="Calibri"/>
-              </a:rPr>
-              <a:t>–   </a:t>
-            </a:r>
-            <a:r>
-              <a:rPr sz="1600" b="1" i="0">
-                <a:solidFill>
-                  <a:srgbClr val="2B2B2B"/>
-                </a:solidFill>
-                <a:latin typeface="Calibri"/>
-              </a:rPr>
-              <a:t>Condición 2 — Verificar todo.</a:t>
-            </a:r>
-            <a:r>
-              <a:rPr sz="1600" b="0" i="0">
-                <a:solidFill>
-                  <a:srgbClr val="2B2B2B"/>
-                </a:solidFill>
-                <a:latin typeface="Calibri"/>
-              </a:rPr>
-              <a:t> Cada dato y cada fuente que sugiera la herramienta se comprueba en el original.</a:t>
-            </a:r>
-          </a:p>
-          <a:p>
-            <a:pPr lvl="1">
-              <a:spcAft>
-                <a:spcPts val="600"/>
-              </a:spcAft>
-            </a:pPr>
-            <a:r>
-              <a:rPr sz="1500" b="0" i="0">
-                <a:solidFill>
-                  <a:srgbClr val="2B2B2B"/>
-                </a:solidFill>
-                <a:latin typeface="Calibri"/>
-              </a:rPr>
-              <a:t>●   Los modelos </a:t>
-            </a:r>
-            <a:r>
-              <a:rPr sz="1500" b="1" i="0">
-                <a:solidFill>
-                  <a:srgbClr val="2B2B2B"/>
-                </a:solidFill>
-                <a:latin typeface="Calibri"/>
-              </a:rPr>
-              <a:t>inventan referencias</a:t>
-            </a:r>
-            <a:r>
-              <a:rPr sz="1500" b="0" i="0">
-                <a:solidFill>
-                  <a:srgbClr val="2B2B2B"/>
-                </a:solidFill>
-                <a:latin typeface="Calibri"/>
-              </a:rPr>
-              <a:t> con apariencia impecable: autor creíble, año creíble, enlace que no existe.</a:t>
-            </a:r>
-          </a:p>
-          <a:p>
-            <a:pPr lvl="1">
-              <a:spcAft>
-                <a:spcPts val="600"/>
-              </a:spcAft>
-            </a:pPr>
-            <a:r>
-              <a:rPr sz="1500" b="0" i="0">
-                <a:solidFill>
-                  <a:srgbClr val="2B2B2B"/>
-                </a:solidFill>
-                <a:latin typeface="Calibri"/>
-              </a:rPr>
-              <a:t>●   Citar una referencia inexistente no es un error de formato: es una fuente falsa dentro de un trabajo académico.</a:t>
-            </a:r>
-          </a:p>
-          <a:p>
-            <a:pPr>
-              <a:spcAft>
-                <a:spcPts val="1000"/>
-              </a:spcAft>
-            </a:pPr>
-            <a:r>
-              <a:rPr sz="1600" b="0" i="0">
-                <a:solidFill>
-                  <a:srgbClr val="2B2B2B"/>
-                </a:solidFill>
-                <a:latin typeface="Calibri"/>
-              </a:rPr>
-              <a:t>–   </a:t>
-            </a:r>
-            <a:r>
-              <a:rPr sz="1600" b="1" i="0">
-                <a:solidFill>
-                  <a:srgbClr val="2B2B2B"/>
-                </a:solidFill>
-                <a:latin typeface="Calibri"/>
-              </a:rPr>
-              <a:t>Condición 3 — La autoría es suya.</a:t>
-            </a:r>
-            <a:r>
-              <a:rPr sz="1600" b="0" i="0">
-                <a:solidFill>
-                  <a:srgbClr val="2B2B2B"/>
-                </a:solidFill>
-                <a:latin typeface="Calibri"/>
-              </a:rPr>
-              <a:t> La decisión, el criterio y la defensa del documento son del equipo.</a:t>
-            </a:r>
-          </a:p>
-          <a:p>
-            <a:pPr lvl="1">
-              <a:spcAft>
-                <a:spcPts val="600"/>
-              </a:spcAft>
-            </a:pPr>
-            <a:r>
-              <a:rPr sz="1500" b="0" i="0">
-                <a:solidFill>
-                  <a:srgbClr val="2B2B2B"/>
-                </a:solidFill>
-                <a:latin typeface="Calibri"/>
-              </a:rPr>
-              <a:t>●   Si no pueden explicar en voz alta un párrafo de su propio anteproyecto, ese párrafo todavía no es suyo.</a:t>
-            </a:r>
-          </a:p>
-          <a:p>
-            <a:pPr>
-              <a:spcAft>
-                <a:spcPts val="1000"/>
-              </a:spcAft>
-            </a:pPr>
-            <a:r>
-              <a:rPr sz="1600" b="0" i="0">
-                <a:solidFill>
-                  <a:srgbClr val="2B2B2B"/>
-                </a:solidFill>
-                <a:latin typeface="Calibri"/>
-              </a:rPr>
-              <a:t>–   Uso sensato: ordenar ideas, mejorar redacción, sugerir ejemplos. Uso inútil: pedirle el trabajo entero.</a:t>
-            </a:r>
-          </a:p>
-        </p:txBody>
-      </p:sp>
-      <p:sp>
-        <p:nvSpPr>
-          <p:cNvPr id="5" name="TextBox 4"/>
-          <p:cNvSpPr txBox="1"/>
-          <p:nvPr/>
-        </p:nvSpPr>
-        <p:spPr>
-          <a:xfrm>
-            <a:off x="11094415" y="6446520"/>
-            <a:ext cx="548640" cy="274320"/>
-          </a:xfrm>
-          <a:prstGeom prst="rect">
-            <a:avLst/>
-          </a:prstGeom>
-          <a:noFill/>
-        </p:spPr>
-        <p:txBody>
-          <a:bodyPr wrap="square" anchor="t" lIns="0" rIns="0" tIns="0" bIns="0">
-            <a:spAutoFit/>
-          </a:bodyPr>
-          <a:lstStyle/>
-          <a:p>
-            <a:pPr algn="r"/>
-            <a:r>
-              <a:rPr sz="1000" b="1" i="0">
-                <a:solidFill>
-                  <a:srgbClr val="8F989D"/>
-                </a:solidFill>
-                <a:latin typeface="Calibri"/>
-              </a:rPr>
-              <a:t>14</a:t>
-            </a:r>
-          </a:p>
-        </p:txBody>
-      </p:sp>
-      <p:sp>
-        <p:nvSpPr>
-          <p:cNvPr id="6" name="TextBox 5"/>
-          <p:cNvSpPr txBox="1"/>
-          <p:nvPr/>
-        </p:nvSpPr>
-        <p:spPr>
-          <a:xfrm>
-            <a:off x="640080" y="5943600"/>
-            <a:ext cx="9997135" cy="457200"/>
-          </a:xfrm>
-          <a:prstGeom prst="rect">
-            <a:avLst/>
-          </a:prstGeom>
-          <a:noFill/>
-        </p:spPr>
-        <p:txBody>
-          <a:bodyPr wrap="square" anchor="t" lIns="0" rIns="0" tIns="0" bIns="0">
-            <a:spAutoFit/>
-          </a:bodyPr>
-          <a:lstStyle/>
-          <a:p>
-            <a:r>
-              <a:rPr sz="1200" b="0" i="1">
-                <a:solidFill>
-                  <a:srgbClr val="2B2B2B"/>
-                </a:solidFill>
-                <a:latin typeface="Calibri"/>
-              </a:rPr>
-              <a:t>Prueba rápida antes de entregar: abran el documento en cualquier página y explíquenla con sus palabras. Si no pueden, reescríbanla.</a:t>
-            </a:r>
-          </a:p>
-        </p:txBody>
-      </p:sp>
-    </p:spTree>
-  </p:cSld>
-  <p:clrMapOvr>
-    <a:masterClrMapping/>
-  </p:clrMapOvr>
-</p:sld>
-</file>
-
-<file path=ppt/slides/slide15.xml><?xml version="1.0" encoding="utf-8"?>
 <p:sld xmlns:a="http://schemas.openxmlformats.org/drawingml/2006/main" xmlns:p="http://schemas.openxmlformats.org/presentationml/2006/main" xmlns:r="http://schemas.openxmlformats.org/officeDocument/2006/relationships">
   <p:cSld>
     <p:bg>
@@ -6740,7 +6288,492 @@
                 </a:solidFill>
                 <a:latin typeface="Calibri"/>
               </a:rPr>
+              <a:t>14</a:t>
+            </a:r>
+          </a:p>
+        </p:txBody>
+      </p:sp>
+    </p:spTree>
+  </p:cSld>
+  <p:clrMapOvr>
+    <a:masterClrMapping/>
+  </p:clrMapOvr>
+</p:sld>
+</file>
+
+<file path=ppt/slides/slide15.xml><?xml version="1.0" encoding="utf-8"?>
+<p:sld xmlns:a="http://schemas.openxmlformats.org/drawingml/2006/main" xmlns:p="http://schemas.openxmlformats.org/presentationml/2006/main" xmlns:r="http://schemas.openxmlformats.org/officeDocument/2006/relationships">
+  <p:cSld>
+    <p:bg>
+      <p:bgPr>
+        <a:solidFill>
+          <a:srgbClr val="FFFFFF"/>
+        </a:solidFill>
+        <a:effectLst/>
+      </p:bgPr>
+    </p:bg>
+    <p:spTree>
+      <p:nvGrpSpPr>
+        <p:cNvPr id="1" name=""/>
+        <p:cNvGrpSpPr/>
+        <p:nvPr/>
+      </p:nvGrpSpPr>
+      <p:grpSpPr/>
+      <p:sp>
+        <p:nvSpPr>
+          <p:cNvPr id="2" name="Rectangle 1"/>
+          <p:cNvSpPr/>
+          <p:nvPr/>
+        </p:nvSpPr>
+        <p:spPr>
+          <a:xfrm>
+            <a:off x="0" y="0"/>
+            <a:ext cx="12191695" cy="1188720"/>
+          </a:xfrm>
+          <a:prstGeom prst="rect">
+            <a:avLst/>
+          </a:prstGeom>
+          <a:solidFill>
+            <a:srgbClr val="0C2340"/>
+          </a:solidFill>
+          <a:ln>
+            <a:noFill/>
+          </a:ln>
+          <a:effectLst/>
+        </p:spPr>
+        <p:style>
+          <a:lnRef idx="1">
+            <a:schemeClr val="accent1"/>
+          </a:lnRef>
+          <a:fillRef idx="3">
+            <a:schemeClr val="accent1"/>
+          </a:fillRef>
+          <a:effectRef idx="2">
+            <a:schemeClr val="accent1"/>
+          </a:effectRef>
+          <a:fontRef idx="minor">
+            <a:schemeClr val="lt1"/>
+          </a:fontRef>
+        </p:style>
+        <p:txBody>
+          <a:bodyPr rtlCol="0" anchor="ctr"/>
+          <a:lstStyle/>
+          <a:p>
+            <a:pPr algn="ctr"/>
+          </a:p>
+        </p:txBody>
+      </p:sp>
+      <p:sp>
+        <p:nvSpPr>
+          <p:cNvPr id="3" name="TextBox 2"/>
+          <p:cNvSpPr txBox="1"/>
+          <p:nvPr/>
+        </p:nvSpPr>
+        <p:spPr>
+          <a:xfrm>
+            <a:off x="640080" y="0"/>
+            <a:ext cx="9082735" cy="1188720"/>
+          </a:xfrm>
+          <a:prstGeom prst="rect">
+            <a:avLst/>
+          </a:prstGeom>
+          <a:noFill/>
+        </p:spPr>
+        <p:txBody>
+          <a:bodyPr wrap="square" anchor="ctr" lIns="0" rIns="0" tIns="0" bIns="0">
+            <a:spAutoFit/>
+          </a:bodyPr>
+          <a:lstStyle/>
+          <a:p>
+            <a:pPr algn="ctr"/>
+            <a:r>
+              <a:rPr sz="2600" b="1" i="0">
+                <a:solidFill>
+                  <a:srgbClr val="FFFFFF"/>
+                </a:solidFill>
+                <a:latin typeface="Calibri"/>
+              </a:rPr>
+              <a:t>Cómo pedir ayuda: canales, tutorías y tiempos de respuesta</a:t>
+            </a:r>
+          </a:p>
+        </p:txBody>
+      </p:sp>
+      <p:sp>
+        <p:nvSpPr>
+          <p:cNvPr id="4" name="TextBox 3"/>
+          <p:cNvSpPr txBox="1"/>
+          <p:nvPr/>
+        </p:nvSpPr>
+        <p:spPr>
+          <a:xfrm>
+            <a:off x="640080" y="1691639"/>
+            <a:ext cx="10911535" cy="4617720"/>
+          </a:xfrm>
+          <a:prstGeom prst="rect">
+            <a:avLst/>
+          </a:prstGeom>
+          <a:noFill/>
+        </p:spPr>
+        <p:txBody>
+          <a:bodyPr wrap="square" anchor="t" lIns="0" rIns="0" tIns="0" bIns="0">
+            <a:spAutoFit/>
+          </a:bodyPr>
+          <a:lstStyle/>
+          <a:p>
+            <a:pPr>
+              <a:spcAft>
+                <a:spcPts val="1000"/>
+              </a:spcAft>
+            </a:pPr>
+            <a:r>
+              <a:rPr sz="1600" b="0" i="0">
+                <a:solidFill>
+                  <a:srgbClr val="2B2B2B"/>
+                </a:solidFill>
+                <a:latin typeface="Calibri"/>
+              </a:rPr>
+              <a:t>–   </a:t>
+            </a:r>
+            <a:r>
+              <a:rPr sz="1600" b="1" i="0">
+                <a:solidFill>
+                  <a:srgbClr val="2B2B2B"/>
+                </a:solidFill>
+                <a:latin typeface="Calibri"/>
+              </a:rPr>
+              <a:t>En clase:</a:t>
+            </a:r>
+            <a:r>
+              <a:rPr sz="1600" b="0" i="0">
+                <a:solidFill>
+                  <a:srgbClr val="2B2B2B"/>
+                </a:solidFill>
+                <a:latin typeface="Calibri"/>
+              </a:rPr>
+              <a:t> la segunda hora es tutoría en vivo. Es el canal más rápido y ya está dentro de su horario.</a:t>
+            </a:r>
+          </a:p>
+          <a:p>
+            <a:pPr>
+              <a:spcAft>
+                <a:spcPts val="1000"/>
+              </a:spcAft>
+            </a:pPr>
+            <a:r>
+              <a:rPr sz="1600" b="0" i="0">
+                <a:solidFill>
+                  <a:srgbClr val="2B2B2B"/>
+                </a:solidFill>
+                <a:latin typeface="Calibri"/>
+              </a:rPr>
+              <a:t>–   </a:t>
+            </a:r>
+            <a:r>
+              <a:rPr sz="1600" b="1" i="0">
+                <a:solidFill>
+                  <a:srgbClr val="2B2B2B"/>
+                </a:solidFill>
+                <a:latin typeface="Calibri"/>
+              </a:rPr>
+              <a:t>Tutorías por equipo:</a:t>
+            </a:r>
+            <a:r>
+              <a:rPr sz="1600" b="0" i="0">
+                <a:solidFill>
+                  <a:srgbClr val="2B2B2B"/>
+                </a:solidFill>
+                <a:latin typeface="Calibri"/>
+              </a:rPr>
+              <a:t> se </a:t>
+            </a:r>
+            <a:r>
+              <a:rPr sz="1600" b="1" i="0">
+                <a:solidFill>
+                  <a:srgbClr val="2B2B2B"/>
+                </a:solidFill>
+                <a:latin typeface="Calibri"/>
+              </a:rPr>
+              <a:t>acuerdan en la semana</a:t>
+            </a:r>
+            <a:r>
+              <a:rPr sz="1600" b="0" i="0">
+                <a:solidFill>
+                  <a:srgbClr val="2B2B2B"/>
+                </a:solidFill>
+                <a:latin typeface="Calibri"/>
+              </a:rPr>
+              <a:t> con el Docente. No hay atención espontánea sin cita.</a:t>
+            </a:r>
+          </a:p>
+          <a:p>
+            <a:pPr lvl="1">
+              <a:spcAft>
+                <a:spcPts val="600"/>
+              </a:spcAft>
+            </a:pPr>
+            <a:r>
+              <a:rPr sz="1500" b="0" i="0">
+                <a:solidFill>
+                  <a:srgbClr val="2B2B2B"/>
+                </a:solidFill>
+                <a:latin typeface="Calibri"/>
+              </a:rPr>
+              <a:t>●   Al pedirla, digan qué necesitan y qué tienen escrito; se agenda y se atiende con el documento abierto.</a:t>
+            </a:r>
+          </a:p>
+          <a:p>
+            <a:pPr>
+              <a:spcAft>
+                <a:spcPts val="1000"/>
+              </a:spcAft>
+            </a:pPr>
+            <a:r>
+              <a:rPr sz="1600" b="0" i="0">
+                <a:solidFill>
+                  <a:srgbClr val="2B2B2B"/>
+                </a:solidFill>
+                <a:latin typeface="Calibri"/>
+              </a:rPr>
+              <a:t>–   </a:t>
+            </a:r>
+            <a:r>
+              <a:rPr sz="1600" b="1" i="0">
+                <a:solidFill>
+                  <a:srgbClr val="2B2B2B"/>
+                </a:solidFill>
+                <a:latin typeface="Calibri"/>
+              </a:rPr>
+              <a:t>Cada estudiante que asiste a tutoría registra su asistencia</a:t>
+            </a:r>
+            <a:r>
+              <a:rPr sz="1600" b="0" i="0">
+                <a:solidFill>
+                  <a:srgbClr val="2B2B2B"/>
+                </a:solidFill>
+                <a:latin typeface="Calibri"/>
+              </a:rPr>
+              <a:t> en el formulario del curso:</a:t>
+            </a:r>
+          </a:p>
+          <a:p>
+            <a:pPr lvl="1">
+              <a:spcAft>
+                <a:spcPts val="600"/>
+              </a:spcAft>
+            </a:pPr>
+            <a:r>
+              <a:rPr sz="1500" b="0" i="0">
+                <a:solidFill>
+                  <a:srgbClr val="2B2B2B"/>
+                </a:solidFill>
+                <a:latin typeface="Calibri"/>
+              </a:rPr>
+              <a:t>●   </a:t>
+            </a:r>
+            <a:r>
+              <a:rPr sz="1500" b="1" i="0">
+                <a:solidFill>
+                  <a:srgbClr val="2B2B2B"/>
+                </a:solidFill>
+                <a:latin typeface="Calibri"/>
+              </a:rPr>
+              <a:t>https://forms.gle/oZ8xCYiUo3KEWr1d9</a:t>
+            </a:r>
+            <a:r>
+              <a:rPr sz="1500" b="0" i="0">
+                <a:solidFill>
+                  <a:srgbClr val="2B2B2B"/>
+                </a:solidFill>
+                <a:latin typeface="Calibri"/>
+              </a:rPr>
+              <a:t> — también queda publicado en CDigital.</a:t>
+            </a:r>
+          </a:p>
+          <a:p>
+            <a:pPr lvl="1">
+              <a:spcAft>
+                <a:spcPts val="600"/>
+              </a:spcAft>
+            </a:pPr>
+            <a:r>
+              <a:rPr sz="1500" b="0" i="0">
+                <a:solidFill>
+                  <a:srgbClr val="2B2B2B"/>
+                </a:solidFill>
+                <a:latin typeface="Calibri"/>
+              </a:rPr>
+              <a:t>●   Ese registro es </a:t>
+            </a:r>
+            <a:r>
+              <a:rPr sz="1500" b="1" i="0">
+                <a:solidFill>
+                  <a:srgbClr val="2B2B2B"/>
+                </a:solidFill>
+                <a:latin typeface="Calibri"/>
+              </a:rPr>
+              <a:t>su evidencia</a:t>
+            </a:r>
+            <a:r>
+              <a:rPr sz="1500" b="0" i="0">
+                <a:solidFill>
+                  <a:srgbClr val="2B2B2B"/>
+                </a:solidFill>
+                <a:latin typeface="Calibri"/>
+              </a:rPr>
+              <a:t> de acompañamiento ante el programa: sin registro, la tutoría no consta.</a:t>
+            </a:r>
+          </a:p>
+          <a:p>
+            <a:pPr>
+              <a:spcAft>
+                <a:spcPts val="1000"/>
+              </a:spcAft>
+            </a:pPr>
+            <a:r>
+              <a:rPr sz="1600" b="0" i="0">
+                <a:solidFill>
+                  <a:srgbClr val="2B2B2B"/>
+                </a:solidFill>
+                <a:latin typeface="Calibri"/>
+              </a:rPr>
+              <a:t>–   </a:t>
+            </a:r>
+            <a:r>
+              <a:rPr sz="1600" b="1" i="0">
+                <a:solidFill>
+                  <a:srgbClr val="2B2B2B"/>
+                </a:solidFill>
+                <a:latin typeface="Calibri"/>
+              </a:rPr>
+              <a:t>Foro y mensajería de CDigital:</a:t>
+            </a:r>
+            <a:r>
+              <a:rPr sz="1600" b="0" i="0">
+                <a:solidFill>
+                  <a:srgbClr val="2B2B2B"/>
+                </a:solidFill>
+                <a:latin typeface="Calibri"/>
+              </a:rPr>
+              <a:t> para dudas que le sirven a todo el curso. Respuesta en días hábiles.</a:t>
+            </a:r>
+          </a:p>
+          <a:p>
+            <a:pPr>
+              <a:spcAft>
+                <a:spcPts val="1000"/>
+              </a:spcAft>
+            </a:pPr>
+            <a:r>
+              <a:rPr sz="1600" b="0" i="0">
+                <a:solidFill>
+                  <a:srgbClr val="2B2B2B"/>
+                </a:solidFill>
+                <a:latin typeface="Calibri"/>
+              </a:rPr>
+              <a:t>–   </a:t>
+            </a:r>
+            <a:r>
+              <a:rPr sz="1600" b="1" i="0">
+                <a:solidFill>
+                  <a:srgbClr val="2B2B2B"/>
+                </a:solidFill>
+                <a:latin typeface="Calibri"/>
+              </a:rPr>
+              <a:t>Antes de preguntar:</a:t>
+            </a:r>
+            <a:r>
+              <a:rPr sz="1600" b="0" i="0">
+                <a:solidFill>
+                  <a:srgbClr val="2B2B2B"/>
+                </a:solidFill>
+                <a:latin typeface="Calibri"/>
+              </a:rPr>
+              <a:t> revisen el enunciado del corte y la plantilla. La mitad de las dudas ya está resuelta ahí.</a:t>
+            </a:r>
+          </a:p>
+          <a:p>
+            <a:pPr>
+              <a:spcAft>
+                <a:spcPts val="1000"/>
+              </a:spcAft>
+            </a:pPr>
+            <a:r>
+              <a:rPr sz="1600" b="0" i="0">
+                <a:solidFill>
+                  <a:srgbClr val="2B2B2B"/>
+                </a:solidFill>
+                <a:latin typeface="Calibri"/>
+              </a:rPr>
+              <a:t>–   Pregunta bien hecha = sección concreta + qué intentaron + qué no les cuadra. «No entendí nada» no se puede responder.</a:t>
+            </a:r>
+          </a:p>
+        </p:txBody>
+      </p:sp>
+      <p:sp>
+        <p:nvSpPr>
+          <p:cNvPr id="5" name="TextBox 4"/>
+          <p:cNvSpPr txBox="1"/>
+          <p:nvPr/>
+        </p:nvSpPr>
+        <p:spPr>
+          <a:xfrm>
+            <a:off x="11094415" y="6446520"/>
+            <a:ext cx="548640" cy="274320"/>
+          </a:xfrm>
+          <a:prstGeom prst="rect">
+            <a:avLst/>
+          </a:prstGeom>
+          <a:noFill/>
+        </p:spPr>
+        <p:txBody>
+          <a:bodyPr wrap="square" anchor="t" lIns="0" rIns="0" tIns="0" bIns="0">
+            <a:spAutoFit/>
+          </a:bodyPr>
+          <a:lstStyle/>
+          <a:p>
+            <a:pPr algn="r"/>
+            <a:r>
+              <a:rPr sz="1000" b="1" i="0">
+                <a:solidFill>
+                  <a:srgbClr val="8F989D"/>
+                </a:solidFill>
+                <a:latin typeface="Calibri"/>
+              </a:rPr>
               <a:t>15</a:t>
+            </a:r>
+          </a:p>
+        </p:txBody>
+      </p:sp>
+      <p:sp>
+        <p:nvSpPr>
+          <p:cNvPr id="6" name="TextBox 5"/>
+          <p:cNvSpPr txBox="1"/>
+          <p:nvPr/>
+        </p:nvSpPr>
+        <p:spPr>
+          <a:xfrm>
+            <a:off x="640080" y="5943600"/>
+            <a:ext cx="9997135" cy="457200"/>
+          </a:xfrm>
+          <a:prstGeom prst="rect">
+            <a:avLst/>
+          </a:prstGeom>
+          <a:noFill/>
+        </p:spPr>
+        <p:txBody>
+          <a:bodyPr wrap="square" anchor="t" lIns="0" rIns="0" tIns="0" bIns="0">
+            <a:spAutoFit/>
+          </a:bodyPr>
+          <a:lstStyle/>
+          <a:p>
+            <a:r>
+              <a:rPr sz="1200" b="0" i="1">
+                <a:solidFill>
+                  <a:srgbClr val="2B2B2B"/>
+                </a:solidFill>
+                <a:latin typeface="Calibri"/>
+              </a:rPr>
+              <a:t>Las tutorías por grupo se acuerdan en la semana con el Docente (no hay atención espontánea sin cita).</a:t>
             </a:r>
           </a:p>
         </p:txBody>
@@ -6845,21 +6878,65 @@
                 </a:solidFill>
                 <a:latin typeface="Calibri"/>
               </a:rPr>
-              <a:t>Cómo pedir ayuda: canales, tutorías y tiempos de respuesta</a:t>
-            </a:r>
-          </a:p>
-        </p:txBody>
-      </p:sp>
-      <p:sp>
-        <p:nvSpPr>
-          <p:cNvPr id="4" name="TextBox 3"/>
+              <a:t>Acuerdos de convivencia del encuentro</a:t>
+            </a:r>
+          </a:p>
+        </p:txBody>
+      </p:sp>
+      <p:sp>
+        <p:nvSpPr>
+          <p:cNvPr id="4" name="Rounded Rectangle 3"/>
+          <p:cNvSpPr/>
+          <p:nvPr/>
+        </p:nvSpPr>
+        <p:spPr>
+          <a:xfrm>
+            <a:off x="640080" y="1737360"/>
+            <a:ext cx="10911535" cy="1225296"/>
+          </a:xfrm>
+          <a:prstGeom prst="roundRect">
+            <a:avLst/>
+          </a:prstGeom>
+          <a:solidFill>
+            <a:srgbClr val="E8F5EC"/>
+          </a:solidFill>
+          <a:ln>
+            <a:noFill/>
+          </a:ln>
+          <a:effectLst/>
+        </p:spPr>
+        <p:style>
+          <a:lnRef idx="1">
+            <a:schemeClr val="accent1"/>
+          </a:lnRef>
+          <a:fillRef idx="3">
+            <a:schemeClr val="accent1"/>
+          </a:fillRef>
+          <a:effectRef idx="2">
+            <a:schemeClr val="accent1"/>
+          </a:effectRef>
+          <a:fontRef idx="minor">
+            <a:schemeClr val="lt1"/>
+          </a:fontRef>
+        </p:style>
+        <p:txBody>
+          <a:bodyPr rtlCol="0" anchor="ctr"/>
+          <a:lstStyle/>
+          <a:p>
+            <a:pPr algn="ctr"/>
+          </a:p>
+        </p:txBody>
+      </p:sp>
+      <p:sp>
+        <p:nvSpPr>
+          <p:cNvPr id="5" name="TextBox 4"/>
           <p:cNvSpPr txBox="1"/>
           <p:nvPr/>
         </p:nvSpPr>
         <p:spPr>
           <a:xfrm>
-            <a:off x="640080" y="1691639"/>
-            <a:ext cx="10911535" cy="4617720"/>
+            <a:off x="868680" y="1847088"/>
+            <a:ext cx="10454335" cy="1005840"/>
           </a:xfrm>
           <a:prstGeom prst="rect">
             <a:avLst/>
@@ -6872,305 +6949,97 @@
           </a:bodyPr>
           <a:lstStyle/>
           <a:p>
+            <a:r>
+              <a:rPr sz="1300" b="1" i="0">
+                <a:solidFill>
+                  <a:srgbClr val="0C2340"/>
+                </a:solidFill>
+                <a:latin typeface="Calibri"/>
+              </a:rPr>
+              <a:t>ℹ️ Nota institucional</a:t>
+            </a:r>
+          </a:p>
+          <a:p>
             <a:pPr>
-              <a:spcAft>
-                <a:spcPts val="1000"/>
-              </a:spcAft>
+              <a:spcBef>
+                <a:spcPts val="400"/>
+              </a:spcBef>
             </a:pPr>
             <a:r>
-              <a:rPr sz="1600" b="0" i="0">
-                <a:solidFill>
-                  <a:srgbClr val="2B2B2B"/>
-                </a:solidFill>
-                <a:latin typeface="Calibri"/>
-              </a:rPr>
-              <a:t>–   </a:t>
-            </a:r>
-            <a:r>
-              <a:rPr sz="1600" b="1" i="0">
-                <a:solidFill>
-                  <a:srgbClr val="2B2B2B"/>
-                </a:solidFill>
-                <a:latin typeface="Calibri"/>
-              </a:rPr>
-              <a:t>En clase:</a:t>
-            </a:r>
-            <a:r>
-              <a:rPr sz="1600" b="0" i="0">
-                <a:solidFill>
-                  <a:srgbClr val="2B2B2B"/>
-                </a:solidFill>
-                <a:latin typeface="Calibri"/>
-              </a:rPr>
-              <a:t> la segunda hora es tutoría en vivo. Es el canal más rápido y ya está dentro de su horario.</a:t>
-            </a:r>
-          </a:p>
-          <a:p>
-            <a:pPr>
-              <a:spcAft>
-                <a:spcPts val="1000"/>
-              </a:spcAft>
-            </a:pPr>
-            <a:r>
-              <a:rPr sz="1600" b="0" i="0">
-                <a:solidFill>
-                  <a:srgbClr val="2B2B2B"/>
-                </a:solidFill>
-                <a:latin typeface="Calibri"/>
-              </a:rPr>
-              <a:t>–   </a:t>
-            </a:r>
-            <a:r>
-              <a:rPr sz="1600" b="1" i="0">
-                <a:solidFill>
-                  <a:srgbClr val="2B2B2B"/>
-                </a:solidFill>
-                <a:latin typeface="Calibri"/>
-              </a:rPr>
-              <a:t>Tutorías por equipo:</a:t>
-            </a:r>
-            <a:r>
-              <a:rPr sz="1600" b="0" i="0">
-                <a:solidFill>
-                  <a:srgbClr val="2B2B2B"/>
-                </a:solidFill>
-                <a:latin typeface="Calibri"/>
-              </a:rPr>
-              <a:t> se </a:t>
-            </a:r>
-            <a:r>
-              <a:rPr sz="1600" b="1" i="0">
-                <a:solidFill>
-                  <a:srgbClr val="2B2B2B"/>
-                </a:solidFill>
-                <a:latin typeface="Calibri"/>
-              </a:rPr>
-              <a:t>acuerdan en la semana</a:t>
-            </a:r>
-            <a:r>
-              <a:rPr sz="1600" b="0" i="0">
-                <a:solidFill>
-                  <a:srgbClr val="2B2B2B"/>
-                </a:solidFill>
-                <a:latin typeface="Calibri"/>
-              </a:rPr>
-              <a:t> con el Docente. No hay atención espontánea sin cita.</a:t>
-            </a:r>
-          </a:p>
-          <a:p>
-            <a:pPr lvl="1">
-              <a:spcAft>
-                <a:spcPts val="600"/>
-              </a:spcAft>
-            </a:pPr>
-            <a:r>
-              <a:rPr sz="1500" b="0" i="0">
-                <a:solidFill>
-                  <a:srgbClr val="2B2B2B"/>
-                </a:solidFill>
-                <a:latin typeface="Calibri"/>
-              </a:rPr>
-              <a:t>●   Al pedirla, digan qué necesitan y qué tienen escrito; se agenda y se atiende con el documento abierto.</a:t>
-            </a:r>
-          </a:p>
-          <a:p>
-            <a:pPr>
-              <a:spcAft>
-                <a:spcPts val="1000"/>
-              </a:spcAft>
-            </a:pPr>
-            <a:r>
-              <a:rPr sz="1600" b="0" i="0">
-                <a:solidFill>
-                  <a:srgbClr val="2B2B2B"/>
-                </a:solidFill>
-                <a:latin typeface="Calibri"/>
-              </a:rPr>
-              <a:t>–   </a:t>
-            </a:r>
-            <a:r>
-              <a:rPr sz="1600" b="1" i="0">
-                <a:solidFill>
-                  <a:srgbClr val="2B2B2B"/>
-                </a:solidFill>
-                <a:latin typeface="Calibri"/>
-              </a:rPr>
-              <a:t>Cada estudiante que asiste a tutoría registra su asistencia</a:t>
-            </a:r>
-            <a:r>
-              <a:rPr sz="1600" b="0" i="0">
-                <a:solidFill>
-                  <a:srgbClr val="2B2B2B"/>
-                </a:solidFill>
-                <a:latin typeface="Calibri"/>
-              </a:rPr>
-              <a:t> en el formulario del curso:</a:t>
-            </a:r>
-          </a:p>
-          <a:p>
-            <a:pPr lvl="1">
-              <a:spcAft>
-                <a:spcPts val="600"/>
-              </a:spcAft>
-            </a:pPr>
-            <a:r>
-              <a:rPr sz="1500" b="0" i="0">
-                <a:solidFill>
-                  <a:srgbClr val="2B2B2B"/>
-                </a:solidFill>
-                <a:latin typeface="Calibri"/>
-              </a:rPr>
-              <a:t>●   </a:t>
-            </a:r>
-            <a:r>
-              <a:rPr sz="1500" b="1" i="0">
-                <a:solidFill>
-                  <a:srgbClr val="2B2B2B"/>
-                </a:solidFill>
-                <a:latin typeface="Calibri"/>
-              </a:rPr>
-              <a:t>https://forms.gle/oZ8xCYiUo3KEWr1d9</a:t>
-            </a:r>
-            <a:r>
-              <a:rPr sz="1500" b="0" i="0">
-                <a:solidFill>
-                  <a:srgbClr val="2B2B2B"/>
-                </a:solidFill>
-                <a:latin typeface="Calibri"/>
-              </a:rPr>
-              <a:t> — también queda publicado en CDigital.</a:t>
-            </a:r>
-          </a:p>
-          <a:p>
-            <a:pPr lvl="1">
-              <a:spcAft>
-                <a:spcPts val="600"/>
-              </a:spcAft>
-            </a:pPr>
-            <a:r>
-              <a:rPr sz="1500" b="0" i="0">
-                <a:solidFill>
-                  <a:srgbClr val="2B2B2B"/>
-                </a:solidFill>
-                <a:latin typeface="Calibri"/>
-              </a:rPr>
-              <a:t>●   Ese registro es </a:t>
-            </a:r>
-            <a:r>
-              <a:rPr sz="1500" b="1" i="0">
-                <a:solidFill>
-                  <a:srgbClr val="2B2B2B"/>
-                </a:solidFill>
-                <a:latin typeface="Calibri"/>
-              </a:rPr>
-              <a:t>su evidencia</a:t>
-            </a:r>
-            <a:r>
-              <a:rPr sz="1500" b="0" i="0">
-                <a:solidFill>
-                  <a:srgbClr val="2B2B2B"/>
-                </a:solidFill>
-                <a:latin typeface="Calibri"/>
-              </a:rPr>
-              <a:t> de acompañamiento ante el programa: sin registro, la tutoría no consta.</a:t>
-            </a:r>
-          </a:p>
-          <a:p>
-            <a:pPr>
-              <a:spcAft>
-                <a:spcPts val="1000"/>
-              </a:spcAft>
-            </a:pPr>
-            <a:r>
-              <a:rPr sz="1600" b="0" i="0">
-                <a:solidFill>
-                  <a:srgbClr val="2B2B2B"/>
-                </a:solidFill>
-                <a:latin typeface="Calibri"/>
-              </a:rPr>
-              <a:t>–   </a:t>
-            </a:r>
-            <a:r>
-              <a:rPr sz="1600" b="1" i="0">
-                <a:solidFill>
-                  <a:srgbClr val="2B2B2B"/>
-                </a:solidFill>
-                <a:latin typeface="Calibri"/>
-              </a:rPr>
-              <a:t>Foro y mensajería de CDigital:</a:t>
-            </a:r>
-            <a:r>
-              <a:rPr sz="1600" b="0" i="0">
-                <a:solidFill>
-                  <a:srgbClr val="2B2B2B"/>
-                </a:solidFill>
-                <a:latin typeface="Calibri"/>
-              </a:rPr>
-              <a:t> para dudas que le sirven a todo el curso. Respuesta en días hábiles.</a:t>
-            </a:r>
-          </a:p>
-          <a:p>
-            <a:pPr>
-              <a:spcAft>
-                <a:spcPts val="1000"/>
-              </a:spcAft>
-            </a:pPr>
-            <a:r>
-              <a:rPr sz="1600" b="0" i="0">
-                <a:solidFill>
-                  <a:srgbClr val="2B2B2B"/>
-                </a:solidFill>
-                <a:latin typeface="Calibri"/>
-              </a:rPr>
-              <a:t>–   </a:t>
-            </a:r>
-            <a:r>
-              <a:rPr sz="1600" b="1" i="0">
-                <a:solidFill>
-                  <a:srgbClr val="2B2B2B"/>
-                </a:solidFill>
-                <a:latin typeface="Calibri"/>
-              </a:rPr>
-              <a:t>Antes de preguntar:</a:t>
-            </a:r>
-            <a:r>
-              <a:rPr sz="1600" b="0" i="0">
-                <a:solidFill>
-                  <a:srgbClr val="2B2B2B"/>
-                </a:solidFill>
-                <a:latin typeface="Calibri"/>
-              </a:rPr>
-              <a:t> revisen el enunciado del corte y la plantilla. La mitad de las dudas ya está resuelta ahí.</a:t>
-            </a:r>
-          </a:p>
-          <a:p>
-            <a:pPr>
-              <a:spcAft>
-                <a:spcPts val="1000"/>
-              </a:spcAft>
-            </a:pPr>
-            <a:r>
-              <a:rPr sz="1600" b="0" i="0">
-                <a:solidFill>
-                  <a:srgbClr val="2B2B2B"/>
-                </a:solidFill>
-                <a:latin typeface="Calibri"/>
-              </a:rPr>
-              <a:t>–   Pregunta bien hecha = sección concreta + qué intentaron + qué no les cuadra. «No entendí nada» no se puede responder.</a:t>
-            </a:r>
-          </a:p>
-        </p:txBody>
-      </p:sp>
-      <p:sp>
-        <p:nvSpPr>
-          <p:cNvPr id="5" name="TextBox 4"/>
+              <a:rPr sz="1300" b="1" i="0">
+                <a:solidFill>
+                  <a:srgbClr val="2B2B2B"/>
+                </a:solidFill>
+                <a:latin typeface="Calibri"/>
+              </a:rPr>
+              <a:t>Puntualidad y cámara.</a:t>
+            </a:r>
+            <a:r>
+              <a:rPr sz="1300" b="0" i="0">
+                <a:solidFill>
+                  <a:srgbClr val="2B2B2B"/>
+                </a:solidFill>
+                <a:latin typeface="Calibri"/>
+              </a:rPr>
+              <a:t> Empezamos a la hora en punto. Cámara encendida al menos en la presentación y en la tutoría de su equipo: revisar un avance a ciegas no funciona. Micrófono en silencio mientras alguien expone.</a:t>
+            </a:r>
+          </a:p>
+        </p:txBody>
+      </p:sp>
+      <p:sp>
+        <p:nvSpPr>
+          <p:cNvPr id="6" name="Rounded Rectangle 5"/>
+          <p:cNvSpPr/>
+          <p:nvPr/>
+        </p:nvSpPr>
+        <p:spPr>
+          <a:xfrm>
+            <a:off x="640080" y="3191256"/>
+            <a:ext cx="10911535" cy="1225296"/>
+          </a:xfrm>
+          <a:prstGeom prst="roundRect">
+            <a:avLst/>
+          </a:prstGeom>
+          <a:solidFill>
+            <a:srgbClr val="FDECD8"/>
+          </a:solidFill>
+          <a:ln>
+            <a:noFill/>
+          </a:ln>
+          <a:effectLst/>
+        </p:spPr>
+        <p:style>
+          <a:lnRef idx="1">
+            <a:schemeClr val="accent1"/>
+          </a:lnRef>
+          <a:fillRef idx="3">
+            <a:schemeClr val="accent1"/>
+          </a:fillRef>
+          <a:effectRef idx="2">
+            <a:schemeClr val="accent1"/>
+          </a:effectRef>
+          <a:fontRef idx="minor">
+            <a:schemeClr val="lt1"/>
+          </a:fontRef>
+        </p:style>
+        <p:txBody>
+          <a:bodyPr rtlCol="0" anchor="ctr"/>
+          <a:lstStyle/>
+          <a:p>
+            <a:pPr algn="ctr"/>
+          </a:p>
+        </p:txBody>
+      </p:sp>
+      <p:sp>
+        <p:nvSpPr>
+          <p:cNvPr id="7" name="TextBox 6"/>
           <p:cNvSpPr txBox="1"/>
           <p:nvPr/>
         </p:nvSpPr>
         <p:spPr>
           <a:xfrm>
-            <a:off x="11094415" y="6446520"/>
-            <a:ext cx="548640" cy="274320"/>
+            <a:off x="868680" y="3300984"/>
+            <a:ext cx="10454335" cy="1005840"/>
           </a:xfrm>
           <a:prstGeom prst="rect">
             <a:avLst/>
@@ -7183,29 +7052,97 @@
           </a:bodyPr>
           <a:lstStyle/>
           <a:p>
-            <a:pPr algn="r"/>
-            <a:r>
-              <a:rPr sz="1000" b="1" i="0">
-                <a:solidFill>
-                  <a:srgbClr val="8F989D"/>
-                </a:solidFill>
-                <a:latin typeface="Calibri"/>
-              </a:rPr>
-              <a:t>16</a:t>
-            </a:r>
-          </a:p>
-        </p:txBody>
-      </p:sp>
-      <p:sp>
-        <p:nvSpPr>
-          <p:cNvPr id="6" name="TextBox 5"/>
+            <a:r>
+              <a:rPr sz="1300" b="1" i="0">
+                <a:solidFill>
+                  <a:srgbClr val="0C2340"/>
+                </a:solidFill>
+                <a:latin typeface="Calibri"/>
+              </a:rPr>
+              <a:t>💡 Aclaración</a:t>
+            </a:r>
+          </a:p>
+          <a:p>
+            <a:pPr>
+              <a:spcBef>
+                <a:spcPts val="400"/>
+              </a:spcBef>
+            </a:pPr>
+            <a:r>
+              <a:rPr sz="1300" b="1" i="0">
+                <a:solidFill>
+                  <a:srgbClr val="2B2B2B"/>
+                </a:solidFill>
+                <a:latin typeface="Calibri"/>
+              </a:rPr>
+              <a:t>Participar es parte del método.</a:t>
+            </a:r>
+            <a:r>
+              <a:rPr sz="1300" b="0" i="0">
+                <a:solidFill>
+                  <a:srgbClr val="2B2B2B"/>
+                </a:solidFill>
+                <a:latin typeface="Calibri"/>
+              </a:rPr>
+              <a:t> Cuando el Docente pregunta, el silencio también es una respuesta: alarga la clase. Interrumpan para preguntar; es preferible una duda a destiempo que un capítulo entero mal escrito.</a:t>
+            </a:r>
+          </a:p>
+        </p:txBody>
+      </p:sp>
+      <p:sp>
+        <p:nvSpPr>
+          <p:cNvPr id="8" name="Rounded Rectangle 7"/>
+          <p:cNvSpPr/>
+          <p:nvPr/>
+        </p:nvSpPr>
+        <p:spPr>
+          <a:xfrm>
+            <a:off x="640080" y="4645152"/>
+            <a:ext cx="10911535" cy="1225296"/>
+          </a:xfrm>
+          <a:prstGeom prst="roundRect">
+            <a:avLst/>
+          </a:prstGeom>
+          <a:solidFill>
+            <a:srgbClr val="FBE4E4"/>
+          </a:solidFill>
+          <a:ln>
+            <a:noFill/>
+          </a:ln>
+          <a:effectLst/>
+        </p:spPr>
+        <p:style>
+          <a:lnRef idx="1">
+            <a:schemeClr val="accent1"/>
+          </a:lnRef>
+          <a:fillRef idx="3">
+            <a:schemeClr val="accent1"/>
+          </a:fillRef>
+          <a:effectRef idx="2">
+            <a:schemeClr val="accent1"/>
+          </a:effectRef>
+          <a:fontRef idx="minor">
+            <a:schemeClr val="lt1"/>
+          </a:fontRef>
+        </p:style>
+        <p:txBody>
+          <a:bodyPr rtlCol="0" anchor="ctr"/>
+          <a:lstStyle/>
+          <a:p>
+            <a:pPr algn="ctr"/>
+          </a:p>
+        </p:txBody>
+      </p:sp>
+      <p:sp>
+        <p:nvSpPr>
+          <p:cNvPr id="9" name="TextBox 8"/>
           <p:cNvSpPr txBox="1"/>
           <p:nvPr/>
         </p:nvSpPr>
         <p:spPr>
           <a:xfrm>
-            <a:off x="640080" y="5943600"/>
-            <a:ext cx="9997135" cy="457200"/>
+            <a:off x="868680" y="4754880"/>
+            <a:ext cx="10454335" cy="1005840"/>
           </a:xfrm>
           <a:prstGeom prst="rect">
             <a:avLst/>
@@ -7219,13 +7156,73 @@
           <a:lstStyle/>
           <a:p>
             <a:r>
-              <a:rPr sz="1200" b="0" i="1">
-                <a:solidFill>
-                  <a:srgbClr val="2B2B2B"/>
-                </a:solidFill>
-                <a:latin typeface="Calibri"/>
-              </a:rPr>
-              <a:t>Las tutorías por grupo se acuerdan en la semana con el Docente (no hay atención espontánea sin cita).</a:t>
+              <a:rPr sz="1300" b="1" i="0">
+                <a:solidFill>
+                  <a:srgbClr val="0C2340"/>
+                </a:solidFill>
+                <a:latin typeface="Calibri"/>
+              </a:rPr>
+              <a:t>⚠️ Importante</a:t>
+            </a:r>
+          </a:p>
+          <a:p>
+            <a:pPr>
+              <a:spcBef>
+                <a:spcPts val="400"/>
+              </a:spcBef>
+            </a:pPr>
+            <a:r>
+              <a:rPr sz="1300" b="1" i="0">
+                <a:solidFill>
+                  <a:srgbClr val="2B2B2B"/>
+                </a:solidFill>
+                <a:latin typeface="Calibri"/>
+              </a:rPr>
+              <a:t>Respeto en el foro y en el chat.</a:t>
+            </a:r>
+            <a:r>
+              <a:rPr sz="1300" b="0" i="0">
+                <a:solidFill>
+                  <a:srgbClr val="2B2B2B"/>
+                </a:solidFill>
+                <a:latin typeface="Calibri"/>
+              </a:rPr>
+              <a:t> Se critica el documento, nunca a la persona. La retroalimentación entre equipos se escribe con la misma cortesía con la que quisieran recibirla. El encuentro se graba.</a:t>
+            </a:r>
+          </a:p>
+        </p:txBody>
+      </p:sp>
+      <p:sp>
+        <p:nvSpPr>
+          <p:cNvPr id="10" name="TextBox 9"/>
+          <p:cNvSpPr txBox="1"/>
+          <p:nvPr/>
+        </p:nvSpPr>
+        <p:spPr>
+          <a:xfrm>
+            <a:off x="11094415" y="6446520"/>
+            <a:ext cx="548640" cy="274320"/>
+          </a:xfrm>
+          <a:prstGeom prst="rect">
+            <a:avLst/>
+          </a:prstGeom>
+          <a:noFill/>
+        </p:spPr>
+        <p:txBody>
+          <a:bodyPr wrap="square" anchor="t" lIns="0" rIns="0" tIns="0" bIns="0">
+            <a:spAutoFit/>
+          </a:bodyPr>
+          <a:lstStyle/>
+          <a:p>
+            <a:pPr algn="r"/>
+            <a:r>
+              <a:rPr sz="1000" b="1" i="0">
+                <a:solidFill>
+                  <a:srgbClr val="8F989D"/>
+                </a:solidFill>
+                <a:latin typeface="Calibri"/>
+              </a:rPr>
+              <a:t>16</a:t>
             </a:r>
           </a:p>
         </p:txBody>
@@ -7330,65 +7327,21 @@
                 </a:solidFill>
                 <a:latin typeface="Calibri"/>
               </a:rPr>
-              <a:t>Acuerdos de convivencia del encuentro</a:t>
-            </a:r>
-          </a:p>
-        </p:txBody>
-      </p:sp>
-      <p:sp>
-        <p:nvSpPr>
-          <p:cNvPr id="4" name="Rounded Rectangle 3"/>
-          <p:cNvSpPr/>
-          <p:nvPr/>
-        </p:nvSpPr>
-        <p:spPr>
-          <a:xfrm>
-            <a:off x="640080" y="1737360"/>
-            <a:ext cx="10911535" cy="1225296"/>
-          </a:xfrm>
-          <a:prstGeom prst="roundRect">
-            <a:avLst/>
-          </a:prstGeom>
-          <a:solidFill>
-            <a:srgbClr val="E8F5EC"/>
-          </a:solidFill>
-          <a:ln>
-            <a:noFill/>
-          </a:ln>
-          <a:effectLst/>
-        </p:spPr>
-        <p:style>
-          <a:lnRef idx="1">
-            <a:schemeClr val="accent1"/>
-          </a:lnRef>
-          <a:fillRef idx="3">
-            <a:schemeClr val="accent1"/>
-          </a:fillRef>
-          <a:effectRef idx="2">
-            <a:schemeClr val="accent1"/>
-          </a:effectRef>
-          <a:fontRef idx="minor">
-            <a:schemeClr val="lt1"/>
-          </a:fontRef>
-        </p:style>
-        <p:txBody>
-          <a:bodyPr rtlCol="0" anchor="ctr"/>
-          <a:lstStyle/>
-          <a:p>
-            <a:pPr algn="ctr"/>
-          </a:p>
-        </p:txBody>
-      </p:sp>
-      <p:sp>
-        <p:nvSpPr>
-          <p:cNvPr id="5" name="TextBox 4"/>
+              <a:t>Antes de la Sesión 02: lectura autónoma y qué traer</a:t>
+            </a:r>
+          </a:p>
+        </p:txBody>
+      </p:sp>
+      <p:sp>
+        <p:nvSpPr>
+          <p:cNvPr id="4" name="TextBox 3"/>
           <p:cNvSpPr txBox="1"/>
           <p:nvPr/>
         </p:nvSpPr>
         <p:spPr>
           <a:xfrm>
-            <a:off x="868680" y="1847088"/>
-            <a:ext cx="10454335" cy="1005840"/>
+            <a:off x="640080" y="1691639"/>
+            <a:ext cx="10911535" cy="4617720"/>
           </a:xfrm>
           <a:prstGeom prst="rect">
             <a:avLst/>
@@ -7401,97 +7354,341 @@
           </a:bodyPr>
           <a:lstStyle/>
           <a:p>
-            <a:r>
-              <a:rPr sz="1300" b="1" i="0">
-                <a:solidFill>
-                  <a:srgbClr val="0C2340"/>
-                </a:solidFill>
-                <a:latin typeface="Calibri"/>
-              </a:rPr>
-              <a:t>ℹ️ Nota institucional</a:t>
-            </a:r>
-          </a:p>
-          <a:p>
             <a:pPr>
-              <a:spcBef>
-                <a:spcPts val="400"/>
-              </a:spcBef>
+              <a:spcAft>
+                <a:spcPts val="1000"/>
+              </a:spcAft>
             </a:pPr>
             <a:r>
-              <a:rPr sz="1300" b="1" i="0">
-                <a:solidFill>
-                  <a:srgbClr val="2B2B2B"/>
-                </a:solidFill>
-                <a:latin typeface="Calibri"/>
-              </a:rPr>
-              <a:t>Puntualidad y cámara.</a:t>
-            </a:r>
-            <a:r>
-              <a:rPr sz="1300" b="0" i="0">
-                <a:solidFill>
-                  <a:srgbClr val="2B2B2B"/>
-                </a:solidFill>
-                <a:latin typeface="Calibri"/>
-              </a:rPr>
-              <a:t> Empezamos a la hora en punto. Cámara encendida al menos en la presentación y en la tutoría de su equipo: revisar un avance a ciegas no funciona. Micrófono en silencio mientras alguien expone.</a:t>
-            </a:r>
-          </a:p>
-        </p:txBody>
-      </p:sp>
-      <p:sp>
-        <p:nvSpPr>
-          <p:cNvPr id="6" name="Rounded Rectangle 5"/>
-          <p:cNvSpPr/>
-          <p:nvPr/>
-        </p:nvSpPr>
-        <p:spPr>
-          <a:xfrm>
-            <a:off x="640080" y="3191256"/>
-            <a:ext cx="10911535" cy="1225296"/>
-          </a:xfrm>
-          <a:prstGeom prst="roundRect">
-            <a:avLst/>
-          </a:prstGeom>
-          <a:solidFill>
-            <a:srgbClr val="FDECD8"/>
-          </a:solidFill>
-          <a:ln>
-            <a:noFill/>
-          </a:ln>
-          <a:effectLst/>
-        </p:spPr>
-        <p:style>
-          <a:lnRef idx="1">
-            <a:schemeClr val="accent1"/>
-          </a:lnRef>
-          <a:fillRef idx="3">
-            <a:schemeClr val="accent1"/>
-          </a:fillRef>
-          <a:effectRef idx="2">
-            <a:schemeClr val="accent1"/>
-          </a:effectRef>
-          <a:fontRef idx="minor">
-            <a:schemeClr val="lt1"/>
-          </a:fontRef>
-        </p:style>
-        <p:txBody>
-          <a:bodyPr rtlCol="0" anchor="ctr"/>
-          <a:lstStyle/>
-          <a:p>
-            <a:pPr algn="ctr"/>
-          </a:p>
-        </p:txBody>
-      </p:sp>
-      <p:sp>
-        <p:nvSpPr>
-          <p:cNvPr id="7" name="TextBox 6"/>
+              <a:rPr sz="1500" b="0" i="0">
+                <a:solidFill>
+                  <a:srgbClr val="2B2B2B"/>
+                </a:solidFill>
+                <a:latin typeface="Calibri"/>
+              </a:rPr>
+              <a:t>–   </a:t>
+            </a:r>
+            <a:r>
+              <a:rPr sz="1500" b="1" i="0">
+                <a:solidFill>
+                  <a:srgbClr val="2B2B2B"/>
+                </a:solidFill>
+                <a:latin typeface="Calibri"/>
+              </a:rPr>
+              <a:t>Lectura autónoma de esta semana:</a:t>
+            </a:r>
+            <a:r>
+              <a:rPr sz="1500" b="0" i="0">
+                <a:solidFill>
+                  <a:srgbClr val="2B2B2B"/>
+                </a:solidFill>
+                <a:latin typeface="Calibri"/>
+              </a:rPr>
+              <a:t> la unidad de </a:t>
+            </a:r>
+            <a:r>
+              <a:rPr sz="1500" b="1" i="0">
+                <a:solidFill>
+                  <a:srgbClr val="2B2B2B"/>
+                </a:solidFill>
+                <a:latin typeface="Calibri"/>
+              </a:rPr>
+              <a:t>fundamentos y enfoque de investigación (U1 del programa)</a:t>
+            </a:r>
+            <a:r>
+              <a:rPr sz="1500" b="0" i="0">
+                <a:solidFill>
+                  <a:srgbClr val="2B2B2B"/>
+                </a:solidFill>
+                <a:latin typeface="Calibri"/>
+              </a:rPr>
+              <a:t>.</a:t>
+            </a:r>
+          </a:p>
+          <a:p>
+            <a:pPr lvl="1">
+              <a:spcAft>
+                <a:spcPts val="600"/>
+              </a:spcAft>
+            </a:pPr>
+            <a:r>
+              <a:rPr sz="1400" b="0" i="0">
+                <a:solidFill>
+                  <a:srgbClr val="2B2B2B"/>
+                </a:solidFill>
+                <a:latin typeface="Calibri"/>
+              </a:rPr>
+              <a:t>●   Hoy no la dictamos: la leen ustedes y la retomamos al abrir la Sesión 02.</a:t>
+            </a:r>
+          </a:p>
+          <a:p>
+            <a:pPr lvl="1">
+              <a:spcAft>
+                <a:spcPts val="600"/>
+              </a:spcAft>
+            </a:pPr>
+            <a:r>
+              <a:rPr sz="1400" b="0" i="0">
+                <a:solidFill>
+                  <a:srgbClr val="2B2B2B"/>
+                </a:solidFill>
+                <a:latin typeface="Calibri"/>
+              </a:rPr>
+              <a:t>●   </a:t>
+            </a:r>
+            <a:r>
+              <a:rPr sz="1400" b="1" i="0">
+                <a:solidFill>
+                  <a:srgbClr val="2B2B2B"/>
+                </a:solidFill>
+                <a:latin typeface="Calibri"/>
+              </a:rPr>
+              <a:t>Dónde está:</a:t>
+            </a:r>
+            <a:r>
+              <a:rPr sz="1400" b="0" i="0">
+                <a:solidFill>
+                  <a:srgbClr val="2B2B2B"/>
+                </a:solidFill>
+                <a:latin typeface="Calibri"/>
+              </a:rPr>
+              <a:t> ya viene en tu carpeta del curso, en `Sesion 01 - …/` (los PDF `Lectura 1 (obligatoria)…`, `Lectura 2 (guia)…` y `Lectura 3 (recomendada)…`, más el archivo `Lectura autonoma - Sesion 01.txt` con la cita, el enlace y qué traer). También queda publicada en CDigital.</a:t>
+            </a:r>
+          </a:p>
+          <a:p>
+            <a:pPr lvl="1">
+              <a:spcAft>
+                <a:spcPts val="600"/>
+              </a:spcAft>
+            </a:pPr>
+            <a:r>
+              <a:rPr sz="1400" b="0" i="0">
+                <a:solidFill>
+                  <a:srgbClr val="2B2B2B"/>
+                </a:solidFill>
+                <a:latin typeface="Calibri"/>
+              </a:rPr>
+              <a:t>●   Mientras leen, anoten </a:t>
+            </a:r>
+            <a:r>
+              <a:rPr sz="1400" b="1" i="0">
+                <a:solidFill>
+                  <a:srgbClr val="2B2B2B"/>
+                </a:solidFill>
+                <a:latin typeface="Calibri"/>
+              </a:rPr>
+              <a:t>tres términos</a:t>
+            </a:r>
+            <a:r>
+              <a:rPr sz="1400" b="0" i="0">
+                <a:solidFill>
+                  <a:srgbClr val="2B2B2B"/>
+                </a:solidFill>
+                <a:latin typeface="Calibri"/>
+              </a:rPr>
+              <a:t> que no les queden claros. Con esos tres arrancamos la próxima clase.</a:t>
+            </a:r>
+          </a:p>
+          <a:p>
+            <a:pPr>
+              <a:spcAft>
+                <a:spcPts val="1000"/>
+              </a:spcAft>
+            </a:pPr>
+            <a:r>
+              <a:rPr sz="1500" b="0" i="0">
+                <a:solidFill>
+                  <a:srgbClr val="2B2B2B"/>
+                </a:solidFill>
+                <a:latin typeface="Calibri"/>
+              </a:rPr>
+              <a:t>–   </a:t>
+            </a:r>
+            <a:r>
+              <a:rPr sz="1500" b="1" i="0">
+                <a:solidFill>
+                  <a:srgbClr val="2B2B2B"/>
+                </a:solidFill>
+                <a:latin typeface="Calibri"/>
+              </a:rPr>
+              <a:t>Confirmen su equipo</a:t>
+            </a:r>
+            <a:r>
+              <a:rPr sz="1500" b="0" i="0">
+                <a:solidFill>
+                  <a:srgbClr val="2B2B2B"/>
+                </a:solidFill>
+                <a:latin typeface="Calibri"/>
+              </a:rPr>
+              <a:t> (máximo 3 personas) y avísenlo. Si aún no tienen con quién, díganlo esta semana y el Docente ayuda a armarlo.</a:t>
+            </a:r>
+          </a:p>
+          <a:p>
+            <a:pPr>
+              <a:spcAft>
+                <a:spcPts val="1000"/>
+              </a:spcAft>
+            </a:pPr>
+            <a:r>
+              <a:rPr sz="1500" b="0" i="0">
+                <a:solidFill>
+                  <a:srgbClr val="2B2B2B"/>
+                </a:solidFill>
+                <a:latin typeface="Calibri"/>
+              </a:rPr>
+              <a:t>–   </a:t>
+            </a:r>
+            <a:r>
+              <a:rPr sz="1500" b="1" i="0">
+                <a:solidFill>
+                  <a:srgbClr val="2B2B2B"/>
+                </a:solidFill>
+                <a:latin typeface="Calibri"/>
+              </a:rPr>
+              <a:t>Abran la guía del primer corte</a:t>
+            </a:r>
+            <a:r>
+              <a:rPr sz="1500" b="0" i="0">
+                <a:solidFill>
+                  <a:srgbClr val="2B2B2B"/>
+                </a:solidFill>
+                <a:latin typeface="Calibri"/>
+              </a:rPr>
+              <a:t> en `Clases/Recursos/ACAs/` — `Quiz (25%)` — y léanla completa, criterios incluidos: eso es lo que comprueba el </a:t>
+            </a:r>
+            <a:r>
+              <a:rPr sz="1500" b="1" i="0">
+                <a:solidFill>
+                  <a:srgbClr val="2B2B2B"/>
+                </a:solidFill>
+                <a:latin typeface="Calibri"/>
+              </a:rPr>
+              <a:t>Quiz</a:t>
+            </a:r>
+            <a:r>
+              <a:rPr sz="1500" b="0" i="0">
+                <a:solidFill>
+                  <a:srgbClr val="2B2B2B"/>
+                </a:solidFill>
+                <a:latin typeface="Calibri"/>
+              </a:rPr>
+              <a:t>.</a:t>
+            </a:r>
+          </a:p>
+          <a:p>
+            <a:pPr>
+              <a:spcAft>
+                <a:spcPts val="1000"/>
+              </a:spcAft>
+            </a:pPr>
+            <a:r>
+              <a:rPr sz="1500" b="0" i="0">
+                <a:solidFill>
+                  <a:srgbClr val="2B2B2B"/>
+                </a:solidFill>
+                <a:latin typeface="Calibri"/>
+              </a:rPr>
+              <a:t>–   </a:t>
+            </a:r>
+            <a:r>
+              <a:rPr sz="1500" b="1" i="0">
+                <a:solidFill>
+                  <a:srgbClr val="2B2B2B"/>
+                </a:solidFill>
+                <a:latin typeface="Calibri"/>
+              </a:rPr>
+              <a:t>Creen el documento del equipo</a:t>
+            </a:r>
+            <a:r>
+              <a:rPr sz="1500" b="0" i="0">
+                <a:solidFill>
+                  <a:srgbClr val="2B2B2B"/>
+                </a:solidFill>
+                <a:latin typeface="Calibri"/>
+              </a:rPr>
+              <a:t> en Google Docs con la plantilla APA CUN y compártanlo con todos los integrantes.</a:t>
+            </a:r>
+          </a:p>
+          <a:p>
+            <a:pPr>
+              <a:spcAft>
+                <a:spcPts val="1000"/>
+              </a:spcAft>
+            </a:pPr>
+            <a:r>
+              <a:rPr sz="1500" b="0" i="0">
+                <a:solidFill>
+                  <a:srgbClr val="2B2B2B"/>
+                </a:solidFill>
+                <a:latin typeface="Calibri"/>
+              </a:rPr>
+              <a:t>–   </a:t>
+            </a:r>
+            <a:r>
+              <a:rPr sz="1500" b="1" i="0">
+                <a:solidFill>
+                  <a:srgbClr val="2B2B2B"/>
+                </a:solidFill>
+                <a:latin typeface="Calibri"/>
+              </a:rPr>
+              <a:t>Traigan a la Sesión 02</a:t>
+            </a:r>
+            <a:r>
+              <a:rPr sz="1500" b="0" i="0">
+                <a:solidFill>
+                  <a:srgbClr val="2B2B2B"/>
+                </a:solidFill>
+                <a:latin typeface="Calibri"/>
+              </a:rPr>
+              <a:t> una idea de tema escrita </a:t>
+            </a:r>
+            <a:r>
+              <a:rPr sz="1500" b="1" i="0">
+                <a:solidFill>
+                  <a:srgbClr val="2B2B2B"/>
+                </a:solidFill>
+                <a:latin typeface="Calibri"/>
+              </a:rPr>
+              <a:t>en una frase</a:t>
+            </a:r>
+            <a:r>
+              <a:rPr sz="1500" b="0" i="0">
+                <a:solidFill>
+                  <a:srgbClr val="2B2B2B"/>
+                </a:solidFill>
+                <a:latin typeface="Calibri"/>
+              </a:rPr>
+              <a:t> y el contexto donde ocurre (empresa, aula, proceso).</a:t>
+            </a:r>
+          </a:p>
+          <a:p>
+            <a:pPr lvl="1">
+              <a:spcAft>
+                <a:spcPts val="600"/>
+              </a:spcAft>
+            </a:pPr>
+            <a:r>
+              <a:rPr sz="1400" b="0" i="0">
+                <a:solidFill>
+                  <a:srgbClr val="2B2B2B"/>
+                </a:solidFill>
+                <a:latin typeface="Calibri"/>
+              </a:rPr>
+              <a:t>●   Con eso trabajamos en clase. Quien llegue sin la frase se pasará la sesión viendo trabajar a los demás.</a:t>
+            </a:r>
+          </a:p>
+        </p:txBody>
+      </p:sp>
+      <p:sp>
+        <p:nvSpPr>
+          <p:cNvPr id="5" name="TextBox 4"/>
           <p:cNvSpPr txBox="1"/>
           <p:nvPr/>
         </p:nvSpPr>
         <p:spPr>
           <a:xfrm>
-            <a:off x="868680" y="3300984"/>
-            <a:ext cx="10454335" cy="1005840"/>
+            <a:off x="11094415" y="6446520"/>
+            <a:ext cx="548640" cy="274320"/>
           </a:xfrm>
           <a:prstGeom prst="rect">
             <a:avLst/>
@@ -7504,97 +7701,29 @@
           </a:bodyPr>
           <a:lstStyle/>
           <a:p>
-            <a:r>
-              <a:rPr sz="1300" b="1" i="0">
-                <a:solidFill>
-                  <a:srgbClr val="0C2340"/>
-                </a:solidFill>
-                <a:latin typeface="Calibri"/>
-              </a:rPr>
-              <a:t>💡 Aclaración</a:t>
-            </a:r>
-          </a:p>
-          <a:p>
-            <a:pPr>
-              <a:spcBef>
-                <a:spcPts val="400"/>
-              </a:spcBef>
-            </a:pPr>
-            <a:r>
-              <a:rPr sz="1300" b="1" i="0">
-                <a:solidFill>
-                  <a:srgbClr val="2B2B2B"/>
-                </a:solidFill>
-                <a:latin typeface="Calibri"/>
-              </a:rPr>
-              <a:t>Participar es parte del método.</a:t>
-            </a:r>
-            <a:r>
-              <a:rPr sz="1300" b="0" i="0">
-                <a:solidFill>
-                  <a:srgbClr val="2B2B2B"/>
-                </a:solidFill>
-                <a:latin typeface="Calibri"/>
-              </a:rPr>
-              <a:t> Cuando el Docente pregunta, el silencio también es una respuesta: alarga la clase. Interrumpan para preguntar; es preferible una duda a destiempo que un capítulo entero mal escrito.</a:t>
-            </a:r>
-          </a:p>
-        </p:txBody>
-      </p:sp>
-      <p:sp>
-        <p:nvSpPr>
-          <p:cNvPr id="8" name="Rounded Rectangle 7"/>
-          <p:cNvSpPr/>
-          <p:nvPr/>
-        </p:nvSpPr>
-        <p:spPr>
-          <a:xfrm>
-            <a:off x="640080" y="4645152"/>
-            <a:ext cx="10911535" cy="1225296"/>
-          </a:xfrm>
-          <a:prstGeom prst="roundRect">
-            <a:avLst/>
-          </a:prstGeom>
-          <a:solidFill>
-            <a:srgbClr val="FBE4E4"/>
-          </a:solidFill>
-          <a:ln>
-            <a:noFill/>
-          </a:ln>
-          <a:effectLst/>
-        </p:spPr>
-        <p:style>
-          <a:lnRef idx="1">
-            <a:schemeClr val="accent1"/>
-          </a:lnRef>
-          <a:fillRef idx="3">
-            <a:schemeClr val="accent1"/>
-          </a:fillRef>
-          <a:effectRef idx="2">
-            <a:schemeClr val="accent1"/>
-          </a:effectRef>
-          <a:fontRef idx="minor">
-            <a:schemeClr val="lt1"/>
-          </a:fontRef>
-        </p:style>
-        <p:txBody>
-          <a:bodyPr rtlCol="0" anchor="ctr"/>
-          <a:lstStyle/>
-          <a:p>
-            <a:pPr algn="ctr"/>
-          </a:p>
-        </p:txBody>
-      </p:sp>
-      <p:sp>
-        <p:nvSpPr>
-          <p:cNvPr id="9" name="TextBox 8"/>
+            <a:pPr algn="r"/>
+            <a:r>
+              <a:rPr sz="1000" b="1" i="0">
+                <a:solidFill>
+                  <a:srgbClr val="8F989D"/>
+                </a:solidFill>
+                <a:latin typeface="Calibri"/>
+              </a:rPr>
+              <a:t>17</a:t>
+            </a:r>
+          </a:p>
+        </p:txBody>
+      </p:sp>
+      <p:sp>
+        <p:nvSpPr>
+          <p:cNvPr id="6" name="TextBox 5"/>
           <p:cNvSpPr txBox="1"/>
           <p:nvPr/>
         </p:nvSpPr>
         <p:spPr>
           <a:xfrm>
-            <a:off x="868680" y="4754880"/>
-            <a:ext cx="10454335" cy="1005840"/>
+            <a:off x="640080" y="5943600"/>
+            <a:ext cx="9997135" cy="457200"/>
           </a:xfrm>
           <a:prstGeom prst="rect">
             <a:avLst/>
@@ -7608,73 +7737,13 @@
           <a:lstStyle/>
           <a:p>
             <a:r>
-              <a:rPr sz="1300" b="1" i="0">
-                <a:solidFill>
-                  <a:srgbClr val="0C2340"/>
-                </a:solidFill>
-                <a:latin typeface="Calibri"/>
-              </a:rPr>
-              <a:t>⚠️ Importante</a:t>
-            </a:r>
-          </a:p>
-          <a:p>
-            <a:pPr>
-              <a:spcBef>
-                <a:spcPts val="400"/>
-              </a:spcBef>
-            </a:pPr>
-            <a:r>
-              <a:rPr sz="1300" b="1" i="0">
-                <a:solidFill>
-                  <a:srgbClr val="2B2B2B"/>
-                </a:solidFill>
-                <a:latin typeface="Calibri"/>
-              </a:rPr>
-              <a:t>Respeto en el foro y en el chat.</a:t>
-            </a:r>
-            <a:r>
-              <a:rPr sz="1300" b="0" i="0">
-                <a:solidFill>
-                  <a:srgbClr val="2B2B2B"/>
-                </a:solidFill>
-                <a:latin typeface="Calibri"/>
-              </a:rPr>
-              <a:t> Se critica el documento, nunca a la persona. La retroalimentación entre equipos se escribe con la misma cortesía con la que quisieran recibirla. El encuentro se graba.</a:t>
-            </a:r>
-          </a:p>
-        </p:txBody>
-      </p:sp>
-      <p:sp>
-        <p:nvSpPr>
-          <p:cNvPr id="10" name="TextBox 9"/>
-          <p:cNvSpPr txBox="1"/>
-          <p:nvPr/>
-        </p:nvSpPr>
-        <p:spPr>
-          <a:xfrm>
-            <a:off x="11094415" y="6446520"/>
-            <a:ext cx="548640" cy="274320"/>
-          </a:xfrm>
-          <a:prstGeom prst="rect">
-            <a:avLst/>
-          </a:prstGeom>
-          <a:noFill/>
-        </p:spPr>
-        <p:txBody>
-          <a:bodyPr wrap="square" anchor="t" lIns="0" rIns="0" tIns="0" bIns="0">
-            <a:spAutoFit/>
-          </a:bodyPr>
-          <a:lstStyle/>
-          <a:p>
-            <a:pPr algn="r"/>
-            <a:r>
-              <a:rPr sz="1000" b="1" i="0">
-                <a:solidFill>
-                  <a:srgbClr val="8F989D"/>
-                </a:solidFill>
-                <a:latin typeface="Calibri"/>
-              </a:rPr>
-              <a:t>17</a:t>
+              <a:rPr sz="1200" b="0" i="1">
+                <a:solidFill>
+                  <a:srgbClr val="2B2B2B"/>
+                </a:solidFill>
+                <a:latin typeface="Calibri"/>
+              </a:rPr>
+              <a:t>Nada de esto se califica hoy, pero todo se nota en la Sesión 02: la clase avanza sobre lo que ustedes traigan escrito.</a:t>
             </a:r>
           </a:p>
         </p:txBody>
@@ -7779,21 +7848,65 @@
                 </a:solidFill>
                 <a:latin typeface="Calibri"/>
               </a:rPr>
-              <a:t>Antes de la Sesión 02: lectura autónoma y qué traer</a:t>
-            </a:r>
-          </a:p>
-        </p:txBody>
-      </p:sp>
-      <p:sp>
-        <p:nvSpPr>
-          <p:cNvPr id="4" name="TextBox 3"/>
+              <a:t>Las preguntas que siempre salen el primer día</a:t>
+            </a:r>
+          </a:p>
+        </p:txBody>
+      </p:sp>
+      <p:sp>
+        <p:nvSpPr>
+          <p:cNvPr id="4" name="Rounded Rectangle 3"/>
+          <p:cNvSpPr/>
+          <p:nvPr/>
+        </p:nvSpPr>
+        <p:spPr>
+          <a:xfrm>
+            <a:off x="640080" y="1737360"/>
+            <a:ext cx="10911535" cy="1225296"/>
+          </a:xfrm>
+          <a:prstGeom prst="roundRect">
+            <a:avLst/>
+          </a:prstGeom>
+          <a:solidFill>
+            <a:srgbClr val="E8F5EC"/>
+          </a:solidFill>
+          <a:ln>
+            <a:noFill/>
+          </a:ln>
+          <a:effectLst/>
+        </p:spPr>
+        <p:style>
+          <a:lnRef idx="1">
+            <a:schemeClr val="accent1"/>
+          </a:lnRef>
+          <a:fillRef idx="3">
+            <a:schemeClr val="accent1"/>
+          </a:fillRef>
+          <a:effectRef idx="2">
+            <a:schemeClr val="accent1"/>
+          </a:effectRef>
+          <a:fontRef idx="minor">
+            <a:schemeClr val="lt1"/>
+          </a:fontRef>
+        </p:style>
+        <p:txBody>
+          <a:bodyPr rtlCol="0" anchor="ctr"/>
+          <a:lstStyle/>
+          <a:p>
+            <a:pPr algn="ctr"/>
+          </a:p>
+        </p:txBody>
+      </p:sp>
+      <p:sp>
+        <p:nvSpPr>
+          <p:cNvPr id="5" name="TextBox 4"/>
           <p:cNvSpPr txBox="1"/>
           <p:nvPr/>
         </p:nvSpPr>
         <p:spPr>
           <a:xfrm>
-            <a:off x="640080" y="1691639"/>
-            <a:ext cx="10911535" cy="4617720"/>
+            <a:off x="868680" y="1847088"/>
+            <a:ext cx="10454335" cy="1005840"/>
           </a:xfrm>
           <a:prstGeom prst="rect">
             <a:avLst/>
@@ -7806,341 +7919,97 @@
           </a:bodyPr>
           <a:lstStyle/>
           <a:p>
+            <a:r>
+              <a:rPr sz="1300" b="1" i="0">
+                <a:solidFill>
+                  <a:srgbClr val="0C2340"/>
+                </a:solidFill>
+                <a:latin typeface="Calibri"/>
+              </a:rPr>
+              <a:t>ℹ️ Nota institucional</a:t>
+            </a:r>
+          </a:p>
+          <a:p>
             <a:pPr>
-              <a:spcAft>
-                <a:spcPts val="1000"/>
-              </a:spcAft>
+              <a:spcBef>
+                <a:spcPts val="400"/>
+              </a:spcBef>
             </a:pPr>
             <a:r>
-              <a:rPr sz="1500" b="0" i="0">
-                <a:solidFill>
-                  <a:srgbClr val="2B2B2B"/>
-                </a:solidFill>
-                <a:latin typeface="Calibri"/>
-              </a:rPr>
-              <a:t>–   </a:t>
-            </a:r>
-            <a:r>
-              <a:rPr sz="1500" b="1" i="0">
-                <a:solidFill>
-                  <a:srgbClr val="2B2B2B"/>
-                </a:solidFill>
-                <a:latin typeface="Calibri"/>
-              </a:rPr>
-              <a:t>Lectura autónoma de esta semana:</a:t>
-            </a:r>
-            <a:r>
-              <a:rPr sz="1500" b="0" i="0">
-                <a:solidFill>
-                  <a:srgbClr val="2B2B2B"/>
-                </a:solidFill>
-                <a:latin typeface="Calibri"/>
-              </a:rPr>
-              <a:t> la unidad de </a:t>
-            </a:r>
-            <a:r>
-              <a:rPr sz="1500" b="1" i="0">
-                <a:solidFill>
-                  <a:srgbClr val="2B2B2B"/>
-                </a:solidFill>
-                <a:latin typeface="Calibri"/>
-              </a:rPr>
-              <a:t>fundamentos y enfoque de investigación (U1 del programa)</a:t>
-            </a:r>
-            <a:r>
-              <a:rPr sz="1500" b="0" i="0">
-                <a:solidFill>
-                  <a:srgbClr val="2B2B2B"/>
-                </a:solidFill>
-                <a:latin typeface="Calibri"/>
-              </a:rPr>
-              <a:t>.</a:t>
-            </a:r>
-          </a:p>
-          <a:p>
-            <a:pPr lvl="1">
-              <a:spcAft>
-                <a:spcPts val="600"/>
-              </a:spcAft>
-            </a:pPr>
-            <a:r>
-              <a:rPr sz="1400" b="0" i="0">
-                <a:solidFill>
-                  <a:srgbClr val="2B2B2B"/>
-                </a:solidFill>
-                <a:latin typeface="Calibri"/>
-              </a:rPr>
-              <a:t>●   Hoy no la dictamos: la leen ustedes y la retomamos al abrir la Sesión 02.</a:t>
-            </a:r>
-          </a:p>
-          <a:p>
-            <a:pPr lvl="1">
-              <a:spcAft>
-                <a:spcPts val="600"/>
-              </a:spcAft>
-            </a:pPr>
-            <a:r>
-              <a:rPr sz="1400" b="0" i="0">
-                <a:solidFill>
-                  <a:srgbClr val="2B2B2B"/>
-                </a:solidFill>
-                <a:latin typeface="Calibri"/>
-              </a:rPr>
-              <a:t>●   </a:t>
-            </a:r>
-            <a:r>
-              <a:rPr sz="1400" b="1" i="0">
-                <a:solidFill>
-                  <a:srgbClr val="2B2B2B"/>
-                </a:solidFill>
-                <a:latin typeface="Calibri"/>
-              </a:rPr>
-              <a:t>Dónde está:</a:t>
-            </a:r>
-            <a:r>
-              <a:rPr sz="1400" b="0" i="0">
-                <a:solidFill>
-                  <a:srgbClr val="2B2B2B"/>
-                </a:solidFill>
-                <a:latin typeface="Calibri"/>
-              </a:rPr>
-              <a:t> ya viene en tu carpeta del curso, en `Sesion 01 - …/` (los PDF `Lectura 1 (obligatoria)…`, `Lectura 2 (guia)…` y `Lectura 3 (recomendada)…`, más el archivo `Lectura autonoma - Sesion 01.txt` con la cita, el enlace y qué traer). También queda publicada en CDigital.</a:t>
-            </a:r>
-          </a:p>
-          <a:p>
-            <a:pPr lvl="1">
-              <a:spcAft>
-                <a:spcPts val="600"/>
-              </a:spcAft>
-            </a:pPr>
-            <a:r>
-              <a:rPr sz="1400" b="0" i="0">
-                <a:solidFill>
-                  <a:srgbClr val="2B2B2B"/>
-                </a:solidFill>
-                <a:latin typeface="Calibri"/>
-              </a:rPr>
-              <a:t>●   Mientras leen, anoten </a:t>
-            </a:r>
-            <a:r>
-              <a:rPr sz="1400" b="1" i="0">
-                <a:solidFill>
-                  <a:srgbClr val="2B2B2B"/>
-                </a:solidFill>
-                <a:latin typeface="Calibri"/>
-              </a:rPr>
-              <a:t>tres términos</a:t>
-            </a:r>
-            <a:r>
-              <a:rPr sz="1400" b="0" i="0">
-                <a:solidFill>
-                  <a:srgbClr val="2B2B2B"/>
-                </a:solidFill>
-                <a:latin typeface="Calibri"/>
-              </a:rPr>
-              <a:t> que no les queden claros. Con esos tres arrancamos la próxima clase.</a:t>
-            </a:r>
-          </a:p>
-          <a:p>
-            <a:pPr>
-              <a:spcAft>
-                <a:spcPts val="1000"/>
-              </a:spcAft>
-            </a:pPr>
-            <a:r>
-              <a:rPr sz="1500" b="0" i="0">
-                <a:solidFill>
-                  <a:srgbClr val="2B2B2B"/>
-                </a:solidFill>
-                <a:latin typeface="Calibri"/>
-              </a:rPr>
-              <a:t>–   </a:t>
-            </a:r>
-            <a:r>
-              <a:rPr sz="1500" b="1" i="0">
-                <a:solidFill>
-                  <a:srgbClr val="2B2B2B"/>
-                </a:solidFill>
-                <a:latin typeface="Calibri"/>
-              </a:rPr>
-              <a:t>Confirmen su equipo</a:t>
-            </a:r>
-            <a:r>
-              <a:rPr sz="1500" b="0" i="0">
-                <a:solidFill>
-                  <a:srgbClr val="2B2B2B"/>
-                </a:solidFill>
-                <a:latin typeface="Calibri"/>
-              </a:rPr>
-              <a:t> (máximo 3 personas) y avísenlo. Si aún no tienen con quién, díganlo esta semana y el Docente ayuda a armarlo.</a:t>
-            </a:r>
-          </a:p>
-          <a:p>
-            <a:pPr>
-              <a:spcAft>
-                <a:spcPts val="1000"/>
-              </a:spcAft>
-            </a:pPr>
-            <a:r>
-              <a:rPr sz="1500" b="0" i="0">
-                <a:solidFill>
-                  <a:srgbClr val="2B2B2B"/>
-                </a:solidFill>
-                <a:latin typeface="Calibri"/>
-              </a:rPr>
-              <a:t>–   </a:t>
-            </a:r>
-            <a:r>
-              <a:rPr sz="1500" b="1" i="0">
-                <a:solidFill>
-                  <a:srgbClr val="2B2B2B"/>
-                </a:solidFill>
-                <a:latin typeface="Calibri"/>
-              </a:rPr>
-              <a:t>Abran la guía del primer corte</a:t>
-            </a:r>
-            <a:r>
-              <a:rPr sz="1500" b="0" i="0">
-                <a:solidFill>
-                  <a:srgbClr val="2B2B2B"/>
-                </a:solidFill>
-                <a:latin typeface="Calibri"/>
-              </a:rPr>
-              <a:t> en `Clases/Recursos/ACAs/` — `Quiz (25%)` — y léanla completa, criterios incluidos: eso es lo que comprueba el </a:t>
-            </a:r>
-            <a:r>
-              <a:rPr sz="1500" b="1" i="0">
-                <a:solidFill>
-                  <a:srgbClr val="2B2B2B"/>
-                </a:solidFill>
-                <a:latin typeface="Calibri"/>
-              </a:rPr>
-              <a:t>Quiz</a:t>
-            </a:r>
-            <a:r>
-              <a:rPr sz="1500" b="0" i="0">
-                <a:solidFill>
-                  <a:srgbClr val="2B2B2B"/>
-                </a:solidFill>
-                <a:latin typeface="Calibri"/>
-              </a:rPr>
-              <a:t>.</a:t>
-            </a:r>
-          </a:p>
-          <a:p>
-            <a:pPr>
-              <a:spcAft>
-                <a:spcPts val="1000"/>
-              </a:spcAft>
-            </a:pPr>
-            <a:r>
-              <a:rPr sz="1500" b="0" i="0">
-                <a:solidFill>
-                  <a:srgbClr val="2B2B2B"/>
-                </a:solidFill>
-                <a:latin typeface="Calibri"/>
-              </a:rPr>
-              <a:t>–   </a:t>
-            </a:r>
-            <a:r>
-              <a:rPr sz="1500" b="1" i="0">
-                <a:solidFill>
-                  <a:srgbClr val="2B2B2B"/>
-                </a:solidFill>
-                <a:latin typeface="Calibri"/>
-              </a:rPr>
-              <a:t>Creen el documento del equipo</a:t>
-            </a:r>
-            <a:r>
-              <a:rPr sz="1500" b="0" i="0">
-                <a:solidFill>
-                  <a:srgbClr val="2B2B2B"/>
-                </a:solidFill>
-                <a:latin typeface="Calibri"/>
-              </a:rPr>
-              <a:t> en Google Docs con la plantilla APA CUN y compártanlo con todos los integrantes.</a:t>
-            </a:r>
-          </a:p>
-          <a:p>
-            <a:pPr>
-              <a:spcAft>
-                <a:spcPts val="1000"/>
-              </a:spcAft>
-            </a:pPr>
-            <a:r>
-              <a:rPr sz="1500" b="0" i="0">
-                <a:solidFill>
-                  <a:srgbClr val="2B2B2B"/>
-                </a:solidFill>
-                <a:latin typeface="Calibri"/>
-              </a:rPr>
-              <a:t>–   </a:t>
-            </a:r>
-            <a:r>
-              <a:rPr sz="1500" b="1" i="0">
-                <a:solidFill>
-                  <a:srgbClr val="2B2B2B"/>
-                </a:solidFill>
-                <a:latin typeface="Calibri"/>
-              </a:rPr>
-              <a:t>Traigan a la Sesión 02</a:t>
-            </a:r>
-            <a:r>
-              <a:rPr sz="1500" b="0" i="0">
-                <a:solidFill>
-                  <a:srgbClr val="2B2B2B"/>
-                </a:solidFill>
-                <a:latin typeface="Calibri"/>
-              </a:rPr>
-              <a:t> una idea de tema escrita </a:t>
-            </a:r>
-            <a:r>
-              <a:rPr sz="1500" b="1" i="0">
-                <a:solidFill>
-                  <a:srgbClr val="2B2B2B"/>
-                </a:solidFill>
-                <a:latin typeface="Calibri"/>
-              </a:rPr>
-              <a:t>en una frase</a:t>
-            </a:r>
-            <a:r>
-              <a:rPr sz="1500" b="0" i="0">
-                <a:solidFill>
-                  <a:srgbClr val="2B2B2B"/>
-                </a:solidFill>
-                <a:latin typeface="Calibri"/>
-              </a:rPr>
-              <a:t> y el contexto donde ocurre (empresa, aula, proceso).</a:t>
-            </a:r>
-          </a:p>
-          <a:p>
-            <a:pPr lvl="1">
-              <a:spcAft>
-                <a:spcPts val="600"/>
-              </a:spcAft>
-            </a:pPr>
-            <a:r>
-              <a:rPr sz="1400" b="0" i="0">
-                <a:solidFill>
-                  <a:srgbClr val="2B2B2B"/>
-                </a:solidFill>
-                <a:latin typeface="Calibri"/>
-              </a:rPr>
-              <a:t>●   Con eso trabajamos en clase. Quien llegue sin la frase se pasará la sesión viendo trabajar a los demás.</a:t>
-            </a:r>
-          </a:p>
-        </p:txBody>
-      </p:sp>
-      <p:sp>
-        <p:nvSpPr>
-          <p:cNvPr id="5" name="TextBox 4"/>
+              <a:rPr sz="1300" b="1" i="0">
+                <a:solidFill>
+                  <a:srgbClr val="2B2B2B"/>
+                </a:solidFill>
+                <a:latin typeface="Calibri"/>
+              </a:rPr>
+              <a:t>«¿Esta materia se pierde fácil?»</a:t>
+            </a:r>
+            <a:r>
+              <a:rPr sz="1300" b="0" i="0">
+                <a:solidFill>
+                  <a:srgbClr val="2B2B2B"/>
+                </a:solidFill>
+                <a:latin typeface="Calibri"/>
+              </a:rPr>
+              <a:t> No se pierde por dificultad: se pierde por entregar tarde o por entregar un documento que nadie leyó antes de subirlo. Quien trae avance cada semana llega al final con el anteproyecto prácticamente listo.</a:t>
+            </a:r>
+          </a:p>
+        </p:txBody>
+      </p:sp>
+      <p:sp>
+        <p:nvSpPr>
+          <p:cNvPr id="6" name="Rounded Rectangle 5"/>
+          <p:cNvSpPr/>
+          <p:nvPr/>
+        </p:nvSpPr>
+        <p:spPr>
+          <a:xfrm>
+            <a:off x="640080" y="3191256"/>
+            <a:ext cx="10911535" cy="1225296"/>
+          </a:xfrm>
+          <a:prstGeom prst="roundRect">
+            <a:avLst/>
+          </a:prstGeom>
+          <a:solidFill>
+            <a:srgbClr val="FDECD8"/>
+          </a:solidFill>
+          <a:ln>
+            <a:noFill/>
+          </a:ln>
+          <a:effectLst/>
+        </p:spPr>
+        <p:style>
+          <a:lnRef idx="1">
+            <a:schemeClr val="accent1"/>
+          </a:lnRef>
+          <a:fillRef idx="3">
+            <a:schemeClr val="accent1"/>
+          </a:fillRef>
+          <a:effectRef idx="2">
+            <a:schemeClr val="accent1"/>
+          </a:effectRef>
+          <a:fontRef idx="minor">
+            <a:schemeClr val="lt1"/>
+          </a:fontRef>
+        </p:style>
+        <p:txBody>
+          <a:bodyPr rtlCol="0" anchor="ctr"/>
+          <a:lstStyle/>
+          <a:p>
+            <a:pPr algn="ctr"/>
+          </a:p>
+        </p:txBody>
+      </p:sp>
+      <p:sp>
+        <p:nvSpPr>
+          <p:cNvPr id="7" name="TextBox 6"/>
           <p:cNvSpPr txBox="1"/>
           <p:nvPr/>
         </p:nvSpPr>
         <p:spPr>
           <a:xfrm>
-            <a:off x="11094415" y="6446520"/>
-            <a:ext cx="548640" cy="274320"/>
+            <a:off x="868680" y="3300984"/>
+            <a:ext cx="10454335" cy="1005840"/>
           </a:xfrm>
           <a:prstGeom prst="rect">
             <a:avLst/>
@@ -8153,29 +8022,97 @@
           </a:bodyPr>
           <a:lstStyle/>
           <a:p>
-            <a:pPr algn="r"/>
-            <a:r>
-              <a:rPr sz="1000" b="1" i="0">
-                <a:solidFill>
-                  <a:srgbClr val="8F989D"/>
-                </a:solidFill>
-                <a:latin typeface="Calibri"/>
-              </a:rPr>
-              <a:t>18</a:t>
-            </a:r>
-          </a:p>
-        </p:txBody>
-      </p:sp>
-      <p:sp>
-        <p:nvSpPr>
-          <p:cNvPr id="6" name="TextBox 5"/>
+            <a:r>
+              <a:rPr sz="1300" b="1" i="0">
+                <a:solidFill>
+                  <a:srgbClr val="0C2340"/>
+                </a:solidFill>
+                <a:latin typeface="Calibri"/>
+              </a:rPr>
+              <a:t>💡 Aclaración</a:t>
+            </a:r>
+          </a:p>
+          <a:p>
+            <a:pPr>
+              <a:spcBef>
+                <a:spcPts val="400"/>
+              </a:spcBef>
+            </a:pPr>
+            <a:r>
+              <a:rPr sz="1300" b="1" i="0">
+                <a:solidFill>
+                  <a:srgbClr val="2B2B2B"/>
+                </a:solidFill>
+                <a:latin typeface="Calibri"/>
+              </a:rPr>
+              <a:t>«¿Puedo trabajar solo?»</a:t>
+            </a:r>
+            <a:r>
+              <a:rPr sz="1300" b="0" i="0">
+                <a:solidFill>
+                  <a:srgbClr val="2B2B2B"/>
+                </a:solidFill>
+                <a:latin typeface="Calibri"/>
+              </a:rPr>
+              <a:t> Sí, pero el equipo es de máximo 3 y la carga de trabajo es la misma para uno que para tres. Decídanlo esta semana: después del primer corte no conviene cambiar de equipo ni de tema.</a:t>
+            </a:r>
+          </a:p>
+        </p:txBody>
+      </p:sp>
+      <p:sp>
+        <p:nvSpPr>
+          <p:cNvPr id="8" name="Rounded Rectangle 7"/>
+          <p:cNvSpPr/>
+          <p:nvPr/>
+        </p:nvSpPr>
+        <p:spPr>
+          <a:xfrm>
+            <a:off x="640080" y="4645152"/>
+            <a:ext cx="10911535" cy="1225296"/>
+          </a:xfrm>
+          <a:prstGeom prst="roundRect">
+            <a:avLst/>
+          </a:prstGeom>
+          <a:solidFill>
+            <a:srgbClr val="FBE4E4"/>
+          </a:solidFill>
+          <a:ln>
+            <a:noFill/>
+          </a:ln>
+          <a:effectLst/>
+        </p:spPr>
+        <p:style>
+          <a:lnRef idx="1">
+            <a:schemeClr val="accent1"/>
+          </a:lnRef>
+          <a:fillRef idx="3">
+            <a:schemeClr val="accent1"/>
+          </a:fillRef>
+          <a:effectRef idx="2">
+            <a:schemeClr val="accent1"/>
+          </a:effectRef>
+          <a:fontRef idx="minor">
+            <a:schemeClr val="lt1"/>
+          </a:fontRef>
+        </p:style>
+        <p:txBody>
+          <a:bodyPr rtlCol="0" anchor="ctr"/>
+          <a:lstStyle/>
+          <a:p>
+            <a:pPr algn="ctr"/>
+          </a:p>
+        </p:txBody>
+      </p:sp>
+      <p:sp>
+        <p:nvSpPr>
+          <p:cNvPr id="9" name="TextBox 8"/>
           <p:cNvSpPr txBox="1"/>
           <p:nvPr/>
         </p:nvSpPr>
         <p:spPr>
           <a:xfrm>
-            <a:off x="640080" y="5943600"/>
-            <a:ext cx="9997135" cy="457200"/>
+            <a:off x="868680" y="4754880"/>
+            <a:ext cx="10454335" cy="1005840"/>
           </a:xfrm>
           <a:prstGeom prst="rect">
             <a:avLst/>
@@ -8189,13 +8126,73 @@
           <a:lstStyle/>
           <a:p>
             <a:r>
-              <a:rPr sz="1200" b="0" i="1">
-                <a:solidFill>
-                  <a:srgbClr val="2B2B2B"/>
-                </a:solidFill>
-                <a:latin typeface="Calibri"/>
-              </a:rPr>
-              <a:t>Nada de esto se califica hoy, pero todo se nota en la Sesión 02: la clase avanza sobre lo que ustedes traigan escrito.</a:t>
+              <a:rPr sz="1300" b="1" i="0">
+                <a:solidFill>
+                  <a:srgbClr val="0C2340"/>
+                </a:solidFill>
+                <a:latin typeface="Calibri"/>
+              </a:rPr>
+              <a:t>⚠️ Importante</a:t>
+            </a:r>
+          </a:p>
+          <a:p>
+            <a:pPr>
+              <a:spcBef>
+                <a:spcPts val="400"/>
+              </a:spcBef>
+            </a:pPr>
+            <a:r>
+              <a:rPr sz="1300" b="1" i="0">
+                <a:solidFill>
+                  <a:srgbClr val="2B2B2B"/>
+                </a:solidFill>
+                <a:latin typeface="Calibri"/>
+              </a:rPr>
+              <a:t>«¿Sirve un trabajo de otro semestre?»</a:t>
+            </a:r>
+            <a:r>
+              <a:rPr sz="1300" b="0" i="0">
+                <a:solidFill>
+                  <a:srgbClr val="2B2B2B"/>
+                </a:solidFill>
+                <a:latin typeface="Calibri"/>
+              </a:rPr>
+              <a:t> Como punto de partida sí, si usted lo declara y lo reformula para este curso. Entregarlo tal cual como si fuera nuevo también es plagio y entra en el mismo debido proceso.</a:t>
+            </a:r>
+          </a:p>
+        </p:txBody>
+      </p:sp>
+      <p:sp>
+        <p:nvSpPr>
+          <p:cNvPr id="10" name="TextBox 9"/>
+          <p:cNvSpPr txBox="1"/>
+          <p:nvPr/>
+        </p:nvSpPr>
+        <p:spPr>
+          <a:xfrm>
+            <a:off x="11094415" y="6446520"/>
+            <a:ext cx="548640" cy="274320"/>
+          </a:xfrm>
+          <a:prstGeom prst="rect">
+            <a:avLst/>
+          </a:prstGeom>
+          <a:noFill/>
+        </p:spPr>
+        <p:txBody>
+          <a:bodyPr wrap="square" anchor="t" lIns="0" rIns="0" tIns="0" bIns="0">
+            <a:spAutoFit/>
+          </a:bodyPr>
+          <a:lstStyle/>
+          <a:p>
+            <a:pPr algn="r"/>
+            <a:r>
+              <a:rPr sz="1000" b="1" i="0">
+                <a:solidFill>
+                  <a:srgbClr val="8F989D"/>
+                </a:solidFill>
+                <a:latin typeface="Calibri"/>
+              </a:rPr>
+              <a:t>18</a:t>
             </a:r>
           </a:p>
         </p:txBody>
@@ -8300,7 +8297,7 @@
                 </a:solidFill>
                 <a:latin typeface="Calibri"/>
               </a:rPr>
-              <a:t>Las preguntas que siempre salen el primer día</a:t>
+              <a:t>ACUERDOS DE TRABAJO</a:t>
             </a:r>
           </a:p>
         </p:txBody>
@@ -8314,7 +8311,7 @@
         <p:spPr>
           <a:xfrm>
             <a:off x="640080" y="1737360"/>
-            <a:ext cx="10911535" cy="1225296"/>
+            <a:ext cx="10911535" cy="713232"/>
           </a:xfrm>
           <a:prstGeom prst="roundRect">
             <a:avLst/>
@@ -8358,7 +8355,7 @@
         <p:spPr>
           <a:xfrm>
             <a:off x="868680" y="1847088"/>
-            <a:ext cx="10454335" cy="1005840"/>
+            <a:ext cx="10454335" cy="493776"/>
           </a:xfrm>
           <a:prstGeom prst="rect">
             <a:avLst/>
@@ -8394,7 +8391,7 @@
                 </a:solidFill>
                 <a:latin typeface="Calibri"/>
               </a:rPr>
-              <a:t>«¿Esta materia se pierde fácil?»</a:t>
+              <a:t>Entrega oficial: CDigital.</a:t>
             </a:r>
             <a:r>
               <a:rPr sz="1300" b="0" i="0">
@@ -8403,7 +8400,7 @@
                 </a:solidFill>
                 <a:latin typeface="Calibri"/>
               </a:rPr>
-              <a:t> No se pierde por dificultad: se pierde por entregar tarde o por entregar un documento que nadie leyó antes de subirlo. Quien trae avance cada semana llega al final con el anteproyecto prácticamente listo.</a:t>
+              <a:t> Lo que no esté ahí, no está entregado.</a:t>
             </a:r>
           </a:p>
         </p:txBody>
@@ -8416,8 +8413,8 @@
         </p:nvSpPr>
         <p:spPr>
           <a:xfrm>
-            <a:off x="640080" y="3191256"/>
-            <a:ext cx="10911535" cy="1225296"/>
+            <a:off x="640080" y="2679191"/>
+            <a:ext cx="10911535" cy="969264"/>
           </a:xfrm>
           <a:prstGeom prst="roundRect">
             <a:avLst/>
@@ -8460,8 +8457,8 @@
         </p:nvSpPr>
         <p:spPr>
           <a:xfrm>
-            <a:off x="868680" y="3300984"/>
-            <a:ext cx="10454335" cy="1005840"/>
+            <a:off x="868680" y="2788920"/>
+            <a:ext cx="10454335" cy="749808"/>
           </a:xfrm>
           <a:prstGeom prst="rect">
             <a:avLst/>
@@ -8491,22 +8488,13 @@
               </a:spcBef>
             </a:pPr>
             <a:r>
-              <a:rPr sz="1300" b="1" i="0">
-                <a:solidFill>
-                  <a:srgbClr val="2B2B2B"/>
-                </a:solidFill>
-                <a:latin typeface="Calibri"/>
-              </a:rPr>
-              <a:t>«¿Puedo trabajar solo?»</a:t>
-            </a:r>
-            <a:r>
               <a:rPr sz="1300" b="0" i="0">
                 <a:solidFill>
                   <a:srgbClr val="2B2B2B"/>
                 </a:solidFill>
                 <a:latin typeface="Calibri"/>
               </a:rPr>
-              <a:t> Sí, pero el equipo es de máximo 3 y la carga de trabajo es la misma para uno que para tres. Decídanlo esta semana: después del primer corte no conviene cambiar de equipo ni de tema.</a:t>
+              <a:t>Las tutorías por grupo se acuerdan en la semana con el Docente (no hay atención espontánea sin cita).</a:t>
             </a:r>
           </a:p>
         </p:txBody>
@@ -8519,14 +8507,14 @@
         </p:nvSpPr>
         <p:spPr>
           <a:xfrm>
-            <a:off x="640080" y="4645152"/>
-            <a:ext cx="10911535" cy="1225296"/>
+            <a:off x="640080" y="3877056"/>
+            <a:ext cx="10911535" cy="713232"/>
           </a:xfrm>
           <a:prstGeom prst="roundRect">
             <a:avLst/>
           </a:prstGeom>
           <a:solidFill>
-            <a:srgbClr val="FBE4E4"/>
+            <a:srgbClr val="FDECD8"/>
           </a:solidFill>
           <a:ln>
             <a:noFill/>
@@ -8563,8 +8551,8 @@
         </p:nvSpPr>
         <p:spPr>
           <a:xfrm>
-            <a:off x="868680" y="4754880"/>
-            <a:ext cx="10454335" cy="1005840"/>
+            <a:off x="868680" y="3986784"/>
+            <a:ext cx="10454335" cy="493776"/>
           </a:xfrm>
           <a:prstGeom prst="rect">
             <a:avLst/>
@@ -8584,7 +8572,7 @@
                 </a:solidFill>
                 <a:latin typeface="Calibri"/>
               </a:rPr>
-              <a:t>⚠️ Importante</a:t>
+              <a:t>💡 Aclaración</a:t>
             </a:r>
           </a:p>
           <a:p>
@@ -8594,13 +8582,22 @@
               </a:spcBef>
             </a:pPr>
             <a:r>
+              <a:rPr sz="1300" b="0" i="0">
+                <a:solidFill>
+                  <a:srgbClr val="2B2B2B"/>
+                </a:solidFill>
+                <a:latin typeface="Calibri"/>
+              </a:rPr>
+              <a:t>Traer el avance </a:t>
+            </a:r>
+            <a:r>
               <a:rPr sz="1300" b="1" i="0">
                 <a:solidFill>
                   <a:srgbClr val="2B2B2B"/>
                 </a:solidFill>
                 <a:latin typeface="Calibri"/>
               </a:rPr>
-              <a:t>«¿Sirve un trabajo de otro semestre?»</a:t>
+              <a:t>escrito</a:t>
             </a:r>
             <a:r>
               <a:rPr sz="1300" b="0" i="0">
@@ -8609,14 +8606,126 @@
                 </a:solidFill>
                 <a:latin typeface="Calibri"/>
               </a:rPr>
-              <a:t> Como punto de partida sí, si usted lo declara y lo reformula para este curso. Entregarlo tal cual como si fuera nuevo también es plagio y entra en el mismo debido proceso.</a:t>
-            </a:r>
-          </a:p>
-        </p:txBody>
-      </p:sp>
-      <p:sp>
-        <p:nvSpPr>
-          <p:cNvPr id="10" name="TextBox 9"/>
+              <a:t> a cada encuentro: se trabaja sobre lo que ya existe.</a:t>
+            </a:r>
+          </a:p>
+        </p:txBody>
+      </p:sp>
+      <p:sp>
+        <p:nvSpPr>
+          <p:cNvPr id="10" name="Rounded Rectangle 9"/>
+          <p:cNvSpPr/>
+          <p:nvPr/>
+        </p:nvSpPr>
+        <p:spPr>
+          <a:xfrm>
+            <a:off x="640080" y="4818888"/>
+            <a:ext cx="10911535" cy="713232"/>
+          </a:xfrm>
+          <a:prstGeom prst="roundRect">
+            <a:avLst/>
+          </a:prstGeom>
+          <a:solidFill>
+            <a:srgbClr val="FBE4E4"/>
+          </a:solidFill>
+          <a:ln>
+            <a:noFill/>
+          </a:ln>
+          <a:effectLst/>
+        </p:spPr>
+        <p:style>
+          <a:lnRef idx="1">
+            <a:schemeClr val="accent1"/>
+          </a:lnRef>
+          <a:fillRef idx="3">
+            <a:schemeClr val="accent1"/>
+          </a:fillRef>
+          <a:effectRef idx="2">
+            <a:schemeClr val="accent1"/>
+          </a:effectRef>
+          <a:fontRef idx="minor">
+            <a:schemeClr val="lt1"/>
+          </a:fontRef>
+        </p:style>
+        <p:txBody>
+          <a:bodyPr rtlCol="0" anchor="ctr"/>
+          <a:lstStyle/>
+          <a:p>
+            <a:pPr algn="ctr"/>
+          </a:p>
+        </p:txBody>
+      </p:sp>
+      <p:sp>
+        <p:nvSpPr>
+          <p:cNvPr id="11" name="TextBox 10"/>
+          <p:cNvSpPr txBox="1"/>
+          <p:nvPr/>
+        </p:nvSpPr>
+        <p:spPr>
+          <a:xfrm>
+            <a:off x="868680" y="4928616"/>
+            <a:ext cx="10454335" cy="493776"/>
+          </a:xfrm>
+          <a:prstGeom prst="rect">
+            <a:avLst/>
+          </a:prstGeom>
+          <a:noFill/>
+        </p:spPr>
+        <p:txBody>
+          <a:bodyPr wrap="square" anchor="t" lIns="0" rIns="0" tIns="0" bIns="0">
+            <a:spAutoFit/>
+          </a:bodyPr>
+          <a:lstStyle/>
+          <a:p>
+            <a:r>
+              <a:rPr sz="1300" b="1" i="0">
+                <a:solidFill>
+                  <a:srgbClr val="0C2340"/>
+                </a:solidFill>
+                <a:latin typeface="Calibri"/>
+              </a:rPr>
+              <a:t>⚠️ Importante</a:t>
+            </a:r>
+          </a:p>
+          <a:p>
+            <a:pPr>
+              <a:spcBef>
+                <a:spcPts val="400"/>
+              </a:spcBef>
+            </a:pPr>
+            <a:r>
+              <a:rPr sz="1300" b="0" i="0">
+                <a:solidFill>
+                  <a:srgbClr val="2B2B2B"/>
+                </a:solidFill>
+                <a:latin typeface="Calibri"/>
+              </a:rPr>
+              <a:t>Integridad académica: citar siempre en </a:t>
+            </a:r>
+            <a:r>
+              <a:rPr sz="1300" b="1" i="0">
+                <a:solidFill>
+                  <a:srgbClr val="2B2B2B"/>
+                </a:solidFill>
+                <a:latin typeface="Calibri"/>
+              </a:rPr>
+              <a:t>APA 7</a:t>
+            </a:r>
+            <a:r>
+              <a:rPr sz="1300" b="0" i="0">
+                <a:solidFill>
+                  <a:srgbClr val="2B2B2B"/>
+                </a:solidFill>
+                <a:latin typeface="Calibri"/>
+              </a:rPr>
+              <a:t>. El plagio tiene debido proceso.</a:t>
+            </a:r>
+          </a:p>
+        </p:txBody>
+      </p:sp>
+      <p:sp>
+        <p:nvSpPr>
+          <p:cNvPr id="12" name="TextBox 11"/>
           <p:cNvSpPr txBox="1"/>
           <p:nvPr/>
         </p:nvSpPr>
@@ -8909,7 +9018,7 @@
                 </a:solidFill>
                 <a:latin typeface="Calibri"/>
               </a:rPr>
-              <a:t> nos presentamos en el tablero colaborativo.</a:t>
+              <a:t> arrancamos con un juego de 8 minutos —«dos verdades y una mentira»— y hay premio.</a:t>
             </a:r>
           </a:p>
           <a:p>
@@ -9117,65 +9226,21 @@
                 </a:solidFill>
                 <a:latin typeface="Calibri"/>
               </a:rPr>
-              <a:t>ACUERDOS DE TRABAJO</a:t>
-            </a:r>
-          </a:p>
-        </p:txBody>
-      </p:sp>
-      <p:sp>
-        <p:nvSpPr>
-          <p:cNvPr id="4" name="Rounded Rectangle 3"/>
-          <p:cNvSpPr/>
-          <p:nvPr/>
-        </p:nvSpPr>
-        <p:spPr>
-          <a:xfrm>
-            <a:off x="640080" y="1737360"/>
-            <a:ext cx="10911535" cy="713232"/>
-          </a:xfrm>
-          <a:prstGeom prst="roundRect">
-            <a:avLst/>
-          </a:prstGeom>
-          <a:solidFill>
-            <a:srgbClr val="E8F5EC"/>
-          </a:solidFill>
-          <a:ln>
-            <a:noFill/>
-          </a:ln>
-          <a:effectLst/>
-        </p:spPr>
-        <p:style>
-          <a:lnRef idx="1">
-            <a:schemeClr val="accent1"/>
-          </a:lnRef>
-          <a:fillRef idx="3">
-            <a:schemeClr val="accent1"/>
-          </a:fillRef>
-          <a:effectRef idx="2">
-            <a:schemeClr val="accent1"/>
-          </a:effectRef>
-          <a:fontRef idx="minor">
-            <a:schemeClr val="lt1"/>
-          </a:fontRef>
-        </p:style>
-        <p:txBody>
-          <a:bodyPr rtlCol="0" anchor="ctr"/>
-          <a:lstStyle/>
-          <a:p>
-            <a:pPr algn="ctr"/>
-          </a:p>
-        </p:txBody>
-      </p:sp>
-      <p:sp>
-        <p:nvSpPr>
-          <p:cNvPr id="5" name="TextBox 4"/>
+              <a:t>PARA LA PRÓXIMA SESIÓN</a:t>
+            </a:r>
+          </a:p>
+        </p:txBody>
+      </p:sp>
+      <p:sp>
+        <p:nvSpPr>
+          <p:cNvPr id="4" name="TextBox 3"/>
           <p:cNvSpPr txBox="1"/>
           <p:nvPr/>
         </p:nvSpPr>
         <p:spPr>
           <a:xfrm>
-            <a:off x="868680" y="1847088"/>
-            <a:ext cx="10454335" cy="493776"/>
+            <a:off x="640080" y="1691639"/>
+            <a:ext cx="10911535" cy="4617720"/>
           </a:xfrm>
           <a:prstGeom prst="rect">
             <a:avLst/>
@@ -9188,364 +9253,94 @@
           </a:bodyPr>
           <a:lstStyle/>
           <a:p>
-            <a:r>
-              <a:rPr sz="1300" b="1" i="0">
-                <a:solidFill>
-                  <a:srgbClr val="0C2340"/>
-                </a:solidFill>
-                <a:latin typeface="Calibri"/>
-              </a:rPr>
-              <a:t>ℹ️ Nota institucional</a:t>
-            </a:r>
-          </a:p>
-          <a:p>
             <a:pPr>
-              <a:spcBef>
-                <a:spcPts val="400"/>
-              </a:spcBef>
+              <a:spcAft>
+                <a:spcPts val="1000"/>
+              </a:spcAft>
             </a:pPr>
             <a:r>
-              <a:rPr sz="1300" b="1" i="0">
-                <a:solidFill>
-                  <a:srgbClr val="2B2B2B"/>
-                </a:solidFill>
-                <a:latin typeface="Calibri"/>
-              </a:rPr>
-              <a:t>Entrega oficial: CDigital.</a:t>
-            </a:r>
-            <a:r>
-              <a:rPr sz="1300" b="0" i="0">
-                <a:solidFill>
-                  <a:srgbClr val="2B2B2B"/>
-                </a:solidFill>
-                <a:latin typeface="Calibri"/>
-              </a:rPr>
-              <a:t> Lo que no esté ahí, no está entregado.</a:t>
-            </a:r>
-          </a:p>
-        </p:txBody>
-      </p:sp>
-      <p:sp>
-        <p:nvSpPr>
-          <p:cNvPr id="6" name="Rounded Rectangle 5"/>
-          <p:cNvSpPr/>
-          <p:nvPr/>
-        </p:nvSpPr>
-        <p:spPr>
-          <a:xfrm>
-            <a:off x="640080" y="2679191"/>
-            <a:ext cx="10911535" cy="969264"/>
-          </a:xfrm>
-          <a:prstGeom prst="roundRect">
-            <a:avLst/>
-          </a:prstGeom>
-          <a:solidFill>
-            <a:srgbClr val="FDECD8"/>
-          </a:solidFill>
-          <a:ln>
-            <a:noFill/>
-          </a:ln>
-          <a:effectLst/>
-        </p:spPr>
-        <p:style>
-          <a:lnRef idx="1">
-            <a:schemeClr val="accent1"/>
-          </a:lnRef>
-          <a:fillRef idx="3">
-            <a:schemeClr val="accent1"/>
-          </a:fillRef>
-          <a:effectRef idx="2">
-            <a:schemeClr val="accent1"/>
-          </a:effectRef>
-          <a:fontRef idx="minor">
-            <a:schemeClr val="lt1"/>
-          </a:fontRef>
-        </p:style>
-        <p:txBody>
-          <a:bodyPr rtlCol="0" anchor="ctr"/>
-          <a:lstStyle/>
-          <a:p>
-            <a:pPr algn="ctr"/>
-          </a:p>
-        </p:txBody>
-      </p:sp>
-      <p:sp>
-        <p:nvSpPr>
-          <p:cNvPr id="7" name="TextBox 6"/>
-          <p:cNvSpPr txBox="1"/>
-          <p:nvPr/>
-        </p:nvSpPr>
-        <p:spPr>
-          <a:xfrm>
-            <a:off x="868680" y="2788920"/>
-            <a:ext cx="10454335" cy="749808"/>
-          </a:xfrm>
-          <a:prstGeom prst="rect">
-            <a:avLst/>
-          </a:prstGeom>
-          <a:noFill/>
-        </p:spPr>
-        <p:txBody>
-          <a:bodyPr wrap="square" anchor="t" lIns="0" rIns="0" tIns="0" bIns="0">
-            <a:spAutoFit/>
-          </a:bodyPr>
-          <a:lstStyle/>
-          <a:p>
-            <a:r>
-              <a:rPr sz="1300" b="1" i="0">
-                <a:solidFill>
-                  <a:srgbClr val="0C2340"/>
-                </a:solidFill>
-                <a:latin typeface="Calibri"/>
-              </a:rPr>
-              <a:t>💡 Aclaración</a:t>
+              <a:rPr sz="1600" b="0" i="0">
+                <a:solidFill>
+                  <a:srgbClr val="2B2B2B"/>
+                </a:solidFill>
+                <a:latin typeface="Calibri"/>
+              </a:rPr>
+              <a:t>–   </a:t>
+            </a:r>
+            <a:r>
+              <a:rPr sz="1600" b="1" i="0">
+                <a:solidFill>
+                  <a:srgbClr val="2B2B2B"/>
+                </a:solidFill>
+                <a:latin typeface="Calibri"/>
+              </a:rPr>
+              <a:t>Lectura autónoma:</a:t>
+            </a:r>
+            <a:r>
+              <a:rPr sz="1600" b="0" i="0">
+                <a:solidFill>
+                  <a:srgbClr val="2B2B2B"/>
+                </a:solidFill>
+                <a:latin typeface="Calibri"/>
+              </a:rPr>
+              <a:t> ESP329 U1 (Fundamentos y enfoque de investigación) — la retomamos al abrir la Sesión 02.</a:t>
             </a:r>
           </a:p>
           <a:p>
             <a:pPr>
-              <a:spcBef>
-                <a:spcPts val="400"/>
-              </a:spcBef>
+              <a:spcAft>
+                <a:spcPts val="1000"/>
+              </a:spcAft>
             </a:pPr>
             <a:r>
-              <a:rPr sz="1300" b="0" i="0">
-                <a:solidFill>
-                  <a:srgbClr val="2B2B2B"/>
-                </a:solidFill>
-                <a:latin typeface="Calibri"/>
-              </a:rPr>
-              <a:t>Las tutorías por grupo se acuerdan en la semana con el Docente (no hay atención espontánea sin cita).</a:t>
-            </a:r>
-          </a:p>
-        </p:txBody>
-      </p:sp>
-      <p:sp>
-        <p:nvSpPr>
-          <p:cNvPr id="8" name="Rounded Rectangle 7"/>
-          <p:cNvSpPr/>
-          <p:nvPr/>
-        </p:nvSpPr>
-        <p:spPr>
-          <a:xfrm>
-            <a:off x="640080" y="3877056"/>
-            <a:ext cx="10911535" cy="713232"/>
-          </a:xfrm>
-          <a:prstGeom prst="roundRect">
-            <a:avLst/>
-          </a:prstGeom>
-          <a:solidFill>
-            <a:srgbClr val="FDECD8"/>
-          </a:solidFill>
-          <a:ln>
-            <a:noFill/>
-          </a:ln>
-          <a:effectLst/>
-        </p:spPr>
-        <p:style>
-          <a:lnRef idx="1">
-            <a:schemeClr val="accent1"/>
-          </a:lnRef>
-          <a:fillRef idx="3">
-            <a:schemeClr val="accent1"/>
-          </a:fillRef>
-          <a:effectRef idx="2">
-            <a:schemeClr val="accent1"/>
-          </a:effectRef>
-          <a:fontRef idx="minor">
-            <a:schemeClr val="lt1"/>
-          </a:fontRef>
-        </p:style>
-        <p:txBody>
-          <a:bodyPr rtlCol="0" anchor="ctr"/>
-          <a:lstStyle/>
-          <a:p>
-            <a:pPr algn="ctr"/>
-          </a:p>
-        </p:txBody>
-      </p:sp>
-      <p:sp>
-        <p:nvSpPr>
-          <p:cNvPr id="9" name="TextBox 8"/>
-          <p:cNvSpPr txBox="1"/>
-          <p:nvPr/>
-        </p:nvSpPr>
-        <p:spPr>
-          <a:xfrm>
-            <a:off x="868680" y="3986784"/>
-            <a:ext cx="10454335" cy="493776"/>
-          </a:xfrm>
-          <a:prstGeom prst="rect">
-            <a:avLst/>
-          </a:prstGeom>
-          <a:noFill/>
-        </p:spPr>
-        <p:txBody>
-          <a:bodyPr wrap="square" anchor="t" lIns="0" rIns="0" tIns="0" bIns="0">
-            <a:spAutoFit/>
-          </a:bodyPr>
-          <a:lstStyle/>
-          <a:p>
-            <a:r>
-              <a:rPr sz="1300" b="1" i="0">
-                <a:solidFill>
-                  <a:srgbClr val="0C2340"/>
-                </a:solidFill>
-                <a:latin typeface="Calibri"/>
-              </a:rPr>
-              <a:t>💡 Aclaración</a:t>
+              <a:rPr sz="1600" b="0" i="0">
+                <a:solidFill>
+                  <a:srgbClr val="2B2B2B"/>
+                </a:solidFill>
+                <a:latin typeface="Calibri"/>
+              </a:rPr>
+              <a:t>–   Revisar la </a:t>
+            </a:r>
+            <a:r>
+              <a:rPr sz="1600" b="1" i="0">
+                <a:solidFill>
+                  <a:srgbClr val="2B2B2B"/>
+                </a:solidFill>
+                <a:latin typeface="Calibri"/>
+              </a:rPr>
+              <a:t>Presentación del Curso</a:t>
+            </a:r>
+            <a:r>
+              <a:rPr sz="1600" b="0" i="0">
+                <a:solidFill>
+                  <a:srgbClr val="2B2B2B"/>
+                </a:solidFill>
+                <a:latin typeface="Calibri"/>
+              </a:rPr>
+              <a:t> completa (fechas, evaluación, contenido de todas las sesiones).</a:t>
             </a:r>
           </a:p>
           <a:p>
             <a:pPr>
-              <a:spcBef>
-                <a:spcPts val="400"/>
-              </a:spcBef>
+              <a:spcAft>
+                <a:spcPts val="1000"/>
+              </a:spcAft>
             </a:pPr>
             <a:r>
-              <a:rPr sz="1300" b="0" i="0">
-                <a:solidFill>
-                  <a:srgbClr val="2B2B2B"/>
-                </a:solidFill>
-                <a:latin typeface="Calibri"/>
-              </a:rPr>
-              <a:t>Traer el avance </a:t>
-            </a:r>
-            <a:r>
-              <a:rPr sz="1300" b="1" i="0">
-                <a:solidFill>
-                  <a:srgbClr val="2B2B2B"/>
-                </a:solidFill>
-                <a:latin typeface="Calibri"/>
-              </a:rPr>
-              <a:t>escrito</a:t>
-            </a:r>
-            <a:r>
-              <a:rPr sz="1300" b="0" i="0">
-                <a:solidFill>
-                  <a:srgbClr val="2B2B2B"/>
-                </a:solidFill>
-                <a:latin typeface="Calibri"/>
-              </a:rPr>
-              <a:t> a cada encuentro: se trabaja sobre lo que ya existe.</a:t>
-            </a:r>
-          </a:p>
-        </p:txBody>
-      </p:sp>
-      <p:sp>
-        <p:nvSpPr>
-          <p:cNvPr id="10" name="Rounded Rectangle 9"/>
-          <p:cNvSpPr/>
-          <p:nvPr/>
-        </p:nvSpPr>
-        <p:spPr>
-          <a:xfrm>
-            <a:off x="640080" y="4818888"/>
-            <a:ext cx="10911535" cy="713232"/>
-          </a:xfrm>
-          <a:prstGeom prst="roundRect">
-            <a:avLst/>
-          </a:prstGeom>
-          <a:solidFill>
-            <a:srgbClr val="FBE4E4"/>
-          </a:solidFill>
-          <a:ln>
-            <a:noFill/>
-          </a:ln>
-          <a:effectLst/>
-        </p:spPr>
-        <p:style>
-          <a:lnRef idx="1">
-            <a:schemeClr val="accent1"/>
-          </a:lnRef>
-          <a:fillRef idx="3">
-            <a:schemeClr val="accent1"/>
-          </a:fillRef>
-          <a:effectRef idx="2">
-            <a:schemeClr val="accent1"/>
-          </a:effectRef>
-          <a:fontRef idx="minor">
-            <a:schemeClr val="lt1"/>
-          </a:fontRef>
-        </p:style>
-        <p:txBody>
-          <a:bodyPr rtlCol="0" anchor="ctr"/>
-          <a:lstStyle/>
-          <a:p>
-            <a:pPr algn="ctr"/>
-          </a:p>
-        </p:txBody>
-      </p:sp>
-      <p:sp>
-        <p:nvSpPr>
-          <p:cNvPr id="11" name="TextBox 10"/>
-          <p:cNvSpPr txBox="1"/>
-          <p:nvPr/>
-        </p:nvSpPr>
-        <p:spPr>
-          <a:xfrm>
-            <a:off x="868680" y="4928616"/>
-            <a:ext cx="10454335" cy="493776"/>
-          </a:xfrm>
-          <a:prstGeom prst="rect">
-            <a:avLst/>
-          </a:prstGeom>
-          <a:noFill/>
-        </p:spPr>
-        <p:txBody>
-          <a:bodyPr wrap="square" anchor="t" lIns="0" rIns="0" tIns="0" bIns="0">
-            <a:spAutoFit/>
-          </a:bodyPr>
-          <a:lstStyle/>
-          <a:p>
-            <a:r>
-              <a:rPr sz="1300" b="1" i="0">
-                <a:solidFill>
-                  <a:srgbClr val="0C2340"/>
-                </a:solidFill>
-                <a:latin typeface="Calibri"/>
-              </a:rPr>
-              <a:t>⚠️ Importante</a:t>
-            </a:r>
-          </a:p>
-          <a:p>
-            <a:pPr>
-              <a:spcBef>
-                <a:spcPts val="400"/>
-              </a:spcBef>
-            </a:pPr>
-            <a:r>
-              <a:rPr sz="1300" b="0" i="0">
-                <a:solidFill>
-                  <a:srgbClr val="2B2B2B"/>
-                </a:solidFill>
-                <a:latin typeface="Calibri"/>
-              </a:rPr>
-              <a:t>Integridad académica: citar siempre en </a:t>
-            </a:r>
-            <a:r>
-              <a:rPr sz="1300" b="1" i="0">
-                <a:solidFill>
-                  <a:srgbClr val="2B2B2B"/>
-                </a:solidFill>
-                <a:latin typeface="Calibri"/>
-              </a:rPr>
-              <a:t>APA 7</a:t>
-            </a:r>
-            <a:r>
-              <a:rPr sz="1300" b="0" i="0">
-                <a:solidFill>
-                  <a:srgbClr val="2B2B2B"/>
-                </a:solidFill>
-                <a:latin typeface="Calibri"/>
-              </a:rPr>
-              <a:t>. El plagio tiene debido proceso.</a:t>
-            </a:r>
-          </a:p>
-        </p:txBody>
-      </p:sp>
-      <p:sp>
-        <p:nvSpPr>
-          <p:cNvPr id="12" name="TextBox 11"/>
+              <a:rPr sz="1600" b="0" i="0">
+                <a:solidFill>
+                  <a:srgbClr val="2B2B2B"/>
+                </a:solidFill>
+                <a:latin typeface="Calibri"/>
+              </a:rPr>
+              <a:t>–   Abrir los enunciados de `Clases/Recursos/ACAs/`: son la guía escrita de lo que evalúa cada corte.</a:t>
+            </a:r>
+          </a:p>
+        </p:txBody>
+      </p:sp>
+      <p:sp>
+        <p:nvSpPr>
+          <p:cNvPr id="5" name="TextBox 4"/>
           <p:cNvSpPr txBox="1"/>
           <p:nvPr/>
         </p:nvSpPr>
@@ -9613,253 +9408,6 @@
         <p:spPr>
           <a:xfrm>
             <a:off x="0" y="0"/>
-            <a:ext cx="12191695" cy="1188720"/>
-          </a:xfrm>
-          <a:prstGeom prst="rect">
-            <a:avLst/>
-          </a:prstGeom>
-          <a:solidFill>
-            <a:srgbClr val="0C2340"/>
-          </a:solidFill>
-          <a:ln>
-            <a:noFill/>
-          </a:ln>
-          <a:effectLst/>
-        </p:spPr>
-        <p:style>
-          <a:lnRef idx="1">
-            <a:schemeClr val="accent1"/>
-          </a:lnRef>
-          <a:fillRef idx="3">
-            <a:schemeClr val="accent1"/>
-          </a:fillRef>
-          <a:effectRef idx="2">
-            <a:schemeClr val="accent1"/>
-          </a:effectRef>
-          <a:fontRef idx="minor">
-            <a:schemeClr val="lt1"/>
-          </a:fontRef>
-        </p:style>
-        <p:txBody>
-          <a:bodyPr rtlCol="0" anchor="ctr"/>
-          <a:lstStyle/>
-          <a:p>
-            <a:pPr algn="ctr"/>
-          </a:p>
-        </p:txBody>
-      </p:sp>
-      <p:sp>
-        <p:nvSpPr>
-          <p:cNvPr id="3" name="TextBox 2"/>
-          <p:cNvSpPr txBox="1"/>
-          <p:nvPr/>
-        </p:nvSpPr>
-        <p:spPr>
-          <a:xfrm>
-            <a:off x="640080" y="0"/>
-            <a:ext cx="9082735" cy="1188720"/>
-          </a:xfrm>
-          <a:prstGeom prst="rect">
-            <a:avLst/>
-          </a:prstGeom>
-          <a:noFill/>
-        </p:spPr>
-        <p:txBody>
-          <a:bodyPr wrap="square" anchor="ctr" lIns="0" rIns="0" tIns="0" bIns="0">
-            <a:spAutoFit/>
-          </a:bodyPr>
-          <a:lstStyle/>
-          <a:p>
-            <a:pPr algn="ctr"/>
-            <a:r>
-              <a:rPr sz="2600" b="1" i="0">
-                <a:solidFill>
-                  <a:srgbClr val="FFFFFF"/>
-                </a:solidFill>
-                <a:latin typeface="Calibri"/>
-              </a:rPr>
-              <a:t>PARA LA PRÓXIMA SESIÓN</a:t>
-            </a:r>
-          </a:p>
-        </p:txBody>
-      </p:sp>
-      <p:sp>
-        <p:nvSpPr>
-          <p:cNvPr id="4" name="TextBox 3"/>
-          <p:cNvSpPr txBox="1"/>
-          <p:nvPr/>
-        </p:nvSpPr>
-        <p:spPr>
-          <a:xfrm>
-            <a:off x="640080" y="1691639"/>
-            <a:ext cx="10911535" cy="4617720"/>
-          </a:xfrm>
-          <a:prstGeom prst="rect">
-            <a:avLst/>
-          </a:prstGeom>
-          <a:noFill/>
-        </p:spPr>
-        <p:txBody>
-          <a:bodyPr wrap="square" anchor="t" lIns="0" rIns="0" tIns="0" bIns="0">
-            <a:spAutoFit/>
-          </a:bodyPr>
-          <a:lstStyle/>
-          <a:p>
-            <a:pPr>
-              <a:spcAft>
-                <a:spcPts val="1000"/>
-              </a:spcAft>
-            </a:pPr>
-            <a:r>
-              <a:rPr sz="1600" b="0" i="0">
-                <a:solidFill>
-                  <a:srgbClr val="2B2B2B"/>
-                </a:solidFill>
-                <a:latin typeface="Calibri"/>
-              </a:rPr>
-              <a:t>–   </a:t>
-            </a:r>
-            <a:r>
-              <a:rPr sz="1600" b="1" i="0">
-                <a:solidFill>
-                  <a:srgbClr val="2B2B2B"/>
-                </a:solidFill>
-                <a:latin typeface="Calibri"/>
-              </a:rPr>
-              <a:t>Lectura autónoma:</a:t>
-            </a:r>
-            <a:r>
-              <a:rPr sz="1600" b="0" i="0">
-                <a:solidFill>
-                  <a:srgbClr val="2B2B2B"/>
-                </a:solidFill>
-                <a:latin typeface="Calibri"/>
-              </a:rPr>
-              <a:t> ESP329 U1 (Fundamentos y enfoque de investigación) — la retomamos al abrir la Sesión 02.</a:t>
-            </a:r>
-          </a:p>
-          <a:p>
-            <a:pPr>
-              <a:spcAft>
-                <a:spcPts val="1000"/>
-              </a:spcAft>
-            </a:pPr>
-            <a:r>
-              <a:rPr sz="1600" b="0" i="0">
-                <a:solidFill>
-                  <a:srgbClr val="2B2B2B"/>
-                </a:solidFill>
-                <a:latin typeface="Calibri"/>
-              </a:rPr>
-              <a:t>–   Revisar la </a:t>
-            </a:r>
-            <a:r>
-              <a:rPr sz="1600" b="1" i="0">
-                <a:solidFill>
-                  <a:srgbClr val="2B2B2B"/>
-                </a:solidFill>
-                <a:latin typeface="Calibri"/>
-              </a:rPr>
-              <a:t>Presentación del Curso</a:t>
-            </a:r>
-            <a:r>
-              <a:rPr sz="1600" b="0" i="0">
-                <a:solidFill>
-                  <a:srgbClr val="2B2B2B"/>
-                </a:solidFill>
-                <a:latin typeface="Calibri"/>
-              </a:rPr>
-              <a:t> completa (fechas, evaluación, contenido de todas las sesiones).</a:t>
-            </a:r>
-          </a:p>
-          <a:p>
-            <a:pPr>
-              <a:spcAft>
-                <a:spcPts val="1000"/>
-              </a:spcAft>
-            </a:pPr>
-            <a:r>
-              <a:rPr sz="1600" b="0" i="0">
-                <a:solidFill>
-                  <a:srgbClr val="2B2B2B"/>
-                </a:solidFill>
-                <a:latin typeface="Calibri"/>
-              </a:rPr>
-              <a:t>–   Abrir los enunciados de `Clases/Recursos/ACAs/`: son la guía escrita de lo que evalúa cada corte.</a:t>
-            </a:r>
-          </a:p>
-        </p:txBody>
-      </p:sp>
-      <p:sp>
-        <p:nvSpPr>
-          <p:cNvPr id="5" name="TextBox 4"/>
-          <p:cNvSpPr txBox="1"/>
-          <p:nvPr/>
-        </p:nvSpPr>
-        <p:spPr>
-          <a:xfrm>
-            <a:off x="11094415" y="6446520"/>
-            <a:ext cx="548640" cy="274320"/>
-          </a:xfrm>
-          <a:prstGeom prst="rect">
-            <a:avLst/>
-          </a:prstGeom>
-          <a:noFill/>
-        </p:spPr>
-        <p:txBody>
-          <a:bodyPr wrap="square" anchor="t" lIns="0" rIns="0" tIns="0" bIns="0">
-            <a:spAutoFit/>
-          </a:bodyPr>
-          <a:lstStyle/>
-          <a:p>
-            <a:pPr algn="r"/>
-            <a:r>
-              <a:rPr sz="1000" b="1" i="0">
-                <a:solidFill>
-                  <a:srgbClr val="8F989D"/>
-                </a:solidFill>
-                <a:latin typeface="Calibri"/>
-              </a:rPr>
-              <a:t>21</a:t>
-            </a:r>
-          </a:p>
-        </p:txBody>
-      </p:sp>
-    </p:spTree>
-  </p:cSld>
-  <p:clrMapOvr>
-    <a:masterClrMapping/>
-  </p:clrMapOvr>
-</p:sld>
-</file>
-
-<file path=ppt/slides/slide22.xml><?xml version="1.0" encoding="utf-8"?>
-<p:sld xmlns:a="http://schemas.openxmlformats.org/drawingml/2006/main" xmlns:p="http://schemas.openxmlformats.org/presentationml/2006/main" xmlns:r="http://schemas.openxmlformats.org/officeDocument/2006/relationships">
-  <p:cSld>
-    <p:bg>
-      <p:bgPr>
-        <a:solidFill>
-          <a:srgbClr val="FFFFFF"/>
-        </a:solidFill>
-        <a:effectLst/>
-      </p:bgPr>
-    </p:bg>
-    <p:spTree>
-      <p:nvGrpSpPr>
-        <p:cNvPr id="1" name=""/>
-        <p:cNvGrpSpPr/>
-        <p:nvPr/>
-      </p:nvGrpSpPr>
-      <p:grpSpPr/>
-      <p:sp>
-        <p:nvSpPr>
-          <p:cNvPr id="2" name="Rectangle 1"/>
-          <p:cNvSpPr/>
-          <p:nvPr/>
-        </p:nvSpPr>
-        <p:spPr>
-          <a:xfrm>
-            <a:off x="0" y="0"/>
             <a:ext cx="12191695" cy="164592"/>
           </a:xfrm>
           <a:prstGeom prst="rect">
@@ -10462,7 +10010,7 @@
                 </a:solidFill>
                 <a:latin typeface="Calibri"/>
               </a:rPr>
-              <a:t>PRESÉNTATE — ROMPEHIELOS</a:t>
+              <a:t>ROMPEHIELOS — DOS VERDADES Y UNA MENTIRA</a:t>
             </a:r>
           </a:p>
         </p:txBody>
@@ -10497,7 +10045,7 @@
                 </a:solidFill>
                 <a:latin typeface="Calibri"/>
               </a:rPr>
-              <a:t>Formulario de Google · encuestas y Q&amp;A en el propio Meet</a:t>
+              <a:t>Dos verdades y una mentira · Slido · 8 minutos</a:t>
             </a:r>
           </a:p>
         </p:txBody>
@@ -10545,7 +10093,7 @@
                 </a:solidFill>
                 <a:latin typeface="Calibri"/>
               </a:rPr>
-              <a:t>Escanea el QR o abre:</a:t>
+              <a:t>Entra a slido.com</a:t>
             </a:r>
             <a:r>
               <a:rPr sz="1300" b="0" i="0">
@@ -10554,7 +10102,25 @@
                 </a:solidFill>
                 <a:latin typeface="Calibri"/>
               </a:rPr>
-              <a:t> [URL Formulario Preséntate — pendiente · PROYECTO I]</a:t>
+              <a:t> y escribe el </a:t>
+            </a:r>
+            <a:r>
+              <a:rPr sz="1300" b="1" i="0">
+                <a:solidFill>
+                  <a:srgbClr val="2B2B2B"/>
+                </a:solidFill>
+                <a:latin typeface="Calibri"/>
+              </a:rPr>
+              <a:t>código del evento</a:t>
+            </a:r>
+            <a:r>
+              <a:rPr sz="1300" b="0" i="0">
+                <a:solidFill>
+                  <a:srgbClr val="2B2B2B"/>
+                </a:solidFill>
+                <a:latin typeface="Calibri"/>
+              </a:rPr>
+              <a:t> que el Docente pega en el chat del Meet. Sin cuenta ni instalar nada.</a:t>
             </a:r>
           </a:p>
           <a:p>
@@ -10579,7 +10145,7 @@
                 </a:solidFill>
                 <a:latin typeface="Calibri"/>
               </a:rPr>
-              <a:t>Qué respondes (1 min):</a:t>
+              <a:t>El juego:</a:t>
             </a:r>
             <a:r>
               <a:rPr sz="1300" b="0" i="0">
@@ -10588,7 +10154,7 @@
                 </a:solidFill>
                 <a:latin typeface="Calibri"/>
               </a:rPr>
-              <a:t> tu </a:t>
+              <a:t> «</a:t>
             </a:r>
             <a:r>
               <a:rPr sz="1300" b="1" i="0">
@@ -10597,7 +10163,7 @@
                 </a:solidFill>
                 <a:latin typeface="Calibri"/>
               </a:rPr>
-              <a:t>nombre</a:t>
+              <a:t>dos verdades y una mentira</a:t>
             </a:r>
             <a:r>
               <a:rPr sz="1300" b="0" i="0">
@@ -10606,7 +10172,7 @@
                 </a:solidFill>
                 <a:latin typeface="Calibri"/>
               </a:rPr>
-              <a:t> + expectativa del curso + </a:t>
+              <a:t>» sobre el Docente. Se proyectan tres frases suyas y votas </a:t>
             </a:r>
             <a:r>
               <a:rPr sz="1300" b="1" i="0">
@@ -10615,7 +10181,7 @@
                 </a:solidFill>
                 <a:latin typeface="Calibri"/>
               </a:rPr>
-              <a:t>tema tentativo</a:t>
+              <a:t>cuál de las tres NO es cierta</a:t>
             </a:r>
             <a:r>
               <a:rPr sz="1300" b="0" i="0">
@@ -10624,7 +10190,7 @@
                 </a:solidFill>
                 <a:latin typeface="Calibri"/>
               </a:rPr>
-              <a:t> de investigación (1 frase). Entras con tu correo </a:t>
+              <a:t> — acertar es </a:t>
             </a:r>
             <a:r>
               <a:rPr sz="1300" b="1" i="0">
@@ -10633,7 +10199,7 @@
                 </a:solidFill>
                 <a:latin typeface="Calibri"/>
               </a:rPr>
-              <a:t>@cun.edu.co</a:t>
+              <a:t>1 entre 3</a:t>
             </a:r>
             <a:r>
               <a:rPr sz="1300" b="0" i="0">
@@ -10642,7 +10208,7 @@
                 </a:solidFill>
                 <a:latin typeface="Calibri"/>
               </a:rPr>
-              <a:t>: no hay que crear cuenta ni instalar nada.</a:t>
+              <a:t>, así que arrancamos todos iguales.</a:t>
             </a:r>
           </a:p>
           <a:p>
@@ -10667,7 +10233,7 @@
                 </a:solidFill>
                 <a:latin typeface="Calibri"/>
               </a:rPr>
-              <a:t>Ahora, ~3 min.</a:t>
+              <a:t>Tres rondas (~4 min).</a:t>
             </a:r>
             <a:r>
               <a:rPr sz="1300" b="0" i="0">
@@ -10676,7 +10242,7 @@
                 </a:solidFill>
                 <a:latin typeface="Calibri"/>
               </a:rPr>
-              <a:t> Somos 50: no alcanzamos a presentarnos uno por uno, así que el formulario nos ordena.</a:t>
+              <a:t> Al cerrar cada una el Docente revela la mentira y cuenta la historia de la verdad más rara: ahí queda hecha su presentación.</a:t>
             </a:r>
           </a:p>
           <a:p>
@@ -10701,7 +10267,7 @@
                 </a:solidFill>
                 <a:latin typeface="Calibri"/>
               </a:rPr>
-              <a:t>Con eso, hoy:</a:t>
+              <a:t>Ronda final (~2 min):</a:t>
             </a:r>
             <a:r>
               <a:rPr sz="1300" b="0" i="0">
@@ -10710,7 +10276,7 @@
                 </a:solidFill>
                 <a:latin typeface="Calibri"/>
               </a:rPr>
-              <a:t> el Docente lee en voz alta </a:t>
+              <a:t> sale la tabla de posiciones y los </a:t>
             </a:r>
             <a:r>
               <a:rPr sz="1300" b="1" i="0">
@@ -10719,7 +10285,7 @@
                 </a:solidFill>
                 <a:latin typeface="Calibri"/>
               </a:rPr>
-              <a:t>5 o 6 respuestas</a:t>
+              <a:t>tres primeros</a:t>
             </a:r>
             <a:r>
               <a:rPr sz="1300" b="0" i="0">
@@ -10728,7 +10294,7 @@
                 </a:solidFill>
                 <a:latin typeface="Calibri"/>
               </a:rPr>
-              <a:t> y proyecta el </a:t>
+              <a:t> toman el micrófono con </a:t>
             </a:r>
             <a:r>
               <a:rPr sz="1300" b="1" i="0">
@@ -10737,7 +10303,7 @@
                 </a:solidFill>
                 <a:latin typeface="Calibri"/>
               </a:rPr>
-              <a:t>resumen</a:t>
+              <a:t>sus</a:t>
             </a:r>
             <a:r>
               <a:rPr sz="1300" b="0" i="0">
@@ -10746,7 +10312,7 @@
                 </a:solidFill>
                 <a:latin typeface="Calibri"/>
               </a:rPr>
-              <a:t> del formulario — ahí quedan todas a la vista, no solo las leídas.</a:t>
+              <a:t> dos verdades y una mentira. Gana quien engañe a más gente. Hablan tres, no 50.</a:t>
             </a:r>
           </a:p>
           <a:p>
@@ -10771,7 +10337,7 @@
                 </a:solidFill>
                 <a:latin typeface="Calibri"/>
               </a:rPr>
-              <a:t>En vivo:</a:t>
+              <a:t>Premio:</a:t>
             </a:r>
             <a:r>
               <a:rPr sz="1300" b="0" i="0">
@@ -10780,7 +10346,7 @@
                 </a:solidFill>
                 <a:latin typeface="Calibri"/>
               </a:rPr>
-              <a:t> las preguntas y las votaciones van por la </a:t>
+              <a:t> </a:t>
             </a:r>
             <a:r>
               <a:rPr sz="1300" b="1" i="0">
@@ -10789,7 +10355,7 @@
                 </a:solidFill>
                 <a:latin typeface="Calibri"/>
               </a:rPr>
-              <a:t>encuesta</a:t>
+              <a:t>revisión 1 a 1 con el Docente</a:t>
             </a:r>
             <a:r>
               <a:rPr sz="1300" b="0" i="0">
@@ -10798,25 +10364,7 @@
                 </a:solidFill>
                 <a:latin typeface="Calibri"/>
               </a:rPr>
-              <a:t> y el </a:t>
-            </a:r>
-            <a:r>
-              <a:rPr sz="1300" b="1" i="0">
-                <a:solidFill>
-                  <a:srgbClr val="2B2B2B"/>
-                </a:solidFill>
-                <a:latin typeface="Calibri"/>
-              </a:rPr>
-              <a:t>Q&amp;A</a:t>
-            </a:r>
-            <a:r>
-              <a:rPr sz="1300" b="0" i="0">
-                <a:solidFill>
-                  <a:srgbClr val="2B2B2B"/>
-                </a:solidFill>
-                <a:latin typeface="Calibri"/>
-              </a:rPr>
-              <a:t> del propio Meet; no hay que abrir ninguna otra plataforma.</a:t>
+              <a:t> del avance del ganador, antes de la primera entrega.</a:t>
             </a:r>
           </a:p>
           <a:p>
@@ -10841,7 +10389,7 @@
                 </a:solidFill>
                 <a:latin typeface="Calibri"/>
               </a:rPr>
-              <a:t>Después:</a:t>
+              <a:t>Las preguntas</a:t>
             </a:r>
             <a:r>
               <a:rPr sz="1300" b="0" i="0">
@@ -10850,7 +10398,25 @@
                 </a:solidFill>
                 <a:latin typeface="Calibri"/>
               </a:rPr>
-              <a:t> las respuestas quedan en una hoja que el Docente usa todo el periodo (equipos, ejemplos y seguimiento).</a:t>
+              <a:t> de toda la sesión van por el </a:t>
+            </a:r>
+            <a:r>
+              <a:rPr sz="1300" b="1" i="0">
+                <a:solidFill>
+                  <a:srgbClr val="2B2B2B"/>
+                </a:solidFill>
+                <a:latin typeface="Calibri"/>
+              </a:rPr>
+              <a:t>Q&amp;A</a:t>
+            </a:r>
+            <a:r>
+              <a:rPr sz="1300" b="0" i="0">
+                <a:solidFill>
+                  <a:srgbClr val="2B2B2B"/>
+                </a:solidFill>
+                <a:latin typeface="Calibri"/>
+              </a:rPr>
+              <a:t> del mismo Slido.</a:t>
             </a:r>
           </a:p>
         </p:txBody>
@@ -10907,8 +10473,8 @@
         </p:nvSpPr>
         <p:spPr>
           <a:xfrm>
-            <a:off x="8579815" y="2926079"/>
-            <a:ext cx="2834640" cy="1463040"/>
+            <a:off x="8534095" y="2606039"/>
+            <a:ext cx="2926079" cy="2103120"/>
           </a:xfrm>
           <a:prstGeom prst="rect">
             <a:avLst/>
@@ -10923,29 +10489,65 @@
           <a:p>
             <a:pPr algn="ctr"/>
             <a:r>
-              <a:rPr sz="1800" b="1" i="0">
-                <a:solidFill>
-                  <a:srgbClr val="0C2340"/>
-                </a:solidFill>
-                <a:latin typeface="Calibri"/>
-              </a:rPr>
-              <a:t>QR pendiente</a:t>
+              <a:rPr sz="3000" b="1" i="0">
+                <a:solidFill>
+                  <a:srgbClr val="007433"/>
+                </a:solidFill>
+                <a:latin typeface="Calibri"/>
+              </a:rPr>
+              <a:t>slido.com</a:t>
             </a:r>
           </a:p>
           <a:p>
             <a:pPr algn="ctr">
               <a:spcBef>
-                <a:spcPts val="1000"/>
+                <a:spcPts val="1400"/>
               </a:spcBef>
             </a:pPr>
             <a:r>
-              <a:rPr sz="1200" b="0" i="0">
-                <a:solidFill>
-                  <a:srgbClr val="2B2B2B"/>
-                </a:solidFill>
-                <a:latin typeface="Calibri"/>
-              </a:rPr>
-              <a:t>Se genera cuando el formulario tenga enlace real.</a:t>
+              <a:rPr sz="1300" b="0" i="0">
+                <a:solidFill>
+                  <a:srgbClr val="0C2340"/>
+                </a:solidFill>
+                <a:latin typeface="Calibri"/>
+              </a:rPr>
+              <a:t>El </a:t>
+            </a:r>
+            <a:r>
+              <a:rPr sz="1300" b="1" i="0">
+                <a:solidFill>
+                  <a:srgbClr val="0C2340"/>
+                </a:solidFill>
+                <a:latin typeface="Calibri"/>
+              </a:rPr>
+              <a:t>código del evento</a:t>
+            </a:r>
+            <a:r>
+              <a:rPr sz="1300" b="0" i="0">
+                <a:solidFill>
+                  <a:srgbClr val="0C2340"/>
+                </a:solidFill>
+                <a:latin typeface="Calibri"/>
+              </a:rPr>
+              <a:t> te lo pega el Docente en el </a:t>
+            </a:r>
+            <a:r>
+              <a:rPr sz="1300" b="1" i="0">
+                <a:solidFill>
+                  <a:srgbClr val="0C2340"/>
+                </a:solidFill>
+                <a:latin typeface="Calibri"/>
+              </a:rPr>
+              <a:t>chat del Meet</a:t>
+            </a:r>
+            <a:r>
+              <a:rPr sz="1300" b="0" i="0">
+                <a:solidFill>
+                  <a:srgbClr val="0C2340"/>
+                </a:solidFill>
+                <a:latin typeface="Calibri"/>
+              </a:rPr>
+              <a:t>.</a:t>
             </a:r>
           </a:p>
         </p:txBody>
@@ -10980,7 +10582,7 @@
                 </a:solidFill>
                 <a:latin typeface="Calibri"/>
               </a:rPr>
-              <a:t>[URL Formulario Preséntate — pendiente · PROYECTO I]</a:t>
+              <a:t>[URL Slido — evento del rompehielos pendiente · PROYECTO I]</a:t>
             </a:r>
           </a:p>
         </p:txBody>
@@ -12168,7 +11770,7 @@
                 </a:solidFill>
                 <a:latin typeface="Calibri"/>
               </a:rPr>
-              <a:t>Preséntate: el formulario del curso (y por qué no un muro)</a:t>
+              <a:t>Cómo trabajamos: el encuentro tiene dos mitades</a:t>
             </a:r>
           </a:p>
         </p:txBody>
@@ -12201,13 +11803,47 @@
               </a:spcAft>
             </a:pPr>
             <a:r>
+              <a:rPr sz="1600" b="0" i="0">
+                <a:solidFill>
+                  <a:srgbClr val="2B2B2B"/>
+                </a:solidFill>
+                <a:latin typeface="Calibri"/>
+              </a:rPr>
+              <a:t>–   Nos vemos </a:t>
+            </a:r>
+            <a:r>
+              <a:rPr sz="1600" b="1" i="0">
+                <a:solidFill>
+                  <a:srgbClr val="2B2B2B"/>
+                </a:solidFill>
+                <a:latin typeface="Calibri"/>
+              </a:rPr>
+              <a:t>una vez por semana, dos horas</a:t>
+            </a:r>
+            <a:r>
+              <a:rPr sz="1600" b="0" i="0">
+                <a:solidFill>
+                  <a:srgbClr val="2B2B2B"/>
+                </a:solidFill>
+                <a:latin typeface="Calibri"/>
+              </a:rPr>
+              <a:t>. No son dos horas de exposición.</a:t>
+            </a:r>
+          </a:p>
+          <a:p>
+            <a:pPr lvl="1">
+              <a:spcAft>
+                <a:spcPts val="600"/>
+              </a:spcAft>
+            </a:pPr>
+            <a:r>
               <a:rPr sz="1500" b="0" i="0">
                 <a:solidFill>
                   <a:srgbClr val="2B2B2B"/>
                 </a:solidFill>
                 <a:latin typeface="Calibri"/>
               </a:rPr>
-              <a:t>–   Somos </a:t>
+              <a:t>●   </a:t>
             </a:r>
             <a:r>
               <a:rPr sz="1500" b="1" i="0">
@@ -12216,7 +11852,7 @@
                 </a:solidFill>
                 <a:latin typeface="Calibri"/>
               </a:rPr>
-              <a:t>50 matriculados</a:t>
+              <a:t>Primera hora — contenido:</a:t>
             </a:r>
             <a:r>
               <a:rPr sz="1500" b="0" i="0">
@@ -12225,7 +11861,41 @@
                 </a:solidFill>
                 <a:latin typeface="Calibri"/>
               </a:rPr>
-              <a:t>: un muro de notas no se alcanza a leer en clase y la mitad quedaría sin ser vista.</a:t>
+              <a:t> el Docente explica el punto de la semana y modela un ejemplo en pantalla.</a:t>
+            </a:r>
+          </a:p>
+          <a:p>
+            <a:pPr lvl="1">
+              <a:spcAft>
+                <a:spcPts val="600"/>
+              </a:spcAft>
+            </a:pPr>
+            <a:r>
+              <a:rPr sz="1500" b="0" i="0">
+                <a:solidFill>
+                  <a:srgbClr val="2B2B2B"/>
+                </a:solidFill>
+                <a:latin typeface="Calibri"/>
+              </a:rPr>
+              <a:t>●   </a:t>
+            </a:r>
+            <a:r>
+              <a:rPr sz="1500" b="1" i="0">
+                <a:solidFill>
+                  <a:srgbClr val="2B2B2B"/>
+                </a:solidFill>
+                <a:latin typeface="Calibri"/>
+              </a:rPr>
+              <a:t>Segunda hora — tutoría en vivo:</a:t>
+            </a:r>
+            <a:r>
+              <a:rPr sz="1500" b="0" i="0">
+                <a:solidFill>
+                  <a:srgbClr val="2B2B2B"/>
+                </a:solidFill>
+                <a:latin typeface="Calibri"/>
+              </a:rPr>
+              <a:t> cada equipo trabaja su avance y el Docente pasa por los equipos.</a:t>
             </a:r>
           </a:p>
           <a:p>
@@ -12235,31 +11905,49 @@
               </a:spcAft>
             </a:pPr>
             <a:r>
-              <a:rPr sz="1500" b="0" i="0">
-                <a:solidFill>
-                  <a:srgbClr val="2B2B2B"/>
-                </a:solidFill>
-                <a:latin typeface="Calibri"/>
-              </a:rPr>
-              <a:t>–   Por eso el rompehielos es un </a:t>
-            </a:r>
-            <a:r>
-              <a:rPr sz="1500" b="1" i="0">
-                <a:solidFill>
-                  <a:srgbClr val="2B2B2B"/>
-                </a:solidFill>
-                <a:latin typeface="Calibri"/>
-              </a:rPr>
-              <a:t>formulario de Google</a:t>
-            </a:r>
-            <a:r>
-              <a:rPr sz="1500" b="0" i="0">
-                <a:solidFill>
-                  <a:srgbClr val="2B2B2B"/>
-                </a:solidFill>
-                <a:latin typeface="Calibri"/>
-              </a:rPr>
-              <a:t>: el Docente lo pega en el chat del Meet y queda en el LEEME de `Clases/`.</a:t>
+              <a:rPr sz="1600" b="0" i="0">
+                <a:solidFill>
+                  <a:srgbClr val="2B2B2B"/>
+                </a:solidFill>
+                <a:latin typeface="Calibri"/>
+              </a:rPr>
+              <a:t>–   El curso funciona </a:t>
+            </a:r>
+            <a:r>
+              <a:rPr sz="1600" b="1" i="0">
+                <a:solidFill>
+                  <a:srgbClr val="2B2B2B"/>
+                </a:solidFill>
+                <a:latin typeface="Calibri"/>
+              </a:rPr>
+              <a:t>al revés de lo que se acostumbra</a:t>
+            </a:r>
+            <a:r>
+              <a:rPr sz="1600" b="0" i="0">
+                <a:solidFill>
+                  <a:srgbClr val="2B2B2B"/>
+                </a:solidFill>
+                <a:latin typeface="Calibri"/>
+              </a:rPr>
+              <a:t>: se lee y se escribe </a:t>
+            </a:r>
+            <a:r>
+              <a:rPr sz="1600" b="1" i="0">
+                <a:solidFill>
+                  <a:srgbClr val="2B2B2B"/>
+                </a:solidFill>
+                <a:latin typeface="Calibri"/>
+              </a:rPr>
+              <a:t>antes</a:t>
+            </a:r>
+            <a:r>
+              <a:rPr sz="1600" b="0" i="0">
+                <a:solidFill>
+                  <a:srgbClr val="2B2B2B"/>
+                </a:solidFill>
+                <a:latin typeface="Calibri"/>
+              </a:rPr>
+              <a:t> de llegar al encuentro.</a:t>
             </a:r>
           </a:p>
           <a:p>
@@ -12269,31 +11957,31 @@
               </a:spcAft>
             </a:pPr>
             <a:r>
-              <a:rPr sz="1400" b="0" i="0">
-                <a:solidFill>
-                  <a:srgbClr val="2B2B2B"/>
-                </a:solidFill>
-                <a:latin typeface="Calibri"/>
-              </a:rPr>
-              <a:t>●   </a:t>
-            </a:r>
-            <a:r>
-              <a:rPr sz="1400" b="1" i="0">
-                <a:solidFill>
-                  <a:srgbClr val="2B2B2B"/>
-                </a:solidFill>
-                <a:latin typeface="Calibri"/>
-              </a:rPr>
-              <a:t>Enlace:</a:t>
-            </a:r>
-            <a:r>
-              <a:rPr sz="1400" b="0" i="0">
-                <a:solidFill>
-                  <a:srgbClr val="2B2B2B"/>
-                </a:solidFill>
-                <a:latin typeface="Calibri"/>
-              </a:rPr>
-              <a:t> [URL Formulario «Preséntate» — pendiente]</a:t>
+              <a:rPr sz="1500" b="0" i="0">
+                <a:solidFill>
+                  <a:srgbClr val="2B2B2B"/>
+                </a:solidFill>
+                <a:latin typeface="Calibri"/>
+              </a:rPr>
+              <a:t>●   A cada sesión se </a:t>
+            </a:r>
+            <a:r>
+              <a:rPr sz="1500" b="1" i="0">
+                <a:solidFill>
+                  <a:srgbClr val="2B2B2B"/>
+                </a:solidFill>
+                <a:latin typeface="Calibri"/>
+              </a:rPr>
+              <a:t>trae el avance escrito</a:t>
+            </a:r>
+            <a:r>
+              <a:rPr sz="1500" b="0" i="0">
+                <a:solidFill>
+                  <a:srgbClr val="2B2B2B"/>
+                </a:solidFill>
+                <a:latin typeface="Calibri"/>
+              </a:rPr>
+              <a:t>. Aquí se corrige lo que ya existe; no se empieza de cero en clase.</a:t>
             </a:r>
           </a:p>
           <a:p>
@@ -12303,31 +11991,13 @@
               </a:spcAft>
             </a:pPr>
             <a:r>
-              <a:rPr sz="1400" b="0" i="0">
-                <a:solidFill>
-                  <a:srgbClr val="2B2B2B"/>
-                </a:solidFill>
-                <a:latin typeface="Calibri"/>
-              </a:rPr>
-              <a:t>●   Se entra con el correo </a:t>
-            </a:r>
-            <a:r>
-              <a:rPr sz="1400" b="1" i="0">
-                <a:solidFill>
-                  <a:srgbClr val="2B2B2B"/>
-                </a:solidFill>
-                <a:latin typeface="Calibri"/>
-              </a:rPr>
-              <a:t>@cun.edu.co</a:t>
-            </a:r>
-            <a:r>
-              <a:rPr sz="1400" b="0" i="0">
-                <a:solidFill>
-                  <a:srgbClr val="2B2B2B"/>
-                </a:solidFill>
-                <a:latin typeface="Calibri"/>
-              </a:rPr>
-              <a:t>: no hay que crear cuenta en ninguna plataforma nueva ni instalar nada.</a:t>
+              <a:rPr sz="1500" b="0" i="0">
+                <a:solidFill>
+                  <a:srgbClr val="2B2B2B"/>
+                </a:solidFill>
+                <a:latin typeface="Calibri"/>
+              </a:rPr>
+              <a:t>●   Quien llega sin nada escrito pierde la segunda hora: no hay avance que revisar.</a:t>
             </a:r>
           </a:p>
           <a:p>
@@ -12337,67 +12007,31 @@
               </a:spcAft>
             </a:pPr>
             <a:r>
-              <a:rPr sz="1500" b="0" i="0">
-                <a:solidFill>
-                  <a:srgbClr val="2B2B2B"/>
-                </a:solidFill>
-                <a:latin typeface="Calibri"/>
-              </a:rPr>
-              <a:t>–   </a:t>
-            </a:r>
-            <a:r>
-              <a:rPr sz="1500" b="1" i="0">
-                <a:solidFill>
-                  <a:srgbClr val="2B2B2B"/>
-                </a:solidFill>
-                <a:latin typeface="Calibri"/>
-              </a:rPr>
-              <a:t>Qué se responde</a:t>
-            </a:r>
-            <a:r>
-              <a:rPr sz="1500" b="0" i="0">
-                <a:solidFill>
-                  <a:srgbClr val="2B2B2B"/>
-                </a:solidFill>
-                <a:latin typeface="Calibri"/>
-              </a:rPr>
-              <a:t> (2–3 minutos, una sola vez): nombre, programa, </a:t>
-            </a:r>
-            <a:r>
-              <a:rPr sz="1500" b="1" i="0">
-                <a:solidFill>
-                  <a:srgbClr val="2B2B2B"/>
-                </a:solidFill>
-                <a:latin typeface="Calibri"/>
-              </a:rPr>
-              <a:t>expectativa del curso</a:t>
-            </a:r>
-            <a:r>
-              <a:rPr sz="1500" b="0" i="0">
-                <a:solidFill>
-                  <a:srgbClr val="2B2B2B"/>
-                </a:solidFill>
-                <a:latin typeface="Calibri"/>
-              </a:rPr>
-              <a:t> y </a:t>
-            </a:r>
-            <a:r>
-              <a:rPr sz="1500" b="1" i="0">
-                <a:solidFill>
-                  <a:srgbClr val="2B2B2B"/>
-                </a:solidFill>
-                <a:latin typeface="Calibri"/>
-              </a:rPr>
-              <a:t>tema tentativo</a:t>
-            </a:r>
-            <a:r>
-              <a:rPr sz="1500" b="0" i="0">
-                <a:solidFill>
-                  <a:srgbClr val="2B2B2B"/>
-                </a:solidFill>
-                <a:latin typeface="Calibri"/>
-              </a:rPr>
-              <a:t> de investigación en una frase.</a:t>
+              <a:rPr sz="1600" b="0" i="0">
+                <a:solidFill>
+                  <a:srgbClr val="2B2B2B"/>
+                </a:solidFill>
+                <a:latin typeface="Calibri"/>
+              </a:rPr>
+              <a:t>–   Se trabaja en </a:t>
+            </a:r>
+            <a:r>
+              <a:rPr sz="1600" b="1" i="0">
+                <a:solidFill>
+                  <a:srgbClr val="2B2B2B"/>
+                </a:solidFill>
+                <a:latin typeface="Calibri"/>
+              </a:rPr>
+              <a:t>equipos de máximo 3 personas</a:t>
+            </a:r>
+            <a:r>
+              <a:rPr sz="1600" b="0" i="0">
+                <a:solidFill>
+                  <a:srgbClr val="2B2B2B"/>
+                </a:solidFill>
+                <a:latin typeface="Calibri"/>
+              </a:rPr>
+              <a:t>, los mismos durante todo el curso.</a:t>
             </a:r>
           </a:p>
           <a:p>
@@ -12407,19 +12041,19 @@
               </a:spcAft>
             </a:pPr>
             <a:r>
-              <a:rPr sz="1400" b="0" i="0">
-                <a:solidFill>
-                  <a:srgbClr val="2B2B2B"/>
-                </a:solidFill>
-                <a:latin typeface="Calibri"/>
-              </a:rPr>
-              <a:t>●   Digan también con quién piensan hacer equipo, si ya lo tienen: de ahí sale el armado de los equipos de máximo 3.</a:t>
-            </a:r>
-          </a:p>
-          <a:p>
-            <a:pPr>
+              <a:rPr sz="1500" b="0" i="0">
+                <a:solidFill>
+                  <a:srgbClr val="2B2B2B"/>
+                </a:solidFill>
+                <a:latin typeface="Calibri"/>
+              </a:rPr>
+              <a:t>●   Un solo integrante sube la entrega grupal, pero la nota es del equipo, no de quien subió el archivo.</a:t>
+            </a:r>
+          </a:p>
+          <a:p>
+            <a:pPr lvl="1">
               <a:spcAft>
-                <a:spcPts val="1000"/>
+                <a:spcPts val="600"/>
               </a:spcAft>
             </a:pPr>
             <a:r>
@@ -12429,111 +12063,7 @@
                 </a:solidFill>
                 <a:latin typeface="Calibri"/>
               </a:rPr>
-              <a:t>–   </a:t>
-            </a:r>
-            <a:r>
-              <a:rPr sz="1500" b="1" i="0">
-                <a:solidFill>
-                  <a:srgbClr val="2B2B2B"/>
-                </a:solidFill>
-                <a:latin typeface="Calibri"/>
-              </a:rPr>
-              <a:t>Cuándo:</a:t>
-            </a:r>
-            <a:r>
-              <a:rPr sz="1500" b="0" i="0">
-                <a:solidFill>
-                  <a:srgbClr val="2B2B2B"/>
-                </a:solidFill>
-                <a:latin typeface="Calibri"/>
-              </a:rPr>
-              <a:t> en los primeros minutos del encuentro. Al cerrar, el Docente proyecta el resumen y lee en voz alta cinco o seis respuestas.</a:t>
-            </a:r>
-          </a:p>
-          <a:p>
-            <a:pPr>
-              <a:spcAft>
-                <a:spcPts val="1000"/>
-              </a:spcAft>
-            </a:pPr>
-            <a:r>
-              <a:rPr sz="1500" b="0" i="0">
-                <a:solidFill>
-                  <a:srgbClr val="2B2B2B"/>
-                </a:solidFill>
-                <a:latin typeface="Calibri"/>
-              </a:rPr>
-              <a:t>–   </a:t>
-            </a:r>
-            <a:r>
-              <a:rPr sz="1500" b="1" i="0">
-                <a:solidFill>
-                  <a:srgbClr val="2B2B2B"/>
-                </a:solidFill>
-                <a:latin typeface="Calibri"/>
-              </a:rPr>
-              <a:t>En vivo se participa por el Meet:</a:t>
-            </a:r>
-            <a:r>
-              <a:rPr sz="1500" b="0" i="0">
-                <a:solidFill>
-                  <a:srgbClr val="2B2B2B"/>
-                </a:solidFill>
-                <a:latin typeface="Calibri"/>
-              </a:rPr>
-              <a:t> las </a:t>
-            </a:r>
-            <a:r>
-              <a:rPr sz="1500" b="1" i="0">
-                <a:solidFill>
-                  <a:srgbClr val="2B2B2B"/>
-                </a:solidFill>
-                <a:latin typeface="Calibri"/>
-              </a:rPr>
-              <a:t>encuestas</a:t>
-            </a:r>
-            <a:r>
-              <a:rPr sz="1500" b="0" i="0">
-                <a:solidFill>
-                  <a:srgbClr val="2B2B2B"/>
-                </a:solidFill>
-                <a:latin typeface="Calibri"/>
-              </a:rPr>
-              <a:t> y el </a:t>
-            </a:r>
-            <a:r>
-              <a:rPr sz="1500" b="1" i="0">
-                <a:solidFill>
-                  <a:srgbClr val="2B2B2B"/>
-                </a:solidFill>
-                <a:latin typeface="Calibri"/>
-              </a:rPr>
-              <a:t>Q&amp;A</a:t>
-            </a:r>
-            <a:r>
-              <a:rPr sz="1500" b="0" i="0">
-                <a:solidFill>
-                  <a:srgbClr val="2B2B2B"/>
-                </a:solidFill>
-                <a:latin typeface="Calibri"/>
-              </a:rPr>
-              <a:t> de la propia sala aguantan al curso completo.</a:t>
-            </a:r>
-          </a:p>
-          <a:p>
-            <a:pPr>
-              <a:spcAft>
-                <a:spcPts val="1000"/>
-              </a:spcAft>
-            </a:pPr>
-            <a:r>
-              <a:rPr sz="1500" b="0" i="0">
-                <a:solidFill>
-                  <a:srgbClr val="2B2B2B"/>
-                </a:solidFill>
-                <a:latin typeface="Calibri"/>
-              </a:rPr>
-              <a:t>–   Queda abierto hasta la Sesión 02 para quien llegó tarde o no alcanzó a responder hoy.</a:t>
+              <a:t>●   ¿Prefieren trabajar solos? Se puede, y la carga es la misma. Decídanlo esta semana, no en octubre.</a:t>
             </a:r>
           </a:p>
         </p:txBody>
@@ -12602,7 +12132,7 @@
                 </a:solidFill>
                 <a:latin typeface="Calibri"/>
               </a:rPr>
-              <a:t>Las respuestas quedan en una hoja que el Docente usa todo el periodo: agrupar temas parecidos, escoger los ejemplos de clase y armar los equipos.</a:t>
+              <a:t>Regla de oro: la clase avanza sobre el documento del equipo. Si el documento no crece, el curso no avanza.</a:t>
             </a:r>
           </a:p>
         </p:txBody>
@@ -12616,473 +12146,6 @@
 </file>
 
 <file path=ppt/slides/slide7.xml><?xml version="1.0" encoding="utf-8"?>
-<p:sld xmlns:a="http://schemas.openxmlformats.org/drawingml/2006/main" xmlns:p="http://schemas.openxmlformats.org/presentationml/2006/main" xmlns:r="http://schemas.openxmlformats.org/officeDocument/2006/relationships">
-  <p:cSld>
-    <p:bg>
-      <p:bgPr>
-        <a:solidFill>
-          <a:srgbClr val="FFFFFF"/>
-        </a:solidFill>
-        <a:effectLst/>
-      </p:bgPr>
-    </p:bg>
-    <p:spTree>
-      <p:nvGrpSpPr>
-        <p:cNvPr id="1" name=""/>
-        <p:cNvGrpSpPr/>
-        <p:nvPr/>
-      </p:nvGrpSpPr>
-      <p:grpSpPr/>
-      <p:sp>
-        <p:nvSpPr>
-          <p:cNvPr id="2" name="Rectangle 1"/>
-          <p:cNvSpPr/>
-          <p:nvPr/>
-        </p:nvSpPr>
-        <p:spPr>
-          <a:xfrm>
-            <a:off x="0" y="0"/>
-            <a:ext cx="12191695" cy="1188720"/>
-          </a:xfrm>
-          <a:prstGeom prst="rect">
-            <a:avLst/>
-          </a:prstGeom>
-          <a:solidFill>
-            <a:srgbClr val="0C2340"/>
-          </a:solidFill>
-          <a:ln>
-            <a:noFill/>
-          </a:ln>
-          <a:effectLst/>
-        </p:spPr>
-        <p:style>
-          <a:lnRef idx="1">
-            <a:schemeClr val="accent1"/>
-          </a:lnRef>
-          <a:fillRef idx="3">
-            <a:schemeClr val="accent1"/>
-          </a:fillRef>
-          <a:effectRef idx="2">
-            <a:schemeClr val="accent1"/>
-          </a:effectRef>
-          <a:fontRef idx="minor">
-            <a:schemeClr val="lt1"/>
-          </a:fontRef>
-        </p:style>
-        <p:txBody>
-          <a:bodyPr rtlCol="0" anchor="ctr"/>
-          <a:lstStyle/>
-          <a:p>
-            <a:pPr algn="ctr"/>
-          </a:p>
-        </p:txBody>
-      </p:sp>
-      <p:sp>
-        <p:nvSpPr>
-          <p:cNvPr id="3" name="TextBox 2"/>
-          <p:cNvSpPr txBox="1"/>
-          <p:nvPr/>
-        </p:nvSpPr>
-        <p:spPr>
-          <a:xfrm>
-            <a:off x="640080" y="0"/>
-            <a:ext cx="9082735" cy="1188720"/>
-          </a:xfrm>
-          <a:prstGeom prst="rect">
-            <a:avLst/>
-          </a:prstGeom>
-          <a:noFill/>
-        </p:spPr>
-        <p:txBody>
-          <a:bodyPr wrap="square" anchor="ctr" lIns="0" rIns="0" tIns="0" bIns="0">
-            <a:spAutoFit/>
-          </a:bodyPr>
-          <a:lstStyle/>
-          <a:p>
-            <a:pPr algn="ctr"/>
-            <a:r>
-              <a:rPr sz="2600" b="1" i="0">
-                <a:solidFill>
-                  <a:srgbClr val="FFFFFF"/>
-                </a:solidFill>
-                <a:latin typeface="Calibri"/>
-              </a:rPr>
-              <a:t>Cómo trabajamos: el encuentro tiene dos mitades</a:t>
-            </a:r>
-          </a:p>
-        </p:txBody>
-      </p:sp>
-      <p:sp>
-        <p:nvSpPr>
-          <p:cNvPr id="4" name="TextBox 3"/>
-          <p:cNvSpPr txBox="1"/>
-          <p:nvPr/>
-        </p:nvSpPr>
-        <p:spPr>
-          <a:xfrm>
-            <a:off x="640080" y="1691639"/>
-            <a:ext cx="10911535" cy="4617720"/>
-          </a:xfrm>
-          <a:prstGeom prst="rect">
-            <a:avLst/>
-          </a:prstGeom>
-          <a:noFill/>
-        </p:spPr>
-        <p:txBody>
-          <a:bodyPr wrap="square" anchor="t" lIns="0" rIns="0" tIns="0" bIns="0">
-            <a:spAutoFit/>
-          </a:bodyPr>
-          <a:lstStyle/>
-          <a:p>
-            <a:pPr>
-              <a:spcAft>
-                <a:spcPts val="1000"/>
-              </a:spcAft>
-            </a:pPr>
-            <a:r>
-              <a:rPr sz="1600" b="0" i="0">
-                <a:solidFill>
-                  <a:srgbClr val="2B2B2B"/>
-                </a:solidFill>
-                <a:latin typeface="Calibri"/>
-              </a:rPr>
-              <a:t>–   Nos vemos </a:t>
-            </a:r>
-            <a:r>
-              <a:rPr sz="1600" b="1" i="0">
-                <a:solidFill>
-                  <a:srgbClr val="2B2B2B"/>
-                </a:solidFill>
-                <a:latin typeface="Calibri"/>
-              </a:rPr>
-              <a:t>una vez por semana, dos horas</a:t>
-            </a:r>
-            <a:r>
-              <a:rPr sz="1600" b="0" i="0">
-                <a:solidFill>
-                  <a:srgbClr val="2B2B2B"/>
-                </a:solidFill>
-                <a:latin typeface="Calibri"/>
-              </a:rPr>
-              <a:t>. No son dos horas de exposición.</a:t>
-            </a:r>
-          </a:p>
-          <a:p>
-            <a:pPr lvl="1">
-              <a:spcAft>
-                <a:spcPts val="600"/>
-              </a:spcAft>
-            </a:pPr>
-            <a:r>
-              <a:rPr sz="1500" b="0" i="0">
-                <a:solidFill>
-                  <a:srgbClr val="2B2B2B"/>
-                </a:solidFill>
-                <a:latin typeface="Calibri"/>
-              </a:rPr>
-              <a:t>●   </a:t>
-            </a:r>
-            <a:r>
-              <a:rPr sz="1500" b="1" i="0">
-                <a:solidFill>
-                  <a:srgbClr val="2B2B2B"/>
-                </a:solidFill>
-                <a:latin typeface="Calibri"/>
-              </a:rPr>
-              <a:t>Primera hora — contenido:</a:t>
-            </a:r>
-            <a:r>
-              <a:rPr sz="1500" b="0" i="0">
-                <a:solidFill>
-                  <a:srgbClr val="2B2B2B"/>
-                </a:solidFill>
-                <a:latin typeface="Calibri"/>
-              </a:rPr>
-              <a:t> el Docente explica el punto de la semana y modela un ejemplo en pantalla.</a:t>
-            </a:r>
-          </a:p>
-          <a:p>
-            <a:pPr lvl="1">
-              <a:spcAft>
-                <a:spcPts val="600"/>
-              </a:spcAft>
-            </a:pPr>
-            <a:r>
-              <a:rPr sz="1500" b="0" i="0">
-                <a:solidFill>
-                  <a:srgbClr val="2B2B2B"/>
-                </a:solidFill>
-                <a:latin typeface="Calibri"/>
-              </a:rPr>
-              <a:t>●   </a:t>
-            </a:r>
-            <a:r>
-              <a:rPr sz="1500" b="1" i="0">
-                <a:solidFill>
-                  <a:srgbClr val="2B2B2B"/>
-                </a:solidFill>
-                <a:latin typeface="Calibri"/>
-              </a:rPr>
-              <a:t>Segunda hora — tutoría en vivo:</a:t>
-            </a:r>
-            <a:r>
-              <a:rPr sz="1500" b="0" i="0">
-                <a:solidFill>
-                  <a:srgbClr val="2B2B2B"/>
-                </a:solidFill>
-                <a:latin typeface="Calibri"/>
-              </a:rPr>
-              <a:t> cada equipo trabaja su avance y el Docente pasa por los equipos.</a:t>
-            </a:r>
-          </a:p>
-          <a:p>
-            <a:pPr>
-              <a:spcAft>
-                <a:spcPts val="1000"/>
-              </a:spcAft>
-            </a:pPr>
-            <a:r>
-              <a:rPr sz="1600" b="0" i="0">
-                <a:solidFill>
-                  <a:srgbClr val="2B2B2B"/>
-                </a:solidFill>
-                <a:latin typeface="Calibri"/>
-              </a:rPr>
-              <a:t>–   El curso funciona </a:t>
-            </a:r>
-            <a:r>
-              <a:rPr sz="1600" b="1" i="0">
-                <a:solidFill>
-                  <a:srgbClr val="2B2B2B"/>
-                </a:solidFill>
-                <a:latin typeface="Calibri"/>
-              </a:rPr>
-              <a:t>al revés de lo que se acostumbra</a:t>
-            </a:r>
-            <a:r>
-              <a:rPr sz="1600" b="0" i="0">
-                <a:solidFill>
-                  <a:srgbClr val="2B2B2B"/>
-                </a:solidFill>
-                <a:latin typeface="Calibri"/>
-              </a:rPr>
-              <a:t>: se lee y se escribe </a:t>
-            </a:r>
-            <a:r>
-              <a:rPr sz="1600" b="1" i="0">
-                <a:solidFill>
-                  <a:srgbClr val="2B2B2B"/>
-                </a:solidFill>
-                <a:latin typeface="Calibri"/>
-              </a:rPr>
-              <a:t>antes</a:t>
-            </a:r>
-            <a:r>
-              <a:rPr sz="1600" b="0" i="0">
-                <a:solidFill>
-                  <a:srgbClr val="2B2B2B"/>
-                </a:solidFill>
-                <a:latin typeface="Calibri"/>
-              </a:rPr>
-              <a:t> de llegar al encuentro.</a:t>
-            </a:r>
-          </a:p>
-          <a:p>
-            <a:pPr lvl="1">
-              <a:spcAft>
-                <a:spcPts val="600"/>
-              </a:spcAft>
-            </a:pPr>
-            <a:r>
-              <a:rPr sz="1500" b="0" i="0">
-                <a:solidFill>
-                  <a:srgbClr val="2B2B2B"/>
-                </a:solidFill>
-                <a:latin typeface="Calibri"/>
-              </a:rPr>
-              <a:t>●   A cada sesión se </a:t>
-            </a:r>
-            <a:r>
-              <a:rPr sz="1500" b="1" i="0">
-                <a:solidFill>
-                  <a:srgbClr val="2B2B2B"/>
-                </a:solidFill>
-                <a:latin typeface="Calibri"/>
-              </a:rPr>
-              <a:t>trae el avance escrito</a:t>
-            </a:r>
-            <a:r>
-              <a:rPr sz="1500" b="0" i="0">
-                <a:solidFill>
-                  <a:srgbClr val="2B2B2B"/>
-                </a:solidFill>
-                <a:latin typeface="Calibri"/>
-              </a:rPr>
-              <a:t>. Aquí se corrige lo que ya existe; no se empieza de cero en clase.</a:t>
-            </a:r>
-          </a:p>
-          <a:p>
-            <a:pPr lvl="1">
-              <a:spcAft>
-                <a:spcPts val="600"/>
-              </a:spcAft>
-            </a:pPr>
-            <a:r>
-              <a:rPr sz="1500" b="0" i="0">
-                <a:solidFill>
-                  <a:srgbClr val="2B2B2B"/>
-                </a:solidFill>
-                <a:latin typeface="Calibri"/>
-              </a:rPr>
-              <a:t>●   Quien llega sin nada escrito pierde la segunda hora: no hay avance que revisar.</a:t>
-            </a:r>
-          </a:p>
-          <a:p>
-            <a:pPr>
-              <a:spcAft>
-                <a:spcPts val="1000"/>
-              </a:spcAft>
-            </a:pPr>
-            <a:r>
-              <a:rPr sz="1600" b="0" i="0">
-                <a:solidFill>
-                  <a:srgbClr val="2B2B2B"/>
-                </a:solidFill>
-                <a:latin typeface="Calibri"/>
-              </a:rPr>
-              <a:t>–   Se trabaja en </a:t>
-            </a:r>
-            <a:r>
-              <a:rPr sz="1600" b="1" i="0">
-                <a:solidFill>
-                  <a:srgbClr val="2B2B2B"/>
-                </a:solidFill>
-                <a:latin typeface="Calibri"/>
-              </a:rPr>
-              <a:t>equipos de máximo 3 personas</a:t>
-            </a:r>
-            <a:r>
-              <a:rPr sz="1600" b="0" i="0">
-                <a:solidFill>
-                  <a:srgbClr val="2B2B2B"/>
-                </a:solidFill>
-                <a:latin typeface="Calibri"/>
-              </a:rPr>
-              <a:t>, los mismos durante todo el curso.</a:t>
-            </a:r>
-          </a:p>
-          <a:p>
-            <a:pPr lvl="1">
-              <a:spcAft>
-                <a:spcPts val="600"/>
-              </a:spcAft>
-            </a:pPr>
-            <a:r>
-              <a:rPr sz="1500" b="0" i="0">
-                <a:solidFill>
-                  <a:srgbClr val="2B2B2B"/>
-                </a:solidFill>
-                <a:latin typeface="Calibri"/>
-              </a:rPr>
-              <a:t>●   Un solo integrante sube la entrega grupal, pero la nota es del equipo, no de quien subió el archivo.</a:t>
-            </a:r>
-          </a:p>
-          <a:p>
-            <a:pPr lvl="1">
-              <a:spcAft>
-                <a:spcPts val="600"/>
-              </a:spcAft>
-            </a:pPr>
-            <a:r>
-              <a:rPr sz="1500" b="0" i="0">
-                <a:solidFill>
-                  <a:srgbClr val="2B2B2B"/>
-                </a:solidFill>
-                <a:latin typeface="Calibri"/>
-              </a:rPr>
-              <a:t>●   ¿Prefieren trabajar solos? Se puede, y la carga es la misma. Decídanlo esta semana, no en octubre.</a:t>
-            </a:r>
-          </a:p>
-        </p:txBody>
-      </p:sp>
-      <p:sp>
-        <p:nvSpPr>
-          <p:cNvPr id="5" name="TextBox 4"/>
-          <p:cNvSpPr txBox="1"/>
-          <p:nvPr/>
-        </p:nvSpPr>
-        <p:spPr>
-          <a:xfrm>
-            <a:off x="11094415" y="6446520"/>
-            <a:ext cx="548640" cy="274320"/>
-          </a:xfrm>
-          <a:prstGeom prst="rect">
-            <a:avLst/>
-          </a:prstGeom>
-          <a:noFill/>
-        </p:spPr>
-        <p:txBody>
-          <a:bodyPr wrap="square" anchor="t" lIns="0" rIns="0" tIns="0" bIns="0">
-            <a:spAutoFit/>
-          </a:bodyPr>
-          <a:lstStyle/>
-          <a:p>
-            <a:pPr algn="r"/>
-            <a:r>
-              <a:rPr sz="1000" b="1" i="0">
-                <a:solidFill>
-                  <a:srgbClr val="8F989D"/>
-                </a:solidFill>
-                <a:latin typeface="Calibri"/>
-              </a:rPr>
-              <a:t>7</a:t>
-            </a:r>
-          </a:p>
-        </p:txBody>
-      </p:sp>
-      <p:sp>
-        <p:nvSpPr>
-          <p:cNvPr id="6" name="TextBox 5"/>
-          <p:cNvSpPr txBox="1"/>
-          <p:nvPr/>
-        </p:nvSpPr>
-        <p:spPr>
-          <a:xfrm>
-            <a:off x="640080" y="5943600"/>
-            <a:ext cx="9997135" cy="457200"/>
-          </a:xfrm>
-          <a:prstGeom prst="rect">
-            <a:avLst/>
-          </a:prstGeom>
-          <a:noFill/>
-        </p:spPr>
-        <p:txBody>
-          <a:bodyPr wrap="square" anchor="t" lIns="0" rIns="0" tIns="0" bIns="0">
-            <a:spAutoFit/>
-          </a:bodyPr>
-          <a:lstStyle/>
-          <a:p>
-            <a:r>
-              <a:rPr sz="1200" b="0" i="1">
-                <a:solidFill>
-                  <a:srgbClr val="2B2B2B"/>
-                </a:solidFill>
-                <a:latin typeface="Calibri"/>
-              </a:rPr>
-              <a:t>Regla de oro: la clase avanza sobre el documento del equipo. Si el documento no crece, el curso no avanza.</a:t>
-            </a:r>
-          </a:p>
-        </p:txBody>
-      </p:sp>
-    </p:spTree>
-  </p:cSld>
-  <p:clrMapOvr>
-    <a:masterClrMapping/>
-  </p:clrMapOvr>
-</p:sld>
-</file>
-
-<file path=ppt/slides/slide8.xml><?xml version="1.0" encoding="utf-8"?>
 <p:sld xmlns:a="http://schemas.openxmlformats.org/drawingml/2006/main" xmlns:p="http://schemas.openxmlformats.org/presentationml/2006/main" xmlns:r="http://schemas.openxmlformats.org/officeDocument/2006/relationships">
   <p:cSld>
     <p:bg>
@@ -13929,7 +12992,7 @@
                 </a:solidFill>
                 <a:latin typeface="Calibri"/>
               </a:rPr>
-              <a:t>8</a:t>
+              <a:t>7</a:t>
             </a:r>
           </a:p>
         </p:txBody>
@@ -13942,7 +13005,7 @@
 </p:sld>
 </file>
 
-<file path=ppt/slides/slide9.xml><?xml version="1.0" encoding="utf-8"?>
+<file path=ppt/slides/slide8.xml><?xml version="1.0" encoding="utf-8"?>
 <p:sld xmlns:a="http://schemas.openxmlformats.org/drawingml/2006/main" xmlns:p="http://schemas.openxmlformats.org/presentationml/2006/main" xmlns:r="http://schemas.openxmlformats.org/officeDocument/2006/relationships">
   <p:cSld>
     <p:bg>
@@ -14477,7 +13540,458 @@
                 </a:solidFill>
                 <a:latin typeface="Calibri"/>
               </a:rPr>
+              <a:t>8</a:t>
+            </a:r>
+          </a:p>
+        </p:txBody>
+      </p:sp>
+    </p:spTree>
+  </p:cSld>
+  <p:clrMapOvr>
+    <a:masterClrMapping/>
+  </p:clrMapOvr>
+</p:sld>
+</file>
+
+<file path=ppt/slides/slide9.xml><?xml version="1.0" encoding="utf-8"?>
+<p:sld xmlns:a="http://schemas.openxmlformats.org/drawingml/2006/main" xmlns:p="http://schemas.openxmlformats.org/presentationml/2006/main" xmlns:r="http://schemas.openxmlformats.org/officeDocument/2006/relationships">
+  <p:cSld>
+    <p:bg>
+      <p:bgPr>
+        <a:solidFill>
+          <a:srgbClr val="FFFFFF"/>
+        </a:solidFill>
+        <a:effectLst/>
+      </p:bgPr>
+    </p:bg>
+    <p:spTree>
+      <p:nvGrpSpPr>
+        <p:cNvPr id="1" name=""/>
+        <p:cNvGrpSpPr/>
+        <p:nvPr/>
+      </p:nvGrpSpPr>
+      <p:grpSpPr/>
+      <p:sp>
+        <p:nvSpPr>
+          <p:cNvPr id="2" name="Rectangle 1"/>
+          <p:cNvSpPr/>
+          <p:nvPr/>
+        </p:nvSpPr>
+        <p:spPr>
+          <a:xfrm>
+            <a:off x="0" y="0"/>
+            <a:ext cx="12191695" cy="1188720"/>
+          </a:xfrm>
+          <a:prstGeom prst="rect">
+            <a:avLst/>
+          </a:prstGeom>
+          <a:solidFill>
+            <a:srgbClr val="0C2340"/>
+          </a:solidFill>
+          <a:ln>
+            <a:noFill/>
+          </a:ln>
+          <a:effectLst/>
+        </p:spPr>
+        <p:style>
+          <a:lnRef idx="1">
+            <a:schemeClr val="accent1"/>
+          </a:lnRef>
+          <a:fillRef idx="3">
+            <a:schemeClr val="accent1"/>
+          </a:fillRef>
+          <a:effectRef idx="2">
+            <a:schemeClr val="accent1"/>
+          </a:effectRef>
+          <a:fontRef idx="minor">
+            <a:schemeClr val="lt1"/>
+          </a:fontRef>
+        </p:style>
+        <p:txBody>
+          <a:bodyPr rtlCol="0" anchor="ctr"/>
+          <a:lstStyle/>
+          <a:p>
+            <a:pPr algn="ctr"/>
+          </a:p>
+        </p:txBody>
+      </p:sp>
+      <p:sp>
+        <p:nvSpPr>
+          <p:cNvPr id="3" name="TextBox 2"/>
+          <p:cNvSpPr txBox="1"/>
+          <p:nvPr/>
+        </p:nvSpPr>
+        <p:spPr>
+          <a:xfrm>
+            <a:off x="640080" y="0"/>
+            <a:ext cx="9082735" cy="1188720"/>
+          </a:xfrm>
+          <a:prstGeom prst="rect">
+            <a:avLst/>
+          </a:prstGeom>
+          <a:noFill/>
+        </p:spPr>
+        <p:txBody>
+          <a:bodyPr wrap="square" anchor="ctr" lIns="0" rIns="0" tIns="0" bIns="0">
+            <a:spAutoFit/>
+          </a:bodyPr>
+          <a:lstStyle/>
+          <a:p>
+            <a:pPr algn="ctr"/>
+            <a:r>
+              <a:rPr sz="2600" b="1" i="0">
+                <a:solidFill>
+                  <a:srgbClr val="FFFFFF"/>
+                </a:solidFill>
+                <a:latin typeface="Calibri"/>
+              </a:rPr>
+              <a:t>El producto del curso: qué archivo entregan al final</a:t>
+            </a:r>
+          </a:p>
+        </p:txBody>
+      </p:sp>
+      <p:sp>
+        <p:nvSpPr>
+          <p:cNvPr id="4" name="TextBox 3"/>
+          <p:cNvSpPr txBox="1"/>
+          <p:nvPr/>
+        </p:nvSpPr>
+        <p:spPr>
+          <a:xfrm>
+            <a:off x="640080" y="1691639"/>
+            <a:ext cx="10911535" cy="4617720"/>
+          </a:xfrm>
+          <a:prstGeom prst="rect">
+            <a:avLst/>
+          </a:prstGeom>
+          <a:noFill/>
+        </p:spPr>
+        <p:txBody>
+          <a:bodyPr wrap="square" anchor="t" lIns="0" rIns="0" tIns="0" bIns="0">
+            <a:spAutoFit/>
+          </a:bodyPr>
+          <a:lstStyle/>
+          <a:p>
+            <a:pPr>
+              <a:spcAft>
+                <a:spcPts val="1000"/>
+              </a:spcAft>
+            </a:pPr>
+            <a:r>
+              <a:rPr sz="1600" b="0" i="0">
+                <a:solidFill>
+                  <a:srgbClr val="2B2B2B"/>
+                </a:solidFill>
+                <a:latin typeface="Calibri"/>
+              </a:rPr>
+              <a:t>–   Al terminar el curso ustedes suben </a:t>
+            </a:r>
+            <a:r>
+              <a:rPr sz="1600" b="1" i="0">
+                <a:solidFill>
+                  <a:srgbClr val="2B2B2B"/>
+                </a:solidFill>
+                <a:latin typeface="Calibri"/>
+              </a:rPr>
+              <a:t>un solo documento: el anteproyecto</a:t>
+            </a:r>
+            <a:r>
+              <a:rPr sz="1600" b="0" i="0">
+                <a:solidFill>
+                  <a:srgbClr val="2B2B2B"/>
+                </a:solidFill>
+                <a:latin typeface="Calibri"/>
+              </a:rPr>
+              <a:t> de su investigación.</a:t>
+            </a:r>
+          </a:p>
+          <a:p>
+            <a:pPr lvl="1">
+              <a:spcAft>
+                <a:spcPts val="600"/>
+              </a:spcAft>
+            </a:pPr>
+            <a:r>
+              <a:rPr sz="1500" b="0" i="0">
+                <a:solidFill>
+                  <a:srgbClr val="2B2B2B"/>
+                </a:solidFill>
+                <a:latin typeface="Calibri"/>
+              </a:rPr>
+              <a:t>●   No son trabajos sueltos: es </a:t>
+            </a:r>
+            <a:r>
+              <a:rPr sz="1500" b="1" i="0">
+                <a:solidFill>
+                  <a:srgbClr val="2B2B2B"/>
+                </a:solidFill>
+                <a:latin typeface="Calibri"/>
+              </a:rPr>
+              <a:t>un mismo archivo que crece</a:t>
+            </a:r>
+            <a:r>
+              <a:rPr sz="1500" b="0" i="0">
+                <a:solidFill>
+                  <a:srgbClr val="2B2B2B"/>
+                </a:solidFill>
+                <a:latin typeface="Calibri"/>
+              </a:rPr>
+              <a:t> corte tras corte.</a:t>
+            </a:r>
+          </a:p>
+          <a:p>
+            <a:pPr lvl="1">
+              <a:spcAft>
+                <a:spcPts val="600"/>
+              </a:spcAft>
+            </a:pPr>
+            <a:r>
+              <a:rPr sz="1500" b="0" i="0">
+                <a:solidFill>
+                  <a:srgbClr val="2B2B2B"/>
+                </a:solidFill>
+                <a:latin typeface="Calibri"/>
+              </a:rPr>
+              <a:t>●   La </a:t>
+            </a:r>
+            <a:r>
+              <a:rPr sz="1500" b="1" i="0">
+                <a:solidFill>
+                  <a:srgbClr val="2B2B2B"/>
+                </a:solidFill>
+                <a:latin typeface="Calibri"/>
+              </a:rPr>
+              <a:t>ACA FINAL</a:t>
+            </a:r>
+            <a:r>
+              <a:rPr sz="1500" b="0" i="0">
+                <a:solidFill>
+                  <a:srgbClr val="2B2B2B"/>
+                </a:solidFill>
+                <a:latin typeface="Calibri"/>
+              </a:rPr>
+              <a:t> del aula es ese archivo completo e integrado, no un fragmento nuevo escrito la última semana.</a:t>
+            </a:r>
+          </a:p>
+          <a:p>
+            <a:pPr>
+              <a:spcAft>
+                <a:spcPts val="1000"/>
+              </a:spcAft>
+            </a:pPr>
+            <a:r>
+              <a:rPr sz="1600" b="0" i="0">
+                <a:solidFill>
+                  <a:srgbClr val="2B2B2B"/>
+                </a:solidFill>
+                <a:latin typeface="Calibri"/>
+              </a:rPr>
+              <a:t>–   Va en la </a:t>
+            </a:r>
+            <a:r>
+              <a:rPr sz="1600" b="1" i="0">
+                <a:solidFill>
+                  <a:srgbClr val="2B2B2B"/>
+                </a:solidFill>
+                <a:latin typeface="Calibri"/>
+              </a:rPr>
+              <a:t>plantilla APA CUN de proyecto de grado</a:t>
+            </a:r>
+            <a:r>
+              <a:rPr sz="1600" b="0" i="0">
+                <a:solidFill>
+                  <a:srgbClr val="2B2B2B"/>
+                </a:solidFill>
+                <a:latin typeface="Calibri"/>
+              </a:rPr>
+              <a:t>, la misma desde el primer día.</a:t>
+            </a:r>
+          </a:p>
+          <a:p>
+            <a:pPr lvl="1">
+              <a:spcAft>
+                <a:spcPts val="600"/>
+              </a:spcAft>
+            </a:pPr>
+            <a:r>
+              <a:rPr sz="1500" b="0" i="0">
+                <a:solidFill>
+                  <a:srgbClr val="2B2B2B"/>
+                </a:solidFill>
+                <a:latin typeface="Calibri"/>
+              </a:rPr>
+              <a:t>●   Está en `Clases/Recursos/Plantilla_APA_CUN_Proyecto de grado.docx`; ábranla en Google Docs y trabajen ahí.</a:t>
+            </a:r>
+          </a:p>
+          <a:p>
+            <a:pPr>
+              <a:spcAft>
+                <a:spcPts val="1000"/>
+              </a:spcAft>
+            </a:pPr>
+            <a:r>
+              <a:rPr sz="1600" b="0" i="0">
+                <a:solidFill>
+                  <a:srgbClr val="2B2B2B"/>
+                </a:solidFill>
+                <a:latin typeface="Calibri"/>
+              </a:rPr>
+              <a:t>–   </a:t>
+            </a:r>
+            <a:r>
+              <a:rPr sz="1600" b="1" i="0">
+                <a:solidFill>
+                  <a:srgbClr val="2B2B2B"/>
+                </a:solidFill>
+                <a:latin typeface="Calibri"/>
+              </a:rPr>
+              <a:t>¿Para qué les sirve después?</a:t>
+            </a:r>
+            <a:r>
+              <a:rPr sz="1600" b="0" i="0">
+                <a:solidFill>
+                  <a:srgbClr val="2B2B2B"/>
+                </a:solidFill>
+                <a:latin typeface="Calibri"/>
+              </a:rPr>
+              <a:t> Es el punto de partida de </a:t>
+            </a:r>
+            <a:r>
+              <a:rPr sz="1600" b="1" i="0">
+                <a:solidFill>
+                  <a:srgbClr val="2B2B2B"/>
+                </a:solidFill>
+                <a:latin typeface="Calibri"/>
+              </a:rPr>
+              <a:t>Proyecto II</a:t>
+            </a:r>
+            <a:r>
+              <a:rPr sz="1600" b="0" i="0">
+                <a:solidFill>
+                  <a:srgbClr val="2B2B2B"/>
+                </a:solidFill>
+                <a:latin typeface="Calibri"/>
+              </a:rPr>
+              <a:t>, donde el proyecto se ejecuta.</a:t>
+            </a:r>
+          </a:p>
+          <a:p>
+            <a:pPr lvl="1">
+              <a:spcAft>
+                <a:spcPts val="600"/>
+              </a:spcAft>
+            </a:pPr>
+            <a:r>
+              <a:rPr sz="1500" b="0" i="0">
+                <a:solidFill>
+                  <a:srgbClr val="2B2B2B"/>
+                </a:solidFill>
+                <a:latin typeface="Calibri"/>
+              </a:rPr>
+              <a:t>●   Y es la base de lo que sustentarán al cerrar el programa: no es un trabajo que se archiva y se olvida.</a:t>
+            </a:r>
+          </a:p>
+          <a:p>
+            <a:pPr>
+              <a:spcAft>
+                <a:spcPts val="1000"/>
+              </a:spcAft>
+            </a:pPr>
+            <a:r>
+              <a:rPr sz="1600" b="0" i="0">
+                <a:solidFill>
+                  <a:srgbClr val="2B2B2B"/>
+                </a:solidFill>
+                <a:latin typeface="Calibri"/>
+              </a:rPr>
+              <a:t>–   Frontera del curso, sin excepciones: en </a:t>
+            </a:r>
+            <a:r>
+              <a:rPr sz="1600" b="1" i="0">
+                <a:solidFill>
+                  <a:srgbClr val="2B2B2B"/>
+                </a:solidFill>
+                <a:latin typeface="Calibri"/>
+              </a:rPr>
+              <a:t>Proyecto I los instrumentos se proponen; nunca se aplican</a:t>
+            </a:r>
+            <a:r>
+              <a:rPr sz="1600" b="0" i="0">
+                <a:solidFill>
+                  <a:srgbClr val="2B2B2B"/>
+                </a:solidFill>
+                <a:latin typeface="Calibri"/>
+              </a:rPr>
+              <a:t>.</a:t>
+            </a:r>
+          </a:p>
+        </p:txBody>
+      </p:sp>
+      <p:sp>
+        <p:nvSpPr>
+          <p:cNvPr id="5" name="TextBox 4"/>
+          <p:cNvSpPr txBox="1"/>
+          <p:nvPr/>
+        </p:nvSpPr>
+        <p:spPr>
+          <a:xfrm>
+            <a:off x="11094415" y="6446520"/>
+            <a:ext cx="548640" cy="274320"/>
+          </a:xfrm>
+          <a:prstGeom prst="rect">
+            <a:avLst/>
+          </a:prstGeom>
+          <a:noFill/>
+        </p:spPr>
+        <p:txBody>
+          <a:bodyPr wrap="square" anchor="t" lIns="0" rIns="0" tIns="0" bIns="0">
+            <a:spAutoFit/>
+          </a:bodyPr>
+          <a:lstStyle/>
+          <a:p>
+            <a:pPr algn="r"/>
+            <a:r>
+              <a:rPr sz="1000" b="1" i="0">
+                <a:solidFill>
+                  <a:srgbClr val="8F989D"/>
+                </a:solidFill>
+                <a:latin typeface="Calibri"/>
+              </a:rPr>
               <a:t>9</a:t>
+            </a:r>
+          </a:p>
+        </p:txBody>
+      </p:sp>
+      <p:sp>
+        <p:nvSpPr>
+          <p:cNvPr id="6" name="TextBox 5"/>
+          <p:cNvSpPr txBox="1"/>
+          <p:nvPr/>
+        </p:nvSpPr>
+        <p:spPr>
+          <a:xfrm>
+            <a:off x="640080" y="5943600"/>
+            <a:ext cx="9997135" cy="457200"/>
+          </a:xfrm>
+          <a:prstGeom prst="rect">
+            <a:avLst/>
+          </a:prstGeom>
+          <a:noFill/>
+        </p:spPr>
+        <p:txBody>
+          <a:bodyPr wrap="square" anchor="t" lIns="0" rIns="0" tIns="0" bIns="0">
+            <a:spAutoFit/>
+          </a:bodyPr>
+          <a:lstStyle/>
+          <a:p>
+            <a:r>
+              <a:rPr sz="1200" b="0" i="1">
+                <a:solidFill>
+                  <a:srgbClr val="2B2B2B"/>
+                </a:solidFill>
+                <a:latin typeface="Calibri"/>
+              </a:rPr>
+              <a:t>Piénsenlo así: todo el semestre queda en un archivo. Cuídenlo, guarden versiones y compártanlo con todo el equipo desde hoy.</a:t>
             </a:r>
           </a:p>
         </p:txBody>
